--- a/slides/datasets-in-10-minutes-coco.pptx
+++ b/slides/datasets-in-10-minutes-coco.pptx
@@ -33,6 +33,7 @@
     <p:sldId id="281" r:id="rId31"/>
     <p:sldId id="282" r:id="rId32"/>
     <p:sldId id="283" r:id="rId33"/>
+    <p:sldId id="316" r:id="rId66"/>
     <p:sldId id="284" r:id="rId34"/>
     <p:sldId id="285" r:id="rId35"/>
     <p:sldId id="286" r:id="rId36"/>
@@ -62,9 +63,6 @@
     <p:sldId id="310" r:id="rId60"/>
     <p:sldId id="311" r:id="rId61"/>
     <p:sldId id="312" r:id="rId62"/>
-    <p:sldId id="313" r:id="rId63"/>
-    <p:sldId id="314" r:id="rId64"/>
-    <p:sldId id="315" r:id="rId65"/>
   </p:sldIdLst>
   <p:sldSz cx="9144000" cy="5143500" type="screen16x9"/>
   <p:notesSz cx="6858000" cy="9144000"/>
@@ -7678,9 +7676,20 @@
                 <a:latin typeface="Noto Sans"/>
                 <a:ea typeface="Noto Sans CJK JP"/>
                 <a:cs typeface="Noto Sans"/>
+              </a:rPr>
+              <a:t>[1] </a:t>
+            </a:r>
+            <a:r>
+              <a:rPr lang="ja-JP" sz="800" b="0">
+                <a:solidFill>
+                  <a:srgbClr val="626669"/>
+                </a:solidFill>
+                <a:latin typeface="Noto Sans"/>
+                <a:ea typeface="Noto Sans CJK JP"/>
+                <a:cs typeface="Noto Sans"/>
                 <a:hlinkClick r:id="rId2"/>
               </a:rPr>
-              <a:t>[1] https://arxiv.org/abs/1405.0312</a:t>
+              <a:t>https://arxiv.org/abs/1405.0312</a:t>
             </a:r>
           </a:p>
           <a:p>
@@ -7712,9 +7721,20 @@
                 <a:latin typeface="Noto Sans"/>
                 <a:ea typeface="Noto Sans CJK JP"/>
                 <a:cs typeface="Noto Sans"/>
+              </a:rPr>
+              <a:t>[2] </a:t>
+            </a:r>
+            <a:r>
+              <a:rPr lang="ja-JP" sz="800" b="0">
+                <a:solidFill>
+                  <a:srgbClr val="626669"/>
+                </a:solidFill>
+                <a:latin typeface="Noto Sans"/>
+                <a:ea typeface="Noto Sans CJK JP"/>
+                <a:cs typeface="Noto Sans"/>
                 <a:hlinkClick r:id="rId3"/>
               </a:rPr>
-              <a:t>[2] https://cocodataset.org/#format-data</a:t>
+              <a:t>https://cocodataset.org/#format-data</a:t>
             </a:r>
           </a:p>
         </p:txBody>
@@ -8021,9 +8041,20 @@
                 <a:latin typeface="Noto Sans"/>
                 <a:ea typeface="Noto Sans CJK JP"/>
                 <a:cs typeface="Noto Sans"/>
+              </a:rPr>
+              <a:t>[1] </a:t>
+            </a:r>
+            <a:r>
+              <a:rPr lang="ja-JP" sz="800" b="0">
+                <a:solidFill>
+                  <a:srgbClr val="626669"/>
+                </a:solidFill>
+                <a:latin typeface="Noto Sans"/>
+                <a:ea typeface="Noto Sans CJK JP"/>
+                <a:cs typeface="Noto Sans"/>
                 <a:hlinkClick r:id="rId2"/>
               </a:rPr>
-              <a:t>[1] https://cocodataset.org/#format-data</a:t>
+              <a:t>https://cocodataset.org/#format-data</a:t>
             </a:r>
           </a:p>
         </p:txBody>
@@ -8163,21 +8194,19 @@
           <p:nvPr/>
         </p:nvGraphicFramePr>
         <p:xfrm>
-          <a:off x="594360" y="1417320"/>
-          <a:ext cx="7955280" cy="1901952"/>
+          <a:off x="548640" y="1417320"/>
+          <a:ext cx="8046720" cy="2084831"/>
         </p:xfrm>
         <a:graphic>
           <a:graphicData uri="http://schemas.openxmlformats.org/drawingml/2006/table">
             <a:tbl>
-              <a:tblPr firstRow="1" bandRow="1">
-                <a:tableStyleId>{5C22544A-7EE6-4342-B048-85BDC9FD1C3A}</a:tableStyleId>
-              </a:tblPr>
+              <a:tblPr firstRow="0" bandRow="0" lastRow="0" firstCol="0" lastCol="0" bandCol="0"/>
               <a:tblGrid>
                 <a:gridCol w="2103120"/>
                 <a:gridCol w="2743200"/>
-                <a:gridCol w="3108960"/>
+                <a:gridCol w="3200400"/>
               </a:tblGrid>
-              <a:tr h="475488">
+              <a:tr h="521207">
                 <a:tc>
                   <a:txBody>
                     <a:bodyPr/>
@@ -8185,7 +8214,7 @@
                     <a:p>
                       <a:pPr algn="l">
                         <a:lnSpc>
-                          <a:spcPct val="115000"/>
+                          <a:spcPct val="110000"/>
                         </a:lnSpc>
                         <a:spcBef>
                           <a:spcPts val="0"/>
@@ -8194,9 +8223,9 @@
                           <a:spcPts val="0"/>
                         </a:spcAft>
                         <a:buNone/>
-                        <a:defRPr lang="ja-JP" sz="2200" b="1">
+                        <a:defRPr lang="ja-JP" sz="2200" b="0">
                           <a:solidFill>
-                            <a:srgbClr val="FFFEF8"/>
+                            <a:srgbClr val="303437"/>
                           </a:solidFill>
                           <a:latin typeface="Noto Sans"/>
                           <a:ea typeface="Noto Sans CJK JP"/>
@@ -8204,9 +8233,9 @@
                         </a:defRPr>
                       </a:pPr>
                       <a:r>
-                        <a:rPr lang="ja-JP" sz="2200" b="1">
+                        <a:rPr lang="ja-JP" sz="2200" b="0">
                           <a:solidFill>
-                            <a:srgbClr val="FFFEF8"/>
+                            <a:srgbClr val="303437"/>
                           </a:solidFill>
                           <a:latin typeface="Noto Sans"/>
                           <a:ea typeface="Noto Sans CJK JP"/>
@@ -8216,9 +8245,25 @@
                       </a:r>
                     </a:p>
                   </a:txBody>
-                  <a:tcPr marL="88900" marR="88900" marT="76200" marB="76200" anchor="ctr">
+                  <a:tcPr marL="76200" marR="76200" marT="38100" marB="38100" anchor="ctr">
+                    <a:lnL w="0">
+                      <a:noFill/>
+                    </a:lnL>
+                    <a:lnR w="0">
+                      <a:noFill/>
+                    </a:lnR>
+                    <a:lnT w="10160">
+                      <a:solidFill>
+                        <a:srgbClr val="626669"/>
+                      </a:solidFill>
+                    </a:lnT>
+                    <a:lnB w="10160">
+                      <a:solidFill>
+                        <a:srgbClr val="626669"/>
+                      </a:solidFill>
+                    </a:lnB>
                     <a:solidFill>
-                      <a:srgbClr val="2C9100"/>
+                      <a:srgbClr val="FFFEF8"/>
                     </a:solidFill>
                   </a:tcPr>
                 </a:tc>
@@ -8229,7 +8274,7 @@
                     <a:p>
                       <a:pPr algn="r">
                         <a:lnSpc>
-                          <a:spcPct val="115000"/>
+                          <a:spcPct val="110000"/>
                         </a:lnSpc>
                         <a:spcBef>
                           <a:spcPts val="0"/>
@@ -8238,9 +8283,9 @@
                           <a:spcPts val="0"/>
                         </a:spcAft>
                         <a:buNone/>
-                        <a:defRPr lang="ja-JP" sz="2200" b="1">
+                        <a:defRPr lang="ja-JP" sz="2200" b="0">
                           <a:solidFill>
-                            <a:srgbClr val="FFFEF8"/>
+                            <a:srgbClr val="303437"/>
                           </a:solidFill>
                           <a:latin typeface="Noto Sans"/>
                           <a:ea typeface="Noto Sans CJK JP"/>
@@ -8248,9 +8293,9 @@
                         </a:defRPr>
                       </a:pPr>
                       <a:r>
-                        <a:rPr lang="ja-JP" sz="2200" b="1">
+                        <a:rPr lang="ja-JP" sz="2200" b="0">
                           <a:solidFill>
-                            <a:srgbClr val="FFFEF8"/>
+                            <a:srgbClr val="303437"/>
                           </a:solidFill>
                           <a:latin typeface="Noto Sans"/>
                           <a:ea typeface="Noto Sans CJK JP"/>
@@ -8260,9 +8305,25 @@
                       </a:r>
                     </a:p>
                   </a:txBody>
-                  <a:tcPr marL="88900" marR="88900" marT="76200" marB="76200" anchor="ctr">
+                  <a:tcPr marL="76200" marR="76200" marT="38100" marB="38100" anchor="ctr">
+                    <a:lnL w="0">
+                      <a:noFill/>
+                    </a:lnL>
+                    <a:lnR w="0">
+                      <a:noFill/>
+                    </a:lnR>
+                    <a:lnT w="10160">
+                      <a:solidFill>
+                        <a:srgbClr val="626669"/>
+                      </a:solidFill>
+                    </a:lnT>
+                    <a:lnB w="10160">
+                      <a:solidFill>
+                        <a:srgbClr val="626669"/>
+                      </a:solidFill>
+                    </a:lnB>
                     <a:solidFill>
-                      <a:srgbClr val="2C9100"/>
+                      <a:srgbClr val="FFFEF8"/>
                     </a:solidFill>
                   </a:tcPr>
                 </a:tc>
@@ -8271,9 +8332,9 @@
                     <a:bodyPr/>
                     <a:lstStyle/>
                     <a:p>
-                      <a:pPr algn="r">
+                      <a:pPr algn="l">
                         <a:lnSpc>
-                          <a:spcPct val="115000"/>
+                          <a:spcPct val="110000"/>
                         </a:lnSpc>
                         <a:spcBef>
                           <a:spcPts val="0"/>
@@ -8282,9 +8343,9 @@
                           <a:spcPts val="0"/>
                         </a:spcAft>
                         <a:buNone/>
-                        <a:defRPr lang="ja-JP" sz="2200" b="1">
+                        <a:defRPr lang="ja-JP" sz="2200" b="0">
                           <a:solidFill>
-                            <a:srgbClr val="FFFEF8"/>
+                            <a:srgbClr val="303437"/>
                           </a:solidFill>
                           <a:latin typeface="Noto Sans"/>
                           <a:ea typeface="Noto Sans CJK JP"/>
@@ -8292,9 +8353,9 @@
                         </a:defRPr>
                       </a:pPr>
                       <a:r>
-                        <a:rPr lang="ja-JP" sz="2200" b="1">
+                        <a:rPr lang="ja-JP" sz="2200" b="0">
                           <a:solidFill>
-                            <a:srgbClr val="FFFEF8"/>
+                            <a:srgbClr val="303437"/>
                           </a:solidFill>
                           <a:latin typeface="Noto Sans"/>
                           <a:ea typeface="Noto Sans CJK JP"/>
@@ -8304,14 +8365,30 @@
                       </a:r>
                     </a:p>
                   </a:txBody>
-                  <a:tcPr marL="88900" marR="88900" marT="76200" marB="76200" anchor="ctr">
+                  <a:tcPr marL="203200" marR="76200" marT="38100" marB="38100" anchor="ctr">
+                    <a:lnL w="0">
+                      <a:noFill/>
+                    </a:lnL>
+                    <a:lnR w="0">
+                      <a:noFill/>
+                    </a:lnR>
+                    <a:lnT w="10160">
+                      <a:solidFill>
+                        <a:srgbClr val="626669"/>
+                      </a:solidFill>
+                    </a:lnT>
+                    <a:lnB w="10160">
+                      <a:solidFill>
+                        <a:srgbClr val="626669"/>
+                      </a:solidFill>
+                    </a:lnB>
                     <a:solidFill>
-                      <a:srgbClr val="2C9100"/>
+                      <a:srgbClr val="FFFEF8"/>
                     </a:solidFill>
                   </a:tcPr>
                 </a:tc>
               </a:tr>
-              <a:tr h="475488">
+              <a:tr h="521207">
                 <a:tc>
                   <a:txBody>
                     <a:bodyPr/>
@@ -8319,7 +8396,7 @@
                     <a:p>
                       <a:pPr algn="l">
                         <a:lnSpc>
-                          <a:spcPct val="115000"/>
+                          <a:spcPct val="110000"/>
                         </a:lnSpc>
                         <a:spcBef>
                           <a:spcPts val="0"/>
@@ -8350,7 +8427,19 @@
                       </a:r>
                     </a:p>
                   </a:txBody>
-                  <a:tcPr marL="88900" marR="88900" marT="76200" marB="76200" anchor="ctr">
+                  <a:tcPr marL="76200" marR="76200" marT="38100" marB="38100" anchor="ctr">
+                    <a:lnL w="0">
+                      <a:noFill/>
+                    </a:lnL>
+                    <a:lnR w="0">
+                      <a:noFill/>
+                    </a:lnR>
+                    <a:lnT w="0">
+                      <a:noFill/>
+                    </a:lnT>
+                    <a:lnB w="0">
+                      <a:noFill/>
+                    </a:lnB>
                     <a:solidFill>
                       <a:srgbClr val="FFFEF8"/>
                     </a:solidFill>
@@ -8363,7 +8452,7 @@
                     <a:p>
                       <a:pPr algn="r">
                         <a:lnSpc>
-                          <a:spcPct val="115000"/>
+                          <a:spcPct val="110000"/>
                         </a:lnSpc>
                         <a:spcBef>
                           <a:spcPts val="0"/>
@@ -8394,7 +8483,19 @@
                       </a:r>
                     </a:p>
                   </a:txBody>
-                  <a:tcPr marL="88900" marR="88900" marT="76200" marB="76200" anchor="ctr">
+                  <a:tcPr marL="76200" marR="76200" marT="38100" marB="38100" anchor="ctr">
+                    <a:lnL w="0">
+                      <a:noFill/>
+                    </a:lnL>
+                    <a:lnR w="0">
+                      <a:noFill/>
+                    </a:lnR>
+                    <a:lnT w="0">
+                      <a:noFill/>
+                    </a:lnT>
+                    <a:lnB w="0">
+                      <a:noFill/>
+                    </a:lnB>
                     <a:solidFill>
                       <a:srgbClr val="FFFEF8"/>
                     </a:solidFill>
@@ -8405,9 +8506,9 @@
                     <a:bodyPr/>
                     <a:lstStyle/>
                     <a:p>
-                      <a:pPr algn="r">
+                      <a:pPr algn="l">
                         <a:lnSpc>
-                          <a:spcPct val="115000"/>
+                          <a:spcPct val="110000"/>
                         </a:lnSpc>
                         <a:spcBef>
                           <a:spcPts val="0"/>
@@ -8438,14 +8539,26 @@
                       </a:r>
                     </a:p>
                   </a:txBody>
-                  <a:tcPr marL="88900" marR="88900" marT="76200" marB="76200" anchor="ctr">
+                  <a:tcPr marL="203200" marR="76200" marT="38100" marB="38100" anchor="ctr">
+                    <a:lnL w="0">
+                      <a:noFill/>
+                    </a:lnL>
+                    <a:lnR w="0">
+                      <a:noFill/>
+                    </a:lnR>
+                    <a:lnT w="0">
+                      <a:noFill/>
+                    </a:lnT>
+                    <a:lnB w="0">
+                      <a:noFill/>
+                    </a:lnB>
                     <a:solidFill>
                       <a:srgbClr val="FFFEF8"/>
                     </a:solidFill>
                   </a:tcPr>
                 </a:tc>
               </a:tr>
-              <a:tr h="475488">
+              <a:tr h="521207">
                 <a:tc>
                   <a:txBody>
                     <a:bodyPr/>
@@ -8453,7 +8566,7 @@
                     <a:p>
                       <a:pPr algn="l">
                         <a:lnSpc>
-                          <a:spcPct val="115000"/>
+                          <a:spcPct val="110000"/>
                         </a:lnSpc>
                         <a:spcBef>
                           <a:spcPts val="0"/>
@@ -8484,7 +8597,19 @@
                       </a:r>
                     </a:p>
                   </a:txBody>
-                  <a:tcPr marL="88900" marR="88900" marT="76200" marB="76200" anchor="ctr">
+                  <a:tcPr marL="76200" marR="76200" marT="38100" marB="38100" anchor="ctr">
+                    <a:lnL w="0">
+                      <a:noFill/>
+                    </a:lnL>
+                    <a:lnR w="0">
+                      <a:noFill/>
+                    </a:lnR>
+                    <a:lnT w="0">
+                      <a:noFill/>
+                    </a:lnT>
+                    <a:lnB w="0">
+                      <a:noFill/>
+                    </a:lnB>
                     <a:solidFill>
                       <a:srgbClr val="FFFEF8"/>
                     </a:solidFill>
@@ -8497,7 +8622,7 @@
                     <a:p>
                       <a:pPr algn="r">
                         <a:lnSpc>
-                          <a:spcPct val="115000"/>
+                          <a:spcPct val="110000"/>
                         </a:lnSpc>
                         <a:spcBef>
                           <a:spcPts val="0"/>
@@ -8528,7 +8653,19 @@
                       </a:r>
                     </a:p>
                   </a:txBody>
-                  <a:tcPr marL="88900" marR="88900" marT="76200" marB="76200" anchor="ctr">
+                  <a:tcPr marL="76200" marR="76200" marT="38100" marB="38100" anchor="ctr">
+                    <a:lnL w="0">
+                      <a:noFill/>
+                    </a:lnL>
+                    <a:lnR w="0">
+                      <a:noFill/>
+                    </a:lnR>
+                    <a:lnT w="0">
+                      <a:noFill/>
+                    </a:lnT>
+                    <a:lnB w="0">
+                      <a:noFill/>
+                    </a:lnB>
                     <a:solidFill>
                       <a:srgbClr val="FFFEF8"/>
                     </a:solidFill>
@@ -8539,9 +8676,9 @@
                     <a:bodyPr/>
                     <a:lstStyle/>
                     <a:p>
-                      <a:pPr algn="r">
+                      <a:pPr algn="l">
                         <a:lnSpc>
-                          <a:spcPct val="115000"/>
+                          <a:spcPct val="110000"/>
                         </a:lnSpc>
                         <a:spcBef>
                           <a:spcPts val="0"/>
@@ -8572,14 +8709,26 @@
                       </a:r>
                     </a:p>
                   </a:txBody>
-                  <a:tcPr marL="88900" marR="88900" marT="76200" marB="76200" anchor="ctr">
+                  <a:tcPr marL="203200" marR="76200" marT="38100" marB="38100" anchor="ctr">
+                    <a:lnL w="0">
+                      <a:noFill/>
+                    </a:lnL>
+                    <a:lnR w="0">
+                      <a:noFill/>
+                    </a:lnR>
+                    <a:lnT w="0">
+                      <a:noFill/>
+                    </a:lnT>
+                    <a:lnB w="0">
+                      <a:noFill/>
+                    </a:lnB>
                     <a:solidFill>
                       <a:srgbClr val="FFFEF8"/>
                     </a:solidFill>
                   </a:tcPr>
                 </a:tc>
               </a:tr>
-              <a:tr h="475488">
+              <a:tr h="521207">
                 <a:tc>
                   <a:txBody>
                     <a:bodyPr/>
@@ -8587,7 +8736,7 @@
                     <a:p>
                       <a:pPr algn="l">
                         <a:lnSpc>
-                          <a:spcPct val="115000"/>
+                          <a:spcPct val="110000"/>
                         </a:lnSpc>
                         <a:spcBef>
                           <a:spcPts val="0"/>
@@ -8618,7 +8767,21 @@
                       </a:r>
                     </a:p>
                   </a:txBody>
-                  <a:tcPr marL="88900" marR="88900" marT="76200" marB="76200" anchor="ctr">
+                  <a:tcPr marL="76200" marR="76200" marT="38100" marB="38100" anchor="ctr">
+                    <a:lnL w="0">
+                      <a:noFill/>
+                    </a:lnL>
+                    <a:lnR w="0">
+                      <a:noFill/>
+                    </a:lnR>
+                    <a:lnT w="0">
+                      <a:noFill/>
+                    </a:lnT>
+                    <a:lnB w="10160">
+                      <a:solidFill>
+                        <a:srgbClr val="626669"/>
+                      </a:solidFill>
+                    </a:lnB>
                     <a:solidFill>
                       <a:srgbClr val="FFFEF8"/>
                     </a:solidFill>
@@ -8631,7 +8794,7 @@
                     <a:p>
                       <a:pPr algn="r">
                         <a:lnSpc>
-                          <a:spcPct val="115000"/>
+                          <a:spcPct val="110000"/>
                         </a:lnSpc>
                         <a:spcBef>
                           <a:spcPts val="0"/>
@@ -8662,7 +8825,21 @@
                       </a:r>
                     </a:p>
                   </a:txBody>
-                  <a:tcPr marL="88900" marR="88900" marT="76200" marB="76200" anchor="ctr">
+                  <a:tcPr marL="76200" marR="76200" marT="38100" marB="38100" anchor="ctr">
+                    <a:lnL w="0">
+                      <a:noFill/>
+                    </a:lnL>
+                    <a:lnR w="0">
+                      <a:noFill/>
+                    </a:lnR>
+                    <a:lnT w="0">
+                      <a:noFill/>
+                    </a:lnT>
+                    <a:lnB w="10160">
+                      <a:solidFill>
+                        <a:srgbClr val="626669"/>
+                      </a:solidFill>
+                    </a:lnB>
                     <a:solidFill>
                       <a:srgbClr val="FFFEF8"/>
                     </a:solidFill>
@@ -8673,9 +8850,9 @@
                     <a:bodyPr/>
                     <a:lstStyle/>
                     <a:p>
-                      <a:pPr algn="r">
+                      <a:pPr algn="l">
                         <a:lnSpc>
-                          <a:spcPct val="115000"/>
+                          <a:spcPct val="110000"/>
                         </a:lnSpc>
                         <a:spcBef>
                           <a:spcPts val="0"/>
@@ -8706,7 +8883,21 @@
                       </a:r>
                     </a:p>
                   </a:txBody>
-                  <a:tcPr marL="88900" marR="88900" marT="76200" marB="76200" anchor="ctr">
+                  <a:tcPr marL="203200" marR="76200" marT="38100" marB="38100" anchor="ctr">
+                    <a:lnL w="0">
+                      <a:noFill/>
+                    </a:lnL>
+                    <a:lnR w="0">
+                      <a:noFill/>
+                    </a:lnR>
+                    <a:lnT w="0">
+                      <a:noFill/>
+                    </a:lnT>
+                    <a:lnB w="10160">
+                      <a:solidFill>
+                        <a:srgbClr val="626669"/>
+                      </a:solidFill>
+                    </a:lnB>
                     <a:solidFill>
                       <a:srgbClr val="FFFEF8"/>
                     </a:solidFill>
@@ -8725,8 +8916,8 @@
         </p:nvSpPr>
         <p:spPr>
           <a:xfrm>
-            <a:off x="658368" y="3456432"/>
-            <a:ext cx="7772400" cy="914400"/>
+            <a:off x="594360" y="3705351"/>
+            <a:ext cx="7955279" cy="713232"/>
           </a:xfrm>
           <a:prstGeom prst="rect">
             <a:avLst/>
@@ -8823,9 +9014,20 @@
                 <a:latin typeface="Noto Sans"/>
                 <a:ea typeface="Noto Sans CJK JP"/>
                 <a:cs typeface="Noto Sans"/>
+              </a:rPr>
+              <a:t>[1] </a:t>
+            </a:r>
+            <a:r>
+              <a:rPr lang="ja-JP" sz="800" b="0">
+                <a:solidFill>
+                  <a:srgbClr val="626669"/>
+                </a:solidFill>
+                <a:latin typeface="Noto Sans"/>
+                <a:ea typeface="Noto Sans CJK JP"/>
+                <a:cs typeface="Noto Sans"/>
                 <a:hlinkClick r:id="rId2"/>
               </a:rPr>
-              <a:t>[1] https://cocodataset.org/#download</a:t>
+              <a:t>https://cocodataset.org/#download</a:t>
             </a:r>
           </a:p>
         </p:txBody>
@@ -9133,7 +9335,42 @@
                 <a:ea typeface="Noto Sans CJK JP"/>
                 <a:cs typeface="Noto Sans"/>
               </a:rPr>
-              <a:t>[1] https://cocodataset.org/ / https://cocodataset.org/#download</a:t>
+              <a:t>[1] </a:t>
+            </a:r>
+            <a:r>
+              <a:rPr lang="ja-JP" sz="800" b="0">
+                <a:solidFill>
+                  <a:srgbClr val="626669"/>
+                </a:solidFill>
+                <a:latin typeface="Noto Sans"/>
+                <a:ea typeface="Noto Sans CJK JP"/>
+                <a:cs typeface="Noto Sans"/>
+                <a:hlinkClick r:id="rId2"/>
+              </a:rPr>
+              <a:t>https://cocodataset.org/</a:t>
+            </a:r>
+            <a:r>
+              <a:rPr lang="ja-JP" sz="800" b="0">
+                <a:solidFill>
+                  <a:srgbClr val="626669"/>
+                </a:solidFill>
+                <a:latin typeface="Noto Sans"/>
+                <a:ea typeface="Noto Sans CJK JP"/>
+                <a:cs typeface="Noto Sans"/>
+              </a:rPr>
+              <a:t> / </a:t>
+            </a:r>
+            <a:r>
+              <a:rPr lang="ja-JP" sz="800" b="0">
+                <a:solidFill>
+                  <a:srgbClr val="626669"/>
+                </a:solidFill>
+                <a:latin typeface="Noto Sans"/>
+                <a:ea typeface="Noto Sans CJK JP"/>
+                <a:cs typeface="Noto Sans"/>
+                <a:hlinkClick r:id="rId3"/>
+              </a:rPr>
+              <a:t>https://cocodataset.org/#download</a:t>
             </a:r>
           </a:p>
         </p:txBody>
@@ -9440,9 +9677,20 @@
                 <a:latin typeface="Noto Sans"/>
                 <a:ea typeface="Noto Sans CJK JP"/>
                 <a:cs typeface="Noto Sans"/>
+              </a:rPr>
+              <a:t>[1] </a:t>
+            </a:r>
+            <a:r>
+              <a:rPr lang="ja-JP" sz="800" b="0">
+                <a:solidFill>
+                  <a:srgbClr val="626669"/>
+                </a:solidFill>
+                <a:latin typeface="Noto Sans"/>
+                <a:ea typeface="Noto Sans CJK JP"/>
+                <a:cs typeface="Noto Sans"/>
                 <a:hlinkClick r:id="rId2"/>
               </a:rPr>
-              <a:t>[1] https://github.com/nightrome/cocostuff</a:t>
+              <a:t>https://github.com/nightrome/cocostuff</a:t>
             </a:r>
           </a:p>
           <a:p>
@@ -9474,9 +9722,20 @@
                 <a:latin typeface="Noto Sans"/>
                 <a:ea typeface="Noto Sans CJK JP"/>
                 <a:cs typeface="Noto Sans"/>
+              </a:rPr>
+              <a:t>[2] </a:t>
+            </a:r>
+            <a:r>
+              <a:rPr lang="ja-JP" sz="800" b="0">
+                <a:solidFill>
+                  <a:srgbClr val="626669"/>
+                </a:solidFill>
+                <a:latin typeface="Noto Sans"/>
+                <a:ea typeface="Noto Sans CJK JP"/>
+                <a:cs typeface="Noto Sans"/>
                 <a:hlinkClick r:id="rId3"/>
               </a:rPr>
-              <a:t>[2] https://github.com/cocodataset/panopticapi/blob/master/panoptic_coco_categories.json</a:t>
+              <a:t>https://github.com/cocodataset/panopticapi/blob/master/panoptic_coco_categories.json</a:t>
             </a:r>
           </a:p>
         </p:txBody>
@@ -9681,9 +9940,31 @@
                 <a:latin typeface="Noto Sans"/>
                 <a:ea typeface="Noto Sans CJK JP"/>
                 <a:cs typeface="Noto Sans"/>
+              </a:rPr>
+              <a:t>[1] </a:t>
+            </a:r>
+            <a:r>
+              <a:rPr lang="ja-JP" sz="800" b="0">
+                <a:solidFill>
+                  <a:srgbClr val="626669"/>
+                </a:solidFill>
+                <a:latin typeface="Noto Sans"/>
+                <a:ea typeface="Noto Sans CJK JP"/>
+                <a:cs typeface="Noto Sans"/>
                 <a:hlinkClick r:id="rId3"/>
               </a:rPr>
-              <a:t>[1] https://cocodataset.org/#detection-eval / 公式ページの物体面積別の概数（42%、34%、24%）</a:t>
+              <a:t>https://cocodataset.org/#detection-eval</a:t>
+            </a:r>
+            <a:r>
+              <a:rPr lang="ja-JP" sz="800" b="0">
+                <a:solidFill>
+                  <a:srgbClr val="626669"/>
+                </a:solidFill>
+                <a:latin typeface="Noto Sans"/>
+                <a:ea typeface="Noto Sans CJK JP"/>
+                <a:cs typeface="Noto Sans"/>
+              </a:rPr>
+              <a:t> / 公式ページの物体面積別の概数（42%、34%、24%）</a:t>
             </a:r>
           </a:p>
         </p:txBody>
@@ -10366,9 +10647,31 @@
                 <a:latin typeface="Noto Sans"/>
                 <a:ea typeface="Noto Sans CJK JP"/>
                 <a:cs typeface="Noto Sans"/>
+              </a:rPr>
+              <a:t>[1] </a:t>
+            </a:r>
+            <a:r>
+              <a:rPr lang="ja-JP" sz="800" b="0">
+                <a:solidFill>
+                  <a:srgbClr val="626669"/>
+                </a:solidFill>
+                <a:latin typeface="Noto Sans"/>
+                <a:ea typeface="Noto Sans CJK JP"/>
+                <a:cs typeface="Noto Sans"/>
                 <a:hlinkClick r:id="rId2"/>
               </a:rPr>
-              <a:t>[1] https://cocodataset.org/#detection-eval / 図は指標を説明する矩形例</a:t>
+              <a:t>https://cocodataset.org/#detection-eval</a:t>
+            </a:r>
+            <a:r>
+              <a:rPr lang="ja-JP" sz="800" b="0">
+                <a:solidFill>
+                  <a:srgbClr val="626669"/>
+                </a:solidFill>
+                <a:latin typeface="Noto Sans"/>
+                <a:ea typeface="Noto Sans CJK JP"/>
+                <a:cs typeface="Noto Sans"/>
+              </a:rPr>
+              <a:t> / 図は指標を説明する矩形例</a:t>
             </a:r>
           </a:p>
         </p:txBody>
@@ -10675,9 +10978,20 @@
                 <a:latin typeface="Noto Sans"/>
                 <a:ea typeface="Noto Sans CJK JP"/>
                 <a:cs typeface="Noto Sans"/>
+              </a:rPr>
+              <a:t>[1] </a:t>
+            </a:r>
+            <a:r>
+              <a:rPr lang="ja-JP" sz="800" b="0">
+                <a:solidFill>
+                  <a:srgbClr val="626669"/>
+                </a:solidFill>
+                <a:latin typeface="Noto Sans"/>
+                <a:ea typeface="Noto Sans CJK JP"/>
+                <a:cs typeface="Noto Sans"/>
                 <a:hlinkClick r:id="rId2"/>
               </a:rPr>
-              <a:t>[1] https://github.com/cocodataset/cocoapi/blob/master/PythonAPI/pycocotools/cocoeval.py</a:t>
+              <a:t>https://github.com/cocodataset/cocoapi/blob/master/PythonAPI/pycocotools/cocoeval.py</a:t>
             </a:r>
           </a:p>
         </p:txBody>
@@ -10749,7 +11063,7 @@
                 <a:ea typeface="Noto Sans CJK JP"/>
                 <a:cs typeface="Noto Sans"/>
               </a:rPr>
-              <a:t>本編の構成</a:t>
+              <a:t/>
             </a:r>
           </a:p>
         </p:txBody>
@@ -10766,15 +11080,15 @@
         </p:nvSpPr>
         <p:spPr>
           <a:xfrm>
-            <a:off x="731520" y="1508760"/>
-            <a:ext cx="7772400" cy="3017520"/>
+            <a:off x="731520" y="1234440"/>
+            <a:ext cx="7772400" cy="3474720"/>
           </a:xfrm>
         </p:spPr>
         <p:txBody>
           <a:bodyPr wrap="square" anchor="t" tIns="91440" bIns="91440"/>
           <a:lstStyle/>
           <a:p>
-            <a:pPr algn="l" marL="457200" indent="-355600">
+            <a:pPr algn="l" marL="457200" indent="-355600" lvl="0">
               <a:lnSpc>
                 <a:spcPct val="115000"/>
               </a:lnSpc>
@@ -10784,6 +11098,8 @@
               <a:spcAft>
                 <a:spcPts val="1400"/>
               </a:spcAft>
+              <a:buSzPct val="100000"/>
+              <a:buFont typeface="Noto Sans CJK JP"/>
               <a:buAutoNum type="arabicPeriod"/>
               <a:defRPr lang="ja-JP" sz="2600" b="0">
                 <a:solidFill>
@@ -10807,7 +11123,7 @@
             </a:r>
           </a:p>
           <a:p>
-            <a:pPr algn="l" marL="457200" indent="-355600">
+            <a:pPr algn="l" marL="457200" indent="-355600" lvl="0">
               <a:lnSpc>
                 <a:spcPct val="115000"/>
               </a:lnSpc>
@@ -10817,6 +11133,8 @@
               <a:spcAft>
                 <a:spcPts val="1400"/>
               </a:spcAft>
+              <a:buSzPct val="100000"/>
+              <a:buFont typeface="Noto Sans CJK JP"/>
               <a:buAutoNum type="arabicPeriod"/>
               <a:defRPr lang="ja-JP" sz="2600" b="0">
                 <a:solidFill>
@@ -10840,7 +11158,7 @@
             </a:r>
           </a:p>
           <a:p>
-            <a:pPr algn="l" marL="457200" indent="-355600">
+            <a:pPr algn="l" marL="457200" indent="-355600" lvl="0">
               <a:lnSpc>
                 <a:spcPct val="115000"/>
               </a:lnSpc>
@@ -10850,6 +11168,8 @@
               <a:spcAft>
                 <a:spcPts val="1400"/>
               </a:spcAft>
+              <a:buSzPct val="100000"/>
+              <a:buFont typeface="Noto Sans CJK JP"/>
               <a:buAutoNum type="arabicPeriod"/>
               <a:defRPr lang="ja-JP" sz="2600" b="0">
                 <a:solidFill>
@@ -10873,7 +11193,7 @@
             </a:r>
           </a:p>
           <a:p>
-            <a:pPr algn="l" marL="457200" indent="-355600">
+            <a:pPr algn="l" marL="457200" indent="-355600" lvl="0">
               <a:lnSpc>
                 <a:spcPct val="115000"/>
               </a:lnSpc>
@@ -10883,6 +11203,8 @@
               <a:spcAft>
                 <a:spcPts val="1400"/>
               </a:spcAft>
+              <a:buSzPct val="100000"/>
+              <a:buFont typeface="Noto Sans CJK JP"/>
               <a:buAutoNum type="arabicPeriod"/>
               <a:defRPr lang="ja-JP" sz="2600" b="0">
                 <a:solidFill>
@@ -10956,7 +11278,7 @@
                 <a:ea typeface="Noto Sans CJK JP"/>
                 <a:cs typeface="Noto Sans"/>
               </a:rPr>
-              <a:t>構成</a:t>
+              <a:t>目次</a:t>
             </a:r>
           </a:p>
         </p:txBody>
@@ -11263,9 +11585,20 @@
                 <a:latin typeface="Noto Sans"/>
                 <a:ea typeface="Noto Sans CJK JP"/>
                 <a:cs typeface="Noto Sans"/>
+              </a:rPr>
+              <a:t>[1] </a:t>
+            </a:r>
+            <a:r>
+              <a:rPr lang="ja-JP" sz="800" b="0">
+                <a:solidFill>
+                  <a:srgbClr val="626669"/>
+                </a:solidFill>
+                <a:latin typeface="Noto Sans"/>
+                <a:ea typeface="Noto Sans CJK JP"/>
+                <a:cs typeface="Noto Sans"/>
                 <a:hlinkClick r:id="rId2"/>
               </a:rPr>
-              <a:t>[1] https://github.com/cocodataset/cocoapi/blob/master/PythonAPI/pycocotools/cocoeval.py</a:t>
+              <a:t>https://github.com/cocodataset/cocoapi/blob/master/PythonAPI/pycocotools/cocoeval.py</a:t>
             </a:r>
           </a:p>
         </p:txBody>
@@ -11405,21 +11738,19 @@
           <p:nvPr/>
         </p:nvGraphicFramePr>
         <p:xfrm>
-          <a:off x="594360" y="1417320"/>
-          <a:ext cx="7955280" cy="1901952"/>
+          <a:off x="548640" y="1417320"/>
+          <a:ext cx="8046720" cy="2084831"/>
         </p:xfrm>
         <a:graphic>
           <a:graphicData uri="http://schemas.openxmlformats.org/drawingml/2006/table">
             <a:tbl>
-              <a:tblPr firstRow="1" bandRow="1">
-                <a:tableStyleId>{5C22544A-7EE6-4342-B048-85BDC9FD1C3A}</a:tableStyleId>
-              </a:tblPr>
+              <a:tblPr firstRow="0" bandRow="0" lastRow="0" firstCol="0" lastCol="0" bandCol="0"/>
               <a:tblGrid>
                 <a:gridCol w="4754880"/>
                 <a:gridCol w="1143000"/>
-                <a:gridCol w="2057400"/>
+                <a:gridCol w="2148840"/>
               </a:tblGrid>
-              <a:tr h="475488">
+              <a:tr h="521207">
                 <a:tc>
                   <a:txBody>
                     <a:bodyPr/>
@@ -11427,7 +11758,7 @@
                     <a:p>
                       <a:pPr algn="l">
                         <a:lnSpc>
-                          <a:spcPct val="115000"/>
+                          <a:spcPct val="110000"/>
                         </a:lnSpc>
                         <a:spcBef>
                           <a:spcPts val="0"/>
@@ -11436,9 +11767,9 @@
                           <a:spcPts val="0"/>
                         </a:spcAft>
                         <a:buNone/>
-                        <a:defRPr lang="ja-JP" sz="1800" b="1">
+                        <a:defRPr lang="ja-JP" sz="1800" b="0">
                           <a:solidFill>
-                            <a:srgbClr val="FFFEF8"/>
+                            <a:srgbClr val="303437"/>
                           </a:solidFill>
                           <a:latin typeface="Noto Sans"/>
                           <a:ea typeface="Noto Sans CJK JP"/>
@@ -11446,9 +11777,9 @@
                         </a:defRPr>
                       </a:pPr>
                       <a:r>
-                        <a:rPr lang="ja-JP" sz="1800" b="1">
+                        <a:rPr lang="ja-JP" sz="1800" b="0">
                           <a:solidFill>
-                            <a:srgbClr val="FFFEF8"/>
+                            <a:srgbClr val="303437"/>
                           </a:solidFill>
                           <a:latin typeface="Noto Sans"/>
                           <a:ea typeface="Noto Sans CJK JP"/>
@@ -11458,9 +11789,25 @@
                       </a:r>
                     </a:p>
                   </a:txBody>
-                  <a:tcPr marL="88900" marR="88900" marT="76200" marB="76200" anchor="ctr">
+                  <a:tcPr marL="76200" marR="76200" marT="38100" marB="38100" anchor="ctr">
+                    <a:lnL w="0">
+                      <a:noFill/>
+                    </a:lnL>
+                    <a:lnR w="0">
+                      <a:noFill/>
+                    </a:lnR>
+                    <a:lnT w="10160">
+                      <a:solidFill>
+                        <a:srgbClr val="626669"/>
+                      </a:solidFill>
+                    </a:lnT>
+                    <a:lnB w="10160">
+                      <a:solidFill>
+                        <a:srgbClr val="626669"/>
+                      </a:solidFill>
+                    </a:lnB>
                     <a:solidFill>
-                      <a:srgbClr val="2C9100"/>
+                      <a:srgbClr val="FFFEF8"/>
                     </a:solidFill>
                   </a:tcPr>
                 </a:tc>
@@ -11471,7 +11818,7 @@
                     <a:p>
                       <a:pPr algn="r">
                         <a:lnSpc>
-                          <a:spcPct val="115000"/>
+                          <a:spcPct val="110000"/>
                         </a:lnSpc>
                         <a:spcBef>
                           <a:spcPts val="0"/>
@@ -11480,9 +11827,9 @@
                           <a:spcPts val="0"/>
                         </a:spcAft>
                         <a:buNone/>
-                        <a:defRPr lang="ja-JP" sz="1800" b="1">
+                        <a:defRPr lang="ja-JP" sz="1800" b="0">
                           <a:solidFill>
-                            <a:srgbClr val="FFFEF8"/>
+                            <a:srgbClr val="303437"/>
                           </a:solidFill>
                           <a:latin typeface="Noto Sans"/>
                           <a:ea typeface="Noto Sans CJK JP"/>
@@ -11490,9 +11837,9 @@
                         </a:defRPr>
                       </a:pPr>
                       <a:r>
-                        <a:rPr lang="ja-JP" sz="1800" b="1">
+                        <a:rPr lang="ja-JP" sz="1800" b="0">
                           <a:solidFill>
-                            <a:srgbClr val="FFFEF8"/>
+                            <a:srgbClr val="303437"/>
                           </a:solidFill>
                           <a:latin typeface="Noto Sans"/>
                           <a:ea typeface="Noto Sans CJK JP"/>
@@ -11502,9 +11849,25 @@
                       </a:r>
                     </a:p>
                   </a:txBody>
-                  <a:tcPr marL="88900" marR="88900" marT="76200" marB="76200" anchor="ctr">
+                  <a:tcPr marL="76200" marR="76200" marT="38100" marB="38100" anchor="ctr">
+                    <a:lnL w="0">
+                      <a:noFill/>
+                    </a:lnL>
+                    <a:lnR w="0">
+                      <a:noFill/>
+                    </a:lnR>
+                    <a:lnT w="10160">
+                      <a:solidFill>
+                        <a:srgbClr val="626669"/>
+                      </a:solidFill>
+                    </a:lnT>
+                    <a:lnB w="10160">
+                      <a:solidFill>
+                        <a:srgbClr val="626669"/>
+                      </a:solidFill>
+                    </a:lnB>
                     <a:solidFill>
-                      <a:srgbClr val="2C9100"/>
+                      <a:srgbClr val="FFFEF8"/>
                     </a:solidFill>
                   </a:tcPr>
                 </a:tc>
@@ -11513,9 +11876,9 @@
                     <a:bodyPr/>
                     <a:lstStyle/>
                     <a:p>
-                      <a:pPr algn="r">
+                      <a:pPr algn="l">
                         <a:lnSpc>
-                          <a:spcPct val="115000"/>
+                          <a:spcPct val="110000"/>
                         </a:lnSpc>
                         <a:spcBef>
                           <a:spcPts val="0"/>
@@ -11524,9 +11887,9 @@
                           <a:spcPts val="0"/>
                         </a:spcAft>
                         <a:buNone/>
-                        <a:defRPr lang="ja-JP" sz="1800" b="1">
+                        <a:defRPr lang="ja-JP" sz="1800" b="0">
                           <a:solidFill>
-                            <a:srgbClr val="FFFEF8"/>
+                            <a:srgbClr val="303437"/>
                           </a:solidFill>
                           <a:latin typeface="Noto Sans"/>
                           <a:ea typeface="Noto Sans CJK JP"/>
@@ -11534,9 +11897,9 @@
                         </a:defRPr>
                       </a:pPr>
                       <a:r>
-                        <a:rPr lang="ja-JP" sz="1800" b="1">
+                        <a:rPr lang="ja-JP" sz="1800" b="0">
                           <a:solidFill>
-                            <a:srgbClr val="FFFEF8"/>
+                            <a:srgbClr val="303437"/>
                           </a:solidFill>
                           <a:latin typeface="Noto Sans"/>
                           <a:ea typeface="Noto Sans CJK JP"/>
@@ -11546,14 +11909,30 @@
                       </a:r>
                     </a:p>
                   </a:txBody>
-                  <a:tcPr marL="88900" marR="88900" marT="76200" marB="76200" anchor="ctr">
+                  <a:tcPr marL="203200" marR="76200" marT="38100" marB="38100" anchor="ctr">
+                    <a:lnL w="0">
+                      <a:noFill/>
+                    </a:lnL>
+                    <a:lnR w="0">
+                      <a:noFill/>
+                    </a:lnR>
+                    <a:lnT w="10160">
+                      <a:solidFill>
+                        <a:srgbClr val="626669"/>
+                      </a:solidFill>
+                    </a:lnT>
+                    <a:lnB w="10160">
+                      <a:solidFill>
+                        <a:srgbClr val="626669"/>
+                      </a:solidFill>
+                    </a:lnB>
                     <a:solidFill>
-                      <a:srgbClr val="2C9100"/>
+                      <a:srgbClr val="FFFEF8"/>
                     </a:solidFill>
                   </a:tcPr>
                 </a:tc>
               </a:tr>
-              <a:tr h="475488">
+              <a:tr h="521207">
                 <a:tc>
                   <a:txBody>
                     <a:bodyPr/>
@@ -11561,7 +11940,7 @@
                     <a:p>
                       <a:pPr algn="l">
                         <a:lnSpc>
-                          <a:spcPct val="115000"/>
+                          <a:spcPct val="110000"/>
                         </a:lnSpc>
                         <a:spcBef>
                           <a:spcPts val="0"/>
@@ -11592,7 +11971,19 @@
                       </a:r>
                     </a:p>
                   </a:txBody>
-                  <a:tcPr marL="88900" marR="88900" marT="76200" marB="76200" anchor="ctr">
+                  <a:tcPr marL="76200" marR="76200" marT="38100" marB="38100" anchor="ctr">
+                    <a:lnL w="0">
+                      <a:noFill/>
+                    </a:lnL>
+                    <a:lnR w="0">
+                      <a:noFill/>
+                    </a:lnR>
+                    <a:lnT w="0">
+                      <a:noFill/>
+                    </a:lnT>
+                    <a:lnB w="0">
+                      <a:noFill/>
+                    </a:lnB>
                     <a:solidFill>
                       <a:srgbClr val="FFFEF8"/>
                     </a:solidFill>
@@ -11605,7 +11996,7 @@
                     <a:p>
                       <a:pPr algn="r">
                         <a:lnSpc>
-                          <a:spcPct val="115000"/>
+                          <a:spcPct val="110000"/>
                         </a:lnSpc>
                         <a:spcBef>
                           <a:spcPts val="0"/>
@@ -11636,7 +12027,19 @@
                       </a:r>
                     </a:p>
                   </a:txBody>
-                  <a:tcPr marL="88900" marR="88900" marT="76200" marB="76200" anchor="ctr">
+                  <a:tcPr marL="76200" marR="76200" marT="38100" marB="38100" anchor="ctr">
+                    <a:lnL w="0">
+                      <a:noFill/>
+                    </a:lnL>
+                    <a:lnR w="0">
+                      <a:noFill/>
+                    </a:lnR>
+                    <a:lnT w="0">
+                      <a:noFill/>
+                    </a:lnT>
+                    <a:lnB w="0">
+                      <a:noFill/>
+                    </a:lnB>
                     <a:solidFill>
                       <a:srgbClr val="FFFEF8"/>
                     </a:solidFill>
@@ -11647,9 +12050,9 @@
                     <a:bodyPr/>
                     <a:lstStyle/>
                     <a:p>
-                      <a:pPr algn="r">
+                      <a:pPr algn="l">
                         <a:lnSpc>
-                          <a:spcPct val="115000"/>
+                          <a:spcPct val="110000"/>
                         </a:lnSpc>
                         <a:spcBef>
                           <a:spcPts val="0"/>
@@ -11680,14 +12083,26 @@
                       </a:r>
                     </a:p>
                   </a:txBody>
-                  <a:tcPr marL="88900" marR="88900" marT="76200" marB="76200" anchor="ctr">
+                  <a:tcPr marL="203200" marR="76200" marT="38100" marB="38100" anchor="ctr">
+                    <a:lnL w="0">
+                      <a:noFill/>
+                    </a:lnL>
+                    <a:lnR w="0">
+                      <a:noFill/>
+                    </a:lnR>
+                    <a:lnT w="0">
+                      <a:noFill/>
+                    </a:lnT>
+                    <a:lnB w="0">
+                      <a:noFill/>
+                    </a:lnB>
                     <a:solidFill>
                       <a:srgbClr val="FFFEF8"/>
                     </a:solidFill>
                   </a:tcPr>
                 </a:tc>
               </a:tr>
-              <a:tr h="475488">
+              <a:tr h="521207">
                 <a:tc>
                   <a:txBody>
                     <a:bodyPr/>
@@ -11695,7 +12110,7 @@
                     <a:p>
                       <a:pPr algn="l">
                         <a:lnSpc>
-                          <a:spcPct val="115000"/>
+                          <a:spcPct val="110000"/>
                         </a:lnSpc>
                         <a:spcBef>
                           <a:spcPts val="0"/>
@@ -11726,7 +12141,19 @@
                       </a:r>
                     </a:p>
                   </a:txBody>
-                  <a:tcPr marL="88900" marR="88900" marT="76200" marB="76200" anchor="ctr">
+                  <a:tcPr marL="76200" marR="76200" marT="38100" marB="38100" anchor="ctr">
+                    <a:lnL w="0">
+                      <a:noFill/>
+                    </a:lnL>
+                    <a:lnR w="0">
+                      <a:noFill/>
+                    </a:lnR>
+                    <a:lnT w="0">
+                      <a:noFill/>
+                    </a:lnT>
+                    <a:lnB w="0">
+                      <a:noFill/>
+                    </a:lnB>
                     <a:solidFill>
                       <a:srgbClr val="FFFEF8"/>
                     </a:solidFill>
@@ -11739,7 +12166,7 @@
                     <a:p>
                       <a:pPr algn="r">
                         <a:lnSpc>
-                          <a:spcPct val="115000"/>
+                          <a:spcPct val="110000"/>
                         </a:lnSpc>
                         <a:spcBef>
                           <a:spcPts val="0"/>
@@ -11770,7 +12197,19 @@
                       </a:r>
                     </a:p>
                   </a:txBody>
-                  <a:tcPr marL="88900" marR="88900" marT="76200" marB="76200" anchor="ctr">
+                  <a:tcPr marL="76200" marR="76200" marT="38100" marB="38100" anchor="ctr">
+                    <a:lnL w="0">
+                      <a:noFill/>
+                    </a:lnL>
+                    <a:lnR w="0">
+                      <a:noFill/>
+                    </a:lnR>
+                    <a:lnT w="0">
+                      <a:noFill/>
+                    </a:lnT>
+                    <a:lnB w="0">
+                      <a:noFill/>
+                    </a:lnB>
                     <a:solidFill>
                       <a:srgbClr val="FFFEF8"/>
                     </a:solidFill>
@@ -11781,9 +12220,9 @@
                     <a:bodyPr/>
                     <a:lstStyle/>
                     <a:p>
-                      <a:pPr algn="r">
+                      <a:pPr algn="l">
                         <a:lnSpc>
-                          <a:spcPct val="115000"/>
+                          <a:spcPct val="110000"/>
                         </a:lnSpc>
                         <a:spcBef>
                           <a:spcPts val="0"/>
@@ -11814,14 +12253,26 @@
                       </a:r>
                     </a:p>
                   </a:txBody>
-                  <a:tcPr marL="88900" marR="88900" marT="76200" marB="76200" anchor="ctr">
+                  <a:tcPr marL="203200" marR="76200" marT="38100" marB="38100" anchor="ctr">
+                    <a:lnL w="0">
+                      <a:noFill/>
+                    </a:lnL>
+                    <a:lnR w="0">
+                      <a:noFill/>
+                    </a:lnR>
+                    <a:lnT w="0">
+                      <a:noFill/>
+                    </a:lnT>
+                    <a:lnB w="0">
+                      <a:noFill/>
+                    </a:lnB>
                     <a:solidFill>
                       <a:srgbClr val="FFFEF8"/>
                     </a:solidFill>
                   </a:tcPr>
                 </a:tc>
               </a:tr>
-              <a:tr h="475488">
+              <a:tr h="521207">
                 <a:tc>
                   <a:txBody>
                     <a:bodyPr/>
@@ -11829,7 +12280,7 @@
                     <a:p>
                       <a:pPr algn="l">
                         <a:lnSpc>
-                          <a:spcPct val="115000"/>
+                          <a:spcPct val="110000"/>
                         </a:lnSpc>
                         <a:spcBef>
                           <a:spcPts val="0"/>
@@ -11860,7 +12311,21 @@
                       </a:r>
                     </a:p>
                   </a:txBody>
-                  <a:tcPr marL="88900" marR="88900" marT="76200" marB="76200" anchor="ctr">
+                  <a:tcPr marL="76200" marR="76200" marT="38100" marB="38100" anchor="ctr">
+                    <a:lnL w="0">
+                      <a:noFill/>
+                    </a:lnL>
+                    <a:lnR w="0">
+                      <a:noFill/>
+                    </a:lnR>
+                    <a:lnT w="0">
+                      <a:noFill/>
+                    </a:lnT>
+                    <a:lnB w="10160">
+                      <a:solidFill>
+                        <a:srgbClr val="626669"/>
+                      </a:solidFill>
+                    </a:lnB>
                     <a:solidFill>
                       <a:srgbClr val="FFFEF8"/>
                     </a:solidFill>
@@ -11873,7 +12338,7 @@
                     <a:p>
                       <a:pPr algn="r">
                         <a:lnSpc>
-                          <a:spcPct val="115000"/>
+                          <a:spcPct val="110000"/>
                         </a:lnSpc>
                         <a:spcBef>
                           <a:spcPts val="0"/>
@@ -11904,7 +12369,21 @@
                       </a:r>
                     </a:p>
                   </a:txBody>
-                  <a:tcPr marL="88900" marR="88900" marT="76200" marB="76200" anchor="ctr">
+                  <a:tcPr marL="76200" marR="76200" marT="38100" marB="38100" anchor="ctr">
+                    <a:lnL w="0">
+                      <a:noFill/>
+                    </a:lnL>
+                    <a:lnR w="0">
+                      <a:noFill/>
+                    </a:lnR>
+                    <a:lnT w="0">
+                      <a:noFill/>
+                    </a:lnT>
+                    <a:lnB w="10160">
+                      <a:solidFill>
+                        <a:srgbClr val="626669"/>
+                      </a:solidFill>
+                    </a:lnB>
                     <a:solidFill>
                       <a:srgbClr val="FFFEF8"/>
                     </a:solidFill>
@@ -11915,9 +12394,9 @@
                     <a:bodyPr/>
                     <a:lstStyle/>
                     <a:p>
-                      <a:pPr algn="r">
+                      <a:pPr algn="l">
                         <a:lnSpc>
-                          <a:spcPct val="115000"/>
+                          <a:spcPct val="110000"/>
                         </a:lnSpc>
                         <a:spcBef>
                           <a:spcPts val="0"/>
@@ -11948,7 +12427,21 @@
                       </a:r>
                     </a:p>
                   </a:txBody>
-                  <a:tcPr marL="88900" marR="88900" marT="76200" marB="76200" anchor="ctr">
+                  <a:tcPr marL="203200" marR="76200" marT="38100" marB="38100" anchor="ctr">
+                    <a:lnL w="0">
+                      <a:noFill/>
+                    </a:lnL>
+                    <a:lnR w="0">
+                      <a:noFill/>
+                    </a:lnR>
+                    <a:lnT w="0">
+                      <a:noFill/>
+                    </a:lnT>
+                    <a:lnB w="10160">
+                      <a:solidFill>
+                        <a:srgbClr val="626669"/>
+                      </a:solidFill>
+                    </a:lnB>
                     <a:solidFill>
                       <a:srgbClr val="FFFEF8"/>
                     </a:solidFill>
@@ -11967,8 +12460,8 @@
         </p:nvSpPr>
         <p:spPr>
           <a:xfrm>
-            <a:off x="658368" y="3456432"/>
-            <a:ext cx="7772400" cy="914400"/>
+            <a:off x="594360" y="3705351"/>
+            <a:ext cx="7955279" cy="713232"/>
           </a:xfrm>
           <a:prstGeom prst="rect">
             <a:avLst/>
@@ -12065,9 +12558,20 @@
                 <a:latin typeface="Noto Sans"/>
                 <a:ea typeface="Noto Sans CJK JP"/>
                 <a:cs typeface="Noto Sans"/>
+              </a:rPr>
+              <a:t>[1] </a:t>
+            </a:r>
+            <a:r>
+              <a:rPr lang="ja-JP" sz="800" b="0">
+                <a:solidFill>
+                  <a:srgbClr val="626669"/>
+                </a:solidFill>
+                <a:latin typeface="Noto Sans"/>
+                <a:ea typeface="Noto Sans CJK JP"/>
+                <a:cs typeface="Noto Sans"/>
                 <a:hlinkClick r:id="rId2"/>
               </a:rPr>
-              <a:t>[1] https://github.com/facebookresearch/detectron2/blob/main/MODEL_ZOO.md</a:t>
+              <a:t>https://github.com/facebookresearch/detectron2/blob/main/MODEL_ZOO.md</a:t>
             </a:r>
           </a:p>
           <a:p>
@@ -12099,9 +12603,20 @@
                 <a:latin typeface="Noto Sans"/>
                 <a:ea typeface="Noto Sans CJK JP"/>
                 <a:cs typeface="Noto Sans"/>
+              </a:rPr>
+              <a:t>[2] </a:t>
+            </a:r>
+            <a:r>
+              <a:rPr lang="ja-JP" sz="800" b="0">
+                <a:solidFill>
+                  <a:srgbClr val="626669"/>
+                </a:solidFill>
+                <a:latin typeface="Noto Sans"/>
+                <a:ea typeface="Noto Sans CJK JP"/>
+                <a:cs typeface="Noto Sans"/>
                 <a:hlinkClick r:id="rId3"/>
               </a:rPr>
-              <a:t>[2] https://github.com/lyuwenyu/RT-DETR</a:t>
+              <a:t>https://github.com/lyuwenyu/RT-DETR</a:t>
             </a:r>
           </a:p>
         </p:txBody>
@@ -12408,9 +12923,20 @@
                 <a:latin typeface="Noto Sans"/>
                 <a:ea typeface="Noto Sans CJK JP"/>
                 <a:cs typeface="Noto Sans"/>
+              </a:rPr>
+              <a:t>[1] </a:t>
+            </a:r>
+            <a:r>
+              <a:rPr lang="ja-JP" sz="800" b="0">
+                <a:solidFill>
+                  <a:srgbClr val="626669"/>
+                </a:solidFill>
+                <a:latin typeface="Noto Sans"/>
+                <a:ea typeface="Noto Sans CJK JP"/>
+                <a:cs typeface="Noto Sans"/>
                 <a:hlinkClick r:id="rId2"/>
               </a:rPr>
-              <a:t>[1] https://cocodataset.org/#panoptic-eval</a:t>
+              <a:t>https://cocodataset.org/#panoptic-eval</a:t>
             </a:r>
           </a:p>
         </p:txBody>
@@ -12843,9 +13369,20 @@
                 <a:latin typeface="Noto Sans"/>
                 <a:ea typeface="Noto Sans CJK JP"/>
                 <a:cs typeface="Noto Sans"/>
+              </a:rPr>
+              <a:t>[1] </a:t>
+            </a:r>
+            <a:r>
+              <a:rPr lang="ja-JP" sz="800" b="0">
+                <a:solidFill>
+                  <a:srgbClr val="626669"/>
+                </a:solidFill>
+                <a:latin typeface="Noto Sans"/>
+                <a:ea typeface="Noto Sans CJK JP"/>
+                <a:cs typeface="Noto Sans"/>
                 <a:hlinkClick r:id="rId2"/>
               </a:rPr>
-              <a:t>[1] https://cocodataset.org/#download</a:t>
+              <a:t>https://cocodataset.org/#download</a:t>
             </a:r>
           </a:p>
           <a:p>
@@ -12877,9 +13414,20 @@
                 <a:latin typeface="Noto Sans"/>
                 <a:ea typeface="Noto Sans CJK JP"/>
                 <a:cs typeface="Noto Sans"/>
+              </a:rPr>
+              <a:t>[2] </a:t>
+            </a:r>
+            <a:r>
+              <a:rPr lang="ja-JP" sz="800" b="0">
+                <a:solidFill>
+                  <a:srgbClr val="626669"/>
+                </a:solidFill>
+                <a:latin typeface="Noto Sans"/>
+                <a:ea typeface="Noto Sans CJK JP"/>
+                <a:cs typeface="Noto Sans"/>
                 <a:hlinkClick r:id="rId3"/>
               </a:rPr>
-              <a:t>[2] https://github.com/lyuwenyu/RT-DETR</a:t>
+              <a:t>https://github.com/lyuwenyu/RT-DETR</a:t>
             </a:r>
           </a:p>
         </p:txBody>
@@ -13186,9 +13734,20 @@
                 <a:latin typeface="Noto Sans"/>
                 <a:ea typeface="Noto Sans CJK JP"/>
                 <a:cs typeface="Noto Sans"/>
+              </a:rPr>
+              <a:t>[1] </a:t>
+            </a:r>
+            <a:r>
+              <a:rPr lang="ja-JP" sz="800" b="0">
+                <a:solidFill>
+                  <a:srgbClr val="626669"/>
+                </a:solidFill>
+                <a:latin typeface="Noto Sans"/>
+                <a:ea typeface="Noto Sans CJK JP"/>
+                <a:cs typeface="Noto Sans"/>
                 <a:hlinkClick r:id="rId2"/>
               </a:rPr>
-              <a:t>[1] https://cocodataset.org/#external</a:t>
+              <a:t>https://cocodataset.org/#external</a:t>
             </a:r>
           </a:p>
           <a:p>
@@ -13220,9 +13779,20 @@
                 <a:latin typeface="Noto Sans"/>
                 <a:ea typeface="Noto Sans CJK JP"/>
                 <a:cs typeface="Noto Sans"/>
+              </a:rPr>
+              <a:t>[2] </a:t>
+            </a:r>
+            <a:r>
+              <a:rPr lang="ja-JP" sz="800" b="0">
+                <a:solidFill>
+                  <a:srgbClr val="626669"/>
+                </a:solidFill>
+                <a:latin typeface="Noto Sans"/>
+                <a:ea typeface="Noto Sans CJK JP"/>
+                <a:cs typeface="Noto Sans"/>
                 <a:hlinkClick r:id="rId3"/>
               </a:rPr>
-              <a:t>[2] https://github.com/lvis-dataset/lvis-api</a:t>
+              <a:t>https://github.com/lvis-dataset/lvis-api</a:t>
             </a:r>
           </a:p>
         </p:txBody>
@@ -13362,18 +13932,16 @@
           <p:nvPr/>
         </p:nvGraphicFramePr>
         <p:xfrm>
-          <a:off x="594360" y="1417320"/>
-          <a:ext cx="7955280" cy="2377440"/>
+          <a:off x="548640" y="1417320"/>
+          <a:ext cx="8046720" cy="2377440"/>
         </p:xfrm>
         <a:graphic>
           <a:graphicData uri="http://schemas.openxmlformats.org/drawingml/2006/table">
             <a:tbl>
-              <a:tblPr firstRow="1" bandRow="1">
-                <a:tableStyleId>{5C22544A-7EE6-4342-B048-85BDC9FD1C3A}</a:tableStyleId>
-              </a:tblPr>
+              <a:tblPr firstRow="0" bandRow="0" lastRow="0" firstCol="0" lastCol="0" bandCol="0"/>
               <a:tblGrid>
                 <a:gridCol w="5212080"/>
-                <a:gridCol w="2743200"/>
+                <a:gridCol w="2834640"/>
               </a:tblGrid>
               <a:tr h="475488">
                 <a:tc>
@@ -13383,7 +13951,7 @@
                     <a:p>
                       <a:pPr algn="l">
                         <a:lnSpc>
-                          <a:spcPct val="115000"/>
+                          <a:spcPct val="110000"/>
                         </a:lnSpc>
                         <a:spcBef>
                           <a:spcPts val="0"/>
@@ -13392,9 +13960,9 @@
                           <a:spcPts val="0"/>
                         </a:spcAft>
                         <a:buNone/>
-                        <a:defRPr lang="ja-JP" sz="2100" b="1">
+                        <a:defRPr lang="ja-JP" sz="2100" b="0">
                           <a:solidFill>
-                            <a:srgbClr val="FFFEF8"/>
+                            <a:srgbClr val="303437"/>
                           </a:solidFill>
                           <a:latin typeface="Noto Sans"/>
                           <a:ea typeface="Noto Sans CJK JP"/>
@@ -13402,9 +13970,9 @@
                         </a:defRPr>
                       </a:pPr>
                       <a:r>
-                        <a:rPr lang="ja-JP" sz="2100" b="1">
+                        <a:rPr lang="ja-JP" sz="2100" b="0">
                           <a:solidFill>
-                            <a:srgbClr val="FFFEF8"/>
+                            <a:srgbClr val="303437"/>
                           </a:solidFill>
                           <a:latin typeface="Noto Sans"/>
                           <a:ea typeface="Noto Sans CJK JP"/>
@@ -13414,9 +13982,25 @@
                       </a:r>
                     </a:p>
                   </a:txBody>
-                  <a:tcPr marL="88900" marR="88900" marT="76200" marB="76200" anchor="ctr">
+                  <a:tcPr marL="76200" marR="76200" marT="38100" marB="38100" anchor="ctr">
+                    <a:lnL w="0">
+                      <a:noFill/>
+                    </a:lnL>
+                    <a:lnR w="0">
+                      <a:noFill/>
+                    </a:lnR>
+                    <a:lnT w="10160">
+                      <a:solidFill>
+                        <a:srgbClr val="626669"/>
+                      </a:solidFill>
+                    </a:lnT>
+                    <a:lnB w="10160">
+                      <a:solidFill>
+                        <a:srgbClr val="626669"/>
+                      </a:solidFill>
+                    </a:lnB>
                     <a:solidFill>
-                      <a:srgbClr val="2C9100"/>
+                      <a:srgbClr val="FFFEF8"/>
                     </a:solidFill>
                   </a:tcPr>
                 </a:tc>
@@ -13427,7 +14011,7 @@
                     <a:p>
                       <a:pPr algn="r">
                         <a:lnSpc>
-                          <a:spcPct val="115000"/>
+                          <a:spcPct val="110000"/>
                         </a:lnSpc>
                         <a:spcBef>
                           <a:spcPts val="0"/>
@@ -13436,9 +14020,9 @@
                           <a:spcPts val="0"/>
                         </a:spcAft>
                         <a:buNone/>
-                        <a:defRPr lang="ja-JP" sz="2100" b="1">
+                        <a:defRPr lang="ja-JP" sz="2100" b="0">
                           <a:solidFill>
-                            <a:srgbClr val="FFFEF8"/>
+                            <a:srgbClr val="303437"/>
                           </a:solidFill>
                           <a:latin typeface="Noto Sans"/>
                           <a:ea typeface="Noto Sans CJK JP"/>
@@ -13446,9 +14030,9 @@
                         </a:defRPr>
                       </a:pPr>
                       <a:r>
-                        <a:rPr lang="ja-JP" sz="2100" b="1">
+                        <a:rPr lang="ja-JP" sz="2100" b="0">
                           <a:solidFill>
-                            <a:srgbClr val="FFFEF8"/>
+                            <a:srgbClr val="303437"/>
                           </a:solidFill>
                           <a:latin typeface="Noto Sans"/>
                           <a:ea typeface="Noto Sans CJK JP"/>
@@ -13458,9 +14042,25 @@
                       </a:r>
                     </a:p>
                   </a:txBody>
-                  <a:tcPr marL="88900" marR="88900" marT="76200" marB="76200" anchor="ctr">
+                  <a:tcPr marL="76200" marR="76200" marT="38100" marB="38100" anchor="ctr">
+                    <a:lnL w="0">
+                      <a:noFill/>
+                    </a:lnL>
+                    <a:lnR w="0">
+                      <a:noFill/>
+                    </a:lnR>
+                    <a:lnT w="10160">
+                      <a:solidFill>
+                        <a:srgbClr val="626669"/>
+                      </a:solidFill>
+                    </a:lnT>
+                    <a:lnB w="10160">
+                      <a:solidFill>
+                        <a:srgbClr val="626669"/>
+                      </a:solidFill>
+                    </a:lnB>
                     <a:solidFill>
-                      <a:srgbClr val="2C9100"/>
+                      <a:srgbClr val="FFFEF8"/>
                     </a:solidFill>
                   </a:tcPr>
                 </a:tc>
@@ -13473,7 +14073,7 @@
                     <a:p>
                       <a:pPr algn="l">
                         <a:lnSpc>
-                          <a:spcPct val="115000"/>
+                          <a:spcPct val="110000"/>
                         </a:lnSpc>
                         <a:spcBef>
                           <a:spcPts val="0"/>
@@ -13504,7 +14104,19 @@
                       </a:r>
                     </a:p>
                   </a:txBody>
-                  <a:tcPr marL="88900" marR="88900" marT="76200" marB="76200" anchor="ctr">
+                  <a:tcPr marL="76200" marR="76200" marT="38100" marB="38100" anchor="ctr">
+                    <a:lnL w="0">
+                      <a:noFill/>
+                    </a:lnL>
+                    <a:lnR w="0">
+                      <a:noFill/>
+                    </a:lnR>
+                    <a:lnT w="0">
+                      <a:noFill/>
+                    </a:lnT>
+                    <a:lnB w="0">
+                      <a:noFill/>
+                    </a:lnB>
                     <a:solidFill>
                       <a:srgbClr val="FFFEF8"/>
                     </a:solidFill>
@@ -13517,7 +14129,7 @@
                     <a:p>
                       <a:pPr algn="r">
                         <a:lnSpc>
-                          <a:spcPct val="115000"/>
+                          <a:spcPct val="110000"/>
                         </a:lnSpc>
                         <a:spcBef>
                           <a:spcPts val="0"/>
@@ -13548,7 +14160,19 @@
                       </a:r>
                     </a:p>
                   </a:txBody>
-                  <a:tcPr marL="88900" marR="88900" marT="76200" marB="76200" anchor="ctr">
+                  <a:tcPr marL="76200" marR="76200" marT="38100" marB="38100" anchor="ctr">
+                    <a:lnL w="0">
+                      <a:noFill/>
+                    </a:lnL>
+                    <a:lnR w="0">
+                      <a:noFill/>
+                    </a:lnR>
+                    <a:lnT w="0">
+                      <a:noFill/>
+                    </a:lnT>
+                    <a:lnB w="0">
+                      <a:noFill/>
+                    </a:lnB>
                     <a:solidFill>
                       <a:srgbClr val="FFFEF8"/>
                     </a:solidFill>
@@ -13563,7 +14187,7 @@
                     <a:p>
                       <a:pPr algn="l">
                         <a:lnSpc>
-                          <a:spcPct val="115000"/>
+                          <a:spcPct val="110000"/>
                         </a:lnSpc>
                         <a:spcBef>
                           <a:spcPts val="0"/>
@@ -13594,7 +14218,19 @@
                       </a:r>
                     </a:p>
                   </a:txBody>
-                  <a:tcPr marL="88900" marR="88900" marT="76200" marB="76200" anchor="ctr">
+                  <a:tcPr marL="76200" marR="76200" marT="38100" marB="38100" anchor="ctr">
+                    <a:lnL w="0">
+                      <a:noFill/>
+                    </a:lnL>
+                    <a:lnR w="0">
+                      <a:noFill/>
+                    </a:lnR>
+                    <a:lnT w="0">
+                      <a:noFill/>
+                    </a:lnT>
+                    <a:lnB w="0">
+                      <a:noFill/>
+                    </a:lnB>
                     <a:solidFill>
                       <a:srgbClr val="FFFEF8"/>
                     </a:solidFill>
@@ -13607,7 +14243,7 @@
                     <a:p>
                       <a:pPr algn="r">
                         <a:lnSpc>
-                          <a:spcPct val="115000"/>
+                          <a:spcPct val="110000"/>
                         </a:lnSpc>
                         <a:spcBef>
                           <a:spcPts val="0"/>
@@ -13638,7 +14274,19 @@
                       </a:r>
                     </a:p>
                   </a:txBody>
-                  <a:tcPr marL="88900" marR="88900" marT="76200" marB="76200" anchor="ctr">
+                  <a:tcPr marL="76200" marR="76200" marT="38100" marB="38100" anchor="ctr">
+                    <a:lnL w="0">
+                      <a:noFill/>
+                    </a:lnL>
+                    <a:lnR w="0">
+                      <a:noFill/>
+                    </a:lnR>
+                    <a:lnT w="0">
+                      <a:noFill/>
+                    </a:lnT>
+                    <a:lnB w="0">
+                      <a:noFill/>
+                    </a:lnB>
                     <a:solidFill>
                       <a:srgbClr val="FFFEF8"/>
                     </a:solidFill>
@@ -13653,7 +14301,7 @@
                     <a:p>
                       <a:pPr algn="l">
                         <a:lnSpc>
-                          <a:spcPct val="115000"/>
+                          <a:spcPct val="110000"/>
                         </a:lnSpc>
                         <a:spcBef>
                           <a:spcPts val="0"/>
@@ -13684,7 +14332,19 @@
                       </a:r>
                     </a:p>
                   </a:txBody>
-                  <a:tcPr marL="88900" marR="88900" marT="76200" marB="76200" anchor="ctr">
+                  <a:tcPr marL="76200" marR="76200" marT="38100" marB="38100" anchor="ctr">
+                    <a:lnL w="0">
+                      <a:noFill/>
+                    </a:lnL>
+                    <a:lnR w="0">
+                      <a:noFill/>
+                    </a:lnR>
+                    <a:lnT w="0">
+                      <a:noFill/>
+                    </a:lnT>
+                    <a:lnB w="0">
+                      <a:noFill/>
+                    </a:lnB>
                     <a:solidFill>
                       <a:srgbClr val="FFFEF8"/>
                     </a:solidFill>
@@ -13697,7 +14357,7 @@
                     <a:p>
                       <a:pPr algn="r">
                         <a:lnSpc>
-                          <a:spcPct val="115000"/>
+                          <a:spcPct val="110000"/>
                         </a:lnSpc>
                         <a:spcBef>
                           <a:spcPts val="0"/>
@@ -13728,7 +14388,19 @@
                       </a:r>
                     </a:p>
                   </a:txBody>
-                  <a:tcPr marL="88900" marR="88900" marT="76200" marB="76200" anchor="ctr">
+                  <a:tcPr marL="76200" marR="76200" marT="38100" marB="38100" anchor="ctr">
+                    <a:lnL w="0">
+                      <a:noFill/>
+                    </a:lnL>
+                    <a:lnR w="0">
+                      <a:noFill/>
+                    </a:lnR>
+                    <a:lnT w="0">
+                      <a:noFill/>
+                    </a:lnT>
+                    <a:lnB w="0">
+                      <a:noFill/>
+                    </a:lnB>
                     <a:solidFill>
                       <a:srgbClr val="FFFEF8"/>
                     </a:solidFill>
@@ -13743,7 +14415,7 @@
                     <a:p>
                       <a:pPr algn="l">
                         <a:lnSpc>
-                          <a:spcPct val="115000"/>
+                          <a:spcPct val="110000"/>
                         </a:lnSpc>
                         <a:spcBef>
                           <a:spcPts val="0"/>
@@ -13774,7 +14446,21 @@
                       </a:r>
                     </a:p>
                   </a:txBody>
-                  <a:tcPr marL="88900" marR="88900" marT="76200" marB="76200" anchor="ctr">
+                  <a:tcPr marL="76200" marR="76200" marT="38100" marB="38100" anchor="ctr">
+                    <a:lnL w="0">
+                      <a:noFill/>
+                    </a:lnL>
+                    <a:lnR w="0">
+                      <a:noFill/>
+                    </a:lnR>
+                    <a:lnT w="0">
+                      <a:noFill/>
+                    </a:lnT>
+                    <a:lnB w="10160">
+                      <a:solidFill>
+                        <a:srgbClr val="626669"/>
+                      </a:solidFill>
+                    </a:lnB>
                     <a:solidFill>
                       <a:srgbClr val="FFFEF8"/>
                     </a:solidFill>
@@ -13787,7 +14473,7 @@
                     <a:p>
                       <a:pPr algn="r">
                         <a:lnSpc>
-                          <a:spcPct val="115000"/>
+                          <a:spcPct val="110000"/>
                         </a:lnSpc>
                         <a:spcBef>
                           <a:spcPts val="0"/>
@@ -13818,7 +14504,21 @@
                       </a:r>
                     </a:p>
                   </a:txBody>
-                  <a:tcPr marL="88900" marR="88900" marT="76200" marB="76200" anchor="ctr">
+                  <a:tcPr marL="76200" marR="76200" marT="38100" marB="38100" anchor="ctr">
+                    <a:lnL w="0">
+                      <a:noFill/>
+                    </a:lnL>
+                    <a:lnR w="0">
+                      <a:noFill/>
+                    </a:lnR>
+                    <a:lnT w="0">
+                      <a:noFill/>
+                    </a:lnT>
+                    <a:lnB w="10160">
+                      <a:solidFill>
+                        <a:srgbClr val="626669"/>
+                      </a:solidFill>
+                    </a:lnB>
                     <a:solidFill>
                       <a:srgbClr val="FFFEF8"/>
                     </a:solidFill>
@@ -13837,8 +14537,8 @@
         </p:nvSpPr>
         <p:spPr>
           <a:xfrm>
-            <a:off x="658368" y="3931920"/>
-            <a:ext cx="7772400" cy="914400"/>
+            <a:off x="594360" y="3959860"/>
+            <a:ext cx="7955279" cy="713232"/>
           </a:xfrm>
           <a:prstGeom prst="rect">
             <a:avLst/>
@@ -13935,9 +14635,20 @@
                 <a:latin typeface="Noto Sans"/>
                 <a:ea typeface="Noto Sans CJK JP"/>
                 <a:cs typeface="Noto Sans"/>
+              </a:rPr>
+              <a:t>[1] </a:t>
+            </a:r>
+            <a:r>
+              <a:rPr lang="ja-JP" sz="800" b="0">
+                <a:solidFill>
+                  <a:srgbClr val="626669"/>
+                </a:solidFill>
+                <a:latin typeface="Noto Sans"/>
+                <a:ea typeface="Noto Sans CJK JP"/>
+                <a:cs typeface="Noto Sans"/>
                 <a:hlinkClick r:id="rId2"/>
               </a:rPr>
-              <a:t>[1] https://cocodataset.org/#download</a:t>
+              <a:t>https://cocodataset.org/#download</a:t>
             </a:r>
           </a:p>
         </p:txBody>
@@ -14076,18 +14787,19 @@
         </p:nvSpPr>
         <p:spPr>
           <a:xfrm>
-            <a:off x="594360" y="1417320"/>
-            <a:ext cx="7955279" cy="2103120"/>
+            <a:off x="548640" y="1481328"/>
+            <a:ext cx="8046720" cy="1737360"/>
           </a:xfrm>
           <a:prstGeom prst="rect">
             <a:avLst/>
           </a:prstGeom>
           <a:solidFill>
-            <a:srgbClr val="F0F0EA"/>
+            <a:srgbClr val="EBEDEB"/>
           </a:solidFill>
           <a:ln>
             <a:noFill/>
           </a:ln>
+          <a:effectLst/>
         </p:spPr>
         <p:style>
           <a:lnRef idx="1">
@@ -14096,7 +14808,7 @@
           <a:fillRef idx="3">
             <a:schemeClr val="accent1"/>
           </a:fillRef>
-          <a:effectRef idx="2">
+          <a:effectRef idx="0">
             <a:schemeClr val="accent1"/>
           </a:effectRef>
           <a:fontRef idx="minor">
@@ -14119,8 +14831,8 @@
         </p:nvSpPr>
         <p:spPr>
           <a:xfrm>
-            <a:off x="777240" y="1691640"/>
-            <a:ext cx="7589520" cy="1737360"/>
+            <a:off x="548640" y="1481328"/>
+            <a:ext cx="8046720" cy="1737360"/>
           </a:xfrm>
           <a:prstGeom prst="rect">
             <a:avLst/>
@@ -14128,14 +14840,14 @@
           <a:noFill/>
         </p:spPr>
         <p:txBody>
-          <a:bodyPr wrap="square" anchor="t" lIns="0" rIns="0" tIns="0" bIns="0">
+          <a:bodyPr wrap="none" anchor="t" lIns="152400" rIns="152400" tIns="76200" bIns="114300">
             <a:spAutoFit/>
           </a:bodyPr>
           <a:lstStyle/>
           <a:p>
             <a:pPr algn="l">
               <a:lnSpc>
-                <a:spcPct val="115000"/>
+                <a:spcPct val="110000"/>
               </a:lnSpc>
               <a:spcBef>
                 <a:spcPts val="0"/>
@@ -14168,7 +14880,7 @@
           <a:p>
             <a:pPr algn="l">
               <a:lnSpc>
-                <a:spcPct val="115000"/>
+                <a:spcPct val="110000"/>
               </a:lnSpc>
               <a:spcBef>
                 <a:spcPts val="0"/>
@@ -14190,7 +14902,7 @@
           <a:p>
             <a:pPr algn="l">
               <a:lnSpc>
-                <a:spcPct val="115000"/>
+                <a:spcPct val="110000"/>
               </a:lnSpc>
               <a:spcBef>
                 <a:spcPts val="0"/>
@@ -14223,7 +14935,7 @@
           <a:p>
             <a:pPr algn="l">
               <a:lnSpc>
-                <a:spcPct val="115000"/>
+                <a:spcPct val="110000"/>
               </a:lnSpc>
               <a:spcBef>
                 <a:spcPts val="0"/>
@@ -14256,7 +14968,7 @@
           <a:p>
             <a:pPr algn="l">
               <a:lnSpc>
-                <a:spcPct val="115000"/>
+                <a:spcPct val="110000"/>
               </a:lnSpc>
               <a:spcBef>
                 <a:spcPts val="0"/>
@@ -14289,7 +15001,7 @@
           <a:p>
             <a:pPr algn="l">
               <a:lnSpc>
-                <a:spcPct val="115000"/>
+                <a:spcPct val="110000"/>
               </a:lnSpc>
               <a:spcBef>
                 <a:spcPts val="0"/>
@@ -14329,7 +15041,7 @@
         </p:nvSpPr>
         <p:spPr>
           <a:xfrm>
-            <a:off x="685800" y="3840480"/>
+            <a:off x="685800" y="3703320"/>
             <a:ext cx="7772400" cy="640080"/>
           </a:xfrm>
           <a:prstGeom prst="rect">
@@ -14427,9 +15139,20 @@
                 <a:latin typeface="Noto Sans"/>
                 <a:ea typeface="Noto Sans CJK JP"/>
                 <a:cs typeface="Noto Sans"/>
+              </a:rPr>
+              <a:t>[1] </a:t>
+            </a:r>
+            <a:r>
+              <a:rPr lang="ja-JP" sz="800" b="0">
+                <a:solidFill>
+                  <a:srgbClr val="626669"/>
+                </a:solidFill>
+                <a:latin typeface="Noto Sans"/>
+                <a:ea typeface="Noto Sans CJK JP"/>
+                <a:cs typeface="Noto Sans"/>
                 <a:hlinkClick r:id="rId2"/>
               </a:rPr>
-              <a:t>[1] https://github.com/cocodataset/cocoapi/blob/master/PythonAPI/pycocoDemo.ipynb</a:t>
+              <a:t>https://github.com/cocodataset/cocoapi/blob/master/PythonAPI/pycocoDemo.ipynb</a:t>
             </a:r>
           </a:p>
         </p:txBody>
@@ -14753,7 +15476,7 @@
                 <a:ea typeface="Noto Sans CJK JP"/>
                 <a:cs typeface="Noto Sans"/>
               </a:rPr>
-              <a:t>Appendixの構成</a:t>
+              <a:t/>
             </a:r>
           </a:p>
         </p:txBody>
@@ -14770,15 +15493,15 @@
         </p:nvSpPr>
         <p:spPr>
           <a:xfrm>
-            <a:off x="731520" y="1508760"/>
-            <a:ext cx="7772400" cy="3017520"/>
+            <a:off x="731520" y="1234440"/>
+            <a:ext cx="7772400" cy="3474720"/>
           </a:xfrm>
         </p:spPr>
         <p:txBody>
           <a:bodyPr wrap="square" anchor="t" tIns="91440" bIns="91440"/>
           <a:lstStyle/>
           <a:p>
-            <a:pPr algn="l" marL="457200" indent="-355600">
+            <a:pPr algn="l" marL="457200" indent="-355600" lvl="0">
               <a:lnSpc>
                 <a:spcPct val="115000"/>
               </a:lnSpc>
@@ -14788,6 +15511,8 @@
               <a:spcAft>
                 <a:spcPts val="1400"/>
               </a:spcAft>
+              <a:buSzPct val="100000"/>
+              <a:buFont typeface="Noto Sans CJK JP"/>
               <a:buAutoNum type="arabicPeriod"/>
               <a:defRPr lang="ja-JP" sz="2600" b="0">
                 <a:solidFill>
@@ -14811,7 +15536,7 @@
             </a:r>
           </a:p>
           <a:p>
-            <a:pPr algn="l" marL="457200" indent="-355600">
+            <a:pPr algn="l" marL="457200" indent="-355600" lvl="0">
               <a:lnSpc>
                 <a:spcPct val="115000"/>
               </a:lnSpc>
@@ -14821,6 +15546,8 @@
               <a:spcAft>
                 <a:spcPts val="1400"/>
               </a:spcAft>
+              <a:buSzPct val="100000"/>
+              <a:buFont typeface="Noto Sans CJK JP"/>
               <a:buAutoNum type="arabicPeriod"/>
               <a:defRPr lang="ja-JP" sz="2600" b="0">
                 <a:solidFill>
@@ -14844,7 +15571,7 @@
             </a:r>
           </a:p>
           <a:p>
-            <a:pPr algn="l" marL="457200" indent="-355600">
+            <a:pPr algn="l" marL="457200" indent="-355600" lvl="0">
               <a:lnSpc>
                 <a:spcPct val="115000"/>
               </a:lnSpc>
@@ -14854,6 +15581,8 @@
               <a:spcAft>
                 <a:spcPts val="1400"/>
               </a:spcAft>
+              <a:buSzPct val="100000"/>
+              <a:buFont typeface="Noto Sans CJK JP"/>
               <a:buAutoNum type="arabicPeriod"/>
               <a:defRPr lang="ja-JP" sz="2600" b="0">
                 <a:solidFill>
@@ -14877,7 +15606,7 @@
             </a:r>
           </a:p>
           <a:p>
-            <a:pPr algn="l" marL="457200" indent="-355600">
+            <a:pPr algn="l" marL="457200" indent="-355600" lvl="0">
               <a:lnSpc>
                 <a:spcPct val="115000"/>
               </a:lnSpc>
@@ -14887,6 +15616,8 @@
               <a:spcAft>
                 <a:spcPts val="1400"/>
               </a:spcAft>
+              <a:buSzPct val="100000"/>
+              <a:buFont typeface="Noto Sans CJK JP"/>
               <a:buAutoNum type="arabicPeriod"/>
               <a:defRPr lang="ja-JP" sz="2600" b="0">
                 <a:solidFill>
@@ -14910,7 +15641,7 @@
             </a:r>
           </a:p>
           <a:p>
-            <a:pPr algn="l" marL="457200" indent="-355600">
+            <a:pPr algn="l" marL="457200" indent="-355600" lvl="0">
               <a:lnSpc>
                 <a:spcPct val="115000"/>
               </a:lnSpc>
@@ -14920,6 +15651,8 @@
               <a:spcAft>
                 <a:spcPts val="1400"/>
               </a:spcAft>
+              <a:buSzPct val="100000"/>
+              <a:buFont typeface="Noto Sans CJK JP"/>
               <a:buAutoNum type="arabicPeriod"/>
               <a:defRPr lang="ja-JP" sz="2600" b="0">
                 <a:solidFill>
@@ -14993,7 +15726,7 @@
                 <a:ea typeface="Noto Sans CJK JP"/>
                 <a:cs typeface="Noto Sans"/>
               </a:rPr>
-              <a:t>構成</a:t>
+              <a:t>目次</a:t>
             </a:r>
           </a:p>
         </p:txBody>
@@ -15426,9 +16159,20 @@
                 <a:latin typeface="Noto Sans"/>
                 <a:ea typeface="Noto Sans CJK JP"/>
                 <a:cs typeface="Noto Sans"/>
+              </a:rPr>
+              <a:t>[1] </a:t>
+            </a:r>
+            <a:r>
+              <a:rPr lang="ja-JP" sz="800" b="0">
+                <a:solidFill>
+                  <a:srgbClr val="626669"/>
+                </a:solidFill>
+                <a:latin typeface="Noto Sans"/>
+                <a:ea typeface="Noto Sans CJK JP"/>
+                <a:cs typeface="Noto Sans"/>
                 <a:hlinkClick r:id="rId2"/>
               </a:rPr>
-              <a:t>[1] https://arxiv.org/abs/1405.0312</a:t>
+              <a:t>https://arxiv.org/abs/1405.0312</a:t>
             </a:r>
           </a:p>
           <a:p>
@@ -15601,19 +16345,17 @@
           <p:nvPr/>
         </p:nvGraphicFramePr>
         <p:xfrm>
-          <a:off x="594360" y="1417320"/>
-          <a:ext cx="7955280" cy="2377440"/>
+          <a:off x="548640" y="1417320"/>
+          <a:ext cx="8046720" cy="2377440"/>
         </p:xfrm>
         <a:graphic>
           <a:graphicData uri="http://schemas.openxmlformats.org/drawingml/2006/table">
             <a:tbl>
-              <a:tblPr firstRow="1" bandRow="1">
-                <a:tableStyleId>{5C22544A-7EE6-4342-B048-85BDC9FD1C3A}</a:tableStyleId>
-              </a:tblPr>
+              <a:tblPr firstRow="0" bandRow="0" lastRow="0" firstCol="0" lastCol="0" bandCol="0"/>
               <a:tblGrid>
                 <a:gridCol w="2834640"/>
                 <a:gridCol w="3566160"/>
-                <a:gridCol w="1554480"/>
+                <a:gridCol w="1645920"/>
               </a:tblGrid>
               <a:tr h="475488">
                 <a:tc>
@@ -15623,7 +16365,7 @@
                     <a:p>
                       <a:pPr algn="l">
                         <a:lnSpc>
-                          <a:spcPct val="115000"/>
+                          <a:spcPct val="110000"/>
                         </a:lnSpc>
                         <a:spcBef>
                           <a:spcPts val="0"/>
@@ -15632,9 +16374,9 @@
                           <a:spcPts val="0"/>
                         </a:spcAft>
                         <a:buNone/>
-                        <a:defRPr lang="ja-JP" sz="2000" b="1">
+                        <a:defRPr lang="ja-JP" sz="2000" b="0">
                           <a:solidFill>
-                            <a:srgbClr val="FFFEF8"/>
+                            <a:srgbClr val="303437"/>
                           </a:solidFill>
                           <a:latin typeface="Noto Sans"/>
                           <a:ea typeface="Noto Sans CJK JP"/>
@@ -15642,9 +16384,9 @@
                         </a:defRPr>
                       </a:pPr>
                       <a:r>
-                        <a:rPr lang="ja-JP" sz="2000" b="1">
+                        <a:rPr lang="ja-JP" sz="2000" b="0">
                           <a:solidFill>
-                            <a:srgbClr val="FFFEF8"/>
+                            <a:srgbClr val="303437"/>
                           </a:solidFill>
                           <a:latin typeface="Noto Sans"/>
                           <a:ea typeface="Noto Sans CJK JP"/>
@@ -15654,9 +16396,25 @@
                       </a:r>
                     </a:p>
                   </a:txBody>
-                  <a:tcPr marL="88900" marR="88900" marT="76200" marB="76200" anchor="ctr">
+                  <a:tcPr marL="76200" marR="76200" marT="38100" marB="38100" anchor="ctr">
+                    <a:lnL w="0">
+                      <a:noFill/>
+                    </a:lnL>
+                    <a:lnR w="0">
+                      <a:noFill/>
+                    </a:lnR>
+                    <a:lnT w="10160">
+                      <a:solidFill>
+                        <a:srgbClr val="626669"/>
+                      </a:solidFill>
+                    </a:lnT>
+                    <a:lnB w="10160">
+                      <a:solidFill>
+                        <a:srgbClr val="626669"/>
+                      </a:solidFill>
+                    </a:lnB>
                     <a:solidFill>
-                      <a:srgbClr val="2C9100"/>
+                      <a:srgbClr val="FFFEF8"/>
                     </a:solidFill>
                   </a:tcPr>
                 </a:tc>
@@ -15665,9 +16423,9 @@
                     <a:bodyPr/>
                     <a:lstStyle/>
                     <a:p>
-                      <a:pPr algn="r">
+                      <a:pPr algn="l">
                         <a:lnSpc>
-                          <a:spcPct val="115000"/>
+                          <a:spcPct val="110000"/>
                         </a:lnSpc>
                         <a:spcBef>
                           <a:spcPts val="0"/>
@@ -15676,9 +16434,9 @@
                           <a:spcPts val="0"/>
                         </a:spcAft>
                         <a:buNone/>
-                        <a:defRPr lang="ja-JP" sz="2000" b="1">
+                        <a:defRPr lang="ja-JP" sz="2000" b="0">
                           <a:solidFill>
-                            <a:srgbClr val="FFFEF8"/>
+                            <a:srgbClr val="303437"/>
                           </a:solidFill>
                           <a:latin typeface="Noto Sans"/>
                           <a:ea typeface="Noto Sans CJK JP"/>
@@ -15686,9 +16444,9 @@
                         </a:defRPr>
                       </a:pPr>
                       <a:r>
-                        <a:rPr lang="ja-JP" sz="2000" b="1">
+                        <a:rPr lang="ja-JP" sz="2000" b="0">
                           <a:solidFill>
-                            <a:srgbClr val="FFFEF8"/>
+                            <a:srgbClr val="303437"/>
                           </a:solidFill>
                           <a:latin typeface="Noto Sans"/>
                           <a:ea typeface="Noto Sans CJK JP"/>
@@ -15698,9 +16456,25 @@
                       </a:r>
                     </a:p>
                   </a:txBody>
-                  <a:tcPr marL="88900" marR="88900" marT="76200" marB="76200" anchor="ctr">
+                  <a:tcPr marL="76200" marR="76200" marT="38100" marB="38100" anchor="ctr">
+                    <a:lnL w="0">
+                      <a:noFill/>
+                    </a:lnL>
+                    <a:lnR w="0">
+                      <a:noFill/>
+                    </a:lnR>
+                    <a:lnT w="10160">
+                      <a:solidFill>
+                        <a:srgbClr val="626669"/>
+                      </a:solidFill>
+                    </a:lnT>
+                    <a:lnB w="10160">
+                      <a:solidFill>
+                        <a:srgbClr val="626669"/>
+                      </a:solidFill>
+                    </a:lnB>
                     <a:solidFill>
-                      <a:srgbClr val="2C9100"/>
+                      <a:srgbClr val="FFFEF8"/>
                     </a:solidFill>
                   </a:tcPr>
                 </a:tc>
@@ -15709,9 +16483,9 @@
                     <a:bodyPr/>
                     <a:lstStyle/>
                     <a:p>
-                      <a:pPr algn="r">
+                      <a:pPr algn="l">
                         <a:lnSpc>
-                          <a:spcPct val="115000"/>
+                          <a:spcPct val="110000"/>
                         </a:lnSpc>
                         <a:spcBef>
                           <a:spcPts val="0"/>
@@ -15720,9 +16494,9 @@
                           <a:spcPts val="0"/>
                         </a:spcAft>
                         <a:buNone/>
-                        <a:defRPr lang="ja-JP" sz="2000" b="1">
+                        <a:defRPr lang="ja-JP" sz="2000" b="0">
                           <a:solidFill>
-                            <a:srgbClr val="FFFEF8"/>
+                            <a:srgbClr val="303437"/>
                           </a:solidFill>
                           <a:latin typeface="Noto Sans"/>
                           <a:ea typeface="Noto Sans CJK JP"/>
@@ -15730,9 +16504,9 @@
                         </a:defRPr>
                       </a:pPr>
                       <a:r>
-                        <a:rPr lang="ja-JP" sz="2000" b="1">
+                        <a:rPr lang="ja-JP" sz="2000" b="0">
                           <a:solidFill>
-                            <a:srgbClr val="FFFEF8"/>
+                            <a:srgbClr val="303437"/>
                           </a:solidFill>
                           <a:latin typeface="Noto Sans"/>
                           <a:ea typeface="Noto Sans CJK JP"/>
@@ -15742,9 +16516,25 @@
                       </a:r>
                     </a:p>
                   </a:txBody>
-                  <a:tcPr marL="88900" marR="88900" marT="76200" marB="76200" anchor="ctr">
+                  <a:tcPr marL="76200" marR="76200" marT="38100" marB="38100" anchor="ctr">
+                    <a:lnL w="0">
+                      <a:noFill/>
+                    </a:lnL>
+                    <a:lnR w="0">
+                      <a:noFill/>
+                    </a:lnR>
+                    <a:lnT w="10160">
+                      <a:solidFill>
+                        <a:srgbClr val="626669"/>
+                      </a:solidFill>
+                    </a:lnT>
+                    <a:lnB w="10160">
+                      <a:solidFill>
+                        <a:srgbClr val="626669"/>
+                      </a:solidFill>
+                    </a:lnB>
                     <a:solidFill>
-                      <a:srgbClr val="2C9100"/>
+                      <a:srgbClr val="FFFEF8"/>
                     </a:solidFill>
                   </a:tcPr>
                 </a:tc>
@@ -15757,7 +16547,7 @@
                     <a:p>
                       <a:pPr algn="l">
                         <a:lnSpc>
-                          <a:spcPct val="115000"/>
+                          <a:spcPct val="110000"/>
                         </a:lnSpc>
                         <a:spcBef>
                           <a:spcPts val="0"/>
@@ -15788,7 +16578,19 @@
                       </a:r>
                     </a:p>
                   </a:txBody>
-                  <a:tcPr marL="88900" marR="88900" marT="76200" marB="76200" anchor="ctr">
+                  <a:tcPr marL="76200" marR="76200" marT="38100" marB="38100" anchor="ctr">
+                    <a:lnL w="0">
+                      <a:noFill/>
+                    </a:lnL>
+                    <a:lnR w="0">
+                      <a:noFill/>
+                    </a:lnR>
+                    <a:lnT w="0">
+                      <a:noFill/>
+                    </a:lnT>
+                    <a:lnB w="0">
+                      <a:noFill/>
+                    </a:lnB>
                     <a:solidFill>
                       <a:srgbClr val="FFFEF8"/>
                     </a:solidFill>
@@ -15799,9 +16601,9 @@
                     <a:bodyPr/>
                     <a:lstStyle/>
                     <a:p>
-                      <a:pPr algn="r">
+                      <a:pPr algn="l">
                         <a:lnSpc>
-                          <a:spcPct val="115000"/>
+                          <a:spcPct val="110000"/>
                         </a:lnSpc>
                         <a:spcBef>
                           <a:spcPts val="0"/>
@@ -15832,7 +16634,19 @@
                       </a:r>
                     </a:p>
                   </a:txBody>
-                  <a:tcPr marL="88900" marR="88900" marT="76200" marB="76200" anchor="ctr">
+                  <a:tcPr marL="76200" marR="76200" marT="38100" marB="38100" anchor="ctr">
+                    <a:lnL w="0">
+                      <a:noFill/>
+                    </a:lnL>
+                    <a:lnR w="0">
+                      <a:noFill/>
+                    </a:lnR>
+                    <a:lnT w="0">
+                      <a:noFill/>
+                    </a:lnT>
+                    <a:lnB w="0">
+                      <a:noFill/>
+                    </a:lnB>
                     <a:solidFill>
                       <a:srgbClr val="FFFEF8"/>
                     </a:solidFill>
@@ -15843,9 +16657,9 @@
                     <a:bodyPr/>
                     <a:lstStyle/>
                     <a:p>
-                      <a:pPr algn="r">
+                      <a:pPr algn="l">
                         <a:lnSpc>
-                          <a:spcPct val="115000"/>
+                          <a:spcPct val="110000"/>
                         </a:lnSpc>
                         <a:spcBef>
                           <a:spcPts val="0"/>
@@ -15876,7 +16690,19 @@
                       </a:r>
                     </a:p>
                   </a:txBody>
-                  <a:tcPr marL="88900" marR="88900" marT="76200" marB="76200" anchor="ctr">
+                  <a:tcPr marL="76200" marR="76200" marT="38100" marB="38100" anchor="ctr">
+                    <a:lnL w="0">
+                      <a:noFill/>
+                    </a:lnL>
+                    <a:lnR w="0">
+                      <a:noFill/>
+                    </a:lnR>
+                    <a:lnT w="0">
+                      <a:noFill/>
+                    </a:lnT>
+                    <a:lnB w="0">
+                      <a:noFill/>
+                    </a:lnB>
                     <a:solidFill>
                       <a:srgbClr val="FFFEF8"/>
                     </a:solidFill>
@@ -15891,7 +16717,7 @@
                     <a:p>
                       <a:pPr algn="l">
                         <a:lnSpc>
-                          <a:spcPct val="115000"/>
+                          <a:spcPct val="110000"/>
                         </a:lnSpc>
                         <a:spcBef>
                           <a:spcPts val="0"/>
@@ -15922,7 +16748,19 @@
                       </a:r>
                     </a:p>
                   </a:txBody>
-                  <a:tcPr marL="88900" marR="88900" marT="76200" marB="76200" anchor="ctr">
+                  <a:tcPr marL="76200" marR="76200" marT="38100" marB="38100" anchor="ctr">
+                    <a:lnL w="0">
+                      <a:noFill/>
+                    </a:lnL>
+                    <a:lnR w="0">
+                      <a:noFill/>
+                    </a:lnR>
+                    <a:lnT w="0">
+                      <a:noFill/>
+                    </a:lnT>
+                    <a:lnB w="0">
+                      <a:noFill/>
+                    </a:lnB>
                     <a:solidFill>
                       <a:srgbClr val="FFFEF8"/>
                     </a:solidFill>
@@ -15933,9 +16771,9 @@
                     <a:bodyPr/>
                     <a:lstStyle/>
                     <a:p>
-                      <a:pPr algn="r">
+                      <a:pPr algn="l">
                         <a:lnSpc>
-                          <a:spcPct val="115000"/>
+                          <a:spcPct val="110000"/>
                         </a:lnSpc>
                         <a:spcBef>
                           <a:spcPts val="0"/>
@@ -15966,7 +16804,19 @@
                       </a:r>
                     </a:p>
                   </a:txBody>
-                  <a:tcPr marL="88900" marR="88900" marT="76200" marB="76200" anchor="ctr">
+                  <a:tcPr marL="76200" marR="76200" marT="38100" marB="38100" anchor="ctr">
+                    <a:lnL w="0">
+                      <a:noFill/>
+                    </a:lnL>
+                    <a:lnR w="0">
+                      <a:noFill/>
+                    </a:lnR>
+                    <a:lnT w="0">
+                      <a:noFill/>
+                    </a:lnT>
+                    <a:lnB w="0">
+                      <a:noFill/>
+                    </a:lnB>
                     <a:solidFill>
                       <a:srgbClr val="FFFEF8"/>
                     </a:solidFill>
@@ -15977,9 +16827,9 @@
                     <a:bodyPr/>
                     <a:lstStyle/>
                     <a:p>
-                      <a:pPr algn="r">
+                      <a:pPr algn="l">
                         <a:lnSpc>
-                          <a:spcPct val="115000"/>
+                          <a:spcPct val="110000"/>
                         </a:lnSpc>
                         <a:spcBef>
                           <a:spcPts val="0"/>
@@ -16010,7 +16860,19 @@
                       </a:r>
                     </a:p>
                   </a:txBody>
-                  <a:tcPr marL="88900" marR="88900" marT="76200" marB="76200" anchor="ctr">
+                  <a:tcPr marL="76200" marR="76200" marT="38100" marB="38100" anchor="ctr">
+                    <a:lnL w="0">
+                      <a:noFill/>
+                    </a:lnL>
+                    <a:lnR w="0">
+                      <a:noFill/>
+                    </a:lnR>
+                    <a:lnT w="0">
+                      <a:noFill/>
+                    </a:lnT>
+                    <a:lnB w="0">
+                      <a:noFill/>
+                    </a:lnB>
                     <a:solidFill>
                       <a:srgbClr val="FFFEF8"/>
                     </a:solidFill>
@@ -16025,7 +16887,7 @@
                     <a:p>
                       <a:pPr algn="l">
                         <a:lnSpc>
-                          <a:spcPct val="115000"/>
+                          <a:spcPct val="110000"/>
                         </a:lnSpc>
                         <a:spcBef>
                           <a:spcPts val="0"/>
@@ -16056,7 +16918,19 @@
                       </a:r>
                     </a:p>
                   </a:txBody>
-                  <a:tcPr marL="88900" marR="88900" marT="76200" marB="76200" anchor="ctr">
+                  <a:tcPr marL="76200" marR="76200" marT="38100" marB="38100" anchor="ctr">
+                    <a:lnL w="0">
+                      <a:noFill/>
+                    </a:lnL>
+                    <a:lnR w="0">
+                      <a:noFill/>
+                    </a:lnR>
+                    <a:lnT w="0">
+                      <a:noFill/>
+                    </a:lnT>
+                    <a:lnB w="0">
+                      <a:noFill/>
+                    </a:lnB>
                     <a:solidFill>
                       <a:srgbClr val="FFFEF8"/>
                     </a:solidFill>
@@ -16067,9 +16941,9 @@
                     <a:bodyPr/>
                     <a:lstStyle/>
                     <a:p>
-                      <a:pPr algn="r">
+                      <a:pPr algn="l">
                         <a:lnSpc>
-                          <a:spcPct val="115000"/>
+                          <a:spcPct val="110000"/>
                         </a:lnSpc>
                         <a:spcBef>
                           <a:spcPts val="0"/>
@@ -16100,7 +16974,19 @@
                       </a:r>
                     </a:p>
                   </a:txBody>
-                  <a:tcPr marL="88900" marR="88900" marT="76200" marB="76200" anchor="ctr">
+                  <a:tcPr marL="76200" marR="76200" marT="38100" marB="38100" anchor="ctr">
+                    <a:lnL w="0">
+                      <a:noFill/>
+                    </a:lnL>
+                    <a:lnR w="0">
+                      <a:noFill/>
+                    </a:lnR>
+                    <a:lnT w="0">
+                      <a:noFill/>
+                    </a:lnT>
+                    <a:lnB w="0">
+                      <a:noFill/>
+                    </a:lnB>
                     <a:solidFill>
                       <a:srgbClr val="FFFEF8"/>
                     </a:solidFill>
@@ -16111,9 +16997,9 @@
                     <a:bodyPr/>
                     <a:lstStyle/>
                     <a:p>
-                      <a:pPr algn="r">
+                      <a:pPr algn="l">
                         <a:lnSpc>
-                          <a:spcPct val="115000"/>
+                          <a:spcPct val="110000"/>
                         </a:lnSpc>
                         <a:spcBef>
                           <a:spcPts val="0"/>
@@ -16144,7 +17030,19 @@
                       </a:r>
                     </a:p>
                   </a:txBody>
-                  <a:tcPr marL="88900" marR="88900" marT="76200" marB="76200" anchor="ctr">
+                  <a:tcPr marL="76200" marR="76200" marT="38100" marB="38100" anchor="ctr">
+                    <a:lnL w="0">
+                      <a:noFill/>
+                    </a:lnL>
+                    <a:lnR w="0">
+                      <a:noFill/>
+                    </a:lnR>
+                    <a:lnT w="0">
+                      <a:noFill/>
+                    </a:lnT>
+                    <a:lnB w="0">
+                      <a:noFill/>
+                    </a:lnB>
                     <a:solidFill>
                       <a:srgbClr val="FFFEF8"/>
                     </a:solidFill>
@@ -16159,7 +17057,7 @@
                     <a:p>
                       <a:pPr algn="l">
                         <a:lnSpc>
-                          <a:spcPct val="115000"/>
+                          <a:spcPct val="110000"/>
                         </a:lnSpc>
                         <a:spcBef>
                           <a:spcPts val="0"/>
@@ -16190,7 +17088,21 @@
                       </a:r>
                     </a:p>
                   </a:txBody>
-                  <a:tcPr marL="88900" marR="88900" marT="76200" marB="76200" anchor="ctr">
+                  <a:tcPr marL="76200" marR="76200" marT="38100" marB="38100" anchor="ctr">
+                    <a:lnL w="0">
+                      <a:noFill/>
+                    </a:lnL>
+                    <a:lnR w="0">
+                      <a:noFill/>
+                    </a:lnR>
+                    <a:lnT w="0">
+                      <a:noFill/>
+                    </a:lnT>
+                    <a:lnB w="10160">
+                      <a:solidFill>
+                        <a:srgbClr val="626669"/>
+                      </a:solidFill>
+                    </a:lnB>
                     <a:solidFill>
                       <a:srgbClr val="FFFEF8"/>
                     </a:solidFill>
@@ -16201,9 +17113,9 @@
                     <a:bodyPr/>
                     <a:lstStyle/>
                     <a:p>
-                      <a:pPr algn="r">
+                      <a:pPr algn="l">
                         <a:lnSpc>
-                          <a:spcPct val="115000"/>
+                          <a:spcPct val="110000"/>
                         </a:lnSpc>
                         <a:spcBef>
                           <a:spcPts val="0"/>
@@ -16234,7 +17146,21 @@
                       </a:r>
                     </a:p>
                   </a:txBody>
-                  <a:tcPr marL="88900" marR="88900" marT="76200" marB="76200" anchor="ctr">
+                  <a:tcPr marL="76200" marR="76200" marT="38100" marB="38100" anchor="ctr">
+                    <a:lnL w="0">
+                      <a:noFill/>
+                    </a:lnL>
+                    <a:lnR w="0">
+                      <a:noFill/>
+                    </a:lnR>
+                    <a:lnT w="0">
+                      <a:noFill/>
+                    </a:lnT>
+                    <a:lnB w="10160">
+                      <a:solidFill>
+                        <a:srgbClr val="626669"/>
+                      </a:solidFill>
+                    </a:lnB>
                     <a:solidFill>
                       <a:srgbClr val="FFFEF8"/>
                     </a:solidFill>
@@ -16245,9 +17171,9 @@
                     <a:bodyPr/>
                     <a:lstStyle/>
                     <a:p>
-                      <a:pPr algn="r">
+                      <a:pPr algn="l">
                         <a:lnSpc>
-                          <a:spcPct val="115000"/>
+                          <a:spcPct val="110000"/>
                         </a:lnSpc>
                         <a:spcBef>
                           <a:spcPts val="0"/>
@@ -16278,7 +17204,21 @@
                       </a:r>
                     </a:p>
                   </a:txBody>
-                  <a:tcPr marL="88900" marR="88900" marT="76200" marB="76200" anchor="ctr">
+                  <a:tcPr marL="76200" marR="76200" marT="38100" marB="38100" anchor="ctr">
+                    <a:lnL w="0">
+                      <a:noFill/>
+                    </a:lnL>
+                    <a:lnR w="0">
+                      <a:noFill/>
+                    </a:lnR>
+                    <a:lnT w="0">
+                      <a:noFill/>
+                    </a:lnT>
+                    <a:lnB w="10160">
+                      <a:solidFill>
+                        <a:srgbClr val="626669"/>
+                      </a:solidFill>
+                    </a:lnB>
                     <a:solidFill>
                       <a:srgbClr val="FFFEF8"/>
                     </a:solidFill>
@@ -16297,8 +17237,8 @@
         </p:nvSpPr>
         <p:spPr>
           <a:xfrm>
-            <a:off x="658368" y="3931920"/>
-            <a:ext cx="7772400" cy="914400"/>
+            <a:off x="594360" y="3959860"/>
+            <a:ext cx="7955279" cy="713232"/>
           </a:xfrm>
           <a:prstGeom prst="rect">
             <a:avLst/>
@@ -16395,9 +17335,20 @@
                 <a:latin typeface="Noto Sans"/>
                 <a:ea typeface="Noto Sans CJK JP"/>
                 <a:cs typeface="Noto Sans"/>
+              </a:rPr>
+              <a:t>[1] </a:t>
+            </a:r>
+            <a:r>
+              <a:rPr lang="ja-JP" sz="800" b="0">
+                <a:solidFill>
+                  <a:srgbClr val="626669"/>
+                </a:solidFill>
+                <a:latin typeface="Noto Sans"/>
+                <a:ea typeface="Noto Sans CJK JP"/>
+                <a:cs typeface="Noto Sans"/>
                 <a:hlinkClick r:id="rId2"/>
               </a:rPr>
-              <a:t>[1] https://cocodataset.org/#panoptic-eval</a:t>
+              <a:t>https://cocodataset.org/#panoptic-eval</a:t>
             </a:r>
           </a:p>
           <a:p>
@@ -16429,9 +17380,20 @@
                 <a:latin typeface="Noto Sans"/>
                 <a:ea typeface="Noto Sans CJK JP"/>
                 <a:cs typeface="Noto Sans"/>
+              </a:rPr>
+              <a:t>[2] </a:t>
+            </a:r>
+            <a:r>
+              <a:rPr lang="ja-JP" sz="800" b="0">
+                <a:solidFill>
+                  <a:srgbClr val="626669"/>
+                </a:solidFill>
+                <a:latin typeface="Noto Sans"/>
+                <a:ea typeface="Noto Sans CJK JP"/>
+                <a:cs typeface="Noto Sans"/>
                 <a:hlinkClick r:id="rId3"/>
               </a:rPr>
-              <a:t>[2] https://github.com/nightrome/cocostuff</a:t>
+              <a:t>https://github.com/nightrome/cocostuff</a:t>
             </a:r>
           </a:p>
         </p:txBody>
@@ -16738,9 +17700,20 @@
                 <a:latin typeface="Noto Sans"/>
                 <a:ea typeface="Noto Sans CJK JP"/>
                 <a:cs typeface="Noto Sans"/>
+              </a:rPr>
+              <a:t>[1] </a:t>
+            </a:r>
+            <a:r>
+              <a:rPr lang="ja-JP" sz="800" b="0">
+                <a:solidFill>
+                  <a:srgbClr val="626669"/>
+                </a:solidFill>
+                <a:latin typeface="Noto Sans"/>
+                <a:ea typeface="Noto Sans CJK JP"/>
+                <a:cs typeface="Noto Sans"/>
                 <a:hlinkClick r:id="rId2"/>
               </a:rPr>
-              <a:t>[1] https://github.com/cocodataset/cocoapi/blob/master/common/maskApi.c</a:t>
+              <a:t>https://github.com/cocodataset/cocoapi/blob/master/common/maskApi.c</a:t>
             </a:r>
           </a:p>
           <a:p>
@@ -17081,9 +18054,20 @@
                 <a:latin typeface="Noto Sans"/>
                 <a:ea typeface="Noto Sans CJK JP"/>
                 <a:cs typeface="Noto Sans"/>
+              </a:rPr>
+              <a:t>[1] </a:t>
+            </a:r>
+            <a:r>
+              <a:rPr lang="ja-JP" sz="800" b="0">
+                <a:solidFill>
+                  <a:srgbClr val="626669"/>
+                </a:solidFill>
+                <a:latin typeface="Noto Sans"/>
+                <a:ea typeface="Noto Sans CJK JP"/>
+                <a:cs typeface="Noto Sans"/>
                 <a:hlinkClick r:id="rId2"/>
               </a:rPr>
-              <a:t>[1] https://github.com/cocodataset/cocoapi/blob/master/PythonAPI/pycocotools/cocoeval.py</a:t>
+              <a:t>https://github.com/cocodataset/cocoapi/blob/master/PythonAPI/pycocotools/cocoeval.py</a:t>
             </a:r>
           </a:p>
         </p:txBody>
@@ -17390,9 +18374,31 @@
                 <a:latin typeface="Noto Sans"/>
                 <a:ea typeface="Noto Sans CJK JP"/>
                 <a:cs typeface="Noto Sans"/>
+              </a:rPr>
+              <a:t>[1] </a:t>
+            </a:r>
+            <a:r>
+              <a:rPr lang="ja-JP" sz="800" b="0">
+                <a:solidFill>
+                  <a:srgbClr val="626669"/>
+                </a:solidFill>
+                <a:latin typeface="Noto Sans"/>
+                <a:ea typeface="Noto Sans CJK JP"/>
+                <a:cs typeface="Noto Sans"/>
                 <a:hlinkClick r:id="rId2"/>
               </a:rPr>
-              <a:t>[1] https://github.com/cocodataset/panopticapi/blob/master/panopticapi/evaluation.py / 数値は計算説明の例</a:t>
+              <a:t>https://github.com/cocodataset/panopticapi/blob/master/panopticapi/evaluation.py</a:t>
+            </a:r>
+            <a:r>
+              <a:rPr lang="ja-JP" sz="800" b="0">
+                <a:solidFill>
+                  <a:srgbClr val="626669"/>
+                </a:solidFill>
+                <a:latin typeface="Noto Sans"/>
+                <a:ea typeface="Noto Sans CJK JP"/>
+                <a:cs typeface="Noto Sans"/>
+              </a:rPr>
+              <a:t> / 数値は計算説明の例</a:t>
             </a:r>
           </a:p>
         </p:txBody>
@@ -17699,9 +18705,20 @@
                 <a:latin typeface="Noto Sans"/>
                 <a:ea typeface="Noto Sans CJK JP"/>
                 <a:cs typeface="Noto Sans"/>
+              </a:rPr>
+              <a:t>[1] </a:t>
+            </a:r>
+            <a:r>
+              <a:rPr lang="ja-JP" sz="800" b="0">
+                <a:solidFill>
+                  <a:srgbClr val="626669"/>
+                </a:solidFill>
+                <a:latin typeface="Noto Sans"/>
+                <a:ea typeface="Noto Sans CJK JP"/>
+                <a:cs typeface="Noto Sans"/>
                 <a:hlinkClick r:id="rId2"/>
               </a:rPr>
-              <a:t>[1] https://github.com/ultralytics/assets/releases/download/v0.0.0/coco128-seg.zip</a:t>
+              <a:t>https://github.com/ultralytics/assets/releases/download/v0.0.0/coco128-seg.zip</a:t>
             </a:r>
           </a:p>
         </p:txBody>
@@ -17906,9 +18923,20 @@
                 <a:latin typeface="Noto Sans"/>
                 <a:ea typeface="Noto Sans CJK JP"/>
                 <a:cs typeface="Noto Sans"/>
+              </a:rPr>
+              <a:t>[1] </a:t>
+            </a:r>
+            <a:r>
+              <a:rPr lang="ja-JP" sz="800" b="0">
+                <a:solidFill>
+                  <a:srgbClr val="626669"/>
+                </a:solidFill>
+                <a:latin typeface="Noto Sans"/>
+                <a:ea typeface="Noto Sans CJK JP"/>
+                <a:cs typeface="Noto Sans"/>
                 <a:hlinkClick r:id="rId3"/>
               </a:rPr>
-              <a:t>[1] https://github.com/ultralytics/assets/releases/download/v0.0.0/coco128-seg.zip</a:t>
+              <a:t>https://github.com/ultralytics/assets/releases/download/v0.0.0/coco128-seg.zip</a:t>
             </a:r>
           </a:p>
           <a:p>
@@ -18081,18 +19109,16 @@
           <p:nvPr/>
         </p:nvGraphicFramePr>
         <p:xfrm>
-          <a:off x="594360" y="1417320"/>
-          <a:ext cx="7955280" cy="2377440"/>
+          <a:off x="548640" y="1417320"/>
+          <a:ext cx="8046720" cy="2377440"/>
         </p:xfrm>
         <a:graphic>
           <a:graphicData uri="http://schemas.openxmlformats.org/drawingml/2006/table">
             <a:tbl>
-              <a:tblPr firstRow="1" bandRow="1">
-                <a:tableStyleId>{5C22544A-7EE6-4342-B048-85BDC9FD1C3A}</a:tableStyleId>
-              </a:tblPr>
+              <a:tblPr firstRow="0" bandRow="0" lastRow="0" firstCol="0" lastCol="0" bandCol="0"/>
               <a:tblGrid>
                 <a:gridCol w="4754880"/>
-                <a:gridCol w="3200400"/>
+                <a:gridCol w="3291840"/>
               </a:tblGrid>
               <a:tr h="475488">
                 <a:tc>
@@ -18102,7 +19128,7 @@
                     <a:p>
                       <a:pPr algn="l">
                         <a:lnSpc>
-                          <a:spcPct val="115000"/>
+                          <a:spcPct val="110000"/>
                         </a:lnSpc>
                         <a:spcBef>
                           <a:spcPts val="0"/>
@@ -18111,9 +19137,9 @@
                           <a:spcPts val="0"/>
                         </a:spcAft>
                         <a:buNone/>
-                        <a:defRPr lang="ja-JP" sz="2100" b="1">
+                        <a:defRPr lang="ja-JP" sz="2100" b="0">
                           <a:solidFill>
-                            <a:srgbClr val="FFFEF8"/>
+                            <a:srgbClr val="303437"/>
                           </a:solidFill>
                           <a:latin typeface="Noto Sans"/>
                           <a:ea typeface="Noto Sans CJK JP"/>
@@ -18121,9 +19147,9 @@
                         </a:defRPr>
                       </a:pPr>
                       <a:r>
-                        <a:rPr lang="ja-JP" sz="2100" b="1">
+                        <a:rPr lang="ja-JP" sz="2100" b="0">
                           <a:solidFill>
-                            <a:srgbClr val="FFFEF8"/>
+                            <a:srgbClr val="303437"/>
                           </a:solidFill>
                           <a:latin typeface="Noto Sans"/>
                           <a:ea typeface="Noto Sans CJK JP"/>
@@ -18133,9 +19159,25 @@
                       </a:r>
                     </a:p>
                   </a:txBody>
-                  <a:tcPr marL="88900" marR="88900" marT="76200" marB="76200" anchor="ctr">
+                  <a:tcPr marL="76200" marR="76200" marT="38100" marB="38100" anchor="ctr">
+                    <a:lnL w="0">
+                      <a:noFill/>
+                    </a:lnL>
+                    <a:lnR w="0">
+                      <a:noFill/>
+                    </a:lnR>
+                    <a:lnT w="10160">
+                      <a:solidFill>
+                        <a:srgbClr val="626669"/>
+                      </a:solidFill>
+                    </a:lnT>
+                    <a:lnB w="10160">
+                      <a:solidFill>
+                        <a:srgbClr val="626669"/>
+                      </a:solidFill>
+                    </a:lnB>
                     <a:solidFill>
-                      <a:srgbClr val="2C9100"/>
+                      <a:srgbClr val="FFFEF8"/>
                     </a:solidFill>
                   </a:tcPr>
                 </a:tc>
@@ -18146,7 +19188,7 @@
                     <a:p>
                       <a:pPr algn="r">
                         <a:lnSpc>
-                          <a:spcPct val="115000"/>
+                          <a:spcPct val="110000"/>
                         </a:lnSpc>
                         <a:spcBef>
                           <a:spcPts val="0"/>
@@ -18155,9 +19197,9 @@
                           <a:spcPts val="0"/>
                         </a:spcAft>
                         <a:buNone/>
-                        <a:defRPr lang="ja-JP" sz="2100" b="1">
+                        <a:defRPr lang="ja-JP" sz="2100" b="0">
                           <a:solidFill>
-                            <a:srgbClr val="FFFEF8"/>
+                            <a:srgbClr val="303437"/>
                           </a:solidFill>
                           <a:latin typeface="Noto Sans"/>
                           <a:ea typeface="Noto Sans CJK JP"/>
@@ -18165,9 +19207,9 @@
                         </a:defRPr>
                       </a:pPr>
                       <a:r>
-                        <a:rPr lang="ja-JP" sz="2100" b="1">
+                        <a:rPr lang="ja-JP" sz="2100" b="0">
                           <a:solidFill>
-                            <a:srgbClr val="FFFEF8"/>
+                            <a:srgbClr val="303437"/>
                           </a:solidFill>
                           <a:latin typeface="Noto Sans"/>
                           <a:ea typeface="Noto Sans CJK JP"/>
@@ -18177,9 +19219,25 @@
                       </a:r>
                     </a:p>
                   </a:txBody>
-                  <a:tcPr marL="88900" marR="88900" marT="76200" marB="76200" anchor="ctr">
+                  <a:tcPr marL="76200" marR="76200" marT="38100" marB="38100" anchor="ctr">
+                    <a:lnL w="0">
+                      <a:noFill/>
+                    </a:lnL>
+                    <a:lnR w="0">
+                      <a:noFill/>
+                    </a:lnR>
+                    <a:lnT w="10160">
+                      <a:solidFill>
+                        <a:srgbClr val="626669"/>
+                      </a:solidFill>
+                    </a:lnT>
+                    <a:lnB w="10160">
+                      <a:solidFill>
+                        <a:srgbClr val="626669"/>
+                      </a:solidFill>
+                    </a:lnB>
                     <a:solidFill>
-                      <a:srgbClr val="2C9100"/>
+                      <a:srgbClr val="FFFEF8"/>
                     </a:solidFill>
                   </a:tcPr>
                 </a:tc>
@@ -18192,7 +19250,7 @@
                     <a:p>
                       <a:pPr algn="l">
                         <a:lnSpc>
-                          <a:spcPct val="115000"/>
+                          <a:spcPct val="110000"/>
                         </a:lnSpc>
                         <a:spcBef>
                           <a:spcPts val="0"/>
@@ -18223,7 +19281,19 @@
                       </a:r>
                     </a:p>
                   </a:txBody>
-                  <a:tcPr marL="88900" marR="88900" marT="76200" marB="76200" anchor="ctr">
+                  <a:tcPr marL="76200" marR="76200" marT="38100" marB="38100" anchor="ctr">
+                    <a:lnL w="0">
+                      <a:noFill/>
+                    </a:lnL>
+                    <a:lnR w="0">
+                      <a:noFill/>
+                    </a:lnR>
+                    <a:lnT w="0">
+                      <a:noFill/>
+                    </a:lnT>
+                    <a:lnB w="0">
+                      <a:noFill/>
+                    </a:lnB>
                     <a:solidFill>
                       <a:srgbClr val="FFFEF8"/>
                     </a:solidFill>
@@ -18236,7 +19306,7 @@
                     <a:p>
                       <a:pPr algn="r">
                         <a:lnSpc>
-                          <a:spcPct val="115000"/>
+                          <a:spcPct val="110000"/>
                         </a:lnSpc>
                         <a:spcBef>
                           <a:spcPts val="0"/>
@@ -18267,7 +19337,19 @@
                       </a:r>
                     </a:p>
                   </a:txBody>
-                  <a:tcPr marL="88900" marR="88900" marT="76200" marB="76200" anchor="ctr">
+                  <a:tcPr marL="76200" marR="76200" marT="38100" marB="38100" anchor="ctr">
+                    <a:lnL w="0">
+                      <a:noFill/>
+                    </a:lnL>
+                    <a:lnR w="0">
+                      <a:noFill/>
+                    </a:lnR>
+                    <a:lnT w="0">
+                      <a:noFill/>
+                    </a:lnT>
+                    <a:lnB w="0">
+                      <a:noFill/>
+                    </a:lnB>
                     <a:solidFill>
                       <a:srgbClr val="FFFEF8"/>
                     </a:solidFill>
@@ -18282,7 +19364,7 @@
                     <a:p>
                       <a:pPr algn="l">
                         <a:lnSpc>
-                          <a:spcPct val="115000"/>
+                          <a:spcPct val="110000"/>
                         </a:lnSpc>
                         <a:spcBef>
                           <a:spcPts val="0"/>
@@ -18313,7 +19395,19 @@
                       </a:r>
                     </a:p>
                   </a:txBody>
-                  <a:tcPr marL="88900" marR="88900" marT="76200" marB="76200" anchor="ctr">
+                  <a:tcPr marL="76200" marR="76200" marT="38100" marB="38100" anchor="ctr">
+                    <a:lnL w="0">
+                      <a:noFill/>
+                    </a:lnL>
+                    <a:lnR w="0">
+                      <a:noFill/>
+                    </a:lnR>
+                    <a:lnT w="0">
+                      <a:noFill/>
+                    </a:lnT>
+                    <a:lnB w="0">
+                      <a:noFill/>
+                    </a:lnB>
                     <a:solidFill>
                       <a:srgbClr val="FFFEF8"/>
                     </a:solidFill>
@@ -18326,7 +19420,7 @@
                     <a:p>
                       <a:pPr algn="r">
                         <a:lnSpc>
-                          <a:spcPct val="115000"/>
+                          <a:spcPct val="110000"/>
                         </a:lnSpc>
                         <a:spcBef>
                           <a:spcPts val="0"/>
@@ -18357,7 +19451,19 @@
                       </a:r>
                     </a:p>
                   </a:txBody>
-                  <a:tcPr marL="88900" marR="88900" marT="76200" marB="76200" anchor="ctr">
+                  <a:tcPr marL="76200" marR="76200" marT="38100" marB="38100" anchor="ctr">
+                    <a:lnL w="0">
+                      <a:noFill/>
+                    </a:lnL>
+                    <a:lnR w="0">
+                      <a:noFill/>
+                    </a:lnR>
+                    <a:lnT w="0">
+                      <a:noFill/>
+                    </a:lnT>
+                    <a:lnB w="0">
+                      <a:noFill/>
+                    </a:lnB>
                     <a:solidFill>
                       <a:srgbClr val="FFFEF8"/>
                     </a:solidFill>
@@ -18372,7 +19478,7 @@
                     <a:p>
                       <a:pPr algn="l">
                         <a:lnSpc>
-                          <a:spcPct val="115000"/>
+                          <a:spcPct val="110000"/>
                         </a:lnSpc>
                         <a:spcBef>
                           <a:spcPts val="0"/>
@@ -18403,7 +19509,19 @@
                       </a:r>
                     </a:p>
                   </a:txBody>
-                  <a:tcPr marL="88900" marR="88900" marT="76200" marB="76200" anchor="ctr">
+                  <a:tcPr marL="76200" marR="76200" marT="38100" marB="38100" anchor="ctr">
+                    <a:lnL w="0">
+                      <a:noFill/>
+                    </a:lnL>
+                    <a:lnR w="0">
+                      <a:noFill/>
+                    </a:lnR>
+                    <a:lnT w="0">
+                      <a:noFill/>
+                    </a:lnT>
+                    <a:lnB w="0">
+                      <a:noFill/>
+                    </a:lnB>
                     <a:solidFill>
                       <a:srgbClr val="FFFEF8"/>
                     </a:solidFill>
@@ -18416,7 +19534,7 @@
                     <a:p>
                       <a:pPr algn="r">
                         <a:lnSpc>
-                          <a:spcPct val="115000"/>
+                          <a:spcPct val="110000"/>
                         </a:lnSpc>
                         <a:spcBef>
                           <a:spcPts val="0"/>
@@ -18447,7 +19565,19 @@
                       </a:r>
                     </a:p>
                   </a:txBody>
-                  <a:tcPr marL="88900" marR="88900" marT="76200" marB="76200" anchor="ctr">
+                  <a:tcPr marL="76200" marR="76200" marT="38100" marB="38100" anchor="ctr">
+                    <a:lnL w="0">
+                      <a:noFill/>
+                    </a:lnL>
+                    <a:lnR w="0">
+                      <a:noFill/>
+                    </a:lnR>
+                    <a:lnT w="0">
+                      <a:noFill/>
+                    </a:lnT>
+                    <a:lnB w="0">
+                      <a:noFill/>
+                    </a:lnB>
                     <a:solidFill>
                       <a:srgbClr val="FFFEF8"/>
                     </a:solidFill>
@@ -18462,7 +19592,7 @@
                     <a:p>
                       <a:pPr algn="l">
                         <a:lnSpc>
-                          <a:spcPct val="115000"/>
+                          <a:spcPct val="110000"/>
                         </a:lnSpc>
                         <a:spcBef>
                           <a:spcPts val="0"/>
@@ -18493,7 +19623,21 @@
                       </a:r>
                     </a:p>
                   </a:txBody>
-                  <a:tcPr marL="88900" marR="88900" marT="76200" marB="76200" anchor="ctr">
+                  <a:tcPr marL="76200" marR="76200" marT="38100" marB="38100" anchor="ctr">
+                    <a:lnL w="0">
+                      <a:noFill/>
+                    </a:lnL>
+                    <a:lnR w="0">
+                      <a:noFill/>
+                    </a:lnR>
+                    <a:lnT w="0">
+                      <a:noFill/>
+                    </a:lnT>
+                    <a:lnB w="10160">
+                      <a:solidFill>
+                        <a:srgbClr val="626669"/>
+                      </a:solidFill>
+                    </a:lnB>
                     <a:solidFill>
                       <a:srgbClr val="FFFEF8"/>
                     </a:solidFill>
@@ -18506,7 +19650,7 @@
                     <a:p>
                       <a:pPr algn="r">
                         <a:lnSpc>
-                          <a:spcPct val="115000"/>
+                          <a:spcPct val="110000"/>
                         </a:lnSpc>
                         <a:spcBef>
                           <a:spcPts val="0"/>
@@ -18537,7 +19681,21 @@
                       </a:r>
                     </a:p>
                   </a:txBody>
-                  <a:tcPr marL="88900" marR="88900" marT="76200" marB="76200" anchor="ctr">
+                  <a:tcPr marL="76200" marR="76200" marT="38100" marB="38100" anchor="ctr">
+                    <a:lnL w="0">
+                      <a:noFill/>
+                    </a:lnL>
+                    <a:lnR w="0">
+                      <a:noFill/>
+                    </a:lnR>
+                    <a:lnT w="0">
+                      <a:noFill/>
+                    </a:lnT>
+                    <a:lnB w="10160">
+                      <a:solidFill>
+                        <a:srgbClr val="626669"/>
+                      </a:solidFill>
+                    </a:lnB>
                     <a:solidFill>
                       <a:srgbClr val="FFFEF8"/>
                     </a:solidFill>
@@ -18556,8 +19714,8 @@
         </p:nvSpPr>
         <p:spPr>
           <a:xfrm>
-            <a:off x="658368" y="3931920"/>
-            <a:ext cx="7772400" cy="914400"/>
+            <a:off x="594360" y="3959860"/>
+            <a:ext cx="7955279" cy="713232"/>
           </a:xfrm>
           <a:prstGeom prst="rect">
             <a:avLst/>
@@ -18654,9 +19812,20 @@
                 <a:latin typeface="Noto Sans"/>
                 <a:ea typeface="Noto Sans CJK JP"/>
                 <a:cs typeface="Noto Sans"/>
+              </a:rPr>
+              <a:t>[1] </a:t>
+            </a:r>
+            <a:r>
+              <a:rPr lang="ja-JP" sz="800" b="0">
+                <a:solidFill>
+                  <a:srgbClr val="626669"/>
+                </a:solidFill>
+                <a:latin typeface="Noto Sans"/>
+                <a:ea typeface="Noto Sans CJK JP"/>
+                <a:cs typeface="Noto Sans"/>
                 <a:hlinkClick r:id="rId2"/>
               </a:rPr>
-              <a:t>[1] https://github.com/ultralytics/assets/releases/download/v0.0.0/coco128-seg.zip</a:t>
+              <a:t>https://github.com/ultralytics/assets/releases/download/v0.0.0/coco128-seg.zip</a:t>
             </a:r>
           </a:p>
         </p:txBody>
@@ -18861,9 +20030,20 @@
                 <a:latin typeface="Noto Sans"/>
                 <a:ea typeface="Noto Sans CJK JP"/>
                 <a:cs typeface="Noto Sans"/>
+              </a:rPr>
+              <a:t>[1] </a:t>
+            </a:r>
+            <a:r>
+              <a:rPr lang="ja-JP" sz="800" b="0">
+                <a:solidFill>
+                  <a:srgbClr val="626669"/>
+                </a:solidFill>
+                <a:latin typeface="Noto Sans"/>
+                <a:ea typeface="Noto Sans CJK JP"/>
+                <a:cs typeface="Noto Sans"/>
                 <a:hlinkClick r:id="rId3"/>
               </a:rPr>
-              <a:t>[1] https://github.com/ultralytics/assets/releases/download/v0.0.0/coco128-seg.zip</a:t>
+              <a:t>https://github.com/ultralytics/assets/releases/download/v0.0.0/coco128-seg.zip</a:t>
             </a:r>
           </a:p>
           <a:p>
@@ -19101,9 +20281,20 @@
                 <a:latin typeface="Noto Sans"/>
                 <a:ea typeface="Noto Sans CJK JP"/>
                 <a:cs typeface="Noto Sans"/>
+              </a:rPr>
+              <a:t>[1] </a:t>
+            </a:r>
+            <a:r>
+              <a:rPr lang="ja-JP" sz="800" b="0">
+                <a:solidFill>
+                  <a:srgbClr val="626669"/>
+                </a:solidFill>
+                <a:latin typeface="Noto Sans"/>
+                <a:ea typeface="Noto Sans CJK JP"/>
+                <a:cs typeface="Noto Sans"/>
                 <a:hlinkClick r:id="rId3"/>
               </a:rPr>
-              <a:t>[1] https://github.com/ultralytics/assets/releases/download/v0.0.0/coco128-seg.zip</a:t>
+              <a:t>https://github.com/ultralytics/assets/releases/download/v0.0.0/coco128-seg.zip</a:t>
             </a:r>
           </a:p>
           <a:p>
@@ -19208,7 +20399,7 @@
                 <a:ea typeface="Noto Sans CJK JP"/>
                 <a:cs typeface="Noto Sans"/>
               </a:rPr>
-              <a:t>公式サイトの公開ソースによるトップ画面</a:t>
+              <a:t>公式サイト</a:t>
             </a:r>
           </a:p>
         </p:txBody>
@@ -19344,40 +20535,6 @@
                 <a:hlinkClick r:id="rId3"/>
               </a:rPr>
               <a:t>https://cocodataset.org/</a:t>
-            </a:r>
-          </a:p>
-          <a:p>
-            <a:pPr algn="l">
-              <a:lnSpc>
-                <a:spcPct val="115000"/>
-              </a:lnSpc>
-              <a:spcBef>
-                <a:spcPts val="0"/>
-              </a:spcBef>
-              <a:spcAft>
-                <a:spcPts val="0"/>
-              </a:spcAft>
-              <a:buNone/>
-              <a:defRPr lang="ja-JP" sz="800" b="0">
-                <a:solidFill>
-                  <a:srgbClr val="626669"/>
-                </a:solidFill>
-                <a:latin typeface="Noto Sans"/>
-                <a:ea typeface="Noto Sans CJK JP"/>
-                <a:cs typeface="Noto Sans"/>
-              </a:defRPr>
-            </a:pPr>
-            <a:r>
-              <a:rPr lang="ja-JP" sz="800" b="0">
-                <a:solidFill>
-                  <a:srgbClr val="626669"/>
-                </a:solidFill>
-                <a:latin typeface="Noto Sans"/>
-                <a:ea typeface="Noto Sans CJK JP"/>
-                <a:cs typeface="Noto Sans"/>
-                <a:hlinkClick r:id="rId4"/>
-              </a:rPr>
-              <a:t>公開元 https://github.com/cocodataset/cocodataset.github.io （ライブ画面ではなく公開HTMLの再描画）</a:t>
             </a:r>
           </a:p>
         </p:txBody>
@@ -19582,9 +20739,20 @@
                 <a:latin typeface="Noto Sans"/>
                 <a:ea typeface="Noto Sans CJK JP"/>
                 <a:cs typeface="Noto Sans"/>
+              </a:rPr>
+              <a:t>[1] </a:t>
+            </a:r>
+            <a:r>
+              <a:rPr lang="ja-JP" sz="800" b="0">
+                <a:solidFill>
+                  <a:srgbClr val="626669"/>
+                </a:solidFill>
+                <a:latin typeface="Noto Sans"/>
+                <a:ea typeface="Noto Sans CJK JP"/>
+                <a:cs typeface="Noto Sans"/>
                 <a:hlinkClick r:id="rId3"/>
               </a:rPr>
-              <a:t>[1] https://github.com/ultralytics/assets/releases/download/v0.0.0/coco128-seg.zip</a:t>
+              <a:t>https://github.com/ultralytics/assets/releases/download/v0.0.0/coco128-seg.zip</a:t>
             </a:r>
           </a:p>
           <a:p>
@@ -19822,9 +20990,20 @@
                 <a:latin typeface="Noto Sans"/>
                 <a:ea typeface="Noto Sans CJK JP"/>
                 <a:cs typeface="Noto Sans"/>
+              </a:rPr>
+              <a:t>[1] </a:t>
+            </a:r>
+            <a:r>
+              <a:rPr lang="ja-JP" sz="800" b="0">
+                <a:solidFill>
+                  <a:srgbClr val="626669"/>
+                </a:solidFill>
+                <a:latin typeface="Noto Sans"/>
+                <a:ea typeface="Noto Sans CJK JP"/>
+                <a:cs typeface="Noto Sans"/>
                 <a:hlinkClick r:id="rId3"/>
               </a:rPr>
-              <a:t>[1] https://github.com/ultralytics/assets/releases/download/v0.0.0/coco128-seg.zip</a:t>
+              <a:t>https://github.com/ultralytics/assets/releases/download/v0.0.0/coco128-seg.zip</a:t>
             </a:r>
           </a:p>
           <a:p>
@@ -20062,9 +21241,20 @@
                 <a:latin typeface="Noto Sans"/>
                 <a:ea typeface="Noto Sans CJK JP"/>
                 <a:cs typeface="Noto Sans"/>
+              </a:rPr>
+              <a:t>[1] </a:t>
+            </a:r>
+            <a:r>
+              <a:rPr lang="ja-JP" sz="800" b="0">
+                <a:solidFill>
+                  <a:srgbClr val="626669"/>
+                </a:solidFill>
+                <a:latin typeface="Noto Sans"/>
+                <a:ea typeface="Noto Sans CJK JP"/>
+                <a:cs typeface="Noto Sans"/>
                 <a:hlinkClick r:id="rId3"/>
               </a:rPr>
-              <a:t>[1] https://github.com/ultralytics/assets/releases/download/v0.0.0/coco128-seg.zip</a:t>
+              <a:t>https://github.com/ultralytics/assets/releases/download/v0.0.0/coco128-seg.zip</a:t>
             </a:r>
           </a:p>
           <a:p>
@@ -20302,9 +21492,20 @@
                 <a:latin typeface="Noto Sans"/>
                 <a:ea typeface="Noto Sans CJK JP"/>
                 <a:cs typeface="Noto Sans"/>
+              </a:rPr>
+              <a:t>[1] </a:t>
+            </a:r>
+            <a:r>
+              <a:rPr lang="ja-JP" sz="800" b="0">
+                <a:solidFill>
+                  <a:srgbClr val="626669"/>
+                </a:solidFill>
+                <a:latin typeface="Noto Sans"/>
+                <a:ea typeface="Noto Sans CJK JP"/>
+                <a:cs typeface="Noto Sans"/>
                 <a:hlinkClick r:id="rId3"/>
               </a:rPr>
-              <a:t>[1] https://github.com/ultralytics/assets/releases/download/v0.0.0/coco128-seg.zip</a:t>
+              <a:t>https://github.com/ultralytics/assets/releases/download/v0.0.0/coco128-seg.zip</a:t>
             </a:r>
           </a:p>
           <a:p>
@@ -20542,9 +21743,20 @@
                 <a:latin typeface="Noto Sans"/>
                 <a:ea typeface="Noto Sans CJK JP"/>
                 <a:cs typeface="Noto Sans"/>
+              </a:rPr>
+              <a:t>[1] </a:t>
+            </a:r>
+            <a:r>
+              <a:rPr lang="ja-JP" sz="800" b="0">
+                <a:solidFill>
+                  <a:srgbClr val="626669"/>
+                </a:solidFill>
+                <a:latin typeface="Noto Sans"/>
+                <a:ea typeface="Noto Sans CJK JP"/>
+                <a:cs typeface="Noto Sans"/>
                 <a:hlinkClick r:id="rId3"/>
               </a:rPr>
-              <a:t>[1] https://github.com/ultralytics/assets/releases/download/v0.0.0/coco128-seg.zip</a:t>
+              <a:t>https://github.com/ultralytics/assets/releases/download/v0.0.0/coco128-seg.zip</a:t>
             </a:r>
           </a:p>
           <a:p>
@@ -20782,9 +21994,20 @@
                 <a:latin typeface="Noto Sans"/>
                 <a:ea typeface="Noto Sans CJK JP"/>
                 <a:cs typeface="Noto Sans"/>
+              </a:rPr>
+              <a:t>[1] </a:t>
+            </a:r>
+            <a:r>
+              <a:rPr lang="ja-JP" sz="800" b="0">
+                <a:solidFill>
+                  <a:srgbClr val="626669"/>
+                </a:solidFill>
+                <a:latin typeface="Noto Sans"/>
+                <a:ea typeface="Noto Sans CJK JP"/>
+                <a:cs typeface="Noto Sans"/>
                 <a:hlinkClick r:id="rId3"/>
               </a:rPr>
-              <a:t>[1] https://github.com/ultralytics/assets/releases/download/v0.0.0/coco128-seg.zip</a:t>
+              <a:t>https://github.com/ultralytics/assets/releases/download/v0.0.0/coco128-seg.zip</a:t>
             </a:r>
           </a:p>
           <a:p>
@@ -21022,9 +22245,20 @@
                 <a:latin typeface="Noto Sans"/>
                 <a:ea typeface="Noto Sans CJK JP"/>
                 <a:cs typeface="Noto Sans"/>
+              </a:rPr>
+              <a:t>[1] </a:t>
+            </a:r>
+            <a:r>
+              <a:rPr lang="ja-JP" sz="800" b="0">
+                <a:solidFill>
+                  <a:srgbClr val="626669"/>
+                </a:solidFill>
+                <a:latin typeface="Noto Sans"/>
+                <a:ea typeface="Noto Sans CJK JP"/>
+                <a:cs typeface="Noto Sans"/>
                 <a:hlinkClick r:id="rId3"/>
               </a:rPr>
-              <a:t>[1] https://github.com/ultralytics/assets/releases/download/v0.0.0/coco128-seg.zip</a:t>
+              <a:t>https://github.com/ultralytics/assets/releases/download/v0.0.0/coco128-seg.zip</a:t>
             </a:r>
           </a:p>
           <a:p>
@@ -21262,9 +22496,20 @@
                 <a:latin typeface="Noto Sans"/>
                 <a:ea typeface="Noto Sans CJK JP"/>
                 <a:cs typeface="Noto Sans"/>
+              </a:rPr>
+              <a:t>[1] </a:t>
+            </a:r>
+            <a:r>
+              <a:rPr lang="ja-JP" sz="800" b="0">
+                <a:solidFill>
+                  <a:srgbClr val="626669"/>
+                </a:solidFill>
+                <a:latin typeface="Noto Sans"/>
+                <a:ea typeface="Noto Sans CJK JP"/>
+                <a:cs typeface="Noto Sans"/>
                 <a:hlinkClick r:id="rId3"/>
               </a:rPr>
-              <a:t>[1] https://github.com/ultralytics/assets/releases/download/v0.0.0/coco128-seg.zip</a:t>
+              <a:t>https://github.com/ultralytics/assets/releases/download/v0.0.0/coco128-seg.zip</a:t>
             </a:r>
           </a:p>
           <a:p>
@@ -21502,9 +22747,20 @@
                 <a:latin typeface="Noto Sans"/>
                 <a:ea typeface="Noto Sans CJK JP"/>
                 <a:cs typeface="Noto Sans"/>
+              </a:rPr>
+              <a:t>[1] </a:t>
+            </a:r>
+            <a:r>
+              <a:rPr lang="ja-JP" sz="800" b="0">
+                <a:solidFill>
+                  <a:srgbClr val="626669"/>
+                </a:solidFill>
+                <a:latin typeface="Noto Sans"/>
+                <a:ea typeface="Noto Sans CJK JP"/>
+                <a:cs typeface="Noto Sans"/>
                 <a:hlinkClick r:id="rId3"/>
               </a:rPr>
-              <a:t>[1] https://github.com/ultralytics/assets/releases/download/v0.0.0/coco128-seg.zip</a:t>
+              <a:t>https://github.com/ultralytics/assets/releases/download/v0.0.0/coco128-seg.zip</a:t>
             </a:r>
           </a:p>
           <a:p>
@@ -21742,9 +22998,20 @@
                 <a:latin typeface="Noto Sans"/>
                 <a:ea typeface="Noto Sans CJK JP"/>
                 <a:cs typeface="Noto Sans"/>
+              </a:rPr>
+              <a:t>[1] </a:t>
+            </a:r>
+            <a:r>
+              <a:rPr lang="ja-JP" sz="800" b="0">
+                <a:solidFill>
+                  <a:srgbClr val="626669"/>
+                </a:solidFill>
+                <a:latin typeface="Noto Sans"/>
+                <a:ea typeface="Noto Sans CJK JP"/>
+                <a:cs typeface="Noto Sans"/>
                 <a:hlinkClick r:id="rId3"/>
               </a:rPr>
-              <a:t>[1] https://github.com/ultralytics/assets/releases/download/v0.0.0/coco128-seg.zip</a:t>
+              <a:t>https://github.com/ultralytics/assets/releases/download/v0.0.0/coco128-seg.zip</a:t>
             </a:r>
           </a:p>
           <a:p>
@@ -22084,9 +23351,20 @@
                 <a:latin typeface="Noto Sans"/>
                 <a:ea typeface="Noto Sans CJK JP"/>
                 <a:cs typeface="Noto Sans"/>
+              </a:rPr>
+              <a:t>[1] </a:t>
+            </a:r>
+            <a:r>
+              <a:rPr lang="ja-JP" sz="800" b="0">
+                <a:solidFill>
+                  <a:srgbClr val="626669"/>
+                </a:solidFill>
+                <a:latin typeface="Noto Sans"/>
+                <a:ea typeface="Noto Sans CJK JP"/>
+                <a:cs typeface="Noto Sans"/>
                 <a:hlinkClick r:id="rId2"/>
               </a:rPr>
-              <a:t>[1] https://cocodataset.org/#panoptic-2018</a:t>
+              <a:t>https://cocodataset.org/#panoptic-2018</a:t>
             </a:r>
           </a:p>
         </p:txBody>
@@ -22393,9 +23671,31 @@
                 <a:latin typeface="Noto Sans"/>
                 <a:ea typeface="Noto Sans CJK JP"/>
                 <a:cs typeface="Noto Sans"/>
+              </a:rPr>
+              <a:t>[1] </a:t>
+            </a:r>
+            <a:r>
+              <a:rPr lang="ja-JP" sz="800" b="0">
+                <a:solidFill>
+                  <a:srgbClr val="626669"/>
+                </a:solidFill>
+                <a:latin typeface="Noto Sans"/>
+                <a:ea typeface="Noto Sans CJK JP"/>
+                <a:cs typeface="Noto Sans"/>
                 <a:hlinkClick r:id="rId2"/>
               </a:rPr>
-              <a:t>[1] https://github.com/cocodataset/panopticapi/blob/master/panoptic_coco_categories.json / isthing=1の全80カテゴリ</a:t>
+              <a:t>https://github.com/cocodataset/panopticapi/blob/master/panoptic_coco_categories.json</a:t>
+            </a:r>
+            <a:r>
+              <a:rPr lang="ja-JP" sz="800" b="0">
+                <a:solidFill>
+                  <a:srgbClr val="626669"/>
+                </a:solidFill>
+                <a:latin typeface="Noto Sans"/>
+                <a:ea typeface="Noto Sans CJK JP"/>
+                <a:cs typeface="Noto Sans"/>
+              </a:rPr>
+              <a:t> / isthing=1の全80カテゴリ</a:t>
             </a:r>
           </a:p>
         </p:txBody>
@@ -22702,9 +24002,31 @@
                 <a:latin typeface="Noto Sans"/>
                 <a:ea typeface="Noto Sans CJK JP"/>
                 <a:cs typeface="Noto Sans"/>
+              </a:rPr>
+              <a:t>[1] </a:t>
+            </a:r>
+            <a:r>
+              <a:rPr lang="ja-JP" sz="800" b="0">
+                <a:solidFill>
+                  <a:srgbClr val="626669"/>
+                </a:solidFill>
+                <a:latin typeface="Noto Sans"/>
+                <a:ea typeface="Noto Sans CJK JP"/>
+                <a:cs typeface="Noto Sans"/>
                 <a:hlinkClick r:id="rId2"/>
               </a:rPr>
-              <a:t>[1] https://github.com/cocodataset/panopticapi/blob/master/panoptic_coco_categories.json / isthing=1の全80カテゴリ</a:t>
+              <a:t>https://github.com/cocodataset/panopticapi/blob/master/panoptic_coco_categories.json</a:t>
+            </a:r>
+            <a:r>
+              <a:rPr lang="ja-JP" sz="800" b="0">
+                <a:solidFill>
+                  <a:srgbClr val="626669"/>
+                </a:solidFill>
+                <a:latin typeface="Noto Sans"/>
+                <a:ea typeface="Noto Sans CJK JP"/>
+                <a:cs typeface="Noto Sans"/>
+              </a:rPr>
+              <a:t> / isthing=1の全80カテゴリ</a:t>
             </a:r>
           </a:p>
         </p:txBody>
@@ -23011,9 +24333,31 @@
                 <a:latin typeface="Noto Sans"/>
                 <a:ea typeface="Noto Sans CJK JP"/>
                 <a:cs typeface="Noto Sans"/>
+              </a:rPr>
+              <a:t>[1] </a:t>
+            </a:r>
+            <a:r>
+              <a:rPr lang="ja-JP" sz="800" b="0">
+                <a:solidFill>
+                  <a:srgbClr val="626669"/>
+                </a:solidFill>
+                <a:latin typeface="Noto Sans"/>
+                <a:ea typeface="Noto Sans CJK JP"/>
+                <a:cs typeface="Noto Sans"/>
                 <a:hlinkClick r:id="rId2"/>
               </a:rPr>
-              <a:t>[1] https://github.com/cocodataset/panopticapi/blob/master/panoptic_coco_categories.json / isthing=1の全80カテゴリ</a:t>
+              <a:t>https://github.com/cocodataset/panopticapi/blob/master/panoptic_coco_categories.json</a:t>
+            </a:r>
+            <a:r>
+              <a:rPr lang="ja-JP" sz="800" b="0">
+                <a:solidFill>
+                  <a:srgbClr val="626669"/>
+                </a:solidFill>
+                <a:latin typeface="Noto Sans"/>
+                <a:ea typeface="Noto Sans CJK JP"/>
+                <a:cs typeface="Noto Sans"/>
+              </a:rPr>
+              <a:t> / isthing=1の全80カテゴリ</a:t>
             </a:r>
           </a:p>
         </p:txBody>
@@ -23320,9 +24664,31 @@
                 <a:latin typeface="Noto Sans"/>
                 <a:ea typeface="Noto Sans CJK JP"/>
                 <a:cs typeface="Noto Sans"/>
+              </a:rPr>
+              <a:t>[1] </a:t>
+            </a:r>
+            <a:r>
+              <a:rPr lang="ja-JP" sz="800" b="0">
+                <a:solidFill>
+                  <a:srgbClr val="626669"/>
+                </a:solidFill>
+                <a:latin typeface="Noto Sans"/>
+                <a:ea typeface="Noto Sans CJK JP"/>
+                <a:cs typeface="Noto Sans"/>
                 <a:hlinkClick r:id="rId2"/>
               </a:rPr>
-              <a:t>[1] https://github.com/cocodataset/panopticapi/blob/master/panoptic_coco_categories.json / isthing=1の全80カテゴリ</a:t>
+              <a:t>https://github.com/cocodataset/panopticapi/blob/master/panoptic_coco_categories.json</a:t>
+            </a:r>
+            <a:r>
+              <a:rPr lang="ja-JP" sz="800" b="0">
+                <a:solidFill>
+                  <a:srgbClr val="626669"/>
+                </a:solidFill>
+                <a:latin typeface="Noto Sans"/>
+                <a:ea typeface="Noto Sans CJK JP"/>
+                <a:cs typeface="Noto Sans"/>
+              </a:rPr>
+              <a:t> / isthing=1の全80カテゴリ</a:t>
             </a:r>
           </a:p>
         </p:txBody>
@@ -23629,9 +24995,20 @@
                 <a:latin typeface="Noto Sans"/>
                 <a:ea typeface="Noto Sans CJK JP"/>
                 <a:cs typeface="Noto Sans"/>
+              </a:rPr>
+              <a:t>[1] </a:t>
+            </a:r>
+            <a:r>
+              <a:rPr lang="ja-JP" sz="800" b="0">
+                <a:solidFill>
+                  <a:srgbClr val="626669"/>
+                </a:solidFill>
+                <a:latin typeface="Noto Sans"/>
+                <a:ea typeface="Noto Sans CJK JP"/>
+                <a:cs typeface="Noto Sans"/>
                 <a:hlinkClick r:id="rId2"/>
               </a:rPr>
-              <a:t>[1] https://cocodataset.org/#termsofuse</a:t>
+              <a:t>https://cocodataset.org/#termsofuse</a:t>
             </a:r>
           </a:p>
           <a:p>
@@ -23804,8 +25181,8 @@
         </p:nvSpPr>
         <p:spPr>
           <a:xfrm>
-            <a:off x="594360" y="1508760"/>
-            <a:ext cx="7955279" cy="868680"/>
+            <a:off x="594360" y="1234440"/>
+            <a:ext cx="7955279" cy="292608"/>
           </a:xfrm>
           <a:prstGeom prst="rect">
             <a:avLst/>
@@ -23813,33 +25190,33 @@
           <a:noFill/>
         </p:spPr>
         <p:txBody>
-          <a:bodyPr wrap="square" anchor="t" lIns="0" rIns="0" tIns="0" bIns="0">
+          <a:bodyPr wrap="square" lIns="0" rIns="0" tIns="0" bIns="0" anchor="t">
             <a:spAutoFit/>
           </a:bodyPr>
           <a:lstStyle/>
           <a:p>
-            <a:pPr algn="l">
-              <a:lnSpc>
-                <a:spcPct val="115000"/>
-              </a:lnSpc>
-              <a:spcBef>
-                <a:spcPts val="0"/>
-              </a:spcBef>
-              <a:spcAft>
-                <a:spcPts val="0"/>
-              </a:spcAft>
-              <a:buNone/>
-              <a:defRPr lang="ja-JP" sz="2400" b="1">
-                <a:solidFill>
-                  <a:srgbClr val="303437"/>
-                </a:solidFill>
-                <a:latin typeface="Noto Sans"/>
-                <a:ea typeface="Noto Sans CJK JP"/>
-                <a:cs typeface="Noto Sans"/>
-              </a:defRPr>
-            </a:pPr>
-            <a:r>
-              <a:rPr lang="ja-JP" sz="2400" b="1">
+            <a:pPr>
+              <a:lnSpc>
+                <a:spcPct val="105000"/>
+              </a:lnSpc>
+              <a:spcBef>
+                <a:spcPts val="0"/>
+              </a:spcBef>
+              <a:spcAft>
+                <a:spcPts val="0"/>
+              </a:spcAft>
+              <a:buNone/>
+              <a:defRPr sz="2000" b="0" lang="ja-JP">
+                <a:solidFill>
+                  <a:srgbClr val="303437"/>
+                </a:solidFill>
+                <a:latin typeface="Noto Sans"/>
+                <a:ea typeface="Noto Sans CJK JP"/>
+                <a:cs typeface="Noto Sans"/>
+              </a:defRPr>
+            </a:pPr>
+            <a:r>
+              <a:rPr sz="2000" b="0" lang="ja-JP">
                 <a:solidFill>
                   <a:srgbClr val="303437"/>
                 </a:solidFill>
@@ -23860,8 +25237,8 @@
         </p:nvSpPr>
         <p:spPr>
           <a:xfrm>
-            <a:off x="594360" y="2487168"/>
-            <a:ext cx="7955279" cy="548640"/>
+            <a:off x="594360" y="1655064"/>
+            <a:ext cx="7955279" cy="594360"/>
           </a:xfrm>
           <a:prstGeom prst="rect">
             <a:avLst/>
@@ -23869,41 +25246,74 @@
           <a:noFill/>
         </p:spPr>
         <p:txBody>
-          <a:bodyPr wrap="square" anchor="t" lIns="0" rIns="0" tIns="0" bIns="0">
+          <a:bodyPr wrap="square" lIns="0" rIns="0" tIns="0" bIns="0" anchor="t">
             <a:spAutoFit/>
           </a:bodyPr>
           <a:lstStyle/>
           <a:p>
-            <a:pPr algn="l">
-              <a:lnSpc>
-                <a:spcPct val="115000"/>
-              </a:lnSpc>
-              <a:spcBef>
-                <a:spcPts val="0"/>
-              </a:spcBef>
-              <a:spcAft>
-                <a:spcPts val="0"/>
-              </a:spcAft>
-              <a:buNone/>
-              <a:defRPr lang="ja-JP" sz="1400" b="0">
-                <a:solidFill>
-                  <a:srgbClr val="303437"/>
-                </a:solidFill>
-                <a:latin typeface="Noto Sans"/>
-                <a:ea typeface="Noto Sans CJK JP"/>
-                <a:cs typeface="Noto Sans"/>
-              </a:defRPr>
-            </a:pPr>
-            <a:r>
-              <a:rPr lang="ja-JP" sz="1400" b="0">
-                <a:solidFill>
-                  <a:srgbClr val="303437"/>
-                </a:solidFill>
-                <a:latin typeface="Noto Sans"/>
-                <a:ea typeface="Noto Sans CJK JP"/>
-                <a:cs typeface="Noto Sans"/>
-              </a:rPr>
-              <a:t>Tsung-Yi Lin, Michael Maire, Serge Belongie, James Hays, Pietro Perona, Deva Ramanan, Piotr Dollár, C. Lawrence Zitnick (2014).</a:t>
+            <a:pPr>
+              <a:lnSpc>
+                <a:spcPct val="105000"/>
+              </a:lnSpc>
+              <a:spcBef>
+                <a:spcPts val="0"/>
+              </a:spcBef>
+              <a:spcAft>
+                <a:spcPts val="0"/>
+              </a:spcAft>
+              <a:buNone/>
+              <a:defRPr sz="1300" b="0" lang="ja-JP">
+                <a:solidFill>
+                  <a:srgbClr val="626669"/>
+                </a:solidFill>
+                <a:latin typeface="Noto Sans"/>
+                <a:ea typeface="Noto Sans CJK JP"/>
+                <a:cs typeface="Noto Sans"/>
+              </a:defRPr>
+            </a:pPr>
+            <a:r>
+              <a:rPr sz="1300" b="0" lang="ja-JP">
+                <a:solidFill>
+                  <a:srgbClr val="626669"/>
+                </a:solidFill>
+                <a:latin typeface="Noto Sans"/>
+                <a:ea typeface="Noto Sans CJK JP"/>
+                <a:cs typeface="Noto Sans"/>
+              </a:rPr>
+              <a:t>Tsung-Yi Lin et al. (2014).</a:t>
+            </a:r>
+          </a:p>
+          <a:p>
+            <a:pPr>
+              <a:lnSpc>
+                <a:spcPct val="105000"/>
+              </a:lnSpc>
+              <a:spcBef>
+                <a:spcPts val="0"/>
+              </a:spcBef>
+              <a:spcAft>
+                <a:spcPts val="0"/>
+              </a:spcAft>
+              <a:buNone/>
+              <a:defRPr sz="1300" b="0" lang="ja-JP">
+                <a:solidFill>
+                  <a:srgbClr val="626669"/>
+                </a:solidFill>
+                <a:latin typeface="Noto Sans"/>
+                <a:ea typeface="Noto Sans CJK JP"/>
+                <a:cs typeface="Noto Sans"/>
+              </a:defRPr>
+            </a:pPr>
+            <a:r>
+              <a:rPr sz="1300" b="0" lang="ja-JP">
+                <a:solidFill>
+                  <a:srgbClr val="626669"/>
+                </a:solidFill>
+                <a:latin typeface="Noto Sans"/>
+                <a:ea typeface="Noto Sans CJK JP"/>
+                <a:cs typeface="Noto Sans"/>
+              </a:rPr>
+              <a:t>European Conference on Computer Vision (ECCV), pp. 740–755.</a:t>
             </a:r>
           </a:p>
         </p:txBody>
@@ -23916,8 +25326,8 @@
         </p:nvSpPr>
         <p:spPr>
           <a:xfrm>
-            <a:off x="594360" y="3063240"/>
-            <a:ext cx="7955279" cy="548640"/>
+            <a:off x="594360" y="2194560"/>
+            <a:ext cx="7955279" cy="521207"/>
           </a:xfrm>
           <a:prstGeom prst="rect">
             <a:avLst/>
@@ -23925,41 +25335,41 @@
           <a:noFill/>
         </p:spPr>
         <p:txBody>
-          <a:bodyPr wrap="square" anchor="t" lIns="0" rIns="0" tIns="0" bIns="0">
+          <a:bodyPr wrap="square" lIns="0" rIns="0" tIns="0" bIns="0" anchor="t">
             <a:spAutoFit/>
           </a:bodyPr>
           <a:lstStyle/>
           <a:p>
-            <a:pPr algn="l">
-              <a:lnSpc>
-                <a:spcPct val="115000"/>
-              </a:lnSpc>
-              <a:spcBef>
-                <a:spcPts val="0"/>
-              </a:spcBef>
-              <a:spcAft>
-                <a:spcPts val="0"/>
-              </a:spcAft>
-              <a:buNone/>
-              <a:defRPr lang="ja-JP" sz="1400" b="0">
-                <a:solidFill>
-                  <a:srgbClr val="626669"/>
-                </a:solidFill>
-                <a:latin typeface="Noto Sans"/>
-                <a:ea typeface="Noto Sans CJK JP"/>
-                <a:cs typeface="Noto Sans"/>
-              </a:defRPr>
-            </a:pPr>
-            <a:r>
-              <a:rPr lang="ja-JP" sz="1400" b="0">
-                <a:solidFill>
-                  <a:srgbClr val="626669"/>
-                </a:solidFill>
-                <a:latin typeface="Noto Sans"/>
-                <a:ea typeface="Noto Sans CJK JP"/>
-                <a:cs typeface="Noto Sans"/>
-              </a:rPr>
-              <a:t>European Conference on Computer Vision (ECCV), pp. 740–755.</a:t>
+            <a:pPr>
+              <a:lnSpc>
+                <a:spcPct val="105000"/>
+              </a:lnSpc>
+              <a:spcBef>
+                <a:spcPts val="0"/>
+              </a:spcBef>
+              <a:spcAft>
+                <a:spcPts val="0"/>
+              </a:spcAft>
+              <a:buNone/>
+              <a:defRPr sz="1800" b="0" lang="ja-JP">
+                <a:solidFill>
+                  <a:srgbClr val="303437"/>
+                </a:solidFill>
+                <a:latin typeface="Noto Sans"/>
+                <a:ea typeface="Noto Sans CJK JP"/>
+                <a:cs typeface="Noto Sans"/>
+              </a:defRPr>
+            </a:pPr>
+            <a:r>
+              <a:rPr sz="1800" b="0" lang="ja-JP">
+                <a:solidFill>
+                  <a:srgbClr val="303437"/>
+                </a:solidFill>
+                <a:latin typeface="Noto Sans"/>
+                <a:ea typeface="Noto Sans CJK JP"/>
+                <a:cs typeface="Noto Sans"/>
+              </a:rPr>
+              <a:t>COCOの原著論文。日常場面の画像選定、物体の領域注釈、データの性質と初期評価を報告する。</a:t>
             </a:r>
           </a:p>
         </p:txBody>
@@ -23972,8 +25382,8 @@
         </p:nvSpPr>
         <p:spPr>
           <a:xfrm>
-            <a:off x="594360" y="3675887"/>
-            <a:ext cx="7955279" cy="960120"/>
+            <a:off x="594360" y="2916936"/>
+            <a:ext cx="7955279" cy="182880"/>
           </a:xfrm>
           <a:prstGeom prst="rect">
             <a:avLst/>
@@ -23981,41 +25391,42 @@
           <a:noFill/>
         </p:spPr>
         <p:txBody>
-          <a:bodyPr wrap="square" anchor="t" lIns="0" rIns="0" tIns="0" bIns="0">
+          <a:bodyPr wrap="square" lIns="0" rIns="0" tIns="0" bIns="0" anchor="t">
             <a:spAutoFit/>
           </a:bodyPr>
           <a:lstStyle/>
           <a:p>
-            <a:pPr algn="l">
-              <a:lnSpc>
-                <a:spcPct val="115000"/>
-              </a:lnSpc>
-              <a:spcBef>
-                <a:spcPts val="0"/>
-              </a:spcBef>
-              <a:spcAft>
-                <a:spcPts val="0"/>
-              </a:spcAft>
-              <a:buNone/>
-              <a:defRPr lang="ja-JP" sz="2100" b="0">
-                <a:solidFill>
-                  <a:srgbClr val="303437"/>
-                </a:solidFill>
-                <a:latin typeface="Noto Sans"/>
-                <a:ea typeface="Noto Sans CJK JP"/>
-                <a:cs typeface="Noto Sans"/>
-              </a:defRPr>
-            </a:pPr>
-            <a:r>
-              <a:rPr lang="ja-JP" sz="2100" b="0">
-                <a:solidFill>
-                  <a:srgbClr val="303437"/>
-                </a:solidFill>
-                <a:latin typeface="Noto Sans"/>
-                <a:ea typeface="Noto Sans CJK JP"/>
-                <a:cs typeface="Noto Sans"/>
-              </a:rPr>
-              <a:t>COCOの原著論文。日常場面の画像選定、物体の領域注釈、データの性質と初期評価を報告する。</a:t>
+            <a:pPr>
+              <a:lnSpc>
+                <a:spcPct val="105000"/>
+              </a:lnSpc>
+              <a:spcBef>
+                <a:spcPts val="0"/>
+              </a:spcBef>
+              <a:spcAft>
+                <a:spcPts val="0"/>
+              </a:spcAft>
+              <a:buNone/>
+              <a:defRPr sz="1100" b="0" lang="ja-JP">
+                <a:solidFill>
+                  <a:srgbClr val="626669"/>
+                </a:solidFill>
+                <a:latin typeface="Noto Sans"/>
+                <a:ea typeface="Noto Sans CJK JP"/>
+                <a:cs typeface="Noto Sans"/>
+              </a:defRPr>
+            </a:pPr>
+            <a:r>
+              <a:rPr sz="1100" b="0" lang="ja-JP">
+                <a:solidFill>
+                  <a:srgbClr val="626669"/>
+                </a:solidFill>
+                <a:latin typeface="Noto Sans"/>
+                <a:ea typeface="Noto Sans CJK JP"/>
+                <a:cs typeface="Noto Sans"/>
+                <a:hlinkClick r:id="rId2"/>
+              </a:rPr>
+              <a:t>https://arxiv.org/abs/1405.0312</a:t>
             </a:r>
           </a:p>
         </p:txBody>
@@ -24028,8 +25439,8 @@
         </p:nvSpPr>
         <p:spPr>
           <a:xfrm>
-            <a:off x="502920" y="4754880"/>
-            <a:ext cx="8183879" cy="320040"/>
+            <a:off x="594360" y="3200400"/>
+            <a:ext cx="7955279" cy="292608"/>
           </a:xfrm>
           <a:prstGeom prst="rect">
             <a:avLst/>
@@ -24037,23 +25448,79 @@
           <a:noFill/>
         </p:spPr>
         <p:txBody>
-          <a:bodyPr wrap="square" anchor="t" lIns="0" rIns="0" tIns="0" bIns="0">
+          <a:bodyPr wrap="square" lIns="0" rIns="0" tIns="0" bIns="0" anchor="t">
             <a:spAutoFit/>
           </a:bodyPr>
           <a:lstStyle/>
           <a:p>
-            <a:pPr algn="l">
-              <a:lnSpc>
-                <a:spcPct val="115000"/>
-              </a:lnSpc>
-              <a:spcBef>
-                <a:spcPts val="0"/>
-              </a:spcBef>
-              <a:spcAft>
-                <a:spcPts val="0"/>
-              </a:spcAft>
-              <a:buNone/>
-              <a:defRPr lang="ja-JP" sz="800" b="0">
+            <a:pPr>
+              <a:lnSpc>
+                <a:spcPct val="105000"/>
+              </a:lnSpc>
+              <a:spcBef>
+                <a:spcPts val="0"/>
+              </a:spcBef>
+              <a:spcAft>
+                <a:spcPts val="0"/>
+              </a:spcAft>
+              <a:buNone/>
+              <a:defRPr sz="2000" b="0" lang="ja-JP">
+                <a:solidFill>
+                  <a:srgbClr val="303437"/>
+                </a:solidFill>
+                <a:latin typeface="Noto Sans"/>
+                <a:ea typeface="Noto Sans CJK JP"/>
+                <a:cs typeface="Noto Sans"/>
+              </a:defRPr>
+            </a:pPr>
+            <a:r>
+              <a:rPr sz="2000" b="0" lang="ja-JP">
+                <a:solidFill>
+                  <a:srgbClr val="303437"/>
+                </a:solidFill>
+                <a:latin typeface="Noto Sans"/>
+                <a:ea typeface="Noto Sans CJK JP"/>
+                <a:cs typeface="Noto Sans"/>
+              </a:rPr>
+              <a:t>COCO API</a:t>
+            </a:r>
+          </a:p>
+        </p:txBody>
+      </p:sp>
+      <p:sp>
+        <p:nvSpPr>
+          <p:cNvPr id="9" name="TextBox 8"/>
+          <p:cNvSpPr txBox="1"/>
+          <p:nvPr/>
+        </p:nvSpPr>
+        <p:spPr>
+          <a:xfrm>
+            <a:off x="594360" y="3621024"/>
+            <a:ext cx="7955279" cy="594360"/>
+          </a:xfrm>
+          <a:prstGeom prst="rect">
+            <a:avLst/>
+          </a:prstGeom>
+          <a:noFill/>
+        </p:spPr>
+        <p:txBody>
+          <a:bodyPr wrap="square" lIns="0" rIns="0" tIns="0" bIns="0" anchor="t">
+            <a:spAutoFit/>
+          </a:bodyPr>
+          <a:lstStyle/>
+          <a:p>
+            <a:pPr>
+              <a:lnSpc>
+                <a:spcPct val="105000"/>
+              </a:lnSpc>
+              <a:spcBef>
+                <a:spcPts val="0"/>
+              </a:spcBef>
+              <a:spcAft>
+                <a:spcPts val="0"/>
+              </a:spcAft>
+              <a:buNone/>
+              <a:defRPr sz="1300" b="0" lang="ja-JP">
                 <a:solidFill>
                   <a:srgbClr val="626669"/>
                 </a:solidFill>
@@ -24063,16 +25530,161 @@
               </a:defRPr>
             </a:pPr>
             <a:r>
-              <a:rPr lang="ja-JP" sz="800" b="0">
+              <a:rPr sz="1300" b="0" lang="ja-JP">
                 <a:solidFill>
                   <a:srgbClr val="626669"/>
                 </a:solidFill>
                 <a:latin typeface="Noto Sans"/>
                 <a:ea typeface="Noto Sans CJK JP"/>
                 <a:cs typeface="Noto Sans"/>
-                <a:hlinkClick r:id="rId2"/>
-              </a:rPr>
-              <a:t>https://arxiv.org/abs/1405.0312</a:t>
+              </a:rPr>
+              <a:t>COCO Consortium (n.d.; 参照日 2026-10-15).</a:t>
+            </a:r>
+          </a:p>
+          <a:p>
+            <a:pPr>
+              <a:lnSpc>
+                <a:spcPct val="105000"/>
+              </a:lnSpc>
+              <a:spcBef>
+                <a:spcPts val="0"/>
+              </a:spcBef>
+              <a:spcAft>
+                <a:spcPts val="0"/>
+              </a:spcAft>
+              <a:buNone/>
+              <a:defRPr sz="1300" b="0" lang="ja-JP">
+                <a:solidFill>
+                  <a:srgbClr val="626669"/>
+                </a:solidFill>
+                <a:latin typeface="Noto Sans"/>
+                <a:ea typeface="Noto Sans CJK JP"/>
+                <a:cs typeface="Noto Sans"/>
+              </a:defRPr>
+            </a:pPr>
+            <a:r>
+              <a:rPr sz="1300" b="0" lang="ja-JP">
+                <a:solidFill>
+                  <a:srgbClr val="626669"/>
+                </a:solidFill>
+                <a:latin typeface="Noto Sans"/>
+                <a:ea typeface="Noto Sans CJK JP"/>
+                <a:cs typeface="Noto Sans"/>
+              </a:rPr>
+              <a:t>GitHub, cocodataset/cocoapi.</a:t>
+            </a:r>
+          </a:p>
+        </p:txBody>
+      </p:sp>
+      <p:sp>
+        <p:nvSpPr>
+          <p:cNvPr id="10" name="TextBox 9"/>
+          <p:cNvSpPr txBox="1"/>
+          <p:nvPr/>
+        </p:nvSpPr>
+        <p:spPr>
+          <a:xfrm>
+            <a:off x="594360" y="4160520"/>
+            <a:ext cx="7955279" cy="521207"/>
+          </a:xfrm>
+          <a:prstGeom prst="rect">
+            <a:avLst/>
+          </a:prstGeom>
+          <a:noFill/>
+        </p:spPr>
+        <p:txBody>
+          <a:bodyPr wrap="square" lIns="0" rIns="0" tIns="0" bIns="0" anchor="t">
+            <a:spAutoFit/>
+          </a:bodyPr>
+          <a:lstStyle/>
+          <a:p>
+            <a:pPr>
+              <a:lnSpc>
+                <a:spcPct val="105000"/>
+              </a:lnSpc>
+              <a:spcBef>
+                <a:spcPts val="0"/>
+              </a:spcBef>
+              <a:spcAft>
+                <a:spcPts val="0"/>
+              </a:spcAft>
+              <a:buNone/>
+              <a:defRPr sz="1800" b="0" lang="ja-JP">
+                <a:solidFill>
+                  <a:srgbClr val="303437"/>
+                </a:solidFill>
+                <a:latin typeface="Noto Sans"/>
+                <a:ea typeface="Noto Sans CJK JP"/>
+                <a:cs typeface="Noto Sans"/>
+              </a:defRPr>
+            </a:pPr>
+            <a:r>
+              <a:rPr sz="1800" b="0" lang="ja-JP">
+                <a:solidFill>
+                  <a:srgbClr val="303437"/>
+                </a:solidFill>
+                <a:latin typeface="Noto Sans"/>
+                <a:ea typeface="Noto Sans CJK JP"/>
+                <a:cs typeface="Noto Sans"/>
+              </a:rPr>
+              <a:t>COCOの公式実装。画像・注釈の読込み、マスク表現、検出と領域分割の評価コードを提供する。</a:t>
+            </a:r>
+          </a:p>
+        </p:txBody>
+      </p:sp>
+      <p:sp>
+        <p:nvSpPr>
+          <p:cNvPr id="11" name="TextBox 10"/>
+          <p:cNvSpPr txBox="1"/>
+          <p:nvPr/>
+        </p:nvSpPr>
+        <p:spPr>
+          <a:xfrm>
+            <a:off x="594360" y="4882896"/>
+            <a:ext cx="7955279" cy="182880"/>
+          </a:xfrm>
+          <a:prstGeom prst="rect">
+            <a:avLst/>
+          </a:prstGeom>
+          <a:noFill/>
+        </p:spPr>
+        <p:txBody>
+          <a:bodyPr wrap="square" lIns="0" rIns="0" tIns="0" bIns="0" anchor="t">
+            <a:spAutoFit/>
+          </a:bodyPr>
+          <a:lstStyle/>
+          <a:p>
+            <a:pPr>
+              <a:lnSpc>
+                <a:spcPct val="105000"/>
+              </a:lnSpc>
+              <a:spcBef>
+                <a:spcPts val="0"/>
+              </a:spcBef>
+              <a:spcAft>
+                <a:spcPts val="0"/>
+              </a:spcAft>
+              <a:buNone/>
+              <a:defRPr sz="1100" b="0" lang="ja-JP">
+                <a:solidFill>
+                  <a:srgbClr val="626669"/>
+                </a:solidFill>
+                <a:latin typeface="Noto Sans"/>
+                <a:ea typeface="Noto Sans CJK JP"/>
+                <a:cs typeface="Noto Sans"/>
+              </a:defRPr>
+            </a:pPr>
+            <a:r>
+              <a:rPr sz="1100" b="0" lang="ja-JP">
+                <a:solidFill>
+                  <a:srgbClr val="626669"/>
+                </a:solidFill>
+                <a:latin typeface="Noto Sans"/>
+                <a:ea typeface="Noto Sans CJK JP"/>
+                <a:cs typeface="Noto Sans"/>
+                <a:hlinkClick r:id="rId3"/>
+              </a:rPr>
+              <a:t>https://github.com/cocodataset/cocoapi</a:t>
             </a:r>
           </a:p>
         </p:txBody>
@@ -24211,8 +25823,8 @@
         </p:nvSpPr>
         <p:spPr>
           <a:xfrm>
-            <a:off x="594360" y="1508760"/>
-            <a:ext cx="7955279" cy="868680"/>
+            <a:off x="594360" y="1234440"/>
+            <a:ext cx="7955279" cy="292608"/>
           </a:xfrm>
           <a:prstGeom prst="rect">
             <a:avLst/>
@@ -24220,41 +25832,41 @@
           <a:noFill/>
         </p:spPr>
         <p:txBody>
-          <a:bodyPr wrap="square" anchor="t" lIns="0" rIns="0" tIns="0" bIns="0">
+          <a:bodyPr wrap="square" lIns="0" rIns="0" tIns="0" bIns="0" anchor="t">
             <a:spAutoFit/>
           </a:bodyPr>
           <a:lstStyle/>
           <a:p>
-            <a:pPr algn="l">
-              <a:lnSpc>
-                <a:spcPct val="115000"/>
-              </a:lnSpc>
-              <a:spcBef>
-                <a:spcPts val="0"/>
-              </a:spcBef>
-              <a:spcAft>
-                <a:spcPts val="0"/>
-              </a:spcAft>
-              <a:buNone/>
-              <a:defRPr lang="ja-JP" sz="2400" b="1">
-                <a:solidFill>
-                  <a:srgbClr val="303437"/>
-                </a:solidFill>
-                <a:latin typeface="Noto Sans"/>
-                <a:ea typeface="Noto Sans CJK JP"/>
-                <a:cs typeface="Noto Sans"/>
-              </a:defRPr>
-            </a:pPr>
-            <a:r>
-              <a:rPr lang="ja-JP" sz="2400" b="1">
-                <a:solidFill>
-                  <a:srgbClr val="303437"/>
-                </a:solidFill>
-                <a:latin typeface="Noto Sans"/>
-                <a:ea typeface="Noto Sans CJK JP"/>
-                <a:cs typeface="Noto Sans"/>
-              </a:rPr>
-              <a:t>COCO API</a:t>
+            <a:pPr>
+              <a:lnSpc>
+                <a:spcPct val="105000"/>
+              </a:lnSpc>
+              <a:spcBef>
+                <a:spcPts val="0"/>
+              </a:spcBef>
+              <a:spcAft>
+                <a:spcPts val="0"/>
+              </a:spcAft>
+              <a:buNone/>
+              <a:defRPr sz="2000" b="0" lang="ja-JP">
+                <a:solidFill>
+                  <a:srgbClr val="303437"/>
+                </a:solidFill>
+                <a:latin typeface="Noto Sans"/>
+                <a:ea typeface="Noto Sans CJK JP"/>
+                <a:cs typeface="Noto Sans"/>
+              </a:defRPr>
+            </a:pPr>
+            <a:r>
+              <a:rPr sz="2000" b="0" lang="ja-JP">
+                <a:solidFill>
+                  <a:srgbClr val="303437"/>
+                </a:solidFill>
+                <a:latin typeface="Noto Sans"/>
+                <a:ea typeface="Noto Sans CJK JP"/>
+                <a:cs typeface="Noto Sans"/>
+              </a:rPr>
+              <a:t>COCO-Stuff: Thing and Stuff Classes in Context</a:t>
             </a:r>
           </a:p>
         </p:txBody>
@@ -24267,8 +25879,8 @@
         </p:nvSpPr>
         <p:spPr>
           <a:xfrm>
-            <a:off x="594360" y="2487168"/>
-            <a:ext cx="7955279" cy="548640"/>
+            <a:off x="594360" y="1655064"/>
+            <a:ext cx="7955279" cy="594360"/>
           </a:xfrm>
           <a:prstGeom prst="rect">
             <a:avLst/>
@@ -24276,41 +25888,74 @@
           <a:noFill/>
         </p:spPr>
         <p:txBody>
-          <a:bodyPr wrap="square" anchor="t" lIns="0" rIns="0" tIns="0" bIns="0">
+          <a:bodyPr wrap="square" lIns="0" rIns="0" tIns="0" bIns="0" anchor="t">
             <a:spAutoFit/>
           </a:bodyPr>
           <a:lstStyle/>
           <a:p>
-            <a:pPr algn="l">
-              <a:lnSpc>
-                <a:spcPct val="115000"/>
-              </a:lnSpc>
-              <a:spcBef>
-                <a:spcPts val="0"/>
-              </a:spcBef>
-              <a:spcAft>
-                <a:spcPts val="0"/>
-              </a:spcAft>
-              <a:buNone/>
-              <a:defRPr lang="ja-JP" sz="1400" b="0">
-                <a:solidFill>
-                  <a:srgbClr val="303437"/>
-                </a:solidFill>
-                <a:latin typeface="Noto Sans"/>
-                <a:ea typeface="Noto Sans CJK JP"/>
-                <a:cs typeface="Noto Sans"/>
-              </a:defRPr>
-            </a:pPr>
-            <a:r>
-              <a:rPr lang="ja-JP" sz="1400" b="0">
-                <a:solidFill>
-                  <a:srgbClr val="303437"/>
-                </a:solidFill>
-                <a:latin typeface="Noto Sans"/>
-                <a:ea typeface="Noto Sans CJK JP"/>
-                <a:cs typeface="Noto Sans"/>
-              </a:rPr>
-              <a:t>COCO Consortium (n.d.; 参照日 2026-10-15).</a:t>
+            <a:pPr>
+              <a:lnSpc>
+                <a:spcPct val="105000"/>
+              </a:lnSpc>
+              <a:spcBef>
+                <a:spcPts val="0"/>
+              </a:spcBef>
+              <a:spcAft>
+                <a:spcPts val="0"/>
+              </a:spcAft>
+              <a:buNone/>
+              <a:defRPr sz="1300" b="0" lang="ja-JP">
+                <a:solidFill>
+                  <a:srgbClr val="626669"/>
+                </a:solidFill>
+                <a:latin typeface="Noto Sans"/>
+                <a:ea typeface="Noto Sans CJK JP"/>
+                <a:cs typeface="Noto Sans"/>
+              </a:defRPr>
+            </a:pPr>
+            <a:r>
+              <a:rPr sz="1300" b="0" lang="ja-JP">
+                <a:solidFill>
+                  <a:srgbClr val="626669"/>
+                </a:solidFill>
+                <a:latin typeface="Noto Sans"/>
+                <a:ea typeface="Noto Sans CJK JP"/>
+                <a:cs typeface="Noto Sans"/>
+              </a:rPr>
+              <a:t>Holger Caesar, Jasper Uijlings, Vittorio Ferrari (2018).</a:t>
+            </a:r>
+          </a:p>
+          <a:p>
+            <a:pPr>
+              <a:lnSpc>
+                <a:spcPct val="105000"/>
+              </a:lnSpc>
+              <a:spcBef>
+                <a:spcPts val="0"/>
+              </a:spcBef>
+              <a:spcAft>
+                <a:spcPts val="0"/>
+              </a:spcAft>
+              <a:buNone/>
+              <a:defRPr sz="1300" b="0" lang="ja-JP">
+                <a:solidFill>
+                  <a:srgbClr val="626669"/>
+                </a:solidFill>
+                <a:latin typeface="Noto Sans"/>
+                <a:ea typeface="Noto Sans CJK JP"/>
+                <a:cs typeface="Noto Sans"/>
+              </a:defRPr>
+            </a:pPr>
+            <a:r>
+              <a:rPr sz="1300" b="0" lang="ja-JP">
+                <a:solidFill>
+                  <a:srgbClr val="626669"/>
+                </a:solidFill>
+                <a:latin typeface="Noto Sans"/>
+                <a:ea typeface="Noto Sans CJK JP"/>
+                <a:cs typeface="Noto Sans"/>
+              </a:rPr>
+              <a:t>IEEE/CVF Conference on Computer Vision and Pattern Recognition (CVPR), pp. 1209–1218.</a:t>
             </a:r>
           </a:p>
         </p:txBody>
@@ -24323,8 +25968,8 @@
         </p:nvSpPr>
         <p:spPr>
           <a:xfrm>
-            <a:off x="594360" y="3063240"/>
-            <a:ext cx="7955279" cy="548640"/>
+            <a:off x="594360" y="2194560"/>
+            <a:ext cx="7955279" cy="521207"/>
           </a:xfrm>
           <a:prstGeom prst="rect">
             <a:avLst/>
@@ -24332,41 +25977,41 @@
           <a:noFill/>
         </p:spPr>
         <p:txBody>
-          <a:bodyPr wrap="square" anchor="t" lIns="0" rIns="0" tIns="0" bIns="0">
+          <a:bodyPr wrap="square" lIns="0" rIns="0" tIns="0" bIns="0" anchor="t">
             <a:spAutoFit/>
           </a:bodyPr>
           <a:lstStyle/>
           <a:p>
-            <a:pPr algn="l">
-              <a:lnSpc>
-                <a:spcPct val="115000"/>
-              </a:lnSpc>
-              <a:spcBef>
-                <a:spcPts val="0"/>
-              </a:spcBef>
-              <a:spcAft>
-                <a:spcPts val="0"/>
-              </a:spcAft>
-              <a:buNone/>
-              <a:defRPr lang="ja-JP" sz="1400" b="0">
-                <a:solidFill>
-                  <a:srgbClr val="626669"/>
-                </a:solidFill>
-                <a:latin typeface="Noto Sans"/>
-                <a:ea typeface="Noto Sans CJK JP"/>
-                <a:cs typeface="Noto Sans"/>
-              </a:defRPr>
-            </a:pPr>
-            <a:r>
-              <a:rPr lang="ja-JP" sz="1400" b="0">
-                <a:solidFill>
-                  <a:srgbClr val="626669"/>
-                </a:solidFill>
-                <a:latin typeface="Noto Sans"/>
-                <a:ea typeface="Noto Sans CJK JP"/>
-                <a:cs typeface="Noto Sans"/>
-              </a:rPr>
-              <a:t>GitHub, cocodataset/cocoapi.</a:t>
+            <a:pPr>
+              <a:lnSpc>
+                <a:spcPct val="105000"/>
+              </a:lnSpc>
+              <a:spcBef>
+                <a:spcPts val="0"/>
+              </a:spcBef>
+              <a:spcAft>
+                <a:spcPts val="0"/>
+              </a:spcAft>
+              <a:buNone/>
+              <a:defRPr sz="1800" b="0" lang="ja-JP">
+                <a:solidFill>
+                  <a:srgbClr val="303437"/>
+                </a:solidFill>
+                <a:latin typeface="Noto Sans"/>
+                <a:ea typeface="Noto Sans CJK JP"/>
+                <a:cs typeface="Noto Sans"/>
+              </a:defRPr>
+            </a:pPr>
+            <a:r>
+              <a:rPr sz="1800" b="0" lang="ja-JP">
+                <a:solidFill>
+                  <a:srgbClr val="303437"/>
+                </a:solidFill>
+                <a:latin typeface="Noto Sans"/>
+                <a:ea typeface="Noto Sans CJK JP"/>
+                <a:cs typeface="Noto Sans"/>
+              </a:rPr>
+              <a:t>COCOへ背景領域の画素注釈を加えた研究。物体と背景を合わせた場面理解用データを提示する。</a:t>
             </a:r>
           </a:p>
         </p:txBody>
@@ -24379,8 +26024,8 @@
         </p:nvSpPr>
         <p:spPr>
           <a:xfrm>
-            <a:off x="594360" y="3675887"/>
-            <a:ext cx="7955279" cy="960120"/>
+            <a:off x="594360" y="2916936"/>
+            <a:ext cx="7955279" cy="182880"/>
           </a:xfrm>
           <a:prstGeom prst="rect">
             <a:avLst/>
@@ -24388,41 +26033,42 @@
           <a:noFill/>
         </p:spPr>
         <p:txBody>
-          <a:bodyPr wrap="square" anchor="t" lIns="0" rIns="0" tIns="0" bIns="0">
+          <a:bodyPr wrap="square" lIns="0" rIns="0" tIns="0" bIns="0" anchor="t">
             <a:spAutoFit/>
           </a:bodyPr>
           <a:lstStyle/>
           <a:p>
-            <a:pPr algn="l">
-              <a:lnSpc>
-                <a:spcPct val="115000"/>
-              </a:lnSpc>
-              <a:spcBef>
-                <a:spcPts val="0"/>
-              </a:spcBef>
-              <a:spcAft>
-                <a:spcPts val="0"/>
-              </a:spcAft>
-              <a:buNone/>
-              <a:defRPr lang="ja-JP" sz="2100" b="0">
-                <a:solidFill>
-                  <a:srgbClr val="303437"/>
-                </a:solidFill>
-                <a:latin typeface="Noto Sans"/>
-                <a:ea typeface="Noto Sans CJK JP"/>
-                <a:cs typeface="Noto Sans"/>
-              </a:defRPr>
-            </a:pPr>
-            <a:r>
-              <a:rPr lang="ja-JP" sz="2100" b="0">
-                <a:solidFill>
-                  <a:srgbClr val="303437"/>
-                </a:solidFill>
-                <a:latin typeface="Noto Sans"/>
-                <a:ea typeface="Noto Sans CJK JP"/>
-                <a:cs typeface="Noto Sans"/>
-              </a:rPr>
-              <a:t>COCOの公式実装。画像・注釈の読込み、マスク表現、検出と領域分割の評価コードを提供する。</a:t>
+            <a:pPr>
+              <a:lnSpc>
+                <a:spcPct val="105000"/>
+              </a:lnSpc>
+              <a:spcBef>
+                <a:spcPts val="0"/>
+              </a:spcBef>
+              <a:spcAft>
+                <a:spcPts val="0"/>
+              </a:spcAft>
+              <a:buNone/>
+              <a:defRPr sz="1100" b="0" lang="ja-JP">
+                <a:solidFill>
+                  <a:srgbClr val="626669"/>
+                </a:solidFill>
+                <a:latin typeface="Noto Sans"/>
+                <a:ea typeface="Noto Sans CJK JP"/>
+                <a:cs typeface="Noto Sans"/>
+              </a:defRPr>
+            </a:pPr>
+            <a:r>
+              <a:rPr sz="1100" b="0" lang="ja-JP">
+                <a:solidFill>
+                  <a:srgbClr val="626669"/>
+                </a:solidFill>
+                <a:latin typeface="Noto Sans"/>
+                <a:ea typeface="Noto Sans CJK JP"/>
+                <a:cs typeface="Noto Sans"/>
+                <a:hlinkClick r:id="rId3"/>
+              </a:rPr>
+              <a:t>https://arxiv.org/abs/1612.03716</a:t>
             </a:r>
           </a:p>
         </p:txBody>
@@ -24435,8 +26081,8 @@
         </p:nvSpPr>
         <p:spPr>
           <a:xfrm>
-            <a:off x="502920" y="4754880"/>
-            <a:ext cx="8183879" cy="320040"/>
+            <a:off x="594360" y="3200400"/>
+            <a:ext cx="7955279" cy="292608"/>
           </a:xfrm>
           <a:prstGeom prst="rect">
             <a:avLst/>
@@ -24444,23 +26090,79 @@
           <a:noFill/>
         </p:spPr>
         <p:txBody>
-          <a:bodyPr wrap="square" anchor="t" lIns="0" rIns="0" tIns="0" bIns="0">
+          <a:bodyPr wrap="square" lIns="0" rIns="0" tIns="0" bIns="0" anchor="t">
             <a:spAutoFit/>
           </a:bodyPr>
           <a:lstStyle/>
           <a:p>
-            <a:pPr algn="l">
-              <a:lnSpc>
-                <a:spcPct val="115000"/>
-              </a:lnSpc>
-              <a:spcBef>
-                <a:spcPts val="0"/>
-              </a:spcBef>
-              <a:spcAft>
-                <a:spcPts val="0"/>
-              </a:spcAft>
-              <a:buNone/>
-              <a:defRPr lang="ja-JP" sz="800" b="0">
+            <a:pPr>
+              <a:lnSpc>
+                <a:spcPct val="105000"/>
+              </a:lnSpc>
+              <a:spcBef>
+                <a:spcPts val="0"/>
+              </a:spcBef>
+              <a:spcAft>
+                <a:spcPts val="0"/>
+              </a:spcAft>
+              <a:buNone/>
+              <a:defRPr sz="2000" b="0" lang="ja-JP">
+                <a:solidFill>
+                  <a:srgbClr val="303437"/>
+                </a:solidFill>
+                <a:latin typeface="Noto Sans"/>
+                <a:ea typeface="Noto Sans CJK JP"/>
+                <a:cs typeface="Noto Sans"/>
+              </a:defRPr>
+            </a:pPr>
+            <a:r>
+              <a:rPr sz="2000" b="0" lang="ja-JP">
+                <a:solidFill>
+                  <a:srgbClr val="303437"/>
+                </a:solidFill>
+                <a:latin typeface="Noto Sans"/>
+                <a:ea typeface="Noto Sans CJK JP"/>
+                <a:cs typeface="Noto Sans"/>
+              </a:rPr>
+              <a:t>Panoptic Segmentation</a:t>
+            </a:r>
+          </a:p>
+        </p:txBody>
+      </p:sp>
+      <p:sp>
+        <p:nvSpPr>
+          <p:cNvPr id="9" name="TextBox 8"/>
+          <p:cNvSpPr txBox="1"/>
+          <p:nvPr/>
+        </p:nvSpPr>
+        <p:spPr>
+          <a:xfrm>
+            <a:off x="594360" y="3621024"/>
+            <a:ext cx="7955279" cy="594360"/>
+          </a:xfrm>
+          <a:prstGeom prst="rect">
+            <a:avLst/>
+          </a:prstGeom>
+          <a:noFill/>
+        </p:spPr>
+        <p:txBody>
+          <a:bodyPr wrap="square" lIns="0" rIns="0" tIns="0" bIns="0" anchor="t">
+            <a:spAutoFit/>
+          </a:bodyPr>
+          <a:lstStyle/>
+          <a:p>
+            <a:pPr>
+              <a:lnSpc>
+                <a:spcPct val="105000"/>
+              </a:lnSpc>
+              <a:spcBef>
+                <a:spcPts val="0"/>
+              </a:spcBef>
+              <a:spcAft>
+                <a:spcPts val="0"/>
+              </a:spcAft>
+              <a:buNone/>
+              <a:defRPr sz="1300" b="0" lang="ja-JP">
                 <a:solidFill>
                   <a:srgbClr val="626669"/>
                 </a:solidFill>
@@ -24470,16 +26172,161 @@
               </a:defRPr>
             </a:pPr>
             <a:r>
-              <a:rPr lang="ja-JP" sz="800" b="0">
+              <a:rPr sz="1300" b="0" lang="ja-JP">
                 <a:solidFill>
                   <a:srgbClr val="626669"/>
                 </a:solidFill>
                 <a:latin typeface="Noto Sans"/>
                 <a:ea typeface="Noto Sans CJK JP"/>
                 <a:cs typeface="Noto Sans"/>
-                <a:hlinkClick r:id="rId2"/>
-              </a:rPr>
-              <a:t>https://github.com/cocodataset/cocoapi</a:t>
+              </a:rPr>
+              <a:t>Alexander Kirillov, Kaiming He, Ross Girshick, Carsten Rother, Piotr Dollár (2019).</a:t>
+            </a:r>
+          </a:p>
+          <a:p>
+            <a:pPr>
+              <a:lnSpc>
+                <a:spcPct val="105000"/>
+              </a:lnSpc>
+              <a:spcBef>
+                <a:spcPts val="0"/>
+              </a:spcBef>
+              <a:spcAft>
+                <a:spcPts val="0"/>
+              </a:spcAft>
+              <a:buNone/>
+              <a:defRPr sz="1300" b="0" lang="ja-JP">
+                <a:solidFill>
+                  <a:srgbClr val="626669"/>
+                </a:solidFill>
+                <a:latin typeface="Noto Sans"/>
+                <a:ea typeface="Noto Sans CJK JP"/>
+                <a:cs typeface="Noto Sans"/>
+              </a:defRPr>
+            </a:pPr>
+            <a:r>
+              <a:rPr sz="1300" b="0" lang="ja-JP">
+                <a:solidFill>
+                  <a:srgbClr val="626669"/>
+                </a:solidFill>
+                <a:latin typeface="Noto Sans"/>
+                <a:ea typeface="Noto Sans CJK JP"/>
+                <a:cs typeface="Noto Sans"/>
+              </a:rPr>
+              <a:t>IEEE/CVF Conference on Computer Vision and Pattern Recognition (CVPR), pp. 9404–9413.</a:t>
+            </a:r>
+          </a:p>
+        </p:txBody>
+      </p:sp>
+      <p:sp>
+        <p:nvSpPr>
+          <p:cNvPr id="10" name="TextBox 9"/>
+          <p:cNvSpPr txBox="1"/>
+          <p:nvPr/>
+        </p:nvSpPr>
+        <p:spPr>
+          <a:xfrm>
+            <a:off x="594360" y="4160520"/>
+            <a:ext cx="7955279" cy="521207"/>
+          </a:xfrm>
+          <a:prstGeom prst="rect">
+            <a:avLst/>
+          </a:prstGeom>
+          <a:noFill/>
+        </p:spPr>
+        <p:txBody>
+          <a:bodyPr wrap="square" lIns="0" rIns="0" tIns="0" bIns="0" anchor="t">
+            <a:spAutoFit/>
+          </a:bodyPr>
+          <a:lstStyle/>
+          <a:p>
+            <a:pPr>
+              <a:lnSpc>
+                <a:spcPct val="105000"/>
+              </a:lnSpc>
+              <a:spcBef>
+                <a:spcPts val="0"/>
+              </a:spcBef>
+              <a:spcAft>
+                <a:spcPts val="0"/>
+              </a:spcAft>
+              <a:buNone/>
+              <a:defRPr sz="1800" b="0" lang="ja-JP">
+                <a:solidFill>
+                  <a:srgbClr val="303437"/>
+                </a:solidFill>
+                <a:latin typeface="Noto Sans"/>
+                <a:ea typeface="Noto Sans CJK JP"/>
+                <a:cs typeface="Noto Sans"/>
+              </a:defRPr>
+            </a:pPr>
+            <a:r>
+              <a:rPr sz="1800" b="0" lang="ja-JP">
+                <a:solidFill>
+                  <a:srgbClr val="303437"/>
+                </a:solidFill>
+                <a:latin typeface="Noto Sans"/>
+                <a:ea typeface="Noto Sans CJK JP"/>
+                <a:cs typeface="Noto Sans"/>
+              </a:rPr>
+              <a:t>意味的領域分割とインスタンス分割を統合する課題を定義した研究。共通指標Panoptic Qualityを提案する。</a:t>
+            </a:r>
+          </a:p>
+        </p:txBody>
+      </p:sp>
+      <p:sp>
+        <p:nvSpPr>
+          <p:cNvPr id="11" name="TextBox 10"/>
+          <p:cNvSpPr txBox="1"/>
+          <p:nvPr/>
+        </p:nvSpPr>
+        <p:spPr>
+          <a:xfrm>
+            <a:off x="594360" y="4882896"/>
+            <a:ext cx="7955279" cy="182880"/>
+          </a:xfrm>
+          <a:prstGeom prst="rect">
+            <a:avLst/>
+          </a:prstGeom>
+          <a:noFill/>
+        </p:spPr>
+        <p:txBody>
+          <a:bodyPr wrap="square" lIns="0" rIns="0" tIns="0" bIns="0" anchor="t">
+            <a:spAutoFit/>
+          </a:bodyPr>
+          <a:lstStyle/>
+          <a:p>
+            <a:pPr>
+              <a:lnSpc>
+                <a:spcPct val="105000"/>
+              </a:lnSpc>
+              <a:spcBef>
+                <a:spcPts val="0"/>
+              </a:spcBef>
+              <a:spcAft>
+                <a:spcPts val="0"/>
+              </a:spcAft>
+              <a:buNone/>
+              <a:defRPr sz="1100" b="0" lang="ja-JP">
+                <a:solidFill>
+                  <a:srgbClr val="626669"/>
+                </a:solidFill>
+                <a:latin typeface="Noto Sans"/>
+                <a:ea typeface="Noto Sans CJK JP"/>
+                <a:cs typeface="Noto Sans"/>
+              </a:defRPr>
+            </a:pPr>
+            <a:r>
+              <a:rPr sz="1100" b="0" lang="ja-JP">
+                <a:solidFill>
+                  <a:srgbClr val="626669"/>
+                </a:solidFill>
+                <a:latin typeface="Noto Sans"/>
+                <a:ea typeface="Noto Sans CJK JP"/>
+                <a:cs typeface="Noto Sans"/>
+                <a:hlinkClick r:id="rId4"/>
+              </a:rPr>
+              <a:t>https://arxiv.org/abs/1801.00868</a:t>
             </a:r>
           </a:p>
         </p:txBody>
@@ -24618,8 +26465,8 @@
         </p:nvSpPr>
         <p:spPr>
           <a:xfrm>
-            <a:off x="594360" y="1508760"/>
-            <a:ext cx="7955279" cy="868680"/>
+            <a:off x="594360" y="1234440"/>
+            <a:ext cx="7955279" cy="292608"/>
           </a:xfrm>
           <a:prstGeom prst="rect">
             <a:avLst/>
@@ -24627,41 +26474,41 @@
           <a:noFill/>
         </p:spPr>
         <p:txBody>
-          <a:bodyPr wrap="square" anchor="t" lIns="0" rIns="0" tIns="0" bIns="0">
+          <a:bodyPr wrap="square" lIns="0" rIns="0" tIns="0" bIns="0" anchor="t">
             <a:spAutoFit/>
           </a:bodyPr>
           <a:lstStyle/>
           <a:p>
-            <a:pPr algn="l">
-              <a:lnSpc>
-                <a:spcPct val="115000"/>
-              </a:lnSpc>
-              <a:spcBef>
-                <a:spcPts val="0"/>
-              </a:spcBef>
-              <a:spcAft>
-                <a:spcPts val="0"/>
-              </a:spcAft>
-              <a:buNone/>
-              <a:defRPr lang="ja-JP" sz="2400" b="1">
-                <a:solidFill>
-                  <a:srgbClr val="303437"/>
-                </a:solidFill>
-                <a:latin typeface="Noto Sans"/>
-                <a:ea typeface="Noto Sans CJK JP"/>
-                <a:cs typeface="Noto Sans"/>
-              </a:defRPr>
-            </a:pPr>
-            <a:r>
-              <a:rPr lang="ja-JP" sz="2400" b="1">
-                <a:solidFill>
-                  <a:srgbClr val="303437"/>
-                </a:solidFill>
-                <a:latin typeface="Noto Sans"/>
-                <a:ea typeface="Noto Sans CJK JP"/>
-                <a:cs typeface="Noto Sans"/>
-              </a:rPr>
-              <a:t>COCO-Stuff: Thing and Stuff Classes in Context</a:t>
+            <a:pPr>
+              <a:lnSpc>
+                <a:spcPct val="105000"/>
+              </a:lnSpc>
+              <a:spcBef>
+                <a:spcPts val="0"/>
+              </a:spcBef>
+              <a:spcAft>
+                <a:spcPts val="0"/>
+              </a:spcAft>
+              <a:buNone/>
+              <a:defRPr sz="2000" b="0" lang="ja-JP">
+                <a:solidFill>
+                  <a:srgbClr val="303437"/>
+                </a:solidFill>
+                <a:latin typeface="Noto Sans"/>
+                <a:ea typeface="Noto Sans CJK JP"/>
+                <a:cs typeface="Noto Sans"/>
+              </a:defRPr>
+            </a:pPr>
+            <a:r>
+              <a:rPr sz="2000" b="0" lang="ja-JP">
+                <a:solidFill>
+                  <a:srgbClr val="303437"/>
+                </a:solidFill>
+                <a:latin typeface="Noto Sans"/>
+                <a:ea typeface="Noto Sans CJK JP"/>
+                <a:cs typeface="Noto Sans"/>
+              </a:rPr>
+              <a:t>Mask R-CNN</a:t>
             </a:r>
           </a:p>
         </p:txBody>
@@ -24674,8 +26521,8 @@
         </p:nvSpPr>
         <p:spPr>
           <a:xfrm>
-            <a:off x="594360" y="2487168"/>
-            <a:ext cx="7955279" cy="548640"/>
+            <a:off x="594360" y="1655064"/>
+            <a:ext cx="7955279" cy="594360"/>
           </a:xfrm>
           <a:prstGeom prst="rect">
             <a:avLst/>
@@ -24683,41 +26530,74 @@
           <a:noFill/>
         </p:spPr>
         <p:txBody>
-          <a:bodyPr wrap="square" anchor="t" lIns="0" rIns="0" tIns="0" bIns="0">
+          <a:bodyPr wrap="square" lIns="0" rIns="0" tIns="0" bIns="0" anchor="t">
             <a:spAutoFit/>
           </a:bodyPr>
           <a:lstStyle/>
           <a:p>
-            <a:pPr algn="l">
-              <a:lnSpc>
-                <a:spcPct val="115000"/>
-              </a:lnSpc>
-              <a:spcBef>
-                <a:spcPts val="0"/>
-              </a:spcBef>
-              <a:spcAft>
-                <a:spcPts val="0"/>
-              </a:spcAft>
-              <a:buNone/>
-              <a:defRPr lang="ja-JP" sz="1400" b="0">
-                <a:solidFill>
-                  <a:srgbClr val="303437"/>
-                </a:solidFill>
-                <a:latin typeface="Noto Sans"/>
-                <a:ea typeface="Noto Sans CJK JP"/>
-                <a:cs typeface="Noto Sans"/>
-              </a:defRPr>
-            </a:pPr>
-            <a:r>
-              <a:rPr lang="ja-JP" sz="1400" b="0">
-                <a:solidFill>
-                  <a:srgbClr val="303437"/>
-                </a:solidFill>
-                <a:latin typeface="Noto Sans"/>
-                <a:ea typeface="Noto Sans CJK JP"/>
-                <a:cs typeface="Noto Sans"/>
-              </a:rPr>
-              <a:t>Holger Caesar, Jasper Uijlings, Vittorio Ferrari (2018).</a:t>
+            <a:pPr>
+              <a:lnSpc>
+                <a:spcPct val="105000"/>
+              </a:lnSpc>
+              <a:spcBef>
+                <a:spcPts val="0"/>
+              </a:spcBef>
+              <a:spcAft>
+                <a:spcPts val="0"/>
+              </a:spcAft>
+              <a:buNone/>
+              <a:defRPr sz="1300" b="0" lang="ja-JP">
+                <a:solidFill>
+                  <a:srgbClr val="626669"/>
+                </a:solidFill>
+                <a:latin typeface="Noto Sans"/>
+                <a:ea typeface="Noto Sans CJK JP"/>
+                <a:cs typeface="Noto Sans"/>
+              </a:defRPr>
+            </a:pPr>
+            <a:r>
+              <a:rPr sz="1300" b="0" lang="ja-JP">
+                <a:solidFill>
+                  <a:srgbClr val="626669"/>
+                </a:solidFill>
+                <a:latin typeface="Noto Sans"/>
+                <a:ea typeface="Noto Sans CJK JP"/>
+                <a:cs typeface="Noto Sans"/>
+              </a:rPr>
+              <a:t>Kaiming He, Georgia Gkioxari, Piotr Dollár, Ross Girshick (2017).</a:t>
+            </a:r>
+          </a:p>
+          <a:p>
+            <a:pPr>
+              <a:lnSpc>
+                <a:spcPct val="105000"/>
+              </a:lnSpc>
+              <a:spcBef>
+                <a:spcPts val="0"/>
+              </a:spcBef>
+              <a:spcAft>
+                <a:spcPts val="0"/>
+              </a:spcAft>
+              <a:buNone/>
+              <a:defRPr sz="1300" b="0" lang="ja-JP">
+                <a:solidFill>
+                  <a:srgbClr val="626669"/>
+                </a:solidFill>
+                <a:latin typeface="Noto Sans"/>
+                <a:ea typeface="Noto Sans CJK JP"/>
+                <a:cs typeface="Noto Sans"/>
+              </a:defRPr>
+            </a:pPr>
+            <a:r>
+              <a:rPr sz="1300" b="0" lang="ja-JP">
+                <a:solidFill>
+                  <a:srgbClr val="626669"/>
+                </a:solidFill>
+                <a:latin typeface="Noto Sans"/>
+                <a:ea typeface="Noto Sans CJK JP"/>
+                <a:cs typeface="Noto Sans"/>
+              </a:rPr>
+              <a:t>IEEE International Conference on Computer Vision (ICCV), pp. 2961–2969.</a:t>
             </a:r>
           </a:p>
         </p:txBody>
@@ -24730,8 +26610,8 @@
         </p:nvSpPr>
         <p:spPr>
           <a:xfrm>
-            <a:off x="594360" y="3063240"/>
-            <a:ext cx="7955279" cy="548640"/>
+            <a:off x="594360" y="2194560"/>
+            <a:ext cx="7955279" cy="521207"/>
           </a:xfrm>
           <a:prstGeom prst="rect">
             <a:avLst/>
@@ -24739,41 +26619,41 @@
           <a:noFill/>
         </p:spPr>
         <p:txBody>
-          <a:bodyPr wrap="square" anchor="t" lIns="0" rIns="0" tIns="0" bIns="0">
+          <a:bodyPr wrap="square" lIns="0" rIns="0" tIns="0" bIns="0" anchor="t">
             <a:spAutoFit/>
           </a:bodyPr>
           <a:lstStyle/>
           <a:p>
-            <a:pPr algn="l">
-              <a:lnSpc>
-                <a:spcPct val="115000"/>
-              </a:lnSpc>
-              <a:spcBef>
-                <a:spcPts val="0"/>
-              </a:spcBef>
-              <a:spcAft>
-                <a:spcPts val="0"/>
-              </a:spcAft>
-              <a:buNone/>
-              <a:defRPr lang="ja-JP" sz="1400" b="0">
-                <a:solidFill>
-                  <a:srgbClr val="626669"/>
-                </a:solidFill>
-                <a:latin typeface="Noto Sans"/>
-                <a:ea typeface="Noto Sans CJK JP"/>
-                <a:cs typeface="Noto Sans"/>
-              </a:defRPr>
-            </a:pPr>
-            <a:r>
-              <a:rPr lang="ja-JP" sz="1400" b="0">
-                <a:solidFill>
-                  <a:srgbClr val="626669"/>
-                </a:solidFill>
-                <a:latin typeface="Noto Sans"/>
-                <a:ea typeface="Noto Sans CJK JP"/>
-                <a:cs typeface="Noto Sans"/>
-              </a:rPr>
-              <a:t>IEEE/CVF Conference on Computer Vision and Pattern Recognition (CVPR), pp. 1209–1218.</a:t>
+            <a:pPr>
+              <a:lnSpc>
+                <a:spcPct val="105000"/>
+              </a:lnSpc>
+              <a:spcBef>
+                <a:spcPts val="0"/>
+              </a:spcBef>
+              <a:spcAft>
+                <a:spcPts val="0"/>
+              </a:spcAft>
+              <a:buNone/>
+              <a:defRPr sz="1800" b="0" lang="ja-JP">
+                <a:solidFill>
+                  <a:srgbClr val="303437"/>
+                </a:solidFill>
+                <a:latin typeface="Noto Sans"/>
+                <a:ea typeface="Noto Sans CJK JP"/>
+                <a:cs typeface="Noto Sans"/>
+              </a:defRPr>
+            </a:pPr>
+            <a:r>
+              <a:rPr sz="1800" b="0" lang="ja-JP">
+                <a:solidFill>
+                  <a:srgbClr val="303437"/>
+                </a:solidFill>
+                <a:latin typeface="Noto Sans"/>
+                <a:ea typeface="Noto Sans CJK JP"/>
+                <a:cs typeface="Noto Sans"/>
+              </a:rPr>
+              <a:t>検出器へ物体ごとのマスク予測を加えた代表的な領域分割モデル。COCO上で検出・分割・人物姿勢の評価を報告する。</a:t>
             </a:r>
           </a:p>
         </p:txBody>
@@ -24786,8 +26666,8 @@
         </p:nvSpPr>
         <p:spPr>
           <a:xfrm>
-            <a:off x="594360" y="3675887"/>
-            <a:ext cx="7955279" cy="960120"/>
+            <a:off x="594360" y="2916936"/>
+            <a:ext cx="7955279" cy="182880"/>
           </a:xfrm>
           <a:prstGeom prst="rect">
             <a:avLst/>
@@ -24795,41 +26675,42 @@
           <a:noFill/>
         </p:spPr>
         <p:txBody>
-          <a:bodyPr wrap="square" anchor="t" lIns="0" rIns="0" tIns="0" bIns="0">
+          <a:bodyPr wrap="square" lIns="0" rIns="0" tIns="0" bIns="0" anchor="t">
             <a:spAutoFit/>
           </a:bodyPr>
           <a:lstStyle/>
           <a:p>
-            <a:pPr algn="l">
-              <a:lnSpc>
-                <a:spcPct val="115000"/>
-              </a:lnSpc>
-              <a:spcBef>
-                <a:spcPts val="0"/>
-              </a:spcBef>
-              <a:spcAft>
-                <a:spcPts val="0"/>
-              </a:spcAft>
-              <a:buNone/>
-              <a:defRPr lang="ja-JP" sz="2100" b="0">
-                <a:solidFill>
-                  <a:srgbClr val="303437"/>
-                </a:solidFill>
-                <a:latin typeface="Noto Sans"/>
-                <a:ea typeface="Noto Sans CJK JP"/>
-                <a:cs typeface="Noto Sans"/>
-              </a:defRPr>
-            </a:pPr>
-            <a:r>
-              <a:rPr lang="ja-JP" sz="2100" b="0">
-                <a:solidFill>
-                  <a:srgbClr val="303437"/>
-                </a:solidFill>
-                <a:latin typeface="Noto Sans"/>
-                <a:ea typeface="Noto Sans CJK JP"/>
-                <a:cs typeface="Noto Sans"/>
-              </a:rPr>
-              <a:t>COCOへ背景領域の画素注釈を加えた研究。物体と背景を合わせた場面理解用データを提示する。</a:t>
+            <a:pPr>
+              <a:lnSpc>
+                <a:spcPct val="105000"/>
+              </a:lnSpc>
+              <a:spcBef>
+                <a:spcPts val="0"/>
+              </a:spcBef>
+              <a:spcAft>
+                <a:spcPts val="0"/>
+              </a:spcAft>
+              <a:buNone/>
+              <a:defRPr sz="1100" b="0" lang="ja-JP">
+                <a:solidFill>
+                  <a:srgbClr val="626669"/>
+                </a:solidFill>
+                <a:latin typeface="Noto Sans"/>
+                <a:ea typeface="Noto Sans CJK JP"/>
+                <a:cs typeface="Noto Sans"/>
+              </a:defRPr>
+            </a:pPr>
+            <a:r>
+              <a:rPr sz="1100" b="0" lang="ja-JP">
+                <a:solidFill>
+                  <a:srgbClr val="626669"/>
+                </a:solidFill>
+                <a:latin typeface="Noto Sans"/>
+                <a:ea typeface="Noto Sans CJK JP"/>
+                <a:cs typeface="Noto Sans"/>
+                <a:hlinkClick r:id="rId3"/>
+              </a:rPr>
+              <a:t>https://arxiv.org/abs/1703.06870</a:t>
             </a:r>
           </a:p>
         </p:txBody>
@@ -24842,8 +26723,8 @@
         </p:nvSpPr>
         <p:spPr>
           <a:xfrm>
-            <a:off x="502920" y="4754880"/>
-            <a:ext cx="8183879" cy="320040"/>
+            <a:off x="594360" y="3200400"/>
+            <a:ext cx="7955279" cy="292608"/>
           </a:xfrm>
           <a:prstGeom prst="rect">
             <a:avLst/>
@@ -24851,182 +26732,144 @@
           <a:noFill/>
         </p:spPr>
         <p:txBody>
-          <a:bodyPr wrap="square" anchor="t" lIns="0" rIns="0" tIns="0" bIns="0">
+          <a:bodyPr wrap="square" lIns="0" rIns="0" tIns="0" bIns="0" anchor="t">
             <a:spAutoFit/>
           </a:bodyPr>
           <a:lstStyle/>
           <a:p>
-            <a:pPr algn="l">
-              <a:lnSpc>
-                <a:spcPct val="115000"/>
-              </a:lnSpc>
-              <a:spcBef>
-                <a:spcPts val="0"/>
-              </a:spcBef>
-              <a:spcAft>
-                <a:spcPts val="0"/>
-              </a:spcAft>
-              <a:buNone/>
-              <a:defRPr lang="ja-JP" sz="800" b="0">
-                <a:solidFill>
-                  <a:srgbClr val="626669"/>
-                </a:solidFill>
-                <a:latin typeface="Noto Sans"/>
-                <a:ea typeface="Noto Sans CJK JP"/>
-                <a:cs typeface="Noto Sans"/>
-              </a:defRPr>
-            </a:pPr>
-            <a:r>
-              <a:rPr lang="ja-JP" sz="800" b="0">
-                <a:solidFill>
-                  <a:srgbClr val="626669"/>
-                </a:solidFill>
-                <a:latin typeface="Noto Sans"/>
-                <a:ea typeface="Noto Sans CJK JP"/>
-                <a:cs typeface="Noto Sans"/>
-                <a:hlinkClick r:id="rId2"/>
-              </a:rPr>
-              <a:t>https://arxiv.org/abs/1612.03716</a:t>
-            </a:r>
-          </a:p>
-        </p:txBody>
-      </p:sp>
-    </p:spTree>
-  </p:cSld>
-  <p:clrMapOvr>
-    <a:masterClrMapping/>
-  </p:clrMapOvr>
-</p:sld>
-</file>
-
-<file path=ppt/slides/slide58.xml><?xml version="1.0" encoding="utf-8"?>
-<p:sld xmlns:a="http://schemas.openxmlformats.org/drawingml/2006/main" xmlns:p="http://schemas.openxmlformats.org/presentationml/2006/main" xmlns:r="http://schemas.openxmlformats.org/officeDocument/2006/relationships">
-  <p:cSld>
-    <p:spTree>
-      <p:nvGrpSpPr>
-        <p:cNvPr id="1" name=""/>
-        <p:cNvGrpSpPr/>
-        <p:nvPr/>
-      </p:nvGrpSpPr>
-      <p:grpSpPr/>
-      <p:sp>
-        <p:nvSpPr>
-          <p:cNvPr id="2" name="Title 1"/>
-          <p:cNvSpPr>
-            <a:spLocks noGrp="1"/>
-          </p:cNvSpPr>
-          <p:nvPr>
-            <p:ph type="title"/>
-          </p:nvPr>
-        </p:nvSpPr>
-        <p:spPr>
-          <a:xfrm>
-            <a:off x="468172" y="650138"/>
-            <a:ext cx="8206740" cy="616305"/>
-          </a:xfrm>
-        </p:spPr>
-        <p:txBody>
-          <a:bodyPr wrap="square" anchor="t" lIns="0" rIns="0" tIns="0" bIns="0"/>
-          <a:lstStyle/>
-          <a:p>
-            <a:pPr algn="l">
-              <a:lnSpc>
-                <a:spcPct val="115000"/>
-              </a:lnSpc>
-              <a:spcBef>
-                <a:spcPts val="0"/>
-              </a:spcBef>
-              <a:spcAft>
-                <a:spcPts val="0"/>
-              </a:spcAft>
-              <a:buNone/>
-              <a:defRPr lang="ja-JP" sz="2800" b="1">
-                <a:solidFill>
-                  <a:srgbClr val="303437"/>
-                </a:solidFill>
-                <a:latin typeface="Noto Sans"/>
-                <a:ea typeface="Noto Sans CJK JP"/>
-                <a:cs typeface="Noto Sans"/>
-              </a:defRPr>
-            </a:pPr>
-            <a:r>
-              <a:rPr lang="ja-JP" sz="2800" b="1">
-                <a:solidFill>
-                  <a:srgbClr val="303437"/>
-                </a:solidFill>
-                <a:latin typeface="Noto Sans"/>
-                <a:ea typeface="Noto Sans CJK JP"/>
-                <a:cs typeface="Noto Sans"/>
-              </a:rPr>
-              <a:t>参考文献</a:t>
+            <a:pPr>
+              <a:lnSpc>
+                <a:spcPct val="105000"/>
+              </a:lnSpc>
+              <a:spcBef>
+                <a:spcPts val="0"/>
+              </a:spcBef>
+              <a:spcAft>
+                <a:spcPts val="0"/>
+              </a:spcAft>
+              <a:buNone/>
+              <a:defRPr sz="2000" b="0" lang="ja-JP">
+                <a:solidFill>
+                  <a:srgbClr val="303437"/>
+                </a:solidFill>
+                <a:latin typeface="Noto Sans"/>
+                <a:ea typeface="Noto Sans CJK JP"/>
+                <a:cs typeface="Noto Sans"/>
+              </a:defRPr>
+            </a:pPr>
+            <a:r>
+              <a:rPr sz="2000" b="0" lang="ja-JP">
+                <a:solidFill>
+                  <a:srgbClr val="303437"/>
+                </a:solidFill>
+                <a:latin typeface="Noto Sans"/>
+                <a:ea typeface="Noto Sans CJK JP"/>
+                <a:cs typeface="Noto Sans"/>
+              </a:rPr>
+              <a:t>LVIS: A Dataset for Large Vocabulary Instance Segmentation</a:t>
             </a:r>
           </a:p>
         </p:txBody>
       </p:sp>
       <p:sp>
         <p:nvSpPr>
-          <p:cNvPr id="3" name="Title 2"/>
-          <p:cNvSpPr>
-            <a:spLocks noGrp="1"/>
-          </p:cNvSpPr>
-          <p:nvPr>
-            <p:ph type="title" idx="2"/>
-          </p:nvPr>
+          <p:cNvPr id="9" name="TextBox 8"/>
+          <p:cNvSpPr txBox="1"/>
+          <p:nvPr/>
         </p:nvSpPr>
         <p:spPr>
           <a:xfrm>
-            <a:off x="75895" y="0"/>
-            <a:ext cx="8115300" cy="480060"/>
-          </a:xfrm>
+            <a:off x="594360" y="3621024"/>
+            <a:ext cx="7955279" cy="594360"/>
+          </a:xfrm>
+          <a:prstGeom prst="rect">
+            <a:avLst/>
+          </a:prstGeom>
+          <a:noFill/>
         </p:spPr>
         <p:txBody>
-          <a:bodyPr wrap="square" anchor="ctr" lIns="0" rIns="0" tIns="0" bIns="0"/>
+          <a:bodyPr wrap="square" lIns="0" rIns="0" tIns="0" bIns="0" anchor="t">
+            <a:spAutoFit/>
+          </a:bodyPr>
           <a:lstStyle/>
           <a:p>
-            <a:pPr algn="l">
-              <a:lnSpc>
-                <a:spcPct val="100000"/>
-              </a:lnSpc>
-              <a:spcBef>
-                <a:spcPts val="0"/>
-              </a:spcBef>
-              <a:spcAft>
-                <a:spcPts val="0"/>
-              </a:spcAft>
-              <a:buNone/>
-              <a:defRPr lang="ja-JP" sz="1400" b="1">
-                <a:solidFill>
-                  <a:srgbClr val="FFFEF8"/>
-                </a:solidFill>
-                <a:latin typeface="Noto Sans"/>
-                <a:ea typeface="Noto Sans CJK JP"/>
-                <a:cs typeface="Noto Sans"/>
-              </a:defRPr>
-            </a:pPr>
-            <a:r>
-              <a:rPr lang="ja-JP" sz="1400" b="1">
-                <a:solidFill>
-                  <a:srgbClr val="FFFEF8"/>
-                </a:solidFill>
-                <a:latin typeface="Noto Sans"/>
-                <a:ea typeface="Noto Sans CJK JP"/>
-                <a:cs typeface="Noto Sans"/>
-              </a:rPr>
-              <a:t>Appendix 5 参考文献</a:t>
+            <a:pPr>
+              <a:lnSpc>
+                <a:spcPct val="105000"/>
+              </a:lnSpc>
+              <a:spcBef>
+                <a:spcPts val="0"/>
+              </a:spcBef>
+              <a:spcAft>
+                <a:spcPts val="0"/>
+              </a:spcAft>
+              <a:buNone/>
+              <a:defRPr sz="1300" b="0" lang="ja-JP">
+                <a:solidFill>
+                  <a:srgbClr val="626669"/>
+                </a:solidFill>
+                <a:latin typeface="Noto Sans"/>
+                <a:ea typeface="Noto Sans CJK JP"/>
+                <a:cs typeface="Noto Sans"/>
+              </a:defRPr>
+            </a:pPr>
+            <a:r>
+              <a:rPr sz="1300" b="0" lang="ja-JP">
+                <a:solidFill>
+                  <a:srgbClr val="626669"/>
+                </a:solidFill>
+                <a:latin typeface="Noto Sans"/>
+                <a:ea typeface="Noto Sans CJK JP"/>
+                <a:cs typeface="Noto Sans"/>
+              </a:rPr>
+              <a:t>Agrim Gupta, Piotr Dollár, Ross Girshick (2019).</a:t>
+            </a:r>
+          </a:p>
+          <a:p>
+            <a:pPr>
+              <a:lnSpc>
+                <a:spcPct val="105000"/>
+              </a:lnSpc>
+              <a:spcBef>
+                <a:spcPts val="0"/>
+              </a:spcBef>
+              <a:spcAft>
+                <a:spcPts val="0"/>
+              </a:spcAft>
+              <a:buNone/>
+              <a:defRPr sz="1300" b="0" lang="ja-JP">
+                <a:solidFill>
+                  <a:srgbClr val="626669"/>
+                </a:solidFill>
+                <a:latin typeface="Noto Sans"/>
+                <a:ea typeface="Noto Sans CJK JP"/>
+                <a:cs typeface="Noto Sans"/>
+              </a:defRPr>
+            </a:pPr>
+            <a:r>
+              <a:rPr sz="1300" b="0" lang="ja-JP">
+                <a:solidFill>
+                  <a:srgbClr val="626669"/>
+                </a:solidFill>
+                <a:latin typeface="Noto Sans"/>
+                <a:ea typeface="Noto Sans CJK JP"/>
+                <a:cs typeface="Noto Sans"/>
+              </a:rPr>
+              <a:t>IEEE/CVF Conference on Computer Vision and Pattern Recognition (CVPR), pp. 5356–5364.</a:t>
             </a:r>
           </a:p>
         </p:txBody>
       </p:sp>
       <p:sp>
         <p:nvSpPr>
-          <p:cNvPr id="4" name="TextBox 3"/>
+          <p:cNvPr id="10" name="TextBox 9"/>
           <p:cNvSpPr txBox="1"/>
           <p:nvPr/>
         </p:nvSpPr>
         <p:spPr>
           <a:xfrm>
-            <a:off x="594360" y="1508760"/>
-            <a:ext cx="7955279" cy="868680"/>
+            <a:off x="594360" y="4160520"/>
+            <a:ext cx="7955279" cy="521207"/>
           </a:xfrm>
           <a:prstGeom prst="rect">
             <a:avLst/>
@@ -25034,55 +26877,55 @@
           <a:noFill/>
         </p:spPr>
         <p:txBody>
-          <a:bodyPr wrap="square" anchor="t" lIns="0" rIns="0" tIns="0" bIns="0">
+          <a:bodyPr wrap="square" lIns="0" rIns="0" tIns="0" bIns="0" anchor="t">
             <a:spAutoFit/>
           </a:bodyPr>
           <a:lstStyle/>
           <a:p>
-            <a:pPr algn="l">
-              <a:lnSpc>
-                <a:spcPct val="115000"/>
-              </a:lnSpc>
-              <a:spcBef>
-                <a:spcPts val="0"/>
-              </a:spcBef>
-              <a:spcAft>
-                <a:spcPts val="0"/>
-              </a:spcAft>
-              <a:buNone/>
-              <a:defRPr lang="ja-JP" sz="2400" b="1">
-                <a:solidFill>
-                  <a:srgbClr val="303437"/>
-                </a:solidFill>
-                <a:latin typeface="Noto Sans"/>
-                <a:ea typeface="Noto Sans CJK JP"/>
-                <a:cs typeface="Noto Sans"/>
-              </a:defRPr>
-            </a:pPr>
-            <a:r>
-              <a:rPr lang="ja-JP" sz="2400" b="1">
-                <a:solidFill>
-                  <a:srgbClr val="303437"/>
-                </a:solidFill>
-                <a:latin typeface="Noto Sans"/>
-                <a:ea typeface="Noto Sans CJK JP"/>
-                <a:cs typeface="Noto Sans"/>
-              </a:rPr>
-              <a:t>Panoptic Segmentation</a:t>
+            <a:pPr>
+              <a:lnSpc>
+                <a:spcPct val="105000"/>
+              </a:lnSpc>
+              <a:spcBef>
+                <a:spcPts val="0"/>
+              </a:spcBef>
+              <a:spcAft>
+                <a:spcPts val="0"/>
+              </a:spcAft>
+              <a:buNone/>
+              <a:defRPr sz="1800" b="0" lang="ja-JP">
+                <a:solidFill>
+                  <a:srgbClr val="303437"/>
+                </a:solidFill>
+                <a:latin typeface="Noto Sans"/>
+                <a:ea typeface="Noto Sans CJK JP"/>
+                <a:cs typeface="Noto Sans"/>
+              </a:defRPr>
+            </a:pPr>
+            <a:r>
+              <a:rPr sz="1800" b="0" lang="ja-JP">
+                <a:solidFill>
+                  <a:srgbClr val="303437"/>
+                </a:solidFill>
+                <a:latin typeface="Noto Sans"/>
+                <a:ea typeface="Noto Sans CJK JP"/>
+                <a:cs typeface="Noto Sans"/>
+              </a:rPr>
+              <a:t>COCO画像へ大語彙の物体領域注釈を追加した後続データセット。まれなカテゴリを含む長い裾の分布を評価対象にする。</a:t>
             </a:r>
           </a:p>
         </p:txBody>
       </p:sp>
       <p:sp>
         <p:nvSpPr>
-          <p:cNvPr id="5" name="TextBox 4"/>
+          <p:cNvPr id="11" name="TextBox 10"/>
           <p:cNvSpPr txBox="1"/>
           <p:nvPr/>
         </p:nvSpPr>
         <p:spPr>
           <a:xfrm>
-            <a:off x="594360" y="2487168"/>
-            <a:ext cx="7955279" cy="548640"/>
+            <a:off x="594360" y="4882896"/>
+            <a:ext cx="7955279" cy="182880"/>
           </a:xfrm>
           <a:prstGeom prst="rect">
             <a:avLst/>
@@ -25090,79 +26933,23 @@
           <a:noFill/>
         </p:spPr>
         <p:txBody>
-          <a:bodyPr wrap="square" anchor="t" lIns="0" rIns="0" tIns="0" bIns="0">
+          <a:bodyPr wrap="square" lIns="0" rIns="0" tIns="0" bIns="0" anchor="t">
             <a:spAutoFit/>
           </a:bodyPr>
           <a:lstStyle/>
           <a:p>
-            <a:pPr algn="l">
-              <a:lnSpc>
-                <a:spcPct val="115000"/>
-              </a:lnSpc>
-              <a:spcBef>
-                <a:spcPts val="0"/>
-              </a:spcBef>
-              <a:spcAft>
-                <a:spcPts val="0"/>
-              </a:spcAft>
-              <a:buNone/>
-              <a:defRPr lang="ja-JP" sz="1400" b="0">
-                <a:solidFill>
-                  <a:srgbClr val="303437"/>
-                </a:solidFill>
-                <a:latin typeface="Noto Sans"/>
-                <a:ea typeface="Noto Sans CJK JP"/>
-                <a:cs typeface="Noto Sans"/>
-              </a:defRPr>
-            </a:pPr>
-            <a:r>
-              <a:rPr lang="ja-JP" sz="1400" b="0">
-                <a:solidFill>
-                  <a:srgbClr val="303437"/>
-                </a:solidFill>
-                <a:latin typeface="Noto Sans"/>
-                <a:ea typeface="Noto Sans CJK JP"/>
-                <a:cs typeface="Noto Sans"/>
-              </a:rPr>
-              <a:t>Alexander Kirillov, Kaiming He, Ross Girshick, Carsten Rother, Piotr Dollár (2019).</a:t>
-            </a:r>
-          </a:p>
-        </p:txBody>
-      </p:sp>
-      <p:sp>
-        <p:nvSpPr>
-          <p:cNvPr id="6" name="TextBox 5"/>
-          <p:cNvSpPr txBox="1"/>
-          <p:nvPr/>
-        </p:nvSpPr>
-        <p:spPr>
-          <a:xfrm>
-            <a:off x="594360" y="3063240"/>
-            <a:ext cx="7955279" cy="548640"/>
-          </a:xfrm>
-          <a:prstGeom prst="rect">
-            <a:avLst/>
-          </a:prstGeom>
-          <a:noFill/>
-        </p:spPr>
-        <p:txBody>
-          <a:bodyPr wrap="square" anchor="t" lIns="0" rIns="0" tIns="0" bIns="0">
-            <a:spAutoFit/>
-          </a:bodyPr>
-          <a:lstStyle/>
-          <a:p>
-            <a:pPr algn="l">
-              <a:lnSpc>
-                <a:spcPct val="115000"/>
-              </a:lnSpc>
-              <a:spcBef>
-                <a:spcPts val="0"/>
-              </a:spcBef>
-              <a:spcAft>
-                <a:spcPts val="0"/>
-              </a:spcAft>
-              <a:buNone/>
-              <a:defRPr lang="ja-JP" sz="1400" b="0">
+            <a:pPr>
+              <a:lnSpc>
+                <a:spcPct val="105000"/>
+              </a:lnSpc>
+              <a:spcBef>
+                <a:spcPts val="0"/>
+              </a:spcBef>
+              <a:spcAft>
+                <a:spcPts val="0"/>
+              </a:spcAft>
+              <a:buNone/>
+              <a:defRPr sz="1100" b="0" lang="ja-JP">
                 <a:solidFill>
                   <a:srgbClr val="626669"/>
                 </a:solidFill>
@@ -25172,535 +26959,16 @@
               </a:defRPr>
             </a:pPr>
             <a:r>
-              <a:rPr lang="ja-JP" sz="1400" b="0">
+              <a:rPr sz="1100" b="0" lang="ja-JP">
                 <a:solidFill>
                   <a:srgbClr val="626669"/>
                 </a:solidFill>
                 <a:latin typeface="Noto Sans"/>
                 <a:ea typeface="Noto Sans CJK JP"/>
                 <a:cs typeface="Noto Sans"/>
-              </a:rPr>
-              <a:t>IEEE/CVF Conference on Computer Vision and Pattern Recognition (CVPR), pp. 9404–9413.</a:t>
-            </a:r>
-          </a:p>
-        </p:txBody>
-      </p:sp>
-      <p:sp>
-        <p:nvSpPr>
-          <p:cNvPr id="7" name="TextBox 6"/>
-          <p:cNvSpPr txBox="1"/>
-          <p:nvPr/>
-        </p:nvSpPr>
-        <p:spPr>
-          <a:xfrm>
-            <a:off x="594360" y="3675887"/>
-            <a:ext cx="7955279" cy="960120"/>
-          </a:xfrm>
-          <a:prstGeom prst="rect">
-            <a:avLst/>
-          </a:prstGeom>
-          <a:noFill/>
-        </p:spPr>
-        <p:txBody>
-          <a:bodyPr wrap="square" anchor="t" lIns="0" rIns="0" tIns="0" bIns="0">
-            <a:spAutoFit/>
-          </a:bodyPr>
-          <a:lstStyle/>
-          <a:p>
-            <a:pPr algn="l">
-              <a:lnSpc>
-                <a:spcPct val="115000"/>
-              </a:lnSpc>
-              <a:spcBef>
-                <a:spcPts val="0"/>
-              </a:spcBef>
-              <a:spcAft>
-                <a:spcPts val="0"/>
-              </a:spcAft>
-              <a:buNone/>
-              <a:defRPr lang="ja-JP" sz="2100" b="0">
-                <a:solidFill>
-                  <a:srgbClr val="303437"/>
-                </a:solidFill>
-                <a:latin typeface="Noto Sans"/>
-                <a:ea typeface="Noto Sans CJK JP"/>
-                <a:cs typeface="Noto Sans"/>
-              </a:defRPr>
-            </a:pPr>
-            <a:r>
-              <a:rPr lang="ja-JP" sz="2100" b="0">
-                <a:solidFill>
-                  <a:srgbClr val="303437"/>
-                </a:solidFill>
-                <a:latin typeface="Noto Sans"/>
-                <a:ea typeface="Noto Sans CJK JP"/>
-                <a:cs typeface="Noto Sans"/>
-              </a:rPr>
-              <a:t>意味的領域分割とインスタンス分割を統合する課題を定義した研究。共通指標Panoptic Qualityを提案する。</a:t>
-            </a:r>
-          </a:p>
-        </p:txBody>
-      </p:sp>
-      <p:sp>
-        <p:nvSpPr>
-          <p:cNvPr id="8" name="TextBox 7"/>
-          <p:cNvSpPr txBox="1"/>
-          <p:nvPr/>
-        </p:nvSpPr>
-        <p:spPr>
-          <a:xfrm>
-            <a:off x="502920" y="4754880"/>
-            <a:ext cx="8183879" cy="320040"/>
-          </a:xfrm>
-          <a:prstGeom prst="rect">
-            <a:avLst/>
-          </a:prstGeom>
-          <a:noFill/>
-        </p:spPr>
-        <p:txBody>
-          <a:bodyPr wrap="square" anchor="t" lIns="0" rIns="0" tIns="0" bIns="0">
-            <a:spAutoFit/>
-          </a:bodyPr>
-          <a:lstStyle/>
-          <a:p>
-            <a:pPr algn="l">
-              <a:lnSpc>
-                <a:spcPct val="115000"/>
-              </a:lnSpc>
-              <a:spcBef>
-                <a:spcPts val="0"/>
-              </a:spcBef>
-              <a:spcAft>
-                <a:spcPts val="0"/>
-              </a:spcAft>
-              <a:buNone/>
-              <a:defRPr lang="ja-JP" sz="800" b="0">
-                <a:solidFill>
-                  <a:srgbClr val="626669"/>
-                </a:solidFill>
-                <a:latin typeface="Noto Sans"/>
-                <a:ea typeface="Noto Sans CJK JP"/>
-                <a:cs typeface="Noto Sans"/>
-              </a:defRPr>
-            </a:pPr>
-            <a:r>
-              <a:rPr lang="ja-JP" sz="800" b="0">
-                <a:solidFill>
-                  <a:srgbClr val="626669"/>
-                </a:solidFill>
-                <a:latin typeface="Noto Sans"/>
-                <a:ea typeface="Noto Sans CJK JP"/>
-                <a:cs typeface="Noto Sans"/>
-                <a:hlinkClick r:id="rId2"/>
-              </a:rPr>
-              <a:t>https://arxiv.org/abs/1801.00868</a:t>
-            </a:r>
-          </a:p>
-        </p:txBody>
-      </p:sp>
-    </p:spTree>
-  </p:cSld>
-  <p:clrMapOvr>
-    <a:masterClrMapping/>
-  </p:clrMapOvr>
-</p:sld>
-</file>
-
-<file path=ppt/slides/slide59.xml><?xml version="1.0" encoding="utf-8"?>
-<p:sld xmlns:a="http://schemas.openxmlformats.org/drawingml/2006/main" xmlns:p="http://schemas.openxmlformats.org/presentationml/2006/main" xmlns:r="http://schemas.openxmlformats.org/officeDocument/2006/relationships">
-  <p:cSld>
-    <p:spTree>
-      <p:nvGrpSpPr>
-        <p:cNvPr id="1" name=""/>
-        <p:cNvGrpSpPr/>
-        <p:nvPr/>
-      </p:nvGrpSpPr>
-      <p:grpSpPr/>
-      <p:sp>
-        <p:nvSpPr>
-          <p:cNvPr id="2" name="Title 1"/>
-          <p:cNvSpPr>
-            <a:spLocks noGrp="1"/>
-          </p:cNvSpPr>
-          <p:nvPr>
-            <p:ph type="title"/>
-          </p:nvPr>
-        </p:nvSpPr>
-        <p:spPr>
-          <a:xfrm>
-            <a:off x="468172" y="650138"/>
-            <a:ext cx="8206740" cy="616305"/>
-          </a:xfrm>
-        </p:spPr>
-        <p:txBody>
-          <a:bodyPr wrap="square" anchor="t" lIns="0" rIns="0" tIns="0" bIns="0"/>
-          <a:lstStyle/>
-          <a:p>
-            <a:pPr algn="l">
-              <a:lnSpc>
-                <a:spcPct val="115000"/>
-              </a:lnSpc>
-              <a:spcBef>
-                <a:spcPts val="0"/>
-              </a:spcBef>
-              <a:spcAft>
-                <a:spcPts val="0"/>
-              </a:spcAft>
-              <a:buNone/>
-              <a:defRPr lang="ja-JP" sz="2800" b="1">
-                <a:solidFill>
-                  <a:srgbClr val="303437"/>
-                </a:solidFill>
-                <a:latin typeface="Noto Sans"/>
-                <a:ea typeface="Noto Sans CJK JP"/>
-                <a:cs typeface="Noto Sans"/>
-              </a:defRPr>
-            </a:pPr>
-            <a:r>
-              <a:rPr lang="ja-JP" sz="2800" b="1">
-                <a:solidFill>
-                  <a:srgbClr val="303437"/>
-                </a:solidFill>
-                <a:latin typeface="Noto Sans"/>
-                <a:ea typeface="Noto Sans CJK JP"/>
-                <a:cs typeface="Noto Sans"/>
-              </a:rPr>
-              <a:t>参考文献</a:t>
-            </a:r>
-          </a:p>
-        </p:txBody>
-      </p:sp>
-      <p:sp>
-        <p:nvSpPr>
-          <p:cNvPr id="3" name="Title 2"/>
-          <p:cNvSpPr>
-            <a:spLocks noGrp="1"/>
-          </p:cNvSpPr>
-          <p:nvPr>
-            <p:ph type="title" idx="2"/>
-          </p:nvPr>
-        </p:nvSpPr>
-        <p:spPr>
-          <a:xfrm>
-            <a:off x="75895" y="0"/>
-            <a:ext cx="8115300" cy="480060"/>
-          </a:xfrm>
-        </p:spPr>
-        <p:txBody>
-          <a:bodyPr wrap="square" anchor="ctr" lIns="0" rIns="0" tIns="0" bIns="0"/>
-          <a:lstStyle/>
-          <a:p>
-            <a:pPr algn="l">
-              <a:lnSpc>
-                <a:spcPct val="100000"/>
-              </a:lnSpc>
-              <a:spcBef>
-                <a:spcPts val="0"/>
-              </a:spcBef>
-              <a:spcAft>
-                <a:spcPts val="0"/>
-              </a:spcAft>
-              <a:buNone/>
-              <a:defRPr lang="ja-JP" sz="1400" b="1">
-                <a:solidFill>
-                  <a:srgbClr val="FFFEF8"/>
-                </a:solidFill>
-                <a:latin typeface="Noto Sans"/>
-                <a:ea typeface="Noto Sans CJK JP"/>
-                <a:cs typeface="Noto Sans"/>
-              </a:defRPr>
-            </a:pPr>
-            <a:r>
-              <a:rPr lang="ja-JP" sz="1400" b="1">
-                <a:solidFill>
-                  <a:srgbClr val="FFFEF8"/>
-                </a:solidFill>
-                <a:latin typeface="Noto Sans"/>
-                <a:ea typeface="Noto Sans CJK JP"/>
-                <a:cs typeface="Noto Sans"/>
-              </a:rPr>
-              <a:t>Appendix 5 参考文献</a:t>
-            </a:r>
-          </a:p>
-        </p:txBody>
-      </p:sp>
-      <p:sp>
-        <p:nvSpPr>
-          <p:cNvPr id="4" name="TextBox 3"/>
-          <p:cNvSpPr txBox="1"/>
-          <p:nvPr/>
-        </p:nvSpPr>
-        <p:spPr>
-          <a:xfrm>
-            <a:off x="594360" y="1508760"/>
-            <a:ext cx="7955279" cy="868680"/>
-          </a:xfrm>
-          <a:prstGeom prst="rect">
-            <a:avLst/>
-          </a:prstGeom>
-          <a:noFill/>
-        </p:spPr>
-        <p:txBody>
-          <a:bodyPr wrap="square" anchor="t" lIns="0" rIns="0" tIns="0" bIns="0">
-            <a:spAutoFit/>
-          </a:bodyPr>
-          <a:lstStyle/>
-          <a:p>
-            <a:pPr algn="l">
-              <a:lnSpc>
-                <a:spcPct val="115000"/>
-              </a:lnSpc>
-              <a:spcBef>
-                <a:spcPts val="0"/>
-              </a:spcBef>
-              <a:spcAft>
-                <a:spcPts val="0"/>
-              </a:spcAft>
-              <a:buNone/>
-              <a:defRPr lang="ja-JP" sz="2400" b="1">
-                <a:solidFill>
-                  <a:srgbClr val="303437"/>
-                </a:solidFill>
-                <a:latin typeface="Noto Sans"/>
-                <a:ea typeface="Noto Sans CJK JP"/>
-                <a:cs typeface="Noto Sans"/>
-              </a:defRPr>
-            </a:pPr>
-            <a:r>
-              <a:rPr lang="ja-JP" sz="2400" b="1">
-                <a:solidFill>
-                  <a:srgbClr val="303437"/>
-                </a:solidFill>
-                <a:latin typeface="Noto Sans"/>
-                <a:ea typeface="Noto Sans CJK JP"/>
-                <a:cs typeface="Noto Sans"/>
-              </a:rPr>
-              <a:t>Mask R-CNN</a:t>
-            </a:r>
-          </a:p>
-        </p:txBody>
-      </p:sp>
-      <p:sp>
-        <p:nvSpPr>
-          <p:cNvPr id="5" name="TextBox 4"/>
-          <p:cNvSpPr txBox="1"/>
-          <p:nvPr/>
-        </p:nvSpPr>
-        <p:spPr>
-          <a:xfrm>
-            <a:off x="594360" y="2487168"/>
-            <a:ext cx="7955279" cy="548640"/>
-          </a:xfrm>
-          <a:prstGeom prst="rect">
-            <a:avLst/>
-          </a:prstGeom>
-          <a:noFill/>
-        </p:spPr>
-        <p:txBody>
-          <a:bodyPr wrap="square" anchor="t" lIns="0" rIns="0" tIns="0" bIns="0">
-            <a:spAutoFit/>
-          </a:bodyPr>
-          <a:lstStyle/>
-          <a:p>
-            <a:pPr algn="l">
-              <a:lnSpc>
-                <a:spcPct val="115000"/>
-              </a:lnSpc>
-              <a:spcBef>
-                <a:spcPts val="0"/>
-              </a:spcBef>
-              <a:spcAft>
-                <a:spcPts val="0"/>
-              </a:spcAft>
-              <a:buNone/>
-              <a:defRPr lang="ja-JP" sz="1400" b="0">
-                <a:solidFill>
-                  <a:srgbClr val="303437"/>
-                </a:solidFill>
-                <a:latin typeface="Noto Sans"/>
-                <a:ea typeface="Noto Sans CJK JP"/>
-                <a:cs typeface="Noto Sans"/>
-              </a:defRPr>
-            </a:pPr>
-            <a:r>
-              <a:rPr lang="ja-JP" sz="1400" b="0">
-                <a:solidFill>
-                  <a:srgbClr val="303437"/>
-                </a:solidFill>
-                <a:latin typeface="Noto Sans"/>
-                <a:ea typeface="Noto Sans CJK JP"/>
-                <a:cs typeface="Noto Sans"/>
-              </a:rPr>
-              <a:t>Kaiming He, Georgia Gkioxari, Piotr Dollár, Ross Girshick (2017).</a:t>
-            </a:r>
-          </a:p>
-        </p:txBody>
-      </p:sp>
-      <p:sp>
-        <p:nvSpPr>
-          <p:cNvPr id="6" name="TextBox 5"/>
-          <p:cNvSpPr txBox="1"/>
-          <p:nvPr/>
-        </p:nvSpPr>
-        <p:spPr>
-          <a:xfrm>
-            <a:off x="594360" y="3063240"/>
-            <a:ext cx="7955279" cy="548640"/>
-          </a:xfrm>
-          <a:prstGeom prst="rect">
-            <a:avLst/>
-          </a:prstGeom>
-          <a:noFill/>
-        </p:spPr>
-        <p:txBody>
-          <a:bodyPr wrap="square" anchor="t" lIns="0" rIns="0" tIns="0" bIns="0">
-            <a:spAutoFit/>
-          </a:bodyPr>
-          <a:lstStyle/>
-          <a:p>
-            <a:pPr algn="l">
-              <a:lnSpc>
-                <a:spcPct val="115000"/>
-              </a:lnSpc>
-              <a:spcBef>
-                <a:spcPts val="0"/>
-              </a:spcBef>
-              <a:spcAft>
-                <a:spcPts val="0"/>
-              </a:spcAft>
-              <a:buNone/>
-              <a:defRPr lang="ja-JP" sz="1400" b="0">
-                <a:solidFill>
-                  <a:srgbClr val="626669"/>
-                </a:solidFill>
-                <a:latin typeface="Noto Sans"/>
-                <a:ea typeface="Noto Sans CJK JP"/>
-                <a:cs typeface="Noto Sans"/>
-              </a:defRPr>
-            </a:pPr>
-            <a:r>
-              <a:rPr lang="ja-JP" sz="1400" b="0">
-                <a:solidFill>
-                  <a:srgbClr val="626669"/>
-                </a:solidFill>
-                <a:latin typeface="Noto Sans"/>
-                <a:ea typeface="Noto Sans CJK JP"/>
-                <a:cs typeface="Noto Sans"/>
-              </a:rPr>
-              <a:t>IEEE International Conference on Computer Vision (ICCV), pp. 2961–2969.</a:t>
-            </a:r>
-          </a:p>
-        </p:txBody>
-      </p:sp>
-      <p:sp>
-        <p:nvSpPr>
-          <p:cNvPr id="7" name="TextBox 6"/>
-          <p:cNvSpPr txBox="1"/>
-          <p:nvPr/>
-        </p:nvSpPr>
-        <p:spPr>
-          <a:xfrm>
-            <a:off x="594360" y="3675887"/>
-            <a:ext cx="7955279" cy="960120"/>
-          </a:xfrm>
-          <a:prstGeom prst="rect">
-            <a:avLst/>
-          </a:prstGeom>
-          <a:noFill/>
-        </p:spPr>
-        <p:txBody>
-          <a:bodyPr wrap="square" anchor="t" lIns="0" rIns="0" tIns="0" bIns="0">
-            <a:spAutoFit/>
-          </a:bodyPr>
-          <a:lstStyle/>
-          <a:p>
-            <a:pPr algn="l">
-              <a:lnSpc>
-                <a:spcPct val="115000"/>
-              </a:lnSpc>
-              <a:spcBef>
-                <a:spcPts val="0"/>
-              </a:spcBef>
-              <a:spcAft>
-                <a:spcPts val="0"/>
-              </a:spcAft>
-              <a:buNone/>
-              <a:defRPr lang="ja-JP" sz="2100" b="0">
-                <a:solidFill>
-                  <a:srgbClr val="303437"/>
-                </a:solidFill>
-                <a:latin typeface="Noto Sans"/>
-                <a:ea typeface="Noto Sans CJK JP"/>
-                <a:cs typeface="Noto Sans"/>
-              </a:defRPr>
-            </a:pPr>
-            <a:r>
-              <a:rPr lang="ja-JP" sz="2100" b="0">
-                <a:solidFill>
-                  <a:srgbClr val="303437"/>
-                </a:solidFill>
-                <a:latin typeface="Noto Sans"/>
-                <a:ea typeface="Noto Sans CJK JP"/>
-                <a:cs typeface="Noto Sans"/>
-              </a:rPr>
-              <a:t>検出器へ物体ごとのマスク予測を加えた代表的な領域分割モデル。COCO上で検出・分割・人物姿勢の評価を報告する。</a:t>
-            </a:r>
-          </a:p>
-        </p:txBody>
-      </p:sp>
-      <p:sp>
-        <p:nvSpPr>
-          <p:cNvPr id="8" name="TextBox 7"/>
-          <p:cNvSpPr txBox="1"/>
-          <p:nvPr/>
-        </p:nvSpPr>
-        <p:spPr>
-          <a:xfrm>
-            <a:off x="502920" y="4754880"/>
-            <a:ext cx="8183879" cy="320040"/>
-          </a:xfrm>
-          <a:prstGeom prst="rect">
-            <a:avLst/>
-          </a:prstGeom>
-          <a:noFill/>
-        </p:spPr>
-        <p:txBody>
-          <a:bodyPr wrap="square" anchor="t" lIns="0" rIns="0" tIns="0" bIns="0">
-            <a:spAutoFit/>
-          </a:bodyPr>
-          <a:lstStyle/>
-          <a:p>
-            <a:pPr algn="l">
-              <a:lnSpc>
-                <a:spcPct val="115000"/>
-              </a:lnSpc>
-              <a:spcBef>
-                <a:spcPts val="0"/>
-              </a:spcBef>
-              <a:spcAft>
-                <a:spcPts val="0"/>
-              </a:spcAft>
-              <a:buNone/>
-              <a:defRPr lang="ja-JP" sz="800" b="0">
-                <a:solidFill>
-                  <a:srgbClr val="626669"/>
-                </a:solidFill>
-                <a:latin typeface="Noto Sans"/>
-                <a:ea typeface="Noto Sans CJK JP"/>
-                <a:cs typeface="Noto Sans"/>
-              </a:defRPr>
-            </a:pPr>
-            <a:r>
-              <a:rPr lang="ja-JP" sz="800" b="0">
-                <a:solidFill>
-                  <a:srgbClr val="626669"/>
-                </a:solidFill>
-                <a:latin typeface="Noto Sans"/>
-                <a:ea typeface="Noto Sans CJK JP"/>
-                <a:cs typeface="Noto Sans"/>
-                <a:hlinkClick r:id="rId2"/>
-              </a:rPr>
-              <a:t>https://arxiv.org/abs/1703.06870</a:t>
+                <a:hlinkClick r:id="rId4"/>
+              </a:rPr>
+              <a:t>https://arxiv.org/abs/1908.03195</a:t>
             </a:r>
           </a:p>
         </p:txBody>
@@ -25905,9 +27173,20 @@
                 <a:latin typeface="Noto Sans"/>
                 <a:ea typeface="Noto Sans CJK JP"/>
                 <a:cs typeface="Noto Sans"/>
+              </a:rPr>
+              <a:t>[1] </a:t>
+            </a:r>
+            <a:r>
+              <a:rPr lang="ja-JP" sz="800" b="0">
+                <a:solidFill>
+                  <a:srgbClr val="626669"/>
+                </a:solidFill>
+                <a:latin typeface="Noto Sans"/>
+                <a:ea typeface="Noto Sans CJK JP"/>
+                <a:cs typeface="Noto Sans"/>
                 <a:hlinkClick r:id="rId3"/>
               </a:rPr>
-              <a:t>[1] https://github.com/ultralytics/assets/releases/download/v0.0.0/coco128-seg.zip</a:t>
+              <a:t>https://github.com/ultralytics/assets/releases/download/v0.0.0/coco128-seg.zip</a:t>
             </a:r>
           </a:p>
           <a:p>
@@ -25953,7 +27232,7 @@
 </p:sld>
 </file>
 
-<file path=ppt/slides/slide60.xml><?xml version="1.0" encoding="utf-8"?>
+<file path=ppt/slides/slide61.xml><?xml version="1.0" encoding="utf-8"?>
 <p:sld xmlns:a="http://schemas.openxmlformats.org/drawingml/2006/main" xmlns:p="http://schemas.openxmlformats.org/presentationml/2006/main" xmlns:r="http://schemas.openxmlformats.org/officeDocument/2006/relationships">
   <p:cSld>
     <p:spTree>
@@ -25975,44 +27254,34 @@
         </p:nvSpPr>
         <p:spPr>
           <a:xfrm>
-            <a:off x="468172" y="650138"/>
-            <a:ext cx="8206740" cy="616305"/>
+            <a:off x="457200" y="1645920"/>
+            <a:ext cx="8229600" cy="1280160"/>
           </a:xfrm>
         </p:spPr>
         <p:txBody>
-          <a:bodyPr wrap="square" anchor="t" lIns="0" rIns="0" tIns="0" bIns="0"/>
+          <a:bodyPr anchor="ctr"/>
           <a:lstStyle/>
           <a:p>
-            <a:pPr algn="l">
-              <a:lnSpc>
-                <a:spcPct val="115000"/>
-              </a:lnSpc>
-              <a:spcBef>
-                <a:spcPts val="0"/>
-              </a:spcBef>
-              <a:spcAft>
-                <a:spcPts val="0"/>
-              </a:spcAft>
-              <a:buNone/>
-              <a:defRPr lang="ja-JP" sz="2800" b="1">
-                <a:solidFill>
-                  <a:srgbClr val="303437"/>
-                </a:solidFill>
-                <a:latin typeface="Noto Sans"/>
-                <a:ea typeface="Noto Sans CJK JP"/>
-                <a:cs typeface="Noto Sans"/>
-              </a:defRPr>
-            </a:pPr>
-            <a:r>
-              <a:rPr lang="ja-JP" sz="2800" b="1">
-                <a:solidFill>
-                  <a:srgbClr val="303437"/>
-                </a:solidFill>
-                <a:latin typeface="Noto Sans"/>
-                <a:ea typeface="Noto Sans CJK JP"/>
-                <a:cs typeface="Noto Sans"/>
-              </a:rPr>
-              <a:t>参考文献</a:t>
+            <a:pPr algn="ctr">
+              <a:defRPr sz="4800" b="1" lang="ja-JP">
+                <a:solidFill>
+                  <a:srgbClr val="303437"/>
+                </a:solidFill>
+                <a:latin typeface="Noto Sans"/>
+                <a:ea typeface="Noto Sans CJK JP"/>
+                <a:cs typeface="Noto Sans"/>
+              </a:defRPr>
+            </a:pPr>
+            <a:r>
+              <a:rPr sz="4800" b="1" lang="ja-JP">
+                <a:solidFill>
+                  <a:srgbClr val="303437"/>
+                </a:solidFill>
+                <a:latin typeface="Noto Sans"/>
+                <a:ea typeface="Noto Sans CJK JP"/>
+                <a:cs typeface="Noto Sans"/>
+              </a:rPr>
+              <a:t>Appendix</a:t>
             </a:r>
           </a:p>
         </p:txBody>
@@ -26027,329 +27296,11 @@
             <p:ph type="title" idx="2"/>
           </p:nvPr>
         </p:nvSpPr>
-        <p:spPr>
-          <a:xfrm>
-            <a:off x="75895" y="0"/>
-            <a:ext cx="8115300" cy="480060"/>
-          </a:xfrm>
-        </p:spPr>
+        <p:spPr/>
         <p:txBody>
-          <a:bodyPr wrap="square" anchor="ctr" lIns="0" rIns="0" tIns="0" bIns="0"/>
+          <a:bodyPr/>
           <a:lstStyle/>
-          <a:p>
-            <a:pPr algn="l">
-              <a:lnSpc>
-                <a:spcPct val="100000"/>
-              </a:lnSpc>
-              <a:spcBef>
-                <a:spcPts val="0"/>
-              </a:spcBef>
-              <a:spcAft>
-                <a:spcPts val="0"/>
-              </a:spcAft>
-              <a:buNone/>
-              <a:defRPr lang="ja-JP" sz="1400" b="1">
-                <a:solidFill>
-                  <a:srgbClr val="FFFEF8"/>
-                </a:solidFill>
-                <a:latin typeface="Noto Sans"/>
-                <a:ea typeface="Noto Sans CJK JP"/>
-                <a:cs typeface="Noto Sans"/>
-              </a:defRPr>
-            </a:pPr>
-            <a:r>
-              <a:rPr lang="ja-JP" sz="1400" b="1">
-                <a:solidFill>
-                  <a:srgbClr val="FFFEF8"/>
-                </a:solidFill>
-                <a:latin typeface="Noto Sans"/>
-                <a:ea typeface="Noto Sans CJK JP"/>
-                <a:cs typeface="Noto Sans"/>
-              </a:rPr>
-              <a:t>Appendix 5 参考文献</a:t>
-            </a:r>
-          </a:p>
-        </p:txBody>
-      </p:sp>
-      <p:sp>
-        <p:nvSpPr>
-          <p:cNvPr id="4" name="TextBox 3"/>
-          <p:cNvSpPr txBox="1"/>
-          <p:nvPr/>
-        </p:nvSpPr>
-        <p:spPr>
-          <a:xfrm>
-            <a:off x="594360" y="1508760"/>
-            <a:ext cx="7955279" cy="868680"/>
-          </a:xfrm>
-          <a:prstGeom prst="rect">
-            <a:avLst/>
-          </a:prstGeom>
-          <a:noFill/>
-        </p:spPr>
-        <p:txBody>
-          <a:bodyPr wrap="square" anchor="t" lIns="0" rIns="0" tIns="0" bIns="0">
-            <a:spAutoFit/>
-          </a:bodyPr>
-          <a:lstStyle/>
-          <a:p>
-            <a:pPr algn="l">
-              <a:lnSpc>
-                <a:spcPct val="115000"/>
-              </a:lnSpc>
-              <a:spcBef>
-                <a:spcPts val="0"/>
-              </a:spcBef>
-              <a:spcAft>
-                <a:spcPts val="0"/>
-              </a:spcAft>
-              <a:buNone/>
-              <a:defRPr lang="ja-JP" sz="2400" b="1">
-                <a:solidFill>
-                  <a:srgbClr val="303437"/>
-                </a:solidFill>
-                <a:latin typeface="Noto Sans"/>
-                <a:ea typeface="Noto Sans CJK JP"/>
-                <a:cs typeface="Noto Sans"/>
-              </a:defRPr>
-            </a:pPr>
-            <a:r>
-              <a:rPr lang="ja-JP" sz="2400" b="1">
-                <a:solidFill>
-                  <a:srgbClr val="303437"/>
-                </a:solidFill>
-                <a:latin typeface="Noto Sans"/>
-                <a:ea typeface="Noto Sans CJK JP"/>
-                <a:cs typeface="Noto Sans"/>
-              </a:rPr>
-              <a:t>LVIS: A Dataset for Large Vocabulary Instance Segmentation</a:t>
-            </a:r>
-          </a:p>
-        </p:txBody>
-      </p:sp>
-      <p:sp>
-        <p:nvSpPr>
-          <p:cNvPr id="5" name="TextBox 4"/>
-          <p:cNvSpPr txBox="1"/>
-          <p:nvPr/>
-        </p:nvSpPr>
-        <p:spPr>
-          <a:xfrm>
-            <a:off x="594360" y="2487168"/>
-            <a:ext cx="7955279" cy="548640"/>
-          </a:xfrm>
-          <a:prstGeom prst="rect">
-            <a:avLst/>
-          </a:prstGeom>
-          <a:noFill/>
-        </p:spPr>
-        <p:txBody>
-          <a:bodyPr wrap="square" anchor="t" lIns="0" rIns="0" tIns="0" bIns="0">
-            <a:spAutoFit/>
-          </a:bodyPr>
-          <a:lstStyle/>
-          <a:p>
-            <a:pPr algn="l">
-              <a:lnSpc>
-                <a:spcPct val="115000"/>
-              </a:lnSpc>
-              <a:spcBef>
-                <a:spcPts val="0"/>
-              </a:spcBef>
-              <a:spcAft>
-                <a:spcPts val="0"/>
-              </a:spcAft>
-              <a:buNone/>
-              <a:defRPr lang="ja-JP" sz="1400" b="0">
-                <a:solidFill>
-                  <a:srgbClr val="303437"/>
-                </a:solidFill>
-                <a:latin typeface="Noto Sans"/>
-                <a:ea typeface="Noto Sans CJK JP"/>
-                <a:cs typeface="Noto Sans"/>
-              </a:defRPr>
-            </a:pPr>
-            <a:r>
-              <a:rPr lang="ja-JP" sz="1400" b="0">
-                <a:solidFill>
-                  <a:srgbClr val="303437"/>
-                </a:solidFill>
-                <a:latin typeface="Noto Sans"/>
-                <a:ea typeface="Noto Sans CJK JP"/>
-                <a:cs typeface="Noto Sans"/>
-              </a:rPr>
-              <a:t>Agrim Gupta, Piotr Dollár, Ross Girshick (2019).</a:t>
-            </a:r>
-          </a:p>
-        </p:txBody>
-      </p:sp>
-      <p:sp>
-        <p:nvSpPr>
-          <p:cNvPr id="6" name="TextBox 5"/>
-          <p:cNvSpPr txBox="1"/>
-          <p:nvPr/>
-        </p:nvSpPr>
-        <p:spPr>
-          <a:xfrm>
-            <a:off x="594360" y="3063240"/>
-            <a:ext cx="7955279" cy="548640"/>
-          </a:xfrm>
-          <a:prstGeom prst="rect">
-            <a:avLst/>
-          </a:prstGeom>
-          <a:noFill/>
-        </p:spPr>
-        <p:txBody>
-          <a:bodyPr wrap="square" anchor="t" lIns="0" rIns="0" tIns="0" bIns="0">
-            <a:spAutoFit/>
-          </a:bodyPr>
-          <a:lstStyle/>
-          <a:p>
-            <a:pPr algn="l">
-              <a:lnSpc>
-                <a:spcPct val="115000"/>
-              </a:lnSpc>
-              <a:spcBef>
-                <a:spcPts val="0"/>
-              </a:spcBef>
-              <a:spcAft>
-                <a:spcPts val="0"/>
-              </a:spcAft>
-              <a:buNone/>
-              <a:defRPr lang="ja-JP" sz="1400" b="0">
-                <a:solidFill>
-                  <a:srgbClr val="626669"/>
-                </a:solidFill>
-                <a:latin typeface="Noto Sans"/>
-                <a:ea typeface="Noto Sans CJK JP"/>
-                <a:cs typeface="Noto Sans"/>
-              </a:defRPr>
-            </a:pPr>
-            <a:r>
-              <a:rPr lang="ja-JP" sz="1400" b="0">
-                <a:solidFill>
-                  <a:srgbClr val="626669"/>
-                </a:solidFill>
-                <a:latin typeface="Noto Sans"/>
-                <a:ea typeface="Noto Sans CJK JP"/>
-                <a:cs typeface="Noto Sans"/>
-              </a:rPr>
-              <a:t>IEEE/CVF Conference on Computer Vision and Pattern Recognition (CVPR), pp. 5356–5364.</a:t>
-            </a:r>
-          </a:p>
-        </p:txBody>
-      </p:sp>
-      <p:sp>
-        <p:nvSpPr>
-          <p:cNvPr id="7" name="TextBox 6"/>
-          <p:cNvSpPr txBox="1"/>
-          <p:nvPr/>
-        </p:nvSpPr>
-        <p:spPr>
-          <a:xfrm>
-            <a:off x="594360" y="3675887"/>
-            <a:ext cx="7955279" cy="960120"/>
-          </a:xfrm>
-          <a:prstGeom prst="rect">
-            <a:avLst/>
-          </a:prstGeom>
-          <a:noFill/>
-        </p:spPr>
-        <p:txBody>
-          <a:bodyPr wrap="square" anchor="t" lIns="0" rIns="0" tIns="0" bIns="0">
-            <a:spAutoFit/>
-          </a:bodyPr>
-          <a:lstStyle/>
-          <a:p>
-            <a:pPr algn="l">
-              <a:lnSpc>
-                <a:spcPct val="115000"/>
-              </a:lnSpc>
-              <a:spcBef>
-                <a:spcPts val="0"/>
-              </a:spcBef>
-              <a:spcAft>
-                <a:spcPts val="0"/>
-              </a:spcAft>
-              <a:buNone/>
-              <a:defRPr lang="ja-JP" sz="2100" b="0">
-                <a:solidFill>
-                  <a:srgbClr val="303437"/>
-                </a:solidFill>
-                <a:latin typeface="Noto Sans"/>
-                <a:ea typeface="Noto Sans CJK JP"/>
-                <a:cs typeface="Noto Sans"/>
-              </a:defRPr>
-            </a:pPr>
-            <a:r>
-              <a:rPr lang="ja-JP" sz="2100" b="0">
-                <a:solidFill>
-                  <a:srgbClr val="303437"/>
-                </a:solidFill>
-                <a:latin typeface="Noto Sans"/>
-                <a:ea typeface="Noto Sans CJK JP"/>
-                <a:cs typeface="Noto Sans"/>
-              </a:rPr>
-              <a:t>COCO画像へ大語彙の物体領域注釈を追加した後続データセット。まれなカテゴリを含む長い裾の分布を評価対象にする。</a:t>
-            </a:r>
-          </a:p>
-        </p:txBody>
-      </p:sp>
-      <p:sp>
-        <p:nvSpPr>
-          <p:cNvPr id="8" name="TextBox 7"/>
-          <p:cNvSpPr txBox="1"/>
-          <p:nvPr/>
-        </p:nvSpPr>
-        <p:spPr>
-          <a:xfrm>
-            <a:off x="502920" y="4754880"/>
-            <a:ext cx="8183879" cy="320040"/>
-          </a:xfrm>
-          <a:prstGeom prst="rect">
-            <a:avLst/>
-          </a:prstGeom>
-          <a:noFill/>
-        </p:spPr>
-        <p:txBody>
-          <a:bodyPr wrap="square" anchor="t" lIns="0" rIns="0" tIns="0" bIns="0">
-            <a:spAutoFit/>
-          </a:bodyPr>
-          <a:lstStyle/>
-          <a:p>
-            <a:pPr algn="l">
-              <a:lnSpc>
-                <a:spcPct val="115000"/>
-              </a:lnSpc>
-              <a:spcBef>
-                <a:spcPts val="0"/>
-              </a:spcBef>
-              <a:spcAft>
-                <a:spcPts val="0"/>
-              </a:spcAft>
-              <a:buNone/>
-              <a:defRPr lang="ja-JP" sz="800" b="0">
-                <a:solidFill>
-                  <a:srgbClr val="626669"/>
-                </a:solidFill>
-                <a:latin typeface="Noto Sans"/>
-                <a:ea typeface="Noto Sans CJK JP"/>
-                <a:cs typeface="Noto Sans"/>
-              </a:defRPr>
-            </a:pPr>
-            <a:r>
-              <a:rPr lang="ja-JP" sz="800" b="0">
-                <a:solidFill>
-                  <a:srgbClr val="626669"/>
-                </a:solidFill>
-                <a:latin typeface="Noto Sans"/>
-                <a:ea typeface="Noto Sans CJK JP"/>
-                <a:cs typeface="Noto Sans"/>
-                <a:hlinkClick r:id="rId2"/>
-              </a:rPr>
-              <a:t>https://arxiv.org/abs/1908.03195</a:t>
-            </a:r>
-          </a:p>
+          <a:p/>
         </p:txBody>
       </p:sp>
     </p:spTree>
@@ -26552,9 +27503,20 @@
                 <a:latin typeface="Noto Sans"/>
                 <a:ea typeface="Noto Sans CJK JP"/>
                 <a:cs typeface="Noto Sans"/>
+              </a:rPr>
+              <a:t>[1] </a:t>
+            </a:r>
+            <a:r>
+              <a:rPr lang="ja-JP" sz="800" b="0">
+                <a:solidFill>
+                  <a:srgbClr val="626669"/>
+                </a:solidFill>
+                <a:latin typeface="Noto Sans"/>
+                <a:ea typeface="Noto Sans CJK JP"/>
+                <a:cs typeface="Noto Sans"/>
                 <a:hlinkClick r:id="rId3"/>
               </a:rPr>
-              <a:t>[1] https://github.com/ultralytics/assets/releases/download/v0.0.0/coco128-seg.zip</a:t>
+              <a:t>https://github.com/ultralytics/assets/releases/download/v0.0.0/coco128-seg.zip</a:t>
             </a:r>
           </a:p>
           <a:p>
@@ -26792,9 +27754,20 @@
                 <a:latin typeface="Noto Sans"/>
                 <a:ea typeface="Noto Sans CJK JP"/>
                 <a:cs typeface="Noto Sans"/>
+              </a:rPr>
+              <a:t>[1] </a:t>
+            </a:r>
+            <a:r>
+              <a:rPr lang="ja-JP" sz="800" b="0">
+                <a:solidFill>
+                  <a:srgbClr val="626669"/>
+                </a:solidFill>
+                <a:latin typeface="Noto Sans"/>
+                <a:ea typeface="Noto Sans CJK JP"/>
+                <a:cs typeface="Noto Sans"/>
                 <a:hlinkClick r:id="rId3"/>
               </a:rPr>
-              <a:t>[1] https://github.com/cocodataset/panopticapi</a:t>
+              <a:t>https://github.com/cocodataset/panopticapi</a:t>
             </a:r>
           </a:p>
           <a:p>
@@ -27134,9 +28107,20 @@
                 <a:latin typeface="Noto Sans"/>
                 <a:ea typeface="Noto Sans CJK JP"/>
                 <a:cs typeface="Noto Sans"/>
+              </a:rPr>
+              <a:t>[1] </a:t>
+            </a:r>
+            <a:r>
+              <a:rPr lang="ja-JP" sz="800" b="0">
+                <a:solidFill>
+                  <a:srgbClr val="626669"/>
+                </a:solidFill>
+                <a:latin typeface="Noto Sans"/>
+                <a:ea typeface="Noto Sans CJK JP"/>
+                <a:cs typeface="Noto Sans"/>
                 <a:hlinkClick r:id="rId2"/>
               </a:rPr>
-              <a:t>[1] https://arxiv.org/abs/1405.0312</a:t>
+              <a:t>https://arxiv.org/abs/1405.0312</a:t>
             </a:r>
           </a:p>
         </p:txBody>

--- a/slides/datasets-in-10-minutes-coco.pptx
+++ b/slides/datasets-in-10-minutes-coco.pptx
@@ -9807,7 +9807,7 @@
                 <a:ea typeface="Noto Sans CJK JP"/>
                 <a:cs typeface="Noto Sans"/>
               </a:rPr>
-              <a:t>小さな物体が多く、位置合わせも難しい</a:t>
+              <a:t>32² px は、32×32画素ぶんの面積</a:t>
             </a:r>
           </a:p>
         </p:txBody>
@@ -9866,30 +9866,52 @@
           </a:p>
         </p:txBody>
       </p:sp>
-      <p:pic>
-        <p:nvPicPr>
-          <p:cNvPr id="4" name="Picture 3" descr="sizes.png"/>
-          <p:cNvPicPr>
-            <a:picLocks noChangeAspect="1"/>
-          </p:cNvPicPr>
+      <p:sp>
+        <p:nvSpPr>
+          <p:cNvPr id="4" name="Rectangle 3"/>
+          <p:cNvSpPr/>
           <p:nvPr/>
-        </p:nvPicPr>
-        <p:blipFill>
-          <a:blip r:embed="rId2"/>
-          <a:stretch>
-            <a:fillRect/>
-          </a:stretch>
-        </p:blipFill>
-        <p:spPr>
-          <a:xfrm>
-            <a:off x="594360" y="1380744"/>
-            <a:ext cx="7955279" cy="3182111"/>
+        </p:nvSpPr>
+        <p:spPr>
+          <a:xfrm>
+            <a:off x="548640" y="1435608"/>
+            <a:ext cx="4114800" cy="3086100"/>
           </a:xfrm>
           <a:prstGeom prst="rect">
             <a:avLst/>
           </a:prstGeom>
-        </p:spPr>
-      </p:pic>
+          <a:solidFill>
+            <a:srgbClr val="EBEDEB"/>
+          </a:solidFill>
+          <a:ln w="10160">
+            <a:solidFill>
+              <a:srgbClr val="626669"/>
+            </a:solidFill>
+          </a:ln>
+          <a:effectLst/>
+        </p:spPr>
+        <p:style>
+          <a:lnRef idx="1">
+            <a:schemeClr val="accent1"/>
+          </a:lnRef>
+          <a:fillRef idx="3">
+            <a:schemeClr val="accent1"/>
+          </a:fillRef>
+          <a:effectRef idx="0">
+            <a:schemeClr val="accent1"/>
+          </a:effectRef>
+          <a:fontRef idx="minor">
+            <a:schemeClr val="lt1"/>
+          </a:fontRef>
+        </p:style>
+        <p:txBody>
+          <a:bodyPr rtlCol="0" anchor="ctr"/>
+          <a:lstStyle/>
+          <a:p>
+            <a:pPr algn="ctr"/>
+          </a:p>
+        </p:txBody>
+      </p:sp>
       <p:sp>
         <p:nvSpPr>
           <p:cNvPr id="5" name="TextBox 4"/>
@@ -9898,8 +9920,8 @@
         </p:nvSpPr>
         <p:spPr>
           <a:xfrm>
-            <a:off x="502920" y="4754880"/>
-            <a:ext cx="8183879" cy="320040"/>
+            <a:off x="758952" y="1682496"/>
+            <a:ext cx="3657600" cy="365760"/>
           </a:xfrm>
           <a:prstGeom prst="rect">
             <a:avLst/>
@@ -9907,23 +9929,283 @@
           <a:noFill/>
         </p:spPr>
         <p:txBody>
-          <a:bodyPr wrap="square" anchor="t" lIns="0" rIns="0" tIns="0" bIns="0">
+          <a:bodyPr wrap="square" lIns="0" rIns="0" tIns="0" bIns="0">
             <a:spAutoFit/>
           </a:bodyPr>
           <a:lstStyle/>
           <a:p>
-            <a:pPr algn="l">
-              <a:lnSpc>
-                <a:spcPct val="115000"/>
-              </a:lnSpc>
-              <a:spcBef>
-                <a:spcPts val="0"/>
-              </a:spcBef>
-              <a:spcAft>
-                <a:spcPts val="0"/>
-              </a:spcAft>
-              <a:buNone/>
-              <a:defRPr lang="ja-JP" sz="800" b="0">
+            <a:pPr>
+              <a:lnSpc>
+                <a:spcPct val="110000"/>
+              </a:lnSpc>
+              <a:spcBef>
+                <a:spcPts val="0"/>
+              </a:spcBef>
+              <a:spcAft>
+                <a:spcPts val="0"/>
+              </a:spcAft>
+              <a:buNone/>
+              <a:defRPr sz="2200" lang="ja-JP" b="0">
+                <a:solidFill>
+                  <a:srgbClr val="303437"/>
+                </a:solidFill>
+                <a:latin typeface="Noto Sans"/>
+                <a:ea typeface="Noto Sans CJK JP"/>
+                <a:cs typeface="Noto Sans"/>
+              </a:defRPr>
+            </a:pPr>
+            <a:r>
+              <a:rPr sz="2200" lang="ja-JP" b="0">
+                <a:solidFill>
+                  <a:srgbClr val="303437"/>
+                </a:solidFill>
+                <a:latin typeface="Noto Sans"/>
+                <a:ea typeface="Noto Sans CJK JP"/>
+                <a:cs typeface="Noto Sans"/>
+              </a:rPr>
+              <a:t>640 × 480 pxの画像</a:t>
+            </a:r>
+          </a:p>
+        </p:txBody>
+      </p:sp>
+      <p:sp>
+        <p:nvSpPr>
+          <p:cNvPr id="6" name="Rectangle 5"/>
+          <p:cNvSpPr/>
+          <p:nvPr/>
+        </p:nvSpPr>
+        <p:spPr>
+          <a:xfrm>
+            <a:off x="1234440" y="3337560"/>
+            <a:ext cx="205740" cy="205740"/>
+          </a:xfrm>
+          <a:prstGeom prst="rect">
+            <a:avLst/>
+          </a:prstGeom>
+          <a:solidFill>
+            <a:srgbClr val="B13731"/>
+          </a:solidFill>
+          <a:ln w="6350">
+            <a:solidFill>
+              <a:srgbClr val="B13731"/>
+            </a:solidFill>
+          </a:ln>
+          <a:effectLst/>
+        </p:spPr>
+        <p:style>
+          <a:lnRef idx="1">
+            <a:schemeClr val="accent1"/>
+          </a:lnRef>
+          <a:fillRef idx="3">
+            <a:schemeClr val="accent1"/>
+          </a:fillRef>
+          <a:effectRef idx="0">
+            <a:schemeClr val="accent1"/>
+          </a:effectRef>
+          <a:fontRef idx="minor">
+            <a:schemeClr val="lt1"/>
+          </a:fontRef>
+        </p:style>
+        <p:txBody>
+          <a:bodyPr rtlCol="0" anchor="ctr"/>
+          <a:lstStyle/>
+          <a:p>
+            <a:pPr algn="ctr"/>
+          </a:p>
+        </p:txBody>
+      </p:sp>
+      <p:sp>
+        <p:nvSpPr>
+          <p:cNvPr id="7" name="Rectangle 6"/>
+          <p:cNvSpPr/>
+          <p:nvPr/>
+        </p:nvSpPr>
+        <p:spPr>
+          <a:xfrm>
+            <a:off x="2788920" y="2926080"/>
+            <a:ext cx="617220" cy="617220"/>
+          </a:xfrm>
+          <a:prstGeom prst="rect">
+            <a:avLst/>
+          </a:prstGeom>
+          <a:solidFill>
+            <a:srgbClr val="2C9100"/>
+          </a:solidFill>
+          <a:ln w="6350">
+            <a:solidFill>
+              <a:srgbClr val="2C9100"/>
+            </a:solidFill>
+          </a:ln>
+          <a:effectLst/>
+        </p:spPr>
+        <p:style>
+          <a:lnRef idx="1">
+            <a:schemeClr val="accent1"/>
+          </a:lnRef>
+          <a:fillRef idx="3">
+            <a:schemeClr val="accent1"/>
+          </a:fillRef>
+          <a:effectRef idx="0">
+            <a:schemeClr val="accent1"/>
+          </a:effectRef>
+          <a:fontRef idx="minor">
+            <a:schemeClr val="lt1"/>
+          </a:fontRef>
+        </p:style>
+        <p:txBody>
+          <a:bodyPr rtlCol="0" anchor="ctr"/>
+          <a:lstStyle/>
+          <a:p>
+            <a:pPr algn="ctr"/>
+          </a:p>
+        </p:txBody>
+      </p:sp>
+      <p:sp>
+        <p:nvSpPr>
+          <p:cNvPr id="8" name="TextBox 7"/>
+          <p:cNvSpPr txBox="1"/>
+          <p:nvPr/>
+        </p:nvSpPr>
+        <p:spPr>
+          <a:xfrm>
+            <a:off x="914400" y="3767328"/>
+            <a:ext cx="1371600" cy="365760"/>
+          </a:xfrm>
+          <a:prstGeom prst="rect">
+            <a:avLst/>
+          </a:prstGeom>
+          <a:noFill/>
+        </p:spPr>
+        <p:txBody>
+          <a:bodyPr wrap="square" lIns="0" rIns="0" tIns="0" bIns="0">
+            <a:spAutoFit/>
+          </a:bodyPr>
+          <a:lstStyle/>
+          <a:p>
+            <a:pPr>
+              <a:lnSpc>
+                <a:spcPct val="110000"/>
+              </a:lnSpc>
+              <a:spcBef>
+                <a:spcPts val="0"/>
+              </a:spcBef>
+              <a:spcAft>
+                <a:spcPts val="0"/>
+              </a:spcAft>
+              <a:buNone/>
+              <a:defRPr sz="1800" lang="ja-JP" b="0">
+                <a:solidFill>
+                  <a:srgbClr val="B13731"/>
+                </a:solidFill>
+                <a:latin typeface="Noto Sans"/>
+                <a:ea typeface="Noto Sans CJK JP"/>
+                <a:cs typeface="Noto Sans"/>
+              </a:defRPr>
+            </a:pPr>
+            <a:r>
+              <a:rPr sz="1800" lang="ja-JP" b="0">
+                <a:solidFill>
+                  <a:srgbClr val="B13731"/>
+                </a:solidFill>
+                <a:latin typeface="Noto Sans"/>
+                <a:ea typeface="Noto Sans CJK JP"/>
+                <a:cs typeface="Noto Sans"/>
+              </a:rPr>
+              <a:t>32 × 32</a:t>
+            </a:r>
+          </a:p>
+        </p:txBody>
+      </p:sp>
+      <p:sp>
+        <p:nvSpPr>
+          <p:cNvPr id="9" name="TextBox 8"/>
+          <p:cNvSpPr txBox="1"/>
+          <p:nvPr/>
+        </p:nvSpPr>
+        <p:spPr>
+          <a:xfrm>
+            <a:off x="2651760" y="3767328"/>
+            <a:ext cx="1645920" cy="365760"/>
+          </a:xfrm>
+          <a:prstGeom prst="rect">
+            <a:avLst/>
+          </a:prstGeom>
+          <a:noFill/>
+        </p:spPr>
+        <p:txBody>
+          <a:bodyPr wrap="square" lIns="0" rIns="0" tIns="0" bIns="0">
+            <a:spAutoFit/>
+          </a:bodyPr>
+          <a:lstStyle/>
+          <a:p>
+            <a:pPr>
+              <a:lnSpc>
+                <a:spcPct val="110000"/>
+              </a:lnSpc>
+              <a:spcBef>
+                <a:spcPts val="0"/>
+              </a:spcBef>
+              <a:spcAft>
+                <a:spcPts val="0"/>
+              </a:spcAft>
+              <a:buNone/>
+              <a:defRPr sz="1800" lang="ja-JP" b="0">
+                <a:solidFill>
+                  <a:srgbClr val="2C9100"/>
+                </a:solidFill>
+                <a:latin typeface="Noto Sans"/>
+                <a:ea typeface="Noto Sans CJK JP"/>
+                <a:cs typeface="Noto Sans"/>
+              </a:defRPr>
+            </a:pPr>
+            <a:r>
+              <a:rPr sz="1800" lang="ja-JP" b="0">
+                <a:solidFill>
+                  <a:srgbClr val="2C9100"/>
+                </a:solidFill>
+                <a:latin typeface="Noto Sans"/>
+                <a:ea typeface="Noto Sans CJK JP"/>
+                <a:cs typeface="Noto Sans"/>
+              </a:rPr>
+              <a:t>96 × 96</a:t>
+            </a:r>
+          </a:p>
+        </p:txBody>
+      </p:sp>
+      <p:sp>
+        <p:nvSpPr>
+          <p:cNvPr id="10" name="TextBox 9"/>
+          <p:cNvSpPr txBox="1"/>
+          <p:nvPr/>
+        </p:nvSpPr>
+        <p:spPr>
+          <a:xfrm>
+            <a:off x="758952" y="4242816"/>
+            <a:ext cx="3657600" cy="274320"/>
+          </a:xfrm>
+          <a:prstGeom prst="rect">
+            <a:avLst/>
+          </a:prstGeom>
+          <a:noFill/>
+        </p:spPr>
+        <p:txBody>
+          <a:bodyPr wrap="square" lIns="0" rIns="0" tIns="0" bIns="0">
+            <a:spAutoFit/>
+          </a:bodyPr>
+          <a:lstStyle/>
+          <a:p>
+            <a:pPr>
+              <a:lnSpc>
+                <a:spcPct val="110000"/>
+              </a:lnSpc>
+              <a:spcBef>
+                <a:spcPts val="0"/>
+              </a:spcBef>
+              <a:spcAft>
+                <a:spcPts val="0"/>
+              </a:spcAft>
+              <a:buNone/>
+              <a:defRPr sz="1400" lang="ja-JP" b="0">
                 <a:solidFill>
                   <a:srgbClr val="626669"/>
                 </a:solidFill>
@@ -9933,7 +10215,7 @@
               </a:defRPr>
             </a:pPr>
             <a:r>
-              <a:rPr lang="ja-JP" sz="800" b="0">
+              <a:rPr sz="1400" lang="ja-JP" b="0">
                 <a:solidFill>
                   <a:srgbClr val="626669"/>
                 </a:solidFill>
@@ -9941,10 +10223,501 @@
                 <a:ea typeface="Noto Sans CJK JP"/>
                 <a:cs typeface="Noto Sans"/>
               </a:rPr>
+              <a:t>正方形に置き換えた面積の例</a:t>
+            </a:r>
+          </a:p>
+        </p:txBody>
+      </p:sp>
+      <p:sp>
+        <p:nvSpPr>
+          <p:cNvPr id="11" name="TextBox 10"/>
+          <p:cNvSpPr txBox="1"/>
+          <p:nvPr/>
+        </p:nvSpPr>
+        <p:spPr>
+          <a:xfrm>
+            <a:off x="4983480" y="1481328"/>
+            <a:ext cx="3657600" cy="393192"/>
+          </a:xfrm>
+          <a:prstGeom prst="rect">
+            <a:avLst/>
+          </a:prstGeom>
+          <a:noFill/>
+        </p:spPr>
+        <p:txBody>
+          <a:bodyPr wrap="square" lIns="0" rIns="0" tIns="0" bIns="0">
+            <a:spAutoFit/>
+          </a:bodyPr>
+          <a:lstStyle/>
+          <a:p>
+            <a:pPr>
+              <a:lnSpc>
+                <a:spcPct val="110000"/>
+              </a:lnSpc>
+              <a:spcBef>
+                <a:spcPts val="0"/>
+              </a:spcBef>
+              <a:spcAft>
+                <a:spcPts val="0"/>
+              </a:spcAft>
+              <a:buNone/>
+              <a:defRPr sz="2200" lang="ja-JP" b="1">
+                <a:solidFill>
+                  <a:srgbClr val="303437"/>
+                </a:solidFill>
+                <a:latin typeface="Noto Sans"/>
+                <a:ea typeface="Noto Sans CJK JP"/>
+                <a:cs typeface="Noto Sans"/>
+              </a:defRPr>
+            </a:pPr>
+            <a:r>
+              <a:rPr sz="2200" lang="ja-JP" b="1">
+                <a:solidFill>
+                  <a:srgbClr val="303437"/>
+                </a:solidFill>
+                <a:latin typeface="Noto Sans"/>
+                <a:ea typeface="Noto Sans CJK JP"/>
+                <a:cs typeface="Noto Sans"/>
+              </a:rPr>
+              <a:t>32 × 32 = 1,024画素</a:t>
+            </a:r>
+          </a:p>
+        </p:txBody>
+      </p:sp>
+      <p:sp>
+        <p:nvSpPr>
+          <p:cNvPr id="12" name="TextBox 11"/>
+          <p:cNvSpPr txBox="1"/>
+          <p:nvPr/>
+        </p:nvSpPr>
+        <p:spPr>
+          <a:xfrm>
+            <a:off x="4983480" y="1965960"/>
+            <a:ext cx="3657600" cy="685800"/>
+          </a:xfrm>
+          <a:prstGeom prst="rect">
+            <a:avLst/>
+          </a:prstGeom>
+          <a:noFill/>
+        </p:spPr>
+        <p:txBody>
+          <a:bodyPr wrap="square" lIns="0" rIns="0" tIns="0" bIns="0">
+            <a:spAutoFit/>
+          </a:bodyPr>
+          <a:lstStyle/>
+          <a:p>
+            <a:pPr>
+              <a:lnSpc>
+                <a:spcPct val="110000"/>
+              </a:lnSpc>
+              <a:spcBef>
+                <a:spcPts val="0"/>
+              </a:spcBef>
+              <a:spcAft>
+                <a:spcPts val="0"/>
+              </a:spcAft>
+              <a:buNone/>
+              <a:defRPr sz="1800" lang="ja-JP" b="0">
+                <a:solidFill>
+                  <a:srgbClr val="303437"/>
+                </a:solidFill>
+                <a:latin typeface="Noto Sans"/>
+                <a:ea typeface="Noto Sans CJK JP"/>
+                <a:cs typeface="Noto Sans"/>
+              </a:defRPr>
+            </a:pPr>
+            <a:r>
+              <a:rPr sz="1800" lang="ja-JP" b="0">
+                <a:solidFill>
+                  <a:srgbClr val="303437"/>
+                </a:solidFill>
+                <a:latin typeface="Noto Sans"/>
+                <a:ea typeface="Noto Sans CJK JP"/>
+                <a:cs typeface="Noto Sans"/>
+              </a:rPr>
+              <a:t>画像全体の約0.33%</a:t>
+            </a:r>
+          </a:p>
+          <a:p>
+            <a:pPr>
+              <a:lnSpc>
+                <a:spcPct val="110000"/>
+              </a:lnSpc>
+              <a:spcBef>
+                <a:spcPts val="0"/>
+              </a:spcBef>
+              <a:spcAft>
+                <a:spcPts val="0"/>
+              </a:spcAft>
+              <a:buNone/>
+              <a:defRPr sz="1800" lang="ja-JP" b="0">
+                <a:solidFill>
+                  <a:srgbClr val="303437"/>
+                </a:solidFill>
+                <a:latin typeface="Noto Sans"/>
+                <a:ea typeface="Noto Sans CJK JP"/>
+                <a:cs typeface="Noto Sans"/>
+              </a:defRPr>
+            </a:pPr>
+            <a:r>
+              <a:rPr sz="1800" lang="ja-JP" b="0">
+                <a:solidFill>
+                  <a:srgbClr val="303437"/>
+                </a:solidFill>
+                <a:latin typeface="Noto Sans"/>
+                <a:ea typeface="Noto Sans CJK JP"/>
+                <a:cs typeface="Noto Sans"/>
+              </a:rPr>
+              <a:t>16×64画素の領域も同じ面積</a:t>
+            </a:r>
+          </a:p>
+        </p:txBody>
+      </p:sp>
+      <p:sp>
+        <p:nvSpPr>
+          <p:cNvPr id="13" name="TextBox 12"/>
+          <p:cNvSpPr txBox="1"/>
+          <p:nvPr/>
+        </p:nvSpPr>
+        <p:spPr>
+          <a:xfrm>
+            <a:off x="4983480" y="2788920"/>
+            <a:ext cx="3657600" cy="393192"/>
+          </a:xfrm>
+          <a:prstGeom prst="rect">
+            <a:avLst/>
+          </a:prstGeom>
+          <a:noFill/>
+        </p:spPr>
+        <p:txBody>
+          <a:bodyPr wrap="square" lIns="0" rIns="0" tIns="0" bIns="0">
+            <a:spAutoFit/>
+          </a:bodyPr>
+          <a:lstStyle/>
+          <a:p>
+            <a:pPr>
+              <a:lnSpc>
+                <a:spcPct val="110000"/>
+              </a:lnSpc>
+              <a:spcBef>
+                <a:spcPts val="0"/>
+              </a:spcBef>
+              <a:spcAft>
+                <a:spcPts val="0"/>
+              </a:spcAft>
+              <a:buNone/>
+              <a:defRPr sz="2200" lang="ja-JP" b="1">
+                <a:solidFill>
+                  <a:srgbClr val="303437"/>
+                </a:solidFill>
+                <a:latin typeface="Noto Sans"/>
+                <a:ea typeface="Noto Sans CJK JP"/>
+                <a:cs typeface="Noto Sans"/>
+              </a:defRPr>
+            </a:pPr>
+            <a:r>
+              <a:rPr sz="2200" lang="ja-JP" b="1">
+                <a:solidFill>
+                  <a:srgbClr val="303437"/>
+                </a:solidFill>
+                <a:latin typeface="Noto Sans"/>
+                <a:ea typeface="Noto Sans CJK JP"/>
+                <a:cs typeface="Noto Sans"/>
+              </a:rPr>
+              <a:t>96 × 96 = 9,216画素</a:t>
+            </a:r>
+          </a:p>
+        </p:txBody>
+      </p:sp>
+      <p:sp>
+        <p:nvSpPr>
+          <p:cNvPr id="14" name="TextBox 13"/>
+          <p:cNvSpPr txBox="1"/>
+          <p:nvPr/>
+        </p:nvSpPr>
+        <p:spPr>
+          <a:xfrm>
+            <a:off x="4983480" y="3273552"/>
+            <a:ext cx="3657600" cy="365760"/>
+          </a:xfrm>
+          <a:prstGeom prst="rect">
+            <a:avLst/>
+          </a:prstGeom>
+          <a:noFill/>
+        </p:spPr>
+        <p:txBody>
+          <a:bodyPr wrap="square" lIns="0" rIns="0" tIns="0" bIns="0">
+            <a:spAutoFit/>
+          </a:bodyPr>
+          <a:lstStyle/>
+          <a:p>
+            <a:pPr>
+              <a:lnSpc>
+                <a:spcPct val="110000"/>
+              </a:lnSpc>
+              <a:spcBef>
+                <a:spcPts val="0"/>
+              </a:spcBef>
+              <a:spcAft>
+                <a:spcPts val="0"/>
+              </a:spcAft>
+              <a:buNone/>
+              <a:defRPr sz="1800" lang="ja-JP" b="0">
+                <a:solidFill>
+                  <a:srgbClr val="303437"/>
+                </a:solidFill>
+                <a:latin typeface="Noto Sans"/>
+                <a:ea typeface="Noto Sans CJK JP"/>
+                <a:cs typeface="Noto Sans"/>
+              </a:defRPr>
+            </a:pPr>
+            <a:r>
+              <a:rPr sz="1800" lang="ja-JP" b="0">
+                <a:solidFill>
+                  <a:srgbClr val="303437"/>
+                </a:solidFill>
+                <a:latin typeface="Noto Sans"/>
+                <a:ea typeface="Noto Sans CJK JP"/>
+                <a:cs typeface="Noto Sans"/>
+              </a:rPr>
+              <a:t>画像全体の3%</a:t>
+            </a:r>
+          </a:p>
+        </p:txBody>
+      </p:sp>
+      <p:sp>
+        <p:nvSpPr>
+          <p:cNvPr id="15" name="TextBox 14"/>
+          <p:cNvSpPr txBox="1"/>
+          <p:nvPr/>
+        </p:nvSpPr>
+        <p:spPr>
+          <a:xfrm>
+            <a:off x="4983480" y="3685032"/>
+            <a:ext cx="3657600" cy="822960"/>
+          </a:xfrm>
+          <a:prstGeom prst="rect">
+            <a:avLst/>
+          </a:prstGeom>
+          <a:noFill/>
+        </p:spPr>
+        <p:txBody>
+          <a:bodyPr wrap="square" lIns="0" rIns="0" tIns="0" bIns="0">
+            <a:spAutoFit/>
+          </a:bodyPr>
+          <a:lstStyle/>
+          <a:p>
+            <a:pPr>
+              <a:lnSpc>
+                <a:spcPct val="110000"/>
+              </a:lnSpc>
+              <a:spcBef>
+                <a:spcPts val="0"/>
+              </a:spcBef>
+              <a:spcAft>
+                <a:spcPts val="0"/>
+              </a:spcAft>
+              <a:buNone/>
+              <a:defRPr sz="1600" lang="ja-JP" b="0">
+                <a:solidFill>
+                  <a:srgbClr val="303437"/>
+                </a:solidFill>
+                <a:latin typeface="Noto Sans"/>
+                <a:ea typeface="Noto Sans CJK JP"/>
+                <a:cs typeface="Noto Sans"/>
+              </a:defRPr>
+            </a:pPr>
+            <a:r>
+              <a:rPr sz="1600" lang="ja-JP" b="0">
+                <a:solidFill>
+                  <a:srgbClr val="303437"/>
+                </a:solidFill>
+                <a:latin typeface="Noto Sans"/>
+                <a:ea typeface="Noto Sans CJK JP"/>
+                <a:cs typeface="Noto Sans"/>
+              </a:rPr>
+              <a:t>small &lt; 32²：42%</a:t>
+            </a:r>
+          </a:p>
+          <a:p>
+            <a:pPr>
+              <a:lnSpc>
+                <a:spcPct val="110000"/>
+              </a:lnSpc>
+              <a:spcBef>
+                <a:spcPts val="0"/>
+              </a:spcBef>
+              <a:spcAft>
+                <a:spcPts val="0"/>
+              </a:spcAft>
+              <a:buNone/>
+              <a:defRPr sz="1600" lang="ja-JP" b="0">
+                <a:solidFill>
+                  <a:srgbClr val="303437"/>
+                </a:solidFill>
+                <a:latin typeface="Noto Sans"/>
+                <a:ea typeface="Noto Sans CJK JP"/>
+                <a:cs typeface="Noto Sans"/>
+              </a:defRPr>
+            </a:pPr>
+            <a:r>
+              <a:rPr sz="1600" lang="ja-JP" b="0">
+                <a:solidFill>
+                  <a:srgbClr val="303437"/>
+                </a:solidFill>
+                <a:latin typeface="Noto Sans"/>
+                <a:ea typeface="Noto Sans CJK JP"/>
+                <a:cs typeface="Noto Sans"/>
+              </a:rPr>
+              <a:t>medium 32²〜96²：34%</a:t>
+            </a:r>
+          </a:p>
+          <a:p>
+            <a:pPr>
+              <a:lnSpc>
+                <a:spcPct val="110000"/>
+              </a:lnSpc>
+              <a:spcBef>
+                <a:spcPts val="0"/>
+              </a:spcBef>
+              <a:spcAft>
+                <a:spcPts val="0"/>
+              </a:spcAft>
+              <a:buNone/>
+              <a:defRPr sz="1600" lang="ja-JP" b="0">
+                <a:solidFill>
+                  <a:srgbClr val="303437"/>
+                </a:solidFill>
+                <a:latin typeface="Noto Sans"/>
+                <a:ea typeface="Noto Sans CJK JP"/>
+                <a:cs typeface="Noto Sans"/>
+              </a:defRPr>
+            </a:pPr>
+            <a:r>
+              <a:rPr sz="1600" lang="ja-JP" b="0">
+                <a:solidFill>
+                  <a:srgbClr val="303437"/>
+                </a:solidFill>
+                <a:latin typeface="Noto Sans"/>
+                <a:ea typeface="Noto Sans CJK JP"/>
+                <a:cs typeface="Noto Sans"/>
+              </a:rPr>
+              <a:t>large &gt; 96²：24%</a:t>
+            </a:r>
+          </a:p>
+        </p:txBody>
+      </p:sp>
+      <p:sp>
+        <p:nvSpPr>
+          <p:cNvPr id="16" name="TextBox 15"/>
+          <p:cNvSpPr txBox="1"/>
+          <p:nvPr/>
+        </p:nvSpPr>
+        <p:spPr>
+          <a:xfrm>
+            <a:off x="594360" y="4608576"/>
+            <a:ext cx="7955279" cy="256032"/>
+          </a:xfrm>
+          <a:prstGeom prst="rect">
+            <a:avLst/>
+          </a:prstGeom>
+          <a:noFill/>
+        </p:spPr>
+        <p:txBody>
+          <a:bodyPr wrap="square" lIns="0" rIns="0" tIns="0" bIns="0">
+            <a:spAutoFit/>
+          </a:bodyPr>
+          <a:lstStyle/>
+          <a:p>
+            <a:pPr>
+              <a:lnSpc>
+                <a:spcPct val="110000"/>
+              </a:lnSpc>
+              <a:spcBef>
+                <a:spcPts val="0"/>
+              </a:spcBef>
+              <a:spcAft>
+                <a:spcPts val="0"/>
+              </a:spcAft>
+              <a:buNone/>
+              <a:defRPr sz="1400" lang="ja-JP" b="0">
+                <a:solidFill>
+                  <a:srgbClr val="303437"/>
+                </a:solidFill>
+                <a:latin typeface="Noto Sans"/>
+                <a:ea typeface="Noto Sans CJK JP"/>
+                <a:cs typeface="Noto Sans"/>
+              </a:defRPr>
+            </a:pPr>
+            <a:r>
+              <a:rPr sz="1400" lang="ja-JP" b="0">
+                <a:solidFill>
+                  <a:srgbClr val="303437"/>
+                </a:solidFill>
+                <a:latin typeface="Noto Sans"/>
+                <a:ea typeface="Noto Sans CJK JP"/>
+                <a:cs typeface="Noto Sans"/>
+              </a:rPr>
+              <a:t>区分は正解マスクの面積で決める。</a:t>
+            </a:r>
+          </a:p>
+        </p:txBody>
+      </p:sp>
+      <p:sp>
+        <p:nvSpPr>
+          <p:cNvPr id="17" name="TextBox 16"/>
+          <p:cNvSpPr txBox="1"/>
+          <p:nvPr/>
+        </p:nvSpPr>
+        <p:spPr>
+          <a:xfrm>
+            <a:off x="502920" y="4965192"/>
+            <a:ext cx="8183879" cy="137160"/>
+          </a:xfrm>
+          <a:prstGeom prst="rect">
+            <a:avLst/>
+          </a:prstGeom>
+          <a:noFill/>
+        </p:spPr>
+        <p:txBody>
+          <a:bodyPr wrap="square" lIns="0" rIns="0" tIns="0" bIns="0">
+            <a:spAutoFit/>
+          </a:bodyPr>
+          <a:lstStyle/>
+          <a:p>
+            <a:pPr>
+              <a:lnSpc>
+                <a:spcPct val="110000"/>
+              </a:lnSpc>
+              <a:spcBef>
+                <a:spcPts val="0"/>
+              </a:spcBef>
+              <a:spcAft>
+                <a:spcPts val="0"/>
+              </a:spcAft>
+              <a:buNone/>
+              <a:defRPr sz="800" lang="ja-JP" b="0">
+                <a:solidFill>
+                  <a:srgbClr val="626669"/>
+                </a:solidFill>
+                <a:latin typeface="Noto Sans"/>
+                <a:ea typeface="Noto Sans CJK JP"/>
+                <a:cs typeface="Noto Sans"/>
+              </a:defRPr>
+            </a:pPr>
+            <a:r>
+              <a:rPr sz="800" lang="ja-JP" b="0">
+                <a:solidFill>
+                  <a:srgbClr val="626669"/>
+                </a:solidFill>
+                <a:latin typeface="Noto Sans"/>
+                <a:ea typeface="Noto Sans CJK JP"/>
+                <a:cs typeface="Noto Sans"/>
+              </a:rPr>
               <a:t>[1] </a:t>
             </a:r>
             <a:r>
-              <a:rPr lang="ja-JP" sz="800" b="0">
+              <a:rPr sz="800" lang="ja-JP" b="0">
                 <a:solidFill>
                   <a:srgbClr val="626669"/>
                 </a:solidFill>
@@ -9956,7 +10729,7 @@
               <a:t>https://cocodataset.org/#detection-eval</a:t>
             </a:r>
             <a:r>
-              <a:rPr lang="ja-JP" sz="800" b="0">
+              <a:rPr sz="800" lang="ja-JP" b="0">
                 <a:solidFill>
                   <a:srgbClr val="626669"/>
                 </a:solidFill>
@@ -9964,7 +10737,7 @@
                 <a:ea typeface="Noto Sans CJK JP"/>
                 <a:cs typeface="Noto Sans"/>
               </a:rPr>
-              <a:t> / 公式ページの物体面積別の概数（42%、34%、24%）</a:t>
+              <a:t> （割合は公式の概数）</a:t>
             </a:r>
           </a:p>
         </p:txBody>
@@ -11080,15 +11853,15 @@
         </p:nvSpPr>
         <p:spPr>
           <a:xfrm>
-            <a:off x="731520" y="1234440"/>
-            <a:ext cx="7772400" cy="3474720"/>
+            <a:off x="594360" y="960120"/>
+            <a:ext cx="8138160" cy="3749039"/>
           </a:xfrm>
         </p:spPr>
         <p:txBody>
           <a:bodyPr wrap="square" anchor="t" tIns="91440" bIns="91440"/>
           <a:lstStyle/>
           <a:p>
-            <a:pPr algn="l" marL="457200" indent="-355600" lvl="0">
+            <a:pPr algn="l" marL="609600" indent="-457200" lvl="0">
               <a:lnSpc>
                 <a:spcPct val="115000"/>
               </a:lnSpc>
@@ -11096,22 +11869,22 @@
                 <a:spcPts val="0"/>
               </a:spcBef>
               <a:spcAft>
-                <a:spcPts val="1400"/>
+                <a:spcPts val="1600"/>
               </a:spcAft>
               <a:buSzPct val="100000"/>
               <a:buFont typeface="Noto Sans CJK JP"/>
               <a:buAutoNum type="arabicPeriod"/>
-              <a:defRPr lang="ja-JP" sz="2600" b="0">
-                <a:solidFill>
-                  <a:srgbClr val="303437"/>
-                </a:solidFill>
-                <a:latin typeface="Noto Sans"/>
-                <a:ea typeface="Noto Sans CJK JP"/>
-                <a:cs typeface="Noto Sans"/>
-              </a:defRPr>
-            </a:pPr>
-            <a:r>
-              <a:rPr lang="ja-JP" sz="2600" b="0">
+              <a:defRPr lang="ja-JP" sz="3200" b="0">
+                <a:solidFill>
+                  <a:srgbClr val="303437"/>
+                </a:solidFill>
+                <a:latin typeface="Noto Sans"/>
+                <a:ea typeface="Noto Sans CJK JP"/>
+                <a:cs typeface="Noto Sans"/>
+              </a:defRPr>
+            </a:pPr>
+            <a:r>
+              <a:rPr lang="ja-JP" sz="3200" b="0">
                 <a:solidFill>
                   <a:srgbClr val="303437"/>
                 </a:solidFill>
@@ -11123,7 +11896,7 @@
             </a:r>
           </a:p>
           <a:p>
-            <a:pPr algn="l" marL="457200" indent="-355600" lvl="0">
+            <a:pPr algn="l" marL="609600" indent="-457200" lvl="0">
               <a:lnSpc>
                 <a:spcPct val="115000"/>
               </a:lnSpc>
@@ -11131,22 +11904,22 @@
                 <a:spcPts val="0"/>
               </a:spcBef>
               <a:spcAft>
-                <a:spcPts val="1400"/>
+                <a:spcPts val="1600"/>
               </a:spcAft>
               <a:buSzPct val="100000"/>
               <a:buFont typeface="Noto Sans CJK JP"/>
               <a:buAutoNum type="arabicPeriod"/>
-              <a:defRPr lang="ja-JP" sz="2600" b="0">
-                <a:solidFill>
-                  <a:srgbClr val="303437"/>
-                </a:solidFill>
-                <a:latin typeface="Noto Sans"/>
-                <a:ea typeface="Noto Sans CJK JP"/>
-                <a:cs typeface="Noto Sans"/>
-              </a:defRPr>
-            </a:pPr>
-            <a:r>
-              <a:rPr lang="ja-JP" sz="2600" b="0">
+              <a:defRPr lang="ja-JP" sz="3200" b="0">
+                <a:solidFill>
+                  <a:srgbClr val="303437"/>
+                </a:solidFill>
+                <a:latin typeface="Noto Sans"/>
+                <a:ea typeface="Noto Sans CJK JP"/>
+                <a:cs typeface="Noto Sans"/>
+              </a:defRPr>
+            </a:pPr>
+            <a:r>
+              <a:rPr lang="ja-JP" sz="3200" b="0">
                 <a:solidFill>
                   <a:srgbClr val="303437"/>
                 </a:solidFill>
@@ -11158,7 +11931,7 @@
             </a:r>
           </a:p>
           <a:p>
-            <a:pPr algn="l" marL="457200" indent="-355600" lvl="0">
+            <a:pPr algn="l" marL="609600" indent="-457200" lvl="0">
               <a:lnSpc>
                 <a:spcPct val="115000"/>
               </a:lnSpc>
@@ -11166,22 +11939,22 @@
                 <a:spcPts val="0"/>
               </a:spcBef>
               <a:spcAft>
-                <a:spcPts val="1400"/>
+                <a:spcPts val="1600"/>
               </a:spcAft>
               <a:buSzPct val="100000"/>
               <a:buFont typeface="Noto Sans CJK JP"/>
               <a:buAutoNum type="arabicPeriod"/>
-              <a:defRPr lang="ja-JP" sz="2600" b="0">
-                <a:solidFill>
-                  <a:srgbClr val="303437"/>
-                </a:solidFill>
-                <a:latin typeface="Noto Sans"/>
-                <a:ea typeface="Noto Sans CJK JP"/>
-                <a:cs typeface="Noto Sans"/>
-              </a:defRPr>
-            </a:pPr>
-            <a:r>
-              <a:rPr lang="ja-JP" sz="2600" b="0">
+              <a:defRPr lang="ja-JP" sz="3200" b="0">
+                <a:solidFill>
+                  <a:srgbClr val="303437"/>
+                </a:solidFill>
+                <a:latin typeface="Noto Sans"/>
+                <a:ea typeface="Noto Sans CJK JP"/>
+                <a:cs typeface="Noto Sans"/>
+              </a:defRPr>
+            </a:pPr>
+            <a:r>
+              <a:rPr lang="ja-JP" sz="3200" b="0">
                 <a:solidFill>
                   <a:srgbClr val="303437"/>
                 </a:solidFill>
@@ -11193,7 +11966,7 @@
             </a:r>
           </a:p>
           <a:p>
-            <a:pPr algn="l" marL="457200" indent="-355600" lvl="0">
+            <a:pPr algn="l" marL="609600" indent="-457200" lvl="0">
               <a:lnSpc>
                 <a:spcPct val="115000"/>
               </a:lnSpc>
@@ -11201,22 +11974,22 @@
                 <a:spcPts val="0"/>
               </a:spcBef>
               <a:spcAft>
-                <a:spcPts val="1400"/>
+                <a:spcPts val="1600"/>
               </a:spcAft>
               <a:buSzPct val="100000"/>
               <a:buFont typeface="Noto Sans CJK JP"/>
               <a:buAutoNum type="arabicPeriod"/>
-              <a:defRPr lang="ja-JP" sz="2600" b="0">
-                <a:solidFill>
-                  <a:srgbClr val="303437"/>
-                </a:solidFill>
-                <a:latin typeface="Noto Sans"/>
-                <a:ea typeface="Noto Sans CJK JP"/>
-                <a:cs typeface="Noto Sans"/>
-              </a:defRPr>
-            </a:pPr>
-            <a:r>
-              <a:rPr lang="ja-JP" sz="2600" b="0">
+              <a:defRPr lang="ja-JP" sz="3200" b="0">
+                <a:solidFill>
+                  <a:srgbClr val="303437"/>
+                </a:solidFill>
+                <a:latin typeface="Noto Sans"/>
+                <a:ea typeface="Noto Sans CJK JP"/>
+                <a:cs typeface="Noto Sans"/>
+              </a:defRPr>
+            </a:pPr>
+            <a:r>
+              <a:rPr lang="ja-JP" sz="3200" b="0">
                 <a:solidFill>
                   <a:srgbClr val="303437"/>
                 </a:solidFill>
@@ -15439,247 +16212,41 @@
         </p:nvSpPr>
         <p:spPr>
           <a:xfrm>
-            <a:off x="468172" y="650138"/>
-            <a:ext cx="8206740" cy="616305"/>
+            <a:off x="457200" y="1645920"/>
+            <a:ext cx="8229600" cy="1280160"/>
           </a:xfrm>
         </p:spPr>
         <p:txBody>
-          <a:bodyPr wrap="square" anchor="t" lIns="0" rIns="0" tIns="0" bIns="0"/>
+          <a:bodyPr anchor="ctr"/>
           <a:lstStyle/>
           <a:p>
-            <a:pPr algn="l">
-              <a:lnSpc>
-                <a:spcPct val="115000"/>
-              </a:lnSpc>
-              <a:spcBef>
-                <a:spcPts val="0"/>
-              </a:spcBef>
-              <a:spcAft>
-                <a:spcPts val="0"/>
-              </a:spcAft>
-              <a:buNone/>
-              <a:defRPr lang="ja-JP" sz="2800" b="1">
-                <a:solidFill>
-                  <a:srgbClr val="303437"/>
-                </a:solidFill>
-                <a:latin typeface="Noto Sans"/>
-                <a:ea typeface="Noto Sans CJK JP"/>
-                <a:cs typeface="Noto Sans"/>
-              </a:defRPr>
-            </a:pPr>
-            <a:r>
-              <a:rPr lang="ja-JP" sz="2800" b="1">
-                <a:solidFill>
-                  <a:srgbClr val="303437"/>
-                </a:solidFill>
-                <a:latin typeface="Noto Sans"/>
-                <a:ea typeface="Noto Sans CJK JP"/>
-                <a:cs typeface="Noto Sans"/>
-              </a:rPr>
-              <a:t/>
+            <a:pPr algn="ctr">
+              <a:defRPr sz="4800" b="1" lang="ja-JP">
+                <a:solidFill>
+                  <a:srgbClr val="303437"/>
+                </a:solidFill>
+                <a:latin typeface="Noto Sans"/>
+                <a:ea typeface="Noto Sans CJK JP"/>
+                <a:cs typeface="Noto Sans"/>
+              </a:defRPr>
+            </a:pPr>
+            <a:r>
+              <a:rPr sz="4800" b="1" lang="ja-JP">
+                <a:solidFill>
+                  <a:srgbClr val="303437"/>
+                </a:solidFill>
+                <a:latin typeface="Noto Sans"/>
+                <a:ea typeface="Noto Sans CJK JP"/>
+                <a:cs typeface="Noto Sans"/>
+              </a:rPr>
+              <a:t>Appendix</a:t>
             </a:r>
           </a:p>
         </p:txBody>
       </p:sp>
       <p:sp>
         <p:nvSpPr>
-          <p:cNvPr id="3" name="Text Placeholder 2"/>
-          <p:cNvSpPr>
-            <a:spLocks noGrp="1"/>
-          </p:cNvSpPr>
-          <p:nvPr>
-            <p:ph type="body" idx="1"/>
-          </p:nvPr>
-        </p:nvSpPr>
-        <p:spPr>
-          <a:xfrm>
-            <a:off x="731520" y="1234440"/>
-            <a:ext cx="7772400" cy="3474720"/>
-          </a:xfrm>
-        </p:spPr>
-        <p:txBody>
-          <a:bodyPr wrap="square" anchor="t" tIns="91440" bIns="91440"/>
-          <a:lstStyle/>
-          <a:p>
-            <a:pPr algn="l" marL="457200" indent="-355600" lvl="0">
-              <a:lnSpc>
-                <a:spcPct val="115000"/>
-              </a:lnSpc>
-              <a:spcBef>
-                <a:spcPts val="0"/>
-              </a:spcBef>
-              <a:spcAft>
-                <a:spcPts val="1400"/>
-              </a:spcAft>
-              <a:buSzPct val="100000"/>
-              <a:buFont typeface="Noto Sans CJK JP"/>
-              <a:buAutoNum type="arabicPeriod"/>
-              <a:defRPr lang="ja-JP" sz="2600" b="0">
-                <a:solidFill>
-                  <a:srgbClr val="303437"/>
-                </a:solidFill>
-                <a:latin typeface="Noto Sans"/>
-                <a:ea typeface="Noto Sans CJK JP"/>
-                <a:cs typeface="Noto Sans"/>
-              </a:defRPr>
-            </a:pPr>
-            <a:r>
-              <a:rPr lang="ja-JP" sz="2600" b="0">
-                <a:solidFill>
-                  <a:srgbClr val="303437"/>
-                </a:solidFill>
-                <a:latin typeface="Noto Sans"/>
-                <a:ea typeface="Noto Sans CJK JP"/>
-                <a:cs typeface="Noto Sans"/>
-              </a:rPr>
-              <a:t>定義・著者・評価の詳細</a:t>
-            </a:r>
-          </a:p>
-          <a:p>
-            <a:pPr algn="l" marL="457200" indent="-355600" lvl="0">
-              <a:lnSpc>
-                <a:spcPct val="115000"/>
-              </a:lnSpc>
-              <a:spcBef>
-                <a:spcPts val="0"/>
-              </a:spcBef>
-              <a:spcAft>
-                <a:spcPts val="1400"/>
-              </a:spcAft>
-              <a:buSzPct val="100000"/>
-              <a:buFont typeface="Noto Sans CJK JP"/>
-              <a:buAutoNum type="arabicPeriod"/>
-              <a:defRPr lang="ja-JP" sz="2600" b="0">
-                <a:solidFill>
-                  <a:srgbClr val="303437"/>
-                </a:solidFill>
-                <a:latin typeface="Noto Sans"/>
-                <a:ea typeface="Noto Sans CJK JP"/>
-                <a:cs typeface="Noto Sans"/>
-              </a:defRPr>
-            </a:pPr>
-            <a:r>
-              <a:rPr lang="ja-JP" sz="2600" b="0">
-                <a:solidFill>
-                  <a:srgbClr val="303437"/>
-                </a:solidFill>
-                <a:latin typeface="Noto Sans"/>
-                <a:ea typeface="Noto Sans CJK JP"/>
-                <a:cs typeface="Noto Sans"/>
-              </a:rPr>
-              <a:t>128画像で見る注釈の分布</a:t>
-            </a:r>
-          </a:p>
-          <a:p>
-            <a:pPr algn="l" marL="457200" indent="-355600" lvl="0">
-              <a:lnSpc>
-                <a:spcPct val="115000"/>
-              </a:lnSpc>
-              <a:spcBef>
-                <a:spcPts val="0"/>
-              </a:spcBef>
-              <a:spcAft>
-                <a:spcPts val="1400"/>
-              </a:spcAft>
-              <a:buSzPct val="100000"/>
-              <a:buFont typeface="Noto Sans CJK JP"/>
-              <a:buAutoNum type="arabicPeriod"/>
-              <a:defRPr lang="ja-JP" sz="2600" b="0">
-                <a:solidFill>
-                  <a:srgbClr val="303437"/>
-                </a:solidFill>
-                <a:latin typeface="Noto Sans"/>
-                <a:ea typeface="Noto Sans CJK JP"/>
-                <a:cs typeface="Noto Sans"/>
-              </a:defRPr>
-            </a:pPr>
-            <a:r>
-              <a:rPr lang="ja-JP" sz="2600" b="0">
-                <a:solidFill>
-                  <a:srgbClr val="303437"/>
-                </a:solidFill>
-                <a:latin typeface="Noto Sans"/>
-                <a:ea typeface="Noto Sans CJK JP"/>
-                <a:cs typeface="Noto Sans"/>
-              </a:rPr>
-              <a:t>追加の領域注釈例</a:t>
-            </a:r>
-          </a:p>
-          <a:p>
-            <a:pPr algn="l" marL="457200" indent="-355600" lvl="0">
-              <a:lnSpc>
-                <a:spcPct val="115000"/>
-              </a:lnSpc>
-              <a:spcBef>
-                <a:spcPts val="0"/>
-              </a:spcBef>
-              <a:spcAft>
-                <a:spcPts val="1400"/>
-              </a:spcAft>
-              <a:buSzPct val="100000"/>
-              <a:buFont typeface="Noto Sans CJK JP"/>
-              <a:buAutoNum type="arabicPeriod"/>
-              <a:defRPr lang="ja-JP" sz="2600" b="0">
-                <a:solidFill>
-                  <a:srgbClr val="303437"/>
-                </a:solidFill>
-                <a:latin typeface="Noto Sans"/>
-                <a:ea typeface="Noto Sans CJK JP"/>
-                <a:cs typeface="Noto Sans"/>
-              </a:defRPr>
-            </a:pPr>
-            <a:r>
-              <a:rPr lang="ja-JP" sz="2600" b="0">
-                <a:solidFill>
-                  <a:srgbClr val="303437"/>
-                </a:solidFill>
-                <a:latin typeface="Noto Sans"/>
-                <a:ea typeface="Noto Sans CJK JP"/>
-                <a:cs typeface="Noto Sans"/>
-              </a:rPr>
-              <a:t>全80カテゴリと利用条件</a:t>
-            </a:r>
-          </a:p>
-          <a:p>
-            <a:pPr algn="l" marL="457200" indent="-355600" lvl="0">
-              <a:lnSpc>
-                <a:spcPct val="115000"/>
-              </a:lnSpc>
-              <a:spcBef>
-                <a:spcPts val="0"/>
-              </a:spcBef>
-              <a:spcAft>
-                <a:spcPts val="1400"/>
-              </a:spcAft>
-              <a:buSzPct val="100000"/>
-              <a:buFont typeface="Noto Sans CJK JP"/>
-              <a:buAutoNum type="arabicPeriod"/>
-              <a:defRPr lang="ja-JP" sz="2600" b="0">
-                <a:solidFill>
-                  <a:srgbClr val="303437"/>
-                </a:solidFill>
-                <a:latin typeface="Noto Sans"/>
-                <a:ea typeface="Noto Sans CJK JP"/>
-                <a:cs typeface="Noto Sans"/>
-              </a:defRPr>
-            </a:pPr>
-            <a:r>
-              <a:rPr lang="ja-JP" sz="2600" b="0">
-                <a:solidFill>
-                  <a:srgbClr val="303437"/>
-                </a:solidFill>
-                <a:latin typeface="Noto Sans"/>
-                <a:ea typeface="Noto Sans CJK JP"/>
-                <a:cs typeface="Noto Sans"/>
-              </a:rPr>
-              <a:t>参考文献</a:t>
-            </a:r>
-          </a:p>
-        </p:txBody>
-      </p:sp>
-      <p:sp>
-        <p:nvSpPr>
-          <p:cNvPr id="4" name="Title 3"/>
+          <p:cNvPr id="3" name="Title 2"/>
           <p:cNvSpPr>
             <a:spLocks noGrp="1"/>
           </p:cNvSpPr>
@@ -15687,48 +16254,11 @@
             <p:ph type="title" idx="2"/>
           </p:nvPr>
         </p:nvSpPr>
-        <p:spPr>
-          <a:xfrm>
-            <a:off x="75895" y="0"/>
-            <a:ext cx="8115300" cy="480060"/>
-          </a:xfrm>
-        </p:spPr>
+        <p:spPr/>
         <p:txBody>
-          <a:bodyPr wrap="square" anchor="ctr" lIns="0" rIns="0" tIns="0" bIns="0"/>
+          <a:bodyPr/>
           <a:lstStyle/>
-          <a:p>
-            <a:pPr algn="l">
-              <a:lnSpc>
-                <a:spcPct val="100000"/>
-              </a:lnSpc>
-              <a:spcBef>
-                <a:spcPts val="0"/>
-              </a:spcBef>
-              <a:spcAft>
-                <a:spcPts val="0"/>
-              </a:spcAft>
-              <a:buNone/>
-              <a:defRPr lang="ja-JP" sz="1400" b="1">
-                <a:solidFill>
-                  <a:srgbClr val="FFFEF8"/>
-                </a:solidFill>
-                <a:latin typeface="Noto Sans"/>
-                <a:ea typeface="Noto Sans CJK JP"/>
-                <a:cs typeface="Noto Sans"/>
-              </a:defRPr>
-            </a:pPr>
-            <a:r>
-              <a:rPr lang="ja-JP" sz="1400" b="1">
-                <a:solidFill>
-                  <a:srgbClr val="FFFEF8"/>
-                </a:solidFill>
-                <a:latin typeface="Noto Sans"/>
-                <a:ea typeface="Noto Sans CJK JP"/>
-                <a:cs typeface="Noto Sans"/>
-              </a:rPr>
-              <a:t>目次</a:t>
-            </a:r>
-          </a:p>
+          <a:p/>
         </p:txBody>
       </p:sp>
     </p:spTree>
@@ -15924,7 +16454,7 @@
                 <a:ea typeface="Noto Sans CJK JP"/>
                 <a:cs typeface="Noto Sans"/>
               </a:rPr>
-              <a:t>原著の著者と研究の位置付け</a:t>
+              <a:t/>
             </a:r>
           </a:p>
         </p:txBody>
@@ -15941,15 +16471,15 @@
         </p:nvSpPr>
         <p:spPr>
           <a:xfrm>
-            <a:off x="594360" y="1508760"/>
-            <a:ext cx="7955279" cy="3017520"/>
+            <a:off x="594360" y="960120"/>
+            <a:ext cx="8138160" cy="3749039"/>
           </a:xfrm>
         </p:spPr>
         <p:txBody>
           <a:bodyPr wrap="square" anchor="t" tIns="91440" bIns="91440"/>
           <a:lstStyle/>
           <a:p>
-            <a:pPr algn="l" lvl="0" marL="457200" indent="-355600">
+            <a:pPr algn="l" marL="609600" indent="-457200" lvl="0">
               <a:lnSpc>
                 <a:spcPct val="115000"/>
               </a:lnSpc>
@@ -15957,34 +16487,34 @@
                 <a:spcPts val="0"/>
               </a:spcBef>
               <a:spcAft>
-                <a:spcPts val="800"/>
-              </a:spcAft>
-              <a:buSzPct val="57826"/>
+                <a:spcPts val="1600"/>
+              </a:spcAft>
+              <a:buSzPct val="100000"/>
               <a:buFont typeface="Noto Sans CJK JP"/>
-              <a:buChar char="●"/>
-              <a:defRPr lang="ja-JP" sz="2300" b="0">
-                <a:solidFill>
-                  <a:srgbClr val="303437"/>
-                </a:solidFill>
-                <a:latin typeface="Noto Sans"/>
-                <a:ea typeface="Noto Sans CJK JP"/>
-                <a:cs typeface="Noto Sans"/>
-              </a:defRPr>
-            </a:pPr>
-            <a:r>
-              <a:rPr lang="ja-JP" sz="2300" b="0">
-                <a:solidFill>
-                  <a:srgbClr val="303437"/>
-                </a:solidFill>
-                <a:latin typeface="Noto Sans"/>
-                <a:ea typeface="Noto Sans CJK JP"/>
-                <a:cs typeface="Noto Sans"/>
-              </a:rPr>
-              <a:t>第一著者Tsung-Yi Linは、物体認識・検出の研究者。後のFeature Pyramid Networksでも第一著者を務めた。</a:t>
-            </a:r>
-          </a:p>
-          <a:p>
-            <a:pPr algn="l" lvl="0" marL="457200" indent="-355600">
+              <a:buAutoNum type="arabicPeriod"/>
+              <a:defRPr lang="ja-JP" sz="3200" b="0">
+                <a:solidFill>
+                  <a:srgbClr val="303437"/>
+                </a:solidFill>
+                <a:latin typeface="Noto Sans"/>
+                <a:ea typeface="Noto Sans CJK JP"/>
+                <a:cs typeface="Noto Sans"/>
+              </a:defRPr>
+            </a:pPr>
+            <a:r>
+              <a:rPr lang="ja-JP" sz="3200" b="0">
+                <a:solidFill>
+                  <a:srgbClr val="303437"/>
+                </a:solidFill>
+                <a:latin typeface="Noto Sans"/>
+                <a:ea typeface="Noto Sans CJK JP"/>
+                <a:cs typeface="Noto Sans"/>
+              </a:rPr>
+              <a:t>定義・著者・評価の詳細</a:t>
+            </a:r>
+          </a:p>
+          <a:p>
+            <a:pPr algn="l" marL="609600" indent="-457200" lvl="0">
               <a:lnSpc>
                 <a:spcPct val="115000"/>
               </a:lnSpc>
@@ -15992,34 +16522,34 @@
                 <a:spcPts val="0"/>
               </a:spcBef>
               <a:spcAft>
-                <a:spcPts val="800"/>
-              </a:spcAft>
-              <a:buSzPct val="57826"/>
+                <a:spcPts val="1600"/>
+              </a:spcAft>
+              <a:buSzPct val="100000"/>
               <a:buFont typeface="Noto Sans CJK JP"/>
-              <a:buChar char="●"/>
-              <a:defRPr lang="ja-JP" sz="2300" b="0">
-                <a:solidFill>
-                  <a:srgbClr val="303437"/>
-                </a:solidFill>
-                <a:latin typeface="Noto Sans"/>
-                <a:ea typeface="Noto Sans CJK JP"/>
-                <a:cs typeface="Noto Sans"/>
-              </a:defRPr>
-            </a:pPr>
-            <a:r>
-              <a:rPr lang="ja-JP" sz="2300" b="0">
-                <a:solidFill>
-                  <a:srgbClr val="303437"/>
-                </a:solidFill>
-                <a:latin typeface="Noto Sans"/>
-                <a:ea typeface="Noto Sans CJK JP"/>
-                <a:cs typeface="Noto Sans"/>
-              </a:rPr>
-              <a:t>最終著者C. Lawrence Zitnickは、視覚認識や画像理解の研究者。</a:t>
-            </a:r>
-          </a:p>
-          <a:p>
-            <a:pPr algn="l" lvl="0" marL="457200" indent="-355600">
+              <a:buAutoNum type="arabicPeriod"/>
+              <a:defRPr lang="ja-JP" sz="3200" b="0">
+                <a:solidFill>
+                  <a:srgbClr val="303437"/>
+                </a:solidFill>
+                <a:latin typeface="Noto Sans"/>
+                <a:ea typeface="Noto Sans CJK JP"/>
+                <a:cs typeface="Noto Sans"/>
+              </a:defRPr>
+            </a:pPr>
+            <a:r>
+              <a:rPr lang="ja-JP" sz="3200" b="0">
+                <a:solidFill>
+                  <a:srgbClr val="303437"/>
+                </a:solidFill>
+                <a:latin typeface="Noto Sans"/>
+                <a:ea typeface="Noto Sans CJK JP"/>
+                <a:cs typeface="Noto Sans"/>
+              </a:rPr>
+              <a:t>128画像で見る注釈の分布</a:t>
+            </a:r>
+          </a:p>
+          <a:p>
+            <a:pPr algn="l" marL="609600" indent="-457200" lvl="0">
               <a:lnSpc>
                 <a:spcPct val="115000"/>
               </a:lnSpc>
@@ -16027,30 +16557,100 @@
                 <a:spcPts val="0"/>
               </a:spcBef>
               <a:spcAft>
-                <a:spcPts val="800"/>
-              </a:spcAft>
-              <a:buSzPct val="57826"/>
+                <a:spcPts val="1600"/>
+              </a:spcAft>
+              <a:buSzPct val="100000"/>
               <a:buFont typeface="Noto Sans CJK JP"/>
-              <a:buChar char="●"/>
-              <a:defRPr lang="ja-JP" sz="2300" b="0">
-                <a:solidFill>
-                  <a:srgbClr val="303437"/>
-                </a:solidFill>
-                <a:latin typeface="Noto Sans"/>
-                <a:ea typeface="Noto Sans CJK JP"/>
-                <a:cs typeface="Noto Sans"/>
-              </a:defRPr>
-            </a:pPr>
-            <a:r>
-              <a:rPr lang="ja-JP" sz="2300" b="0">
-                <a:solidFill>
-                  <a:srgbClr val="303437"/>
-                </a:solidFill>
-                <a:latin typeface="Noto Sans"/>
-                <a:ea typeface="Noto Sans CJK JP"/>
-                <a:cs typeface="Noto Sans"/>
-              </a:rPr>
-              <a:t>原著はECCV 2014で発表され、日常場面の文脈と物体領域の注釈をデータ設計の中心に据えた [1]。</a:t>
+              <a:buAutoNum type="arabicPeriod"/>
+              <a:defRPr lang="ja-JP" sz="3200" b="0">
+                <a:solidFill>
+                  <a:srgbClr val="303437"/>
+                </a:solidFill>
+                <a:latin typeface="Noto Sans"/>
+                <a:ea typeface="Noto Sans CJK JP"/>
+                <a:cs typeface="Noto Sans"/>
+              </a:defRPr>
+            </a:pPr>
+            <a:r>
+              <a:rPr lang="ja-JP" sz="3200" b="0">
+                <a:solidFill>
+                  <a:srgbClr val="303437"/>
+                </a:solidFill>
+                <a:latin typeface="Noto Sans"/>
+                <a:ea typeface="Noto Sans CJK JP"/>
+                <a:cs typeface="Noto Sans"/>
+              </a:rPr>
+              <a:t>追加の領域注釈例</a:t>
+            </a:r>
+          </a:p>
+          <a:p>
+            <a:pPr algn="l" marL="609600" indent="-457200" lvl="0">
+              <a:lnSpc>
+                <a:spcPct val="115000"/>
+              </a:lnSpc>
+              <a:spcBef>
+                <a:spcPts val="0"/>
+              </a:spcBef>
+              <a:spcAft>
+                <a:spcPts val="1600"/>
+              </a:spcAft>
+              <a:buSzPct val="100000"/>
+              <a:buFont typeface="Noto Sans CJK JP"/>
+              <a:buAutoNum type="arabicPeriod"/>
+              <a:defRPr lang="ja-JP" sz="3200" b="0">
+                <a:solidFill>
+                  <a:srgbClr val="303437"/>
+                </a:solidFill>
+                <a:latin typeface="Noto Sans"/>
+                <a:ea typeface="Noto Sans CJK JP"/>
+                <a:cs typeface="Noto Sans"/>
+              </a:defRPr>
+            </a:pPr>
+            <a:r>
+              <a:rPr lang="ja-JP" sz="3200" b="0">
+                <a:solidFill>
+                  <a:srgbClr val="303437"/>
+                </a:solidFill>
+                <a:latin typeface="Noto Sans"/>
+                <a:ea typeface="Noto Sans CJK JP"/>
+                <a:cs typeface="Noto Sans"/>
+              </a:rPr>
+              <a:t>全80カテゴリと利用条件</a:t>
+            </a:r>
+          </a:p>
+          <a:p>
+            <a:pPr algn="l" marL="609600" indent="-457200" lvl="0">
+              <a:lnSpc>
+                <a:spcPct val="115000"/>
+              </a:lnSpc>
+              <a:spcBef>
+                <a:spcPts val="0"/>
+              </a:spcBef>
+              <a:spcAft>
+                <a:spcPts val="1600"/>
+              </a:spcAft>
+              <a:buSzPct val="100000"/>
+              <a:buFont typeface="Noto Sans CJK JP"/>
+              <a:buAutoNum type="arabicPeriod"/>
+              <a:defRPr lang="ja-JP" sz="3200" b="0">
+                <a:solidFill>
+                  <a:srgbClr val="303437"/>
+                </a:solidFill>
+                <a:latin typeface="Noto Sans"/>
+                <a:ea typeface="Noto Sans CJK JP"/>
+                <a:cs typeface="Noto Sans"/>
+              </a:defRPr>
+            </a:pPr>
+            <a:r>
+              <a:rPr lang="ja-JP" sz="3200" b="0">
+                <a:solidFill>
+                  <a:srgbClr val="303437"/>
+                </a:solidFill>
+                <a:latin typeface="Noto Sans"/>
+                <a:ea typeface="Noto Sans CJK JP"/>
+                <a:cs typeface="Noto Sans"/>
+              </a:rPr>
+              <a:t>参考文献</a:t>
             </a:r>
           </a:p>
         </p:txBody>
@@ -16104,108 +16704,7 @@
                 <a:ea typeface="Noto Sans CJK JP"/>
                 <a:cs typeface="Noto Sans"/>
               </a:rPr>
-              <a:t>Appendix 1 定義・著者・評価の詳細</a:t>
-            </a:r>
-          </a:p>
-        </p:txBody>
-      </p:sp>
-      <p:sp>
-        <p:nvSpPr>
-          <p:cNvPr id="5" name="TextBox 4"/>
-          <p:cNvSpPr txBox="1"/>
-          <p:nvPr/>
-        </p:nvSpPr>
-        <p:spPr>
-          <a:xfrm>
-            <a:off x="502920" y="4754880"/>
-            <a:ext cx="8183879" cy="320040"/>
-          </a:xfrm>
-          <a:prstGeom prst="rect">
-            <a:avLst/>
-          </a:prstGeom>
-          <a:noFill/>
-        </p:spPr>
-        <p:txBody>
-          <a:bodyPr wrap="square" anchor="t" lIns="0" rIns="0" tIns="0" bIns="0">
-            <a:spAutoFit/>
-          </a:bodyPr>
-          <a:lstStyle/>
-          <a:p>
-            <a:pPr algn="l">
-              <a:lnSpc>
-                <a:spcPct val="115000"/>
-              </a:lnSpc>
-              <a:spcBef>
-                <a:spcPts val="0"/>
-              </a:spcBef>
-              <a:spcAft>
-                <a:spcPts val="0"/>
-              </a:spcAft>
-              <a:buNone/>
-              <a:defRPr lang="ja-JP" sz="800" b="0">
-                <a:solidFill>
-                  <a:srgbClr val="626669"/>
-                </a:solidFill>
-                <a:latin typeface="Noto Sans"/>
-                <a:ea typeface="Noto Sans CJK JP"/>
-                <a:cs typeface="Noto Sans"/>
-              </a:defRPr>
-            </a:pPr>
-            <a:r>
-              <a:rPr lang="ja-JP" sz="800" b="0">
-                <a:solidFill>
-                  <a:srgbClr val="626669"/>
-                </a:solidFill>
-                <a:latin typeface="Noto Sans"/>
-                <a:ea typeface="Noto Sans CJK JP"/>
-                <a:cs typeface="Noto Sans"/>
-              </a:rPr>
-              <a:t>[1] </a:t>
-            </a:r>
-            <a:r>
-              <a:rPr lang="ja-JP" sz="800" b="0">
-                <a:solidFill>
-                  <a:srgbClr val="626669"/>
-                </a:solidFill>
-                <a:latin typeface="Noto Sans"/>
-                <a:ea typeface="Noto Sans CJK JP"/>
-                <a:cs typeface="Noto Sans"/>
-                <a:hlinkClick r:id="rId2"/>
-              </a:rPr>
-              <a:t>https://arxiv.org/abs/1405.0312</a:t>
-            </a:r>
-          </a:p>
-          <a:p>
-            <a:pPr algn="l">
-              <a:lnSpc>
-                <a:spcPct val="115000"/>
-              </a:lnSpc>
-              <a:spcBef>
-                <a:spcPts val="0"/>
-              </a:spcBef>
-              <a:spcAft>
-                <a:spcPts val="0"/>
-              </a:spcAft>
-              <a:buNone/>
-              <a:defRPr lang="ja-JP" sz="800" b="0">
-                <a:solidFill>
-                  <a:srgbClr val="626669"/>
-                </a:solidFill>
-                <a:latin typeface="Noto Sans"/>
-                <a:ea typeface="Noto Sans CJK JP"/>
-                <a:cs typeface="Noto Sans"/>
-              </a:defRPr>
-            </a:pPr>
-            <a:r>
-              <a:rPr lang="ja-JP" sz="800" b="0">
-                <a:solidFill>
-                  <a:srgbClr val="626669"/>
-                </a:solidFill>
-                <a:latin typeface="Noto Sans"/>
-                <a:ea typeface="Noto Sans CJK JP"/>
-                <a:cs typeface="Noto Sans"/>
-              </a:rPr>
-              <a:t>Tsung-Yi Lin et al., Microsoft COCO: Common Objects in Context, ECCV 2014, pp. 740–755.</a:t>
+              <a:t>Appendix: 目次</a:t>
             </a:r>
           </a:p>
         </p:txBody>
@@ -16219,6 +16718,359 @@
 </file>
 
 <file path=ppt/slides/slide31.xml><?xml version="1.0" encoding="utf-8"?>
+<p:sld xmlns:a="http://schemas.openxmlformats.org/drawingml/2006/main" xmlns:p="http://schemas.openxmlformats.org/presentationml/2006/main" xmlns:r="http://schemas.openxmlformats.org/officeDocument/2006/relationships">
+  <p:cSld>
+    <p:spTree>
+      <p:nvGrpSpPr>
+        <p:cNvPr id="1" name=""/>
+        <p:cNvGrpSpPr/>
+        <p:nvPr/>
+      </p:nvGrpSpPr>
+      <p:grpSpPr/>
+      <p:sp>
+        <p:nvSpPr>
+          <p:cNvPr id="2" name="Title 1"/>
+          <p:cNvSpPr>
+            <a:spLocks noGrp="1"/>
+          </p:cNvSpPr>
+          <p:nvPr>
+            <p:ph type="title"/>
+          </p:nvPr>
+        </p:nvSpPr>
+        <p:spPr>
+          <a:xfrm>
+            <a:off x="468172" y="650138"/>
+            <a:ext cx="8206740" cy="616305"/>
+          </a:xfrm>
+        </p:spPr>
+        <p:txBody>
+          <a:bodyPr wrap="square" anchor="t" lIns="0" rIns="0" tIns="0" bIns="0"/>
+          <a:lstStyle/>
+          <a:p>
+            <a:pPr algn="l">
+              <a:lnSpc>
+                <a:spcPct val="115000"/>
+              </a:lnSpc>
+              <a:spcBef>
+                <a:spcPts val="0"/>
+              </a:spcBef>
+              <a:spcAft>
+                <a:spcPts val="0"/>
+              </a:spcAft>
+              <a:buNone/>
+              <a:defRPr lang="ja-JP" sz="2800" b="1">
+                <a:solidFill>
+                  <a:srgbClr val="303437"/>
+                </a:solidFill>
+                <a:latin typeface="Noto Sans"/>
+                <a:ea typeface="Noto Sans CJK JP"/>
+                <a:cs typeface="Noto Sans"/>
+              </a:defRPr>
+            </a:pPr>
+            <a:r>
+              <a:rPr lang="ja-JP" sz="2800" b="1">
+                <a:solidFill>
+                  <a:srgbClr val="303437"/>
+                </a:solidFill>
+                <a:latin typeface="Noto Sans"/>
+                <a:ea typeface="Noto Sans CJK JP"/>
+                <a:cs typeface="Noto Sans"/>
+              </a:rPr>
+              <a:t>原著の著者と研究の位置付け</a:t>
+            </a:r>
+          </a:p>
+        </p:txBody>
+      </p:sp>
+      <p:sp>
+        <p:nvSpPr>
+          <p:cNvPr id="3" name="Text Placeholder 2"/>
+          <p:cNvSpPr>
+            <a:spLocks noGrp="1"/>
+          </p:cNvSpPr>
+          <p:nvPr>
+            <p:ph type="body" idx="1"/>
+          </p:nvPr>
+        </p:nvSpPr>
+        <p:spPr>
+          <a:xfrm>
+            <a:off x="594360" y="1508760"/>
+            <a:ext cx="7955279" cy="3017520"/>
+          </a:xfrm>
+        </p:spPr>
+        <p:txBody>
+          <a:bodyPr wrap="square" anchor="t" tIns="91440" bIns="91440"/>
+          <a:lstStyle/>
+          <a:p>
+            <a:pPr algn="l" lvl="0" marL="457200" indent="-355600">
+              <a:lnSpc>
+                <a:spcPct val="115000"/>
+              </a:lnSpc>
+              <a:spcBef>
+                <a:spcPts val="0"/>
+              </a:spcBef>
+              <a:spcAft>
+                <a:spcPts val="800"/>
+              </a:spcAft>
+              <a:buSzPct val="57826"/>
+              <a:buFont typeface="Noto Sans CJK JP"/>
+              <a:buChar char="●"/>
+              <a:defRPr lang="ja-JP" sz="2300" b="0">
+                <a:solidFill>
+                  <a:srgbClr val="303437"/>
+                </a:solidFill>
+                <a:latin typeface="Noto Sans"/>
+                <a:ea typeface="Noto Sans CJK JP"/>
+                <a:cs typeface="Noto Sans"/>
+              </a:defRPr>
+            </a:pPr>
+            <a:r>
+              <a:rPr lang="ja-JP" sz="2300" b="0">
+                <a:solidFill>
+                  <a:srgbClr val="303437"/>
+                </a:solidFill>
+                <a:latin typeface="Noto Sans"/>
+                <a:ea typeface="Noto Sans CJK JP"/>
+                <a:cs typeface="Noto Sans"/>
+              </a:rPr>
+              <a:t>第一著者Tsung-Yi Linは、物体認識・検出の研究者。後のFeature Pyramid Networksでも第一著者を務めた。</a:t>
+            </a:r>
+          </a:p>
+          <a:p>
+            <a:pPr algn="l" lvl="0" marL="457200" indent="-355600">
+              <a:lnSpc>
+                <a:spcPct val="115000"/>
+              </a:lnSpc>
+              <a:spcBef>
+                <a:spcPts val="0"/>
+              </a:spcBef>
+              <a:spcAft>
+                <a:spcPts val="800"/>
+              </a:spcAft>
+              <a:buSzPct val="57826"/>
+              <a:buFont typeface="Noto Sans CJK JP"/>
+              <a:buChar char="●"/>
+              <a:defRPr lang="ja-JP" sz="2300" b="0">
+                <a:solidFill>
+                  <a:srgbClr val="303437"/>
+                </a:solidFill>
+                <a:latin typeface="Noto Sans"/>
+                <a:ea typeface="Noto Sans CJK JP"/>
+                <a:cs typeface="Noto Sans"/>
+              </a:defRPr>
+            </a:pPr>
+            <a:r>
+              <a:rPr lang="ja-JP" sz="2300" b="0">
+                <a:solidFill>
+                  <a:srgbClr val="303437"/>
+                </a:solidFill>
+                <a:latin typeface="Noto Sans"/>
+                <a:ea typeface="Noto Sans CJK JP"/>
+                <a:cs typeface="Noto Sans"/>
+              </a:rPr>
+              <a:t>最終著者C. Lawrence Zitnickは、視覚認識や画像理解の研究者。</a:t>
+            </a:r>
+          </a:p>
+          <a:p>
+            <a:pPr algn="l" lvl="0" marL="457200" indent="-355600">
+              <a:lnSpc>
+                <a:spcPct val="115000"/>
+              </a:lnSpc>
+              <a:spcBef>
+                <a:spcPts val="0"/>
+              </a:spcBef>
+              <a:spcAft>
+                <a:spcPts val="800"/>
+              </a:spcAft>
+              <a:buSzPct val="57826"/>
+              <a:buFont typeface="Noto Sans CJK JP"/>
+              <a:buChar char="●"/>
+              <a:defRPr lang="ja-JP" sz="2300" b="0">
+                <a:solidFill>
+                  <a:srgbClr val="303437"/>
+                </a:solidFill>
+                <a:latin typeface="Noto Sans"/>
+                <a:ea typeface="Noto Sans CJK JP"/>
+                <a:cs typeface="Noto Sans"/>
+              </a:defRPr>
+            </a:pPr>
+            <a:r>
+              <a:rPr lang="ja-JP" sz="2300" b="0">
+                <a:solidFill>
+                  <a:srgbClr val="303437"/>
+                </a:solidFill>
+                <a:latin typeface="Noto Sans"/>
+                <a:ea typeface="Noto Sans CJK JP"/>
+                <a:cs typeface="Noto Sans"/>
+              </a:rPr>
+              <a:t>原著はECCV 2014で発表され、日常場面の文脈と物体領域の注釈をデータ設計の中心に据えた [1]。</a:t>
+            </a:r>
+          </a:p>
+        </p:txBody>
+      </p:sp>
+      <p:sp>
+        <p:nvSpPr>
+          <p:cNvPr id="4" name="Title 3"/>
+          <p:cNvSpPr>
+            <a:spLocks noGrp="1"/>
+          </p:cNvSpPr>
+          <p:nvPr>
+            <p:ph type="title" idx="2"/>
+          </p:nvPr>
+        </p:nvSpPr>
+        <p:spPr>
+          <a:xfrm>
+            <a:off x="75895" y="0"/>
+            <a:ext cx="8115300" cy="480060"/>
+          </a:xfrm>
+        </p:spPr>
+        <p:txBody>
+          <a:bodyPr wrap="square" anchor="ctr" lIns="0" rIns="0" tIns="0" bIns="0"/>
+          <a:lstStyle/>
+          <a:p>
+            <a:pPr algn="l">
+              <a:lnSpc>
+                <a:spcPct val="100000"/>
+              </a:lnSpc>
+              <a:spcBef>
+                <a:spcPts val="0"/>
+              </a:spcBef>
+              <a:spcAft>
+                <a:spcPts val="0"/>
+              </a:spcAft>
+              <a:buNone/>
+              <a:defRPr lang="ja-JP" sz="1400" b="1">
+                <a:solidFill>
+                  <a:srgbClr val="FFFEF8"/>
+                </a:solidFill>
+                <a:latin typeface="Noto Sans"/>
+                <a:ea typeface="Noto Sans CJK JP"/>
+                <a:cs typeface="Noto Sans"/>
+              </a:defRPr>
+            </a:pPr>
+            <a:r>
+              <a:rPr lang="ja-JP" sz="1400" b="1">
+                <a:solidFill>
+                  <a:srgbClr val="FFFEF8"/>
+                </a:solidFill>
+                <a:latin typeface="Noto Sans"/>
+                <a:ea typeface="Noto Sans CJK JP"/>
+                <a:cs typeface="Noto Sans"/>
+              </a:rPr>
+              <a:t>Appendix 1 定義・著者・評価の詳細</a:t>
+            </a:r>
+          </a:p>
+        </p:txBody>
+      </p:sp>
+      <p:sp>
+        <p:nvSpPr>
+          <p:cNvPr id="5" name="TextBox 4"/>
+          <p:cNvSpPr txBox="1"/>
+          <p:nvPr/>
+        </p:nvSpPr>
+        <p:spPr>
+          <a:xfrm>
+            <a:off x="502920" y="4754880"/>
+            <a:ext cx="8183879" cy="320040"/>
+          </a:xfrm>
+          <a:prstGeom prst="rect">
+            <a:avLst/>
+          </a:prstGeom>
+          <a:noFill/>
+        </p:spPr>
+        <p:txBody>
+          <a:bodyPr wrap="square" anchor="t" lIns="0" rIns="0" tIns="0" bIns="0">
+            <a:spAutoFit/>
+          </a:bodyPr>
+          <a:lstStyle/>
+          <a:p>
+            <a:pPr algn="l">
+              <a:lnSpc>
+                <a:spcPct val="115000"/>
+              </a:lnSpc>
+              <a:spcBef>
+                <a:spcPts val="0"/>
+              </a:spcBef>
+              <a:spcAft>
+                <a:spcPts val="0"/>
+              </a:spcAft>
+              <a:buNone/>
+              <a:defRPr lang="ja-JP" sz="800" b="0">
+                <a:solidFill>
+                  <a:srgbClr val="626669"/>
+                </a:solidFill>
+                <a:latin typeface="Noto Sans"/>
+                <a:ea typeface="Noto Sans CJK JP"/>
+                <a:cs typeface="Noto Sans"/>
+              </a:defRPr>
+            </a:pPr>
+            <a:r>
+              <a:rPr lang="ja-JP" sz="800" b="0">
+                <a:solidFill>
+                  <a:srgbClr val="626669"/>
+                </a:solidFill>
+                <a:latin typeface="Noto Sans"/>
+                <a:ea typeface="Noto Sans CJK JP"/>
+                <a:cs typeface="Noto Sans"/>
+              </a:rPr>
+              <a:t>[1] </a:t>
+            </a:r>
+            <a:r>
+              <a:rPr lang="ja-JP" sz="800" b="0">
+                <a:solidFill>
+                  <a:srgbClr val="626669"/>
+                </a:solidFill>
+                <a:latin typeface="Noto Sans"/>
+                <a:ea typeface="Noto Sans CJK JP"/>
+                <a:cs typeface="Noto Sans"/>
+                <a:hlinkClick r:id="rId2"/>
+              </a:rPr>
+              <a:t>https://arxiv.org/abs/1405.0312</a:t>
+            </a:r>
+          </a:p>
+          <a:p>
+            <a:pPr algn="l">
+              <a:lnSpc>
+                <a:spcPct val="115000"/>
+              </a:lnSpc>
+              <a:spcBef>
+                <a:spcPts val="0"/>
+              </a:spcBef>
+              <a:spcAft>
+                <a:spcPts val="0"/>
+              </a:spcAft>
+              <a:buNone/>
+              <a:defRPr lang="ja-JP" sz="800" b="0">
+                <a:solidFill>
+                  <a:srgbClr val="626669"/>
+                </a:solidFill>
+                <a:latin typeface="Noto Sans"/>
+                <a:ea typeface="Noto Sans CJK JP"/>
+                <a:cs typeface="Noto Sans"/>
+              </a:defRPr>
+            </a:pPr>
+            <a:r>
+              <a:rPr lang="ja-JP" sz="800" b="0">
+                <a:solidFill>
+                  <a:srgbClr val="626669"/>
+                </a:solidFill>
+                <a:latin typeface="Noto Sans"/>
+                <a:ea typeface="Noto Sans CJK JP"/>
+                <a:cs typeface="Noto Sans"/>
+              </a:rPr>
+              <a:t>Tsung-Yi Lin et al., Microsoft COCO: Common Objects in Context, ECCV 2014, pp. 740–755.</a:t>
+            </a:r>
+          </a:p>
+        </p:txBody>
+      </p:sp>
+    </p:spTree>
+  </p:cSld>
+  <p:clrMapOvr>
+    <a:masterClrMapping/>
+  </p:clrMapOvr>
+</p:sld>
+</file>
+
+<file path=ppt/slides/slide32.xml><?xml version="1.0" encoding="utf-8"?>
 <p:sld xmlns:a="http://schemas.openxmlformats.org/drawingml/2006/main" xmlns:p="http://schemas.openxmlformats.org/presentationml/2006/main" xmlns:r="http://schemas.openxmlformats.org/officeDocument/2006/relationships">
   <p:cSld>
     <p:spTree>
@@ -17406,360 +18258,6 @@
 </p:sld>
 </file>
 
-<file path=ppt/slides/slide32.xml><?xml version="1.0" encoding="utf-8"?>
-<p:sld xmlns:a="http://schemas.openxmlformats.org/drawingml/2006/main" xmlns:p="http://schemas.openxmlformats.org/presentationml/2006/main" xmlns:r="http://schemas.openxmlformats.org/officeDocument/2006/relationships">
-  <p:cSld>
-    <p:spTree>
-      <p:nvGrpSpPr>
-        <p:cNvPr id="1" name=""/>
-        <p:cNvGrpSpPr/>
-        <p:nvPr/>
-      </p:nvGrpSpPr>
-      <p:grpSpPr/>
-      <p:sp>
-        <p:nvSpPr>
-          <p:cNvPr id="2" name="Title 1"/>
-          <p:cNvSpPr>
-            <a:spLocks noGrp="1"/>
-          </p:cNvSpPr>
-          <p:nvPr>
-            <p:ph type="title"/>
-          </p:nvPr>
-        </p:nvSpPr>
-        <p:spPr>
-          <a:xfrm>
-            <a:off x="468172" y="650138"/>
-            <a:ext cx="8206740" cy="616305"/>
-          </a:xfrm>
-        </p:spPr>
-        <p:txBody>
-          <a:bodyPr wrap="square" anchor="t" lIns="0" rIns="0" tIns="0" bIns="0"/>
-          <a:lstStyle/>
-          <a:p>
-            <a:pPr algn="l">
-              <a:lnSpc>
-                <a:spcPct val="115000"/>
-              </a:lnSpc>
-              <a:spcBef>
-                <a:spcPts val="0"/>
-              </a:spcBef>
-              <a:spcAft>
-                <a:spcPts val="0"/>
-              </a:spcAft>
-              <a:buNone/>
-              <a:defRPr lang="ja-JP" sz="2800" b="1">
-                <a:solidFill>
-                  <a:srgbClr val="303437"/>
-                </a:solidFill>
-                <a:latin typeface="Noto Sans"/>
-                <a:ea typeface="Noto Sans CJK JP"/>
-                <a:cs typeface="Noto Sans"/>
-              </a:defRPr>
-            </a:pPr>
-            <a:r>
-              <a:rPr lang="ja-JP" sz="2800" b="1">
-                <a:solidFill>
-                  <a:srgbClr val="303437"/>
-                </a:solidFill>
-                <a:latin typeface="Noto Sans"/>
-                <a:ea typeface="Noto Sans CJK JP"/>
-                <a:cs typeface="Noto Sans"/>
-              </a:rPr>
-              <a:t>通常注釈とcrowd注釈の扱い</a:t>
-            </a:r>
-          </a:p>
-        </p:txBody>
-      </p:sp>
-      <p:sp>
-        <p:nvSpPr>
-          <p:cNvPr id="3" name="Text Placeholder 2"/>
-          <p:cNvSpPr>
-            <a:spLocks noGrp="1"/>
-          </p:cNvSpPr>
-          <p:nvPr>
-            <p:ph type="body" idx="1"/>
-          </p:nvPr>
-        </p:nvSpPr>
-        <p:spPr>
-          <a:xfrm>
-            <a:off x="594360" y="1508760"/>
-            <a:ext cx="7955279" cy="3017520"/>
-          </a:xfrm>
-        </p:spPr>
-        <p:txBody>
-          <a:bodyPr wrap="square" anchor="t" tIns="91440" bIns="91440"/>
-          <a:lstStyle/>
-          <a:p>
-            <a:pPr algn="l" lvl="0" marL="457200" indent="-355600">
-              <a:lnSpc>
-                <a:spcPct val="115000"/>
-              </a:lnSpc>
-              <a:spcBef>
-                <a:spcPts val="0"/>
-              </a:spcBef>
-              <a:spcAft>
-                <a:spcPts val="800"/>
-              </a:spcAft>
-              <a:buSzPct val="57826"/>
-              <a:buFont typeface="Noto Sans CJK JP"/>
-              <a:buChar char="●"/>
-              <a:defRPr lang="ja-JP" sz="2300" b="0">
-                <a:solidFill>
-                  <a:srgbClr val="303437"/>
-                </a:solidFill>
-                <a:latin typeface="Noto Sans"/>
-                <a:ea typeface="Noto Sans CJK JP"/>
-                <a:cs typeface="Noto Sans"/>
-              </a:defRPr>
-            </a:pPr>
-            <a:r>
-              <a:rPr lang="ja-JP" sz="2300" b="0">
-                <a:solidFill>
-                  <a:srgbClr val="303437"/>
-                </a:solidFill>
-                <a:latin typeface="Noto Sans"/>
-                <a:ea typeface="Noto Sans CJK JP"/>
-                <a:cs typeface="Noto Sans"/>
-              </a:rPr>
-              <a:t>通常の一致判定は、交差面積を和集合面積で割るIoUを用いる。</a:t>
-            </a:r>
-          </a:p>
-          <a:p>
-            <a:pPr algn="l" lvl="0" marL="457200" indent="-355600">
-              <a:lnSpc>
-                <a:spcPct val="115000"/>
-              </a:lnSpc>
-              <a:spcBef>
-                <a:spcPts val="0"/>
-              </a:spcBef>
-              <a:spcAft>
-                <a:spcPts val="800"/>
-              </a:spcAft>
-              <a:buSzPct val="57826"/>
-              <a:buFont typeface="Noto Sans CJK JP"/>
-              <a:buChar char="●"/>
-              <a:defRPr lang="ja-JP" sz="2300" b="0">
-                <a:solidFill>
-                  <a:srgbClr val="303437"/>
-                </a:solidFill>
-                <a:latin typeface="Noto Sans"/>
-                <a:ea typeface="Noto Sans CJK JP"/>
-                <a:cs typeface="Noto Sans"/>
-              </a:defRPr>
-            </a:pPr>
-            <a:r>
-              <a:rPr lang="ja-JP" sz="2300" b="0">
-                <a:solidFill>
-                  <a:srgbClr val="303437"/>
-                </a:solidFill>
-                <a:latin typeface="Noto Sans"/>
-                <a:ea typeface="Noto Sans CJK JP"/>
-                <a:cs typeface="Noto Sans"/>
-              </a:rPr>
-              <a:t>crowdとの判定は交差面積を予測面積で割る。一つのcrowd領域へ複数の予測を対応付けられる。</a:t>
-            </a:r>
-          </a:p>
-          <a:p>
-            <a:pPr algn="l" lvl="0" marL="457200" indent="-355600">
-              <a:lnSpc>
-                <a:spcPct val="115000"/>
-              </a:lnSpc>
-              <a:spcBef>
-                <a:spcPts val="0"/>
-              </a:spcBef>
-              <a:spcAft>
-                <a:spcPts val="800"/>
-              </a:spcAft>
-              <a:buSzPct val="57826"/>
-              <a:buFont typeface="Noto Sans CJK JP"/>
-              <a:buChar char="●"/>
-              <a:defRPr lang="ja-JP" sz="2300" b="0">
-                <a:solidFill>
-                  <a:srgbClr val="303437"/>
-                </a:solidFill>
-                <a:latin typeface="Noto Sans"/>
-                <a:ea typeface="Noto Sans CJK JP"/>
-                <a:cs typeface="Noto Sans"/>
-              </a:defRPr>
-            </a:pPr>
-            <a:r>
-              <a:rPr lang="ja-JP" sz="2300" b="0">
-                <a:solidFill>
-                  <a:srgbClr val="303437"/>
-                </a:solidFill>
-                <a:latin typeface="Noto Sans"/>
-                <a:ea typeface="Noto Sans CJK JP"/>
-                <a:cs typeface="Noto Sans"/>
-              </a:rPr>
-              <a:t>crowd正解は再現率の分母から除外され、そこへ一致した予測も適合率の集計から除外される [1]。</a:t>
-            </a:r>
-          </a:p>
-        </p:txBody>
-      </p:sp>
-      <p:sp>
-        <p:nvSpPr>
-          <p:cNvPr id="4" name="Title 3"/>
-          <p:cNvSpPr>
-            <a:spLocks noGrp="1"/>
-          </p:cNvSpPr>
-          <p:nvPr>
-            <p:ph type="title" idx="2"/>
-          </p:nvPr>
-        </p:nvSpPr>
-        <p:spPr>
-          <a:xfrm>
-            <a:off x="75895" y="0"/>
-            <a:ext cx="8115300" cy="480060"/>
-          </a:xfrm>
-        </p:spPr>
-        <p:txBody>
-          <a:bodyPr wrap="square" anchor="ctr" lIns="0" rIns="0" tIns="0" bIns="0"/>
-          <a:lstStyle/>
-          <a:p>
-            <a:pPr algn="l">
-              <a:lnSpc>
-                <a:spcPct val="100000"/>
-              </a:lnSpc>
-              <a:spcBef>
-                <a:spcPts val="0"/>
-              </a:spcBef>
-              <a:spcAft>
-                <a:spcPts val="0"/>
-              </a:spcAft>
-              <a:buNone/>
-              <a:defRPr lang="ja-JP" sz="1400" b="1">
-                <a:solidFill>
-                  <a:srgbClr val="FFFEF8"/>
-                </a:solidFill>
-                <a:latin typeface="Noto Sans"/>
-                <a:ea typeface="Noto Sans CJK JP"/>
-                <a:cs typeface="Noto Sans"/>
-              </a:defRPr>
-            </a:pPr>
-            <a:r>
-              <a:rPr lang="ja-JP" sz="1400" b="1">
-                <a:solidFill>
-                  <a:srgbClr val="FFFEF8"/>
-                </a:solidFill>
-                <a:latin typeface="Noto Sans"/>
-                <a:ea typeface="Noto Sans CJK JP"/>
-                <a:cs typeface="Noto Sans"/>
-              </a:rPr>
-              <a:t>Appendix 1 定義・著者・評価の詳細</a:t>
-            </a:r>
-          </a:p>
-        </p:txBody>
-      </p:sp>
-      <p:sp>
-        <p:nvSpPr>
-          <p:cNvPr id="5" name="TextBox 4"/>
-          <p:cNvSpPr txBox="1"/>
-          <p:nvPr/>
-        </p:nvSpPr>
-        <p:spPr>
-          <a:xfrm>
-            <a:off x="502920" y="4754880"/>
-            <a:ext cx="8183879" cy="320040"/>
-          </a:xfrm>
-          <a:prstGeom prst="rect">
-            <a:avLst/>
-          </a:prstGeom>
-          <a:noFill/>
-        </p:spPr>
-        <p:txBody>
-          <a:bodyPr wrap="square" anchor="t" lIns="0" rIns="0" tIns="0" bIns="0">
-            <a:spAutoFit/>
-          </a:bodyPr>
-          <a:lstStyle/>
-          <a:p>
-            <a:pPr algn="l">
-              <a:lnSpc>
-                <a:spcPct val="115000"/>
-              </a:lnSpc>
-              <a:spcBef>
-                <a:spcPts val="0"/>
-              </a:spcBef>
-              <a:spcAft>
-                <a:spcPts val="0"/>
-              </a:spcAft>
-              <a:buNone/>
-              <a:defRPr lang="ja-JP" sz="800" b="0">
-                <a:solidFill>
-                  <a:srgbClr val="626669"/>
-                </a:solidFill>
-                <a:latin typeface="Noto Sans"/>
-                <a:ea typeface="Noto Sans CJK JP"/>
-                <a:cs typeface="Noto Sans"/>
-              </a:defRPr>
-            </a:pPr>
-            <a:r>
-              <a:rPr lang="ja-JP" sz="800" b="0">
-                <a:solidFill>
-                  <a:srgbClr val="626669"/>
-                </a:solidFill>
-                <a:latin typeface="Noto Sans"/>
-                <a:ea typeface="Noto Sans CJK JP"/>
-                <a:cs typeface="Noto Sans"/>
-              </a:rPr>
-              <a:t>[1] </a:t>
-            </a:r>
-            <a:r>
-              <a:rPr lang="ja-JP" sz="800" b="0">
-                <a:solidFill>
-                  <a:srgbClr val="626669"/>
-                </a:solidFill>
-                <a:latin typeface="Noto Sans"/>
-                <a:ea typeface="Noto Sans CJK JP"/>
-                <a:cs typeface="Noto Sans"/>
-                <a:hlinkClick r:id="rId2"/>
-              </a:rPr>
-              <a:t>https://github.com/cocodataset/cocoapi/blob/master/common/maskApi.c</a:t>
-            </a:r>
-          </a:p>
-          <a:p>
-            <a:pPr algn="l">
-              <a:lnSpc>
-                <a:spcPct val="115000"/>
-              </a:lnSpc>
-              <a:spcBef>
-                <a:spcPts val="0"/>
-              </a:spcBef>
-              <a:spcAft>
-                <a:spcPts val="0"/>
-              </a:spcAft>
-              <a:buNone/>
-              <a:defRPr lang="ja-JP" sz="800" b="0">
-                <a:solidFill>
-                  <a:srgbClr val="626669"/>
-                </a:solidFill>
-                <a:latin typeface="Noto Sans"/>
-                <a:ea typeface="Noto Sans CJK JP"/>
-                <a:cs typeface="Noto Sans"/>
-              </a:defRPr>
-            </a:pPr>
-            <a:r>
-              <a:rPr lang="ja-JP" sz="800" b="0">
-                <a:solidFill>
-                  <a:srgbClr val="626669"/>
-                </a:solidFill>
-                <a:latin typeface="Noto Sans"/>
-                <a:ea typeface="Noto Sans CJK JP"/>
-                <a:cs typeface="Noto Sans"/>
-                <a:hlinkClick r:id="rId3"/>
-              </a:rPr>
-              <a:t>https://github.com/cocodataset/cocoapi/blob/master/PythonAPI/pycocotools/cocoeval.py</a:t>
-            </a:r>
-          </a:p>
-        </p:txBody>
-      </p:sp>
-    </p:spTree>
-  </p:cSld>
-  <p:clrMapOvr>
-    <a:masterClrMapping/>
-  </p:clrMapOvr>
-</p:sld>
-</file>
-
 <file path=ppt/slides/slide33.xml><?xml version="1.0" encoding="utf-8"?>
 <p:sld xmlns:a="http://schemas.openxmlformats.org/drawingml/2006/main" xmlns:p="http://schemas.openxmlformats.org/presentationml/2006/main" xmlns:r="http://schemas.openxmlformats.org/officeDocument/2006/relationships">
   <p:cSld>
@@ -17819,7 +18317,7 @@
                 <a:ea typeface="Noto Sans CJK JP"/>
                 <a:cs typeface="Noto Sans"/>
               </a:rPr>
-              <a:t>APの平均には複数の軸がある</a:t>
+              <a:t>通常注釈とcrowd注釈の扱い</a:t>
             </a:r>
           </a:p>
         </p:txBody>
@@ -17875,7 +18373,7 @@
                 <a:ea typeface="Noto Sans CJK JP"/>
                 <a:cs typeface="Noto Sans"/>
               </a:rPr>
-              <a:t>各カテゴリ・各IoU閾値で、信頼度順の予測から適合率・再現率を作る。</a:t>
+              <a:t>通常の一致判定は、交差面積を和集合面積で割るIoUを用いる。</a:t>
             </a:r>
           </a:p>
           <a:p>
@@ -17910,7 +18408,7 @@
                 <a:ea typeface="Noto Sans CJK JP"/>
                 <a:cs typeface="Noto Sans"/>
               </a:rPr>
-              <a:t>再現率0.00〜1.00の101点で補間した適合率を平均し、カテゴリと10個のIoU閾値で平均する。</a:t>
+              <a:t>crowdとの判定は交差面積を予測面積で割る。一つのcrowd領域へ複数の予測を対応付けられる。</a:t>
             </a:r>
           </a:p>
           <a:p>
@@ -17945,7 +18443,7 @@
                 <a:ea typeface="Noto Sans CJK JP"/>
                 <a:cs typeface="Noto Sans"/>
               </a:rPr>
-              <a:t>通常APはmaxDets=100。公式Python実装では、画像・カテゴリごとに上位100予測を使う [1]。</a:t>
+              <a:t>crowd正解は再現率の分母から除外され、そこへ一致した予測も適合率の集計から除外される [1]。</a:t>
             </a:r>
           </a:p>
         </p:txBody>
@@ -18066,6 +18564,40 @@
                 <a:ea typeface="Noto Sans CJK JP"/>
                 <a:cs typeface="Noto Sans"/>
                 <a:hlinkClick r:id="rId2"/>
+              </a:rPr>
+              <a:t>https://github.com/cocodataset/cocoapi/blob/master/common/maskApi.c</a:t>
+            </a:r>
+          </a:p>
+          <a:p>
+            <a:pPr algn="l">
+              <a:lnSpc>
+                <a:spcPct val="115000"/>
+              </a:lnSpc>
+              <a:spcBef>
+                <a:spcPts val="0"/>
+              </a:spcBef>
+              <a:spcAft>
+                <a:spcPts val="0"/>
+              </a:spcAft>
+              <a:buNone/>
+              <a:defRPr lang="ja-JP" sz="800" b="0">
+                <a:solidFill>
+                  <a:srgbClr val="626669"/>
+                </a:solidFill>
+                <a:latin typeface="Noto Sans"/>
+                <a:ea typeface="Noto Sans CJK JP"/>
+                <a:cs typeface="Noto Sans"/>
+              </a:defRPr>
+            </a:pPr>
+            <a:r>
+              <a:rPr lang="ja-JP" sz="800" b="0">
+                <a:solidFill>
+                  <a:srgbClr val="626669"/>
+                </a:solidFill>
+                <a:latin typeface="Noto Sans"/>
+                <a:ea typeface="Noto Sans CJK JP"/>
+                <a:cs typeface="Noto Sans"/>
+                <a:hlinkClick r:id="rId3"/>
               </a:rPr>
               <a:t>https://github.com/cocodataset/cocoapi/blob/master/PythonAPI/pycocotools/cocoeval.py</a:t>
             </a:r>
@@ -18139,7 +18671,7 @@
                 <a:ea typeface="Noto Sans CJK JP"/>
                 <a:cs typeface="Noto Sans"/>
               </a:rPr>
-              <a:t>1領域の一致と、PQ全体の計算</a:t>
+              <a:t>APの平均には複数の軸がある</a:t>
             </a:r>
           </a:p>
         </p:txBody>
@@ -18174,28 +18706,28 @@
               <a:spcAft>
                 <a:spcPts val="800"/>
               </a:spcAft>
-              <a:buSzPct val="55417"/>
+              <a:buSzPct val="57826"/>
               <a:buFont typeface="Noto Sans CJK JP"/>
               <a:buChar char="●"/>
-              <a:defRPr lang="ja-JP" sz="2400" b="0">
-                <a:solidFill>
-                  <a:srgbClr val="303437"/>
-                </a:solidFill>
-                <a:latin typeface="Noto Sans"/>
-                <a:ea typeface="Noto Sans CJK JP"/>
-                <a:cs typeface="Noto Sans"/>
-              </a:defRPr>
-            </a:pPr>
-            <a:r>
-              <a:rPr lang="ja-JP" sz="2400" b="0">
-                <a:solidFill>
-                  <a:srgbClr val="303437"/>
-                </a:solidFill>
-                <a:latin typeface="Noto Sans"/>
-                <a:ea typeface="Noto Sans CJK JP"/>
-                <a:cs typeface="Noto Sans"/>
-              </a:rPr>
-              <a:t>同一カテゴリの正解2領域に対し、予測2領域のうち1領域がIoU 0.80で一致したとする。</a:t>
+              <a:defRPr lang="ja-JP" sz="2300" b="0">
+                <a:solidFill>
+                  <a:srgbClr val="303437"/>
+                </a:solidFill>
+                <a:latin typeface="Noto Sans"/>
+                <a:ea typeface="Noto Sans CJK JP"/>
+                <a:cs typeface="Noto Sans"/>
+              </a:defRPr>
+            </a:pPr>
+            <a:r>
+              <a:rPr lang="ja-JP" sz="2300" b="0">
+                <a:solidFill>
+                  <a:srgbClr val="303437"/>
+                </a:solidFill>
+                <a:latin typeface="Noto Sans"/>
+                <a:ea typeface="Noto Sans CJK JP"/>
+                <a:cs typeface="Noto Sans"/>
+              </a:rPr>
+              <a:t>各カテゴリ・各IoU閾値で、信頼度順の予測から適合率・再現率を作る。</a:t>
             </a:r>
           </a:p>
           <a:p>
@@ -18209,28 +18741,28 @@
               <a:spcAft>
                 <a:spcPts val="800"/>
               </a:spcAft>
-              <a:buSzPct val="55417"/>
+              <a:buSzPct val="57826"/>
               <a:buFont typeface="Noto Sans CJK JP"/>
               <a:buChar char="●"/>
-              <a:defRPr lang="ja-JP" sz="2400" b="0">
-                <a:solidFill>
-                  <a:srgbClr val="303437"/>
-                </a:solidFill>
-                <a:latin typeface="Noto Sans"/>
-                <a:ea typeface="Noto Sans CJK JP"/>
-                <a:cs typeface="Noto Sans"/>
-              </a:defRPr>
-            </a:pPr>
-            <a:r>
-              <a:rPr lang="ja-JP" sz="2400" b="0">
-                <a:solidFill>
-                  <a:srgbClr val="303437"/>
-                </a:solidFill>
-                <a:latin typeface="Noto Sans"/>
-                <a:ea typeface="Noto Sans CJK JP"/>
-                <a:cs typeface="Noto Sans"/>
-              </a:rPr>
-              <a:t>TP=1、FP=1、FN=1なので、PQ=0.80÷(1＋0.5＋0.5)=0.40。</a:t>
+              <a:defRPr lang="ja-JP" sz="2300" b="0">
+                <a:solidFill>
+                  <a:srgbClr val="303437"/>
+                </a:solidFill>
+                <a:latin typeface="Noto Sans"/>
+                <a:ea typeface="Noto Sans CJK JP"/>
+                <a:cs typeface="Noto Sans"/>
+              </a:defRPr>
+            </a:pPr>
+            <a:r>
+              <a:rPr lang="ja-JP" sz="2300" b="0">
+                <a:solidFill>
+                  <a:srgbClr val="303437"/>
+                </a:solidFill>
+                <a:latin typeface="Noto Sans"/>
+                <a:ea typeface="Noto Sans CJK JP"/>
+                <a:cs typeface="Noto Sans"/>
+              </a:rPr>
+              <a:t>再現率0.00〜1.00の101点で補間した適合率を平均し、カテゴリと10個のIoU閾値で平均する。</a:t>
             </a:r>
           </a:p>
           <a:p>
@@ -18244,28 +18776,28 @@
               <a:spcAft>
                 <a:spcPts val="800"/>
               </a:spcAft>
-              <a:buSzPct val="55417"/>
+              <a:buSzPct val="57826"/>
               <a:buFont typeface="Noto Sans CJK JP"/>
               <a:buChar char="●"/>
-              <a:defRPr lang="ja-JP" sz="2400" b="0">
-                <a:solidFill>
-                  <a:srgbClr val="303437"/>
-                </a:solidFill>
-                <a:latin typeface="Noto Sans"/>
-                <a:ea typeface="Noto Sans CJK JP"/>
-                <a:cs typeface="Noto Sans"/>
-              </a:defRPr>
-            </a:pPr>
-            <a:r>
-              <a:rPr lang="ja-JP" sz="2400" b="0">
-                <a:solidFill>
-                  <a:srgbClr val="303437"/>
-                </a:solidFill>
-                <a:latin typeface="Noto Sans"/>
-                <a:ea typeface="Noto Sans CJK JP"/>
-                <a:cs typeface="Noto Sans"/>
-              </a:rPr>
-              <a:t>実評価はカテゴリごとに全画像の一致・誤検出・見落としを集計し、カテゴリ間で平均する [1]。</a:t>
+              <a:defRPr lang="ja-JP" sz="2300" b="0">
+                <a:solidFill>
+                  <a:srgbClr val="303437"/>
+                </a:solidFill>
+                <a:latin typeface="Noto Sans"/>
+                <a:ea typeface="Noto Sans CJK JP"/>
+                <a:cs typeface="Noto Sans"/>
+              </a:defRPr>
+            </a:pPr>
+            <a:r>
+              <a:rPr lang="ja-JP" sz="2300" b="0">
+                <a:solidFill>
+                  <a:srgbClr val="303437"/>
+                </a:solidFill>
+                <a:latin typeface="Noto Sans"/>
+                <a:ea typeface="Noto Sans CJK JP"/>
+                <a:cs typeface="Noto Sans"/>
+              </a:rPr>
+              <a:t>通常APはmaxDets=100。公式Python実装では、画像・カテゴリごとに上位100予測を使う [1]。</a:t>
             </a:r>
           </a:p>
         </p:txBody>
@@ -18387,18 +18919,7 @@
                 <a:cs typeface="Noto Sans"/>
                 <a:hlinkClick r:id="rId2"/>
               </a:rPr>
-              <a:t>https://github.com/cocodataset/panopticapi/blob/master/panopticapi/evaluation.py</a:t>
-            </a:r>
-            <a:r>
-              <a:rPr lang="ja-JP" sz="800" b="0">
-                <a:solidFill>
-                  <a:srgbClr val="626669"/>
-                </a:solidFill>
-                <a:latin typeface="Noto Sans"/>
-                <a:ea typeface="Noto Sans CJK JP"/>
-                <a:cs typeface="Noto Sans"/>
-              </a:rPr>
-              <a:t> / 数値は計算説明の例</a:t>
+              <a:t>https://github.com/cocodataset/cocoapi/blob/master/PythonAPI/pycocotools/cocoeval.py</a:t>
             </a:r>
           </a:p>
         </p:txBody>
@@ -18470,7 +18991,7 @@
                 <a:ea typeface="Noto Sans CJK JP"/>
                 <a:cs typeface="Noto Sans"/>
               </a:rPr>
-              <a:t>ここからは公開128画像の部分集合を見る</a:t>
+              <a:t>1領域の一致と、PQ全体の計算</a:t>
             </a:r>
           </a:p>
         </p:txBody>
@@ -18526,7 +19047,7 @@
                 <a:ea typeface="Noto Sans CJK JP"/>
                 <a:cs typeface="Noto Sans"/>
               </a:rPr>
-              <a:t>全体の配布画像は約330K枚だが、以下の集計はCOCO128-segの128画像に限定する。</a:t>
+              <a:t>同一カテゴリの正解2領域に対し、予測2領域のうち1領域がIoU 0.80で一致したとする。</a:t>
             </a:r>
           </a:p>
           <a:p>
@@ -18561,7 +19082,7 @@
                 <a:ea typeface="Noto Sans CJK JP"/>
                 <a:cs typeface="Noto Sans"/>
               </a:rPr>
-              <a:t>公開変換された領域注釈を画像ごとに数え、注釈ファイルがない2画像は0領域として含める。</a:t>
+              <a:t>TP=1、FP=1、FN=1なので、PQ=0.80÷(1＋0.5＋0.5)=0.40。</a:t>
             </a:r>
           </a:p>
           <a:p>
@@ -18596,7 +19117,7 @@
                 <a:ea typeface="Noto Sans CJK JP"/>
                 <a:cs typeface="Noto Sans"/>
               </a:rPr>
-              <a:t>これは例示用の小さな部分集合。カテゴリ頻度や領域数の分布をCOCO全体へ一般化しない [1]。</a:t>
+              <a:t>実評価はカテゴリごとに全画像の一致・誤検出・見落としを集計し、カテゴリ間で平均する [1]。</a:t>
             </a:r>
           </a:p>
         </p:txBody>
@@ -18650,7 +19171,7 @@
                 <a:ea typeface="Noto Sans CJK JP"/>
                 <a:cs typeface="Noto Sans"/>
               </a:rPr>
-              <a:t>Appendix 2 128画像で見る注釈の分布</a:t>
+              <a:t>Appendix 1 定義・著者・評価の詳細</a:t>
             </a:r>
           </a:p>
         </p:txBody>
@@ -18718,7 +19239,18 @@
                 <a:cs typeface="Noto Sans"/>
                 <a:hlinkClick r:id="rId2"/>
               </a:rPr>
-              <a:t>https://github.com/ultralytics/assets/releases/download/v0.0.0/coco128-seg.zip</a:t>
+              <a:t>https://github.com/cocodataset/panopticapi/blob/master/panopticapi/evaluation.py</a:t>
+            </a:r>
+            <a:r>
+              <a:rPr lang="ja-JP" sz="800" b="0">
+                <a:solidFill>
+                  <a:srgbClr val="626669"/>
+                </a:solidFill>
+                <a:latin typeface="Noto Sans"/>
+                <a:ea typeface="Noto Sans CJK JP"/>
+                <a:cs typeface="Noto Sans"/>
+              </a:rPr>
+              <a:t> / 数値は計算説明の例</a:t>
             </a:r>
           </a:p>
         </p:txBody>
@@ -18790,6 +19322,326 @@
                 <a:ea typeface="Noto Sans CJK JP"/>
                 <a:cs typeface="Noto Sans"/>
               </a:rPr>
+              <a:t>ここからは公開128画像の部分集合を見る</a:t>
+            </a:r>
+          </a:p>
+        </p:txBody>
+      </p:sp>
+      <p:sp>
+        <p:nvSpPr>
+          <p:cNvPr id="3" name="Text Placeholder 2"/>
+          <p:cNvSpPr>
+            <a:spLocks noGrp="1"/>
+          </p:cNvSpPr>
+          <p:nvPr>
+            <p:ph type="body" idx="1"/>
+          </p:nvPr>
+        </p:nvSpPr>
+        <p:spPr>
+          <a:xfrm>
+            <a:off x="594360" y="1508760"/>
+            <a:ext cx="7955279" cy="3017520"/>
+          </a:xfrm>
+        </p:spPr>
+        <p:txBody>
+          <a:bodyPr wrap="square" anchor="t" tIns="91440" bIns="91440"/>
+          <a:lstStyle/>
+          <a:p>
+            <a:pPr algn="l" lvl="0" marL="457200" indent="-355600">
+              <a:lnSpc>
+                <a:spcPct val="115000"/>
+              </a:lnSpc>
+              <a:spcBef>
+                <a:spcPts val="0"/>
+              </a:spcBef>
+              <a:spcAft>
+                <a:spcPts val="800"/>
+              </a:spcAft>
+              <a:buSzPct val="55417"/>
+              <a:buFont typeface="Noto Sans CJK JP"/>
+              <a:buChar char="●"/>
+              <a:defRPr lang="ja-JP" sz="2400" b="0">
+                <a:solidFill>
+                  <a:srgbClr val="303437"/>
+                </a:solidFill>
+                <a:latin typeface="Noto Sans"/>
+                <a:ea typeface="Noto Sans CJK JP"/>
+                <a:cs typeface="Noto Sans"/>
+              </a:defRPr>
+            </a:pPr>
+            <a:r>
+              <a:rPr lang="ja-JP" sz="2400" b="0">
+                <a:solidFill>
+                  <a:srgbClr val="303437"/>
+                </a:solidFill>
+                <a:latin typeface="Noto Sans"/>
+                <a:ea typeface="Noto Sans CJK JP"/>
+                <a:cs typeface="Noto Sans"/>
+              </a:rPr>
+              <a:t>全体の配布画像は約330K枚だが、以下の集計はCOCO128-segの128画像に限定する。</a:t>
+            </a:r>
+          </a:p>
+          <a:p>
+            <a:pPr algn="l" lvl="0" marL="457200" indent="-355600">
+              <a:lnSpc>
+                <a:spcPct val="115000"/>
+              </a:lnSpc>
+              <a:spcBef>
+                <a:spcPts val="0"/>
+              </a:spcBef>
+              <a:spcAft>
+                <a:spcPts val="800"/>
+              </a:spcAft>
+              <a:buSzPct val="55417"/>
+              <a:buFont typeface="Noto Sans CJK JP"/>
+              <a:buChar char="●"/>
+              <a:defRPr lang="ja-JP" sz="2400" b="0">
+                <a:solidFill>
+                  <a:srgbClr val="303437"/>
+                </a:solidFill>
+                <a:latin typeface="Noto Sans"/>
+                <a:ea typeface="Noto Sans CJK JP"/>
+                <a:cs typeface="Noto Sans"/>
+              </a:defRPr>
+            </a:pPr>
+            <a:r>
+              <a:rPr lang="ja-JP" sz="2400" b="0">
+                <a:solidFill>
+                  <a:srgbClr val="303437"/>
+                </a:solidFill>
+                <a:latin typeface="Noto Sans"/>
+                <a:ea typeface="Noto Sans CJK JP"/>
+                <a:cs typeface="Noto Sans"/>
+              </a:rPr>
+              <a:t>公開変換された領域注釈を画像ごとに数え、注釈ファイルがない2画像は0領域として含める。</a:t>
+            </a:r>
+          </a:p>
+          <a:p>
+            <a:pPr algn="l" lvl="0" marL="457200" indent="-355600">
+              <a:lnSpc>
+                <a:spcPct val="115000"/>
+              </a:lnSpc>
+              <a:spcBef>
+                <a:spcPts val="0"/>
+              </a:spcBef>
+              <a:spcAft>
+                <a:spcPts val="800"/>
+              </a:spcAft>
+              <a:buSzPct val="55417"/>
+              <a:buFont typeface="Noto Sans CJK JP"/>
+              <a:buChar char="●"/>
+              <a:defRPr lang="ja-JP" sz="2400" b="0">
+                <a:solidFill>
+                  <a:srgbClr val="303437"/>
+                </a:solidFill>
+                <a:latin typeface="Noto Sans"/>
+                <a:ea typeface="Noto Sans CJK JP"/>
+                <a:cs typeface="Noto Sans"/>
+              </a:defRPr>
+            </a:pPr>
+            <a:r>
+              <a:rPr lang="ja-JP" sz="2400" b="0">
+                <a:solidFill>
+                  <a:srgbClr val="303437"/>
+                </a:solidFill>
+                <a:latin typeface="Noto Sans"/>
+                <a:ea typeface="Noto Sans CJK JP"/>
+                <a:cs typeface="Noto Sans"/>
+              </a:rPr>
+              <a:t>これは例示用の小さな部分集合。カテゴリ頻度や領域数の分布をCOCO全体へ一般化しない [1]。</a:t>
+            </a:r>
+          </a:p>
+        </p:txBody>
+      </p:sp>
+      <p:sp>
+        <p:nvSpPr>
+          <p:cNvPr id="4" name="Title 3"/>
+          <p:cNvSpPr>
+            <a:spLocks noGrp="1"/>
+          </p:cNvSpPr>
+          <p:nvPr>
+            <p:ph type="title" idx="2"/>
+          </p:nvPr>
+        </p:nvSpPr>
+        <p:spPr>
+          <a:xfrm>
+            <a:off x="75895" y="0"/>
+            <a:ext cx="8115300" cy="480060"/>
+          </a:xfrm>
+        </p:spPr>
+        <p:txBody>
+          <a:bodyPr wrap="square" anchor="ctr" lIns="0" rIns="0" tIns="0" bIns="0"/>
+          <a:lstStyle/>
+          <a:p>
+            <a:pPr algn="l">
+              <a:lnSpc>
+                <a:spcPct val="100000"/>
+              </a:lnSpc>
+              <a:spcBef>
+                <a:spcPts val="0"/>
+              </a:spcBef>
+              <a:spcAft>
+                <a:spcPts val="0"/>
+              </a:spcAft>
+              <a:buNone/>
+              <a:defRPr lang="ja-JP" sz="1400" b="1">
+                <a:solidFill>
+                  <a:srgbClr val="FFFEF8"/>
+                </a:solidFill>
+                <a:latin typeface="Noto Sans"/>
+                <a:ea typeface="Noto Sans CJK JP"/>
+                <a:cs typeface="Noto Sans"/>
+              </a:defRPr>
+            </a:pPr>
+            <a:r>
+              <a:rPr lang="ja-JP" sz="1400" b="1">
+                <a:solidFill>
+                  <a:srgbClr val="FFFEF8"/>
+                </a:solidFill>
+                <a:latin typeface="Noto Sans"/>
+                <a:ea typeface="Noto Sans CJK JP"/>
+                <a:cs typeface="Noto Sans"/>
+              </a:rPr>
+              <a:t>Appendix 2 128画像で見る注釈の分布</a:t>
+            </a:r>
+          </a:p>
+        </p:txBody>
+      </p:sp>
+      <p:sp>
+        <p:nvSpPr>
+          <p:cNvPr id="5" name="TextBox 4"/>
+          <p:cNvSpPr txBox="1"/>
+          <p:nvPr/>
+        </p:nvSpPr>
+        <p:spPr>
+          <a:xfrm>
+            <a:off x="502920" y="4754880"/>
+            <a:ext cx="8183879" cy="320040"/>
+          </a:xfrm>
+          <a:prstGeom prst="rect">
+            <a:avLst/>
+          </a:prstGeom>
+          <a:noFill/>
+        </p:spPr>
+        <p:txBody>
+          <a:bodyPr wrap="square" anchor="t" lIns="0" rIns="0" tIns="0" bIns="0">
+            <a:spAutoFit/>
+          </a:bodyPr>
+          <a:lstStyle/>
+          <a:p>
+            <a:pPr algn="l">
+              <a:lnSpc>
+                <a:spcPct val="115000"/>
+              </a:lnSpc>
+              <a:spcBef>
+                <a:spcPts val="0"/>
+              </a:spcBef>
+              <a:spcAft>
+                <a:spcPts val="0"/>
+              </a:spcAft>
+              <a:buNone/>
+              <a:defRPr lang="ja-JP" sz="800" b="0">
+                <a:solidFill>
+                  <a:srgbClr val="626669"/>
+                </a:solidFill>
+                <a:latin typeface="Noto Sans"/>
+                <a:ea typeface="Noto Sans CJK JP"/>
+                <a:cs typeface="Noto Sans"/>
+              </a:defRPr>
+            </a:pPr>
+            <a:r>
+              <a:rPr lang="ja-JP" sz="800" b="0">
+                <a:solidFill>
+                  <a:srgbClr val="626669"/>
+                </a:solidFill>
+                <a:latin typeface="Noto Sans"/>
+                <a:ea typeface="Noto Sans CJK JP"/>
+                <a:cs typeface="Noto Sans"/>
+              </a:rPr>
+              <a:t>[1] </a:t>
+            </a:r>
+            <a:r>
+              <a:rPr lang="ja-JP" sz="800" b="0">
+                <a:solidFill>
+                  <a:srgbClr val="626669"/>
+                </a:solidFill>
+                <a:latin typeface="Noto Sans"/>
+                <a:ea typeface="Noto Sans CJK JP"/>
+                <a:cs typeface="Noto Sans"/>
+                <a:hlinkClick r:id="rId2"/>
+              </a:rPr>
+              <a:t>https://github.com/ultralytics/assets/releases/download/v0.0.0/coco128-seg.zip</a:t>
+            </a:r>
+          </a:p>
+        </p:txBody>
+      </p:sp>
+    </p:spTree>
+  </p:cSld>
+  <p:clrMapOvr>
+    <a:masterClrMapping/>
+  </p:clrMapOvr>
+</p:sld>
+</file>
+
+<file path=ppt/slides/slide37.xml><?xml version="1.0" encoding="utf-8"?>
+<p:sld xmlns:a="http://schemas.openxmlformats.org/drawingml/2006/main" xmlns:p="http://schemas.openxmlformats.org/presentationml/2006/main" xmlns:r="http://schemas.openxmlformats.org/officeDocument/2006/relationships">
+  <p:cSld>
+    <p:spTree>
+      <p:nvGrpSpPr>
+        <p:cNvPr id="1" name=""/>
+        <p:cNvGrpSpPr/>
+        <p:nvPr/>
+      </p:nvGrpSpPr>
+      <p:grpSpPr/>
+      <p:sp>
+        <p:nvSpPr>
+          <p:cNvPr id="2" name="Title 1"/>
+          <p:cNvSpPr>
+            <a:spLocks noGrp="1"/>
+          </p:cNvSpPr>
+          <p:nvPr>
+            <p:ph type="title"/>
+          </p:nvPr>
+        </p:nvSpPr>
+        <p:spPr>
+          <a:xfrm>
+            <a:off x="468172" y="650138"/>
+            <a:ext cx="8206740" cy="616305"/>
+          </a:xfrm>
+        </p:spPr>
+        <p:txBody>
+          <a:bodyPr wrap="square" anchor="t" lIns="0" rIns="0" tIns="0" bIns="0"/>
+          <a:lstStyle/>
+          <a:p>
+            <a:pPr algn="l">
+              <a:lnSpc>
+                <a:spcPct val="115000"/>
+              </a:lnSpc>
+              <a:spcBef>
+                <a:spcPts val="0"/>
+              </a:spcBef>
+              <a:spcAft>
+                <a:spcPts val="0"/>
+              </a:spcAft>
+              <a:buNone/>
+              <a:defRPr lang="ja-JP" sz="2800" b="1">
+                <a:solidFill>
+                  <a:srgbClr val="303437"/>
+                </a:solidFill>
+                <a:latin typeface="Noto Sans"/>
+                <a:ea typeface="Noto Sans CJK JP"/>
+                <a:cs typeface="Noto Sans"/>
+              </a:defRPr>
+            </a:pPr>
+            <a:r>
+              <a:rPr lang="ja-JP" sz="2800" b="1">
+                <a:solidFill>
+                  <a:srgbClr val="303437"/>
+                </a:solidFill>
+                <a:latin typeface="Noto Sans"/>
+                <a:ea typeface="Noto Sans CJK JP"/>
+                <a:cs typeface="Noto Sans"/>
+              </a:rPr>
               <a:t>128画像の注釈領域数の分布</a:t>
             </a:r>
           </a:p>
@@ -18982,7 +19834,7 @@
 </p:sld>
 </file>
 
-<file path=ppt/slides/slide37.xml><?xml version="1.0" encoding="utf-8"?>
+<file path=ppt/slides/slide38.xml><?xml version="1.0" encoding="utf-8"?>
 <p:sld xmlns:a="http://schemas.openxmlformats.org/drawingml/2006/main" xmlns:p="http://schemas.openxmlformats.org/presentationml/2006/main" xmlns:r="http://schemas.openxmlformats.org/officeDocument/2006/relationships">
   <p:cSld>
     <p:spTree>
@@ -19838,257 +20690,6 @@
 </p:sld>
 </file>
 
-<file path=ppt/slides/slide38.xml><?xml version="1.0" encoding="utf-8"?>
-<p:sld xmlns:a="http://schemas.openxmlformats.org/drawingml/2006/main" xmlns:p="http://schemas.openxmlformats.org/presentationml/2006/main" xmlns:r="http://schemas.openxmlformats.org/officeDocument/2006/relationships">
-  <p:cSld>
-    <p:spTree>
-      <p:nvGrpSpPr>
-        <p:cNvPr id="1" name=""/>
-        <p:cNvGrpSpPr/>
-        <p:nvPr/>
-      </p:nvGrpSpPr>
-      <p:grpSpPr/>
-      <p:sp>
-        <p:nvSpPr>
-          <p:cNvPr id="2" name="Title 1"/>
-          <p:cNvSpPr>
-            <a:spLocks noGrp="1"/>
-          </p:cNvSpPr>
-          <p:nvPr>
-            <p:ph type="title"/>
-          </p:nvPr>
-        </p:nvSpPr>
-        <p:spPr>
-          <a:xfrm>
-            <a:off x="468172" y="650138"/>
-            <a:ext cx="8206740" cy="616305"/>
-          </a:xfrm>
-        </p:spPr>
-        <p:txBody>
-          <a:bodyPr wrap="square" anchor="t" lIns="0" rIns="0" tIns="0" bIns="0"/>
-          <a:lstStyle/>
-          <a:p>
-            <a:pPr algn="l">
-              <a:lnSpc>
-                <a:spcPct val="115000"/>
-              </a:lnSpc>
-              <a:spcBef>
-                <a:spcPts val="0"/>
-              </a:spcBef>
-              <a:spcAft>
-                <a:spcPts val="0"/>
-              </a:spcAft>
-              <a:buNone/>
-              <a:defRPr lang="ja-JP" sz="2800" b="1">
-                <a:solidFill>
-                  <a:srgbClr val="303437"/>
-                </a:solidFill>
-                <a:latin typeface="Noto Sans"/>
-                <a:ea typeface="Noto Sans CJK JP"/>
-                <a:cs typeface="Noto Sans"/>
-              </a:defRPr>
-            </a:pPr>
-            <a:r>
-              <a:rPr lang="ja-JP" sz="2800" b="1">
-                <a:solidFill>
-                  <a:srgbClr val="303437"/>
-                </a:solidFill>
-                <a:latin typeface="Noto Sans"/>
-                <a:ea typeface="Noto Sans CJK JP"/>
-                <a:cs typeface="Noto Sans"/>
-              </a:rPr>
-              <a:t>最多の42領域を含む食卓</a:t>
-            </a:r>
-          </a:p>
-        </p:txBody>
-      </p:sp>
-      <p:sp>
-        <p:nvSpPr>
-          <p:cNvPr id="3" name="Title 2"/>
-          <p:cNvSpPr>
-            <a:spLocks noGrp="1"/>
-          </p:cNvSpPr>
-          <p:nvPr>
-            <p:ph type="title" idx="2"/>
-          </p:nvPr>
-        </p:nvSpPr>
-        <p:spPr>
-          <a:xfrm>
-            <a:off x="75895" y="0"/>
-            <a:ext cx="8115300" cy="480060"/>
-          </a:xfrm>
-        </p:spPr>
-        <p:txBody>
-          <a:bodyPr wrap="square" anchor="ctr" lIns="0" rIns="0" tIns="0" bIns="0"/>
-          <a:lstStyle/>
-          <a:p>
-            <a:pPr algn="l">
-              <a:lnSpc>
-                <a:spcPct val="100000"/>
-              </a:lnSpc>
-              <a:spcBef>
-                <a:spcPts val="0"/>
-              </a:spcBef>
-              <a:spcAft>
-                <a:spcPts val="0"/>
-              </a:spcAft>
-              <a:buNone/>
-              <a:defRPr lang="ja-JP" sz="1400" b="1">
-                <a:solidFill>
-                  <a:srgbClr val="FFFEF8"/>
-                </a:solidFill>
-                <a:latin typeface="Noto Sans"/>
-                <a:ea typeface="Noto Sans CJK JP"/>
-                <a:cs typeface="Noto Sans"/>
-              </a:defRPr>
-            </a:pPr>
-            <a:r>
-              <a:rPr lang="ja-JP" sz="1400" b="1">
-                <a:solidFill>
-                  <a:srgbClr val="FFFEF8"/>
-                </a:solidFill>
-                <a:latin typeface="Noto Sans"/>
-                <a:ea typeface="Noto Sans CJK JP"/>
-                <a:cs typeface="Noto Sans"/>
-              </a:rPr>
-              <a:t>Appendix 2 128画像で見る注釈の分布</a:t>
-            </a:r>
-          </a:p>
-        </p:txBody>
-      </p:sp>
-      <p:pic>
-        <p:nvPicPr>
-          <p:cNvPr id="4" name="Picture 3" descr="196.jpg"/>
-          <p:cNvPicPr>
-            <a:picLocks noChangeAspect="1"/>
-          </p:cNvPicPr>
-          <p:nvPr/>
-        </p:nvPicPr>
-        <p:blipFill>
-          <a:blip r:embed="rId2"/>
-          <a:stretch>
-            <a:fillRect/>
-          </a:stretch>
-        </p:blipFill>
-        <p:spPr>
-          <a:xfrm>
-            <a:off x="2468879" y="1417320"/>
-            <a:ext cx="4206240" cy="3154680"/>
-          </a:xfrm>
-          <a:prstGeom prst="rect">
-            <a:avLst/>
-          </a:prstGeom>
-        </p:spPr>
-      </p:pic>
-      <p:sp>
-        <p:nvSpPr>
-          <p:cNvPr id="5" name="TextBox 4"/>
-          <p:cNvSpPr txBox="1"/>
-          <p:nvPr/>
-        </p:nvSpPr>
-        <p:spPr>
-          <a:xfrm>
-            <a:off x="502920" y="4754880"/>
-            <a:ext cx="8183879" cy="320040"/>
-          </a:xfrm>
-          <a:prstGeom prst="rect">
-            <a:avLst/>
-          </a:prstGeom>
-          <a:noFill/>
-        </p:spPr>
-        <p:txBody>
-          <a:bodyPr wrap="square" anchor="t" lIns="0" rIns="0" tIns="0" bIns="0">
-            <a:spAutoFit/>
-          </a:bodyPr>
-          <a:lstStyle/>
-          <a:p>
-            <a:pPr algn="l">
-              <a:lnSpc>
-                <a:spcPct val="115000"/>
-              </a:lnSpc>
-              <a:spcBef>
-                <a:spcPts val="0"/>
-              </a:spcBef>
-              <a:spcAft>
-                <a:spcPts val="0"/>
-              </a:spcAft>
-              <a:buNone/>
-              <a:defRPr lang="ja-JP" sz="800" b="0">
-                <a:solidFill>
-                  <a:srgbClr val="626669"/>
-                </a:solidFill>
-                <a:latin typeface="Noto Sans"/>
-                <a:ea typeface="Noto Sans CJK JP"/>
-                <a:cs typeface="Noto Sans"/>
-              </a:defRPr>
-            </a:pPr>
-            <a:r>
-              <a:rPr lang="ja-JP" sz="800" b="0">
-                <a:solidFill>
-                  <a:srgbClr val="626669"/>
-                </a:solidFill>
-                <a:latin typeface="Noto Sans"/>
-                <a:ea typeface="Noto Sans CJK JP"/>
-                <a:cs typeface="Noto Sans"/>
-              </a:rPr>
-              <a:t>[1] </a:t>
-            </a:r>
-            <a:r>
-              <a:rPr lang="ja-JP" sz="800" b="0">
-                <a:solidFill>
-                  <a:srgbClr val="626669"/>
-                </a:solidFill>
-                <a:latin typeface="Noto Sans"/>
-                <a:ea typeface="Noto Sans CJK JP"/>
-                <a:cs typeface="Noto Sans"/>
-                <a:hlinkClick r:id="rId3"/>
-              </a:rPr>
-              <a:t>https://github.com/ultralytics/assets/releases/download/v0.0.0/coco128-seg.zip</a:t>
-            </a:r>
-          </a:p>
-          <a:p>
-            <a:pPr algn="l">
-              <a:lnSpc>
-                <a:spcPct val="115000"/>
-              </a:lnSpc>
-              <a:spcBef>
-                <a:spcPts val="0"/>
-              </a:spcBef>
-              <a:spcAft>
-                <a:spcPts val="0"/>
-              </a:spcAft>
-              <a:buNone/>
-              <a:defRPr lang="ja-JP" sz="800" b="0">
-                <a:solidFill>
-                  <a:srgbClr val="626669"/>
-                </a:solidFill>
-                <a:latin typeface="Noto Sans"/>
-                <a:ea typeface="Noto Sans CJK JP"/>
-                <a:cs typeface="Noto Sans"/>
-              </a:defRPr>
-            </a:pPr>
-            <a:r>
-              <a:rPr lang="ja-JP" sz="800" b="0">
-                <a:solidFill>
-                  <a:srgbClr val="626669"/>
-                </a:solidFill>
-                <a:latin typeface="Noto Sans"/>
-                <a:ea typeface="Noto Sans CJK JP"/>
-                <a:cs typeface="Noto Sans"/>
-              </a:rPr>
-              <a:t>COCO image ID 000000000196 / COCO128-seg公開変換注釈の輪郭を重ねて表示</a:t>
-            </a:r>
-          </a:p>
-        </p:txBody>
-      </p:sp>
-    </p:spTree>
-  </p:cSld>
-  <p:clrMapOvr>
-    <a:masterClrMapping/>
-  </p:clrMapOvr>
-</p:sld>
-</file>
-
 <file path=ppt/slides/slide39.xml><?xml version="1.0" encoding="utf-8"?>
 <p:sld xmlns:a="http://schemas.openxmlformats.org/drawingml/2006/main" xmlns:p="http://schemas.openxmlformats.org/presentationml/2006/main" xmlns:r="http://schemas.openxmlformats.org/officeDocument/2006/relationships">
   <p:cSld>
@@ -20148,7 +20749,7 @@
                 <a:ea typeface="Noto Sans CJK JP"/>
                 <a:cs typeface="Noto Sans"/>
               </a:rPr>
-              <a:t>注釈が0領域の画像にも物体は写る</a:t>
+              <a:t>最多の42領域を含む食卓</a:t>
             </a:r>
           </a:p>
         </p:txBody>
@@ -20209,7 +20810,7 @@
       </p:sp>
       <p:pic>
         <p:nvPicPr>
-          <p:cNvPr id="4" name="Picture 3" descr="250.jpg"/>
+          <p:cNvPr id="4" name="Picture 3" descr="196.jpg"/>
           <p:cNvPicPr>
             <a:picLocks noChangeAspect="1"/>
           </p:cNvPicPr>
@@ -20327,7 +20928,7 @@
                 <a:ea typeface="Noto Sans CJK JP"/>
                 <a:cs typeface="Noto Sans"/>
               </a:rPr>
-              <a:t>COCO image ID 000000000250 / COCO128-seg公開変換注釈の輪郭を重ねて表示</a:t>
+              <a:t>COCO image ID 000000000196 / COCO128-seg公開変換注釈の輪郭を重ねて表示</a:t>
             </a:r>
           </a:p>
         </p:txBody>
@@ -20606,7 +21207,7 @@
                 <a:ea typeface="Noto Sans CJK JP"/>
                 <a:cs typeface="Noto Sans"/>
               </a:rPr>
-              <a:t>キリン giraffe</a:t>
+              <a:t>注釈が0領域の画像にも物体は写る</a:t>
             </a:r>
           </a:p>
         </p:txBody>
@@ -20660,14 +21261,14 @@
                 <a:ea typeface="Noto Sans CJK JP"/>
                 <a:cs typeface="Noto Sans"/>
               </a:rPr>
-              <a:t>Appendix 3 追加の領域注釈例</a:t>
+              <a:t>Appendix 2 128画像で見る注釈の分布</a:t>
             </a:r>
           </a:p>
         </p:txBody>
       </p:sp>
       <p:pic>
         <p:nvPicPr>
-          <p:cNvPr id="4" name="Picture 3" descr="25.jpg"/>
+          <p:cNvPr id="4" name="Picture 3" descr="250.jpg"/>
           <p:cNvPicPr>
             <a:picLocks noChangeAspect="1"/>
           </p:cNvPicPr>
@@ -20681,8 +21282,8 @@
         </p:blipFill>
         <p:spPr>
           <a:xfrm>
-            <a:off x="2202287" y="1417320"/>
-            <a:ext cx="4739425" cy="3154679"/>
+            <a:off x="2468879" y="1417320"/>
+            <a:ext cx="4206240" cy="3154680"/>
           </a:xfrm>
           <a:prstGeom prst="rect">
             <a:avLst/>
@@ -20785,7 +21386,7 @@
                 <a:ea typeface="Noto Sans CJK JP"/>
                 <a:cs typeface="Noto Sans"/>
               </a:rPr>
-              <a:t>COCO image ID 000000000025 / COCO128-seg公開変換注釈の輪郭を重ねて表示</a:t>
+              <a:t>COCO image ID 000000000250 / COCO128-seg公開変換注釈の輪郭を重ねて表示</a:t>
             </a:r>
           </a:p>
         </p:txBody>
@@ -20857,7 +21458,7 @@
                 <a:ea typeface="Noto Sans CJK JP"/>
                 <a:cs typeface="Noto Sans"/>
               </a:rPr>
-              <a:t>シマウマ zebra</a:t>
+              <a:t>キリン giraffe</a:t>
             </a:r>
           </a:p>
         </p:txBody>
@@ -20918,7 +21519,7 @@
       </p:sp>
       <p:pic>
         <p:nvPicPr>
-          <p:cNvPr id="4" name="Picture 3" descr="34.jpg"/>
+          <p:cNvPr id="4" name="Picture 3" descr="25.jpg"/>
           <p:cNvPicPr>
             <a:picLocks noChangeAspect="1"/>
           </p:cNvPicPr>
@@ -20932,8 +21533,8 @@
         </p:blipFill>
         <p:spPr>
           <a:xfrm>
-            <a:off x="2196711" y="1417320"/>
-            <a:ext cx="4750576" cy="3154680"/>
+            <a:off x="2202287" y="1417320"/>
+            <a:ext cx="4739425" cy="3154679"/>
           </a:xfrm>
           <a:prstGeom prst="rect">
             <a:avLst/>
@@ -21036,7 +21637,7 @@
                 <a:ea typeface="Noto Sans CJK JP"/>
                 <a:cs typeface="Noto Sans"/>
               </a:rPr>
-              <a:t>COCO image ID 000000000034 / COCO128-seg公開変換注釈の輪郭を重ねて表示</a:t>
+              <a:t>COCO image ID 000000000025 / COCO128-seg公開変換注釈の輪郭を重ねて表示</a:t>
             </a:r>
           </a:p>
         </p:txBody>
@@ -21108,7 +21709,7 @@
                 <a:ea typeface="Noto Sans CJK JP"/>
                 <a:cs typeface="Noto Sans"/>
               </a:rPr>
-              <a:t>猫 cat</a:t>
+              <a:t>シマウマ zebra</a:t>
             </a:r>
           </a:p>
         </p:txBody>
@@ -21169,7 +21770,7 @@
       </p:sp>
       <p:pic>
         <p:nvPicPr>
-          <p:cNvPr id="4" name="Picture 3" descr="42.jpg"/>
+          <p:cNvPr id="4" name="Picture 3" descr="34.jpg"/>
           <p:cNvPicPr>
             <a:picLocks noChangeAspect="1"/>
           </p:cNvPicPr>
@@ -21183,8 +21784,8 @@
         </p:blipFill>
         <p:spPr>
           <a:xfrm>
-            <a:off x="2460080" y="1417320"/>
-            <a:ext cx="4223839" cy="3154680"/>
+            <a:off x="2196711" y="1417320"/>
+            <a:ext cx="4750576" cy="3154680"/>
           </a:xfrm>
           <a:prstGeom prst="rect">
             <a:avLst/>
@@ -21287,7 +21888,7 @@
                 <a:ea typeface="Noto Sans CJK JP"/>
                 <a:cs typeface="Noto Sans"/>
               </a:rPr>
-              <a:t>COCO image ID 000000000042 / COCO128-seg公開変換注釈の輪郭を重ねて表示</a:t>
+              <a:t>COCO image ID 000000000034 / COCO128-seg公開変換注釈の輪郭を重ねて表示</a:t>
             </a:r>
           </a:p>
         </p:txBody>
@@ -21359,7 +21960,7 @@
                 <a:ea typeface="Noto Sans CJK JP"/>
                 <a:cs typeface="Noto Sans"/>
               </a:rPr>
-              <a:t>街路の時計 clock</a:t>
+              <a:t>猫 cat</a:t>
             </a:r>
           </a:p>
         </p:txBody>
@@ -21420,7 +22021,7 @@
       </p:sp>
       <p:pic>
         <p:nvPicPr>
-          <p:cNvPr id="4" name="Picture 3" descr="64.jpg"/>
+          <p:cNvPr id="4" name="Picture 3" descr="42.jpg"/>
           <p:cNvPicPr>
             <a:picLocks noChangeAspect="1"/>
           </p:cNvPicPr>
@@ -21434,8 +22035,8 @@
         </p:blipFill>
         <p:spPr>
           <a:xfrm>
-            <a:off x="3388994" y="1417320"/>
-            <a:ext cx="2366010" cy="3154680"/>
+            <a:off x="2460080" y="1417320"/>
+            <a:ext cx="4223839" cy="3154680"/>
           </a:xfrm>
           <a:prstGeom prst="rect">
             <a:avLst/>
@@ -21538,7 +22139,7 @@
                 <a:ea typeface="Noto Sans CJK JP"/>
                 <a:cs typeface="Noto Sans"/>
               </a:rPr>
-              <a:t>COCO image ID 000000000064 / COCO128-seg公開変換注釈の輪郭を重ねて表示</a:t>
+              <a:t>COCO image ID 000000000042 / COCO128-seg公開変換注釈の輪郭を重ねて表示</a:t>
             </a:r>
           </a:p>
         </p:txBody>
@@ -21610,7 +22211,7 @@
                 <a:ea typeface="Noto Sans CJK JP"/>
                 <a:cs typeface="Noto Sans"/>
               </a:rPr>
-              <a:t>重なり合う自転車 bicycle</a:t>
+              <a:t>街路の時計 clock</a:t>
             </a:r>
           </a:p>
         </p:txBody>
@@ -21671,7 +22272,7 @@
       </p:sp>
       <p:pic>
         <p:nvPicPr>
-          <p:cNvPr id="4" name="Picture 3" descr="73.jpg"/>
+          <p:cNvPr id="4" name="Picture 3" descr="64.jpg"/>
           <p:cNvPicPr>
             <a:picLocks noChangeAspect="1"/>
           </p:cNvPicPr>
@@ -21685,8 +22286,8 @@
         </p:blipFill>
         <p:spPr>
           <a:xfrm>
-            <a:off x="3179504" y="1417320"/>
-            <a:ext cx="2784990" cy="3154680"/>
+            <a:off x="3388994" y="1417320"/>
+            <a:ext cx="2366010" cy="3154680"/>
           </a:xfrm>
           <a:prstGeom prst="rect">
             <a:avLst/>
@@ -21789,7 +22390,7 @@
                 <a:ea typeface="Noto Sans CJK JP"/>
                 <a:cs typeface="Noto Sans"/>
               </a:rPr>
-              <a:t>COCO image ID 000000000073 / COCO128-seg公開変換注釈の輪郭を重ねて表示</a:t>
+              <a:t>COCO image ID 000000000064 / COCO128-seg公開変換注釈の輪郭を重ねて表示</a:t>
             </a:r>
           </a:p>
         </p:txBody>
@@ -21861,7 +22462,7 @@
                 <a:ea typeface="Noto Sans CJK JP"/>
                 <a:cs typeface="Noto Sans"/>
               </a:rPr>
-              <a:t>飛行機 airplane</a:t>
+              <a:t>重なり合う自転車 bicycle</a:t>
             </a:r>
           </a:p>
         </p:txBody>
@@ -21922,7 +22523,7 @@
       </p:sp>
       <p:pic>
         <p:nvPicPr>
-          <p:cNvPr id="4" name="Picture 3" descr="81.jpg"/>
+          <p:cNvPr id="4" name="Picture 3" descr="73.jpg"/>
           <p:cNvPicPr>
             <a:picLocks noChangeAspect="1"/>
           </p:cNvPicPr>
@@ -21936,8 +22537,8 @@
         </p:blipFill>
         <p:spPr>
           <a:xfrm>
-            <a:off x="2196711" y="1417320"/>
-            <a:ext cx="4750576" cy="3154680"/>
+            <a:off x="3179504" y="1417320"/>
+            <a:ext cx="2784990" cy="3154680"/>
           </a:xfrm>
           <a:prstGeom prst="rect">
             <a:avLst/>
@@ -22040,7 +22641,7 @@
                 <a:ea typeface="Noto Sans CJK JP"/>
                 <a:cs typeface="Noto Sans"/>
               </a:rPr>
-              <a:t>COCO image ID 000000000081 / COCO128-seg公開変換注釈の輪郭を重ねて表示</a:t>
+              <a:t>COCO image ID 000000000073 / COCO128-seg公開変換注釈の輪郭を重ねて表示</a:t>
             </a:r>
           </a:p>
         </p:txBody>
@@ -22112,7 +22713,7 @@
                 <a:ea typeface="Noto Sans CJK JP"/>
                 <a:cs typeface="Noto Sans"/>
               </a:rPr>
-              <a:t>ケーキとフォーク cake / fork</a:t>
+              <a:t>飛行機 airplane</a:t>
             </a:r>
           </a:p>
         </p:txBody>
@@ -22173,7 +22774,7 @@
       </p:sp>
       <p:pic>
         <p:nvPicPr>
-          <p:cNvPr id="4" name="Picture 3" descr="92.jpg"/>
+          <p:cNvPr id="4" name="Picture 3" descr="81.jpg"/>
           <p:cNvPicPr>
             <a:picLocks noChangeAspect="1"/>
           </p:cNvPicPr>
@@ -22187,8 +22788,8 @@
         </p:blipFill>
         <p:spPr>
           <a:xfrm>
-            <a:off x="2207837" y="1417320"/>
-            <a:ext cx="4728325" cy="3154680"/>
+            <a:off x="2196711" y="1417320"/>
+            <a:ext cx="4750576" cy="3154680"/>
           </a:xfrm>
           <a:prstGeom prst="rect">
             <a:avLst/>
@@ -22291,7 +22892,7 @@
                 <a:ea typeface="Noto Sans CJK JP"/>
                 <a:cs typeface="Noto Sans"/>
               </a:rPr>
-              <a:t>COCO image ID 000000000092 / COCO128-seg公開変換注釈の輪郭を重ねて表示</a:t>
+              <a:t>COCO image ID 000000000081 / COCO128-seg公開変換注釈の輪郭を重ねて表示</a:t>
             </a:r>
           </a:p>
         </p:txBody>
@@ -22363,7 +22964,7 @@
                 <a:ea typeface="Noto Sans CJK JP"/>
                 <a:cs typeface="Noto Sans"/>
               </a:rPr>
-              <a:t>野球の人と道具 person / bat / glove</a:t>
+              <a:t>ケーキとフォーク cake / fork</a:t>
             </a:r>
           </a:p>
         </p:txBody>
@@ -22424,7 +23025,7 @@
       </p:sp>
       <p:pic>
         <p:nvPicPr>
-          <p:cNvPr id="4" name="Picture 3" descr="192.jpg"/>
+          <p:cNvPr id="4" name="Picture 3" descr="92.jpg"/>
           <p:cNvPicPr>
             <a:picLocks noChangeAspect="1"/>
           </p:cNvPicPr>
@@ -22438,8 +23039,8 @@
         </p:blipFill>
         <p:spPr>
           <a:xfrm>
-            <a:off x="2468879" y="1417320"/>
-            <a:ext cx="4206240" cy="3154680"/>
+            <a:off x="2207837" y="1417320"/>
+            <a:ext cx="4728325" cy="3154680"/>
           </a:xfrm>
           <a:prstGeom prst="rect">
             <a:avLst/>
@@ -22542,7 +23143,7 @@
                 <a:ea typeface="Noto Sans CJK JP"/>
                 <a:cs typeface="Noto Sans"/>
               </a:rPr>
-              <a:t>COCO image ID 000000000192 / COCO128-seg公開変換注釈の輪郭を重ねて表示</a:t>
+              <a:t>COCO image ID 000000000092 / COCO128-seg公開変換注釈の輪郭を重ねて表示</a:t>
             </a:r>
           </a:p>
         </p:txBody>
@@ -22614,7 +23215,7 @@
                 <a:ea typeface="Noto Sans CJK JP"/>
                 <a:cs typeface="Noto Sans"/>
               </a:rPr>
-              <a:t>スキーとスノーボード skis / snowboard</a:t>
+              <a:t>野球の人と道具 person / bat / glove</a:t>
             </a:r>
           </a:p>
         </p:txBody>
@@ -22675,7 +23276,7 @@
       </p:sp>
       <p:pic>
         <p:nvPicPr>
-          <p:cNvPr id="4" name="Picture 3" descr="201.jpg"/>
+          <p:cNvPr id="4" name="Picture 3" descr="192.jpg"/>
           <p:cNvPicPr>
             <a:picLocks noChangeAspect="1"/>
           </p:cNvPicPr>
@@ -22689,8 +23290,8 @@
         </p:blipFill>
         <p:spPr>
           <a:xfrm>
-            <a:off x="2213360" y="1417319"/>
-            <a:ext cx="4717278" cy="3154680"/>
+            <a:off x="2468879" y="1417320"/>
+            <a:ext cx="4206240" cy="3154680"/>
           </a:xfrm>
           <a:prstGeom prst="rect">
             <a:avLst/>
@@ -22793,7 +23394,7 @@
                 <a:ea typeface="Noto Sans CJK JP"/>
                 <a:cs typeface="Noto Sans"/>
               </a:rPr>
-              <a:t>COCO image ID 000000000201 / COCO128-seg公開変換注釈の輪郭を重ねて表示</a:t>
+              <a:t>COCO image ID 000000000192 / COCO128-seg公開変換注釈の輪郭を重ねて表示</a:t>
             </a:r>
           </a:p>
         </p:txBody>
@@ -22865,7 +23466,7 @@
                 <a:ea typeface="Noto Sans CJK JP"/>
                 <a:cs typeface="Noto Sans"/>
               </a:rPr>
-              <a:t>前後に重なるゾウ elephant</a:t>
+              <a:t>スキーとスノーボード skis / snowboard</a:t>
             </a:r>
           </a:p>
         </p:txBody>
@@ -22926,7 +23527,7 @@
       </p:sp>
       <p:pic>
         <p:nvPicPr>
-          <p:cNvPr id="4" name="Picture 3" descr="263.jpg"/>
+          <p:cNvPr id="4" name="Picture 3" descr="201.jpg"/>
           <p:cNvPicPr>
             <a:picLocks noChangeAspect="1"/>
           </p:cNvPicPr>
@@ -22940,8 +23541,8 @@
         </p:blipFill>
         <p:spPr>
           <a:xfrm>
-            <a:off x="3115425" y="1417320"/>
-            <a:ext cx="2913149" cy="3154680"/>
+            <a:off x="2213360" y="1417319"/>
+            <a:ext cx="4717278" cy="3154680"/>
           </a:xfrm>
           <a:prstGeom prst="rect">
             <a:avLst/>
@@ -23044,7 +23645,7 @@
                 <a:ea typeface="Noto Sans CJK JP"/>
                 <a:cs typeface="Noto Sans"/>
               </a:rPr>
-              <a:t>COCO image ID 000000000263 / COCO128-seg公開変換注釈の輪郭を重ねて表示</a:t>
+              <a:t>COCO image ID 000000000201 / COCO128-seg公開変換注釈の輪郭を重ねて表示</a:t>
             </a:r>
           </a:p>
         </p:txBody>
@@ -23436,140 +24037,14 @@
                 <a:ea typeface="Noto Sans CJK JP"/>
                 <a:cs typeface="Noto Sans"/>
               </a:rPr>
-              <a:t>全80カテゴリ（1/4）</a:t>
+              <a:t>前後に重なるゾウ elephant</a:t>
             </a:r>
           </a:p>
         </p:txBody>
       </p:sp>
       <p:sp>
         <p:nvSpPr>
-          <p:cNvPr id="3" name="Text Placeholder 2"/>
-          <p:cNvSpPr>
-            <a:spLocks noGrp="1"/>
-          </p:cNvSpPr>
-          <p:nvPr>
-            <p:ph type="body" idx="1"/>
-          </p:nvPr>
-        </p:nvSpPr>
-        <p:spPr>
-          <a:xfrm>
-            <a:off x="594360" y="1508760"/>
-            <a:ext cx="7955279" cy="3017520"/>
-          </a:xfrm>
-        </p:spPr>
-        <p:txBody>
-          <a:bodyPr wrap="square" anchor="t" tIns="91440" bIns="91440"/>
-          <a:lstStyle/>
-          <a:p>
-            <a:pPr algn="l" lvl="0" marL="457200" indent="-355600">
-              <a:lnSpc>
-                <a:spcPct val="115000"/>
-              </a:lnSpc>
-              <a:spcBef>
-                <a:spcPts val="0"/>
-              </a:spcBef>
-              <a:spcAft>
-                <a:spcPts val="800"/>
-              </a:spcAft>
-              <a:buSzPct val="57826"/>
-              <a:buFont typeface="Noto Sans CJK JP"/>
-              <a:buChar char="●"/>
-              <a:defRPr lang="ja-JP" sz="2300" b="0">
-                <a:solidFill>
-                  <a:srgbClr val="303437"/>
-                </a:solidFill>
-                <a:latin typeface="Noto Sans"/>
-                <a:ea typeface="Noto Sans CJK JP"/>
-                <a:cs typeface="Noto Sans"/>
-              </a:defRPr>
-            </a:pPr>
-            <a:r>
-              <a:rPr lang="ja-JP" sz="2300" b="0">
-                <a:solidFill>
-                  <a:srgbClr val="303437"/>
-                </a:solidFill>
-                <a:latin typeface="Noto Sans"/>
-                <a:ea typeface="Noto Sans CJK JP"/>
-                <a:cs typeface="Noto Sans"/>
-              </a:rPr>
-              <a:t>person（1カテゴリ）: person</a:t>
-            </a:r>
-          </a:p>
-          <a:p>
-            <a:pPr algn="l" lvl="0" marL="457200" indent="-355600">
-              <a:lnSpc>
-                <a:spcPct val="115000"/>
-              </a:lnSpc>
-              <a:spcBef>
-                <a:spcPts val="0"/>
-              </a:spcBef>
-              <a:spcAft>
-                <a:spcPts val="800"/>
-              </a:spcAft>
-              <a:buSzPct val="57826"/>
-              <a:buFont typeface="Noto Sans CJK JP"/>
-              <a:buChar char="●"/>
-              <a:defRPr lang="ja-JP" sz="2300" b="0">
-                <a:solidFill>
-                  <a:srgbClr val="303437"/>
-                </a:solidFill>
-                <a:latin typeface="Noto Sans"/>
-                <a:ea typeface="Noto Sans CJK JP"/>
-                <a:cs typeface="Noto Sans"/>
-              </a:defRPr>
-            </a:pPr>
-            <a:r>
-              <a:rPr lang="ja-JP" sz="2300" b="0">
-                <a:solidFill>
-                  <a:srgbClr val="303437"/>
-                </a:solidFill>
-                <a:latin typeface="Noto Sans"/>
-                <a:ea typeface="Noto Sans CJK JP"/>
-                <a:cs typeface="Noto Sans"/>
-              </a:rPr>
-              <a:t>vehicle（8カテゴリ）: bicycle, car, motorcycle, airplane, bus, train, truck, boat</a:t>
-            </a:r>
-          </a:p>
-          <a:p>
-            <a:pPr algn="l" lvl="0" marL="457200" indent="-355600">
-              <a:lnSpc>
-                <a:spcPct val="115000"/>
-              </a:lnSpc>
-              <a:spcBef>
-                <a:spcPts val="0"/>
-              </a:spcBef>
-              <a:spcAft>
-                <a:spcPts val="800"/>
-              </a:spcAft>
-              <a:buSzPct val="57826"/>
-              <a:buFont typeface="Noto Sans CJK JP"/>
-              <a:buChar char="●"/>
-              <a:defRPr lang="ja-JP" sz="2300" b="0">
-                <a:solidFill>
-                  <a:srgbClr val="303437"/>
-                </a:solidFill>
-                <a:latin typeface="Noto Sans"/>
-                <a:ea typeface="Noto Sans CJK JP"/>
-                <a:cs typeface="Noto Sans"/>
-              </a:defRPr>
-            </a:pPr>
-            <a:r>
-              <a:rPr lang="ja-JP" sz="2300" b="0">
-                <a:solidFill>
-                  <a:srgbClr val="303437"/>
-                </a:solidFill>
-                <a:latin typeface="Noto Sans"/>
-                <a:ea typeface="Noto Sans CJK JP"/>
-                <a:cs typeface="Noto Sans"/>
-              </a:rPr>
-              <a:t>outdoor（5カテゴリ）: traffic light, fire hydrant, stop sign, parking meter, bench</a:t>
-            </a:r>
-          </a:p>
-        </p:txBody>
-      </p:sp>
-      <p:sp>
-        <p:nvSpPr>
-          <p:cNvPr id="4" name="Title 3"/>
+          <p:cNvPr id="3" name="Title 2"/>
           <p:cNvSpPr>
             <a:spLocks noGrp="1"/>
           </p:cNvSpPr>
@@ -23616,11 +24091,35 @@
                 <a:ea typeface="Noto Sans CJK JP"/>
                 <a:cs typeface="Noto Sans"/>
               </a:rPr>
-              <a:t>Appendix 4 全80カテゴリと利用条件</a:t>
+              <a:t>Appendix 3 追加の領域注釈例</a:t>
             </a:r>
           </a:p>
         </p:txBody>
       </p:sp>
+      <p:pic>
+        <p:nvPicPr>
+          <p:cNvPr id="4" name="Picture 3" descr="263.jpg"/>
+          <p:cNvPicPr>
+            <a:picLocks noChangeAspect="1"/>
+          </p:cNvPicPr>
+          <p:nvPr/>
+        </p:nvPicPr>
+        <p:blipFill>
+          <a:blip r:embed="rId2"/>
+          <a:stretch>
+            <a:fillRect/>
+          </a:stretch>
+        </p:blipFill>
+        <p:spPr>
+          <a:xfrm>
+            <a:off x="3115425" y="1417320"/>
+            <a:ext cx="2913149" cy="3154680"/>
+          </a:xfrm>
+          <a:prstGeom prst="rect">
+            <a:avLst/>
+          </a:prstGeom>
+        </p:spPr>
+      </p:pic>
       <p:sp>
         <p:nvSpPr>
           <p:cNvPr id="5" name="TextBox 4"/>
@@ -23682,10 +24181,32 @@
                 <a:latin typeface="Noto Sans"/>
                 <a:ea typeface="Noto Sans CJK JP"/>
                 <a:cs typeface="Noto Sans"/>
-                <a:hlinkClick r:id="rId2"/>
-              </a:rPr>
-              <a:t>https://github.com/cocodataset/panopticapi/blob/master/panoptic_coco_categories.json</a:t>
-            </a:r>
+                <a:hlinkClick r:id="rId3"/>
+              </a:rPr>
+              <a:t>https://github.com/ultralytics/assets/releases/download/v0.0.0/coco128-seg.zip</a:t>
+            </a:r>
+          </a:p>
+          <a:p>
+            <a:pPr algn="l">
+              <a:lnSpc>
+                <a:spcPct val="115000"/>
+              </a:lnSpc>
+              <a:spcBef>
+                <a:spcPts val="0"/>
+              </a:spcBef>
+              <a:spcAft>
+                <a:spcPts val="0"/>
+              </a:spcAft>
+              <a:buNone/>
+              <a:defRPr lang="ja-JP" sz="800" b="0">
+                <a:solidFill>
+                  <a:srgbClr val="626669"/>
+                </a:solidFill>
+                <a:latin typeface="Noto Sans"/>
+                <a:ea typeface="Noto Sans CJK JP"/>
+                <a:cs typeface="Noto Sans"/>
+              </a:defRPr>
+            </a:pPr>
             <a:r>
               <a:rPr lang="ja-JP" sz="800" b="0">
                 <a:solidFill>
@@ -23695,7 +24216,7 @@
                 <a:ea typeface="Noto Sans CJK JP"/>
                 <a:cs typeface="Noto Sans"/>
               </a:rPr>
-              <a:t> / isthing=1の全80カテゴリ</a:t>
+              <a:t>COCO image ID 000000000263 / COCO128-seg公開変換注釈の輪郭を重ねて表示</a:t>
             </a:r>
           </a:p>
         </p:txBody>
@@ -23767,7 +24288,7 @@
                 <a:ea typeface="Noto Sans CJK JP"/>
                 <a:cs typeface="Noto Sans"/>
               </a:rPr>
-              <a:t>全80カテゴリ（2/4）</a:t>
+              <a:t>全80カテゴリ（1/4）</a:t>
             </a:r>
           </a:p>
         </p:txBody>
@@ -23823,7 +24344,7 @@
                 <a:ea typeface="Noto Sans CJK JP"/>
                 <a:cs typeface="Noto Sans"/>
               </a:rPr>
-              <a:t>animal（10カテゴリ）: bird, cat, dog, horse, sheep, cow, elephant, bear, zebra, giraffe</a:t>
+              <a:t>person（1カテゴリ）: person</a:t>
             </a:r>
           </a:p>
           <a:p>
@@ -23858,7 +24379,7 @@
                 <a:ea typeface="Noto Sans CJK JP"/>
                 <a:cs typeface="Noto Sans"/>
               </a:rPr>
-              <a:t>accessory（5カテゴリ）: backpack, umbrella, handbag, tie, suitcase</a:t>
+              <a:t>vehicle（8カテゴリ）: bicycle, car, motorcycle, airplane, bus, train, truck, boat</a:t>
             </a:r>
           </a:p>
           <a:p>
@@ -23893,7 +24414,7 @@
                 <a:ea typeface="Noto Sans CJK JP"/>
                 <a:cs typeface="Noto Sans"/>
               </a:rPr>
-              <a:t>sports（10カテゴリ）: frisbee, skis, snowboard, sports ball, kite, baseball bat, baseball glove, skateboard, surfboard, tennis racket</a:t>
+              <a:t>outdoor（5カテゴリ）: traffic light, fire hydrant, stop sign, parking meter, bench</a:t>
             </a:r>
           </a:p>
         </p:txBody>
@@ -24098,7 +24619,7 @@
                 <a:ea typeface="Noto Sans CJK JP"/>
                 <a:cs typeface="Noto Sans"/>
               </a:rPr>
-              <a:t>全80カテゴリ（3/4）</a:t>
+              <a:t>全80カテゴリ（2/4）</a:t>
             </a:r>
           </a:p>
         </p:txBody>
@@ -24154,7 +24675,7 @@
                 <a:ea typeface="Noto Sans CJK JP"/>
                 <a:cs typeface="Noto Sans"/>
               </a:rPr>
-              <a:t>kitchen（7カテゴリ）: bottle, wine glass, cup, fork, knife, spoon, bowl</a:t>
+              <a:t>animal（10カテゴリ）: bird, cat, dog, horse, sheep, cow, elephant, bear, zebra, giraffe</a:t>
             </a:r>
           </a:p>
           <a:p>
@@ -24189,7 +24710,7 @@
                 <a:ea typeface="Noto Sans CJK JP"/>
                 <a:cs typeface="Noto Sans"/>
               </a:rPr>
-              <a:t>food（10カテゴリ）: banana, apple, sandwich, orange, broccoli, carrot, hot dog, pizza, donut, cake</a:t>
+              <a:t>accessory（5カテゴリ）: backpack, umbrella, handbag, tie, suitcase</a:t>
             </a:r>
           </a:p>
           <a:p>
@@ -24224,7 +24745,7 @@
                 <a:ea typeface="Noto Sans CJK JP"/>
                 <a:cs typeface="Noto Sans"/>
               </a:rPr>
-              <a:t>furniture（6カテゴリ）: chair, couch, potted plant, bed, dining table, toilet</a:t>
+              <a:t>sports（10カテゴリ）: frisbee, skis, snowboard, sports ball, kite, baseball bat, baseball glove, skateboard, surfboard, tennis racket</a:t>
             </a:r>
           </a:p>
         </p:txBody>
@@ -24429,7 +24950,7 @@
                 <a:ea typeface="Noto Sans CJK JP"/>
                 <a:cs typeface="Noto Sans"/>
               </a:rPr>
-              <a:t>全80カテゴリ（4/4）</a:t>
+              <a:t>全80カテゴリ（3/4）</a:t>
             </a:r>
           </a:p>
         </p:txBody>
@@ -24485,7 +25006,7 @@
                 <a:ea typeface="Noto Sans CJK JP"/>
                 <a:cs typeface="Noto Sans"/>
               </a:rPr>
-              <a:t>electronic（6カテゴリ）: tv, laptop, mouse, remote, keyboard, cell phone</a:t>
+              <a:t>kitchen（7カテゴリ）: bottle, wine glass, cup, fork, knife, spoon, bowl</a:t>
             </a:r>
           </a:p>
           <a:p>
@@ -24520,7 +25041,7 @@
                 <a:ea typeface="Noto Sans CJK JP"/>
                 <a:cs typeface="Noto Sans"/>
               </a:rPr>
-              <a:t>appliance（5カテゴリ）: microwave, oven, toaster, sink, refrigerator</a:t>
+              <a:t>food（10カテゴリ）: banana, apple, sandwich, orange, broccoli, carrot, hot dog, pizza, donut, cake</a:t>
             </a:r>
           </a:p>
           <a:p>
@@ -24555,7 +25076,7 @@
                 <a:ea typeface="Noto Sans CJK JP"/>
                 <a:cs typeface="Noto Sans"/>
               </a:rPr>
-              <a:t>indoor（7カテゴリ）: book, clock, vase, scissors, teddy bear, hair drier, toothbrush</a:t>
+              <a:t>furniture（6カテゴリ）: chair, couch, potted plant, bed, dining table, toilet</a:t>
             </a:r>
           </a:p>
         </p:txBody>
@@ -24760,7 +25281,7 @@
                 <a:ea typeface="Noto Sans CJK JP"/>
                 <a:cs typeface="Noto Sans"/>
               </a:rPr>
-              <a:t>画像・注釈・ソフトウェアの利用条件</a:t>
+              <a:t>全80カテゴリ（4/4）</a:t>
             </a:r>
           </a:p>
         </p:txBody>
@@ -24795,28 +25316,28 @@
               <a:spcAft>
                 <a:spcPts val="800"/>
               </a:spcAft>
-              <a:buSzPct val="55417"/>
+              <a:buSzPct val="57826"/>
               <a:buFont typeface="Noto Sans CJK JP"/>
               <a:buChar char="●"/>
-              <a:defRPr lang="ja-JP" sz="2400" b="0">
-                <a:solidFill>
-                  <a:srgbClr val="303437"/>
-                </a:solidFill>
-                <a:latin typeface="Noto Sans"/>
-                <a:ea typeface="Noto Sans CJK JP"/>
-                <a:cs typeface="Noto Sans"/>
-              </a:defRPr>
-            </a:pPr>
-            <a:r>
-              <a:rPr lang="ja-JP" sz="2400" b="0">
-                <a:solidFill>
-                  <a:srgbClr val="303437"/>
-                </a:solidFill>
-                <a:latin typeface="Noto Sans"/>
-                <a:ea typeface="Noto Sans CJK JP"/>
-                <a:cs typeface="Noto Sans"/>
-              </a:rPr>
-              <a:t>注釈とWebサイトはCOCO ConsortiumのCC BY 4.0で提供される。</a:t>
+              <a:defRPr lang="ja-JP" sz="2300" b="0">
+                <a:solidFill>
+                  <a:srgbClr val="303437"/>
+                </a:solidFill>
+                <a:latin typeface="Noto Sans"/>
+                <a:ea typeface="Noto Sans CJK JP"/>
+                <a:cs typeface="Noto Sans"/>
+              </a:defRPr>
+            </a:pPr>
+            <a:r>
+              <a:rPr lang="ja-JP" sz="2300" b="0">
+                <a:solidFill>
+                  <a:srgbClr val="303437"/>
+                </a:solidFill>
+                <a:latin typeface="Noto Sans"/>
+                <a:ea typeface="Noto Sans CJK JP"/>
+                <a:cs typeface="Noto Sans"/>
+              </a:rPr>
+              <a:t>electronic（6カテゴリ）: tv, laptop, mouse, remote, keyboard, cell phone</a:t>
             </a:r>
           </a:p>
           <a:p>
@@ -24830,28 +25351,28 @@
               <a:spcAft>
                 <a:spcPts val="800"/>
               </a:spcAft>
-              <a:buSzPct val="55417"/>
+              <a:buSzPct val="57826"/>
               <a:buFont typeface="Noto Sans CJK JP"/>
               <a:buChar char="●"/>
-              <a:defRPr lang="ja-JP" sz="2400" b="0">
-                <a:solidFill>
-                  <a:srgbClr val="303437"/>
-                </a:solidFill>
-                <a:latin typeface="Noto Sans"/>
-                <a:ea typeface="Noto Sans CJK JP"/>
-                <a:cs typeface="Noto Sans"/>
-              </a:defRPr>
-            </a:pPr>
-            <a:r>
-              <a:rPr lang="ja-JP" sz="2400" b="0">
-                <a:solidFill>
-                  <a:srgbClr val="303437"/>
-                </a:solidFill>
-                <a:latin typeface="Noto Sans"/>
-                <a:ea typeface="Noto Sans CJK JP"/>
-                <a:cs typeface="Noto Sans"/>
-              </a:rPr>
-              <a:t>画像の著作権は撮影者側にあり、Flickrの画像ごとの利用条件に従う。</a:t>
+              <a:defRPr lang="ja-JP" sz="2300" b="0">
+                <a:solidFill>
+                  <a:srgbClr val="303437"/>
+                </a:solidFill>
+                <a:latin typeface="Noto Sans"/>
+                <a:ea typeface="Noto Sans CJK JP"/>
+                <a:cs typeface="Noto Sans"/>
+              </a:defRPr>
+            </a:pPr>
+            <a:r>
+              <a:rPr lang="ja-JP" sz="2300" b="0">
+                <a:solidFill>
+                  <a:srgbClr val="303437"/>
+                </a:solidFill>
+                <a:latin typeface="Noto Sans"/>
+                <a:ea typeface="Noto Sans CJK JP"/>
+                <a:cs typeface="Noto Sans"/>
+              </a:rPr>
+              <a:t>appliance（5カテゴリ）: microwave, oven, toaster, sink, refrigerator</a:t>
             </a:r>
           </a:p>
           <a:p>
@@ -24865,28 +25386,28 @@
               <a:spcAft>
                 <a:spcPts val="800"/>
               </a:spcAft>
-              <a:buSzPct val="55417"/>
+              <a:buSzPct val="57826"/>
               <a:buFont typeface="Noto Sans CJK JP"/>
               <a:buChar char="●"/>
-              <a:defRPr lang="ja-JP" sz="2400" b="0">
-                <a:solidFill>
-                  <a:srgbClr val="303437"/>
-                </a:solidFill>
-                <a:latin typeface="Noto Sans"/>
-                <a:ea typeface="Noto Sans CJK JP"/>
-                <a:cs typeface="Noto Sans"/>
-              </a:defRPr>
-            </a:pPr>
-            <a:r>
-              <a:rPr lang="ja-JP" sz="2400" b="0">
-                <a:solidFill>
-                  <a:srgbClr val="303437"/>
-                </a:solidFill>
-                <a:latin typeface="Noto Sans"/>
-                <a:ea typeface="Noto Sans CJK JP"/>
-                <a:cs typeface="Noto Sans"/>
-              </a:rPr>
-              <a:t>公式APIはBSD形式の利用条件を持つ。画像・注釈・コードで利用条件が異なる [1]。</a:t>
+              <a:defRPr lang="ja-JP" sz="2300" b="0">
+                <a:solidFill>
+                  <a:srgbClr val="303437"/>
+                </a:solidFill>
+                <a:latin typeface="Noto Sans"/>
+                <a:ea typeface="Noto Sans CJK JP"/>
+                <a:cs typeface="Noto Sans"/>
+              </a:defRPr>
+            </a:pPr>
+            <a:r>
+              <a:rPr lang="ja-JP" sz="2300" b="0">
+                <a:solidFill>
+                  <a:srgbClr val="303437"/>
+                </a:solidFill>
+                <a:latin typeface="Noto Sans"/>
+                <a:ea typeface="Noto Sans CJK JP"/>
+                <a:cs typeface="Noto Sans"/>
+              </a:rPr>
+              <a:t>indoor（7カテゴリ）: book, clock, vase, scissors, teddy bear, hair drier, toothbrush</a:t>
             </a:r>
           </a:p>
         </p:txBody>
@@ -25008,41 +25529,18 @@
                 <a:cs typeface="Noto Sans"/>
                 <a:hlinkClick r:id="rId2"/>
               </a:rPr>
-              <a:t>https://cocodataset.org/#termsofuse</a:t>
-            </a:r>
-          </a:p>
-          <a:p>
-            <a:pPr algn="l">
-              <a:lnSpc>
-                <a:spcPct val="115000"/>
-              </a:lnSpc>
-              <a:spcBef>
-                <a:spcPts val="0"/>
-              </a:spcBef>
-              <a:spcAft>
-                <a:spcPts val="0"/>
-              </a:spcAft>
-              <a:buNone/>
-              <a:defRPr lang="ja-JP" sz="800" b="0">
+              <a:t>https://github.com/cocodataset/panopticapi/blob/master/panoptic_coco_categories.json</a:t>
+            </a:r>
+            <a:r>
+              <a:rPr lang="ja-JP" sz="800" b="0">
                 <a:solidFill>
                   <a:srgbClr val="626669"/>
                 </a:solidFill>
                 <a:latin typeface="Noto Sans"/>
                 <a:ea typeface="Noto Sans CJK JP"/>
                 <a:cs typeface="Noto Sans"/>
-              </a:defRPr>
-            </a:pPr>
-            <a:r>
-              <a:rPr lang="ja-JP" sz="800" b="0">
-                <a:solidFill>
-                  <a:srgbClr val="626669"/>
-                </a:solidFill>
-                <a:latin typeface="Noto Sans"/>
-                <a:ea typeface="Noto Sans CJK JP"/>
-                <a:cs typeface="Noto Sans"/>
-                <a:hlinkClick r:id="rId3"/>
-              </a:rPr>
-              <a:t>https://github.com/cocodataset/cocoapi/blob/master/license.txt</a:t>
+              </a:rPr>
+              <a:t> / isthing=1の全80カテゴリ</a:t>
             </a:r>
           </a:p>
         </p:txBody>
@@ -25114,14 +25612,140 @@
                 <a:ea typeface="Noto Sans CJK JP"/>
                 <a:cs typeface="Noto Sans"/>
               </a:rPr>
-              <a:t>参考文献</a:t>
+              <a:t>画像・注釈・ソフトウェアの利用条件</a:t>
             </a:r>
           </a:p>
         </p:txBody>
       </p:sp>
       <p:sp>
         <p:nvSpPr>
-          <p:cNvPr id="3" name="Title 2"/>
+          <p:cNvPr id="3" name="Text Placeholder 2"/>
+          <p:cNvSpPr>
+            <a:spLocks noGrp="1"/>
+          </p:cNvSpPr>
+          <p:nvPr>
+            <p:ph type="body" idx="1"/>
+          </p:nvPr>
+        </p:nvSpPr>
+        <p:spPr>
+          <a:xfrm>
+            <a:off x="594360" y="1508760"/>
+            <a:ext cx="7955279" cy="3017520"/>
+          </a:xfrm>
+        </p:spPr>
+        <p:txBody>
+          <a:bodyPr wrap="square" anchor="t" tIns="91440" bIns="91440"/>
+          <a:lstStyle/>
+          <a:p>
+            <a:pPr algn="l" lvl="0" marL="457200" indent="-355600">
+              <a:lnSpc>
+                <a:spcPct val="115000"/>
+              </a:lnSpc>
+              <a:spcBef>
+                <a:spcPts val="0"/>
+              </a:spcBef>
+              <a:spcAft>
+                <a:spcPts val="800"/>
+              </a:spcAft>
+              <a:buSzPct val="55417"/>
+              <a:buFont typeface="Noto Sans CJK JP"/>
+              <a:buChar char="●"/>
+              <a:defRPr lang="ja-JP" sz="2400" b="0">
+                <a:solidFill>
+                  <a:srgbClr val="303437"/>
+                </a:solidFill>
+                <a:latin typeface="Noto Sans"/>
+                <a:ea typeface="Noto Sans CJK JP"/>
+                <a:cs typeface="Noto Sans"/>
+              </a:defRPr>
+            </a:pPr>
+            <a:r>
+              <a:rPr lang="ja-JP" sz="2400" b="0">
+                <a:solidFill>
+                  <a:srgbClr val="303437"/>
+                </a:solidFill>
+                <a:latin typeface="Noto Sans"/>
+                <a:ea typeface="Noto Sans CJK JP"/>
+                <a:cs typeface="Noto Sans"/>
+              </a:rPr>
+              <a:t>注釈とWebサイトはCOCO ConsortiumのCC BY 4.0で提供される。</a:t>
+            </a:r>
+          </a:p>
+          <a:p>
+            <a:pPr algn="l" lvl="0" marL="457200" indent="-355600">
+              <a:lnSpc>
+                <a:spcPct val="115000"/>
+              </a:lnSpc>
+              <a:spcBef>
+                <a:spcPts val="0"/>
+              </a:spcBef>
+              <a:spcAft>
+                <a:spcPts val="800"/>
+              </a:spcAft>
+              <a:buSzPct val="55417"/>
+              <a:buFont typeface="Noto Sans CJK JP"/>
+              <a:buChar char="●"/>
+              <a:defRPr lang="ja-JP" sz="2400" b="0">
+                <a:solidFill>
+                  <a:srgbClr val="303437"/>
+                </a:solidFill>
+                <a:latin typeface="Noto Sans"/>
+                <a:ea typeface="Noto Sans CJK JP"/>
+                <a:cs typeface="Noto Sans"/>
+              </a:defRPr>
+            </a:pPr>
+            <a:r>
+              <a:rPr lang="ja-JP" sz="2400" b="0">
+                <a:solidFill>
+                  <a:srgbClr val="303437"/>
+                </a:solidFill>
+                <a:latin typeface="Noto Sans"/>
+                <a:ea typeface="Noto Sans CJK JP"/>
+                <a:cs typeface="Noto Sans"/>
+              </a:rPr>
+              <a:t>画像の著作権は撮影者側にあり、Flickrの画像ごとの利用条件に従う。</a:t>
+            </a:r>
+          </a:p>
+          <a:p>
+            <a:pPr algn="l" lvl="0" marL="457200" indent="-355600">
+              <a:lnSpc>
+                <a:spcPct val="115000"/>
+              </a:lnSpc>
+              <a:spcBef>
+                <a:spcPts val="0"/>
+              </a:spcBef>
+              <a:spcAft>
+                <a:spcPts val="800"/>
+              </a:spcAft>
+              <a:buSzPct val="55417"/>
+              <a:buFont typeface="Noto Sans CJK JP"/>
+              <a:buChar char="●"/>
+              <a:defRPr lang="ja-JP" sz="2400" b="0">
+                <a:solidFill>
+                  <a:srgbClr val="303437"/>
+                </a:solidFill>
+                <a:latin typeface="Noto Sans"/>
+                <a:ea typeface="Noto Sans CJK JP"/>
+                <a:cs typeface="Noto Sans"/>
+              </a:defRPr>
+            </a:pPr>
+            <a:r>
+              <a:rPr lang="ja-JP" sz="2400" b="0">
+                <a:solidFill>
+                  <a:srgbClr val="303437"/>
+                </a:solidFill>
+                <a:latin typeface="Noto Sans"/>
+                <a:ea typeface="Noto Sans CJK JP"/>
+                <a:cs typeface="Noto Sans"/>
+              </a:rPr>
+              <a:t>公式APIはBSD形式の利用条件を持つ。画像・注釈・コードで利用条件が異なる [1]。</a:t>
+            </a:r>
+          </a:p>
+        </p:txBody>
+      </p:sp>
+      <p:sp>
+        <p:nvSpPr>
+          <p:cNvPr id="4" name="Title 3"/>
           <p:cNvSpPr>
             <a:spLocks noGrp="1"/>
           </p:cNvSpPr>
@@ -25168,63 +25792,7 @@
                 <a:ea typeface="Noto Sans CJK JP"/>
                 <a:cs typeface="Noto Sans"/>
               </a:rPr>
-              <a:t>Appendix 5 参考文献</a:t>
-            </a:r>
-          </a:p>
-        </p:txBody>
-      </p:sp>
-      <p:sp>
-        <p:nvSpPr>
-          <p:cNvPr id="4" name="TextBox 3"/>
-          <p:cNvSpPr txBox="1"/>
-          <p:nvPr/>
-        </p:nvSpPr>
-        <p:spPr>
-          <a:xfrm>
-            <a:off x="594360" y="1234440"/>
-            <a:ext cx="7955279" cy="292608"/>
-          </a:xfrm>
-          <a:prstGeom prst="rect">
-            <a:avLst/>
-          </a:prstGeom>
-          <a:noFill/>
-        </p:spPr>
-        <p:txBody>
-          <a:bodyPr wrap="square" lIns="0" rIns="0" tIns="0" bIns="0" anchor="t">
-            <a:spAutoFit/>
-          </a:bodyPr>
-          <a:lstStyle/>
-          <a:p>
-            <a:pPr>
-              <a:lnSpc>
-                <a:spcPct val="105000"/>
-              </a:lnSpc>
-              <a:spcBef>
-                <a:spcPts val="0"/>
-              </a:spcBef>
-              <a:spcAft>
-                <a:spcPts val="0"/>
-              </a:spcAft>
-              <a:buNone/>
-              <a:defRPr sz="2000" b="0" lang="ja-JP">
-                <a:solidFill>
-                  <a:srgbClr val="303437"/>
-                </a:solidFill>
-                <a:latin typeface="Noto Sans"/>
-                <a:ea typeface="Noto Sans CJK JP"/>
-                <a:cs typeface="Noto Sans"/>
-              </a:defRPr>
-            </a:pPr>
-            <a:r>
-              <a:rPr sz="2000" b="0" lang="ja-JP">
-                <a:solidFill>
-                  <a:srgbClr val="303437"/>
-                </a:solidFill>
-                <a:latin typeface="Noto Sans"/>
-                <a:ea typeface="Noto Sans CJK JP"/>
-                <a:cs typeface="Noto Sans"/>
-              </a:rPr>
-              <a:t>Microsoft COCO: Common Objects in Context</a:t>
+              <a:t>Appendix 4 全80カテゴリと利用条件</a:t>
             </a:r>
           </a:p>
         </p:txBody>
@@ -25237,8 +25805,8 @@
         </p:nvSpPr>
         <p:spPr>
           <a:xfrm>
-            <a:off x="594360" y="1655064"/>
-            <a:ext cx="7955279" cy="594360"/>
+            <a:off x="502920" y="4754880"/>
+            <a:ext cx="8183879" cy="320040"/>
           </a:xfrm>
           <a:prstGeom prst="rect">
             <a:avLst/>
@@ -25246,23 +25814,23 @@
           <a:noFill/>
         </p:spPr>
         <p:txBody>
-          <a:bodyPr wrap="square" lIns="0" rIns="0" tIns="0" bIns="0" anchor="t">
+          <a:bodyPr wrap="square" anchor="t" lIns="0" rIns="0" tIns="0" bIns="0">
             <a:spAutoFit/>
           </a:bodyPr>
           <a:lstStyle/>
           <a:p>
-            <a:pPr>
-              <a:lnSpc>
-                <a:spcPct val="105000"/>
-              </a:lnSpc>
-              <a:spcBef>
-                <a:spcPts val="0"/>
-              </a:spcBef>
-              <a:spcAft>
-                <a:spcPts val="0"/>
-              </a:spcAft>
-              <a:buNone/>
-              <a:defRPr sz="1300" b="0" lang="ja-JP">
+            <a:pPr algn="l">
+              <a:lnSpc>
+                <a:spcPct val="115000"/>
+              </a:lnSpc>
+              <a:spcBef>
+                <a:spcPts val="0"/>
+              </a:spcBef>
+              <a:spcAft>
+                <a:spcPts val="0"/>
+              </a:spcAft>
+              <a:buNone/>
+              <a:defRPr lang="ja-JP" sz="800" b="0">
                 <a:solidFill>
                   <a:srgbClr val="626669"/>
                 </a:solidFill>
@@ -25272,7 +25840,7 @@
               </a:defRPr>
             </a:pPr>
             <a:r>
-              <a:rPr sz="1300" b="0" lang="ja-JP">
+              <a:rPr lang="ja-JP" sz="800" b="0">
                 <a:solidFill>
                   <a:srgbClr val="626669"/>
                 </a:solidFill>
@@ -25280,411 +25848,53 @@
                 <a:ea typeface="Noto Sans CJK JP"/>
                 <a:cs typeface="Noto Sans"/>
               </a:rPr>
-              <a:t>Tsung-Yi Lin et al. (2014).</a:t>
-            </a:r>
-          </a:p>
-          <a:p>
-            <a:pPr>
-              <a:lnSpc>
-                <a:spcPct val="105000"/>
-              </a:lnSpc>
-              <a:spcBef>
-                <a:spcPts val="0"/>
-              </a:spcBef>
-              <a:spcAft>
-                <a:spcPts val="0"/>
-              </a:spcAft>
-              <a:buNone/>
-              <a:defRPr sz="1300" b="0" lang="ja-JP">
+              <a:t>[1] </a:t>
+            </a:r>
+            <a:r>
+              <a:rPr lang="ja-JP" sz="800" b="0">
                 <a:solidFill>
                   <a:srgbClr val="626669"/>
                 </a:solidFill>
                 <a:latin typeface="Noto Sans"/>
                 <a:ea typeface="Noto Sans CJK JP"/>
                 <a:cs typeface="Noto Sans"/>
-              </a:defRPr>
-            </a:pPr>
-            <a:r>
-              <a:rPr sz="1300" b="0" lang="ja-JP">
+                <a:hlinkClick r:id="rId2"/>
+              </a:rPr>
+              <a:t>https://cocodataset.org/#termsofuse</a:t>
+            </a:r>
+          </a:p>
+          <a:p>
+            <a:pPr algn="l">
+              <a:lnSpc>
+                <a:spcPct val="115000"/>
+              </a:lnSpc>
+              <a:spcBef>
+                <a:spcPts val="0"/>
+              </a:spcBef>
+              <a:spcAft>
+                <a:spcPts val="0"/>
+              </a:spcAft>
+              <a:buNone/>
+              <a:defRPr lang="ja-JP" sz="800" b="0">
                 <a:solidFill>
                   <a:srgbClr val="626669"/>
                 </a:solidFill>
                 <a:latin typeface="Noto Sans"/>
                 <a:ea typeface="Noto Sans CJK JP"/>
                 <a:cs typeface="Noto Sans"/>
-              </a:rPr>
-              <a:t>European Conference on Computer Vision (ECCV), pp. 740–755.</a:t>
-            </a:r>
-          </a:p>
-        </p:txBody>
-      </p:sp>
-      <p:sp>
-        <p:nvSpPr>
-          <p:cNvPr id="6" name="TextBox 5"/>
-          <p:cNvSpPr txBox="1"/>
-          <p:nvPr/>
-        </p:nvSpPr>
-        <p:spPr>
-          <a:xfrm>
-            <a:off x="594360" y="2194560"/>
-            <a:ext cx="7955279" cy="521207"/>
-          </a:xfrm>
-          <a:prstGeom prst="rect">
-            <a:avLst/>
-          </a:prstGeom>
-          <a:noFill/>
-        </p:spPr>
-        <p:txBody>
-          <a:bodyPr wrap="square" lIns="0" rIns="0" tIns="0" bIns="0" anchor="t">
-            <a:spAutoFit/>
-          </a:bodyPr>
-          <a:lstStyle/>
-          <a:p>
-            <a:pPr>
-              <a:lnSpc>
-                <a:spcPct val="105000"/>
-              </a:lnSpc>
-              <a:spcBef>
-                <a:spcPts val="0"/>
-              </a:spcBef>
-              <a:spcAft>
-                <a:spcPts val="0"/>
-              </a:spcAft>
-              <a:buNone/>
-              <a:defRPr sz="1800" b="0" lang="ja-JP">
-                <a:solidFill>
-                  <a:srgbClr val="303437"/>
-                </a:solidFill>
-                <a:latin typeface="Noto Sans"/>
-                <a:ea typeface="Noto Sans CJK JP"/>
-                <a:cs typeface="Noto Sans"/>
-              </a:defRPr>
-            </a:pPr>
-            <a:r>
-              <a:rPr sz="1800" b="0" lang="ja-JP">
-                <a:solidFill>
-                  <a:srgbClr val="303437"/>
-                </a:solidFill>
-                <a:latin typeface="Noto Sans"/>
-                <a:ea typeface="Noto Sans CJK JP"/>
-                <a:cs typeface="Noto Sans"/>
-              </a:rPr>
-              <a:t>COCOの原著論文。日常場面の画像選定、物体の領域注釈、データの性質と初期評価を報告する。</a:t>
-            </a:r>
-          </a:p>
-        </p:txBody>
-      </p:sp>
-      <p:sp>
-        <p:nvSpPr>
-          <p:cNvPr id="7" name="TextBox 6"/>
-          <p:cNvSpPr txBox="1"/>
-          <p:nvPr/>
-        </p:nvSpPr>
-        <p:spPr>
-          <a:xfrm>
-            <a:off x="594360" y="2916936"/>
-            <a:ext cx="7955279" cy="182880"/>
-          </a:xfrm>
-          <a:prstGeom prst="rect">
-            <a:avLst/>
-          </a:prstGeom>
-          <a:noFill/>
-        </p:spPr>
-        <p:txBody>
-          <a:bodyPr wrap="square" lIns="0" rIns="0" tIns="0" bIns="0" anchor="t">
-            <a:spAutoFit/>
-          </a:bodyPr>
-          <a:lstStyle/>
-          <a:p>
-            <a:pPr>
-              <a:lnSpc>
-                <a:spcPct val="105000"/>
-              </a:lnSpc>
-              <a:spcBef>
-                <a:spcPts val="0"/>
-              </a:spcBef>
-              <a:spcAft>
-                <a:spcPts val="0"/>
-              </a:spcAft>
-              <a:buNone/>
-              <a:defRPr sz="1100" b="0" lang="ja-JP">
+              </a:defRPr>
+            </a:pPr>
+            <a:r>
+              <a:rPr lang="ja-JP" sz="800" b="0">
                 <a:solidFill>
                   <a:srgbClr val="626669"/>
                 </a:solidFill>
                 <a:latin typeface="Noto Sans"/>
                 <a:ea typeface="Noto Sans CJK JP"/>
                 <a:cs typeface="Noto Sans"/>
-              </a:defRPr>
-            </a:pPr>
-            <a:r>
-              <a:rPr sz="1100" b="0" lang="ja-JP">
-                <a:solidFill>
-                  <a:srgbClr val="626669"/>
-                </a:solidFill>
-                <a:latin typeface="Noto Sans"/>
-                <a:ea typeface="Noto Sans CJK JP"/>
-                <a:cs typeface="Noto Sans"/>
-                <a:hlinkClick r:id="rId2"/>
-              </a:rPr>
-              <a:t>https://arxiv.org/abs/1405.0312</a:t>
-            </a:r>
-          </a:p>
-        </p:txBody>
-      </p:sp>
-      <p:sp>
-        <p:nvSpPr>
-          <p:cNvPr id="8" name="TextBox 7"/>
-          <p:cNvSpPr txBox="1"/>
-          <p:nvPr/>
-        </p:nvSpPr>
-        <p:spPr>
-          <a:xfrm>
-            <a:off x="594360" y="3200400"/>
-            <a:ext cx="7955279" cy="292608"/>
-          </a:xfrm>
-          <a:prstGeom prst="rect">
-            <a:avLst/>
-          </a:prstGeom>
-          <a:noFill/>
-        </p:spPr>
-        <p:txBody>
-          <a:bodyPr wrap="square" lIns="0" rIns="0" tIns="0" bIns="0" anchor="t">
-            <a:spAutoFit/>
-          </a:bodyPr>
-          <a:lstStyle/>
-          <a:p>
-            <a:pPr>
-              <a:lnSpc>
-                <a:spcPct val="105000"/>
-              </a:lnSpc>
-              <a:spcBef>
-                <a:spcPts val="0"/>
-              </a:spcBef>
-              <a:spcAft>
-                <a:spcPts val="0"/>
-              </a:spcAft>
-              <a:buNone/>
-              <a:defRPr sz="2000" b="0" lang="ja-JP">
-                <a:solidFill>
-                  <a:srgbClr val="303437"/>
-                </a:solidFill>
-                <a:latin typeface="Noto Sans"/>
-                <a:ea typeface="Noto Sans CJK JP"/>
-                <a:cs typeface="Noto Sans"/>
-              </a:defRPr>
-            </a:pPr>
-            <a:r>
-              <a:rPr sz="2000" b="0" lang="ja-JP">
-                <a:solidFill>
-                  <a:srgbClr val="303437"/>
-                </a:solidFill>
-                <a:latin typeface="Noto Sans"/>
-                <a:ea typeface="Noto Sans CJK JP"/>
-                <a:cs typeface="Noto Sans"/>
-              </a:rPr>
-              <a:t>COCO API</a:t>
-            </a:r>
-          </a:p>
-        </p:txBody>
-      </p:sp>
-      <p:sp>
-        <p:nvSpPr>
-          <p:cNvPr id="9" name="TextBox 8"/>
-          <p:cNvSpPr txBox="1"/>
-          <p:nvPr/>
-        </p:nvSpPr>
-        <p:spPr>
-          <a:xfrm>
-            <a:off x="594360" y="3621024"/>
-            <a:ext cx="7955279" cy="594360"/>
-          </a:xfrm>
-          <a:prstGeom prst="rect">
-            <a:avLst/>
-          </a:prstGeom>
-          <a:noFill/>
-        </p:spPr>
-        <p:txBody>
-          <a:bodyPr wrap="square" lIns="0" rIns="0" tIns="0" bIns="0" anchor="t">
-            <a:spAutoFit/>
-          </a:bodyPr>
-          <a:lstStyle/>
-          <a:p>
-            <a:pPr>
-              <a:lnSpc>
-                <a:spcPct val="105000"/>
-              </a:lnSpc>
-              <a:spcBef>
-                <a:spcPts val="0"/>
-              </a:spcBef>
-              <a:spcAft>
-                <a:spcPts val="0"/>
-              </a:spcAft>
-              <a:buNone/>
-              <a:defRPr sz="1300" b="0" lang="ja-JP">
-                <a:solidFill>
-                  <a:srgbClr val="626669"/>
-                </a:solidFill>
-                <a:latin typeface="Noto Sans"/>
-                <a:ea typeface="Noto Sans CJK JP"/>
-                <a:cs typeface="Noto Sans"/>
-              </a:defRPr>
-            </a:pPr>
-            <a:r>
-              <a:rPr sz="1300" b="0" lang="ja-JP">
-                <a:solidFill>
-                  <a:srgbClr val="626669"/>
-                </a:solidFill>
-                <a:latin typeface="Noto Sans"/>
-                <a:ea typeface="Noto Sans CJK JP"/>
-                <a:cs typeface="Noto Sans"/>
-              </a:rPr>
-              <a:t>COCO Consortium (n.d.; 参照日 2026-10-15).</a:t>
-            </a:r>
-          </a:p>
-          <a:p>
-            <a:pPr>
-              <a:lnSpc>
-                <a:spcPct val="105000"/>
-              </a:lnSpc>
-              <a:spcBef>
-                <a:spcPts val="0"/>
-              </a:spcBef>
-              <a:spcAft>
-                <a:spcPts val="0"/>
-              </a:spcAft>
-              <a:buNone/>
-              <a:defRPr sz="1300" b="0" lang="ja-JP">
-                <a:solidFill>
-                  <a:srgbClr val="626669"/>
-                </a:solidFill>
-                <a:latin typeface="Noto Sans"/>
-                <a:ea typeface="Noto Sans CJK JP"/>
-                <a:cs typeface="Noto Sans"/>
-              </a:defRPr>
-            </a:pPr>
-            <a:r>
-              <a:rPr sz="1300" b="0" lang="ja-JP">
-                <a:solidFill>
-                  <a:srgbClr val="626669"/>
-                </a:solidFill>
-                <a:latin typeface="Noto Sans"/>
-                <a:ea typeface="Noto Sans CJK JP"/>
-                <a:cs typeface="Noto Sans"/>
-              </a:rPr>
-              <a:t>GitHub, cocodataset/cocoapi.</a:t>
-            </a:r>
-          </a:p>
-        </p:txBody>
-      </p:sp>
-      <p:sp>
-        <p:nvSpPr>
-          <p:cNvPr id="10" name="TextBox 9"/>
-          <p:cNvSpPr txBox="1"/>
-          <p:nvPr/>
-        </p:nvSpPr>
-        <p:spPr>
-          <a:xfrm>
-            <a:off x="594360" y="4160520"/>
-            <a:ext cx="7955279" cy="521207"/>
-          </a:xfrm>
-          <a:prstGeom prst="rect">
-            <a:avLst/>
-          </a:prstGeom>
-          <a:noFill/>
-        </p:spPr>
-        <p:txBody>
-          <a:bodyPr wrap="square" lIns="0" rIns="0" tIns="0" bIns="0" anchor="t">
-            <a:spAutoFit/>
-          </a:bodyPr>
-          <a:lstStyle/>
-          <a:p>
-            <a:pPr>
-              <a:lnSpc>
-                <a:spcPct val="105000"/>
-              </a:lnSpc>
-              <a:spcBef>
-                <a:spcPts val="0"/>
-              </a:spcBef>
-              <a:spcAft>
-                <a:spcPts val="0"/>
-              </a:spcAft>
-              <a:buNone/>
-              <a:defRPr sz="1800" b="0" lang="ja-JP">
-                <a:solidFill>
-                  <a:srgbClr val="303437"/>
-                </a:solidFill>
-                <a:latin typeface="Noto Sans"/>
-                <a:ea typeface="Noto Sans CJK JP"/>
-                <a:cs typeface="Noto Sans"/>
-              </a:defRPr>
-            </a:pPr>
-            <a:r>
-              <a:rPr sz="1800" b="0" lang="ja-JP">
-                <a:solidFill>
-                  <a:srgbClr val="303437"/>
-                </a:solidFill>
-                <a:latin typeface="Noto Sans"/>
-                <a:ea typeface="Noto Sans CJK JP"/>
-                <a:cs typeface="Noto Sans"/>
-              </a:rPr>
-              <a:t>COCOの公式実装。画像・注釈の読込み、マスク表現、検出と領域分割の評価コードを提供する。</a:t>
-            </a:r>
-          </a:p>
-        </p:txBody>
-      </p:sp>
-      <p:sp>
-        <p:nvSpPr>
-          <p:cNvPr id="11" name="TextBox 10"/>
-          <p:cNvSpPr txBox="1"/>
-          <p:nvPr/>
-        </p:nvSpPr>
-        <p:spPr>
-          <a:xfrm>
-            <a:off x="594360" y="4882896"/>
-            <a:ext cx="7955279" cy="182880"/>
-          </a:xfrm>
-          <a:prstGeom prst="rect">
-            <a:avLst/>
-          </a:prstGeom>
-          <a:noFill/>
-        </p:spPr>
-        <p:txBody>
-          <a:bodyPr wrap="square" lIns="0" rIns="0" tIns="0" bIns="0" anchor="t">
-            <a:spAutoFit/>
-          </a:bodyPr>
-          <a:lstStyle/>
-          <a:p>
-            <a:pPr>
-              <a:lnSpc>
-                <a:spcPct val="105000"/>
-              </a:lnSpc>
-              <a:spcBef>
-                <a:spcPts val="0"/>
-              </a:spcBef>
-              <a:spcAft>
-                <a:spcPts val="0"/>
-              </a:spcAft>
-              <a:buNone/>
-              <a:defRPr sz="1100" b="0" lang="ja-JP">
-                <a:solidFill>
-                  <a:srgbClr val="626669"/>
-                </a:solidFill>
-                <a:latin typeface="Noto Sans"/>
-                <a:ea typeface="Noto Sans CJK JP"/>
-                <a:cs typeface="Noto Sans"/>
-              </a:defRPr>
-            </a:pPr>
-            <a:r>
-              <a:rPr sz="1100" b="0" lang="ja-JP">
-                <a:solidFill>
-                  <a:srgbClr val="626669"/>
-                </a:solidFill>
-                <a:latin typeface="Noto Sans"/>
-                <a:ea typeface="Noto Sans CJK JP"/>
-                <a:cs typeface="Noto Sans"/>
                 <a:hlinkClick r:id="rId3"/>
               </a:rPr>
-              <a:t>https://github.com/cocodataset/cocoapi</a:t>
+              <a:t>https://github.com/cocodataset/cocoapi/blob/master/license.txt</a:t>
             </a:r>
           </a:p>
         </p:txBody>
@@ -25756,7 +25966,7 @@
                 <a:ea typeface="Noto Sans CJK JP"/>
                 <a:cs typeface="Noto Sans"/>
               </a:rPr>
-              <a:t>参考文献</a:t>
+              <a:t/>
             </a:r>
           </a:p>
         </p:txBody>
@@ -25823,8 +26033,8 @@
         </p:nvSpPr>
         <p:spPr>
           <a:xfrm>
-            <a:off x="594360" y="1234440"/>
-            <a:ext cx="7955279" cy="292608"/>
+            <a:off x="594360" y="1051560"/>
+            <a:ext cx="7955279" cy="411480"/>
           </a:xfrm>
           <a:prstGeom prst="rect">
             <a:avLst/>
@@ -25832,41 +26042,41 @@
           <a:noFill/>
         </p:spPr>
         <p:txBody>
-          <a:bodyPr wrap="square" lIns="0" rIns="0" tIns="0" bIns="0" anchor="t">
+          <a:bodyPr wrap="square" lIns="0" rIns="0" tIns="0" bIns="0">
             <a:spAutoFit/>
           </a:bodyPr>
           <a:lstStyle/>
           <a:p>
             <a:pPr>
               <a:lnSpc>
-                <a:spcPct val="105000"/>
-              </a:lnSpc>
-              <a:spcBef>
-                <a:spcPts val="0"/>
-              </a:spcBef>
-              <a:spcAft>
-                <a:spcPts val="0"/>
-              </a:spcAft>
-              <a:buNone/>
-              <a:defRPr sz="2000" b="0" lang="ja-JP">
-                <a:solidFill>
-                  <a:srgbClr val="303437"/>
-                </a:solidFill>
-                <a:latin typeface="Noto Sans"/>
-                <a:ea typeface="Noto Sans CJK JP"/>
-                <a:cs typeface="Noto Sans"/>
-              </a:defRPr>
-            </a:pPr>
-            <a:r>
-              <a:rPr sz="2000" b="0" lang="ja-JP">
-                <a:solidFill>
-                  <a:srgbClr val="303437"/>
-                </a:solidFill>
-                <a:latin typeface="Noto Sans"/>
-                <a:ea typeface="Noto Sans CJK JP"/>
-                <a:cs typeface="Noto Sans"/>
-              </a:rPr>
-              <a:t>COCO-Stuff: Thing and Stuff Classes in Context</a:t>
+                <a:spcPct val="110000"/>
+              </a:lnSpc>
+              <a:spcBef>
+                <a:spcPts val="0"/>
+              </a:spcBef>
+              <a:spcAft>
+                <a:spcPts val="0"/>
+              </a:spcAft>
+              <a:buNone/>
+              <a:defRPr sz="2400" lang="ja-JP" b="1">
+                <a:solidFill>
+                  <a:srgbClr val="303437"/>
+                </a:solidFill>
+                <a:latin typeface="Noto Sans"/>
+                <a:ea typeface="Noto Sans CJK JP"/>
+                <a:cs typeface="Noto Sans"/>
+              </a:defRPr>
+            </a:pPr>
+            <a:r>
+              <a:rPr sz="2400" lang="ja-JP" b="1">
+                <a:solidFill>
+                  <a:srgbClr val="303437"/>
+                </a:solidFill>
+                <a:latin typeface="Noto Sans"/>
+                <a:ea typeface="Noto Sans CJK JP"/>
+                <a:cs typeface="Noto Sans"/>
+              </a:rPr>
+              <a:t>Microsoft COCO: Common Objects in Context</a:t>
             </a:r>
           </a:p>
         </p:txBody>
@@ -25879,8 +26089,8 @@
         </p:nvSpPr>
         <p:spPr>
           <a:xfrm>
-            <a:off x="594360" y="1655064"/>
-            <a:ext cx="7955279" cy="594360"/>
+            <a:off x="594360" y="1600200"/>
+            <a:ext cx="7955279" cy="566928"/>
           </a:xfrm>
           <a:prstGeom prst="rect">
             <a:avLst/>
@@ -25888,23 +26098,23 @@
           <a:noFill/>
         </p:spPr>
         <p:txBody>
-          <a:bodyPr wrap="square" lIns="0" rIns="0" tIns="0" bIns="0" anchor="t">
+          <a:bodyPr wrap="square" lIns="0" rIns="0" tIns="0" bIns="0">
             <a:spAutoFit/>
           </a:bodyPr>
           <a:lstStyle/>
           <a:p>
             <a:pPr>
               <a:lnSpc>
-                <a:spcPct val="105000"/>
-              </a:lnSpc>
-              <a:spcBef>
-                <a:spcPts val="0"/>
-              </a:spcBef>
-              <a:spcAft>
-                <a:spcPts val="0"/>
-              </a:spcAft>
-              <a:buNone/>
-              <a:defRPr sz="1300" b="0" lang="ja-JP">
+                <a:spcPct val="110000"/>
+              </a:lnSpc>
+              <a:spcBef>
+                <a:spcPts val="0"/>
+              </a:spcBef>
+              <a:spcAft>
+                <a:spcPts val="0"/>
+              </a:spcAft>
+              <a:buNone/>
+              <a:defRPr sz="1400" lang="ja-JP" b="0">
                 <a:solidFill>
                   <a:srgbClr val="626669"/>
                 </a:solidFill>
@@ -25914,7 +26124,7 @@
               </a:defRPr>
             </a:pPr>
             <a:r>
-              <a:rPr sz="1300" b="0" lang="ja-JP">
+              <a:rPr sz="1400" lang="ja-JP" b="0">
                 <a:solidFill>
                   <a:srgbClr val="626669"/>
                 </a:solidFill>
@@ -25922,22 +26132,22 @@
                 <a:ea typeface="Noto Sans CJK JP"/>
                 <a:cs typeface="Noto Sans"/>
               </a:rPr>
-              <a:t>Holger Caesar, Jasper Uijlings, Vittorio Ferrari (2018).</a:t>
+              <a:t>Tsung-Yi Lin et al. (2014).</a:t>
             </a:r>
           </a:p>
           <a:p>
             <a:pPr>
               <a:lnSpc>
-                <a:spcPct val="105000"/>
-              </a:lnSpc>
-              <a:spcBef>
-                <a:spcPts val="0"/>
-              </a:spcBef>
-              <a:spcAft>
-                <a:spcPts val="0"/>
-              </a:spcAft>
-              <a:buNone/>
-              <a:defRPr sz="1300" b="0" lang="ja-JP">
+                <a:spcPct val="110000"/>
+              </a:lnSpc>
+              <a:spcBef>
+                <a:spcPts val="0"/>
+              </a:spcBef>
+              <a:spcAft>
+                <a:spcPts val="0"/>
+              </a:spcAft>
+              <a:buNone/>
+              <a:defRPr sz="1400" lang="ja-JP" b="0">
                 <a:solidFill>
                   <a:srgbClr val="626669"/>
                 </a:solidFill>
@@ -25947,7 +26157,7 @@
               </a:defRPr>
             </a:pPr>
             <a:r>
-              <a:rPr sz="1300" b="0" lang="ja-JP">
+              <a:rPr sz="1400" lang="ja-JP" b="0">
                 <a:solidFill>
                   <a:srgbClr val="626669"/>
                 </a:solidFill>
@@ -25955,7 +26165,7 @@
                 <a:ea typeface="Noto Sans CJK JP"/>
                 <a:cs typeface="Noto Sans"/>
               </a:rPr>
-              <a:t>IEEE/CVF Conference on Computer Vision and Pattern Recognition (CVPR), pp. 1209–1218.</a:t>
+              <a:t>European Conference on Computer Vision (ECCV), pp. 740–755.</a:t>
             </a:r>
           </a:p>
         </p:txBody>
@@ -25969,7 +26179,7 @@
         <p:spPr>
           <a:xfrm>
             <a:off x="594360" y="2194560"/>
-            <a:ext cx="7955279" cy="521207"/>
+            <a:ext cx="7955279" cy="475488"/>
           </a:xfrm>
           <a:prstGeom prst="rect">
             <a:avLst/>
@@ -25977,41 +26187,41 @@
           <a:noFill/>
         </p:spPr>
         <p:txBody>
-          <a:bodyPr wrap="square" lIns="0" rIns="0" tIns="0" bIns="0" anchor="t">
+          <a:bodyPr wrap="square" lIns="0" rIns="0" tIns="0" bIns="0">
             <a:spAutoFit/>
           </a:bodyPr>
           <a:lstStyle/>
           <a:p>
             <a:pPr>
               <a:lnSpc>
-                <a:spcPct val="105000"/>
-              </a:lnSpc>
-              <a:spcBef>
-                <a:spcPts val="0"/>
-              </a:spcBef>
-              <a:spcAft>
-                <a:spcPts val="0"/>
-              </a:spcAft>
-              <a:buNone/>
-              <a:defRPr sz="1800" b="0" lang="ja-JP">
-                <a:solidFill>
-                  <a:srgbClr val="303437"/>
-                </a:solidFill>
-                <a:latin typeface="Noto Sans"/>
-                <a:ea typeface="Noto Sans CJK JP"/>
-                <a:cs typeface="Noto Sans"/>
-              </a:defRPr>
-            </a:pPr>
-            <a:r>
-              <a:rPr sz="1800" b="0" lang="ja-JP">
-                <a:solidFill>
-                  <a:srgbClr val="303437"/>
-                </a:solidFill>
-                <a:latin typeface="Noto Sans"/>
-                <a:ea typeface="Noto Sans CJK JP"/>
-                <a:cs typeface="Noto Sans"/>
-              </a:rPr>
-              <a:t>COCOへ背景領域の画素注釈を加えた研究。物体と背景を合わせた場面理解用データを提示する。</a:t>
+                <a:spcPct val="110000"/>
+              </a:lnSpc>
+              <a:spcBef>
+                <a:spcPts val="0"/>
+              </a:spcBef>
+              <a:spcAft>
+                <a:spcPts val="0"/>
+              </a:spcAft>
+              <a:buNone/>
+              <a:defRPr sz="1800" lang="ja-JP" b="0">
+                <a:solidFill>
+                  <a:srgbClr val="303437"/>
+                </a:solidFill>
+                <a:latin typeface="Noto Sans"/>
+                <a:ea typeface="Noto Sans CJK JP"/>
+                <a:cs typeface="Noto Sans"/>
+              </a:defRPr>
+            </a:pPr>
+            <a:r>
+              <a:rPr sz="1800" lang="ja-JP" b="0">
+                <a:solidFill>
+                  <a:srgbClr val="303437"/>
+                </a:solidFill>
+                <a:latin typeface="Noto Sans"/>
+                <a:ea typeface="Noto Sans CJK JP"/>
+                <a:cs typeface="Noto Sans"/>
+              </a:rPr>
+              <a:t>COCOの原著。日常場面の画像収集、領域注釈と初期評価を報告する。</a:t>
             </a:r>
           </a:p>
         </p:txBody>
@@ -26024,8 +26234,8 @@
         </p:nvSpPr>
         <p:spPr>
           <a:xfrm>
-            <a:off x="594360" y="2916936"/>
-            <a:ext cx="7955279" cy="182880"/>
+            <a:off x="594360" y="2651760"/>
+            <a:ext cx="7955279" cy="228600"/>
           </a:xfrm>
           <a:prstGeom prst="rect">
             <a:avLst/>
@@ -26033,23 +26243,23 @@
           <a:noFill/>
         </p:spPr>
         <p:txBody>
-          <a:bodyPr wrap="square" lIns="0" rIns="0" tIns="0" bIns="0" anchor="t">
+          <a:bodyPr wrap="square" lIns="0" rIns="0" tIns="0" bIns="0">
             <a:spAutoFit/>
           </a:bodyPr>
           <a:lstStyle/>
           <a:p>
             <a:pPr>
               <a:lnSpc>
-                <a:spcPct val="105000"/>
-              </a:lnSpc>
-              <a:spcBef>
-                <a:spcPts val="0"/>
-              </a:spcBef>
-              <a:spcAft>
-                <a:spcPts val="0"/>
-              </a:spcAft>
-              <a:buNone/>
-              <a:defRPr sz="1100" b="0" lang="ja-JP">
+                <a:spcPct val="110000"/>
+              </a:lnSpc>
+              <a:spcBef>
+                <a:spcPts val="0"/>
+              </a:spcBef>
+              <a:spcAft>
+                <a:spcPts val="0"/>
+              </a:spcAft>
+              <a:buNone/>
+              <a:defRPr sz="1150" lang="ja-JP" b="0">
                 <a:solidFill>
                   <a:srgbClr val="626669"/>
                 </a:solidFill>
@@ -26059,16 +26269,16 @@
               </a:defRPr>
             </a:pPr>
             <a:r>
-              <a:rPr sz="1100" b="0" lang="ja-JP">
+              <a:rPr sz="1150" lang="ja-JP" b="0">
                 <a:solidFill>
                   <a:srgbClr val="626669"/>
                 </a:solidFill>
                 <a:latin typeface="Noto Sans"/>
                 <a:ea typeface="Noto Sans CJK JP"/>
                 <a:cs typeface="Noto Sans"/>
-                <a:hlinkClick r:id="rId3"/>
-              </a:rPr>
-              <a:t>https://arxiv.org/abs/1612.03716</a:t>
+                <a:hlinkClick r:id="rId2"/>
+              </a:rPr>
+              <a:t>https://arxiv.org/abs/1405.0312</a:t>
             </a:r>
           </a:p>
         </p:txBody>
@@ -26081,8 +26291,8 @@
         </p:nvSpPr>
         <p:spPr>
           <a:xfrm>
-            <a:off x="594360" y="3200400"/>
-            <a:ext cx="7955279" cy="292608"/>
+            <a:off x="594360" y="3182112"/>
+            <a:ext cx="7955279" cy="411480"/>
           </a:xfrm>
           <a:prstGeom prst="rect">
             <a:avLst/>
@@ -26090,41 +26300,41 @@
           <a:noFill/>
         </p:spPr>
         <p:txBody>
-          <a:bodyPr wrap="square" lIns="0" rIns="0" tIns="0" bIns="0" anchor="t">
+          <a:bodyPr wrap="square" lIns="0" rIns="0" tIns="0" bIns="0">
             <a:spAutoFit/>
           </a:bodyPr>
           <a:lstStyle/>
           <a:p>
             <a:pPr>
               <a:lnSpc>
-                <a:spcPct val="105000"/>
-              </a:lnSpc>
-              <a:spcBef>
-                <a:spcPts val="0"/>
-              </a:spcBef>
-              <a:spcAft>
-                <a:spcPts val="0"/>
-              </a:spcAft>
-              <a:buNone/>
-              <a:defRPr sz="2000" b="0" lang="ja-JP">
-                <a:solidFill>
-                  <a:srgbClr val="303437"/>
-                </a:solidFill>
-                <a:latin typeface="Noto Sans"/>
-                <a:ea typeface="Noto Sans CJK JP"/>
-                <a:cs typeface="Noto Sans"/>
-              </a:defRPr>
-            </a:pPr>
-            <a:r>
-              <a:rPr sz="2000" b="0" lang="ja-JP">
-                <a:solidFill>
-                  <a:srgbClr val="303437"/>
-                </a:solidFill>
-                <a:latin typeface="Noto Sans"/>
-                <a:ea typeface="Noto Sans CJK JP"/>
-                <a:cs typeface="Noto Sans"/>
-              </a:rPr>
-              <a:t>Panoptic Segmentation</a:t>
+                <a:spcPct val="110000"/>
+              </a:lnSpc>
+              <a:spcBef>
+                <a:spcPts val="0"/>
+              </a:spcBef>
+              <a:spcAft>
+                <a:spcPts val="0"/>
+              </a:spcAft>
+              <a:buNone/>
+              <a:defRPr sz="2400" lang="ja-JP" b="1">
+                <a:solidFill>
+                  <a:srgbClr val="303437"/>
+                </a:solidFill>
+                <a:latin typeface="Noto Sans"/>
+                <a:ea typeface="Noto Sans CJK JP"/>
+                <a:cs typeface="Noto Sans"/>
+              </a:defRPr>
+            </a:pPr>
+            <a:r>
+              <a:rPr sz="2400" lang="ja-JP" b="1">
+                <a:solidFill>
+                  <a:srgbClr val="303437"/>
+                </a:solidFill>
+                <a:latin typeface="Noto Sans"/>
+                <a:ea typeface="Noto Sans CJK JP"/>
+                <a:cs typeface="Noto Sans"/>
+              </a:rPr>
+              <a:t>COCO API</a:t>
             </a:r>
           </a:p>
         </p:txBody>
@@ -26137,8 +26347,8 @@
         </p:nvSpPr>
         <p:spPr>
           <a:xfrm>
-            <a:off x="594360" y="3621024"/>
-            <a:ext cx="7955279" cy="594360"/>
+            <a:off x="594360" y="3730752"/>
+            <a:ext cx="7955279" cy="566928"/>
           </a:xfrm>
           <a:prstGeom prst="rect">
             <a:avLst/>
@@ -26146,23 +26356,23 @@
           <a:noFill/>
         </p:spPr>
         <p:txBody>
-          <a:bodyPr wrap="square" lIns="0" rIns="0" tIns="0" bIns="0" anchor="t">
+          <a:bodyPr wrap="square" lIns="0" rIns="0" tIns="0" bIns="0">
             <a:spAutoFit/>
           </a:bodyPr>
           <a:lstStyle/>
           <a:p>
             <a:pPr>
               <a:lnSpc>
-                <a:spcPct val="105000"/>
-              </a:lnSpc>
-              <a:spcBef>
-                <a:spcPts val="0"/>
-              </a:spcBef>
-              <a:spcAft>
-                <a:spcPts val="0"/>
-              </a:spcAft>
-              <a:buNone/>
-              <a:defRPr sz="1300" b="0" lang="ja-JP">
+                <a:spcPct val="110000"/>
+              </a:lnSpc>
+              <a:spcBef>
+                <a:spcPts val="0"/>
+              </a:spcBef>
+              <a:spcAft>
+                <a:spcPts val="0"/>
+              </a:spcAft>
+              <a:buNone/>
+              <a:defRPr sz="1400" lang="ja-JP" b="0">
                 <a:solidFill>
                   <a:srgbClr val="626669"/>
                 </a:solidFill>
@@ -26172,7 +26382,7 @@
               </a:defRPr>
             </a:pPr>
             <a:r>
-              <a:rPr sz="1300" b="0" lang="ja-JP">
+              <a:rPr sz="1400" lang="ja-JP" b="0">
                 <a:solidFill>
                   <a:srgbClr val="626669"/>
                 </a:solidFill>
@@ -26180,22 +26390,22 @@
                 <a:ea typeface="Noto Sans CJK JP"/>
                 <a:cs typeface="Noto Sans"/>
               </a:rPr>
-              <a:t>Alexander Kirillov, Kaiming He, Ross Girshick, Carsten Rother, Piotr Dollár (2019).</a:t>
+              <a:t>COCO Consortium (n.d.; 参照日 2026-10-15).</a:t>
             </a:r>
           </a:p>
           <a:p>
             <a:pPr>
               <a:lnSpc>
-                <a:spcPct val="105000"/>
-              </a:lnSpc>
-              <a:spcBef>
-                <a:spcPts val="0"/>
-              </a:spcBef>
-              <a:spcAft>
-                <a:spcPts val="0"/>
-              </a:spcAft>
-              <a:buNone/>
-              <a:defRPr sz="1300" b="0" lang="ja-JP">
+                <a:spcPct val="110000"/>
+              </a:lnSpc>
+              <a:spcBef>
+                <a:spcPts val="0"/>
+              </a:spcBef>
+              <a:spcAft>
+                <a:spcPts val="0"/>
+              </a:spcAft>
+              <a:buNone/>
+              <a:defRPr sz="1400" lang="ja-JP" b="0">
                 <a:solidFill>
                   <a:srgbClr val="626669"/>
                 </a:solidFill>
@@ -26205,7 +26415,7 @@
               </a:defRPr>
             </a:pPr>
             <a:r>
-              <a:rPr sz="1300" b="0" lang="ja-JP">
+              <a:rPr sz="1400" lang="ja-JP" b="0">
                 <a:solidFill>
                   <a:srgbClr val="626669"/>
                 </a:solidFill>
@@ -26213,7 +26423,7 @@
                 <a:ea typeface="Noto Sans CJK JP"/>
                 <a:cs typeface="Noto Sans"/>
               </a:rPr>
-              <a:t>IEEE/CVF Conference on Computer Vision and Pattern Recognition (CVPR), pp. 9404–9413.</a:t>
+              <a:t>GitHub, cocodataset/cocoapi.</a:t>
             </a:r>
           </a:p>
         </p:txBody>
@@ -26226,8 +26436,8 @@
         </p:nvSpPr>
         <p:spPr>
           <a:xfrm>
-            <a:off x="594360" y="4160520"/>
-            <a:ext cx="7955279" cy="521207"/>
+            <a:off x="594360" y="4325112"/>
+            <a:ext cx="7955279" cy="475488"/>
           </a:xfrm>
           <a:prstGeom prst="rect">
             <a:avLst/>
@@ -26235,41 +26445,41 @@
           <a:noFill/>
         </p:spPr>
         <p:txBody>
-          <a:bodyPr wrap="square" lIns="0" rIns="0" tIns="0" bIns="0" anchor="t">
+          <a:bodyPr wrap="square" lIns="0" rIns="0" tIns="0" bIns="0">
             <a:spAutoFit/>
           </a:bodyPr>
           <a:lstStyle/>
           <a:p>
             <a:pPr>
               <a:lnSpc>
-                <a:spcPct val="105000"/>
-              </a:lnSpc>
-              <a:spcBef>
-                <a:spcPts val="0"/>
-              </a:spcBef>
-              <a:spcAft>
-                <a:spcPts val="0"/>
-              </a:spcAft>
-              <a:buNone/>
-              <a:defRPr sz="1800" b="0" lang="ja-JP">
-                <a:solidFill>
-                  <a:srgbClr val="303437"/>
-                </a:solidFill>
-                <a:latin typeface="Noto Sans"/>
-                <a:ea typeface="Noto Sans CJK JP"/>
-                <a:cs typeface="Noto Sans"/>
-              </a:defRPr>
-            </a:pPr>
-            <a:r>
-              <a:rPr sz="1800" b="0" lang="ja-JP">
-                <a:solidFill>
-                  <a:srgbClr val="303437"/>
-                </a:solidFill>
-                <a:latin typeface="Noto Sans"/>
-                <a:ea typeface="Noto Sans CJK JP"/>
-                <a:cs typeface="Noto Sans"/>
-              </a:rPr>
-              <a:t>意味的領域分割とインスタンス分割を統合する課題を定義した研究。共通指標Panoptic Qualityを提案する。</a:t>
+                <a:spcPct val="110000"/>
+              </a:lnSpc>
+              <a:spcBef>
+                <a:spcPts val="0"/>
+              </a:spcBef>
+              <a:spcAft>
+                <a:spcPts val="0"/>
+              </a:spcAft>
+              <a:buNone/>
+              <a:defRPr sz="1800" lang="ja-JP" b="0">
+                <a:solidFill>
+                  <a:srgbClr val="303437"/>
+                </a:solidFill>
+                <a:latin typeface="Noto Sans"/>
+                <a:ea typeface="Noto Sans CJK JP"/>
+                <a:cs typeface="Noto Sans"/>
+              </a:defRPr>
+            </a:pPr>
+            <a:r>
+              <a:rPr sz="1800" lang="ja-JP" b="0">
+                <a:solidFill>
+                  <a:srgbClr val="303437"/>
+                </a:solidFill>
+                <a:latin typeface="Noto Sans"/>
+                <a:ea typeface="Noto Sans CJK JP"/>
+                <a:cs typeface="Noto Sans"/>
+              </a:rPr>
+              <a:t>画像・注釈の読込み、マスク表現、検出・分割の評価を担う公式実装。</a:t>
             </a:r>
           </a:p>
         </p:txBody>
@@ -26282,8 +26492,8 @@
         </p:nvSpPr>
         <p:spPr>
           <a:xfrm>
-            <a:off x="594360" y="4882896"/>
-            <a:ext cx="7955279" cy="182880"/>
+            <a:off x="594360" y="4782312"/>
+            <a:ext cx="7955279" cy="228600"/>
           </a:xfrm>
           <a:prstGeom prst="rect">
             <a:avLst/>
@@ -26291,23 +26501,23 @@
           <a:noFill/>
         </p:spPr>
         <p:txBody>
-          <a:bodyPr wrap="square" lIns="0" rIns="0" tIns="0" bIns="0" anchor="t">
+          <a:bodyPr wrap="square" lIns="0" rIns="0" tIns="0" bIns="0">
             <a:spAutoFit/>
           </a:bodyPr>
           <a:lstStyle/>
           <a:p>
             <a:pPr>
               <a:lnSpc>
-                <a:spcPct val="105000"/>
-              </a:lnSpc>
-              <a:spcBef>
-                <a:spcPts val="0"/>
-              </a:spcBef>
-              <a:spcAft>
-                <a:spcPts val="0"/>
-              </a:spcAft>
-              <a:buNone/>
-              <a:defRPr sz="1100" b="0" lang="ja-JP">
+                <a:spcPct val="110000"/>
+              </a:lnSpc>
+              <a:spcBef>
+                <a:spcPts val="0"/>
+              </a:spcBef>
+              <a:spcAft>
+                <a:spcPts val="0"/>
+              </a:spcAft>
+              <a:buNone/>
+              <a:defRPr sz="1150" lang="ja-JP" b="0">
                 <a:solidFill>
                   <a:srgbClr val="626669"/>
                 </a:solidFill>
@@ -26317,20 +26527,55 @@
               </a:defRPr>
             </a:pPr>
             <a:r>
-              <a:rPr sz="1100" b="0" lang="ja-JP">
+              <a:rPr sz="1150" lang="ja-JP" b="0">
                 <a:solidFill>
                   <a:srgbClr val="626669"/>
                 </a:solidFill>
                 <a:latin typeface="Noto Sans"/>
                 <a:ea typeface="Noto Sans CJK JP"/>
                 <a:cs typeface="Noto Sans"/>
-                <a:hlinkClick r:id="rId4"/>
-              </a:rPr>
-              <a:t>https://arxiv.org/abs/1801.00868</a:t>
+                <a:hlinkClick r:id="rId3"/>
+              </a:rPr>
+              <a:t>https://github.com/cocodataset/cocoapi</a:t>
             </a:r>
           </a:p>
         </p:txBody>
       </p:sp>
+      <p:cxnSp>
+        <p:nvCxnSpPr>
+          <p:cNvPr id="12" name="Connector 11"/>
+          <p:cNvCxnSpPr/>
+          <p:nvPr/>
+        </p:nvCxnSpPr>
+        <p:spPr>
+          <a:xfrm>
+            <a:off x="594360" y="2999232"/>
+            <a:ext cx="7955280" cy="0"/>
+          </a:xfrm>
+          <a:prstGeom prst="line">
+            <a:avLst/>
+          </a:prstGeom>
+          <a:ln w="10160">
+            <a:solidFill>
+              <a:srgbClr val="626669"/>
+            </a:solidFill>
+          </a:ln>
+        </p:spPr>
+        <p:style>
+          <a:lnRef idx="2">
+            <a:schemeClr val="accent1"/>
+          </a:lnRef>
+          <a:fillRef idx="0">
+            <a:schemeClr val="accent1"/>
+          </a:fillRef>
+          <a:effectRef idx="1">
+            <a:schemeClr val="accent1"/>
+          </a:effectRef>
+          <a:fontRef idx="minor">
+            <a:schemeClr val="tx1"/>
+          </a:fontRef>
+        </p:style>
+      </p:cxnSp>
     </p:spTree>
   </p:cSld>
   <p:clrMapOvr>
@@ -26398,7 +26643,7 @@
                 <a:ea typeface="Noto Sans CJK JP"/>
                 <a:cs typeface="Noto Sans"/>
               </a:rPr>
-              <a:t>参考文献</a:t>
+              <a:t/>
             </a:r>
           </a:p>
         </p:txBody>
@@ -26465,8 +26710,8 @@
         </p:nvSpPr>
         <p:spPr>
           <a:xfrm>
-            <a:off x="594360" y="1234440"/>
-            <a:ext cx="7955279" cy="292608"/>
+            <a:off x="594360" y="1051560"/>
+            <a:ext cx="7955279" cy="411480"/>
           </a:xfrm>
           <a:prstGeom prst="rect">
             <a:avLst/>
@@ -26474,41 +26719,41 @@
           <a:noFill/>
         </p:spPr>
         <p:txBody>
-          <a:bodyPr wrap="square" lIns="0" rIns="0" tIns="0" bIns="0" anchor="t">
+          <a:bodyPr wrap="square" lIns="0" rIns="0" tIns="0" bIns="0">
             <a:spAutoFit/>
           </a:bodyPr>
           <a:lstStyle/>
           <a:p>
             <a:pPr>
               <a:lnSpc>
-                <a:spcPct val="105000"/>
-              </a:lnSpc>
-              <a:spcBef>
-                <a:spcPts val="0"/>
-              </a:spcBef>
-              <a:spcAft>
-                <a:spcPts val="0"/>
-              </a:spcAft>
-              <a:buNone/>
-              <a:defRPr sz="2000" b="0" lang="ja-JP">
-                <a:solidFill>
-                  <a:srgbClr val="303437"/>
-                </a:solidFill>
-                <a:latin typeface="Noto Sans"/>
-                <a:ea typeface="Noto Sans CJK JP"/>
-                <a:cs typeface="Noto Sans"/>
-              </a:defRPr>
-            </a:pPr>
-            <a:r>
-              <a:rPr sz="2000" b="0" lang="ja-JP">
-                <a:solidFill>
-                  <a:srgbClr val="303437"/>
-                </a:solidFill>
-                <a:latin typeface="Noto Sans"/>
-                <a:ea typeface="Noto Sans CJK JP"/>
-                <a:cs typeface="Noto Sans"/>
-              </a:rPr>
-              <a:t>Mask R-CNN</a:t>
+                <a:spcPct val="110000"/>
+              </a:lnSpc>
+              <a:spcBef>
+                <a:spcPts val="0"/>
+              </a:spcBef>
+              <a:spcAft>
+                <a:spcPts val="0"/>
+              </a:spcAft>
+              <a:buNone/>
+              <a:defRPr sz="2400" lang="ja-JP" b="1">
+                <a:solidFill>
+                  <a:srgbClr val="303437"/>
+                </a:solidFill>
+                <a:latin typeface="Noto Sans"/>
+                <a:ea typeface="Noto Sans CJK JP"/>
+                <a:cs typeface="Noto Sans"/>
+              </a:defRPr>
+            </a:pPr>
+            <a:r>
+              <a:rPr sz="2400" lang="ja-JP" b="1">
+                <a:solidFill>
+                  <a:srgbClr val="303437"/>
+                </a:solidFill>
+                <a:latin typeface="Noto Sans"/>
+                <a:ea typeface="Noto Sans CJK JP"/>
+                <a:cs typeface="Noto Sans"/>
+              </a:rPr>
+              <a:t>COCO-Stuff: Thing and Stuff Classes in Context</a:t>
             </a:r>
           </a:p>
         </p:txBody>
@@ -26521,8 +26766,8 @@
         </p:nvSpPr>
         <p:spPr>
           <a:xfrm>
-            <a:off x="594360" y="1655064"/>
-            <a:ext cx="7955279" cy="594360"/>
+            <a:off x="594360" y="1600200"/>
+            <a:ext cx="7955279" cy="566928"/>
           </a:xfrm>
           <a:prstGeom prst="rect">
             <a:avLst/>
@@ -26530,23 +26775,23 @@
           <a:noFill/>
         </p:spPr>
         <p:txBody>
-          <a:bodyPr wrap="square" lIns="0" rIns="0" tIns="0" bIns="0" anchor="t">
+          <a:bodyPr wrap="square" lIns="0" rIns="0" tIns="0" bIns="0">
             <a:spAutoFit/>
           </a:bodyPr>
           <a:lstStyle/>
           <a:p>
             <a:pPr>
               <a:lnSpc>
-                <a:spcPct val="105000"/>
-              </a:lnSpc>
-              <a:spcBef>
-                <a:spcPts val="0"/>
-              </a:spcBef>
-              <a:spcAft>
-                <a:spcPts val="0"/>
-              </a:spcAft>
-              <a:buNone/>
-              <a:defRPr sz="1300" b="0" lang="ja-JP">
+                <a:spcPct val="110000"/>
+              </a:lnSpc>
+              <a:spcBef>
+                <a:spcPts val="0"/>
+              </a:spcBef>
+              <a:spcAft>
+                <a:spcPts val="0"/>
+              </a:spcAft>
+              <a:buNone/>
+              <a:defRPr sz="1400" lang="ja-JP" b="0">
                 <a:solidFill>
                   <a:srgbClr val="626669"/>
                 </a:solidFill>
@@ -26556,7 +26801,7 @@
               </a:defRPr>
             </a:pPr>
             <a:r>
-              <a:rPr sz="1300" b="0" lang="ja-JP">
+              <a:rPr sz="1400" lang="ja-JP" b="0">
                 <a:solidFill>
                   <a:srgbClr val="626669"/>
                 </a:solidFill>
@@ -26564,22 +26809,22 @@
                 <a:ea typeface="Noto Sans CJK JP"/>
                 <a:cs typeface="Noto Sans"/>
               </a:rPr>
-              <a:t>Kaiming He, Georgia Gkioxari, Piotr Dollár, Ross Girshick (2017).</a:t>
+              <a:t>Holger Caesar, Jasper Uijlings, Vittorio Ferrari (2018).</a:t>
             </a:r>
           </a:p>
           <a:p>
             <a:pPr>
               <a:lnSpc>
-                <a:spcPct val="105000"/>
-              </a:lnSpc>
-              <a:spcBef>
-                <a:spcPts val="0"/>
-              </a:spcBef>
-              <a:spcAft>
-                <a:spcPts val="0"/>
-              </a:spcAft>
-              <a:buNone/>
-              <a:defRPr sz="1300" b="0" lang="ja-JP">
+                <a:spcPct val="110000"/>
+              </a:lnSpc>
+              <a:spcBef>
+                <a:spcPts val="0"/>
+              </a:spcBef>
+              <a:spcAft>
+                <a:spcPts val="0"/>
+              </a:spcAft>
+              <a:buNone/>
+              <a:defRPr sz="1400" lang="ja-JP" b="0">
                 <a:solidFill>
                   <a:srgbClr val="626669"/>
                 </a:solidFill>
@@ -26589,7 +26834,7 @@
               </a:defRPr>
             </a:pPr>
             <a:r>
-              <a:rPr sz="1300" b="0" lang="ja-JP">
+              <a:rPr sz="1400" lang="ja-JP" b="0">
                 <a:solidFill>
                   <a:srgbClr val="626669"/>
                 </a:solidFill>
@@ -26597,7 +26842,7 @@
                 <a:ea typeface="Noto Sans CJK JP"/>
                 <a:cs typeface="Noto Sans"/>
               </a:rPr>
-              <a:t>IEEE International Conference on Computer Vision (ICCV), pp. 2961–2969.</a:t>
+              <a:t>IEEE/CVF Conference on Computer Vision and Pattern Recognition (CVPR), pp. 1209–1218.</a:t>
             </a:r>
           </a:p>
         </p:txBody>
@@ -26611,7 +26856,7 @@
         <p:spPr>
           <a:xfrm>
             <a:off x="594360" y="2194560"/>
-            <a:ext cx="7955279" cy="521207"/>
+            <a:ext cx="7955279" cy="475488"/>
           </a:xfrm>
           <a:prstGeom prst="rect">
             <a:avLst/>
@@ -26619,41 +26864,41 @@
           <a:noFill/>
         </p:spPr>
         <p:txBody>
-          <a:bodyPr wrap="square" lIns="0" rIns="0" tIns="0" bIns="0" anchor="t">
+          <a:bodyPr wrap="square" lIns="0" rIns="0" tIns="0" bIns="0">
             <a:spAutoFit/>
           </a:bodyPr>
           <a:lstStyle/>
           <a:p>
             <a:pPr>
               <a:lnSpc>
-                <a:spcPct val="105000"/>
-              </a:lnSpc>
-              <a:spcBef>
-                <a:spcPts val="0"/>
-              </a:spcBef>
-              <a:spcAft>
-                <a:spcPts val="0"/>
-              </a:spcAft>
-              <a:buNone/>
-              <a:defRPr sz="1800" b="0" lang="ja-JP">
-                <a:solidFill>
-                  <a:srgbClr val="303437"/>
-                </a:solidFill>
-                <a:latin typeface="Noto Sans"/>
-                <a:ea typeface="Noto Sans CJK JP"/>
-                <a:cs typeface="Noto Sans"/>
-              </a:defRPr>
-            </a:pPr>
-            <a:r>
-              <a:rPr sz="1800" b="0" lang="ja-JP">
-                <a:solidFill>
-                  <a:srgbClr val="303437"/>
-                </a:solidFill>
-                <a:latin typeface="Noto Sans"/>
-                <a:ea typeface="Noto Sans CJK JP"/>
-                <a:cs typeface="Noto Sans"/>
-              </a:rPr>
-              <a:t>検出器へ物体ごとのマスク予測を加えた代表的な領域分割モデル。COCO上で検出・分割・人物姿勢の評価を報告する。</a:t>
+                <a:spcPct val="110000"/>
+              </a:lnSpc>
+              <a:spcBef>
+                <a:spcPts val="0"/>
+              </a:spcBef>
+              <a:spcAft>
+                <a:spcPts val="0"/>
+              </a:spcAft>
+              <a:buNone/>
+              <a:defRPr sz="1800" lang="ja-JP" b="0">
+                <a:solidFill>
+                  <a:srgbClr val="303437"/>
+                </a:solidFill>
+                <a:latin typeface="Noto Sans"/>
+                <a:ea typeface="Noto Sans CJK JP"/>
+                <a:cs typeface="Noto Sans"/>
+              </a:defRPr>
+            </a:pPr>
+            <a:r>
+              <a:rPr sz="1800" lang="ja-JP" b="0">
+                <a:solidFill>
+                  <a:srgbClr val="303437"/>
+                </a:solidFill>
+                <a:latin typeface="Noto Sans"/>
+                <a:ea typeface="Noto Sans CJK JP"/>
+                <a:cs typeface="Noto Sans"/>
+              </a:rPr>
+              <a:t>COCOへ背景の画素注釈を加え、物体と背景を含む場面理解を扱う研究。</a:t>
             </a:r>
           </a:p>
         </p:txBody>
@@ -26666,8 +26911,8 @@
         </p:nvSpPr>
         <p:spPr>
           <a:xfrm>
-            <a:off x="594360" y="2916936"/>
-            <a:ext cx="7955279" cy="182880"/>
+            <a:off x="594360" y="2651760"/>
+            <a:ext cx="7955279" cy="228600"/>
           </a:xfrm>
           <a:prstGeom prst="rect">
             <a:avLst/>
@@ -26675,23 +26920,23 @@
           <a:noFill/>
         </p:spPr>
         <p:txBody>
-          <a:bodyPr wrap="square" lIns="0" rIns="0" tIns="0" bIns="0" anchor="t">
+          <a:bodyPr wrap="square" lIns="0" rIns="0" tIns="0" bIns="0">
             <a:spAutoFit/>
           </a:bodyPr>
           <a:lstStyle/>
           <a:p>
             <a:pPr>
               <a:lnSpc>
-                <a:spcPct val="105000"/>
-              </a:lnSpc>
-              <a:spcBef>
-                <a:spcPts val="0"/>
-              </a:spcBef>
-              <a:spcAft>
-                <a:spcPts val="0"/>
-              </a:spcAft>
-              <a:buNone/>
-              <a:defRPr sz="1100" b="0" lang="ja-JP">
+                <a:spcPct val="110000"/>
+              </a:lnSpc>
+              <a:spcBef>
+                <a:spcPts val="0"/>
+              </a:spcBef>
+              <a:spcAft>
+                <a:spcPts val="0"/>
+              </a:spcAft>
+              <a:buNone/>
+              <a:defRPr sz="1150" lang="ja-JP" b="0">
                 <a:solidFill>
                   <a:srgbClr val="626669"/>
                 </a:solidFill>
@@ -26701,7 +26946,7 @@
               </a:defRPr>
             </a:pPr>
             <a:r>
-              <a:rPr sz="1100" b="0" lang="ja-JP">
+              <a:rPr sz="1150" lang="ja-JP" b="0">
                 <a:solidFill>
                   <a:srgbClr val="626669"/>
                 </a:solidFill>
@@ -26710,7 +26955,7 @@
                 <a:cs typeface="Noto Sans"/>
                 <a:hlinkClick r:id="rId3"/>
               </a:rPr>
-              <a:t>https://arxiv.org/abs/1703.06870</a:t>
+              <a:t>https://arxiv.org/abs/1612.03716</a:t>
             </a:r>
           </a:p>
         </p:txBody>
@@ -26723,8 +26968,8 @@
         </p:nvSpPr>
         <p:spPr>
           <a:xfrm>
-            <a:off x="594360" y="3200400"/>
-            <a:ext cx="7955279" cy="292608"/>
+            <a:off x="594360" y="3182112"/>
+            <a:ext cx="7955279" cy="411480"/>
           </a:xfrm>
           <a:prstGeom prst="rect">
             <a:avLst/>
@@ -26732,41 +26977,41 @@
           <a:noFill/>
         </p:spPr>
         <p:txBody>
-          <a:bodyPr wrap="square" lIns="0" rIns="0" tIns="0" bIns="0" anchor="t">
+          <a:bodyPr wrap="square" lIns="0" rIns="0" tIns="0" bIns="0">
             <a:spAutoFit/>
           </a:bodyPr>
           <a:lstStyle/>
           <a:p>
             <a:pPr>
               <a:lnSpc>
-                <a:spcPct val="105000"/>
-              </a:lnSpc>
-              <a:spcBef>
-                <a:spcPts val="0"/>
-              </a:spcBef>
-              <a:spcAft>
-                <a:spcPts val="0"/>
-              </a:spcAft>
-              <a:buNone/>
-              <a:defRPr sz="2000" b="0" lang="ja-JP">
-                <a:solidFill>
-                  <a:srgbClr val="303437"/>
-                </a:solidFill>
-                <a:latin typeface="Noto Sans"/>
-                <a:ea typeface="Noto Sans CJK JP"/>
-                <a:cs typeface="Noto Sans"/>
-              </a:defRPr>
-            </a:pPr>
-            <a:r>
-              <a:rPr sz="2000" b="0" lang="ja-JP">
-                <a:solidFill>
-                  <a:srgbClr val="303437"/>
-                </a:solidFill>
-                <a:latin typeface="Noto Sans"/>
-                <a:ea typeface="Noto Sans CJK JP"/>
-                <a:cs typeface="Noto Sans"/>
-              </a:rPr>
-              <a:t>LVIS: A Dataset for Large Vocabulary Instance Segmentation</a:t>
+                <a:spcPct val="110000"/>
+              </a:lnSpc>
+              <a:spcBef>
+                <a:spcPts val="0"/>
+              </a:spcBef>
+              <a:spcAft>
+                <a:spcPts val="0"/>
+              </a:spcAft>
+              <a:buNone/>
+              <a:defRPr sz="2400" lang="ja-JP" b="1">
+                <a:solidFill>
+                  <a:srgbClr val="303437"/>
+                </a:solidFill>
+                <a:latin typeface="Noto Sans"/>
+                <a:ea typeface="Noto Sans CJK JP"/>
+                <a:cs typeface="Noto Sans"/>
+              </a:defRPr>
+            </a:pPr>
+            <a:r>
+              <a:rPr sz="2400" lang="ja-JP" b="1">
+                <a:solidFill>
+                  <a:srgbClr val="303437"/>
+                </a:solidFill>
+                <a:latin typeface="Noto Sans"/>
+                <a:ea typeface="Noto Sans CJK JP"/>
+                <a:cs typeface="Noto Sans"/>
+              </a:rPr>
+              <a:t>Panoptic Segmentation</a:t>
             </a:r>
           </a:p>
         </p:txBody>
@@ -26779,8 +27024,8 @@
         </p:nvSpPr>
         <p:spPr>
           <a:xfrm>
-            <a:off x="594360" y="3621024"/>
-            <a:ext cx="7955279" cy="594360"/>
+            <a:off x="594360" y="3730752"/>
+            <a:ext cx="7955279" cy="566928"/>
           </a:xfrm>
           <a:prstGeom prst="rect">
             <a:avLst/>
@@ -26788,23 +27033,23 @@
           <a:noFill/>
         </p:spPr>
         <p:txBody>
-          <a:bodyPr wrap="square" lIns="0" rIns="0" tIns="0" bIns="0" anchor="t">
+          <a:bodyPr wrap="square" lIns="0" rIns="0" tIns="0" bIns="0">
             <a:spAutoFit/>
           </a:bodyPr>
           <a:lstStyle/>
           <a:p>
             <a:pPr>
               <a:lnSpc>
-                <a:spcPct val="105000"/>
-              </a:lnSpc>
-              <a:spcBef>
-                <a:spcPts val="0"/>
-              </a:spcBef>
-              <a:spcAft>
-                <a:spcPts val="0"/>
-              </a:spcAft>
-              <a:buNone/>
-              <a:defRPr sz="1300" b="0" lang="ja-JP">
+                <a:spcPct val="110000"/>
+              </a:lnSpc>
+              <a:spcBef>
+                <a:spcPts val="0"/>
+              </a:spcBef>
+              <a:spcAft>
+                <a:spcPts val="0"/>
+              </a:spcAft>
+              <a:buNone/>
+              <a:defRPr sz="1400" lang="ja-JP" b="0">
                 <a:solidFill>
                   <a:srgbClr val="626669"/>
                 </a:solidFill>
@@ -26814,7 +27059,7 @@
               </a:defRPr>
             </a:pPr>
             <a:r>
-              <a:rPr sz="1300" b="0" lang="ja-JP">
+              <a:rPr sz="1400" lang="ja-JP" b="0">
                 <a:solidFill>
                   <a:srgbClr val="626669"/>
                 </a:solidFill>
@@ -26822,22 +27067,22 @@
                 <a:ea typeface="Noto Sans CJK JP"/>
                 <a:cs typeface="Noto Sans"/>
               </a:rPr>
-              <a:t>Agrim Gupta, Piotr Dollár, Ross Girshick (2019).</a:t>
+              <a:t>Alexander Kirillov, Kaiming He, Ross Girshick, Carsten Rother, Piotr Dollár (2019).</a:t>
             </a:r>
           </a:p>
           <a:p>
             <a:pPr>
               <a:lnSpc>
-                <a:spcPct val="105000"/>
-              </a:lnSpc>
-              <a:spcBef>
-                <a:spcPts val="0"/>
-              </a:spcBef>
-              <a:spcAft>
-                <a:spcPts val="0"/>
-              </a:spcAft>
-              <a:buNone/>
-              <a:defRPr sz="1300" b="0" lang="ja-JP">
+                <a:spcPct val="110000"/>
+              </a:lnSpc>
+              <a:spcBef>
+                <a:spcPts val="0"/>
+              </a:spcBef>
+              <a:spcAft>
+                <a:spcPts val="0"/>
+              </a:spcAft>
+              <a:buNone/>
+              <a:defRPr sz="1400" lang="ja-JP" b="0">
                 <a:solidFill>
                   <a:srgbClr val="626669"/>
                 </a:solidFill>
@@ -26847,7 +27092,7 @@
               </a:defRPr>
             </a:pPr>
             <a:r>
-              <a:rPr sz="1300" b="0" lang="ja-JP">
+              <a:rPr sz="1400" lang="ja-JP" b="0">
                 <a:solidFill>
                   <a:srgbClr val="626669"/>
                 </a:solidFill>
@@ -26855,7 +27100,7 @@
                 <a:ea typeface="Noto Sans CJK JP"/>
                 <a:cs typeface="Noto Sans"/>
               </a:rPr>
-              <a:t>IEEE/CVF Conference on Computer Vision and Pattern Recognition (CVPR), pp. 5356–5364.</a:t>
+              <a:t>IEEE/CVF Conference on Computer Vision and Pattern Recognition (CVPR), pp. 9404–9413.</a:t>
             </a:r>
           </a:p>
         </p:txBody>
@@ -26868,8 +27113,8 @@
         </p:nvSpPr>
         <p:spPr>
           <a:xfrm>
-            <a:off x="594360" y="4160520"/>
-            <a:ext cx="7955279" cy="521207"/>
+            <a:off x="594360" y="4325112"/>
+            <a:ext cx="7955279" cy="475488"/>
           </a:xfrm>
           <a:prstGeom prst="rect">
             <a:avLst/>
@@ -26877,41 +27122,41 @@
           <a:noFill/>
         </p:spPr>
         <p:txBody>
-          <a:bodyPr wrap="square" lIns="0" rIns="0" tIns="0" bIns="0" anchor="t">
+          <a:bodyPr wrap="square" lIns="0" rIns="0" tIns="0" bIns="0">
             <a:spAutoFit/>
           </a:bodyPr>
           <a:lstStyle/>
           <a:p>
             <a:pPr>
               <a:lnSpc>
-                <a:spcPct val="105000"/>
-              </a:lnSpc>
-              <a:spcBef>
-                <a:spcPts val="0"/>
-              </a:spcBef>
-              <a:spcAft>
-                <a:spcPts val="0"/>
-              </a:spcAft>
-              <a:buNone/>
-              <a:defRPr sz="1800" b="0" lang="ja-JP">
-                <a:solidFill>
-                  <a:srgbClr val="303437"/>
-                </a:solidFill>
-                <a:latin typeface="Noto Sans"/>
-                <a:ea typeface="Noto Sans CJK JP"/>
-                <a:cs typeface="Noto Sans"/>
-              </a:defRPr>
-            </a:pPr>
-            <a:r>
-              <a:rPr sz="1800" b="0" lang="ja-JP">
-                <a:solidFill>
-                  <a:srgbClr val="303437"/>
-                </a:solidFill>
-                <a:latin typeface="Noto Sans"/>
-                <a:ea typeface="Noto Sans CJK JP"/>
-                <a:cs typeface="Noto Sans"/>
-              </a:rPr>
-              <a:t>COCO画像へ大語彙の物体領域注釈を追加した後続データセット。まれなカテゴリを含む長い裾の分布を評価対象にする。</a:t>
+                <a:spcPct val="110000"/>
+              </a:lnSpc>
+              <a:spcBef>
+                <a:spcPts val="0"/>
+              </a:spcBef>
+              <a:spcAft>
+                <a:spcPts val="0"/>
+              </a:spcAft>
+              <a:buNone/>
+              <a:defRPr sz="1800" lang="ja-JP" b="0">
+                <a:solidFill>
+                  <a:srgbClr val="303437"/>
+                </a:solidFill>
+                <a:latin typeface="Noto Sans"/>
+                <a:ea typeface="Noto Sans CJK JP"/>
+                <a:cs typeface="Noto Sans"/>
+              </a:defRPr>
+            </a:pPr>
+            <a:r>
+              <a:rPr sz="1800" lang="ja-JP" b="0">
+                <a:solidFill>
+                  <a:srgbClr val="303437"/>
+                </a:solidFill>
+                <a:latin typeface="Noto Sans"/>
+                <a:ea typeface="Noto Sans CJK JP"/>
+                <a:cs typeface="Noto Sans"/>
+              </a:rPr>
+              <a:t>意味的領域分割と個体ごとの分割を統合し、共通指標PQを提案する。</a:t>
             </a:r>
           </a:p>
         </p:txBody>
@@ -26924,8 +27169,8 @@
         </p:nvSpPr>
         <p:spPr>
           <a:xfrm>
-            <a:off x="594360" y="4882896"/>
-            <a:ext cx="7955279" cy="182880"/>
+            <a:off x="594360" y="4782312"/>
+            <a:ext cx="7955279" cy="228600"/>
           </a:xfrm>
           <a:prstGeom prst="rect">
             <a:avLst/>
@@ -26933,23 +27178,23 @@
           <a:noFill/>
         </p:spPr>
         <p:txBody>
-          <a:bodyPr wrap="square" lIns="0" rIns="0" tIns="0" bIns="0" anchor="t">
+          <a:bodyPr wrap="square" lIns="0" rIns="0" tIns="0" bIns="0">
             <a:spAutoFit/>
           </a:bodyPr>
           <a:lstStyle/>
           <a:p>
             <a:pPr>
               <a:lnSpc>
-                <a:spcPct val="105000"/>
-              </a:lnSpc>
-              <a:spcBef>
-                <a:spcPts val="0"/>
-              </a:spcBef>
-              <a:spcAft>
-                <a:spcPts val="0"/>
-              </a:spcAft>
-              <a:buNone/>
-              <a:defRPr sz="1100" b="0" lang="ja-JP">
+                <a:spcPct val="110000"/>
+              </a:lnSpc>
+              <a:spcBef>
+                <a:spcPts val="0"/>
+              </a:spcBef>
+              <a:spcAft>
+                <a:spcPts val="0"/>
+              </a:spcAft>
+              <a:buNone/>
+              <a:defRPr sz="1150" lang="ja-JP" b="0">
                 <a:solidFill>
                   <a:srgbClr val="626669"/>
                 </a:solidFill>
@@ -26959,7 +27204,7 @@
               </a:defRPr>
             </a:pPr>
             <a:r>
-              <a:rPr sz="1100" b="0" lang="ja-JP">
+              <a:rPr sz="1150" lang="ja-JP" b="0">
                 <a:solidFill>
                   <a:srgbClr val="626669"/>
                 </a:solidFill>
@@ -26968,11 +27213,723 @@
                 <a:cs typeface="Noto Sans"/>
                 <a:hlinkClick r:id="rId4"/>
               </a:rPr>
-              <a:t>https://arxiv.org/abs/1908.03195</a:t>
+              <a:t>https://arxiv.org/abs/1801.00868</a:t>
             </a:r>
           </a:p>
         </p:txBody>
       </p:sp>
+      <p:cxnSp>
+        <p:nvCxnSpPr>
+          <p:cNvPr id="12" name="Connector 11"/>
+          <p:cNvCxnSpPr/>
+          <p:nvPr/>
+        </p:nvCxnSpPr>
+        <p:spPr>
+          <a:xfrm>
+            <a:off x="594360" y="2999232"/>
+            <a:ext cx="7955280" cy="0"/>
+          </a:xfrm>
+          <a:prstGeom prst="line">
+            <a:avLst/>
+          </a:prstGeom>
+          <a:ln w="10160">
+            <a:solidFill>
+              <a:srgbClr val="626669"/>
+            </a:solidFill>
+          </a:ln>
+        </p:spPr>
+        <p:style>
+          <a:lnRef idx="2">
+            <a:schemeClr val="accent1"/>
+          </a:lnRef>
+          <a:fillRef idx="0">
+            <a:schemeClr val="accent1"/>
+          </a:fillRef>
+          <a:effectRef idx="1">
+            <a:schemeClr val="accent1"/>
+          </a:effectRef>
+          <a:fontRef idx="minor">
+            <a:schemeClr val="tx1"/>
+          </a:fontRef>
+        </p:style>
+      </p:cxnSp>
+    </p:spTree>
+  </p:cSld>
+  <p:clrMapOvr>
+    <a:masterClrMapping/>
+  </p:clrMapOvr>
+</p:sld>
+</file>
+
+<file path=ppt/slides/slide58.xml><?xml version="1.0" encoding="utf-8"?>
+<p:sld xmlns:a="http://schemas.openxmlformats.org/drawingml/2006/main" xmlns:p="http://schemas.openxmlformats.org/presentationml/2006/main" xmlns:r="http://schemas.openxmlformats.org/officeDocument/2006/relationships">
+  <p:cSld>
+    <p:spTree>
+      <p:nvGrpSpPr>
+        <p:cNvPr id="1" name=""/>
+        <p:cNvGrpSpPr/>
+        <p:nvPr/>
+      </p:nvGrpSpPr>
+      <p:grpSpPr/>
+      <p:sp>
+        <p:nvSpPr>
+          <p:cNvPr id="2" name="Title 1"/>
+          <p:cNvSpPr>
+            <a:spLocks noGrp="1"/>
+          </p:cNvSpPr>
+          <p:nvPr>
+            <p:ph type="title"/>
+          </p:nvPr>
+        </p:nvSpPr>
+        <p:spPr>
+          <a:xfrm>
+            <a:off x="468172" y="650138"/>
+            <a:ext cx="8206740" cy="616305"/>
+          </a:xfrm>
+        </p:spPr>
+        <p:txBody>
+          <a:bodyPr wrap="square" anchor="t" lIns="0" rIns="0" tIns="0" bIns="0"/>
+          <a:lstStyle/>
+          <a:p>
+            <a:pPr algn="l">
+              <a:lnSpc>
+                <a:spcPct val="115000"/>
+              </a:lnSpc>
+              <a:spcBef>
+                <a:spcPts val="0"/>
+              </a:spcBef>
+              <a:spcAft>
+                <a:spcPts val="0"/>
+              </a:spcAft>
+              <a:buNone/>
+              <a:defRPr lang="ja-JP" sz="2800" b="1">
+                <a:solidFill>
+                  <a:srgbClr val="303437"/>
+                </a:solidFill>
+                <a:latin typeface="Noto Sans"/>
+                <a:ea typeface="Noto Sans CJK JP"/>
+                <a:cs typeface="Noto Sans"/>
+              </a:defRPr>
+            </a:pPr>
+            <a:r>
+              <a:rPr lang="ja-JP" sz="2800" b="1">
+                <a:solidFill>
+                  <a:srgbClr val="303437"/>
+                </a:solidFill>
+                <a:latin typeface="Noto Sans"/>
+                <a:ea typeface="Noto Sans CJK JP"/>
+                <a:cs typeface="Noto Sans"/>
+              </a:rPr>
+              <a:t/>
+            </a:r>
+          </a:p>
+        </p:txBody>
+      </p:sp>
+      <p:sp>
+        <p:nvSpPr>
+          <p:cNvPr id="3" name="Title 2"/>
+          <p:cNvSpPr>
+            <a:spLocks noGrp="1"/>
+          </p:cNvSpPr>
+          <p:nvPr>
+            <p:ph type="title" idx="2"/>
+          </p:nvPr>
+        </p:nvSpPr>
+        <p:spPr>
+          <a:xfrm>
+            <a:off x="75895" y="0"/>
+            <a:ext cx="8115300" cy="480060"/>
+          </a:xfrm>
+        </p:spPr>
+        <p:txBody>
+          <a:bodyPr wrap="square" anchor="ctr" lIns="0" rIns="0" tIns="0" bIns="0"/>
+          <a:lstStyle/>
+          <a:p>
+            <a:pPr algn="l">
+              <a:lnSpc>
+                <a:spcPct val="100000"/>
+              </a:lnSpc>
+              <a:spcBef>
+                <a:spcPts val="0"/>
+              </a:spcBef>
+              <a:spcAft>
+                <a:spcPts val="0"/>
+              </a:spcAft>
+              <a:buNone/>
+              <a:defRPr lang="ja-JP" sz="1400" b="1">
+                <a:solidFill>
+                  <a:srgbClr val="FFFEF8"/>
+                </a:solidFill>
+                <a:latin typeface="Noto Sans"/>
+                <a:ea typeface="Noto Sans CJK JP"/>
+                <a:cs typeface="Noto Sans"/>
+              </a:defRPr>
+            </a:pPr>
+            <a:r>
+              <a:rPr lang="ja-JP" sz="1400" b="1">
+                <a:solidFill>
+                  <a:srgbClr val="FFFEF8"/>
+                </a:solidFill>
+                <a:latin typeface="Noto Sans"/>
+                <a:ea typeface="Noto Sans CJK JP"/>
+                <a:cs typeface="Noto Sans"/>
+              </a:rPr>
+              <a:t>Appendix 5 参考文献</a:t>
+            </a:r>
+          </a:p>
+        </p:txBody>
+      </p:sp>
+      <p:sp>
+        <p:nvSpPr>
+          <p:cNvPr id="4" name="TextBox 3"/>
+          <p:cNvSpPr txBox="1"/>
+          <p:nvPr/>
+        </p:nvSpPr>
+        <p:spPr>
+          <a:xfrm>
+            <a:off x="594360" y="1051560"/>
+            <a:ext cx="7955279" cy="411480"/>
+          </a:xfrm>
+          <a:prstGeom prst="rect">
+            <a:avLst/>
+          </a:prstGeom>
+          <a:noFill/>
+        </p:spPr>
+        <p:txBody>
+          <a:bodyPr wrap="square" lIns="0" rIns="0" tIns="0" bIns="0">
+            <a:spAutoFit/>
+          </a:bodyPr>
+          <a:lstStyle/>
+          <a:p>
+            <a:pPr>
+              <a:lnSpc>
+                <a:spcPct val="110000"/>
+              </a:lnSpc>
+              <a:spcBef>
+                <a:spcPts val="0"/>
+              </a:spcBef>
+              <a:spcAft>
+                <a:spcPts val="0"/>
+              </a:spcAft>
+              <a:buNone/>
+              <a:defRPr sz="2400" lang="ja-JP" b="1">
+                <a:solidFill>
+                  <a:srgbClr val="303437"/>
+                </a:solidFill>
+                <a:latin typeface="Noto Sans"/>
+                <a:ea typeface="Noto Sans CJK JP"/>
+                <a:cs typeface="Noto Sans"/>
+              </a:defRPr>
+            </a:pPr>
+            <a:r>
+              <a:rPr sz="2400" lang="ja-JP" b="1">
+                <a:solidFill>
+                  <a:srgbClr val="303437"/>
+                </a:solidFill>
+                <a:latin typeface="Noto Sans"/>
+                <a:ea typeface="Noto Sans CJK JP"/>
+                <a:cs typeface="Noto Sans"/>
+              </a:rPr>
+              <a:t>Mask R-CNN</a:t>
+            </a:r>
+          </a:p>
+        </p:txBody>
+      </p:sp>
+      <p:sp>
+        <p:nvSpPr>
+          <p:cNvPr id="5" name="TextBox 4"/>
+          <p:cNvSpPr txBox="1"/>
+          <p:nvPr/>
+        </p:nvSpPr>
+        <p:spPr>
+          <a:xfrm>
+            <a:off x="594360" y="1600200"/>
+            <a:ext cx="7955279" cy="566928"/>
+          </a:xfrm>
+          <a:prstGeom prst="rect">
+            <a:avLst/>
+          </a:prstGeom>
+          <a:noFill/>
+        </p:spPr>
+        <p:txBody>
+          <a:bodyPr wrap="square" lIns="0" rIns="0" tIns="0" bIns="0">
+            <a:spAutoFit/>
+          </a:bodyPr>
+          <a:lstStyle/>
+          <a:p>
+            <a:pPr>
+              <a:lnSpc>
+                <a:spcPct val="110000"/>
+              </a:lnSpc>
+              <a:spcBef>
+                <a:spcPts val="0"/>
+              </a:spcBef>
+              <a:spcAft>
+                <a:spcPts val="0"/>
+              </a:spcAft>
+              <a:buNone/>
+              <a:defRPr sz="1400" lang="ja-JP" b="0">
+                <a:solidFill>
+                  <a:srgbClr val="626669"/>
+                </a:solidFill>
+                <a:latin typeface="Noto Sans"/>
+                <a:ea typeface="Noto Sans CJK JP"/>
+                <a:cs typeface="Noto Sans"/>
+              </a:defRPr>
+            </a:pPr>
+            <a:r>
+              <a:rPr sz="1400" lang="ja-JP" b="0">
+                <a:solidFill>
+                  <a:srgbClr val="626669"/>
+                </a:solidFill>
+                <a:latin typeface="Noto Sans"/>
+                <a:ea typeface="Noto Sans CJK JP"/>
+                <a:cs typeface="Noto Sans"/>
+              </a:rPr>
+              <a:t>Kaiming He, Georgia Gkioxari, Piotr Dollár, Ross Girshick (2017).</a:t>
+            </a:r>
+          </a:p>
+          <a:p>
+            <a:pPr>
+              <a:lnSpc>
+                <a:spcPct val="110000"/>
+              </a:lnSpc>
+              <a:spcBef>
+                <a:spcPts val="0"/>
+              </a:spcBef>
+              <a:spcAft>
+                <a:spcPts val="0"/>
+              </a:spcAft>
+              <a:buNone/>
+              <a:defRPr sz="1400" lang="ja-JP" b="0">
+                <a:solidFill>
+                  <a:srgbClr val="626669"/>
+                </a:solidFill>
+                <a:latin typeface="Noto Sans"/>
+                <a:ea typeface="Noto Sans CJK JP"/>
+                <a:cs typeface="Noto Sans"/>
+              </a:defRPr>
+            </a:pPr>
+            <a:r>
+              <a:rPr sz="1400" lang="ja-JP" b="0">
+                <a:solidFill>
+                  <a:srgbClr val="626669"/>
+                </a:solidFill>
+                <a:latin typeface="Noto Sans"/>
+                <a:ea typeface="Noto Sans CJK JP"/>
+                <a:cs typeface="Noto Sans"/>
+              </a:rPr>
+              <a:t>IEEE International Conference on Computer Vision (ICCV), pp. 2961–2969.</a:t>
+            </a:r>
+          </a:p>
+        </p:txBody>
+      </p:sp>
+      <p:sp>
+        <p:nvSpPr>
+          <p:cNvPr id="6" name="TextBox 5"/>
+          <p:cNvSpPr txBox="1"/>
+          <p:nvPr/>
+        </p:nvSpPr>
+        <p:spPr>
+          <a:xfrm>
+            <a:off x="594360" y="2194560"/>
+            <a:ext cx="7955279" cy="475488"/>
+          </a:xfrm>
+          <a:prstGeom prst="rect">
+            <a:avLst/>
+          </a:prstGeom>
+          <a:noFill/>
+        </p:spPr>
+        <p:txBody>
+          <a:bodyPr wrap="square" lIns="0" rIns="0" tIns="0" bIns="0">
+            <a:spAutoFit/>
+          </a:bodyPr>
+          <a:lstStyle/>
+          <a:p>
+            <a:pPr>
+              <a:lnSpc>
+                <a:spcPct val="110000"/>
+              </a:lnSpc>
+              <a:spcBef>
+                <a:spcPts val="0"/>
+              </a:spcBef>
+              <a:spcAft>
+                <a:spcPts val="0"/>
+              </a:spcAft>
+              <a:buNone/>
+              <a:defRPr sz="1800" lang="ja-JP" b="0">
+                <a:solidFill>
+                  <a:srgbClr val="303437"/>
+                </a:solidFill>
+                <a:latin typeface="Noto Sans"/>
+                <a:ea typeface="Noto Sans CJK JP"/>
+                <a:cs typeface="Noto Sans"/>
+              </a:defRPr>
+            </a:pPr>
+            <a:r>
+              <a:rPr sz="1800" lang="ja-JP" b="0">
+                <a:solidFill>
+                  <a:srgbClr val="303437"/>
+                </a:solidFill>
+                <a:latin typeface="Noto Sans"/>
+                <a:ea typeface="Noto Sans CJK JP"/>
+                <a:cs typeface="Noto Sans"/>
+              </a:rPr>
+              <a:t>物体ごとのマスク予測を検出器に加えた、COCOの代表的な分割モデル。</a:t>
+            </a:r>
+          </a:p>
+        </p:txBody>
+      </p:sp>
+      <p:sp>
+        <p:nvSpPr>
+          <p:cNvPr id="7" name="TextBox 6"/>
+          <p:cNvSpPr txBox="1"/>
+          <p:nvPr/>
+        </p:nvSpPr>
+        <p:spPr>
+          <a:xfrm>
+            <a:off x="594360" y="2651760"/>
+            <a:ext cx="7955279" cy="228600"/>
+          </a:xfrm>
+          <a:prstGeom prst="rect">
+            <a:avLst/>
+          </a:prstGeom>
+          <a:noFill/>
+        </p:spPr>
+        <p:txBody>
+          <a:bodyPr wrap="square" lIns="0" rIns="0" tIns="0" bIns="0">
+            <a:spAutoFit/>
+          </a:bodyPr>
+          <a:lstStyle/>
+          <a:p>
+            <a:pPr>
+              <a:lnSpc>
+                <a:spcPct val="110000"/>
+              </a:lnSpc>
+              <a:spcBef>
+                <a:spcPts val="0"/>
+              </a:spcBef>
+              <a:spcAft>
+                <a:spcPts val="0"/>
+              </a:spcAft>
+              <a:buNone/>
+              <a:defRPr sz="1150" lang="ja-JP" b="0">
+                <a:solidFill>
+                  <a:srgbClr val="626669"/>
+                </a:solidFill>
+                <a:latin typeface="Noto Sans"/>
+                <a:ea typeface="Noto Sans CJK JP"/>
+                <a:cs typeface="Noto Sans"/>
+              </a:defRPr>
+            </a:pPr>
+            <a:r>
+              <a:rPr sz="1150" lang="ja-JP" b="0">
+                <a:solidFill>
+                  <a:srgbClr val="626669"/>
+                </a:solidFill>
+                <a:latin typeface="Noto Sans"/>
+                <a:ea typeface="Noto Sans CJK JP"/>
+                <a:cs typeface="Noto Sans"/>
+                <a:hlinkClick r:id="rId3"/>
+              </a:rPr>
+              <a:t>https://arxiv.org/abs/1703.06870</a:t>
+            </a:r>
+          </a:p>
+        </p:txBody>
+      </p:sp>
+      <p:sp>
+        <p:nvSpPr>
+          <p:cNvPr id="8" name="TextBox 7"/>
+          <p:cNvSpPr txBox="1"/>
+          <p:nvPr/>
+        </p:nvSpPr>
+        <p:spPr>
+          <a:xfrm>
+            <a:off x="594360" y="3182112"/>
+            <a:ext cx="7955279" cy="411480"/>
+          </a:xfrm>
+          <a:prstGeom prst="rect">
+            <a:avLst/>
+          </a:prstGeom>
+          <a:noFill/>
+        </p:spPr>
+        <p:txBody>
+          <a:bodyPr wrap="square" lIns="0" rIns="0" tIns="0" bIns="0">
+            <a:spAutoFit/>
+          </a:bodyPr>
+          <a:lstStyle/>
+          <a:p>
+            <a:pPr>
+              <a:lnSpc>
+                <a:spcPct val="110000"/>
+              </a:lnSpc>
+              <a:spcBef>
+                <a:spcPts val="0"/>
+              </a:spcBef>
+              <a:spcAft>
+                <a:spcPts val="0"/>
+              </a:spcAft>
+              <a:buNone/>
+              <a:defRPr sz="2050" lang="ja-JP" b="1">
+                <a:solidFill>
+                  <a:srgbClr val="303437"/>
+                </a:solidFill>
+                <a:latin typeface="Noto Sans"/>
+                <a:ea typeface="Noto Sans CJK JP"/>
+                <a:cs typeface="Noto Sans"/>
+              </a:defRPr>
+            </a:pPr>
+            <a:r>
+              <a:rPr sz="2050" lang="ja-JP" b="1">
+                <a:solidFill>
+                  <a:srgbClr val="303437"/>
+                </a:solidFill>
+                <a:latin typeface="Noto Sans"/>
+                <a:ea typeface="Noto Sans CJK JP"/>
+                <a:cs typeface="Noto Sans"/>
+              </a:rPr>
+              <a:t>LVIS: A Dataset for Large Vocabulary Instance Segmentation</a:t>
+            </a:r>
+          </a:p>
+        </p:txBody>
+      </p:sp>
+      <p:sp>
+        <p:nvSpPr>
+          <p:cNvPr id="9" name="TextBox 8"/>
+          <p:cNvSpPr txBox="1"/>
+          <p:nvPr/>
+        </p:nvSpPr>
+        <p:spPr>
+          <a:xfrm>
+            <a:off x="594360" y="3730752"/>
+            <a:ext cx="7955279" cy="566928"/>
+          </a:xfrm>
+          <a:prstGeom prst="rect">
+            <a:avLst/>
+          </a:prstGeom>
+          <a:noFill/>
+        </p:spPr>
+        <p:txBody>
+          <a:bodyPr wrap="square" lIns="0" rIns="0" tIns="0" bIns="0">
+            <a:spAutoFit/>
+          </a:bodyPr>
+          <a:lstStyle/>
+          <a:p>
+            <a:pPr>
+              <a:lnSpc>
+                <a:spcPct val="110000"/>
+              </a:lnSpc>
+              <a:spcBef>
+                <a:spcPts val="0"/>
+              </a:spcBef>
+              <a:spcAft>
+                <a:spcPts val="0"/>
+              </a:spcAft>
+              <a:buNone/>
+              <a:defRPr sz="1400" lang="ja-JP" b="0">
+                <a:solidFill>
+                  <a:srgbClr val="626669"/>
+                </a:solidFill>
+                <a:latin typeface="Noto Sans"/>
+                <a:ea typeface="Noto Sans CJK JP"/>
+                <a:cs typeface="Noto Sans"/>
+              </a:defRPr>
+            </a:pPr>
+            <a:r>
+              <a:rPr sz="1400" lang="ja-JP" b="0">
+                <a:solidFill>
+                  <a:srgbClr val="626669"/>
+                </a:solidFill>
+                <a:latin typeface="Noto Sans"/>
+                <a:ea typeface="Noto Sans CJK JP"/>
+                <a:cs typeface="Noto Sans"/>
+              </a:rPr>
+              <a:t>Agrim Gupta, Piotr Dollár, Ross Girshick (2019).</a:t>
+            </a:r>
+          </a:p>
+          <a:p>
+            <a:pPr>
+              <a:lnSpc>
+                <a:spcPct val="110000"/>
+              </a:lnSpc>
+              <a:spcBef>
+                <a:spcPts val="0"/>
+              </a:spcBef>
+              <a:spcAft>
+                <a:spcPts val="0"/>
+              </a:spcAft>
+              <a:buNone/>
+              <a:defRPr sz="1400" lang="ja-JP" b="0">
+                <a:solidFill>
+                  <a:srgbClr val="626669"/>
+                </a:solidFill>
+                <a:latin typeface="Noto Sans"/>
+                <a:ea typeface="Noto Sans CJK JP"/>
+                <a:cs typeface="Noto Sans"/>
+              </a:defRPr>
+            </a:pPr>
+            <a:r>
+              <a:rPr sz="1400" lang="ja-JP" b="0">
+                <a:solidFill>
+                  <a:srgbClr val="626669"/>
+                </a:solidFill>
+                <a:latin typeface="Noto Sans"/>
+                <a:ea typeface="Noto Sans CJK JP"/>
+                <a:cs typeface="Noto Sans"/>
+              </a:rPr>
+              <a:t>IEEE/CVF Conference on Computer Vision and Pattern Recognition (CVPR), pp. 5356–5364.</a:t>
+            </a:r>
+          </a:p>
+        </p:txBody>
+      </p:sp>
+      <p:sp>
+        <p:nvSpPr>
+          <p:cNvPr id="10" name="TextBox 9"/>
+          <p:cNvSpPr txBox="1"/>
+          <p:nvPr/>
+        </p:nvSpPr>
+        <p:spPr>
+          <a:xfrm>
+            <a:off x="594360" y="4325112"/>
+            <a:ext cx="7955279" cy="475488"/>
+          </a:xfrm>
+          <a:prstGeom prst="rect">
+            <a:avLst/>
+          </a:prstGeom>
+          <a:noFill/>
+        </p:spPr>
+        <p:txBody>
+          <a:bodyPr wrap="square" lIns="0" rIns="0" tIns="0" bIns="0">
+            <a:spAutoFit/>
+          </a:bodyPr>
+          <a:lstStyle/>
+          <a:p>
+            <a:pPr>
+              <a:lnSpc>
+                <a:spcPct val="110000"/>
+              </a:lnSpc>
+              <a:spcBef>
+                <a:spcPts val="0"/>
+              </a:spcBef>
+              <a:spcAft>
+                <a:spcPts val="0"/>
+              </a:spcAft>
+              <a:buNone/>
+              <a:defRPr sz="1800" lang="ja-JP" b="0">
+                <a:solidFill>
+                  <a:srgbClr val="303437"/>
+                </a:solidFill>
+                <a:latin typeface="Noto Sans"/>
+                <a:ea typeface="Noto Sans CJK JP"/>
+                <a:cs typeface="Noto Sans"/>
+              </a:defRPr>
+            </a:pPr>
+            <a:r>
+              <a:rPr sz="1800" lang="ja-JP" b="0">
+                <a:solidFill>
+                  <a:srgbClr val="303437"/>
+                </a:solidFill>
+                <a:latin typeface="Noto Sans"/>
+                <a:ea typeface="Noto Sans CJK JP"/>
+                <a:cs typeface="Noto Sans"/>
+              </a:rPr>
+              <a:t>COCO画像に大語彙の領域注釈を加え、まれなカテゴリの認識を評価する。</a:t>
+            </a:r>
+          </a:p>
+        </p:txBody>
+      </p:sp>
+      <p:sp>
+        <p:nvSpPr>
+          <p:cNvPr id="11" name="TextBox 10"/>
+          <p:cNvSpPr txBox="1"/>
+          <p:nvPr/>
+        </p:nvSpPr>
+        <p:spPr>
+          <a:xfrm>
+            <a:off x="594360" y="4782312"/>
+            <a:ext cx="7955279" cy="228600"/>
+          </a:xfrm>
+          <a:prstGeom prst="rect">
+            <a:avLst/>
+          </a:prstGeom>
+          <a:noFill/>
+        </p:spPr>
+        <p:txBody>
+          <a:bodyPr wrap="square" lIns="0" rIns="0" tIns="0" bIns="0">
+            <a:spAutoFit/>
+          </a:bodyPr>
+          <a:lstStyle/>
+          <a:p>
+            <a:pPr>
+              <a:lnSpc>
+                <a:spcPct val="110000"/>
+              </a:lnSpc>
+              <a:spcBef>
+                <a:spcPts val="0"/>
+              </a:spcBef>
+              <a:spcAft>
+                <a:spcPts val="0"/>
+              </a:spcAft>
+              <a:buNone/>
+              <a:defRPr sz="1150" lang="ja-JP" b="0">
+                <a:solidFill>
+                  <a:srgbClr val="626669"/>
+                </a:solidFill>
+                <a:latin typeface="Noto Sans"/>
+                <a:ea typeface="Noto Sans CJK JP"/>
+                <a:cs typeface="Noto Sans"/>
+              </a:defRPr>
+            </a:pPr>
+            <a:r>
+              <a:rPr sz="1150" lang="ja-JP" b="0">
+                <a:solidFill>
+                  <a:srgbClr val="626669"/>
+                </a:solidFill>
+                <a:latin typeface="Noto Sans"/>
+                <a:ea typeface="Noto Sans CJK JP"/>
+                <a:cs typeface="Noto Sans"/>
+                <a:hlinkClick r:id="rId4"/>
+              </a:rPr>
+              <a:t>https://arxiv.org/abs/1908.03195</a:t>
+            </a:r>
+          </a:p>
+        </p:txBody>
+      </p:sp>
+      <p:cxnSp>
+        <p:nvCxnSpPr>
+          <p:cNvPr id="12" name="Connector 11"/>
+          <p:cNvCxnSpPr/>
+          <p:nvPr/>
+        </p:nvCxnSpPr>
+        <p:spPr>
+          <a:xfrm>
+            <a:off x="594360" y="2999232"/>
+            <a:ext cx="7955280" cy="0"/>
+          </a:xfrm>
+          <a:prstGeom prst="line">
+            <a:avLst/>
+          </a:prstGeom>
+          <a:ln w="10160">
+            <a:solidFill>
+              <a:srgbClr val="626669"/>
+            </a:solidFill>
+          </a:ln>
+        </p:spPr>
+        <p:style>
+          <a:lnRef idx="2">
+            <a:schemeClr val="accent1"/>
+          </a:lnRef>
+          <a:fillRef idx="0">
+            <a:schemeClr val="accent1"/>
+          </a:fillRef>
+          <a:effectRef idx="1">
+            <a:schemeClr val="accent1"/>
+          </a:effectRef>
+          <a:fontRef idx="minor">
+            <a:schemeClr val="tx1"/>
+          </a:fontRef>
+        </p:style>
+      </p:cxnSp>
     </p:spTree>
   </p:cSld>
   <p:clrMapOvr>
@@ -27222,85 +28179,6 @@
               <a:t>COCO image ID 000000000009 / COCO128-seg公開変換注釈の輪郭を重ねて表示</a:t>
             </a:r>
           </a:p>
-        </p:txBody>
-      </p:sp>
-    </p:spTree>
-  </p:cSld>
-  <p:clrMapOvr>
-    <a:masterClrMapping/>
-  </p:clrMapOvr>
-</p:sld>
-</file>
-
-<file path=ppt/slides/slide61.xml><?xml version="1.0" encoding="utf-8"?>
-<p:sld xmlns:a="http://schemas.openxmlformats.org/drawingml/2006/main" xmlns:p="http://schemas.openxmlformats.org/presentationml/2006/main" xmlns:r="http://schemas.openxmlformats.org/officeDocument/2006/relationships">
-  <p:cSld>
-    <p:spTree>
-      <p:nvGrpSpPr>
-        <p:cNvPr id="1" name=""/>
-        <p:cNvGrpSpPr/>
-        <p:nvPr/>
-      </p:nvGrpSpPr>
-      <p:grpSpPr/>
-      <p:sp>
-        <p:nvSpPr>
-          <p:cNvPr id="2" name="Title 1"/>
-          <p:cNvSpPr>
-            <a:spLocks noGrp="1"/>
-          </p:cNvSpPr>
-          <p:nvPr>
-            <p:ph type="title"/>
-          </p:nvPr>
-        </p:nvSpPr>
-        <p:spPr>
-          <a:xfrm>
-            <a:off x="457200" y="1645920"/>
-            <a:ext cx="8229600" cy="1280160"/>
-          </a:xfrm>
-        </p:spPr>
-        <p:txBody>
-          <a:bodyPr anchor="ctr"/>
-          <a:lstStyle/>
-          <a:p>
-            <a:pPr algn="ctr">
-              <a:defRPr sz="4800" b="1" lang="ja-JP">
-                <a:solidFill>
-                  <a:srgbClr val="303437"/>
-                </a:solidFill>
-                <a:latin typeface="Noto Sans"/>
-                <a:ea typeface="Noto Sans CJK JP"/>
-                <a:cs typeface="Noto Sans"/>
-              </a:defRPr>
-            </a:pPr>
-            <a:r>
-              <a:rPr sz="4800" b="1" lang="ja-JP">
-                <a:solidFill>
-                  <a:srgbClr val="303437"/>
-                </a:solidFill>
-                <a:latin typeface="Noto Sans"/>
-                <a:ea typeface="Noto Sans CJK JP"/>
-                <a:cs typeface="Noto Sans"/>
-              </a:rPr>
-              <a:t>Appendix</a:t>
-            </a:r>
-          </a:p>
-        </p:txBody>
-      </p:sp>
-      <p:sp>
-        <p:nvSpPr>
-          <p:cNvPr id="3" name="Title 2"/>
-          <p:cNvSpPr>
-            <a:spLocks noGrp="1"/>
-          </p:cNvSpPr>
-          <p:nvPr>
-            <p:ph type="title" idx="2"/>
-          </p:nvPr>
-        </p:nvSpPr>
-        <p:spPr/>
-        <p:txBody>
-          <a:bodyPr/>
-          <a:lstStyle/>
-          <a:p/>
         </p:txBody>
       </p:sp>
     </p:spTree>

--- a/slides/datasets-in-10-minutes-coco.pptx
+++ b/slides/datasets-in-10-minutes-coco.pptx
@@ -7036,8 +7036,8 @@
         </p:nvSpPr>
         <p:spPr>
           <a:xfrm>
-            <a:off x="457200" y="1097280"/>
-            <a:ext cx="8229600" cy="2240280"/>
+            <a:off x="457200" y="1363116"/>
+            <a:ext cx="8229600" cy="2926080"/>
           </a:xfrm>
         </p:spPr>
         <p:txBody>
@@ -7046,13 +7046,13 @@
           <a:p>
             <a:pPr algn="ctr">
               <a:lnSpc>
-                <a:spcPct val="115000"/>
-              </a:lnSpc>
-              <a:spcBef>
-                <a:spcPts val="0"/>
-              </a:spcBef>
-              <a:spcAft>
-                <a:spcPts val="0"/>
+                <a:spcPct val="100000"/>
+              </a:lnSpc>
+              <a:spcBef>
+                <a:spcPts val="0"/>
+              </a:spcBef>
+              <a:spcAft>
+                <a:spcPts val="1000"/>
               </a:spcAft>
               <a:buNone/>
               <a:defRPr lang="ja-JP" sz="3400" b="1">
@@ -7065,13 +7065,12 @@
               </a:defRPr>
             </a:pPr>
             <a:r>
-              <a:rPr lang="ja-JP" sz="3400" b="1">
-                <a:solidFill>
-                  <a:srgbClr val="303437"/>
-                </a:solidFill>
-                <a:latin typeface="Noto Sans"/>
-                <a:ea typeface="Noto Sans CJK JP"/>
-                <a:cs typeface="Noto Sans"/>
+              <a:rPr sz="2800" b="0" lang="ja-JP">
+                <a:solidFill>
+                  <a:srgbClr val="303437"/>
+                </a:solidFill>
+                <a:latin typeface="Noto Sans"/>
+                <a:ea typeface="Noto Sans CJK JP"/>
               </a:rPr>
               <a:t>領域認識用データセット</a:t>
             </a:r>
@@ -7079,86 +7078,45 @@
           <a:p>
             <a:pPr algn="ctr">
               <a:lnSpc>
-                <a:spcPct val="115000"/>
-              </a:lnSpc>
-              <a:spcBef>
-                <a:spcPts val="0"/>
-              </a:spcBef>
-              <a:spcAft>
-                <a:spcPts val="0"/>
-              </a:spcAft>
-              <a:buNone/>
-              <a:defRPr lang="ja-JP" sz="5800" b="1">
-                <a:solidFill>
-                  <a:srgbClr val="303437"/>
-                </a:solidFill>
-                <a:latin typeface="Noto Sans"/>
-                <a:ea typeface="Noto Sans CJK JP"/>
-                <a:cs typeface="Noto Sans"/>
-              </a:defRPr>
-            </a:pPr>
-            <a:r>
-              <a:rPr lang="ja-JP" sz="5800" b="1">
-                <a:solidFill>
-                  <a:srgbClr val="303437"/>
-                </a:solidFill>
-                <a:latin typeface="Noto Sans"/>
-                <a:ea typeface="Noto Sans CJK JP"/>
-                <a:cs typeface="Noto Sans"/>
+                <a:spcPct val="100000"/>
+              </a:lnSpc>
+              <a:spcBef>
+                <a:spcPts val="0"/>
+              </a:spcBef>
+              <a:spcAft>
+                <a:spcPts val="1000"/>
+              </a:spcAft>
+            </a:pPr>
+            <a:r>
+              <a:rPr sz="5600" b="1" lang="ja-JP">
+                <a:solidFill>
+                  <a:srgbClr val="303437"/>
+                </a:solidFill>
+                <a:latin typeface="Noto Sans"/>
+                <a:ea typeface="Noto Sans CJK JP"/>
               </a:rPr>
               <a:t>MS COCO</a:t>
             </a:r>
           </a:p>
-        </p:txBody>
-      </p:sp>
-      <p:sp>
-        <p:nvSpPr>
-          <p:cNvPr id="3" name="Subtitle 2"/>
-          <p:cNvSpPr>
-            <a:spLocks noGrp="1"/>
-          </p:cNvSpPr>
-          <p:nvPr>
-            <p:ph type="subTitle" idx="1"/>
-          </p:nvPr>
-        </p:nvSpPr>
-        <p:spPr>
-          <a:xfrm>
-            <a:off x="548640" y="3657600"/>
-            <a:ext cx="8046720" cy="365760"/>
-          </a:xfrm>
-        </p:spPr>
-        <p:txBody>
-          <a:bodyPr wrap="square" anchor="t" lIns="0" rIns="0" tIns="0" bIns="0"/>
-          <a:lstStyle/>
           <a:p>
             <a:pPr algn="ctr">
               <a:lnSpc>
-                <a:spcPct val="115000"/>
-              </a:lnSpc>
-              <a:spcBef>
-                <a:spcPts val="0"/>
-              </a:spcBef>
-              <a:spcAft>
-                <a:spcPts val="0"/>
-              </a:spcAft>
-              <a:buNone/>
-              <a:defRPr lang="ja-JP" sz="2200" b="0">
-                <a:solidFill>
-                  <a:srgbClr val="303437"/>
-                </a:solidFill>
-                <a:latin typeface="Noto Sans"/>
-                <a:ea typeface="Noto Sans CJK JP"/>
-                <a:cs typeface="Noto Sans"/>
-              </a:defRPr>
-            </a:pPr>
-            <a:r>
-              <a:rPr lang="ja-JP" sz="2200" b="0">
-                <a:solidFill>
-                  <a:srgbClr val="303437"/>
-                </a:solidFill>
-                <a:latin typeface="Noto Sans"/>
-                <a:ea typeface="Noto Sans CJK JP"/>
-                <a:cs typeface="Noto Sans"/>
+                <a:spcPct val="100000"/>
+              </a:lnSpc>
+              <a:spcBef>
+                <a:spcPts val="0"/>
+              </a:spcBef>
+              <a:spcAft>
+                <a:spcPts val="0"/>
+              </a:spcAft>
+            </a:pPr>
+            <a:r>
+              <a:rPr sz="2400" b="0" lang="ja-JP">
+                <a:solidFill>
+                  <a:srgbClr val="303437"/>
+                </a:solidFill>
+                <a:latin typeface="Noto Sans"/>
+                <a:ea typeface="Noto Sans CJK JP"/>
               </a:rPr>
               <a:t>Microsoft COCO: Common Objects in Context</a:t>
             </a:r>
@@ -7308,12 +7266,12 @@
           </a:xfrm>
         </p:spPr>
         <p:txBody>
-          <a:bodyPr wrap="square" anchor="t" lIns="0" rIns="0" tIns="0" bIns="0"/>
+          <a:bodyPr wrap="none" anchor="t" lIns="0" rIns="0" tIns="0" bIns="0"/>
           <a:lstStyle/>
           <a:p>
             <a:pPr algn="l">
               <a:lnSpc>
-                <a:spcPct val="115000"/>
+                <a:spcPct val="100000"/>
               </a:lnSpc>
               <a:spcBef>
                 <a:spcPts val="0"/>
@@ -7332,7 +7290,7 @@
               </a:defRPr>
             </a:pPr>
             <a:r>
-              <a:rPr lang="ja-JP" sz="2800" b="1">
+              <a:rPr sz="2800" b="1" lang="ja-JP">
                 <a:solidFill>
                   <a:srgbClr val="303437"/>
                 </a:solidFill>
@@ -7394,7 +7352,7 @@
                 <a:ea typeface="Noto Sans CJK JP"/>
                 <a:cs typeface="Noto Sans"/>
               </a:rPr>
-              <a:t>1 認識課題と実画像</a:t>
+              <a:t>1 COCOの認識課題と領域注釈の実例</a:t>
             </a:r>
           </a:p>
         </p:txBody>
@@ -7550,12 +7508,26 @@
             <p:ph type="title"/>
           </p:nvPr>
         </p:nvSpPr>
-        <p:spPr/>
-        <p:txBody>
-          <a:bodyPr/>
-          <a:lstStyle/>
-          <a:p>
-            <a:pPr>
+        <p:spPr>
+          <a:xfrm>
+            <a:off x="468172" y="650138"/>
+            <a:ext cx="8206740" cy="616305"/>
+          </a:xfrm>
+        </p:spPr>
+        <p:txBody>
+          <a:bodyPr wrap="none" lIns="0" rIns="0" tIns="0" bIns="0"/>
+          <a:lstStyle/>
+          <a:p>
+            <a:pPr algn="l">
+              <a:lnSpc>
+                <a:spcPct val="100000"/>
+              </a:lnSpc>
+              <a:spcBef>
+                <a:spcPts val="0"/>
+              </a:spcBef>
+              <a:spcAft>
+                <a:spcPts val="0"/>
+              </a:spcAft>
               <a:defRPr sz="2800" b="1" lang="ja-JP">
                 <a:solidFill>
                   <a:srgbClr val="303437"/>
@@ -7574,7 +7546,7 @@
                 <a:ea typeface="Noto Sans CJK JP"/>
                 <a:cs typeface="Noto Sans"/>
               </a:rPr>
-              <a:t>同じ写真を個体の領域と背景に分けて見る</a:t>
+              <a:t>同一画像に付いた物体領域と背景の注釈</a:t>
             </a:r>
           </a:p>
         </p:txBody>
@@ -7591,12 +7563,30 @@
         </p:nvSpPr>
         <p:spPr/>
         <p:txBody>
-          <a:bodyPr/>
-          <a:lstStyle/>
-          <a:p>
-            <a:pPr/>
-            <a:r>
-              <a:t>1 認識課題と実画像</a:t>
+          <a:bodyPr anchor="ctr" tIns="0" bIns="0"/>
+          <a:lstStyle/>
+          <a:p>
+            <a:pPr>
+              <a:lnSpc>
+                <a:spcPct val="100000"/>
+              </a:lnSpc>
+              <a:spcBef>
+                <a:spcPts val="0"/>
+              </a:spcBef>
+              <a:spcAft>
+                <a:spcPts val="0"/>
+              </a:spcAft>
+            </a:pPr>
+            <a:r>
+              <a:rPr sz="1400" b="1" lang="ja-JP">
+                <a:solidFill>
+                  <a:srgbClr val="FFFEF8"/>
+                </a:solidFill>
+                <a:latin typeface="Noto Sans"/>
+                <a:ea typeface="Noto Sans CJK JP"/>
+                <a:cs typeface="Noto Sans"/>
+              </a:rPr>
+              <a:t>1 COCOの認識課題と領域注釈の実例</a:t>
             </a:r>
           </a:p>
         </p:txBody>
@@ -7759,12 +7749,12 @@
           </a:xfrm>
         </p:spPr>
         <p:txBody>
-          <a:bodyPr wrap="square" anchor="t" lIns="0" rIns="0" tIns="0" bIns="0"/>
+          <a:bodyPr wrap="none" anchor="t" lIns="0" rIns="0" tIns="0" bIns="0"/>
           <a:lstStyle/>
           <a:p>
             <a:pPr algn="l">
               <a:lnSpc>
-                <a:spcPct val="115000"/>
+                <a:spcPct val="100000"/>
               </a:lnSpc>
               <a:spcBef>
                 <a:spcPts val="0"/>
@@ -7783,7 +7773,7 @@
               </a:defRPr>
             </a:pPr>
             <a:r>
-              <a:rPr lang="ja-JP" sz="2800" b="1">
+              <a:rPr sz="2800" b="1" lang="ja-JP">
                 <a:solidFill>
                   <a:srgbClr val="303437"/>
                 </a:solidFill>
@@ -7845,7 +7835,7 @@
                 <a:ea typeface="Noto Sans CJK JP"/>
                 <a:cs typeface="Noto Sans"/>
               </a:rPr>
-              <a:t>1 認識課題と実画像</a:t>
+              <a:t>1 COCOの認識課題と領域注釈の実例</a:t>
             </a:r>
           </a:p>
         </p:txBody>
@@ -7910,7 +7900,7 @@
                 <a:latin typeface="Noto Sans"/>
                 <a:ea typeface="Noto Sans CJK JP"/>
                 <a:cs typeface="Noto Sans"/>
-                <a:hlinkClick r:id="rId5"/>
+                <a:hlinkClick r:id="rId3"/>
               </a:rPr>
               <a:t>https://github.com/cocodataset/panopticapi</a:t>
             </a:r>
@@ -8207,12 +8197,12 @@
           </a:xfrm>
         </p:spPr>
         <p:txBody>
-          <a:bodyPr wrap="square" anchor="t" lIns="0" rIns="0" tIns="0" bIns="0"/>
+          <a:bodyPr wrap="none" anchor="t" lIns="0" rIns="0" tIns="0" bIns="0"/>
           <a:lstStyle/>
           <a:p>
             <a:pPr algn="l">
               <a:lnSpc>
-                <a:spcPct val="115000"/>
+                <a:spcPct val="100000"/>
               </a:lnSpc>
               <a:spcBef>
                 <a:spcPts val="0"/>
@@ -8231,7 +8221,7 @@
               </a:defRPr>
             </a:pPr>
             <a:r>
-              <a:rPr lang="ja-JP" sz="2800" b="1">
+              <a:rPr sz="2800" b="1" lang="ja-JP">
                 <a:solidFill>
                   <a:srgbClr val="303437"/>
                 </a:solidFill>
@@ -8419,21 +8409,21 @@
                 <a:ea typeface="Noto Sans CJK JP"/>
                 <a:cs typeface="Noto Sans"/>
               </a:rPr>
-              <a:t>1 認識課題と実画像</a:t>
-            </a:r>
-          </a:p>
-        </p:txBody>
-      </p:sp>
-      <p:sp>
-        <p:nvSpPr>
-          <p:cNvPr id="5" name="sources"/>
+              <a:t>1 COCOの認識課題と領域注釈の実例</a:t>
+            </a:r>
+          </a:p>
+        </p:txBody>
+      </p:sp>
+      <p:sp>
+        <p:nvSpPr>
+          <p:cNvPr id="5" name="TextBox 4"/>
           <p:cNvSpPr txBox="1"/>
           <p:nvPr/>
         </p:nvSpPr>
         <p:spPr>
           <a:xfrm>
-            <a:off x="502920" y="4828032"/>
-            <a:ext cx="8183879" cy="640080"/>
+            <a:off x="502920" y="4699000"/>
+            <a:ext cx="8183879" cy="177800"/>
           </a:xfrm>
           <a:prstGeom prst="rect">
             <a:avLst/>
@@ -8446,24 +8436,74 @@
           </a:bodyPr>
           <a:lstStyle/>
           <a:p>
-            <a:pPr>
-              <a:lnSpc>
-                <a:spcPts val="1200"/>
-              </a:lnSpc>
-              <a:spcBef>
-                <a:spcPts val="0"/>
-              </a:spcBef>
-              <a:spcAft>
-                <a:spcPts val="0"/>
-              </a:spcAft>
-              <a:defRPr sz="800" b="0" lang="ja-JP">
+            <a:pPr algn="l">
+              <a:lnSpc>
+                <a:spcPts val="1400"/>
+              </a:lnSpc>
+              <a:spcBef>
+                <a:spcPts val="0"/>
+              </a:spcBef>
+              <a:spcAft>
+                <a:spcPts val="0"/>
+              </a:spcAft>
+            </a:pPr>
+            <a:r>
+              <a:rPr sz="800" b="0" lang="ja-JP">
                 <a:solidFill>
                   <a:srgbClr val="626669"/>
                 </a:solidFill>
                 <a:latin typeface="Noto Sans"/>
                 <a:ea typeface="Noto Sans CJK JP"/>
                 <a:cs typeface="Noto Sans"/>
-              </a:defRPr>
+              </a:rPr>
+              <a:t/>
+            </a:r>
+            <a:r>
+              <a:rPr sz="800" lang="ja-JP">
+                <a:solidFill>
+                  <a:srgbClr val="626669"/>
+                </a:solidFill>
+                <a:latin typeface="Noto Sans"/>
+                <a:ea typeface="Noto Sans CJK JP"/>
+                <a:cs typeface="Noto Sans"/>
+              </a:rPr>
+              <a:t>[1] Alexander Kirillov et al. (2019). IEEE/CVF Conference on Computer Vision and Pattern Recognition (CVPR), pp. 9404–9413. Panoptic Segmentation.</a:t>
+            </a:r>
+          </a:p>
+        </p:txBody>
+      </p:sp>
+      <p:sp>
+        <p:nvSpPr>
+          <p:cNvPr id="6" name="TextBox 5"/>
+          <p:cNvSpPr txBox="1"/>
+          <p:nvPr/>
+        </p:nvSpPr>
+        <p:spPr>
+          <a:xfrm>
+            <a:off x="502920" y="4876800"/>
+            <a:ext cx="8183879" cy="177800"/>
+          </a:xfrm>
+          <a:prstGeom prst="rect">
+            <a:avLst/>
+          </a:prstGeom>
+          <a:noFill/>
+        </p:spPr>
+        <p:txBody>
+          <a:bodyPr wrap="square" lIns="0" rIns="0" tIns="0" bIns="0">
+            <a:spAutoFit/>
+          </a:bodyPr>
+          <a:lstStyle/>
+          <a:p>
+            <a:pPr algn="l">
+              <a:lnSpc>
+                <a:spcPts val="1400"/>
+              </a:lnSpc>
+              <a:spcBef>
+                <a:spcPts val="0"/>
+              </a:spcBef>
+              <a:spcAft>
+                <a:spcPts val="0"/>
+              </a:spcAft>
             </a:pPr>
             <a:r>
               <a:rPr sz="800" b="0" lang="ja-JP">
@@ -8474,17 +8514,17 @@
                 <a:ea typeface="Noto Sans CJK JP"/>
                 <a:cs typeface="Noto Sans"/>
               </a:rPr>
-              <a:t>[1] </a:t>
-            </a:r>
-            <a:r>
-              <a:rPr sz="800" b="0" lang="ja-JP">
+              <a:t/>
+            </a:r>
+            <a:r>
+              <a:rPr sz="800" lang="ja-JP">
                 <a:solidFill>
                   <a:srgbClr val="626669"/>
                 </a:solidFill>
                 <a:latin typeface="Noto Sans"/>
                 <a:ea typeface="Noto Sans CJK JP"/>
                 <a:cs typeface="Noto Sans"/>
-                <a:hlinkClick r:id="rId3"/>
+                <a:hlinkClick r:id="rId2"/>
               </a:rPr>
               <a:t>https://arxiv.org/abs/1801.00868</a:t>
             </a:r>
@@ -8526,12 +8566,12 @@
           </a:xfrm>
         </p:spPr>
         <p:txBody>
-          <a:bodyPr wrap="square" anchor="t" lIns="0" rIns="0" tIns="0" bIns="0"/>
+          <a:bodyPr wrap="none" anchor="t" lIns="0" rIns="0" tIns="0" bIns="0"/>
           <a:lstStyle/>
           <a:p>
             <a:pPr algn="l">
               <a:lnSpc>
-                <a:spcPct val="115000"/>
+                <a:spcPct val="100000"/>
               </a:lnSpc>
               <a:spcBef>
                 <a:spcPts val="0"/>
@@ -8550,7 +8590,7 @@
               </a:defRPr>
             </a:pPr>
             <a:r>
-              <a:rPr lang="ja-JP" sz="2800" b="1">
+              <a:rPr sz="2800" b="1" lang="ja-JP">
                 <a:solidFill>
                   <a:srgbClr val="303437"/>
                 </a:solidFill>
@@ -8612,7 +8652,7 @@
                 <a:ea typeface="Noto Sans CJK JP"/>
                 <a:cs typeface="Noto Sans"/>
               </a:rPr>
-              <a:t>1 認識課題と実画像</a:t>
+              <a:t>1 COCOの認識課題と領域注釈の実例</a:t>
             </a:r>
           </a:p>
         </p:txBody>
@@ -8677,7 +8717,7 @@
                 <a:latin typeface="Noto Sans"/>
                 <a:ea typeface="Noto Sans CJK JP"/>
                 <a:cs typeface="Noto Sans"/>
-                <a:hlinkClick r:id="rId5"/>
+                <a:hlinkClick r:id="rId3"/>
               </a:rPr>
               <a:t>https://github.com/cocodataset/panopticapi</a:t>
             </a:r>
@@ -8974,12 +9014,12 @@
           </a:xfrm>
         </p:spPr>
         <p:txBody>
-          <a:bodyPr wrap="square" anchor="t" lIns="0" rIns="0" tIns="0" bIns="0"/>
+          <a:bodyPr wrap="none" anchor="t" lIns="0" rIns="0" tIns="0" bIns="0"/>
           <a:lstStyle/>
           <a:p>
             <a:pPr algn="l">
               <a:lnSpc>
-                <a:spcPct val="115000"/>
+                <a:spcPct val="100000"/>
               </a:lnSpc>
               <a:spcBef>
                 <a:spcPts val="0"/>
@@ -8998,7 +9038,7 @@
               </a:defRPr>
             </a:pPr>
             <a:r>
-              <a:rPr lang="ja-JP" sz="2800" b="1">
+              <a:rPr sz="2750" b="1" lang="ja-JP">
                 <a:solidFill>
                   <a:srgbClr val="303437"/>
                 </a:solidFill>
@@ -9186,21 +9226,21 @@
                 <a:ea typeface="Noto Sans CJK JP"/>
                 <a:cs typeface="Noto Sans"/>
               </a:rPr>
-              <a:t>1 認識課題と実画像</a:t>
-            </a:r>
-          </a:p>
-        </p:txBody>
-      </p:sp>
-      <p:sp>
-        <p:nvSpPr>
-          <p:cNvPr id="5" name="sources"/>
+              <a:t>1 COCOの認識課題と領域注釈の実例</a:t>
+            </a:r>
+          </a:p>
+        </p:txBody>
+      </p:sp>
+      <p:sp>
+        <p:nvSpPr>
+          <p:cNvPr id="5" name="TextBox 4"/>
           <p:cNvSpPr txBox="1"/>
           <p:nvPr/>
         </p:nvSpPr>
         <p:spPr>
           <a:xfrm>
-            <a:off x="502920" y="4787900"/>
-            <a:ext cx="8183879" cy="640080"/>
+            <a:off x="502920" y="4521200"/>
+            <a:ext cx="8183879" cy="177800"/>
           </a:xfrm>
           <a:prstGeom prst="rect">
             <a:avLst/>
@@ -9213,24 +9253,74 @@
           </a:bodyPr>
           <a:lstStyle/>
           <a:p>
-            <a:pPr>
-              <a:lnSpc>
-                <a:spcPts val="1200"/>
-              </a:lnSpc>
-              <a:spcBef>
-                <a:spcPts val="0"/>
-              </a:spcBef>
-              <a:spcAft>
-                <a:spcPts val="0"/>
-              </a:spcAft>
-              <a:defRPr sz="800" b="0" lang="ja-JP">
+            <a:pPr algn="l">
+              <a:lnSpc>
+                <a:spcPts val="1400"/>
+              </a:lnSpc>
+              <a:spcBef>
+                <a:spcPts val="0"/>
+              </a:spcBef>
+              <a:spcAft>
+                <a:spcPts val="0"/>
+              </a:spcAft>
+            </a:pPr>
+            <a:r>
+              <a:rPr sz="800" b="0" lang="ja-JP">
                 <a:solidFill>
                   <a:srgbClr val="626669"/>
                 </a:solidFill>
                 <a:latin typeface="Noto Sans"/>
                 <a:ea typeface="Noto Sans CJK JP"/>
                 <a:cs typeface="Noto Sans"/>
-              </a:defRPr>
+              </a:rPr>
+              <a:t/>
+            </a:r>
+            <a:r>
+              <a:rPr sz="800" lang="ja-JP">
+                <a:solidFill>
+                  <a:srgbClr val="626669"/>
+                </a:solidFill>
+                <a:latin typeface="Noto Sans"/>
+                <a:ea typeface="Noto Sans CJK JP"/>
+                <a:cs typeface="Noto Sans"/>
+              </a:rPr>
+              <a:t>[1] Alexander Kirillov et al. (2019). IEEE/CVF Conference on Computer Vision and Pattern Recognition (CVPR), pp. 9404–9413. Panoptic Segmentation.</a:t>
+            </a:r>
+          </a:p>
+        </p:txBody>
+      </p:sp>
+      <p:sp>
+        <p:nvSpPr>
+          <p:cNvPr id="6" name="TextBox 5"/>
+          <p:cNvSpPr txBox="1"/>
+          <p:nvPr/>
+        </p:nvSpPr>
+        <p:spPr>
+          <a:xfrm>
+            <a:off x="502920" y="4699000"/>
+            <a:ext cx="8183879" cy="177800"/>
+          </a:xfrm>
+          <a:prstGeom prst="rect">
+            <a:avLst/>
+          </a:prstGeom>
+          <a:noFill/>
+        </p:spPr>
+        <p:txBody>
+          <a:bodyPr wrap="square" lIns="0" rIns="0" tIns="0" bIns="0">
+            <a:spAutoFit/>
+          </a:bodyPr>
+          <a:lstStyle/>
+          <a:p>
+            <a:pPr algn="l">
+              <a:lnSpc>
+                <a:spcPts val="1400"/>
+              </a:lnSpc>
+              <a:spcBef>
+                <a:spcPts val="0"/>
+              </a:spcBef>
+              <a:spcAft>
+                <a:spcPts val="0"/>
+              </a:spcAft>
             </a:pPr>
             <a:r>
               <a:rPr sz="800" b="0" lang="ja-JP">
@@ -9241,8 +9331,56 @@
                 <a:ea typeface="Noto Sans CJK JP"/>
                 <a:cs typeface="Noto Sans"/>
               </a:rPr>
-              <a:t>[1] </a:t>
-            </a:r>
+              <a:t/>
+            </a:r>
+            <a:r>
+              <a:rPr sz="800" lang="ja-JP">
+                <a:solidFill>
+                  <a:srgbClr val="626669"/>
+                </a:solidFill>
+                <a:latin typeface="Noto Sans"/>
+                <a:ea typeface="Noto Sans CJK JP"/>
+                <a:cs typeface="Noto Sans"/>
+                <a:hlinkClick r:id="rId3"/>
+              </a:rPr>
+              <a:t>https://arxiv.org/abs/1801.00868</a:t>
+            </a:r>
+          </a:p>
+        </p:txBody>
+      </p:sp>
+      <p:sp>
+        <p:nvSpPr>
+          <p:cNvPr id="7" name="TextBox 6"/>
+          <p:cNvSpPr txBox="1"/>
+          <p:nvPr/>
+        </p:nvSpPr>
+        <p:spPr>
+          <a:xfrm>
+            <a:off x="502920" y="4876800"/>
+            <a:ext cx="8183879" cy="177800"/>
+          </a:xfrm>
+          <a:prstGeom prst="rect">
+            <a:avLst/>
+          </a:prstGeom>
+          <a:noFill/>
+        </p:spPr>
+        <p:txBody>
+          <a:bodyPr wrap="square" lIns="0" rIns="0" tIns="0" bIns="0">
+            <a:spAutoFit/>
+          </a:bodyPr>
+          <a:lstStyle/>
+          <a:p>
+            <a:pPr algn="l">
+              <a:lnSpc>
+                <a:spcPts val="1400"/>
+              </a:lnSpc>
+              <a:spcBef>
+                <a:spcPts val="0"/>
+              </a:spcBef>
+              <a:spcAft>
+                <a:spcPts val="0"/>
+              </a:spcAft>
+            </a:pPr>
             <a:r>
               <a:rPr sz="800" b="0" lang="ja-JP">
                 <a:solidFill>
@@ -9251,51 +9389,29 @@
                 <a:latin typeface="Noto Sans"/>
                 <a:ea typeface="Noto Sans CJK JP"/>
                 <a:cs typeface="Noto Sans"/>
-                <a:hlinkClick r:id="rId3"/>
-              </a:rPr>
-              <a:t>https://arxiv.org/abs/1801.00868</a:t>
-            </a:r>
-          </a:p>
-          <a:p>
-            <a:pPr>
-              <a:lnSpc>
-                <a:spcPts val="1200"/>
-              </a:lnSpc>
-              <a:spcBef>
-                <a:spcPts val="0"/>
-              </a:spcBef>
-              <a:spcAft>
-                <a:spcPts val="0"/>
-              </a:spcAft>
-              <a:defRPr sz="800" b="0" lang="ja-JP">
+              </a:rPr>
+              <a:t/>
+            </a:r>
+            <a:r>
+              <a:rPr sz="800" lang="ja-JP">
                 <a:solidFill>
                   <a:srgbClr val="626669"/>
                 </a:solidFill>
                 <a:latin typeface="Noto Sans"/>
                 <a:ea typeface="Noto Sans CJK JP"/>
                 <a:cs typeface="Noto Sans"/>
-              </a:defRPr>
-            </a:pPr>
-            <a:r>
-              <a:rPr sz="800" b="0" lang="ja-JP">
+              </a:rPr>
+              <a:t>[2] </a:t>
+            </a:r>
+            <a:r>
+              <a:rPr sz="800" lang="ja-JP">
                 <a:solidFill>
                   <a:srgbClr val="626669"/>
                 </a:solidFill>
                 <a:latin typeface="Noto Sans"/>
                 <a:ea typeface="Noto Sans CJK JP"/>
                 <a:cs typeface="Noto Sans"/>
-              </a:rPr>
-              <a:t>[2] </a:t>
-            </a:r>
-            <a:r>
-              <a:rPr sz="800" b="0" lang="ja-JP">
-                <a:solidFill>
-                  <a:srgbClr val="626669"/>
-                </a:solidFill>
-                <a:latin typeface="Noto Sans"/>
-                <a:ea typeface="Noto Sans CJK JP"/>
-                <a:cs typeface="Noto Sans"/>
-                <a:hlinkClick r:id="rId4"/>
+                <a:hlinkClick r:id="rId2"/>
               </a:rPr>
               <a:t>https://github.com/cocodataset/panopticapi</a:t>
             </a:r>
@@ -9337,12 +9453,12 @@
           </a:xfrm>
         </p:spPr>
         <p:txBody>
-          <a:bodyPr wrap="square" anchor="t" lIns="0" rIns="0" tIns="0" bIns="0"/>
+          <a:bodyPr wrap="none" anchor="t" lIns="0" rIns="0" tIns="0" bIns="0"/>
           <a:lstStyle/>
           <a:p>
             <a:pPr algn="l">
               <a:lnSpc>
-                <a:spcPct val="115000"/>
+                <a:spcPct val="100000"/>
               </a:lnSpc>
               <a:spcBef>
                 <a:spcPts val="0"/>
@@ -9361,7 +9477,7 @@
               </a:defRPr>
             </a:pPr>
             <a:r>
-              <a:rPr lang="ja-JP" sz="2800" b="1">
+              <a:rPr sz="2800" b="1" lang="ja-JP">
                 <a:solidFill>
                   <a:srgbClr val="303437"/>
                 </a:solidFill>
@@ -9423,7 +9539,7 @@
                 <a:ea typeface="Noto Sans CJK JP"/>
                 <a:cs typeface="Noto Sans"/>
               </a:rPr>
-              <a:t>1 認識課題と実画像</a:t>
+              <a:t>1 COCOの認識課題と領域注釈の実例</a:t>
             </a:r>
           </a:p>
         </p:txBody>
@@ -9581,8 +9697,8 @@
         </p:nvSpPr>
         <p:spPr>
           <a:xfrm>
-            <a:off x="457200" y="1554480"/>
-            <a:ext cx="8229600" cy="1920240"/>
+            <a:off x="548640" y="2459852"/>
+            <a:ext cx="8046720" cy="731520"/>
           </a:xfrm>
         </p:spPr>
         <p:txBody>
@@ -9591,7 +9707,7 @@
           <a:p>
             <a:pPr algn="ctr">
               <a:lnSpc>
-                <a:spcPct val="115000"/>
+                <a:spcPct val="100000"/>
               </a:lnSpc>
               <a:spcBef>
                 <a:spcPts val="0"/>
@@ -9610,15 +9726,15 @@
               </a:defRPr>
             </a:pPr>
             <a:r>
-              <a:rPr lang="ja-JP" sz="3400" b="1">
-                <a:solidFill>
-                  <a:srgbClr val="303437"/>
-                </a:solidFill>
-                <a:latin typeface="Noto Sans"/>
-                <a:ea typeface="Noto Sans CJK JP"/>
-                <a:cs typeface="Noto Sans"/>
-              </a:rPr>
-              <a:t>2 成立の背景と注釈の構造</a:t>
+              <a:rPr sz="3200" b="1" lang="ja-JP">
+                <a:solidFill>
+                  <a:srgbClr val="303437"/>
+                </a:solidFill>
+                <a:latin typeface="Noto Sans"/>
+                <a:ea typeface="Noto Sans CJK JP"/>
+                <a:cs typeface="Noto Sans"/>
+              </a:rPr>
+              <a:t>2 画像の収集方法と物体注釈の構造</a:t>
             </a:r>
           </a:p>
         </p:txBody>
@@ -9645,7 +9761,7 @@
           <a:p>
             <a:pPr algn="l">
               <a:lnSpc>
-                <a:spcPct val="115000"/>
+                <a:spcPct val="100000"/>
               </a:lnSpc>
               <a:spcBef>
                 <a:spcPts val="0"/>
@@ -9672,7 +9788,7 @@
                 <a:ea typeface="Noto Sans CJK JP"/>
                 <a:cs typeface="Noto Sans"/>
               </a:rPr>
-              <a:t>2 成立の背景と注釈の構造</a:t>
+              <a:t>2 画像の収集方法と物体注釈の構造</a:t>
             </a:r>
           </a:p>
         </p:txBody>
@@ -9712,12 +9828,12 @@
           </a:xfrm>
         </p:spPr>
         <p:txBody>
-          <a:bodyPr wrap="square" anchor="t" lIns="0" rIns="0" tIns="0" bIns="0"/>
+          <a:bodyPr wrap="none" anchor="t" lIns="0" rIns="0" tIns="0" bIns="0"/>
           <a:lstStyle/>
           <a:p>
             <a:pPr algn="l">
               <a:lnSpc>
-                <a:spcPct val="115000"/>
+                <a:spcPct val="100000"/>
               </a:lnSpc>
               <a:spcBef>
                 <a:spcPts val="0"/>
@@ -9736,7 +9852,7 @@
               </a:defRPr>
             </a:pPr>
             <a:r>
-              <a:rPr lang="ja-JP" sz="2800" b="1">
+              <a:rPr sz="2800" b="1" lang="ja-JP">
                 <a:solidFill>
                   <a:srgbClr val="303437"/>
                 </a:solidFill>
@@ -9924,21 +10040,21 @@
                 <a:ea typeface="Noto Sans CJK JP"/>
                 <a:cs typeface="Noto Sans"/>
               </a:rPr>
-              <a:t>2 成立の背景と注釈の構造</a:t>
-            </a:r>
-          </a:p>
-        </p:txBody>
-      </p:sp>
-      <p:sp>
-        <p:nvSpPr>
-          <p:cNvPr id="5" name="sources"/>
+              <a:t>2 画像の収集方法と物体注釈の構造</a:t>
+            </a:r>
+          </a:p>
+        </p:txBody>
+      </p:sp>
+      <p:sp>
+        <p:nvSpPr>
+          <p:cNvPr id="5" name="TextBox 4"/>
           <p:cNvSpPr txBox="1"/>
           <p:nvPr/>
         </p:nvSpPr>
         <p:spPr>
           <a:xfrm>
-            <a:off x="502920" y="4787900"/>
-            <a:ext cx="8183879" cy="640080"/>
+            <a:off x="502920" y="4699000"/>
+            <a:ext cx="8183879" cy="177800"/>
           </a:xfrm>
           <a:prstGeom prst="rect">
             <a:avLst/>
@@ -9951,24 +10067,74 @@
           </a:bodyPr>
           <a:lstStyle/>
           <a:p>
-            <a:pPr>
-              <a:lnSpc>
-                <a:spcPts val="1200"/>
-              </a:lnSpc>
-              <a:spcBef>
-                <a:spcPts val="0"/>
-              </a:spcBef>
-              <a:spcAft>
-                <a:spcPts val="0"/>
-              </a:spcAft>
-              <a:defRPr sz="800" b="0" lang="ja-JP">
+            <a:pPr algn="l">
+              <a:lnSpc>
+                <a:spcPts val="1400"/>
+              </a:lnSpc>
+              <a:spcBef>
+                <a:spcPts val="0"/>
+              </a:spcBef>
+              <a:spcAft>
+                <a:spcPts val="0"/>
+              </a:spcAft>
+            </a:pPr>
+            <a:r>
+              <a:rPr sz="800" b="0" lang="ja-JP">
                 <a:solidFill>
                   <a:srgbClr val="626669"/>
                 </a:solidFill>
                 <a:latin typeface="Noto Sans"/>
                 <a:ea typeface="Noto Sans CJK JP"/>
                 <a:cs typeface="Noto Sans"/>
-              </a:defRPr>
+              </a:rPr>
+              <a:t/>
+            </a:r>
+            <a:r>
+              <a:rPr sz="800" lang="ja-JP">
+                <a:solidFill>
+                  <a:srgbClr val="626669"/>
+                </a:solidFill>
+                <a:latin typeface="Noto Sans"/>
+                <a:ea typeface="Noto Sans CJK JP"/>
+                <a:cs typeface="Noto Sans"/>
+              </a:rPr>
+              <a:t>[1] Russakovsky et al. (2015). International Journal of Computer Vision, 115, pp. 211–252. ImageNet Large Scale Visual Recognition Challenge.</a:t>
+            </a:r>
+          </a:p>
+        </p:txBody>
+      </p:sp>
+      <p:sp>
+        <p:nvSpPr>
+          <p:cNvPr id="6" name="TextBox 5"/>
+          <p:cNvSpPr txBox="1"/>
+          <p:nvPr/>
+        </p:nvSpPr>
+        <p:spPr>
+          <a:xfrm>
+            <a:off x="502920" y="4876800"/>
+            <a:ext cx="8183879" cy="177800"/>
+          </a:xfrm>
+          <a:prstGeom prst="rect">
+            <a:avLst/>
+          </a:prstGeom>
+          <a:noFill/>
+        </p:spPr>
+        <p:txBody>
+          <a:bodyPr wrap="square" lIns="0" rIns="0" tIns="0" bIns="0">
+            <a:spAutoFit/>
+          </a:bodyPr>
+          <a:lstStyle/>
+          <a:p>
+            <a:pPr algn="l">
+              <a:lnSpc>
+                <a:spcPts val="1400"/>
+              </a:lnSpc>
+              <a:spcBef>
+                <a:spcPts val="0"/>
+              </a:spcBef>
+              <a:spcAft>
+                <a:spcPts val="0"/>
+              </a:spcAft>
             </a:pPr>
             <a:r>
               <a:rPr sz="800" b="0" lang="ja-JP">
@@ -9979,61 +10145,17 @@
                 <a:ea typeface="Noto Sans CJK JP"/>
                 <a:cs typeface="Noto Sans"/>
               </a:rPr>
-              <a:t>[1] </a:t>
-            </a:r>
-            <a:r>
-              <a:rPr sz="800" b="0" lang="ja-JP">
+              <a:t/>
+            </a:r>
+            <a:r>
+              <a:rPr sz="800" lang="ja-JP">
                 <a:solidFill>
                   <a:srgbClr val="626669"/>
                 </a:solidFill>
                 <a:latin typeface="Noto Sans"/>
                 <a:ea typeface="Noto Sans CJK JP"/>
                 <a:cs typeface="Noto Sans"/>
-                <a:hlinkClick r:id="rId3"/>
-              </a:rPr>
-              <a:t>https://www.image-net.org/</a:t>
-            </a:r>
-          </a:p>
-          <a:p>
-            <a:pPr>
-              <a:lnSpc>
-                <a:spcPts val="1200"/>
-              </a:lnSpc>
-              <a:spcBef>
-                <a:spcPts val="0"/>
-              </a:spcBef>
-              <a:spcAft>
-                <a:spcPts val="0"/>
-              </a:spcAft>
-              <a:defRPr sz="800" b="0" lang="ja-JP">
-                <a:solidFill>
-                  <a:srgbClr val="626669"/>
-                </a:solidFill>
-                <a:latin typeface="Noto Sans"/>
-                <a:ea typeface="Noto Sans CJK JP"/>
-                <a:cs typeface="Noto Sans"/>
-              </a:defRPr>
-            </a:pPr>
-            <a:r>
-              <a:rPr sz="800" b="0" lang="ja-JP">
-                <a:solidFill>
-                  <a:srgbClr val="626669"/>
-                </a:solidFill>
-                <a:latin typeface="Noto Sans"/>
-                <a:ea typeface="Noto Sans CJK JP"/>
-                <a:cs typeface="Noto Sans"/>
-              </a:rPr>
-              <a:t>[2] </a:t>
-            </a:r>
-            <a:r>
-              <a:rPr sz="800" b="0" lang="ja-JP">
-                <a:solidFill>
-                  <a:srgbClr val="626669"/>
-                </a:solidFill>
-                <a:latin typeface="Noto Sans"/>
-                <a:ea typeface="Noto Sans CJK JP"/>
-                <a:cs typeface="Noto Sans"/>
-                <a:hlinkClick r:id="rId4"/>
+                <a:hlinkClick r:id="rId2"/>
               </a:rPr>
               <a:t>https://arxiv.org/abs/1409.0575</a:t>
             </a:r>
@@ -10075,12 +10197,12 @@
           </a:xfrm>
         </p:spPr>
         <p:txBody>
-          <a:bodyPr wrap="square" anchor="t" lIns="0" rIns="0" tIns="0" bIns="0"/>
+          <a:bodyPr wrap="none" anchor="t" lIns="0" rIns="0" tIns="0" bIns="0"/>
           <a:lstStyle/>
           <a:p>
             <a:pPr algn="l">
               <a:lnSpc>
-                <a:spcPct val="115000"/>
+                <a:spcPct val="100000"/>
               </a:lnSpc>
               <a:spcBef>
                 <a:spcPts val="0"/>
@@ -10099,7 +10221,7 @@
               </a:defRPr>
             </a:pPr>
             <a:r>
-              <a:rPr lang="ja-JP" sz="2800" b="1">
+              <a:rPr sz="2750" b="1" lang="ja-JP">
                 <a:solidFill>
                   <a:srgbClr val="303437"/>
                 </a:solidFill>
@@ -10287,7 +10409,7 @@
                 <a:ea typeface="Noto Sans CJK JP"/>
                 <a:cs typeface="Noto Sans"/>
               </a:rPr>
-              <a:t>2 成立の背景と注釈の構造</a:t>
+              <a:t>2 画像の収集方法と物体注釈の構造</a:t>
             </a:r>
           </a:p>
         </p:txBody>
@@ -10396,7 +10518,7 @@
                 <a:latin typeface="Noto Sans"/>
                 <a:ea typeface="Noto Sans CJK JP"/>
                 <a:cs typeface="Noto Sans"/>
-                <a:hlinkClick r:id="rId4"/>
+                <a:hlinkClick r:id="rId2"/>
               </a:rPr>
               <a:t>https://cocodataset.org/#external</a:t>
             </a:r>
@@ -10566,25 +10688,25 @@
               <a:buSzPct val="100000"/>
               <a:buFont typeface="Noto Sans CJK JP"/>
               <a:buAutoNum type="arabicPeriod"/>
-              <a:defRPr sz="3200" b="1" lang="ja-JP">
-                <a:solidFill>
-                  <a:srgbClr val="303437"/>
-                </a:solidFill>
-                <a:latin typeface="Noto Sans"/>
-                <a:ea typeface="Noto Sans CJK JP"/>
-                <a:cs typeface="Noto Sans"/>
-              </a:defRPr>
-            </a:pPr>
-            <a:r>
-              <a:rPr sz="3200" b="1" lang="ja-JP">
-                <a:solidFill>
-                  <a:srgbClr val="303437"/>
-                </a:solidFill>
-                <a:latin typeface="Noto Sans"/>
-                <a:ea typeface="Noto Sans CJK JP"/>
-                <a:cs typeface="Noto Sans"/>
-              </a:rPr>
-              <a:t>認識課題と実画像</a:t>
+              <a:defRPr sz="3000" b="1" lang="ja-JP">
+                <a:solidFill>
+                  <a:srgbClr val="303437"/>
+                </a:solidFill>
+                <a:latin typeface="Noto Sans"/>
+                <a:ea typeface="Noto Sans CJK JP"/>
+                <a:cs typeface="Noto Sans"/>
+              </a:defRPr>
+            </a:pPr>
+            <a:r>
+              <a:rPr sz="3000" b="1" lang="ja-JP">
+                <a:solidFill>
+                  <a:srgbClr val="303437"/>
+                </a:solidFill>
+                <a:latin typeface="Noto Sans"/>
+                <a:ea typeface="Noto Sans CJK JP"/>
+                <a:cs typeface="Noto Sans"/>
+              </a:rPr>
+              <a:t>COCOの認識課題と領域注釈の実例</a:t>
             </a:r>
           </a:p>
           <a:p>
@@ -10601,25 +10723,25 @@
               <a:buSzPct val="100000"/>
               <a:buFont typeface="Noto Sans CJK JP"/>
               <a:buAutoNum type="arabicPeriod"/>
-              <a:defRPr sz="3200" b="1" lang="ja-JP">
-                <a:solidFill>
-                  <a:srgbClr val="303437"/>
-                </a:solidFill>
-                <a:latin typeface="Noto Sans"/>
-                <a:ea typeface="Noto Sans CJK JP"/>
-                <a:cs typeface="Noto Sans"/>
-              </a:defRPr>
-            </a:pPr>
-            <a:r>
-              <a:rPr sz="3200" b="1" lang="ja-JP">
-                <a:solidFill>
-                  <a:srgbClr val="303437"/>
-                </a:solidFill>
-                <a:latin typeface="Noto Sans"/>
-                <a:ea typeface="Noto Sans CJK JP"/>
-                <a:cs typeface="Noto Sans"/>
-              </a:rPr>
-              <a:t>成立の背景と注釈の構造</a:t>
+              <a:defRPr sz="3000" b="1" lang="ja-JP">
+                <a:solidFill>
+                  <a:srgbClr val="303437"/>
+                </a:solidFill>
+                <a:latin typeface="Noto Sans"/>
+                <a:ea typeface="Noto Sans CJK JP"/>
+                <a:cs typeface="Noto Sans"/>
+              </a:defRPr>
+            </a:pPr>
+            <a:r>
+              <a:rPr sz="3000" b="1" lang="ja-JP">
+                <a:solidFill>
+                  <a:srgbClr val="303437"/>
+                </a:solidFill>
+                <a:latin typeface="Noto Sans"/>
+                <a:ea typeface="Noto Sans CJK JP"/>
+                <a:cs typeface="Noto Sans"/>
+              </a:rPr>
+              <a:t>画像の収集方法と物体注釈の構造</a:t>
             </a:r>
           </a:p>
           <a:p>
@@ -10636,25 +10758,25 @@
               <a:buSzPct val="100000"/>
               <a:buFont typeface="Noto Sans CJK JP"/>
               <a:buAutoNum type="arabicPeriod"/>
-              <a:defRPr sz="3200" b="1" lang="ja-JP">
-                <a:solidFill>
-                  <a:srgbClr val="303437"/>
-                </a:solidFill>
-                <a:latin typeface="Noto Sans"/>
-                <a:ea typeface="Noto Sans CJK JP"/>
-                <a:cs typeface="Noto Sans"/>
-              </a:defRPr>
-            </a:pPr>
-            <a:r>
-              <a:rPr sz="3200" b="1" lang="ja-JP">
-                <a:solidFill>
-                  <a:srgbClr val="303437"/>
-                </a:solidFill>
-                <a:latin typeface="Noto Sans"/>
-                <a:ea typeface="Noto Sans CJK JP"/>
-                <a:cs typeface="Noto Sans"/>
-              </a:rPr>
-              <a:t>評価指標とモデル</a:t>
+              <a:defRPr sz="3000" b="1" lang="ja-JP">
+                <a:solidFill>
+                  <a:srgbClr val="303437"/>
+                </a:solidFill>
+                <a:latin typeface="Noto Sans"/>
+                <a:ea typeface="Noto Sans CJK JP"/>
+                <a:cs typeface="Noto Sans"/>
+              </a:defRPr>
+            </a:pPr>
+            <a:r>
+              <a:rPr sz="3000" b="1" lang="ja-JP">
+                <a:solidFill>
+                  <a:srgbClr val="303437"/>
+                </a:solidFill>
+                <a:latin typeface="Noto Sans"/>
+                <a:ea typeface="Noto Sans CJK JP"/>
+                <a:cs typeface="Noto Sans"/>
+              </a:rPr>
+              <a:t>物体検出・領域分割の評価とモデル性能</a:t>
             </a:r>
           </a:p>
           <a:p>
@@ -10671,25 +10793,25 @@
               <a:buSzPct val="100000"/>
               <a:buFont typeface="Noto Sans CJK JP"/>
               <a:buAutoNum type="arabicPeriod"/>
-              <a:defRPr sz="3200" b="1" lang="ja-JP">
-                <a:solidFill>
-                  <a:srgbClr val="303437"/>
-                </a:solidFill>
-                <a:latin typeface="Noto Sans"/>
-                <a:ea typeface="Noto Sans CJK JP"/>
-                <a:cs typeface="Noto Sans"/>
-              </a:defRPr>
-            </a:pPr>
-            <a:r>
-              <a:rPr sz="3200" b="1" lang="ja-JP">
-                <a:solidFill>
-                  <a:srgbClr val="303437"/>
-                </a:solidFill>
-                <a:latin typeface="Noto Sans"/>
-                <a:ea typeface="Noto Sans CJK JP"/>
-                <a:cs typeface="Noto Sans"/>
-              </a:rPr>
-              <a:t>利用方法と関連データ</a:t>
+              <a:defRPr sz="2900" b="1" lang="ja-JP">
+                <a:solidFill>
+                  <a:srgbClr val="303437"/>
+                </a:solidFill>
+                <a:latin typeface="Noto Sans"/>
+                <a:ea typeface="Noto Sans CJK JP"/>
+                <a:cs typeface="Noto Sans"/>
+              </a:defRPr>
+            </a:pPr>
+            <a:r>
+              <a:rPr sz="2900" b="1" lang="ja-JP">
+                <a:solidFill>
+                  <a:srgbClr val="303437"/>
+                </a:solidFill>
+                <a:latin typeface="Noto Sans"/>
+                <a:ea typeface="Noto Sans CJK JP"/>
+                <a:cs typeface="Noto Sans"/>
+              </a:rPr>
+              <a:t>COCOの利用動向と画像・注釈の入手方法</a:t>
             </a:r>
           </a:p>
         </p:txBody>
@@ -10729,12 +10851,12 @@
           </a:xfrm>
         </p:spPr>
         <p:txBody>
-          <a:bodyPr wrap="square" anchor="t" lIns="0" rIns="0" tIns="0" bIns="0"/>
+          <a:bodyPr wrap="none" anchor="t" lIns="0" rIns="0" tIns="0" bIns="0"/>
           <a:lstStyle/>
           <a:p>
             <a:pPr algn="l">
               <a:lnSpc>
-                <a:spcPct val="115000"/>
+                <a:spcPct val="100000"/>
               </a:lnSpc>
               <a:spcBef>
                 <a:spcPts val="0"/>
@@ -10753,7 +10875,7 @@
               </a:defRPr>
             </a:pPr>
             <a:r>
-              <a:rPr lang="ja-JP" sz="2800" b="1">
+              <a:rPr sz="2800" b="1" lang="ja-JP">
                 <a:solidFill>
                   <a:srgbClr val="303437"/>
                 </a:solidFill>
@@ -10815,7 +10937,7 @@
                 <a:ea typeface="Noto Sans CJK JP"/>
                 <a:cs typeface="Noto Sans"/>
               </a:rPr>
-              <a:t>2 成立の背景と注釈の構造</a:t>
+              <a:t>2 画像の収集方法と物体注釈の構造</a:t>
             </a:r>
           </a:p>
         </p:txBody>
@@ -10924,7 +11046,7 @@
                 <a:latin typeface="Noto Sans"/>
                 <a:ea typeface="Noto Sans CJK JP"/>
                 <a:cs typeface="Noto Sans"/>
-                <a:hlinkClick r:id="rId5"/>
+                <a:hlinkClick r:id="rId3"/>
               </a:rPr>
               <a:t>https://cocodataset.org/#format-data</a:t>
             </a:r>
@@ -11002,11 +11124,13 @@
                       <a:solidFill>
                         <a:srgbClr val="626669"/>
                       </a:solidFill>
+                      <a:prstDash val="solid"/>
                     </a:lnT>
                     <a:lnB w="10160">
                       <a:solidFill>
                         <a:srgbClr val="626669"/>
                       </a:solidFill>
+                      <a:prstDash val="solid"/>
                     </a:lnB>
                     <a:solidFill>
                       <a:srgbClr val="FFFEF8"/>
@@ -11062,11 +11186,13 @@
                       <a:solidFill>
                         <a:srgbClr val="626669"/>
                       </a:solidFill>
+                      <a:prstDash val="solid"/>
                     </a:lnT>
                     <a:lnB w="10160">
                       <a:solidFill>
                         <a:srgbClr val="626669"/>
                       </a:solidFill>
+                      <a:prstDash val="solid"/>
                     </a:lnB>
                     <a:solidFill>
                       <a:srgbClr val="FFFEF8"/>
@@ -11122,11 +11248,13 @@
                       <a:solidFill>
                         <a:srgbClr val="626669"/>
                       </a:solidFill>
+                      <a:prstDash val="solid"/>
                     </a:lnT>
                     <a:lnB w="10160">
                       <a:solidFill>
                         <a:srgbClr val="626669"/>
                       </a:solidFill>
+                      <a:prstDash val="solid"/>
                     </a:lnB>
                     <a:solidFill>
                       <a:srgbClr val="FFFEF8"/>
@@ -11180,8 +11308,11 @@
                     <a:lnR w="0">
                       <a:noFill/>
                     </a:lnR>
-                    <a:lnT w="0">
-                      <a:noFill/>
+                    <a:lnT w="10160">
+                      <a:solidFill>
+                        <a:srgbClr val="626669"/>
+                      </a:solidFill>
+                      <a:prstDash val="solid"/>
                     </a:lnT>
                     <a:lnB w="0">
                       <a:noFill/>
@@ -11236,8 +11367,11 @@
                     <a:lnR w="0">
                       <a:noFill/>
                     </a:lnR>
-                    <a:lnT w="0">
-                      <a:noFill/>
+                    <a:lnT w="10160">
+                      <a:solidFill>
+                        <a:srgbClr val="626669"/>
+                      </a:solidFill>
+                      <a:prstDash val="solid"/>
                     </a:lnT>
                     <a:lnB w="0">
                       <a:noFill/>
@@ -11292,8 +11426,11 @@
                     <a:lnR w="0">
                       <a:noFill/>
                     </a:lnR>
-                    <a:lnT w="0">
-                      <a:noFill/>
+                    <a:lnT w="10160">
+                      <a:solidFill>
+                        <a:srgbClr val="626669"/>
+                      </a:solidFill>
+                      <a:prstDash val="solid"/>
                     </a:lnT>
                     <a:lnB w="0">
                       <a:noFill/>
@@ -11527,6 +11664,7 @@
                       <a:solidFill>
                         <a:srgbClr val="626669"/>
                       </a:solidFill>
+                      <a:prstDash val="solid"/>
                     </a:lnB>
                     <a:solidFill>
                       <a:srgbClr val="FFFEF8"/>
@@ -11585,6 +11723,7 @@
                       <a:solidFill>
                         <a:srgbClr val="626669"/>
                       </a:solidFill>
+                      <a:prstDash val="solid"/>
                     </a:lnB>
                     <a:solidFill>
                       <a:srgbClr val="FFFEF8"/>
@@ -11643,6 +11782,7 @@
                       <a:solidFill>
                         <a:srgbClr val="626669"/>
                       </a:solidFill>
+                      <a:prstDash val="solid"/>
                     </a:lnB>
                     <a:solidFill>
                       <a:srgbClr val="FFFEF8"/>
@@ -11745,12 +11885,12 @@
           </a:xfrm>
         </p:spPr>
         <p:txBody>
-          <a:bodyPr wrap="square" anchor="t" lIns="0" rIns="0" tIns="0" bIns="0"/>
+          <a:bodyPr wrap="none" anchor="t" lIns="0" rIns="0" tIns="0" bIns="0"/>
           <a:lstStyle/>
           <a:p>
             <a:pPr algn="l">
               <a:lnSpc>
-                <a:spcPct val="115000"/>
+                <a:spcPct val="100000"/>
               </a:lnSpc>
               <a:spcBef>
                 <a:spcPts val="0"/>
@@ -11769,7 +11909,7 @@
               </a:defRPr>
             </a:pPr>
             <a:r>
-              <a:rPr lang="ja-JP" sz="2800" b="1">
+              <a:rPr sz="2800" b="1" lang="ja-JP">
                 <a:solidFill>
                   <a:srgbClr val="303437"/>
                 </a:solidFill>
@@ -11957,21 +12097,21 @@
                 <a:ea typeface="Noto Sans CJK JP"/>
                 <a:cs typeface="Noto Sans"/>
               </a:rPr>
-              <a:t>2 成立の背景と注釈の構造</a:t>
-            </a:r>
-          </a:p>
-        </p:txBody>
-      </p:sp>
-      <p:sp>
-        <p:nvSpPr>
-          <p:cNvPr id="5" name="sources"/>
+              <a:t>2 画像の収集方法と物体注釈の構造</a:t>
+            </a:r>
+          </a:p>
+        </p:txBody>
+      </p:sp>
+      <p:sp>
+        <p:nvSpPr>
+          <p:cNvPr id="5" name="TextBox 4"/>
           <p:cNvSpPr txBox="1"/>
           <p:nvPr/>
         </p:nvSpPr>
         <p:spPr>
           <a:xfrm>
-            <a:off x="502920" y="4828032"/>
-            <a:ext cx="8183879" cy="640080"/>
+            <a:off x="502920" y="4699000"/>
+            <a:ext cx="8183879" cy="177800"/>
           </a:xfrm>
           <a:prstGeom prst="rect">
             <a:avLst/>
@@ -11984,24 +12124,74 @@
           </a:bodyPr>
           <a:lstStyle/>
           <a:p>
-            <a:pPr>
-              <a:lnSpc>
-                <a:spcPts val="1200"/>
-              </a:lnSpc>
-              <a:spcBef>
-                <a:spcPts val="0"/>
-              </a:spcBef>
-              <a:spcAft>
-                <a:spcPts val="0"/>
-              </a:spcAft>
-              <a:defRPr sz="800" b="0" lang="ja-JP">
+            <a:pPr algn="l">
+              <a:lnSpc>
+                <a:spcPts val="1400"/>
+              </a:lnSpc>
+              <a:spcBef>
+                <a:spcPts val="0"/>
+              </a:spcBef>
+              <a:spcAft>
+                <a:spcPts val="0"/>
+              </a:spcAft>
+            </a:pPr>
+            <a:r>
+              <a:rPr sz="800" b="0" lang="ja-JP">
                 <a:solidFill>
                   <a:srgbClr val="626669"/>
                 </a:solidFill>
                 <a:latin typeface="Noto Sans"/>
                 <a:ea typeface="Noto Sans CJK JP"/>
                 <a:cs typeface="Noto Sans"/>
-              </a:defRPr>
+              </a:rPr>
+              <a:t/>
+            </a:r>
+            <a:r>
+              <a:rPr sz="800" lang="ja-JP">
+                <a:solidFill>
+                  <a:srgbClr val="626669"/>
+                </a:solidFill>
+                <a:latin typeface="Noto Sans"/>
+                <a:ea typeface="Noto Sans CJK JP"/>
+                <a:cs typeface="Noto Sans"/>
+              </a:rPr>
+              <a:t>[1] Tsung-Yi Lin et al. (2014). European Conference on Computer Vision (ECCV), pp. 740–755. Microsoft COCO: Common Objects in Context.</a:t>
+            </a:r>
+          </a:p>
+        </p:txBody>
+      </p:sp>
+      <p:sp>
+        <p:nvSpPr>
+          <p:cNvPr id="6" name="TextBox 5"/>
+          <p:cNvSpPr txBox="1"/>
+          <p:nvPr/>
+        </p:nvSpPr>
+        <p:spPr>
+          <a:xfrm>
+            <a:off x="502920" y="4876800"/>
+            <a:ext cx="8183879" cy="177800"/>
+          </a:xfrm>
+          <a:prstGeom prst="rect">
+            <a:avLst/>
+          </a:prstGeom>
+          <a:noFill/>
+        </p:spPr>
+        <p:txBody>
+          <a:bodyPr wrap="square" lIns="0" rIns="0" tIns="0" bIns="0">
+            <a:spAutoFit/>
+          </a:bodyPr>
+          <a:lstStyle/>
+          <a:p>
+            <a:pPr algn="l">
+              <a:lnSpc>
+                <a:spcPts val="1400"/>
+              </a:lnSpc>
+              <a:spcBef>
+                <a:spcPts val="0"/>
+              </a:spcBef>
+              <a:spcAft>
+                <a:spcPts val="0"/>
+              </a:spcAft>
             </a:pPr>
             <a:r>
               <a:rPr sz="800" b="0" lang="ja-JP">
@@ -12012,10 +12202,10 @@
                 <a:ea typeface="Noto Sans CJK JP"/>
                 <a:cs typeface="Noto Sans"/>
               </a:rPr>
-              <a:t>[1] </a:t>
-            </a:r>
-            <a:r>
-              <a:rPr sz="800" b="0" lang="ja-JP">
+              <a:t/>
+            </a:r>
+            <a:r>
+              <a:rPr sz="800" lang="ja-JP">
                 <a:solidFill>
                   <a:srgbClr val="626669"/>
                 </a:solidFill>
@@ -12064,12 +12254,12 @@
           </a:xfrm>
         </p:spPr>
         <p:txBody>
-          <a:bodyPr wrap="square" anchor="t" lIns="0" rIns="0" tIns="0" bIns="0"/>
+          <a:bodyPr wrap="none" anchor="t" lIns="0" rIns="0" tIns="0" bIns="0"/>
           <a:lstStyle/>
           <a:p>
             <a:pPr algn="l">
               <a:lnSpc>
-                <a:spcPct val="115000"/>
+                <a:spcPct val="100000"/>
               </a:lnSpc>
               <a:spcBef>
                 <a:spcPts val="0"/>
@@ -12088,7 +12278,7 @@
               </a:defRPr>
             </a:pPr>
             <a:r>
-              <a:rPr lang="ja-JP" sz="2800" b="1">
+              <a:rPr sz="2800" b="1" lang="ja-JP">
                 <a:solidFill>
                   <a:srgbClr val="303437"/>
                 </a:solidFill>
@@ -12276,21 +12466,21 @@
                 <a:ea typeface="Noto Sans CJK JP"/>
                 <a:cs typeface="Noto Sans"/>
               </a:rPr>
-              <a:t>2 成立の背景と注釈の構造</a:t>
-            </a:r>
-          </a:p>
-        </p:txBody>
-      </p:sp>
-      <p:sp>
-        <p:nvSpPr>
-          <p:cNvPr id="5" name="sources"/>
+              <a:t>2 画像の収集方法と物体注釈の構造</a:t>
+            </a:r>
+          </a:p>
+        </p:txBody>
+      </p:sp>
+      <p:sp>
+        <p:nvSpPr>
+          <p:cNvPr id="5" name="TextBox 4"/>
           <p:cNvSpPr txBox="1"/>
           <p:nvPr/>
         </p:nvSpPr>
         <p:spPr>
           <a:xfrm>
-            <a:off x="502920" y="4787900"/>
-            <a:ext cx="8183879" cy="640080"/>
+            <a:off x="502920" y="4521200"/>
+            <a:ext cx="8183879" cy="177800"/>
           </a:xfrm>
           <a:prstGeom prst="rect">
             <a:avLst/>
@@ -12303,24 +12493,74 @@
           </a:bodyPr>
           <a:lstStyle/>
           <a:p>
-            <a:pPr>
-              <a:lnSpc>
-                <a:spcPts val="1200"/>
-              </a:lnSpc>
-              <a:spcBef>
-                <a:spcPts val="0"/>
-              </a:spcBef>
-              <a:spcAft>
-                <a:spcPts val="0"/>
-              </a:spcAft>
-              <a:defRPr sz="800" b="0" lang="ja-JP">
+            <a:pPr algn="l">
+              <a:lnSpc>
+                <a:spcPts val="1400"/>
+              </a:lnSpc>
+              <a:spcBef>
+                <a:spcPts val="0"/>
+              </a:spcBef>
+              <a:spcAft>
+                <a:spcPts val="0"/>
+              </a:spcAft>
+            </a:pPr>
+            <a:r>
+              <a:rPr sz="800" b="0" lang="ja-JP">
                 <a:solidFill>
                   <a:srgbClr val="626669"/>
                 </a:solidFill>
                 <a:latin typeface="Noto Sans"/>
                 <a:ea typeface="Noto Sans CJK JP"/>
                 <a:cs typeface="Noto Sans"/>
-              </a:defRPr>
+              </a:rPr>
+              <a:t/>
+            </a:r>
+            <a:r>
+              <a:rPr sz="800" lang="ja-JP">
+                <a:solidFill>
+                  <a:srgbClr val="626669"/>
+                </a:solidFill>
+                <a:latin typeface="Noto Sans"/>
+                <a:ea typeface="Noto Sans CJK JP"/>
+                <a:cs typeface="Noto Sans"/>
+              </a:rPr>
+              <a:t>[1] Tsung-Yi Lin et al. (2014). European Conference on Computer Vision (ECCV), pp. 740–755. Microsoft COCO: Common Objects in Context.</a:t>
+            </a:r>
+          </a:p>
+        </p:txBody>
+      </p:sp>
+      <p:sp>
+        <p:nvSpPr>
+          <p:cNvPr id="6" name="TextBox 5"/>
+          <p:cNvSpPr txBox="1"/>
+          <p:nvPr/>
+        </p:nvSpPr>
+        <p:spPr>
+          <a:xfrm>
+            <a:off x="502920" y="4699000"/>
+            <a:ext cx="8183879" cy="177800"/>
+          </a:xfrm>
+          <a:prstGeom prst="rect">
+            <a:avLst/>
+          </a:prstGeom>
+          <a:noFill/>
+        </p:spPr>
+        <p:txBody>
+          <a:bodyPr wrap="square" lIns="0" rIns="0" tIns="0" bIns="0">
+            <a:spAutoFit/>
+          </a:bodyPr>
+          <a:lstStyle/>
+          <a:p>
+            <a:pPr algn="l">
+              <a:lnSpc>
+                <a:spcPts val="1400"/>
+              </a:lnSpc>
+              <a:spcBef>
+                <a:spcPts val="0"/>
+              </a:spcBef>
+              <a:spcAft>
+                <a:spcPts val="0"/>
+              </a:spcAft>
             </a:pPr>
             <a:r>
               <a:rPr sz="800" b="0" lang="ja-JP">
@@ -12331,8 +12571,56 @@
                 <a:ea typeface="Noto Sans CJK JP"/>
                 <a:cs typeface="Noto Sans"/>
               </a:rPr>
-              <a:t>[1] </a:t>
-            </a:r>
+              <a:t/>
+            </a:r>
+            <a:r>
+              <a:rPr sz="800" lang="ja-JP">
+                <a:solidFill>
+                  <a:srgbClr val="626669"/>
+                </a:solidFill>
+                <a:latin typeface="Noto Sans"/>
+                <a:ea typeface="Noto Sans CJK JP"/>
+                <a:cs typeface="Noto Sans"/>
+                <a:hlinkClick r:id="rId2"/>
+              </a:rPr>
+              <a:t>https://arxiv.org/abs/1405.0312</a:t>
+            </a:r>
+          </a:p>
+        </p:txBody>
+      </p:sp>
+      <p:sp>
+        <p:nvSpPr>
+          <p:cNvPr id="7" name="TextBox 6"/>
+          <p:cNvSpPr txBox="1"/>
+          <p:nvPr/>
+        </p:nvSpPr>
+        <p:spPr>
+          <a:xfrm>
+            <a:off x="502920" y="4876800"/>
+            <a:ext cx="8183879" cy="177800"/>
+          </a:xfrm>
+          <a:prstGeom prst="rect">
+            <a:avLst/>
+          </a:prstGeom>
+          <a:noFill/>
+        </p:spPr>
+        <p:txBody>
+          <a:bodyPr wrap="square" lIns="0" rIns="0" tIns="0" bIns="0">
+            <a:spAutoFit/>
+          </a:bodyPr>
+          <a:lstStyle/>
+          <a:p>
+            <a:pPr algn="l">
+              <a:lnSpc>
+                <a:spcPts val="1400"/>
+              </a:lnSpc>
+              <a:spcBef>
+                <a:spcPts val="0"/>
+              </a:spcBef>
+              <a:spcAft>
+                <a:spcPts val="0"/>
+              </a:spcAft>
+            </a:pPr>
             <a:r>
               <a:rPr sz="800" b="0" lang="ja-JP">
                 <a:solidFill>
@@ -12341,44 +12629,22 @@
                 <a:latin typeface="Noto Sans"/>
                 <a:ea typeface="Noto Sans CJK JP"/>
                 <a:cs typeface="Noto Sans"/>
-                <a:hlinkClick r:id="rId2"/>
-              </a:rPr>
-              <a:t>https://arxiv.org/abs/1405.0312</a:t>
-            </a:r>
-          </a:p>
-          <a:p>
-            <a:pPr>
-              <a:lnSpc>
-                <a:spcPts val="1200"/>
-              </a:lnSpc>
-              <a:spcBef>
-                <a:spcPts val="0"/>
-              </a:spcBef>
-              <a:spcAft>
-                <a:spcPts val="0"/>
-              </a:spcAft>
-              <a:defRPr sz="800" b="0" lang="ja-JP">
+              </a:rPr>
+              <a:t/>
+            </a:r>
+            <a:r>
+              <a:rPr sz="800" lang="ja-JP">
                 <a:solidFill>
                   <a:srgbClr val="626669"/>
                 </a:solidFill>
                 <a:latin typeface="Noto Sans"/>
                 <a:ea typeface="Noto Sans CJK JP"/>
                 <a:cs typeface="Noto Sans"/>
-              </a:defRPr>
-            </a:pPr>
-            <a:r>
-              <a:rPr sz="800" b="0" lang="ja-JP">
-                <a:solidFill>
-                  <a:srgbClr val="626669"/>
-                </a:solidFill>
-                <a:latin typeface="Noto Sans"/>
-                <a:ea typeface="Noto Sans CJK JP"/>
-                <a:cs typeface="Noto Sans"/>
               </a:rPr>
               <a:t>[2] </a:t>
             </a:r>
             <a:r>
-              <a:rPr sz="800" b="0" lang="ja-JP">
+              <a:rPr sz="800" lang="ja-JP">
                 <a:solidFill>
                   <a:srgbClr val="626669"/>
                 </a:solidFill>
@@ -12427,12 +12693,12 @@
           </a:xfrm>
         </p:spPr>
         <p:txBody>
-          <a:bodyPr wrap="square" anchor="t" lIns="0" rIns="0" tIns="0" bIns="0"/>
+          <a:bodyPr wrap="none" anchor="t" lIns="0" rIns="0" tIns="0" bIns="0"/>
           <a:lstStyle/>
           <a:p>
             <a:pPr algn="l">
               <a:lnSpc>
-                <a:spcPct val="115000"/>
+                <a:spcPct val="100000"/>
               </a:lnSpc>
               <a:spcBef>
                 <a:spcPts val="0"/>
@@ -12451,7 +12717,7 @@
               </a:defRPr>
             </a:pPr>
             <a:r>
-              <a:rPr lang="ja-JP" sz="2800" b="1">
+              <a:rPr sz="2800" b="1" lang="ja-JP">
                 <a:solidFill>
                   <a:srgbClr val="303437"/>
                 </a:solidFill>
@@ -12639,21 +12905,21 @@
                 <a:ea typeface="Noto Sans CJK JP"/>
                 <a:cs typeface="Noto Sans"/>
               </a:rPr>
-              <a:t>2 成立の背景と注釈の構造</a:t>
-            </a:r>
-          </a:p>
-        </p:txBody>
-      </p:sp>
-      <p:sp>
-        <p:nvSpPr>
-          <p:cNvPr id="5" name="sources"/>
+              <a:t>2 画像の収集方法と物体注釈の構造</a:t>
+            </a:r>
+          </a:p>
+        </p:txBody>
+      </p:sp>
+      <p:sp>
+        <p:nvSpPr>
+          <p:cNvPr id="5" name="TextBox 4"/>
           <p:cNvSpPr txBox="1"/>
           <p:nvPr/>
         </p:nvSpPr>
         <p:spPr>
           <a:xfrm>
-            <a:off x="502920" y="4828032"/>
-            <a:ext cx="8183879" cy="640080"/>
+            <a:off x="502920" y="4699000"/>
+            <a:ext cx="8183879" cy="177800"/>
           </a:xfrm>
           <a:prstGeom prst="rect">
             <a:avLst/>
@@ -12666,24 +12932,74 @@
           </a:bodyPr>
           <a:lstStyle/>
           <a:p>
-            <a:pPr>
-              <a:lnSpc>
-                <a:spcPts val="1200"/>
-              </a:lnSpc>
-              <a:spcBef>
-                <a:spcPts val="0"/>
-              </a:spcBef>
-              <a:spcAft>
-                <a:spcPts val="0"/>
-              </a:spcAft>
-              <a:defRPr sz="800" b="0" lang="ja-JP">
+            <a:pPr algn="l">
+              <a:lnSpc>
+                <a:spcPts val="1400"/>
+              </a:lnSpc>
+              <a:spcBef>
+                <a:spcPts val="0"/>
+              </a:spcBef>
+              <a:spcAft>
+                <a:spcPts val="0"/>
+              </a:spcAft>
+            </a:pPr>
+            <a:r>
+              <a:rPr sz="800" b="0" lang="ja-JP">
                 <a:solidFill>
                   <a:srgbClr val="626669"/>
                 </a:solidFill>
                 <a:latin typeface="Noto Sans"/>
                 <a:ea typeface="Noto Sans CJK JP"/>
                 <a:cs typeface="Noto Sans"/>
-              </a:defRPr>
+              </a:rPr>
+              <a:t/>
+            </a:r>
+            <a:r>
+              <a:rPr sz="800" lang="ja-JP">
+                <a:solidFill>
+                  <a:srgbClr val="626669"/>
+                </a:solidFill>
+                <a:latin typeface="Noto Sans"/>
+                <a:ea typeface="Noto Sans CJK JP"/>
+                <a:cs typeface="Noto Sans"/>
+              </a:rPr>
+              <a:t>[1] Tsung-Yi Lin et al. (2014). European Conference on Computer Vision (ECCV), pp. 740–755. Microsoft COCO: Common Objects in Context.</a:t>
+            </a:r>
+          </a:p>
+        </p:txBody>
+      </p:sp>
+      <p:sp>
+        <p:nvSpPr>
+          <p:cNvPr id="6" name="TextBox 5"/>
+          <p:cNvSpPr txBox="1"/>
+          <p:nvPr/>
+        </p:nvSpPr>
+        <p:spPr>
+          <a:xfrm>
+            <a:off x="502920" y="4876800"/>
+            <a:ext cx="8183879" cy="177800"/>
+          </a:xfrm>
+          <a:prstGeom prst="rect">
+            <a:avLst/>
+          </a:prstGeom>
+          <a:noFill/>
+        </p:spPr>
+        <p:txBody>
+          <a:bodyPr wrap="square" lIns="0" rIns="0" tIns="0" bIns="0">
+            <a:spAutoFit/>
+          </a:bodyPr>
+          <a:lstStyle/>
+          <a:p>
+            <a:pPr algn="l">
+              <a:lnSpc>
+                <a:spcPts val="1400"/>
+              </a:lnSpc>
+              <a:spcBef>
+                <a:spcPts val="0"/>
+              </a:spcBef>
+              <a:spcAft>
+                <a:spcPts val="0"/>
+              </a:spcAft>
             </a:pPr>
             <a:r>
               <a:rPr sz="800" b="0" lang="ja-JP">
@@ -12694,17 +13010,17 @@
                 <a:ea typeface="Noto Sans CJK JP"/>
                 <a:cs typeface="Noto Sans"/>
               </a:rPr>
-              <a:t>[1] </a:t>
-            </a:r>
-            <a:r>
-              <a:rPr sz="800" b="0" lang="ja-JP">
+              <a:t/>
+            </a:r>
+            <a:r>
+              <a:rPr sz="800" lang="ja-JP">
                 <a:solidFill>
                   <a:srgbClr val="626669"/>
                 </a:solidFill>
                 <a:latin typeface="Noto Sans"/>
                 <a:ea typeface="Noto Sans CJK JP"/>
                 <a:cs typeface="Noto Sans"/>
-                <a:hlinkClick r:id="rId3"/>
+                <a:hlinkClick r:id="rId2"/>
               </a:rPr>
               <a:t>https://arxiv.org/abs/1405.0312</a:t>
             </a:r>
@@ -12746,12 +13062,12 @@
           </a:xfrm>
         </p:spPr>
         <p:txBody>
-          <a:bodyPr wrap="square" anchor="t" lIns="0" rIns="0" tIns="0" bIns="0"/>
+          <a:bodyPr wrap="none" anchor="t" lIns="0" rIns="0" tIns="0" bIns="0"/>
           <a:lstStyle/>
           <a:p>
             <a:pPr algn="l">
               <a:lnSpc>
-                <a:spcPct val="115000"/>
+                <a:spcPct val="100000"/>
               </a:lnSpc>
               <a:spcBef>
                 <a:spcPts val="0"/>
@@ -12770,7 +13086,7 @@
               </a:defRPr>
             </a:pPr>
             <a:r>
-              <a:rPr lang="ja-JP" sz="2800" b="1">
+              <a:rPr sz="2800" b="1" lang="ja-JP">
                 <a:solidFill>
                   <a:srgbClr val="303437"/>
                 </a:solidFill>
@@ -12958,7 +13274,7 @@
                 <a:ea typeface="Noto Sans CJK JP"/>
                 <a:cs typeface="Noto Sans"/>
               </a:rPr>
-              <a:t>2 成立の背景と注釈の構造</a:t>
+              <a:t>2 画像の収集方法と物体注釈の構造</a:t>
             </a:r>
           </a:p>
         </p:txBody>
@@ -13065,12 +13381,12 @@
           </a:xfrm>
         </p:spPr>
         <p:txBody>
-          <a:bodyPr wrap="square" anchor="t" lIns="0" rIns="0" tIns="0" bIns="0"/>
+          <a:bodyPr wrap="none" anchor="t" lIns="0" rIns="0" tIns="0" bIns="0"/>
           <a:lstStyle/>
           <a:p>
             <a:pPr algn="l">
               <a:lnSpc>
-                <a:spcPct val="115000"/>
+                <a:spcPct val="100000"/>
               </a:lnSpc>
               <a:spcBef>
                 <a:spcPts val="0"/>
@@ -13089,7 +13405,7 @@
               </a:defRPr>
             </a:pPr>
             <a:r>
-              <a:rPr lang="ja-JP" sz="2800" b="1">
+              <a:rPr sz="2800" b="1" lang="ja-JP">
                 <a:solidFill>
                   <a:srgbClr val="303437"/>
                 </a:solidFill>
@@ -13277,7 +13593,7 @@
                 <a:ea typeface="Noto Sans CJK JP"/>
                 <a:cs typeface="Noto Sans"/>
               </a:rPr>
-              <a:t>2 成立の背景と注釈の構造</a:t>
+              <a:t>2 画像の収集方法と物体注釈の構造</a:t>
             </a:r>
           </a:p>
         </p:txBody>
@@ -13342,7 +13658,7 @@
                 <a:latin typeface="Noto Sans"/>
                 <a:ea typeface="Noto Sans CJK JP"/>
                 <a:cs typeface="Noto Sans"/>
-                <a:hlinkClick r:id="rId3"/>
+                <a:hlinkClick r:id="rId2"/>
               </a:rPr>
               <a:t>https://cocodataset.org/#format-data</a:t>
             </a:r>
@@ -13384,12 +13700,12 @@
           </a:xfrm>
         </p:spPr>
         <p:txBody>
-          <a:bodyPr wrap="square" anchor="t" lIns="0" rIns="0" tIns="0" bIns="0"/>
+          <a:bodyPr wrap="none" anchor="t" lIns="0" rIns="0" tIns="0" bIns="0"/>
           <a:lstStyle/>
           <a:p>
             <a:pPr algn="l">
               <a:lnSpc>
-                <a:spcPct val="115000"/>
+                <a:spcPct val="100000"/>
               </a:lnSpc>
               <a:spcBef>
                 <a:spcPts val="0"/>
@@ -13408,7 +13724,7 @@
               </a:defRPr>
             </a:pPr>
             <a:r>
-              <a:rPr lang="ja-JP" sz="2800" b="1">
+              <a:rPr sz="2800" b="1" lang="ja-JP">
                 <a:solidFill>
                   <a:srgbClr val="303437"/>
                 </a:solidFill>
@@ -13596,7 +13912,7 @@
                 <a:ea typeface="Noto Sans CJK JP"/>
                 <a:cs typeface="Noto Sans"/>
               </a:rPr>
-              <a:t>2 成立の背景と注釈の構造</a:t>
+              <a:t>2 画像の収集方法と物体注釈の構造</a:t>
             </a:r>
           </a:p>
         </p:txBody>
@@ -13705,7 +14021,7 @@
                 <a:latin typeface="Noto Sans"/>
                 <a:ea typeface="Noto Sans CJK JP"/>
                 <a:cs typeface="Noto Sans"/>
-                <a:hlinkClick r:id="rId4"/>
+                <a:hlinkClick r:id="rId2"/>
               </a:rPr>
               <a:t>https://github.com/cocodataset/cocoapi/blob/master/PythonAPI/pycocotools/mask.py</a:t>
             </a:r>
@@ -13747,12 +14063,12 @@
           </a:xfrm>
         </p:spPr>
         <p:txBody>
-          <a:bodyPr wrap="square" anchor="t" lIns="0" rIns="0" tIns="0" bIns="0"/>
+          <a:bodyPr wrap="none" anchor="t" lIns="0" rIns="0" tIns="0" bIns="0"/>
           <a:lstStyle/>
           <a:p>
             <a:pPr algn="l">
               <a:lnSpc>
-                <a:spcPct val="115000"/>
+                <a:spcPct val="100000"/>
               </a:lnSpc>
               <a:spcBef>
                 <a:spcPts val="0"/>
@@ -13771,7 +14087,7 @@
               </a:defRPr>
             </a:pPr>
             <a:r>
-              <a:rPr lang="ja-JP" sz="2800" b="1">
+              <a:rPr sz="2800" b="1" lang="ja-JP">
                 <a:solidFill>
                   <a:srgbClr val="303437"/>
                 </a:solidFill>
@@ -13833,7 +14149,7 @@
                 <a:ea typeface="Noto Sans CJK JP"/>
                 <a:cs typeface="Noto Sans"/>
               </a:rPr>
-              <a:t>2 成立の背景と注釈の構造</a:t>
+              <a:t>2 画像の収集方法と物体注釈の構造</a:t>
             </a:r>
           </a:p>
         </p:txBody>
@@ -13898,7 +14214,7 @@
                 <a:latin typeface="Noto Sans"/>
                 <a:ea typeface="Noto Sans CJK JP"/>
                 <a:cs typeface="Noto Sans"/>
-                <a:hlinkClick r:id="rId4"/>
+                <a:hlinkClick r:id="rId3"/>
               </a:rPr>
               <a:t>https://github.com/cocodataset/cocoapi/blob/master/PythonAPI/pycocotools/mask.py</a:t>
             </a:r>
@@ -16245,12 +16561,12 @@
           </a:xfrm>
         </p:spPr>
         <p:txBody>
-          <a:bodyPr wrap="square" anchor="t" lIns="0" rIns="0" tIns="0" bIns="0"/>
+          <a:bodyPr wrap="none" anchor="t" lIns="0" rIns="0" tIns="0" bIns="0"/>
           <a:lstStyle/>
           <a:p>
             <a:pPr algn="l">
               <a:lnSpc>
-                <a:spcPct val="115000"/>
+                <a:spcPct val="100000"/>
               </a:lnSpc>
               <a:spcBef>
                 <a:spcPts val="0"/>
@@ -16269,7 +16585,7 @@
               </a:defRPr>
             </a:pPr>
             <a:r>
-              <a:rPr lang="ja-JP" sz="2800" b="1">
+              <a:rPr sz="2800" b="1" lang="ja-JP">
                 <a:solidFill>
                   <a:srgbClr val="303437"/>
                 </a:solidFill>
@@ -16331,7 +16647,7 @@
                 <a:ea typeface="Noto Sans CJK JP"/>
                 <a:cs typeface="Noto Sans"/>
               </a:rPr>
-              <a:t>2 成立の背景と注釈の構造</a:t>
+              <a:t>2 画像の収集方法と物体注釈の構造</a:t>
             </a:r>
           </a:p>
         </p:txBody>
@@ -16396,7 +16712,7 @@
                 <a:latin typeface="Noto Sans"/>
                 <a:ea typeface="Noto Sans CJK JP"/>
                 <a:cs typeface="Noto Sans"/>
-                <a:hlinkClick r:id="rId4"/>
+                <a:hlinkClick r:id="rId3"/>
               </a:rPr>
               <a:t>https://github.com/cocodataset/cocoapi/blob/master/PythonAPI/pycocotools/mask.py</a:t>
             </a:r>
@@ -18876,12 +19192,12 @@
           </a:xfrm>
         </p:spPr>
         <p:txBody>
-          <a:bodyPr wrap="square" anchor="t" lIns="0" rIns="0" tIns="0" bIns="0"/>
+          <a:bodyPr wrap="none" anchor="t" lIns="0" rIns="0" tIns="0" bIns="0"/>
           <a:lstStyle/>
           <a:p>
             <a:pPr algn="l">
               <a:lnSpc>
-                <a:spcPct val="115000"/>
+                <a:spcPct val="100000"/>
               </a:lnSpc>
               <a:spcBef>
                 <a:spcPts val="0"/>
@@ -18900,7 +19216,7 @@
               </a:defRPr>
             </a:pPr>
             <a:r>
-              <a:rPr lang="ja-JP" sz="2800" b="1">
+              <a:rPr sz="2800" b="1" lang="ja-JP">
                 <a:solidFill>
                   <a:srgbClr val="303437"/>
                 </a:solidFill>
@@ -18962,7 +19278,7 @@
                 <a:ea typeface="Noto Sans CJK JP"/>
                 <a:cs typeface="Noto Sans"/>
               </a:rPr>
-              <a:t>2 成立の背景と注釈の構造</a:t>
+              <a:t>2 画像の収集方法と物体注釈の構造</a:t>
             </a:r>
           </a:p>
         </p:txBody>
@@ -19027,7 +19343,7 @@
                 <a:latin typeface="Noto Sans"/>
                 <a:ea typeface="Noto Sans CJK JP"/>
                 <a:cs typeface="Noto Sans"/>
-                <a:hlinkClick r:id="rId4"/>
+                <a:hlinkClick r:id="rId3"/>
               </a:rPr>
               <a:t>https://github.com/cocodataset/cocoapi/blob/master/PythonAPI/pycocotools/mask.py</a:t>
             </a:r>
@@ -19417,8 +19733,8 @@
         </p:nvSpPr>
         <p:spPr>
           <a:xfrm>
-            <a:off x="457200" y="1554480"/>
-            <a:ext cx="8229600" cy="1920240"/>
+            <a:off x="548640" y="2459852"/>
+            <a:ext cx="8046720" cy="731520"/>
           </a:xfrm>
         </p:spPr>
         <p:txBody>
@@ -19427,7 +19743,7 @@
           <a:p>
             <a:pPr algn="ctr">
               <a:lnSpc>
-                <a:spcPct val="115000"/>
+                <a:spcPct val="100000"/>
               </a:lnSpc>
               <a:spcBef>
                 <a:spcPts val="0"/>
@@ -19446,15 +19762,15 @@
               </a:defRPr>
             </a:pPr>
             <a:r>
-              <a:rPr lang="ja-JP" sz="3400" b="1">
-                <a:solidFill>
-                  <a:srgbClr val="303437"/>
-                </a:solidFill>
-                <a:latin typeface="Noto Sans"/>
-                <a:ea typeface="Noto Sans CJK JP"/>
-                <a:cs typeface="Noto Sans"/>
-              </a:rPr>
-              <a:t>1 認識課題と実画像</a:t>
+              <a:rPr sz="3200" b="1" lang="ja-JP">
+                <a:solidFill>
+                  <a:srgbClr val="303437"/>
+                </a:solidFill>
+                <a:latin typeface="Noto Sans"/>
+                <a:ea typeface="Noto Sans CJK JP"/>
+                <a:cs typeface="Noto Sans"/>
+              </a:rPr>
+              <a:t>1 COCOの認識課題と領域注釈の実例</a:t>
             </a:r>
           </a:p>
         </p:txBody>
@@ -19481,7 +19797,7 @@
           <a:p>
             <a:pPr algn="l">
               <a:lnSpc>
-                <a:spcPct val="115000"/>
+                <a:spcPct val="100000"/>
               </a:lnSpc>
               <a:spcBef>
                 <a:spcPts val="0"/>
@@ -19508,7 +19824,7 @@
                 <a:ea typeface="Noto Sans CJK JP"/>
                 <a:cs typeface="Noto Sans"/>
               </a:rPr>
-              <a:t>1 認識課題と実画像</a:t>
+              <a:t>1 COCOの認識課題と領域注釈の実例</a:t>
             </a:r>
           </a:p>
         </p:txBody>
@@ -19548,12 +19864,12 @@
           </a:xfrm>
         </p:spPr>
         <p:txBody>
-          <a:bodyPr wrap="square" anchor="t" lIns="0" rIns="0" tIns="0" bIns="0"/>
+          <a:bodyPr wrap="none" anchor="t" lIns="0" rIns="0" tIns="0" bIns="0"/>
           <a:lstStyle/>
           <a:p>
             <a:pPr algn="l">
               <a:lnSpc>
-                <a:spcPct val="115000"/>
+                <a:spcPct val="100000"/>
               </a:lnSpc>
               <a:spcBef>
                 <a:spcPts val="0"/>
@@ -19572,7 +19888,7 @@
               </a:defRPr>
             </a:pPr>
             <a:r>
-              <a:rPr lang="ja-JP" sz="2800" b="1">
+              <a:rPr sz="2800" b="1" lang="ja-JP">
                 <a:solidFill>
                   <a:srgbClr val="303437"/>
                 </a:solidFill>
@@ -19634,7 +19950,7 @@
                 <a:ea typeface="Noto Sans CJK JP"/>
                 <a:cs typeface="Noto Sans"/>
               </a:rPr>
-              <a:t>2 成立の背景と注釈の構造</a:t>
+              <a:t>2 画像の収集方法と物体注釈の構造</a:t>
             </a:r>
           </a:p>
         </p:txBody>
@@ -19710,11 +20026,13 @@
                       <a:solidFill>
                         <a:srgbClr val="626669"/>
                       </a:solidFill>
+                      <a:prstDash val="solid"/>
                     </a:lnT>
                     <a:lnB w="10160">
                       <a:solidFill>
                         <a:srgbClr val="626669"/>
                       </a:solidFill>
+                      <a:prstDash val="solid"/>
                     </a:lnB>
                     <a:solidFill>
                       <a:srgbClr val="FFFEF8"/>
@@ -19770,11 +20088,13 @@
                       <a:solidFill>
                         <a:srgbClr val="626669"/>
                       </a:solidFill>
+                      <a:prstDash val="solid"/>
                     </a:lnT>
                     <a:lnB w="10160">
                       <a:solidFill>
                         <a:srgbClr val="626669"/>
                       </a:solidFill>
+                      <a:prstDash val="solid"/>
                     </a:lnB>
                     <a:solidFill>
                       <a:srgbClr val="FFFEF8"/>
@@ -19830,11 +20150,13 @@
                       <a:solidFill>
                         <a:srgbClr val="626669"/>
                       </a:solidFill>
+                      <a:prstDash val="solid"/>
                     </a:lnT>
                     <a:lnB w="10160">
                       <a:solidFill>
                         <a:srgbClr val="626669"/>
                       </a:solidFill>
+                      <a:prstDash val="solid"/>
                     </a:lnB>
                     <a:solidFill>
                       <a:srgbClr val="FFFEF8"/>
@@ -19888,8 +20210,11 @@
                     <a:lnR w="0">
                       <a:noFill/>
                     </a:lnR>
-                    <a:lnT w="0">
-                      <a:noFill/>
+                    <a:lnT w="10160">
+                      <a:solidFill>
+                        <a:srgbClr val="626669"/>
+                      </a:solidFill>
+                      <a:prstDash val="solid"/>
                     </a:lnT>
                     <a:lnB w="0">
                       <a:noFill/>
@@ -19944,8 +20269,11 @@
                     <a:lnR w="0">
                       <a:noFill/>
                     </a:lnR>
-                    <a:lnT w="0">
-                      <a:noFill/>
+                    <a:lnT w="10160">
+                      <a:solidFill>
+                        <a:srgbClr val="626669"/>
+                      </a:solidFill>
+                      <a:prstDash val="solid"/>
                     </a:lnT>
                     <a:lnB w="0">
                       <a:noFill/>
@@ -20000,8 +20328,11 @@
                     <a:lnR w="0">
                       <a:noFill/>
                     </a:lnR>
-                    <a:lnT w="0">
-                      <a:noFill/>
+                    <a:lnT w="10160">
+                      <a:solidFill>
+                        <a:srgbClr val="626669"/>
+                      </a:solidFill>
+                      <a:prstDash val="solid"/>
                     </a:lnT>
                     <a:lnB w="0">
                       <a:noFill/>
@@ -20235,6 +20566,7 @@
                       <a:solidFill>
                         <a:srgbClr val="626669"/>
                       </a:solidFill>
+                      <a:prstDash val="solid"/>
                     </a:lnB>
                     <a:solidFill>
                       <a:srgbClr val="FFFEF8"/>
@@ -20293,6 +20625,7 @@
                       <a:solidFill>
                         <a:srgbClr val="626669"/>
                       </a:solidFill>
+                      <a:prstDash val="solid"/>
                     </a:lnB>
                     <a:solidFill>
                       <a:srgbClr val="FFFEF8"/>
@@ -20351,6 +20684,7 @@
                       <a:solidFill>
                         <a:srgbClr val="626669"/>
                       </a:solidFill>
+                      <a:prstDash val="solid"/>
                     </a:lnB>
                     <a:solidFill>
                       <a:srgbClr val="FFFEF8"/>
@@ -20520,12 +20854,12 @@
           </a:xfrm>
         </p:spPr>
         <p:txBody>
-          <a:bodyPr wrap="square" anchor="t" lIns="0" rIns="0" tIns="0" bIns="0"/>
+          <a:bodyPr wrap="none" anchor="t" lIns="0" rIns="0" tIns="0" bIns="0"/>
           <a:lstStyle/>
           <a:p>
             <a:pPr algn="l">
               <a:lnSpc>
-                <a:spcPct val="115000"/>
+                <a:spcPct val="100000"/>
               </a:lnSpc>
               <a:spcBef>
                 <a:spcPts val="0"/>
@@ -20544,15 +20878,15 @@
               </a:defRPr>
             </a:pPr>
             <a:r>
-              <a:rPr lang="ja-JP" sz="2800" b="1">
-                <a:solidFill>
-                  <a:srgbClr val="303437"/>
-                </a:solidFill>
-                <a:latin typeface="Noto Sans"/>
-                <a:ea typeface="Noto Sans CJK JP"/>
-                <a:cs typeface="Noto Sans"/>
-              </a:rPr>
-              <a:t>全体の規模と2017年版の範囲</a:t>
+              <a:rPr sz="2800" b="1" lang="ja-JP">
+                <a:solidFill>
+                  <a:srgbClr val="303437"/>
+                </a:solidFill>
+                <a:latin typeface="Noto Sans"/>
+                <a:ea typeface="Noto Sans CJK JP"/>
+                <a:cs typeface="Noto Sans"/>
+              </a:rPr>
+              <a:t>COCO全体と2017年版train・valの画像数</a:t>
             </a:r>
           </a:p>
         </p:txBody>
@@ -20732,7 +21066,7 @@
                 <a:ea typeface="Noto Sans CJK JP"/>
                 <a:cs typeface="Noto Sans"/>
               </a:rPr>
-              <a:t>2 成立の背景と注釈の構造</a:t>
+              <a:t>2 画像の収集方法と物体注釈の構造</a:t>
             </a:r>
           </a:p>
         </p:txBody>
@@ -20862,12 +21196,12 @@
           </a:xfrm>
         </p:spPr>
         <p:txBody>
-          <a:bodyPr wrap="square" anchor="t" lIns="0" rIns="0" tIns="0" bIns="0"/>
+          <a:bodyPr wrap="none" anchor="t" lIns="0" rIns="0" tIns="0" bIns="0"/>
           <a:lstStyle/>
           <a:p>
             <a:pPr algn="l">
               <a:lnSpc>
-                <a:spcPct val="115000"/>
+                <a:spcPct val="100000"/>
               </a:lnSpc>
               <a:spcBef>
                 <a:spcPts val="0"/>
@@ -20886,15 +21220,15 @@
               </a:defRPr>
             </a:pPr>
             <a:r>
-              <a:rPr lang="ja-JP" sz="2800" b="1">
-                <a:solidFill>
-                  <a:srgbClr val="303437"/>
-                </a:solidFill>
-                <a:latin typeface="Noto Sans"/>
-                <a:ea typeface="Noto Sans CJK JP"/>
-                <a:cs typeface="Noto Sans"/>
-              </a:rPr>
-              <a:t>80物体カテゴリと背景カテゴリ</a:t>
+              <a:rPr sz="2800" b="1" lang="ja-JP">
+                <a:solidFill>
+                  <a:srgbClr val="303437"/>
+                </a:solidFill>
+                <a:latin typeface="Noto Sans"/>
+                <a:ea typeface="Noto Sans CJK JP"/>
+                <a:cs typeface="Noto Sans"/>
+              </a:rPr>
+              <a:t>物体・背景のカテゴリ数と注釈体系</a:t>
             </a:r>
           </a:p>
         </p:txBody>
@@ -21074,7 +21408,7 @@
                 <a:ea typeface="Noto Sans CJK JP"/>
                 <a:cs typeface="Noto Sans"/>
               </a:rPr>
-              <a:t>2 成立の背景と注釈の構造</a:t>
+              <a:t>2 画像の収集方法と物体注釈の構造</a:t>
             </a:r>
           </a:p>
         </p:txBody>
@@ -21226,12 +21560,12 @@
           <a:effectLst/>
         </p:spPr>
         <p:txBody>
-          <a:bodyPr wrap="square" anchor="t" lIns="0" rIns="0" tIns="0" bIns="0"/>
+          <a:bodyPr wrap="none" anchor="t" lIns="0" rIns="0" tIns="0" bIns="0"/>
           <a:lstStyle/>
           <a:p>
             <a:pPr algn="l">
               <a:lnSpc>
-                <a:spcPct val="115000"/>
+                <a:spcPct val="100000"/>
               </a:lnSpc>
               <a:spcBef>
                 <a:spcPts val="0"/>
@@ -21250,7 +21584,7 @@
               </a:defRPr>
             </a:pPr>
             <a:r>
-              <a:rPr lang="ja-JP" sz="2800" b="1">
+              <a:rPr sz="2800" b="1" lang="ja-JP">
                 <a:solidFill>
                   <a:srgbClr val="303437"/>
                 </a:solidFill>
@@ -21313,7 +21647,7 @@
                 <a:ea typeface="Noto Sans CJK JP"/>
                 <a:cs typeface="Noto Sans"/>
               </a:rPr>
-              <a:t>2 成立の背景と注釈の構造</a:t>
+              <a:t>2 画像の収集方法と物体注釈の構造</a:t>
             </a:r>
           </a:p>
         </p:txBody>
@@ -22601,7 +22935,7 @@
                 <a:latin typeface="Noto Sans"/>
                 <a:ea typeface="Noto Sans CJK JP"/>
                 <a:cs typeface="Noto Sans"/>
-                <a:hlinkClick r:id="rId5"/>
+                <a:hlinkClick r:id="rId3"/>
               </a:rPr>
               <a:t>https://github.com/ultralytics/assets/releases/download/v0.0.0/coco128-seg.zip</a:t>
             </a:r>
@@ -22675,12 +23009,12 @@
           </a:xfrm>
         </p:spPr>
         <p:txBody>
-          <a:bodyPr wrap="square" anchor="t" lIns="0" rIns="0" tIns="0" bIns="0"/>
+          <a:bodyPr wrap="none" anchor="t" lIns="0" rIns="0" tIns="0" bIns="0"/>
           <a:lstStyle/>
           <a:p>
             <a:pPr algn="l">
               <a:lnSpc>
-                <a:spcPct val="115000"/>
+                <a:spcPct val="100000"/>
               </a:lnSpc>
               <a:spcBef>
                 <a:spcPts val="0"/>
@@ -22699,7 +23033,7 @@
               </a:defRPr>
             </a:pPr>
             <a:r>
-              <a:rPr lang="ja-JP" sz="2800" b="1">
+              <a:rPr sz="2800" b="1" lang="ja-JP">
                 <a:solidFill>
                   <a:srgbClr val="303437"/>
                 </a:solidFill>
@@ -22761,7 +23095,7 @@
                 <a:ea typeface="Noto Sans CJK JP"/>
                 <a:cs typeface="Noto Sans"/>
               </a:rPr>
-              <a:t>2 成立の背景と注釈の構造</a:t>
+              <a:t>2 画像の収集方法と物体注釈の構造</a:t>
             </a:r>
           </a:p>
         </p:txBody>
@@ -22898,8 +23232,8 @@
         </p:nvSpPr>
         <p:spPr>
           <a:xfrm>
-            <a:off x="457200" y="1554480"/>
-            <a:ext cx="8229600" cy="1920240"/>
+            <a:off x="548640" y="2459558"/>
+            <a:ext cx="8046720" cy="731520"/>
           </a:xfrm>
         </p:spPr>
         <p:txBody>
@@ -22908,7 +23242,7 @@
           <a:p>
             <a:pPr algn="ctr">
               <a:lnSpc>
-                <a:spcPct val="115000"/>
+                <a:spcPct val="100000"/>
               </a:lnSpc>
               <a:spcBef>
                 <a:spcPts val="0"/>
@@ -22927,15 +23261,15 @@
               </a:defRPr>
             </a:pPr>
             <a:r>
-              <a:rPr lang="ja-JP" sz="3400" b="1">
-                <a:solidFill>
-                  <a:srgbClr val="303437"/>
-                </a:solidFill>
-                <a:latin typeface="Noto Sans"/>
-                <a:ea typeface="Noto Sans CJK JP"/>
-                <a:cs typeface="Noto Sans"/>
-              </a:rPr>
-              <a:t>3 評価指標とモデル</a:t>
+              <a:rPr sz="3150" b="1" lang="ja-JP">
+                <a:solidFill>
+                  <a:srgbClr val="303437"/>
+                </a:solidFill>
+                <a:latin typeface="Noto Sans"/>
+                <a:ea typeface="Noto Sans CJK JP"/>
+                <a:cs typeface="Noto Sans"/>
+              </a:rPr>
+              <a:t>3 物体検出・領域分割の評価とモデル性能</a:t>
             </a:r>
           </a:p>
         </p:txBody>
@@ -22962,7 +23296,7 @@
           <a:p>
             <a:pPr algn="l">
               <a:lnSpc>
-                <a:spcPct val="115000"/>
+                <a:spcPct val="100000"/>
               </a:lnSpc>
               <a:spcBef>
                 <a:spcPts val="0"/>
@@ -22989,7 +23323,7 @@
                 <a:ea typeface="Noto Sans CJK JP"/>
                 <a:cs typeface="Noto Sans"/>
               </a:rPr>
-              <a:t>3 評価指標とモデル</a:t>
+              <a:t>3 物体検出・領域分割の評価とモデル性能</a:t>
             </a:r>
           </a:p>
         </p:txBody>
@@ -23029,12 +23363,12 @@
           </a:xfrm>
         </p:spPr>
         <p:txBody>
-          <a:bodyPr wrap="square" anchor="t" lIns="0" rIns="0" tIns="0" bIns="0"/>
+          <a:bodyPr wrap="none" anchor="t" lIns="0" rIns="0" tIns="0" bIns="0"/>
           <a:lstStyle/>
           <a:p>
             <a:pPr algn="l">
               <a:lnSpc>
-                <a:spcPct val="115000"/>
+                <a:spcPct val="100000"/>
               </a:lnSpc>
               <a:spcBef>
                 <a:spcPts val="0"/>
@@ -23053,7 +23387,7 @@
               </a:defRPr>
             </a:pPr>
             <a:r>
-              <a:rPr lang="ja-JP" sz="2800" b="1">
+              <a:rPr sz="2800" b="1" lang="ja-JP">
                 <a:solidFill>
                   <a:srgbClr val="303437"/>
                 </a:solidFill>
@@ -23115,7 +23449,7 @@
                 <a:ea typeface="Noto Sans CJK JP"/>
                 <a:cs typeface="Noto Sans"/>
               </a:rPr>
-              <a:t>3 評価指標とモデル</a:t>
+              <a:t>3 物体検出・領域分割の評価とモデル性能</a:t>
             </a:r>
           </a:p>
         </p:txBody>
@@ -23609,12 +23943,12 @@
           </a:xfrm>
         </p:spPr>
         <p:txBody>
-          <a:bodyPr wrap="square" anchor="t" lIns="0" rIns="0" tIns="0" bIns="0"/>
+          <a:bodyPr wrap="none" anchor="t" lIns="0" rIns="0" tIns="0" bIns="0"/>
           <a:lstStyle/>
           <a:p>
             <a:pPr algn="l">
               <a:lnSpc>
-                <a:spcPct val="115000"/>
+                <a:spcPct val="100000"/>
               </a:lnSpc>
               <a:spcBef>
                 <a:spcPts val="0"/>
@@ -23633,7 +23967,7 @@
               </a:defRPr>
             </a:pPr>
             <a:r>
-              <a:rPr lang="ja-JP" sz="2800" b="1">
+              <a:rPr sz="2800" b="1" lang="ja-JP">
                 <a:solidFill>
                   <a:srgbClr val="303437"/>
                 </a:solidFill>
@@ -23821,7 +24155,7 @@
                 <a:ea typeface="Noto Sans CJK JP"/>
                 <a:cs typeface="Noto Sans"/>
               </a:rPr>
-              <a:t>3 評価指標とモデル</a:t>
+              <a:t>3 物体検出・領域分割の評価とモデル性能</a:t>
             </a:r>
           </a:p>
         </p:txBody>
@@ -23886,7 +24220,7 @@
                 <a:latin typeface="Noto Sans"/>
                 <a:ea typeface="Noto Sans CJK JP"/>
                 <a:cs typeface="Noto Sans"/>
-                <a:hlinkClick r:id="rId3"/>
+                <a:hlinkClick r:id="rId2"/>
               </a:rPr>
               <a:t>https://cocodataset.org/#detection-eval</a:t>
             </a:r>
@@ -23928,12 +24262,12 @@
           </a:xfrm>
         </p:spPr>
         <p:txBody>
-          <a:bodyPr wrap="square" anchor="t" lIns="0" rIns="0" tIns="0" bIns="0"/>
+          <a:bodyPr wrap="none" anchor="t" lIns="0" rIns="0" tIns="0" bIns="0"/>
           <a:lstStyle/>
           <a:p>
             <a:pPr algn="l">
               <a:lnSpc>
-                <a:spcPct val="115000"/>
+                <a:spcPct val="100000"/>
               </a:lnSpc>
               <a:spcBef>
                 <a:spcPts val="0"/>
@@ -23952,7 +24286,7 @@
               </a:defRPr>
             </a:pPr>
             <a:r>
-              <a:rPr lang="ja-JP" sz="2800" b="1">
+              <a:rPr sz="2800" b="1" lang="ja-JP">
                 <a:solidFill>
                   <a:srgbClr val="303437"/>
                 </a:solidFill>
@@ -24014,7 +24348,7 @@
                 <a:ea typeface="Noto Sans CJK JP"/>
                 <a:cs typeface="Noto Sans"/>
               </a:rPr>
-              <a:t>3 評価指標とモデル</a:t>
+              <a:t>3 物体検出・領域分割の評価とモデル性能</a:t>
             </a:r>
           </a:p>
         </p:txBody>
@@ -24079,7 +24413,7 @@
                 <a:latin typeface="Noto Sans"/>
                 <a:ea typeface="Noto Sans CJK JP"/>
                 <a:cs typeface="Noto Sans"/>
-                <a:hlinkClick r:id="rId4"/>
+                <a:hlinkClick r:id="rId3"/>
               </a:rPr>
               <a:t>https://cocodataset.org/#detection-eval</a:t>
             </a:r>
@@ -24113,7 +24447,7 @@
                 <a:ea typeface="Noto Sans CJK JP"/>
                 <a:cs typeface="Noto Sans"/>
               </a:rPr>
-              <a:t>TP=2、FP=1、FN=2とした計算説明例。実モデルの評価値ではない。</a:t>
+              <a:t>TP=2、FP=1、FN=2とした計算例。</a:t>
             </a:r>
           </a:p>
         </p:txBody>
@@ -24189,11 +24523,13 @@
                       <a:solidFill>
                         <a:srgbClr val="626669"/>
                       </a:solidFill>
+                      <a:prstDash val="solid"/>
                     </a:lnT>
                     <a:lnB w="10160">
                       <a:solidFill>
                         <a:srgbClr val="626669"/>
                       </a:solidFill>
+                      <a:prstDash val="solid"/>
                     </a:lnB>
                     <a:solidFill>
                       <a:srgbClr val="FFFEF8"/>
@@ -24249,11 +24585,13 @@
                       <a:solidFill>
                         <a:srgbClr val="626669"/>
                       </a:solidFill>
+                      <a:prstDash val="solid"/>
                     </a:lnT>
                     <a:lnB w="10160">
                       <a:solidFill>
                         <a:srgbClr val="626669"/>
                       </a:solidFill>
+                      <a:prstDash val="solid"/>
                     </a:lnB>
                     <a:solidFill>
                       <a:srgbClr val="FFFEF8"/>
@@ -24309,11 +24647,13 @@
                       <a:solidFill>
                         <a:srgbClr val="626669"/>
                       </a:solidFill>
+                      <a:prstDash val="solid"/>
                     </a:lnT>
                     <a:lnB w="10160">
                       <a:solidFill>
                         <a:srgbClr val="626669"/>
                       </a:solidFill>
+                      <a:prstDash val="solid"/>
                     </a:lnB>
                     <a:solidFill>
                       <a:srgbClr val="FFFEF8"/>
@@ -24367,8 +24707,11 @@
                     <a:lnR w="0">
                       <a:noFill/>
                     </a:lnR>
-                    <a:lnT w="0">
-                      <a:noFill/>
+                    <a:lnT w="10160">
+                      <a:solidFill>
+                        <a:srgbClr val="626669"/>
+                      </a:solidFill>
+                      <a:prstDash val="solid"/>
                     </a:lnT>
                     <a:lnB w="0">
                       <a:noFill/>
@@ -24423,8 +24766,11 @@
                     <a:lnR w="0">
                       <a:noFill/>
                     </a:lnR>
-                    <a:lnT w="0">
-                      <a:noFill/>
+                    <a:lnT w="10160">
+                      <a:solidFill>
+                        <a:srgbClr val="626669"/>
+                      </a:solidFill>
+                      <a:prstDash val="solid"/>
                     </a:lnT>
                     <a:lnB w="0">
                       <a:noFill/>
@@ -24479,8 +24825,11 @@
                     <a:lnR w="0">
                       <a:noFill/>
                     </a:lnR>
-                    <a:lnT w="0">
-                      <a:noFill/>
+                    <a:lnT w="10160">
+                      <a:solidFill>
+                        <a:srgbClr val="626669"/>
+                      </a:solidFill>
+                      <a:prstDash val="solid"/>
                     </a:lnT>
                     <a:lnB w="0">
                       <a:noFill/>
@@ -24544,6 +24893,7 @@
                       <a:solidFill>
                         <a:srgbClr val="626669"/>
                       </a:solidFill>
+                      <a:prstDash val="solid"/>
                     </a:lnB>
                     <a:solidFill>
                       <a:srgbClr val="FFFEF8"/>
@@ -24602,6 +24952,7 @@
                       <a:solidFill>
                         <a:srgbClr val="626669"/>
                       </a:solidFill>
+                      <a:prstDash val="solid"/>
                     </a:lnB>
                     <a:solidFill>
                       <a:srgbClr val="FFFEF8"/>
@@ -24660,6 +25011,7 @@
                       <a:solidFill>
                         <a:srgbClr val="626669"/>
                       </a:solidFill>
+                      <a:prstDash val="solid"/>
                     </a:lnB>
                     <a:solidFill>
                       <a:srgbClr val="FFFEF8"/>
@@ -24762,12 +25114,12 @@
           </a:xfrm>
         </p:spPr>
         <p:txBody>
-          <a:bodyPr wrap="square" anchor="t" lIns="0" rIns="0" tIns="0" bIns="0"/>
+          <a:bodyPr wrap="none" anchor="t" lIns="0" rIns="0" tIns="0" bIns="0"/>
           <a:lstStyle/>
           <a:p>
             <a:pPr algn="l">
               <a:lnSpc>
-                <a:spcPct val="115000"/>
+                <a:spcPct val="100000"/>
               </a:lnSpc>
               <a:spcBef>
                 <a:spcPts val="0"/>
@@ -24786,7 +25138,7 @@
               </a:defRPr>
             </a:pPr>
             <a:r>
-              <a:rPr lang="ja-JP" sz="2800" b="1">
+              <a:rPr sz="2800" b="1" lang="ja-JP">
                 <a:solidFill>
                   <a:srgbClr val="303437"/>
                 </a:solidFill>
@@ -24974,7 +25326,7 @@
                 <a:ea typeface="Noto Sans CJK JP"/>
                 <a:cs typeface="Noto Sans"/>
               </a:rPr>
-              <a:t>3 評価指標とモデル</a:t>
+              <a:t>3 物体検出・領域分割の評価とモデル性能</a:t>
             </a:r>
           </a:p>
         </p:txBody>
@@ -25081,12 +25433,12 @@
           </a:xfrm>
         </p:spPr>
         <p:txBody>
-          <a:bodyPr wrap="square" anchor="t" lIns="0" rIns="0" tIns="0" bIns="0"/>
+          <a:bodyPr wrap="none" anchor="t" lIns="0" rIns="0" tIns="0" bIns="0"/>
           <a:lstStyle/>
           <a:p>
             <a:pPr algn="l">
               <a:lnSpc>
-                <a:spcPct val="115000"/>
+                <a:spcPct val="100000"/>
               </a:lnSpc>
               <a:spcBef>
                 <a:spcPts val="0"/>
@@ -25105,15 +25457,15 @@
               </a:defRPr>
             </a:pPr>
             <a:r>
-              <a:rPr lang="ja-JP" sz="2800" b="1">
-                <a:solidFill>
-                  <a:srgbClr val="303437"/>
-                </a:solidFill>
-                <a:latin typeface="Noto Sans"/>
-                <a:ea typeface="Noto Sans CJK JP"/>
-                <a:cs typeface="Noto Sans"/>
-              </a:rPr>
-              <a:t>公式サイト</a:t>
+              <a:rPr sz="2800" b="1" lang="ja-JP">
+                <a:solidFill>
+                  <a:srgbClr val="303437"/>
+                </a:solidFill>
+                <a:latin typeface="Noto Sans"/>
+                <a:ea typeface="Noto Sans CJK JP"/>
+                <a:cs typeface="Noto Sans"/>
+              </a:rPr>
+              <a:t>COCOの公式サイト</a:t>
             </a:r>
           </a:p>
         </p:txBody>
@@ -25167,7 +25519,7 @@
                 <a:ea typeface="Noto Sans CJK JP"/>
                 <a:cs typeface="Noto Sans"/>
               </a:rPr>
-              <a:t>1 認識課題と実画像</a:t>
+              <a:t>1 COCOの認識課題と領域注釈の実例</a:t>
             </a:r>
           </a:p>
         </p:txBody>
@@ -25287,12 +25639,12 @@
           </a:xfrm>
         </p:spPr>
         <p:txBody>
-          <a:bodyPr wrap="square" anchor="t" lIns="0" rIns="0" tIns="0" bIns="0"/>
+          <a:bodyPr wrap="none" anchor="t" lIns="0" rIns="0" tIns="0" bIns="0"/>
           <a:lstStyle/>
           <a:p>
             <a:pPr algn="l">
               <a:lnSpc>
-                <a:spcPct val="115000"/>
+                <a:spcPct val="100000"/>
               </a:lnSpc>
               <a:spcBef>
                 <a:spcPts val="0"/>
@@ -25311,7 +25663,7 @@
               </a:defRPr>
             </a:pPr>
             <a:r>
-              <a:rPr lang="ja-JP" sz="2800" b="1">
+              <a:rPr sz="2800" b="1" lang="ja-JP">
                 <a:solidFill>
                   <a:srgbClr val="303437"/>
                 </a:solidFill>
@@ -25499,7 +25851,7 @@
                 <a:ea typeface="Noto Sans CJK JP"/>
                 <a:cs typeface="Noto Sans"/>
               </a:rPr>
-              <a:t>3 評価指標とモデル</a:t>
+              <a:t>3 物体検出・領域分割の評価とモデル性能</a:t>
             </a:r>
           </a:p>
         </p:txBody>
@@ -25564,7 +25916,7 @@
                 <a:latin typeface="Noto Sans"/>
                 <a:ea typeface="Noto Sans CJK JP"/>
                 <a:cs typeface="Noto Sans"/>
-                <a:hlinkClick r:id="rId3"/>
+                <a:hlinkClick r:id="rId2"/>
               </a:rPr>
               <a:t>https://cocodataset.org/#detection-eval</a:t>
             </a:r>
@@ -25606,12 +25958,12 @@
           </a:xfrm>
         </p:spPr>
         <p:txBody>
-          <a:bodyPr wrap="square" anchor="t" lIns="0" rIns="0" tIns="0" bIns="0"/>
+          <a:bodyPr wrap="none" anchor="t" lIns="0" rIns="0" tIns="0" bIns="0"/>
           <a:lstStyle/>
           <a:p>
             <a:pPr algn="l">
               <a:lnSpc>
-                <a:spcPct val="115000"/>
+                <a:spcPct val="100000"/>
               </a:lnSpc>
               <a:spcBef>
                 <a:spcPts val="0"/>
@@ -25630,7 +25982,7 @@
               </a:defRPr>
             </a:pPr>
             <a:r>
-              <a:rPr lang="ja-JP" sz="2800" b="1">
+              <a:rPr sz="2800" b="1" lang="ja-JP">
                 <a:solidFill>
                   <a:srgbClr val="303437"/>
                 </a:solidFill>
@@ -25818,7 +26170,7 @@
                 <a:ea typeface="Noto Sans CJK JP"/>
                 <a:cs typeface="Noto Sans"/>
               </a:rPr>
-              <a:t>3 評価指標とモデル</a:t>
+              <a:t>3 物体検出・領域分割の評価とモデル性能</a:t>
             </a:r>
           </a:p>
         </p:txBody>
@@ -25925,12 +26277,12 @@
           </a:xfrm>
         </p:spPr>
         <p:txBody>
-          <a:bodyPr wrap="square" anchor="t" lIns="0" rIns="0" tIns="0" bIns="0"/>
+          <a:bodyPr wrap="none" anchor="t" lIns="0" rIns="0" tIns="0" bIns="0"/>
           <a:lstStyle/>
           <a:p>
             <a:pPr algn="l">
               <a:lnSpc>
-                <a:spcPct val="115000"/>
+                <a:spcPct val="100000"/>
               </a:lnSpc>
               <a:spcBef>
                 <a:spcPts val="0"/>
@@ -25949,7 +26301,7 @@
               </a:defRPr>
             </a:pPr>
             <a:r>
-              <a:rPr lang="ja-JP" sz="2800" b="1">
+              <a:rPr sz="2800" b="1" lang="ja-JP">
                 <a:solidFill>
                   <a:srgbClr val="303437"/>
                 </a:solidFill>
@@ -25974,7 +26326,7 @@
         </p:nvSpPr>
         <p:spPr>
           <a:xfrm>
-            <a:off x="594360" y="1417320"/>
+            <a:off x="594360" y="1373852"/>
             <a:ext cx="7955279" cy="3200400"/>
           </a:xfrm>
         </p:spPr>
@@ -25984,28 +26336,28 @@
           <a:p>
             <a:pPr algn="l" lvl="0" marL="457200" indent="-355600">
               <a:lnSpc>
-                <a:spcPct val="115000"/>
-              </a:lnSpc>
-              <a:spcBef>
-                <a:spcPts val="0"/>
-              </a:spcBef>
-              <a:spcAft>
-                <a:spcPts val="1000"/>
-              </a:spcAft>
-              <a:buSzPct val="60455"/>
+                <a:spcPct val="110000"/>
+              </a:lnSpc>
+              <a:spcBef>
+                <a:spcPts val="0"/>
+              </a:spcBef>
+              <a:spcAft>
+                <a:spcPts val="700"/>
+              </a:spcAft>
+              <a:buSzPct val="63333"/>
               <a:buFont typeface="Noto Sans CJK JP"/>
               <a:buChar char="●"/>
-              <a:defRPr lang="ja-JP" sz="2200" b="0">
-                <a:solidFill>
-                  <a:srgbClr val="303437"/>
-                </a:solidFill>
-                <a:latin typeface="Noto Sans"/>
-                <a:ea typeface="Noto Sans CJK JP"/>
-                <a:cs typeface="Noto Sans"/>
-              </a:defRPr>
-            </a:pPr>
-            <a:r>
-              <a:rPr sz="2200" b="0" lang="ja-JP">
+              <a:defRPr lang="ja-JP" sz="2100" b="0">
+                <a:solidFill>
+                  <a:srgbClr val="303437"/>
+                </a:solidFill>
+                <a:latin typeface="Noto Sans"/>
+                <a:ea typeface="Noto Sans CJK JP"/>
+                <a:cs typeface="Noto Sans"/>
+              </a:defRPr>
+            </a:pPr>
+            <a:r>
+              <a:rPr sz="2100" b="0" lang="ja-JP">
                 <a:solidFill>
                   <a:srgbClr val="303437"/>
                 </a:solidFill>
@@ -26019,28 +26371,28 @@
           <a:p>
             <a:pPr algn="l" lvl="0" marL="457200" indent="-355600">
               <a:lnSpc>
-                <a:spcPct val="115000"/>
-              </a:lnSpc>
-              <a:spcBef>
-                <a:spcPts val="0"/>
-              </a:spcBef>
-              <a:spcAft>
-                <a:spcPts val="1000"/>
-              </a:spcAft>
-              <a:buSzPct val="60455"/>
+                <a:spcPct val="110000"/>
+              </a:lnSpc>
+              <a:spcBef>
+                <a:spcPts val="0"/>
+              </a:spcBef>
+              <a:spcAft>
+                <a:spcPts val="700"/>
+              </a:spcAft>
+              <a:buSzPct val="63333"/>
               <a:buFont typeface="Noto Sans CJK JP"/>
               <a:buChar char="●"/>
-              <a:defRPr lang="ja-JP" sz="2200" b="0">
-                <a:solidFill>
-                  <a:srgbClr val="303437"/>
-                </a:solidFill>
-                <a:latin typeface="Noto Sans"/>
-                <a:ea typeface="Noto Sans CJK JP"/>
-                <a:cs typeface="Noto Sans"/>
-              </a:defRPr>
-            </a:pPr>
-            <a:r>
-              <a:rPr sz="2200" b="0" lang="ja-JP">
+              <a:defRPr lang="ja-JP" sz="2100" b="0">
+                <a:solidFill>
+                  <a:srgbClr val="303437"/>
+                </a:solidFill>
+                <a:latin typeface="Noto Sans"/>
+                <a:ea typeface="Noto Sans CJK JP"/>
+                <a:cs typeface="Noto Sans"/>
+              </a:defRPr>
+            </a:pPr>
+            <a:r>
+              <a:rPr sz="2100" b="0" lang="ja-JP">
                 <a:solidFill>
                   <a:srgbClr val="303437"/>
                 </a:solidFill>
@@ -26054,28 +26406,28 @@
           <a:p>
             <a:pPr algn="l" lvl="0" marL="457200" indent="-355600">
               <a:lnSpc>
-                <a:spcPct val="115000"/>
-              </a:lnSpc>
-              <a:spcBef>
-                <a:spcPts val="0"/>
-              </a:spcBef>
-              <a:spcAft>
-                <a:spcPts val="1000"/>
-              </a:spcAft>
-              <a:buSzPct val="60455"/>
+                <a:spcPct val="110000"/>
+              </a:lnSpc>
+              <a:spcBef>
+                <a:spcPts val="0"/>
+              </a:spcBef>
+              <a:spcAft>
+                <a:spcPts val="700"/>
+              </a:spcAft>
+              <a:buSzPct val="63333"/>
               <a:buFont typeface="Noto Sans CJK JP"/>
               <a:buChar char="●"/>
-              <a:defRPr lang="ja-JP" sz="2200" b="0">
-                <a:solidFill>
-                  <a:srgbClr val="303437"/>
-                </a:solidFill>
-                <a:latin typeface="Noto Sans"/>
-                <a:ea typeface="Noto Sans CJK JP"/>
-                <a:cs typeface="Noto Sans"/>
-              </a:defRPr>
-            </a:pPr>
-            <a:r>
-              <a:rPr sz="2200" b="0" lang="ja-JP">
+              <a:defRPr lang="ja-JP" sz="2100" b="0">
+                <a:solidFill>
+                  <a:srgbClr val="303437"/>
+                </a:solidFill>
+                <a:latin typeface="Noto Sans"/>
+                <a:ea typeface="Noto Sans CJK JP"/>
+                <a:cs typeface="Noto Sans"/>
+              </a:defRPr>
+            </a:pPr>
+            <a:r>
+              <a:rPr sz="2100" b="0" lang="ja-JP">
                 <a:solidFill>
                   <a:srgbClr val="303437"/>
                 </a:solidFill>
@@ -26137,21 +26489,21 @@
                 <a:ea typeface="Noto Sans CJK JP"/>
                 <a:cs typeface="Noto Sans"/>
               </a:rPr>
-              <a:t>3 評価指標とモデル</a:t>
-            </a:r>
-          </a:p>
-        </p:txBody>
-      </p:sp>
-      <p:sp>
-        <p:nvSpPr>
-          <p:cNvPr id="5" name="sources"/>
+              <a:t>3 物体検出・領域分割の評価とモデル性能</a:t>
+            </a:r>
+          </a:p>
+        </p:txBody>
+      </p:sp>
+      <p:sp>
+        <p:nvSpPr>
+          <p:cNvPr id="5" name="TextBox 4"/>
           <p:cNvSpPr txBox="1"/>
           <p:nvPr/>
         </p:nvSpPr>
         <p:spPr>
           <a:xfrm>
-            <a:off x="502920" y="4635500"/>
-            <a:ext cx="8183879" cy="640080"/>
+            <a:off x="502920" y="3987799"/>
+            <a:ext cx="8183879" cy="177800"/>
           </a:xfrm>
           <a:prstGeom prst="rect">
             <a:avLst/>
@@ -26164,24 +26516,74 @@
           </a:bodyPr>
           <a:lstStyle/>
           <a:p>
-            <a:pPr>
-              <a:lnSpc>
-                <a:spcPts val="1200"/>
-              </a:lnSpc>
-              <a:spcBef>
-                <a:spcPts val="0"/>
-              </a:spcBef>
-              <a:spcAft>
-                <a:spcPts val="0"/>
-              </a:spcAft>
-              <a:defRPr sz="800" b="0" lang="ja-JP">
+            <a:pPr algn="l">
+              <a:lnSpc>
+                <a:spcPts val="1400"/>
+              </a:lnSpc>
+              <a:spcBef>
+                <a:spcPts val="0"/>
+              </a:spcBef>
+              <a:spcAft>
+                <a:spcPts val="0"/>
+              </a:spcAft>
+            </a:pPr>
+            <a:r>
+              <a:rPr sz="800" b="0" lang="ja-JP">
                 <a:solidFill>
                   <a:srgbClr val="626669"/>
                 </a:solidFill>
                 <a:latin typeface="Noto Sans"/>
                 <a:ea typeface="Noto Sans CJK JP"/>
                 <a:cs typeface="Noto Sans"/>
-              </a:defRPr>
+              </a:rPr>
+              <a:t/>
+            </a:r>
+            <a:r>
+              <a:rPr sz="800" lang="ja-JP">
+                <a:solidFill>
+                  <a:srgbClr val="626669"/>
+                </a:solidFill>
+                <a:latin typeface="Noto Sans"/>
+                <a:ea typeface="Noto Sans CJK JP"/>
+                <a:cs typeface="Noto Sans"/>
+              </a:rPr>
+              <a:t>[1] Ren et al. (2015). NeurIPS. Faster R-CNN: Towards Real-Time Object Detection with Region Proposal Networks.</a:t>
+            </a:r>
+          </a:p>
+        </p:txBody>
+      </p:sp>
+      <p:sp>
+        <p:nvSpPr>
+          <p:cNvPr id="6" name="TextBox 5"/>
+          <p:cNvSpPr txBox="1"/>
+          <p:nvPr/>
+        </p:nvSpPr>
+        <p:spPr>
+          <a:xfrm>
+            <a:off x="502920" y="4165600"/>
+            <a:ext cx="8183879" cy="177800"/>
+          </a:xfrm>
+          <a:prstGeom prst="rect">
+            <a:avLst/>
+          </a:prstGeom>
+          <a:noFill/>
+        </p:spPr>
+        <p:txBody>
+          <a:bodyPr wrap="square" lIns="0" rIns="0" tIns="0" bIns="0">
+            <a:spAutoFit/>
+          </a:bodyPr>
+          <a:lstStyle/>
+          <a:p>
+            <a:pPr algn="l">
+              <a:lnSpc>
+                <a:spcPts val="1400"/>
+              </a:lnSpc>
+              <a:spcBef>
+                <a:spcPts val="0"/>
+              </a:spcBef>
+              <a:spcAft>
+                <a:spcPts val="0"/>
+              </a:spcAft>
             </a:pPr>
             <a:r>
               <a:rPr sz="800" b="0" lang="ja-JP">
@@ -26192,8 +26594,56 @@
                 <a:ea typeface="Noto Sans CJK JP"/>
                 <a:cs typeface="Noto Sans"/>
               </a:rPr>
-              <a:t>[1] </a:t>
-            </a:r>
+              <a:t/>
+            </a:r>
+            <a:r>
+              <a:rPr sz="800" lang="ja-JP">
+                <a:solidFill>
+                  <a:srgbClr val="626669"/>
+                </a:solidFill>
+                <a:latin typeface="Noto Sans"/>
+                <a:ea typeface="Noto Sans CJK JP"/>
+                <a:cs typeface="Noto Sans"/>
+                <a:hlinkClick r:id="rId3"/>
+              </a:rPr>
+              <a:t>https://arxiv.org/abs/1506.01497</a:t>
+            </a:r>
+          </a:p>
+        </p:txBody>
+      </p:sp>
+      <p:sp>
+        <p:nvSpPr>
+          <p:cNvPr id="7" name="TextBox 6"/>
+          <p:cNvSpPr txBox="1"/>
+          <p:nvPr/>
+        </p:nvSpPr>
+        <p:spPr>
+          <a:xfrm>
+            <a:off x="502920" y="4343400"/>
+            <a:ext cx="8183879" cy="177800"/>
+          </a:xfrm>
+          <a:prstGeom prst="rect">
+            <a:avLst/>
+          </a:prstGeom>
+          <a:noFill/>
+        </p:spPr>
+        <p:txBody>
+          <a:bodyPr wrap="square" lIns="0" rIns="0" tIns="0" bIns="0">
+            <a:spAutoFit/>
+          </a:bodyPr>
+          <a:lstStyle/>
+          <a:p>
+            <a:pPr algn="l">
+              <a:lnSpc>
+                <a:spcPts val="1400"/>
+              </a:lnSpc>
+              <a:spcBef>
+                <a:spcPts val="0"/>
+              </a:spcBef>
+              <a:spcAft>
+                <a:spcPts val="0"/>
+              </a:spcAft>
+            </a:pPr>
             <a:r>
               <a:rPr sz="800" b="0" lang="ja-JP">
                 <a:solidFill>
@@ -26202,30 +26652,55 @@
                 <a:latin typeface="Noto Sans"/>
                 <a:ea typeface="Noto Sans CJK JP"/>
                 <a:cs typeface="Noto Sans"/>
-                <a:hlinkClick r:id="rId3"/>
-              </a:rPr>
-              <a:t>https://arxiv.org/abs/1506.01497</a:t>
-            </a:r>
-          </a:p>
-          <a:p>
-            <a:pPr>
-              <a:lnSpc>
-                <a:spcPts val="1200"/>
-              </a:lnSpc>
-              <a:spcBef>
-                <a:spcPts val="0"/>
-              </a:spcBef>
-              <a:spcAft>
-                <a:spcPts val="0"/>
-              </a:spcAft>
-              <a:defRPr sz="800" b="0" lang="ja-JP">
+              </a:rPr>
+              <a:t/>
+            </a:r>
+            <a:r>
+              <a:rPr sz="800" lang="ja-JP">
                 <a:solidFill>
                   <a:srgbClr val="626669"/>
                 </a:solidFill>
                 <a:latin typeface="Noto Sans"/>
                 <a:ea typeface="Noto Sans CJK JP"/>
                 <a:cs typeface="Noto Sans"/>
-              </a:defRPr>
+              </a:rPr>
+              <a:t>[2] Lin et al. (2017). ICCV. Focal Loss for Dense Object Detection.</a:t>
+            </a:r>
+          </a:p>
+        </p:txBody>
+      </p:sp>
+      <p:sp>
+        <p:nvSpPr>
+          <p:cNvPr id="8" name="TextBox 7"/>
+          <p:cNvSpPr txBox="1"/>
+          <p:nvPr/>
+        </p:nvSpPr>
+        <p:spPr>
+          <a:xfrm>
+            <a:off x="502920" y="4521200"/>
+            <a:ext cx="8183879" cy="177800"/>
+          </a:xfrm>
+          <a:prstGeom prst="rect">
+            <a:avLst/>
+          </a:prstGeom>
+          <a:noFill/>
+        </p:spPr>
+        <p:txBody>
+          <a:bodyPr wrap="square" lIns="0" rIns="0" tIns="0" bIns="0">
+            <a:spAutoFit/>
+          </a:bodyPr>
+          <a:lstStyle/>
+          <a:p>
+            <a:pPr algn="l">
+              <a:lnSpc>
+                <a:spcPts val="1400"/>
+              </a:lnSpc>
+              <a:spcBef>
+                <a:spcPts val="0"/>
+              </a:spcBef>
+              <a:spcAft>
+                <a:spcPts val="0"/>
+              </a:spcAft>
             </a:pPr>
             <a:r>
               <a:rPr sz="800" b="0" lang="ja-JP">
@@ -26236,8 +26711,56 @@
                 <a:ea typeface="Noto Sans CJK JP"/>
                 <a:cs typeface="Noto Sans"/>
               </a:rPr>
-              <a:t>[2] </a:t>
-            </a:r>
+              <a:t/>
+            </a:r>
+            <a:r>
+              <a:rPr sz="800" lang="ja-JP">
+                <a:solidFill>
+                  <a:srgbClr val="626669"/>
+                </a:solidFill>
+                <a:latin typeface="Noto Sans"/>
+                <a:ea typeface="Noto Sans CJK JP"/>
+                <a:cs typeface="Noto Sans"/>
+                <a:hlinkClick r:id="rId4"/>
+              </a:rPr>
+              <a:t>https://arxiv.org/abs/1708.02002</a:t>
+            </a:r>
+          </a:p>
+        </p:txBody>
+      </p:sp>
+      <p:sp>
+        <p:nvSpPr>
+          <p:cNvPr id="9" name="TextBox 8"/>
+          <p:cNvSpPr txBox="1"/>
+          <p:nvPr/>
+        </p:nvSpPr>
+        <p:spPr>
+          <a:xfrm>
+            <a:off x="502920" y="4699000"/>
+            <a:ext cx="8183879" cy="177800"/>
+          </a:xfrm>
+          <a:prstGeom prst="rect">
+            <a:avLst/>
+          </a:prstGeom>
+          <a:noFill/>
+        </p:spPr>
+        <p:txBody>
+          <a:bodyPr wrap="square" lIns="0" rIns="0" tIns="0" bIns="0">
+            <a:spAutoFit/>
+          </a:bodyPr>
+          <a:lstStyle/>
+          <a:p>
+            <a:pPr algn="l">
+              <a:lnSpc>
+                <a:spcPts val="1400"/>
+              </a:lnSpc>
+              <a:spcBef>
+                <a:spcPts val="0"/>
+              </a:spcBef>
+              <a:spcAft>
+                <a:spcPts val="0"/>
+              </a:spcAft>
+            </a:pPr>
             <a:r>
               <a:rPr sz="800" b="0" lang="ja-JP">
                 <a:solidFill>
@@ -26246,30 +26769,55 @@
                 <a:latin typeface="Noto Sans"/>
                 <a:ea typeface="Noto Sans CJK JP"/>
                 <a:cs typeface="Noto Sans"/>
-                <a:hlinkClick r:id="rId4"/>
-              </a:rPr>
-              <a:t>https://arxiv.org/abs/1708.02002</a:t>
-            </a:r>
-          </a:p>
-          <a:p>
-            <a:pPr>
-              <a:lnSpc>
-                <a:spcPts val="1200"/>
-              </a:lnSpc>
-              <a:spcBef>
-                <a:spcPts val="0"/>
-              </a:spcBef>
-              <a:spcAft>
-                <a:spcPts val="0"/>
-              </a:spcAft>
-              <a:defRPr sz="800" b="0" lang="ja-JP">
+              </a:rPr>
+              <a:t/>
+            </a:r>
+            <a:r>
+              <a:rPr sz="800" lang="ja-JP">
                 <a:solidFill>
                   <a:srgbClr val="626669"/>
                 </a:solidFill>
                 <a:latin typeface="Noto Sans"/>
                 <a:ea typeface="Noto Sans CJK JP"/>
                 <a:cs typeface="Noto Sans"/>
-              </a:defRPr>
+              </a:rPr>
+              <a:t>[3] Lv et al. (2024). arXiv:2407.17140. RT-DETRv2: Improved Baseline with Bag-of-Freebies for Real-Time Detection Transformer.</a:t>
+            </a:r>
+          </a:p>
+        </p:txBody>
+      </p:sp>
+      <p:sp>
+        <p:nvSpPr>
+          <p:cNvPr id="10" name="TextBox 9"/>
+          <p:cNvSpPr txBox="1"/>
+          <p:nvPr/>
+        </p:nvSpPr>
+        <p:spPr>
+          <a:xfrm>
+            <a:off x="502920" y="4876800"/>
+            <a:ext cx="8183879" cy="177800"/>
+          </a:xfrm>
+          <a:prstGeom prst="rect">
+            <a:avLst/>
+          </a:prstGeom>
+          <a:noFill/>
+        </p:spPr>
+        <p:txBody>
+          <a:bodyPr wrap="square" lIns="0" rIns="0" tIns="0" bIns="0">
+            <a:spAutoFit/>
+          </a:bodyPr>
+          <a:lstStyle/>
+          <a:p>
+            <a:pPr algn="l">
+              <a:lnSpc>
+                <a:spcPts val="1400"/>
+              </a:lnSpc>
+              <a:spcBef>
+                <a:spcPts val="0"/>
+              </a:spcBef>
+              <a:spcAft>
+                <a:spcPts val="0"/>
+              </a:spcAft>
             </a:pPr>
             <a:r>
               <a:rPr sz="800" b="0" lang="ja-JP">
@@ -26280,17 +26828,17 @@
                 <a:ea typeface="Noto Sans CJK JP"/>
                 <a:cs typeface="Noto Sans"/>
               </a:rPr>
-              <a:t>[3] </a:t>
-            </a:r>
-            <a:r>
-              <a:rPr sz="800" b="0" lang="ja-JP">
+              <a:t/>
+            </a:r>
+            <a:r>
+              <a:rPr sz="800" lang="ja-JP">
                 <a:solidFill>
                   <a:srgbClr val="626669"/>
                 </a:solidFill>
                 <a:latin typeface="Noto Sans"/>
                 <a:ea typeface="Noto Sans CJK JP"/>
                 <a:cs typeface="Noto Sans"/>
-                <a:hlinkClick r:id="rId5"/>
+                <a:hlinkClick r:id="rId2"/>
               </a:rPr>
               <a:t>https://arxiv.org/abs/2407.17140</a:t>
             </a:r>
@@ -26332,12 +26880,12 @@
           </a:xfrm>
         </p:spPr>
         <p:txBody>
-          <a:bodyPr wrap="square" anchor="t" lIns="0" rIns="0" tIns="0" bIns="0"/>
+          <a:bodyPr wrap="none" anchor="t" lIns="0" rIns="0" tIns="0" bIns="0"/>
           <a:lstStyle/>
           <a:p>
             <a:pPr algn="l">
               <a:lnSpc>
-                <a:spcPct val="115000"/>
+                <a:spcPct val="100000"/>
               </a:lnSpc>
               <a:spcBef>
                 <a:spcPts val="0"/>
@@ -26356,7 +26904,7 @@
               </a:defRPr>
             </a:pPr>
             <a:r>
-              <a:rPr lang="ja-JP" sz="2800" b="1">
+              <a:rPr sz="2800" b="1" lang="ja-JP">
                 <a:solidFill>
                   <a:srgbClr val="303437"/>
                 </a:solidFill>
@@ -26381,7 +26929,7 @@
         </p:nvSpPr>
         <p:spPr>
           <a:xfrm>
-            <a:off x="594360" y="1417320"/>
+            <a:off x="594360" y="1301097"/>
             <a:ext cx="7955279" cy="3200400"/>
           </a:xfrm>
         </p:spPr>
@@ -26544,21 +27092,21 @@
                 <a:ea typeface="Noto Sans CJK JP"/>
                 <a:cs typeface="Noto Sans"/>
               </a:rPr>
-              <a:t>3 評価指標とモデル</a:t>
-            </a:r>
-          </a:p>
-        </p:txBody>
-      </p:sp>
-      <p:sp>
-        <p:nvSpPr>
-          <p:cNvPr id="5" name="sources"/>
+              <a:t>3 物体検出・領域分割の評価とモデル性能</a:t>
+            </a:r>
+          </a:p>
+        </p:txBody>
+      </p:sp>
+      <p:sp>
+        <p:nvSpPr>
+          <p:cNvPr id="5" name="TextBox 4"/>
           <p:cNvSpPr txBox="1"/>
           <p:nvPr/>
         </p:nvSpPr>
         <p:spPr>
           <a:xfrm>
-            <a:off x="502920" y="4635500"/>
-            <a:ext cx="8183879" cy="640080"/>
+            <a:off x="502920" y="4165600"/>
+            <a:ext cx="8183879" cy="177800"/>
           </a:xfrm>
           <a:prstGeom prst="rect">
             <a:avLst/>
@@ -26571,24 +27119,74 @@
           </a:bodyPr>
           <a:lstStyle/>
           <a:p>
-            <a:pPr>
-              <a:lnSpc>
-                <a:spcPts val="1200"/>
-              </a:lnSpc>
-              <a:spcBef>
-                <a:spcPts val="0"/>
-              </a:spcBef>
-              <a:spcAft>
-                <a:spcPts val="0"/>
-              </a:spcAft>
-              <a:defRPr sz="800" b="0" lang="ja-JP">
+            <a:pPr algn="l">
+              <a:lnSpc>
+                <a:spcPts val="1400"/>
+              </a:lnSpc>
+              <a:spcBef>
+                <a:spcPts val="0"/>
+              </a:spcBef>
+              <a:spcAft>
+                <a:spcPts val="0"/>
+              </a:spcAft>
+            </a:pPr>
+            <a:r>
+              <a:rPr sz="800" b="0" lang="ja-JP">
                 <a:solidFill>
                   <a:srgbClr val="626669"/>
                 </a:solidFill>
                 <a:latin typeface="Noto Sans"/>
                 <a:ea typeface="Noto Sans CJK JP"/>
                 <a:cs typeface="Noto Sans"/>
-              </a:defRPr>
+              </a:rPr>
+              <a:t/>
+            </a:r>
+            <a:r>
+              <a:rPr sz="800" lang="ja-JP">
+                <a:solidFill>
+                  <a:srgbClr val="626669"/>
+                </a:solidFill>
+                <a:latin typeface="Noto Sans"/>
+                <a:ea typeface="Noto Sans CJK JP"/>
+                <a:cs typeface="Noto Sans"/>
+              </a:rPr>
+              <a:t>[1] He et al. (2016). CVPR, pp. 770–778. Deep Residual Learning for Image Recognition.</a:t>
+            </a:r>
+          </a:p>
+        </p:txBody>
+      </p:sp>
+      <p:sp>
+        <p:nvSpPr>
+          <p:cNvPr id="6" name="TextBox 5"/>
+          <p:cNvSpPr txBox="1"/>
+          <p:nvPr/>
+        </p:nvSpPr>
+        <p:spPr>
+          <a:xfrm>
+            <a:off x="502920" y="4343400"/>
+            <a:ext cx="8183879" cy="177800"/>
+          </a:xfrm>
+          <a:prstGeom prst="rect">
+            <a:avLst/>
+          </a:prstGeom>
+          <a:noFill/>
+        </p:spPr>
+        <p:txBody>
+          <a:bodyPr wrap="square" lIns="0" rIns="0" tIns="0" bIns="0">
+            <a:spAutoFit/>
+          </a:bodyPr>
+          <a:lstStyle/>
+          <a:p>
+            <a:pPr algn="l">
+              <a:lnSpc>
+                <a:spcPts val="1400"/>
+              </a:lnSpc>
+              <a:spcBef>
+                <a:spcPts val="0"/>
+              </a:spcBef>
+              <a:spcAft>
+                <a:spcPts val="0"/>
+              </a:spcAft>
             </a:pPr>
             <a:r>
               <a:rPr sz="800" b="0" lang="ja-JP">
@@ -26599,8 +27197,56 @@
                 <a:ea typeface="Noto Sans CJK JP"/>
                 <a:cs typeface="Noto Sans"/>
               </a:rPr>
-              <a:t>[1] </a:t>
-            </a:r>
+              <a:t/>
+            </a:r>
+            <a:r>
+              <a:rPr sz="800" lang="ja-JP">
+                <a:solidFill>
+                  <a:srgbClr val="626669"/>
+                </a:solidFill>
+                <a:latin typeface="Noto Sans"/>
+                <a:ea typeface="Noto Sans CJK JP"/>
+                <a:cs typeface="Noto Sans"/>
+                <a:hlinkClick r:id="rId3"/>
+              </a:rPr>
+              <a:t>https://arxiv.org/abs/1512.03385</a:t>
+            </a:r>
+          </a:p>
+        </p:txBody>
+      </p:sp>
+      <p:sp>
+        <p:nvSpPr>
+          <p:cNvPr id="7" name="TextBox 6"/>
+          <p:cNvSpPr txBox="1"/>
+          <p:nvPr/>
+        </p:nvSpPr>
+        <p:spPr>
+          <a:xfrm>
+            <a:off x="502920" y="4521200"/>
+            <a:ext cx="8183879" cy="177800"/>
+          </a:xfrm>
+          <a:prstGeom prst="rect">
+            <a:avLst/>
+          </a:prstGeom>
+          <a:noFill/>
+        </p:spPr>
+        <p:txBody>
+          <a:bodyPr wrap="square" lIns="0" rIns="0" tIns="0" bIns="0">
+            <a:spAutoFit/>
+          </a:bodyPr>
+          <a:lstStyle/>
+          <a:p>
+            <a:pPr algn="l">
+              <a:lnSpc>
+                <a:spcPts val="1400"/>
+              </a:lnSpc>
+              <a:spcBef>
+                <a:spcPts val="0"/>
+              </a:spcBef>
+              <a:spcAft>
+                <a:spcPts val="0"/>
+              </a:spcAft>
+            </a:pPr>
             <a:r>
               <a:rPr sz="800" b="0" lang="ja-JP">
                 <a:solidFill>
@@ -26609,30 +27255,55 @@
                 <a:latin typeface="Noto Sans"/>
                 <a:ea typeface="Noto Sans CJK JP"/>
                 <a:cs typeface="Noto Sans"/>
-                <a:hlinkClick r:id="rId3"/>
-              </a:rPr>
-              <a:t>https://arxiv.org/abs/1512.03385</a:t>
-            </a:r>
-          </a:p>
-          <a:p>
-            <a:pPr>
-              <a:lnSpc>
-                <a:spcPts val="1200"/>
-              </a:lnSpc>
-              <a:spcBef>
-                <a:spcPts val="0"/>
-              </a:spcBef>
-              <a:spcAft>
-                <a:spcPts val="0"/>
-              </a:spcAft>
-              <a:defRPr sz="800" b="0" lang="ja-JP">
+              </a:rPr>
+              <a:t/>
+            </a:r>
+            <a:r>
+              <a:rPr sz="800" lang="ja-JP">
                 <a:solidFill>
                   <a:srgbClr val="626669"/>
                 </a:solidFill>
                 <a:latin typeface="Noto Sans"/>
                 <a:ea typeface="Noto Sans CJK JP"/>
                 <a:cs typeface="Noto Sans"/>
-              </a:defRPr>
+              </a:rPr>
+              <a:t>[2] Lin et al. (2017). CVPR. Feature Pyramid Networks for Object Detection.</a:t>
+            </a:r>
+          </a:p>
+        </p:txBody>
+      </p:sp>
+      <p:sp>
+        <p:nvSpPr>
+          <p:cNvPr id="8" name="TextBox 7"/>
+          <p:cNvSpPr txBox="1"/>
+          <p:nvPr/>
+        </p:nvSpPr>
+        <p:spPr>
+          <a:xfrm>
+            <a:off x="502920" y="4699000"/>
+            <a:ext cx="8183879" cy="177800"/>
+          </a:xfrm>
+          <a:prstGeom prst="rect">
+            <a:avLst/>
+          </a:prstGeom>
+          <a:noFill/>
+        </p:spPr>
+        <p:txBody>
+          <a:bodyPr wrap="square" lIns="0" rIns="0" tIns="0" bIns="0">
+            <a:spAutoFit/>
+          </a:bodyPr>
+          <a:lstStyle/>
+          <a:p>
+            <a:pPr algn="l">
+              <a:lnSpc>
+                <a:spcPts val="1400"/>
+              </a:lnSpc>
+              <a:spcBef>
+                <a:spcPts val="0"/>
+              </a:spcBef>
+              <a:spcAft>
+                <a:spcPts val="0"/>
+              </a:spcAft>
             </a:pPr>
             <a:r>
               <a:rPr sz="800" b="0" lang="ja-JP">
@@ -26643,8 +27314,56 @@
                 <a:ea typeface="Noto Sans CJK JP"/>
                 <a:cs typeface="Noto Sans"/>
               </a:rPr>
-              <a:t>[2] </a:t>
-            </a:r>
+              <a:t/>
+            </a:r>
+            <a:r>
+              <a:rPr sz="800" lang="ja-JP">
+                <a:solidFill>
+                  <a:srgbClr val="626669"/>
+                </a:solidFill>
+                <a:latin typeface="Noto Sans"/>
+                <a:ea typeface="Noto Sans CJK JP"/>
+                <a:cs typeface="Noto Sans"/>
+                <a:hlinkClick r:id="rId4"/>
+              </a:rPr>
+              <a:t>https://arxiv.org/abs/1612.03144</a:t>
+            </a:r>
+          </a:p>
+        </p:txBody>
+      </p:sp>
+      <p:sp>
+        <p:nvSpPr>
+          <p:cNvPr id="9" name="TextBox 8"/>
+          <p:cNvSpPr txBox="1"/>
+          <p:nvPr/>
+        </p:nvSpPr>
+        <p:spPr>
+          <a:xfrm>
+            <a:off x="502920" y="4876800"/>
+            <a:ext cx="8183879" cy="177800"/>
+          </a:xfrm>
+          <a:prstGeom prst="rect">
+            <a:avLst/>
+          </a:prstGeom>
+          <a:noFill/>
+        </p:spPr>
+        <p:txBody>
+          <a:bodyPr wrap="square" lIns="0" rIns="0" tIns="0" bIns="0">
+            <a:spAutoFit/>
+          </a:bodyPr>
+          <a:lstStyle/>
+          <a:p>
+            <a:pPr algn="l">
+              <a:lnSpc>
+                <a:spcPts val="1400"/>
+              </a:lnSpc>
+              <a:spcBef>
+                <a:spcPts val="0"/>
+              </a:spcBef>
+              <a:spcAft>
+                <a:spcPts val="0"/>
+              </a:spcAft>
+            </a:pPr>
             <a:r>
               <a:rPr sz="800" b="0" lang="ja-JP">
                 <a:solidFill>
@@ -26653,51 +27372,29 @@
                 <a:latin typeface="Noto Sans"/>
                 <a:ea typeface="Noto Sans CJK JP"/>
                 <a:cs typeface="Noto Sans"/>
-                <a:hlinkClick r:id="rId4"/>
-              </a:rPr>
-              <a:t>https://arxiv.org/abs/1612.03144</a:t>
-            </a:r>
-          </a:p>
-          <a:p>
-            <a:pPr>
-              <a:lnSpc>
-                <a:spcPts val="1200"/>
-              </a:lnSpc>
-              <a:spcBef>
-                <a:spcPts val="0"/>
-              </a:spcBef>
-              <a:spcAft>
-                <a:spcPts val="0"/>
-              </a:spcAft>
-              <a:defRPr sz="800" b="0" lang="ja-JP">
+              </a:rPr>
+              <a:t/>
+            </a:r>
+            <a:r>
+              <a:rPr sz="800" lang="ja-JP">
                 <a:solidFill>
                   <a:srgbClr val="626669"/>
                 </a:solidFill>
                 <a:latin typeface="Noto Sans"/>
                 <a:ea typeface="Noto Sans CJK JP"/>
                 <a:cs typeface="Noto Sans"/>
-              </a:defRPr>
-            </a:pPr>
-            <a:r>
-              <a:rPr sz="800" b="0" lang="ja-JP">
+              </a:rPr>
+              <a:t>[3] </a:t>
+            </a:r>
+            <a:r>
+              <a:rPr sz="800" lang="ja-JP">
                 <a:solidFill>
                   <a:srgbClr val="626669"/>
                 </a:solidFill>
                 <a:latin typeface="Noto Sans"/>
                 <a:ea typeface="Noto Sans CJK JP"/>
                 <a:cs typeface="Noto Sans"/>
-              </a:rPr>
-              <a:t>[3] </a:t>
-            </a:r>
-            <a:r>
-              <a:rPr sz="800" b="0" lang="ja-JP">
-                <a:solidFill>
-                  <a:srgbClr val="626669"/>
-                </a:solidFill>
-                <a:latin typeface="Noto Sans"/>
-                <a:ea typeface="Noto Sans CJK JP"/>
-                <a:cs typeface="Noto Sans"/>
-                <a:hlinkClick r:id="rId5"/>
+                <a:hlinkClick r:id="rId2"/>
               </a:rPr>
               <a:t>https://github.com/facebookresearch/detectron2/blob/main/MODEL_ZOO.md</a:t>
             </a:r>
@@ -26739,12 +27436,12 @@
           </a:xfrm>
         </p:spPr>
         <p:txBody>
-          <a:bodyPr wrap="square" anchor="t" lIns="0" rIns="0" tIns="0" bIns="0"/>
+          <a:bodyPr wrap="none" anchor="t" lIns="0" rIns="0" tIns="0" bIns="0"/>
           <a:lstStyle/>
           <a:p>
             <a:pPr algn="l">
               <a:lnSpc>
-                <a:spcPct val="115000"/>
+                <a:spcPct val="100000"/>
               </a:lnSpc>
               <a:spcBef>
                 <a:spcPts val="0"/>
@@ -26763,15 +27460,15 @@
               </a:defRPr>
             </a:pPr>
             <a:r>
-              <a:rPr lang="ja-JP" sz="2800" b="1">
-                <a:solidFill>
-                  <a:srgbClr val="303437"/>
-                </a:solidFill>
-                <a:latin typeface="Noto Sans"/>
-                <a:ea typeface="Noto Sans CJK JP"/>
-                <a:cs typeface="Noto Sans"/>
-              </a:rPr>
-              <a:t>過去のモデルの評価結果</a:t>
+              <a:rPr sz="2800" b="1" lang="ja-JP">
+                <a:solidFill>
+                  <a:srgbClr val="303437"/>
+                </a:solidFill>
+                <a:latin typeface="Noto Sans"/>
+                <a:ea typeface="Noto Sans CJK JP"/>
+                <a:cs typeface="Noto Sans"/>
+              </a:rPr>
+              <a:t>物体検出モデルのbox APと評価集合</a:t>
             </a:r>
           </a:p>
         </p:txBody>
@@ -26825,7 +27522,7 @@
                 <a:ea typeface="Noto Sans CJK JP"/>
                 <a:cs typeface="Noto Sans"/>
               </a:rPr>
-              <a:t>3 評価指標とモデル</a:t>
+              <a:t>3 物体検出・領域分割の評価とモデル性能</a:t>
             </a:r>
           </a:p>
         </p:txBody>
@@ -27069,11 +27766,13 @@
                       <a:solidFill>
                         <a:srgbClr val="626669"/>
                       </a:solidFill>
+                      <a:prstDash val="solid"/>
                     </a:lnT>
                     <a:lnB w="10160">
                       <a:solidFill>
                         <a:srgbClr val="626669"/>
                       </a:solidFill>
+                      <a:prstDash val="solid"/>
                     </a:lnB>
                     <a:solidFill>
                       <a:srgbClr val="FFFEF8"/>
@@ -27129,11 +27828,13 @@
                       <a:solidFill>
                         <a:srgbClr val="626669"/>
                       </a:solidFill>
+                      <a:prstDash val="solid"/>
                     </a:lnT>
                     <a:lnB w="10160">
                       <a:solidFill>
                         <a:srgbClr val="626669"/>
                       </a:solidFill>
+                      <a:prstDash val="solid"/>
                     </a:lnB>
                     <a:solidFill>
                       <a:srgbClr val="FFFEF8"/>
@@ -27189,11 +27890,13 @@
                       <a:solidFill>
                         <a:srgbClr val="626669"/>
                       </a:solidFill>
+                      <a:prstDash val="solid"/>
                     </a:lnT>
                     <a:lnB w="10160">
                       <a:solidFill>
                         <a:srgbClr val="626669"/>
                       </a:solidFill>
+                      <a:prstDash val="solid"/>
                     </a:lnB>
                     <a:solidFill>
                       <a:srgbClr val="FFFEF8"/>
@@ -27249,11 +27952,13 @@
                       <a:solidFill>
                         <a:srgbClr val="626669"/>
                       </a:solidFill>
+                      <a:prstDash val="solid"/>
                     </a:lnT>
                     <a:lnB w="10160">
                       <a:solidFill>
                         <a:srgbClr val="626669"/>
                       </a:solidFill>
+                      <a:prstDash val="solid"/>
                     </a:lnB>
                     <a:solidFill>
                       <a:srgbClr val="FFFEF8"/>
@@ -27307,8 +28012,11 @@
                     <a:lnR w="0">
                       <a:noFill/>
                     </a:lnR>
-                    <a:lnT w="0">
-                      <a:noFill/>
+                    <a:lnT w="10160">
+                      <a:solidFill>
+                        <a:srgbClr val="626669"/>
+                      </a:solidFill>
+                      <a:prstDash val="solid"/>
                     </a:lnT>
                     <a:lnB w="0">
                       <a:noFill/>
@@ -27363,8 +28071,11 @@
                     <a:lnR w="0">
                       <a:noFill/>
                     </a:lnR>
-                    <a:lnT w="0">
-                      <a:noFill/>
+                    <a:lnT w="10160">
+                      <a:solidFill>
+                        <a:srgbClr val="626669"/>
+                      </a:solidFill>
+                      <a:prstDash val="solid"/>
                     </a:lnT>
                     <a:lnB w="0">
                       <a:noFill/>
@@ -27419,8 +28130,11 @@
                     <a:lnR w="0">
                       <a:noFill/>
                     </a:lnR>
-                    <a:lnT w="0">
-                      <a:noFill/>
+                    <a:lnT w="10160">
+                      <a:solidFill>
+                        <a:srgbClr val="626669"/>
+                      </a:solidFill>
+                      <a:prstDash val="solid"/>
                     </a:lnT>
                     <a:lnB w="0">
                       <a:noFill/>
@@ -27475,8 +28189,11 @@
                     <a:lnR w="0">
                       <a:noFill/>
                     </a:lnR>
-                    <a:lnT w="0">
-                      <a:noFill/>
+                    <a:lnT w="10160">
+                      <a:solidFill>
+                        <a:srgbClr val="626669"/>
+                      </a:solidFill>
+                      <a:prstDash val="solid"/>
                     </a:lnT>
                     <a:lnB w="0">
                       <a:noFill/>
@@ -27766,6 +28483,7 @@
                       <a:solidFill>
                         <a:srgbClr val="626669"/>
                       </a:solidFill>
+                      <a:prstDash val="solid"/>
                     </a:lnB>
                     <a:solidFill>
                       <a:srgbClr val="FFFEF8"/>
@@ -27824,6 +28542,7 @@
                       <a:solidFill>
                         <a:srgbClr val="626669"/>
                       </a:solidFill>
+                      <a:prstDash val="solid"/>
                     </a:lnB>
                     <a:solidFill>
                       <a:srgbClr val="FFFEF8"/>
@@ -27882,6 +28601,7 @@
                       <a:solidFill>
                         <a:srgbClr val="626669"/>
                       </a:solidFill>
+                      <a:prstDash val="solid"/>
                     </a:lnB>
                     <a:solidFill>
                       <a:srgbClr val="FFFEF8"/>
@@ -27940,6 +28660,7 @@
                       <a:solidFill>
                         <a:srgbClr val="626669"/>
                       </a:solidFill>
+                      <a:prstDash val="solid"/>
                     </a:lnB>
                     <a:solidFill>
                       <a:srgbClr val="FFFEF8"/>
@@ -27986,12 +28707,12 @@
           </a:xfrm>
         </p:spPr>
         <p:txBody>
-          <a:bodyPr wrap="square" anchor="t" lIns="0" rIns="0" tIns="0" bIns="0"/>
+          <a:bodyPr wrap="none" anchor="t" lIns="0" rIns="0" tIns="0" bIns="0"/>
           <a:lstStyle/>
           <a:p>
             <a:pPr algn="l">
               <a:lnSpc>
-                <a:spcPct val="115000"/>
+                <a:spcPct val="100000"/>
               </a:lnSpc>
               <a:spcBef>
                 <a:spcPts val="0"/>
@@ -28010,7 +28731,7 @@
               </a:defRPr>
             </a:pPr>
             <a:r>
-              <a:rPr lang="ja-JP" sz="2800" b="1">
+              <a:rPr sz="2800" b="1" lang="ja-JP">
                 <a:solidFill>
                   <a:srgbClr val="303437"/>
                 </a:solidFill>
@@ -28198,7 +28919,7 @@
                 <a:ea typeface="Noto Sans CJK JP"/>
                 <a:cs typeface="Noto Sans"/>
               </a:rPr>
-              <a:t>3 評価指標とモデル</a:t>
+              <a:t>3 物体検出・領域分割の評価とモデル性能</a:t>
             </a:r>
           </a:p>
         </p:txBody>
@@ -28305,12 +29026,12 @@
           </a:xfrm>
         </p:spPr>
         <p:txBody>
-          <a:bodyPr wrap="square" anchor="t" lIns="0" rIns="0" tIns="0" bIns="0"/>
+          <a:bodyPr wrap="none" anchor="t" lIns="0" rIns="0" tIns="0" bIns="0"/>
           <a:lstStyle/>
           <a:p>
             <a:pPr algn="l">
               <a:lnSpc>
-                <a:spcPct val="115000"/>
+                <a:spcPct val="100000"/>
               </a:lnSpc>
               <a:spcBef>
                 <a:spcPts val="0"/>
@@ -28329,15 +29050,15 @@
               </a:defRPr>
             </a:pPr>
             <a:r>
-              <a:rPr lang="ja-JP" sz="2800" b="1">
-                <a:solidFill>
-                  <a:srgbClr val="303437"/>
-                </a:solidFill>
-                <a:latin typeface="Noto Sans"/>
-                <a:ea typeface="Noto Sans CJK JP"/>
-                <a:cs typeface="Noto Sans"/>
-              </a:rPr>
-              <a:t>1領域の一致と、PQ全体の計算</a:t>
+              <a:rPr sz="2800" b="1" lang="ja-JP">
+                <a:solidFill>
+                  <a:srgbClr val="303437"/>
+                </a:solidFill>
+                <a:latin typeface="Noto Sans"/>
+                <a:ea typeface="Noto Sans CJK JP"/>
+                <a:cs typeface="Noto Sans"/>
+              </a:rPr>
+              <a:t>1領域の一致から求めるPQの計算例</a:t>
             </a:r>
           </a:p>
         </p:txBody>
@@ -28517,7 +29238,7 @@
                 <a:ea typeface="Noto Sans CJK JP"/>
                 <a:cs typeface="Noto Sans"/>
               </a:rPr>
-              <a:t>3 評価指標とモデル</a:t>
+              <a:t>3 物体検出・領域分割の評価とモデル性能</a:t>
             </a:r>
           </a:p>
         </p:txBody>
@@ -28635,12 +29356,12 @@
           </a:xfrm>
         </p:spPr>
         <p:txBody>
-          <a:bodyPr wrap="square" anchor="t" lIns="0" rIns="0" tIns="0" bIns="0"/>
+          <a:bodyPr wrap="none" anchor="t" lIns="0" rIns="0" tIns="0" bIns="0"/>
           <a:lstStyle/>
           <a:p>
             <a:pPr algn="l">
               <a:lnSpc>
-                <a:spcPct val="115000"/>
+                <a:spcPct val="100000"/>
               </a:lnSpc>
               <a:spcBef>
                 <a:spcPts val="0"/>
@@ -28659,7 +29380,7 @@
               </a:defRPr>
             </a:pPr>
             <a:r>
-              <a:rPr lang="ja-JP" sz="2800" b="1">
+              <a:rPr sz="2800" b="1" lang="ja-JP">
                 <a:solidFill>
                   <a:srgbClr val="303437"/>
                 </a:solidFill>
@@ -28847,21 +29568,21 @@
                 <a:ea typeface="Noto Sans CJK JP"/>
                 <a:cs typeface="Noto Sans"/>
               </a:rPr>
-              <a:t>3 評価指標とモデル</a:t>
-            </a:r>
-          </a:p>
-        </p:txBody>
-      </p:sp>
-      <p:sp>
-        <p:nvSpPr>
-          <p:cNvPr id="5" name="sources"/>
+              <a:t>3 物体検出・領域分割の評価とモデル性能</a:t>
+            </a:r>
+          </a:p>
+        </p:txBody>
+      </p:sp>
+      <p:sp>
+        <p:nvSpPr>
+          <p:cNvPr id="5" name="TextBox 4"/>
           <p:cNvSpPr txBox="1"/>
           <p:nvPr/>
         </p:nvSpPr>
         <p:spPr>
           <a:xfrm>
-            <a:off x="502920" y="4787900"/>
-            <a:ext cx="8183879" cy="640080"/>
+            <a:off x="502920" y="4521200"/>
+            <a:ext cx="8183879" cy="355600"/>
           </a:xfrm>
           <a:prstGeom prst="rect">
             <a:avLst/>
@@ -28874,24 +29595,74 @@
           </a:bodyPr>
           <a:lstStyle/>
           <a:p>
-            <a:pPr>
-              <a:lnSpc>
-                <a:spcPts val="1200"/>
-              </a:lnSpc>
-              <a:spcBef>
-                <a:spcPts val="0"/>
-              </a:spcBef>
-              <a:spcAft>
-                <a:spcPts val="0"/>
-              </a:spcAft>
-              <a:defRPr sz="800" b="0" lang="ja-JP">
+            <a:pPr algn="l">
+              <a:lnSpc>
+                <a:spcPts val="1400"/>
+              </a:lnSpc>
+              <a:spcBef>
+                <a:spcPts val="0"/>
+              </a:spcBef>
+              <a:spcAft>
+                <a:spcPts val="0"/>
+              </a:spcAft>
+            </a:pPr>
+            <a:r>
+              <a:rPr sz="800" b="0" lang="ja-JP">
                 <a:solidFill>
                   <a:srgbClr val="626669"/>
                 </a:solidFill>
                 <a:latin typeface="Noto Sans"/>
                 <a:ea typeface="Noto Sans CJK JP"/>
                 <a:cs typeface="Noto Sans"/>
-              </a:defRPr>
+              </a:rPr>
+              <a:t/>
+            </a:r>
+            <a:r>
+              <a:rPr sz="800" lang="ja-JP">
+                <a:solidFill>
+                  <a:srgbClr val="626669"/>
+                </a:solidFill>
+                <a:latin typeface="Noto Sans"/>
+                <a:ea typeface="Noto Sans CJK JP"/>
+                <a:cs typeface="Noto Sans"/>
+              </a:rPr>
+              <a:t>[1] Agrim Gupta et al. (2019). IEEE/CVF Conference on Computer Vision and Pattern Recognition (CVPR), pp. 5356–5364. LVIS: A Dataset for Large Vocabulary Instance Segmentation.</a:t>
+            </a:r>
+          </a:p>
+        </p:txBody>
+      </p:sp>
+      <p:sp>
+        <p:nvSpPr>
+          <p:cNvPr id="6" name="TextBox 5"/>
+          <p:cNvSpPr txBox="1"/>
+          <p:nvPr/>
+        </p:nvSpPr>
+        <p:spPr>
+          <a:xfrm>
+            <a:off x="502920" y="4876800"/>
+            <a:ext cx="8183879" cy="177800"/>
+          </a:xfrm>
+          <a:prstGeom prst="rect">
+            <a:avLst/>
+          </a:prstGeom>
+          <a:noFill/>
+        </p:spPr>
+        <p:txBody>
+          <a:bodyPr wrap="square" lIns="0" rIns="0" tIns="0" bIns="0">
+            <a:spAutoFit/>
+          </a:bodyPr>
+          <a:lstStyle/>
+          <a:p>
+            <a:pPr algn="l">
+              <a:lnSpc>
+                <a:spcPts val="1400"/>
+              </a:lnSpc>
+              <a:spcBef>
+                <a:spcPts val="0"/>
+              </a:spcBef>
+              <a:spcAft>
+                <a:spcPts val="0"/>
+              </a:spcAft>
             </a:pPr>
             <a:r>
               <a:rPr sz="800" b="0" lang="ja-JP">
@@ -28902,61 +29673,17 @@
                 <a:ea typeface="Noto Sans CJK JP"/>
                 <a:cs typeface="Noto Sans"/>
               </a:rPr>
-              <a:t>[1] </a:t>
-            </a:r>
-            <a:r>
-              <a:rPr sz="800" b="0" lang="ja-JP">
+              <a:t/>
+            </a:r>
+            <a:r>
+              <a:rPr sz="800" lang="ja-JP">
                 <a:solidFill>
                   <a:srgbClr val="626669"/>
                 </a:solidFill>
                 <a:latin typeface="Noto Sans"/>
                 <a:ea typeface="Noto Sans CJK JP"/>
                 <a:cs typeface="Noto Sans"/>
-                <a:hlinkClick r:id="rId3"/>
-              </a:rPr>
-              <a:t>https://cocodataset.org/#detection-eval</a:t>
-            </a:r>
-          </a:p>
-          <a:p>
-            <a:pPr>
-              <a:lnSpc>
-                <a:spcPts val="1200"/>
-              </a:lnSpc>
-              <a:spcBef>
-                <a:spcPts val="0"/>
-              </a:spcBef>
-              <a:spcAft>
-                <a:spcPts val="0"/>
-              </a:spcAft>
-              <a:defRPr sz="800" b="0" lang="ja-JP">
-                <a:solidFill>
-                  <a:srgbClr val="626669"/>
-                </a:solidFill>
-                <a:latin typeface="Noto Sans"/>
-                <a:ea typeface="Noto Sans CJK JP"/>
-                <a:cs typeface="Noto Sans"/>
-              </a:defRPr>
-            </a:pPr>
-            <a:r>
-              <a:rPr sz="800" b="0" lang="ja-JP">
-                <a:solidFill>
-                  <a:srgbClr val="626669"/>
-                </a:solidFill>
-                <a:latin typeface="Noto Sans"/>
-                <a:ea typeface="Noto Sans CJK JP"/>
-                <a:cs typeface="Noto Sans"/>
-              </a:rPr>
-              <a:t>[2] </a:t>
-            </a:r>
-            <a:r>
-              <a:rPr sz="800" b="0" lang="ja-JP">
-                <a:solidFill>
-                  <a:srgbClr val="626669"/>
-                </a:solidFill>
-                <a:latin typeface="Noto Sans"/>
-                <a:ea typeface="Noto Sans CJK JP"/>
-                <a:cs typeface="Noto Sans"/>
-                <a:hlinkClick r:id="rId4"/>
+                <a:hlinkClick r:id="rId2"/>
               </a:rPr>
               <a:t>https://arxiv.org/abs/1908.03195</a:t>
             </a:r>
@@ -28993,8 +29720,8 @@
         </p:nvSpPr>
         <p:spPr>
           <a:xfrm>
-            <a:off x="457200" y="1554480"/>
-            <a:ext cx="8229600" cy="1920240"/>
+            <a:off x="548640" y="2458846"/>
+            <a:ext cx="8046720" cy="731520"/>
           </a:xfrm>
         </p:spPr>
         <p:txBody>
@@ -29003,7 +29730,7 @@
           <a:p>
             <a:pPr algn="ctr">
               <a:lnSpc>
-                <a:spcPct val="115000"/>
+                <a:spcPct val="100000"/>
               </a:lnSpc>
               <a:spcBef>
                 <a:spcPts val="0"/>
@@ -29022,15 +29749,15 @@
               </a:defRPr>
             </a:pPr>
             <a:r>
-              <a:rPr lang="ja-JP" sz="3400" b="1">
-                <a:solidFill>
-                  <a:srgbClr val="303437"/>
-                </a:solidFill>
-                <a:latin typeface="Noto Sans"/>
-                <a:ea typeface="Noto Sans CJK JP"/>
-                <a:cs typeface="Noto Sans"/>
-              </a:rPr>
-              <a:t>4 利用方法と関連データ</a:t>
+              <a:rPr sz="3000" b="1" lang="ja-JP">
+                <a:solidFill>
+                  <a:srgbClr val="303437"/>
+                </a:solidFill>
+                <a:latin typeface="Noto Sans"/>
+                <a:ea typeface="Noto Sans CJK JP"/>
+                <a:cs typeface="Noto Sans"/>
+              </a:rPr>
+              <a:t>4 COCOの利用動向と画像・注釈の入手方法</a:t>
             </a:r>
           </a:p>
         </p:txBody>
@@ -29057,7 +29784,7 @@
           <a:p>
             <a:pPr algn="l">
               <a:lnSpc>
-                <a:spcPct val="115000"/>
+                <a:spcPct val="100000"/>
               </a:lnSpc>
               <a:spcBef>
                 <a:spcPts val="0"/>
@@ -29084,7 +29811,7 @@
                 <a:ea typeface="Noto Sans CJK JP"/>
                 <a:cs typeface="Noto Sans"/>
               </a:rPr>
-              <a:t>4 利用方法と関連データ</a:t>
+              <a:t>4 COCOの利用動向と画像・注釈の入手方法</a:t>
             </a:r>
           </a:p>
         </p:txBody>
@@ -29124,12 +29851,12 @@
           </a:xfrm>
         </p:spPr>
         <p:txBody>
-          <a:bodyPr wrap="square" anchor="t" lIns="0" rIns="0" tIns="0" bIns="0"/>
+          <a:bodyPr wrap="none" anchor="t" lIns="0" rIns="0" tIns="0" bIns="0"/>
           <a:lstStyle/>
           <a:p>
             <a:pPr algn="l">
               <a:lnSpc>
-                <a:spcPct val="115000"/>
+                <a:spcPct val="100000"/>
               </a:lnSpc>
               <a:spcBef>
                 <a:spcPts val="0"/>
@@ -29148,15 +29875,15 @@
               </a:defRPr>
             </a:pPr>
             <a:r>
-              <a:rPr lang="ja-JP" sz="2800" b="1">
-                <a:solidFill>
-                  <a:srgbClr val="303437"/>
-                </a:solidFill>
-                <a:latin typeface="Noto Sans"/>
-                <a:ea typeface="Noto Sans CJK JP"/>
-                <a:cs typeface="Noto Sans"/>
-              </a:rPr>
-              <a:t>公開から現在まで、共通の評価基盤へ</a:t>
+              <a:rPr sz="2800" b="1" lang="ja-JP">
+                <a:solidFill>
+                  <a:srgbClr val="303437"/>
+                </a:solidFill>
+                <a:latin typeface="Noto Sans"/>
+                <a:ea typeface="Noto Sans CJK JP"/>
+                <a:cs typeface="Noto Sans"/>
+              </a:rPr>
+              <a:t>COCOの公開・分割更新と検出モデルへの利用</a:t>
             </a:r>
           </a:p>
         </p:txBody>
@@ -29336,7 +30063,7 @@
                 <a:ea typeface="Noto Sans CJK JP"/>
                 <a:cs typeface="Noto Sans"/>
               </a:rPr>
-              <a:t>4 利用方法と関連データ</a:t>
+              <a:t>4 COCOの利用動向と画像・注釈の入手方法</a:t>
             </a:r>
           </a:p>
         </p:txBody>
@@ -29487,12 +30214,12 @@
           </a:xfrm>
         </p:spPr>
         <p:txBody>
-          <a:bodyPr wrap="square" anchor="t" lIns="0" rIns="0" tIns="0" bIns="0"/>
+          <a:bodyPr wrap="none" anchor="t" lIns="0" rIns="0" tIns="0" bIns="0"/>
           <a:lstStyle/>
           <a:p>
             <a:pPr algn="l">
               <a:lnSpc>
-                <a:spcPct val="115000"/>
+                <a:spcPct val="100000"/>
               </a:lnSpc>
               <a:spcBef>
                 <a:spcPts val="0"/>
@@ -29511,7 +30238,7 @@
               </a:defRPr>
             </a:pPr>
             <a:r>
-              <a:rPr lang="ja-JP" sz="2800" b="1">
+              <a:rPr sz="2800" b="1" lang="ja-JP">
                 <a:solidFill>
                   <a:srgbClr val="303437"/>
                 </a:solidFill>
@@ -29699,7 +30426,7 @@
                 <a:ea typeface="Noto Sans CJK JP"/>
                 <a:cs typeface="Noto Sans"/>
               </a:rPr>
-              <a:t>1 認識課題と実画像</a:t>
+              <a:t>1 COCOの認識課題と領域注釈の実例</a:t>
             </a:r>
           </a:p>
         </p:txBody>
@@ -29764,7 +30491,7 @@
                 <a:latin typeface="Noto Sans"/>
                 <a:ea typeface="Noto Sans CJK JP"/>
                 <a:cs typeface="Noto Sans"/>
-                <a:hlinkClick r:id="rId3"/>
+                <a:hlinkClick r:id="rId2"/>
               </a:rPr>
               <a:t>https://cocodataset.org/#format-data</a:t>
             </a:r>
@@ -29806,12 +30533,12 @@
           </a:xfrm>
         </p:spPr>
         <p:txBody>
-          <a:bodyPr wrap="square" anchor="t" lIns="0" rIns="0" tIns="0" bIns="0"/>
+          <a:bodyPr wrap="none" anchor="t" lIns="0" rIns="0" tIns="0" bIns="0"/>
           <a:lstStyle/>
           <a:p>
             <a:pPr algn="l">
               <a:lnSpc>
-                <a:spcPct val="115000"/>
+                <a:spcPct val="100000"/>
               </a:lnSpc>
               <a:spcBef>
                 <a:spcPts val="0"/>
@@ -29830,7 +30557,7 @@
               </a:defRPr>
             </a:pPr>
             <a:r>
-              <a:rPr lang="ja-JP" sz="2800" b="1">
+              <a:rPr sz="2800" b="1" lang="ja-JP">
                 <a:solidFill>
                   <a:srgbClr val="303437"/>
                 </a:solidFill>
@@ -29855,7 +30582,7 @@
         </p:nvSpPr>
         <p:spPr>
           <a:xfrm>
-            <a:off x="594360" y="1417320"/>
+            <a:off x="594360" y="1198528"/>
             <a:ext cx="7955279" cy="3200400"/>
           </a:xfrm>
         </p:spPr>
@@ -30018,21 +30745,21 @@
                 <a:ea typeface="Noto Sans CJK JP"/>
                 <a:cs typeface="Noto Sans"/>
               </a:rPr>
-              <a:t>4 利用方法と関連データ</a:t>
-            </a:r>
-          </a:p>
-        </p:txBody>
-      </p:sp>
-      <p:sp>
-        <p:nvSpPr>
-          <p:cNvPr id="5" name="sources"/>
+              <a:t>4 COCOの利用動向と画像・注釈の入手方法</a:t>
+            </a:r>
+          </a:p>
+        </p:txBody>
+      </p:sp>
+      <p:sp>
+        <p:nvSpPr>
+          <p:cNvPr id="5" name="TextBox 4"/>
           <p:cNvSpPr txBox="1"/>
           <p:nvPr/>
         </p:nvSpPr>
         <p:spPr>
           <a:xfrm>
-            <a:off x="502920" y="4787900"/>
-            <a:ext cx="8183879" cy="640080"/>
+            <a:off x="502920" y="4343400"/>
+            <a:ext cx="8183879" cy="355600"/>
           </a:xfrm>
           <a:prstGeom prst="rect">
             <a:avLst/>
@@ -30045,24 +30772,74 @@
           </a:bodyPr>
           <a:lstStyle/>
           <a:p>
-            <a:pPr>
-              <a:lnSpc>
-                <a:spcPts val="1200"/>
-              </a:lnSpc>
-              <a:spcBef>
-                <a:spcPts val="0"/>
-              </a:spcBef>
-              <a:spcAft>
-                <a:spcPts val="0"/>
-              </a:spcAft>
-              <a:defRPr sz="800" b="0" lang="ja-JP">
+            <a:pPr algn="l">
+              <a:lnSpc>
+                <a:spcPts val="1400"/>
+              </a:lnSpc>
+              <a:spcBef>
+                <a:spcPts val="0"/>
+              </a:spcBef>
+              <a:spcAft>
+                <a:spcPts val="0"/>
+              </a:spcAft>
+            </a:pPr>
+            <a:r>
+              <a:rPr sz="800" b="0" lang="ja-JP">
                 <a:solidFill>
                   <a:srgbClr val="626669"/>
                 </a:solidFill>
                 <a:latin typeface="Noto Sans"/>
                 <a:ea typeface="Noto Sans CJK JP"/>
                 <a:cs typeface="Noto Sans"/>
-              </a:defRPr>
+              </a:rPr>
+              <a:t/>
+            </a:r>
+            <a:r>
+              <a:rPr sz="800" lang="ja-JP">
+                <a:solidFill>
+                  <a:srgbClr val="626669"/>
+                </a:solidFill>
+                <a:latin typeface="Noto Sans"/>
+                <a:ea typeface="Noto Sans CJK JP"/>
+                <a:cs typeface="Noto Sans"/>
+              </a:rPr>
+              <a:t>[1] Agrim Gupta et al. (2019). IEEE/CVF Conference on Computer Vision and Pattern Recognition (CVPR), pp. 5356–5364. LVIS: A Dataset for Large Vocabulary Instance Segmentation.</a:t>
+            </a:r>
+          </a:p>
+        </p:txBody>
+      </p:sp>
+      <p:sp>
+        <p:nvSpPr>
+          <p:cNvPr id="6" name="TextBox 5"/>
+          <p:cNvSpPr txBox="1"/>
+          <p:nvPr/>
+        </p:nvSpPr>
+        <p:spPr>
+          <a:xfrm>
+            <a:off x="502920" y="4699000"/>
+            <a:ext cx="8183879" cy="177800"/>
+          </a:xfrm>
+          <a:prstGeom prst="rect">
+            <a:avLst/>
+          </a:prstGeom>
+          <a:noFill/>
+        </p:spPr>
+        <p:txBody>
+          <a:bodyPr wrap="square" lIns="0" rIns="0" tIns="0" bIns="0">
+            <a:spAutoFit/>
+          </a:bodyPr>
+          <a:lstStyle/>
+          <a:p>
+            <a:pPr algn="l">
+              <a:lnSpc>
+                <a:spcPts val="1400"/>
+              </a:lnSpc>
+              <a:spcBef>
+                <a:spcPts val="0"/>
+              </a:spcBef>
+              <a:spcAft>
+                <a:spcPts val="0"/>
+              </a:spcAft>
             </a:pPr>
             <a:r>
               <a:rPr sz="800" b="0" lang="ja-JP">
@@ -30073,8 +30850,56 @@
                 <a:ea typeface="Noto Sans CJK JP"/>
                 <a:cs typeface="Noto Sans"/>
               </a:rPr>
-              <a:t>[1] </a:t>
-            </a:r>
+              <a:t/>
+            </a:r>
+            <a:r>
+              <a:rPr sz="800" lang="ja-JP">
+                <a:solidFill>
+                  <a:srgbClr val="626669"/>
+                </a:solidFill>
+                <a:latin typeface="Noto Sans"/>
+                <a:ea typeface="Noto Sans CJK JP"/>
+                <a:cs typeface="Noto Sans"/>
+                <a:hlinkClick r:id="rId2"/>
+              </a:rPr>
+              <a:t>https://arxiv.org/abs/1908.03195</a:t>
+            </a:r>
+          </a:p>
+        </p:txBody>
+      </p:sp>
+      <p:sp>
+        <p:nvSpPr>
+          <p:cNvPr id="7" name="TextBox 6"/>
+          <p:cNvSpPr txBox="1"/>
+          <p:nvPr/>
+        </p:nvSpPr>
+        <p:spPr>
+          <a:xfrm>
+            <a:off x="502920" y="4876800"/>
+            <a:ext cx="8183879" cy="177800"/>
+          </a:xfrm>
+          <a:prstGeom prst="rect">
+            <a:avLst/>
+          </a:prstGeom>
+          <a:noFill/>
+        </p:spPr>
+        <p:txBody>
+          <a:bodyPr wrap="square" lIns="0" rIns="0" tIns="0" bIns="0">
+            <a:spAutoFit/>
+          </a:bodyPr>
+          <a:lstStyle/>
+          <a:p>
+            <a:pPr algn="l">
+              <a:lnSpc>
+                <a:spcPts val="1400"/>
+              </a:lnSpc>
+              <a:spcBef>
+                <a:spcPts val="0"/>
+              </a:spcBef>
+              <a:spcAft>
+                <a:spcPts val="0"/>
+              </a:spcAft>
+            </a:pPr>
             <a:r>
               <a:rPr sz="800" b="0" lang="ja-JP">
                 <a:solidFill>
@@ -30083,44 +30908,22 @@
                 <a:latin typeface="Noto Sans"/>
                 <a:ea typeface="Noto Sans CJK JP"/>
                 <a:cs typeface="Noto Sans"/>
-                <a:hlinkClick r:id="rId4"/>
-              </a:rPr>
-              <a:t>https://arxiv.org/abs/1908.03195</a:t>
-            </a:r>
-          </a:p>
-          <a:p>
-            <a:pPr>
-              <a:lnSpc>
-                <a:spcPts val="1200"/>
-              </a:lnSpc>
-              <a:spcBef>
-                <a:spcPts val="0"/>
-              </a:spcBef>
-              <a:spcAft>
-                <a:spcPts val="0"/>
-              </a:spcAft>
-              <a:defRPr sz="800" b="0" lang="ja-JP">
+              </a:rPr>
+              <a:t/>
+            </a:r>
+            <a:r>
+              <a:rPr sz="800" lang="ja-JP">
                 <a:solidFill>
                   <a:srgbClr val="626669"/>
                 </a:solidFill>
                 <a:latin typeface="Noto Sans"/>
                 <a:ea typeface="Noto Sans CJK JP"/>
                 <a:cs typeface="Noto Sans"/>
-              </a:defRPr>
-            </a:pPr>
-            <a:r>
-              <a:rPr sz="800" b="0" lang="ja-JP">
-                <a:solidFill>
-                  <a:srgbClr val="626669"/>
-                </a:solidFill>
-                <a:latin typeface="Noto Sans"/>
-                <a:ea typeface="Noto Sans CJK JP"/>
-                <a:cs typeface="Noto Sans"/>
               </a:rPr>
               <a:t>[2] </a:t>
             </a:r>
             <a:r>
-              <a:rPr sz="800" b="0" lang="ja-JP">
+              <a:rPr sz="800" lang="ja-JP">
                 <a:solidFill>
                   <a:srgbClr val="626669"/>
                 </a:solidFill>
@@ -30169,12 +30972,12 @@
           </a:xfrm>
         </p:spPr>
         <p:txBody>
-          <a:bodyPr wrap="square" anchor="t" lIns="0" rIns="0" tIns="0" bIns="0"/>
+          <a:bodyPr wrap="none" anchor="t" lIns="0" rIns="0" tIns="0" bIns="0"/>
           <a:lstStyle/>
           <a:p>
             <a:pPr algn="l">
               <a:lnSpc>
-                <a:spcPct val="115000"/>
+                <a:spcPct val="100000"/>
               </a:lnSpc>
               <a:spcBef>
                 <a:spcPts val="0"/>
@@ -30193,7 +30996,7 @@
               </a:defRPr>
             </a:pPr>
             <a:r>
-              <a:rPr lang="ja-JP" sz="2800" b="1">
+              <a:rPr sz="2800" b="1" lang="ja-JP">
                 <a:solidFill>
                   <a:srgbClr val="303437"/>
                 </a:solidFill>
@@ -30255,7 +31058,7 @@
                 <a:ea typeface="Noto Sans CJK JP"/>
                 <a:cs typeface="Noto Sans"/>
               </a:rPr>
-              <a:t>4 利用方法と関連データ</a:t>
+              <a:t>4 COCOの利用動向と画像・注釈の入手方法</a:t>
             </a:r>
           </a:p>
         </p:txBody>
@@ -30330,11 +31133,13 @@
                       <a:solidFill>
                         <a:srgbClr val="626669"/>
                       </a:solidFill>
+                      <a:prstDash val="solid"/>
                     </a:lnT>
                     <a:lnB w="10160">
                       <a:solidFill>
                         <a:srgbClr val="626669"/>
                       </a:solidFill>
+                      <a:prstDash val="solid"/>
                     </a:lnB>
                     <a:solidFill>
                       <a:srgbClr val="FFFEF8"/>
@@ -30390,11 +31195,13 @@
                       <a:solidFill>
                         <a:srgbClr val="626669"/>
                       </a:solidFill>
+                      <a:prstDash val="solid"/>
                     </a:lnT>
                     <a:lnB w="10160">
                       <a:solidFill>
                         <a:srgbClr val="626669"/>
                       </a:solidFill>
+                      <a:prstDash val="solid"/>
                     </a:lnB>
                     <a:solidFill>
                       <a:srgbClr val="FFFEF8"/>
@@ -30448,8 +31255,11 @@
                     <a:lnR w="0">
                       <a:noFill/>
                     </a:lnR>
-                    <a:lnT w="0">
-                      <a:noFill/>
+                    <a:lnT w="10160">
+                      <a:solidFill>
+                        <a:srgbClr val="626669"/>
+                      </a:solidFill>
+                      <a:prstDash val="solid"/>
                     </a:lnT>
                     <a:lnB w="0">
                       <a:noFill/>
@@ -30504,8 +31314,11 @@
                     <a:lnR w="0">
                       <a:noFill/>
                     </a:lnR>
-                    <a:lnT w="0">
-                      <a:noFill/>
+                    <a:lnT w="10160">
+                      <a:solidFill>
+                        <a:srgbClr val="626669"/>
+                      </a:solidFill>
+                      <a:prstDash val="solid"/>
                     </a:lnT>
                     <a:lnB w="0">
                       <a:noFill/>
@@ -30797,6 +31610,7 @@
                       <a:solidFill>
                         <a:srgbClr val="626669"/>
                       </a:solidFill>
+                      <a:prstDash val="solid"/>
                     </a:lnB>
                     <a:solidFill>
                       <a:srgbClr val="FFFEF8"/>
@@ -30855,6 +31669,7 @@
                       <a:solidFill>
                         <a:srgbClr val="626669"/>
                       </a:solidFill>
+                      <a:prstDash val="solid"/>
                     </a:lnB>
                     <a:solidFill>
                       <a:srgbClr val="FFFEF8"/>
@@ -31024,12 +31839,12 @@
           </a:xfrm>
         </p:spPr>
         <p:txBody>
-          <a:bodyPr wrap="square" anchor="t" lIns="0" rIns="0" tIns="0" bIns="0"/>
+          <a:bodyPr wrap="none" anchor="t" lIns="0" rIns="0" tIns="0" bIns="0"/>
           <a:lstStyle/>
           <a:p>
             <a:pPr algn="l">
               <a:lnSpc>
-                <a:spcPct val="115000"/>
+                <a:spcPct val="100000"/>
               </a:lnSpc>
               <a:spcBef>
                 <a:spcPts val="0"/>
@@ -31048,7 +31863,7 @@
               </a:defRPr>
             </a:pPr>
             <a:r>
-              <a:rPr lang="ja-JP" sz="2800" b="1">
+              <a:rPr sz="2800" b="1" lang="ja-JP">
                 <a:solidFill>
                   <a:srgbClr val="303437"/>
                 </a:solidFill>
@@ -31110,7 +31925,7 @@
                 <a:ea typeface="Noto Sans CJK JP"/>
                 <a:cs typeface="Noto Sans"/>
               </a:rPr>
-              <a:t>4 利用方法と関連データ</a:t>
+              <a:t>4 COCOの利用動向と画像・注釈の入手方法</a:t>
             </a:r>
           </a:p>
         </p:txBody>
@@ -31526,12 +32341,12 @@
           </a:xfrm>
         </p:spPr>
         <p:txBody>
-          <a:bodyPr wrap="square" anchor="t" lIns="0" rIns="0" tIns="0" bIns="0"/>
+          <a:bodyPr wrap="none" anchor="t" lIns="0" rIns="0" tIns="0" bIns="0"/>
           <a:lstStyle/>
           <a:p>
             <a:pPr algn="l">
               <a:lnSpc>
-                <a:spcPct val="115000"/>
+                <a:spcPct val="100000"/>
               </a:lnSpc>
               <a:spcBef>
                 <a:spcPts val="0"/>
@@ -31550,7 +32365,7 @@
               </a:defRPr>
             </a:pPr>
             <a:r>
-              <a:rPr lang="ja-JP" sz="2800" b="1">
+              <a:rPr sz="2800" b="1" lang="ja-JP">
                 <a:solidFill>
                   <a:srgbClr val="303437"/>
                 </a:solidFill>
@@ -31738,7 +32553,7 @@
                 <a:ea typeface="Noto Sans CJK JP"/>
                 <a:cs typeface="Noto Sans"/>
               </a:rPr>
-              <a:t>4 利用方法と関連データ</a:t>
+              <a:t>4 COCOの利用動向と画像・注釈の入手方法</a:t>
             </a:r>
           </a:p>
         </p:txBody>
@@ -31803,7 +32618,7 @@
                 <a:latin typeface="Noto Sans"/>
                 <a:ea typeface="Noto Sans CJK JP"/>
                 <a:cs typeface="Noto Sans"/>
-                <a:hlinkClick r:id="rId3"/>
+                <a:hlinkClick r:id="rId2"/>
               </a:rPr>
               <a:t>https://github.com/cocodataset/cocoapi/blob/master/PythonAPI/pycocotools/coco.py</a:t>
             </a:r>
@@ -31845,12 +32660,12 @@
           </a:xfrm>
         </p:spPr>
         <p:txBody>
-          <a:bodyPr wrap="square" anchor="t" lIns="0" rIns="0" tIns="0" bIns="0"/>
+          <a:bodyPr wrap="none" anchor="t" lIns="0" rIns="0" tIns="0" bIns="0"/>
           <a:lstStyle/>
           <a:p>
             <a:pPr algn="l">
               <a:lnSpc>
-                <a:spcPct val="115000"/>
+                <a:spcPct val="100000"/>
               </a:lnSpc>
               <a:spcBef>
                 <a:spcPts val="0"/>
@@ -31869,7 +32684,7 @@
               </a:defRPr>
             </a:pPr>
             <a:r>
-              <a:rPr lang="ja-JP" sz="2800" b="1">
+              <a:rPr sz="2800" b="1" lang="ja-JP">
                 <a:solidFill>
                   <a:srgbClr val="303437"/>
                 </a:solidFill>
@@ -32057,7 +32872,7 @@
                 <a:ea typeface="Noto Sans CJK JP"/>
                 <a:cs typeface="Noto Sans"/>
               </a:rPr>
-              <a:t>4 利用方法と関連データ</a:t>
+              <a:t>4 COCOの利用動向と画像・注釈の入手方法</a:t>
             </a:r>
           </a:p>
         </p:txBody>
@@ -32092,15 +32907,24 @@
         </p:nvSpPr>
         <p:spPr>
           <a:xfrm>
-            <a:off x="457200" y="2164528"/>
-            <a:ext cx="8229600" cy="1280160"/>
-          </a:xfrm>
-        </p:spPr>
-        <p:txBody>
-          <a:bodyPr anchor="ctr"/>
+            <a:off x="548640" y="2441359"/>
+            <a:ext cx="8046720" cy="731520"/>
+          </a:xfrm>
+        </p:spPr>
+        <p:txBody>
+          <a:bodyPr anchor="ctr" wrap="square" lIns="0" rIns="0" tIns="0" bIns="0"/>
           <a:lstStyle/>
           <a:p>
             <a:pPr algn="ctr">
+              <a:lnSpc>
+                <a:spcPct val="100000"/>
+              </a:lnSpc>
+              <a:spcBef>
+                <a:spcPts val="0"/>
+              </a:spcBef>
+              <a:spcAft>
+                <a:spcPts val="0"/>
+              </a:spcAft>
               <a:defRPr sz="4800" b="1" lang="ja-JP">
                 <a:solidFill>
                   <a:srgbClr val="303437"/>
@@ -32111,7 +32935,7 @@
               </a:defRPr>
             </a:pPr>
             <a:r>
-              <a:rPr sz="4800" b="1" lang="ja-JP">
+              <a:rPr sz="3200" b="1" lang="ja-JP">
                 <a:solidFill>
                   <a:srgbClr val="303437"/>
                 </a:solidFill>
@@ -32136,7 +32960,7 @@
         </p:nvSpPr>
         <p:spPr/>
         <p:txBody>
-          <a:bodyPr/>
+          <a:bodyPr anchor="ctr" tIns="0" bIns="0"/>
           <a:lstStyle/>
           <a:p>
             <a:pPr algn="l">
@@ -32278,25 +33102,25 @@
               <a:buSzPct val="100000"/>
               <a:buFont typeface="Noto Sans CJK JP"/>
               <a:buAutoNum type="arabicPeriod"/>
-              <a:defRPr lang="ja-JP" sz="3200" b="1">
-                <a:solidFill>
-                  <a:srgbClr val="303437"/>
-                </a:solidFill>
-                <a:latin typeface="Noto Sans"/>
-                <a:ea typeface="Noto Sans CJK JP"/>
-                <a:cs typeface="Noto Sans"/>
-              </a:defRPr>
-            </a:pPr>
-            <a:r>
-              <a:rPr lang="ja-JP" sz="3200" b="1">
-                <a:solidFill>
-                  <a:srgbClr val="303437"/>
-                </a:solidFill>
-                <a:latin typeface="Noto Sans"/>
-                <a:ea typeface="Noto Sans CJK JP"/>
-                <a:cs typeface="Noto Sans"/>
-              </a:rPr>
-              <a:t>定義・著者・評価の詳細</a:t>
+              <a:defRPr lang="ja-JP" sz="3000" b="1">
+                <a:solidFill>
+                  <a:srgbClr val="303437"/>
+                </a:solidFill>
+                <a:latin typeface="Noto Sans"/>
+                <a:ea typeface="Noto Sans CJK JP"/>
+                <a:cs typeface="Noto Sans"/>
+              </a:defRPr>
+            </a:pPr>
+            <a:r>
+              <a:rPr lang="ja-JP" sz="3000" b="1">
+                <a:solidFill>
+                  <a:srgbClr val="303437"/>
+                </a:solidFill>
+                <a:latin typeface="Noto Sans"/>
+                <a:ea typeface="Noto Sans CJK JP"/>
+                <a:cs typeface="Noto Sans"/>
+              </a:rPr>
+              <a:t>開発者の研究と領域認識の評価仕様</a:t>
             </a:r>
           </a:p>
           <a:p>
@@ -32313,25 +33137,25 @@
               <a:buSzPct val="100000"/>
               <a:buFont typeface="Noto Sans CJK JP"/>
               <a:buAutoNum type="arabicPeriod"/>
-              <a:defRPr lang="ja-JP" sz="3200" b="1">
-                <a:solidFill>
-                  <a:srgbClr val="303437"/>
-                </a:solidFill>
-                <a:latin typeface="Noto Sans"/>
-                <a:ea typeface="Noto Sans CJK JP"/>
-                <a:cs typeface="Noto Sans"/>
-              </a:defRPr>
-            </a:pPr>
-            <a:r>
-              <a:rPr lang="ja-JP" sz="3200" b="1">
-                <a:solidFill>
-                  <a:srgbClr val="303437"/>
-                </a:solidFill>
-                <a:latin typeface="Noto Sans"/>
-                <a:ea typeface="Noto Sans CJK JP"/>
-                <a:cs typeface="Noto Sans"/>
-              </a:rPr>
-              <a:t>128画像で見る注釈の分布</a:t>
+              <a:defRPr lang="ja-JP" sz="2900" b="1">
+                <a:solidFill>
+                  <a:srgbClr val="303437"/>
+                </a:solidFill>
+                <a:latin typeface="Noto Sans"/>
+                <a:ea typeface="Noto Sans CJK JP"/>
+                <a:cs typeface="Noto Sans"/>
+              </a:defRPr>
+            </a:pPr>
+            <a:r>
+              <a:rPr lang="ja-JP" sz="2900" b="1">
+                <a:solidFill>
+                  <a:srgbClr val="303437"/>
+                </a:solidFill>
+                <a:latin typeface="Noto Sans"/>
+                <a:ea typeface="Noto Sans CJK JP"/>
+                <a:cs typeface="Noto Sans"/>
+              </a:rPr>
+              <a:t>128画像の部分集合における注釈数の分布</a:t>
             </a:r>
           </a:p>
           <a:p>
@@ -32348,25 +33172,25 @@
               <a:buSzPct val="100000"/>
               <a:buFont typeface="Noto Sans CJK JP"/>
               <a:buAutoNum type="arabicPeriod"/>
-              <a:defRPr lang="ja-JP" sz="3200" b="1">
-                <a:solidFill>
-                  <a:srgbClr val="303437"/>
-                </a:solidFill>
-                <a:latin typeface="Noto Sans"/>
-                <a:ea typeface="Noto Sans CJK JP"/>
-                <a:cs typeface="Noto Sans"/>
-              </a:defRPr>
-            </a:pPr>
-            <a:r>
-              <a:rPr lang="ja-JP" sz="3200" b="1">
-                <a:solidFill>
-                  <a:srgbClr val="303437"/>
-                </a:solidFill>
-                <a:latin typeface="Noto Sans"/>
-                <a:ea typeface="Noto Sans CJK JP"/>
-                <a:cs typeface="Noto Sans"/>
-              </a:rPr>
-              <a:t>追加の領域注釈例</a:t>
+              <a:defRPr lang="ja-JP" sz="3000" b="1">
+                <a:solidFill>
+                  <a:srgbClr val="303437"/>
+                </a:solidFill>
+                <a:latin typeface="Noto Sans"/>
+                <a:ea typeface="Noto Sans CJK JP"/>
+                <a:cs typeface="Noto Sans"/>
+              </a:defRPr>
+            </a:pPr>
+            <a:r>
+              <a:rPr lang="ja-JP" sz="3000" b="1">
+                <a:solidFill>
+                  <a:srgbClr val="303437"/>
+                </a:solidFill>
+                <a:latin typeface="Noto Sans"/>
+                <a:ea typeface="Noto Sans CJK JP"/>
+                <a:cs typeface="Noto Sans"/>
+              </a:rPr>
+              <a:t>画像と物体領域の追加例</a:t>
             </a:r>
           </a:p>
           <a:p>
@@ -32383,25 +33207,25 @@
               <a:buSzPct val="100000"/>
               <a:buFont typeface="Noto Sans CJK JP"/>
               <a:buAutoNum type="arabicPeriod"/>
-              <a:defRPr lang="ja-JP" sz="3200" b="1">
-                <a:solidFill>
-                  <a:srgbClr val="303437"/>
-                </a:solidFill>
-                <a:latin typeface="Noto Sans"/>
-                <a:ea typeface="Noto Sans CJK JP"/>
-                <a:cs typeface="Noto Sans"/>
-              </a:defRPr>
-            </a:pPr>
-            <a:r>
-              <a:rPr lang="ja-JP" sz="3200" b="1">
-                <a:solidFill>
-                  <a:srgbClr val="303437"/>
-                </a:solidFill>
-                <a:latin typeface="Noto Sans"/>
-                <a:ea typeface="Noto Sans CJK JP"/>
-                <a:cs typeface="Noto Sans"/>
-              </a:rPr>
-              <a:t>全80カテゴリと利用条件</a:t>
+              <a:defRPr lang="ja-JP" sz="2850" b="1">
+                <a:solidFill>
+                  <a:srgbClr val="303437"/>
+                </a:solidFill>
+                <a:latin typeface="Noto Sans"/>
+                <a:ea typeface="Noto Sans CJK JP"/>
+                <a:cs typeface="Noto Sans"/>
+              </a:defRPr>
+            </a:pPr>
+            <a:r>
+              <a:rPr lang="ja-JP" sz="2850" b="1">
+                <a:solidFill>
+                  <a:srgbClr val="303437"/>
+                </a:solidFill>
+                <a:latin typeface="Noto Sans"/>
+                <a:ea typeface="Noto Sans CJK JP"/>
+                <a:cs typeface="Noto Sans"/>
+              </a:rPr>
+              <a:t>全80物体カテゴリと画像・注釈の利用条件</a:t>
             </a:r>
           </a:p>
           <a:p>
@@ -32418,25 +33242,25 @@
               <a:buSzPct val="100000"/>
               <a:buFont typeface="Noto Sans CJK JP"/>
               <a:buAutoNum type="arabicPeriod"/>
-              <a:defRPr lang="ja-JP" sz="3200" b="1">
-                <a:solidFill>
-                  <a:srgbClr val="303437"/>
-                </a:solidFill>
-                <a:latin typeface="Noto Sans"/>
-                <a:ea typeface="Noto Sans CJK JP"/>
-                <a:cs typeface="Noto Sans"/>
-              </a:defRPr>
-            </a:pPr>
-            <a:r>
-              <a:rPr lang="ja-JP" sz="3200" b="1">
-                <a:solidFill>
-                  <a:srgbClr val="303437"/>
-                </a:solidFill>
-                <a:latin typeface="Noto Sans"/>
-                <a:ea typeface="Noto Sans CJK JP"/>
-                <a:cs typeface="Noto Sans"/>
-              </a:rPr>
-              <a:t>参考文献</a:t>
+              <a:defRPr lang="ja-JP" sz="3000" b="1">
+                <a:solidFill>
+                  <a:srgbClr val="303437"/>
+                </a:solidFill>
+                <a:latin typeface="Noto Sans"/>
+                <a:ea typeface="Noto Sans CJK JP"/>
+                <a:cs typeface="Noto Sans"/>
+              </a:defRPr>
+            </a:pPr>
+            <a:r>
+              <a:rPr lang="ja-JP" sz="3000" b="1">
+                <a:solidFill>
+                  <a:srgbClr val="303437"/>
+                </a:solidFill>
+                <a:latin typeface="Noto Sans"/>
+                <a:ea typeface="Noto Sans CJK JP"/>
+                <a:cs typeface="Noto Sans"/>
+              </a:rPr>
+              <a:t>物体検出・領域分割の関連文献</a:t>
             </a:r>
           </a:p>
         </p:txBody>
@@ -32530,12 +33354,12 @@
           </a:xfrm>
         </p:spPr>
         <p:txBody>
-          <a:bodyPr wrap="square" anchor="t" lIns="0" rIns="0" tIns="0" bIns="0"/>
+          <a:bodyPr wrap="none" anchor="t" lIns="0" rIns="0" tIns="0" bIns="0"/>
           <a:lstStyle/>
           <a:p>
             <a:pPr algn="l">
               <a:lnSpc>
-                <a:spcPct val="115000"/>
+                <a:spcPct val="100000"/>
               </a:lnSpc>
               <a:spcBef>
                 <a:spcPts val="0"/>
@@ -32554,7 +33378,7 @@
               </a:defRPr>
             </a:pPr>
             <a:r>
-              <a:rPr lang="ja-JP" sz="2800" b="1">
+              <a:rPr sz="2800" b="1" lang="ja-JP">
                 <a:solidFill>
                   <a:srgbClr val="303437"/>
                 </a:solidFill>
@@ -32579,7 +33403,7 @@
         </p:nvSpPr>
         <p:spPr>
           <a:xfrm>
-            <a:off x="594360" y="1508760"/>
+            <a:off x="594360" y="1304015"/>
             <a:ext cx="7955279" cy="3017520"/>
           </a:xfrm>
         </p:spPr>
@@ -32742,7 +33566,7 @@
                 <a:ea typeface="Noto Sans CJK JP"/>
                 <a:cs typeface="Noto Sans"/>
               </a:rPr>
-              <a:t>Appendix 1 定義・著者・評価の詳細</a:t>
+              <a:t>Appendix 1 開発者の研究と領域認識の評価仕様</a:t>
             </a:r>
           </a:p>
         </p:txBody>
@@ -32755,8 +33579,8 @@
         </p:nvSpPr>
         <p:spPr>
           <a:xfrm>
-            <a:off x="502920" y="4787900"/>
-            <a:ext cx="8183879" cy="640080"/>
+            <a:off x="502920" y="4521200"/>
+            <a:ext cx="8183879" cy="177800"/>
           </a:xfrm>
           <a:prstGeom prst="rect">
             <a:avLst/>
@@ -32764,29 +33588,79 @@
           <a:noFill/>
         </p:spPr>
         <p:txBody>
-          <a:bodyPr wrap="square" anchor="t" lIns="0" rIns="0" tIns="0" bIns="0">
+          <a:bodyPr wrap="square" lIns="0" rIns="0" tIns="0" bIns="0">
             <a:spAutoFit/>
           </a:bodyPr>
           <a:lstStyle/>
           <a:p>
-            <a:pPr>
-              <a:lnSpc>
-                <a:spcPts val="1200"/>
-              </a:lnSpc>
-              <a:spcBef>
-                <a:spcPts val="0"/>
-              </a:spcBef>
-              <a:spcAft>
-                <a:spcPts val="0"/>
-              </a:spcAft>
-              <a:defRPr sz="800" b="0" lang="ja-JP">
+            <a:pPr algn="l">
+              <a:lnSpc>
+                <a:spcPts val="1400"/>
+              </a:lnSpc>
+              <a:spcBef>
+                <a:spcPts val="0"/>
+              </a:spcBef>
+              <a:spcAft>
+                <a:spcPts val="0"/>
+              </a:spcAft>
+            </a:pPr>
+            <a:r>
+              <a:rPr sz="800" b="0" lang="ja-JP">
                 <a:solidFill>
                   <a:srgbClr val="626669"/>
                 </a:solidFill>
                 <a:latin typeface="Noto Sans"/>
                 <a:ea typeface="Noto Sans CJK JP"/>
                 <a:cs typeface="Noto Sans"/>
-              </a:defRPr>
+              </a:rPr>
+              <a:t/>
+            </a:r>
+            <a:r>
+              <a:rPr sz="800" lang="ja-JP">
+                <a:solidFill>
+                  <a:srgbClr val="626669"/>
+                </a:solidFill>
+                <a:latin typeface="Noto Sans"/>
+                <a:ea typeface="Noto Sans CJK JP"/>
+                <a:cs typeface="Noto Sans"/>
+              </a:rPr>
+              <a:t>[1] Tsung-Yi Lin et al. (2014). European Conference on Computer Vision (ECCV), pp. 740–755. Microsoft COCO: Common Objects in Context.</a:t>
+            </a:r>
+          </a:p>
+        </p:txBody>
+      </p:sp>
+      <p:sp>
+        <p:nvSpPr>
+          <p:cNvPr id="6" name="TextBox 5"/>
+          <p:cNvSpPr txBox="1"/>
+          <p:nvPr/>
+        </p:nvSpPr>
+        <p:spPr>
+          <a:xfrm>
+            <a:off x="502920" y="4699000"/>
+            <a:ext cx="8183879" cy="177800"/>
+          </a:xfrm>
+          <a:prstGeom prst="rect">
+            <a:avLst/>
+          </a:prstGeom>
+          <a:noFill/>
+        </p:spPr>
+        <p:txBody>
+          <a:bodyPr wrap="square" lIns="0" rIns="0" tIns="0" bIns="0">
+            <a:spAutoFit/>
+          </a:bodyPr>
+          <a:lstStyle/>
+          <a:p>
+            <a:pPr algn="l">
+              <a:lnSpc>
+                <a:spcPts val="1400"/>
+              </a:lnSpc>
+              <a:spcBef>
+                <a:spcPts val="0"/>
+              </a:spcBef>
+              <a:spcAft>
+                <a:spcPts val="0"/>
+              </a:spcAft>
             </a:pPr>
             <a:r>
               <a:rPr sz="800" b="0" lang="ja-JP">
@@ -32797,8 +33671,56 @@
                 <a:ea typeface="Noto Sans CJK JP"/>
                 <a:cs typeface="Noto Sans"/>
               </a:rPr>
-              <a:t>[1] </a:t>
-            </a:r>
+              <a:t/>
+            </a:r>
+            <a:r>
+              <a:rPr sz="800" lang="ja-JP">
+                <a:solidFill>
+                  <a:srgbClr val="626669"/>
+                </a:solidFill>
+                <a:latin typeface="Noto Sans"/>
+                <a:ea typeface="Noto Sans CJK JP"/>
+                <a:cs typeface="Noto Sans"/>
+                <a:hlinkClick r:id="rId2"/>
+              </a:rPr>
+              <a:t>https://arxiv.org/abs/1405.0312</a:t>
+            </a:r>
+          </a:p>
+        </p:txBody>
+      </p:sp>
+      <p:sp>
+        <p:nvSpPr>
+          <p:cNvPr id="7" name="TextBox 6"/>
+          <p:cNvSpPr txBox="1"/>
+          <p:nvPr/>
+        </p:nvSpPr>
+        <p:spPr>
+          <a:xfrm>
+            <a:off x="502920" y="4876800"/>
+            <a:ext cx="8183879" cy="177800"/>
+          </a:xfrm>
+          <a:prstGeom prst="rect">
+            <a:avLst/>
+          </a:prstGeom>
+          <a:noFill/>
+        </p:spPr>
+        <p:txBody>
+          <a:bodyPr wrap="square" lIns="0" rIns="0" tIns="0" bIns="0">
+            <a:spAutoFit/>
+          </a:bodyPr>
+          <a:lstStyle/>
+          <a:p>
+            <a:pPr algn="l">
+              <a:lnSpc>
+                <a:spcPts val="1400"/>
+              </a:lnSpc>
+              <a:spcBef>
+                <a:spcPts val="0"/>
+              </a:spcBef>
+              <a:spcAft>
+                <a:spcPts val="0"/>
+              </a:spcAft>
+            </a:pPr>
             <a:r>
               <a:rPr sz="800" b="0" lang="ja-JP">
                 <a:solidFill>
@@ -32807,33 +33729,11 @@
                 <a:latin typeface="Noto Sans"/>
                 <a:ea typeface="Noto Sans CJK JP"/>
                 <a:cs typeface="Noto Sans"/>
-                <a:hlinkClick r:id="rId2"/>
-              </a:rPr>
-              <a:t>https://arxiv.org/abs/1405.0312</a:t>
-            </a:r>
-          </a:p>
-          <a:p>
-            <a:pPr>
-              <a:lnSpc>
-                <a:spcPts val="1200"/>
-              </a:lnSpc>
-              <a:spcBef>
-                <a:spcPts val="0"/>
-              </a:spcBef>
-              <a:spcAft>
-                <a:spcPts val="0"/>
-              </a:spcAft>
-              <a:defRPr sz="800" b="0" lang="ja-JP">
-                <a:solidFill>
-                  <a:srgbClr val="626669"/>
-                </a:solidFill>
-                <a:latin typeface="Noto Sans"/>
-                <a:ea typeface="Noto Sans CJK JP"/>
-                <a:cs typeface="Noto Sans"/>
-              </a:defRPr>
-            </a:pPr>
-            <a:r>
-              <a:rPr sz="800" b="0" lang="ja-JP">
+              </a:rPr>
+              <a:t/>
+            </a:r>
+            <a:r>
+              <a:rPr sz="800" lang="ja-JP">
                 <a:solidFill>
                   <a:srgbClr val="626669"/>
                 </a:solidFill>
@@ -32881,12 +33781,12 @@
           </a:xfrm>
         </p:spPr>
         <p:txBody>
-          <a:bodyPr wrap="square" anchor="t" lIns="0" rIns="0" tIns="0" bIns="0"/>
+          <a:bodyPr wrap="none" anchor="t" lIns="0" rIns="0" tIns="0" bIns="0"/>
           <a:lstStyle/>
           <a:p>
             <a:pPr algn="l">
               <a:lnSpc>
-                <a:spcPct val="115000"/>
+                <a:spcPct val="100000"/>
               </a:lnSpc>
               <a:spcBef>
                 <a:spcPts val="0"/>
@@ -32905,7 +33805,7 @@
               </a:defRPr>
             </a:pPr>
             <a:r>
-              <a:rPr lang="ja-JP" sz="2800" b="1">
+              <a:rPr sz="2800" b="1" lang="ja-JP">
                 <a:solidFill>
                   <a:srgbClr val="303437"/>
                 </a:solidFill>
@@ -32967,7 +33867,7 @@
                 <a:ea typeface="Noto Sans CJK JP"/>
                 <a:cs typeface="Noto Sans"/>
               </a:rPr>
-              <a:t>Appendix 1 定義・著者・評価の詳細</a:t>
+              <a:t>Appendix 1 開発者の研究と領域認識の評価仕様</a:t>
             </a:r>
           </a:p>
         </p:txBody>
@@ -33043,11 +33943,13 @@
                       <a:solidFill>
                         <a:srgbClr val="626669"/>
                       </a:solidFill>
+                      <a:prstDash val="solid"/>
                     </a:lnT>
                     <a:lnB w="10160">
                       <a:solidFill>
                         <a:srgbClr val="626669"/>
                       </a:solidFill>
+                      <a:prstDash val="solid"/>
                     </a:lnB>
                     <a:solidFill>
                       <a:srgbClr val="FFFEF8"/>
@@ -33103,11 +34005,13 @@
                       <a:solidFill>
                         <a:srgbClr val="626669"/>
                       </a:solidFill>
+                      <a:prstDash val="solid"/>
                     </a:lnT>
                     <a:lnB w="10160">
                       <a:solidFill>
                         <a:srgbClr val="626669"/>
                       </a:solidFill>
+                      <a:prstDash val="solid"/>
                     </a:lnB>
                     <a:solidFill>
                       <a:srgbClr val="FFFEF8"/>
@@ -33163,11 +34067,13 @@
                       <a:solidFill>
                         <a:srgbClr val="626669"/>
                       </a:solidFill>
+                      <a:prstDash val="solid"/>
                     </a:lnT>
                     <a:lnB w="10160">
                       <a:solidFill>
                         <a:srgbClr val="626669"/>
                       </a:solidFill>
+                      <a:prstDash val="solid"/>
                     </a:lnB>
                     <a:solidFill>
                       <a:srgbClr val="FFFEF8"/>
@@ -33221,8 +34127,11 @@
                     <a:lnR w="0">
                       <a:noFill/>
                     </a:lnR>
-                    <a:lnT w="0">
-                      <a:noFill/>
+                    <a:lnT w="10160">
+                      <a:solidFill>
+                        <a:srgbClr val="626669"/>
+                      </a:solidFill>
+                      <a:prstDash val="solid"/>
                     </a:lnT>
                     <a:lnB w="0">
                       <a:noFill/>
@@ -33277,8 +34186,11 @@
                     <a:lnR w="0">
                       <a:noFill/>
                     </a:lnR>
-                    <a:lnT w="0">
-                      <a:noFill/>
+                    <a:lnT w="10160">
+                      <a:solidFill>
+                        <a:srgbClr val="626669"/>
+                      </a:solidFill>
+                      <a:prstDash val="solid"/>
                     </a:lnT>
                     <a:lnB w="0">
                       <a:noFill/>
@@ -33333,8 +34245,11 @@
                     <a:lnR w="0">
                       <a:noFill/>
                     </a:lnR>
-                    <a:lnT w="0">
-                      <a:noFill/>
+                    <a:lnT w="10160">
+                      <a:solidFill>
+                        <a:srgbClr val="626669"/>
+                      </a:solidFill>
+                      <a:prstDash val="solid"/>
                     </a:lnT>
                     <a:lnB w="0">
                       <a:noFill/>
@@ -33738,6 +34653,7 @@
                       <a:solidFill>
                         <a:srgbClr val="626669"/>
                       </a:solidFill>
+                      <a:prstDash val="solid"/>
                     </a:lnB>
                     <a:solidFill>
                       <a:srgbClr val="FFFEF8"/>
@@ -33796,6 +34712,7 @@
                       <a:solidFill>
                         <a:srgbClr val="626669"/>
                       </a:solidFill>
+                      <a:prstDash val="solid"/>
                     </a:lnB>
                     <a:solidFill>
                       <a:srgbClr val="FFFEF8"/>
@@ -33854,6 +34771,7 @@
                       <a:solidFill>
                         <a:srgbClr val="626669"/>
                       </a:solidFill>
+                      <a:prstDash val="solid"/>
                     </a:lnB>
                     <a:solidFill>
                       <a:srgbClr val="FFFEF8"/>
@@ -34067,12 +34985,12 @@
           </a:xfrm>
         </p:spPr>
         <p:txBody>
-          <a:bodyPr wrap="square" anchor="t" lIns="0" rIns="0" tIns="0" bIns="0"/>
+          <a:bodyPr wrap="none" anchor="t" lIns="0" rIns="0" tIns="0" bIns="0"/>
           <a:lstStyle/>
           <a:p>
             <a:pPr algn="l">
               <a:lnSpc>
-                <a:spcPct val="115000"/>
+                <a:spcPct val="100000"/>
               </a:lnSpc>
               <a:spcBef>
                 <a:spcPts val="0"/>
@@ -34091,7 +35009,7 @@
               </a:defRPr>
             </a:pPr>
             <a:r>
-              <a:rPr lang="ja-JP" sz="2800" b="1">
+              <a:rPr sz="2800" b="1" lang="ja-JP">
                 <a:solidFill>
                   <a:srgbClr val="303437"/>
                 </a:solidFill>
@@ -34279,7 +35197,7 @@
                 <a:ea typeface="Noto Sans CJK JP"/>
                 <a:cs typeface="Noto Sans"/>
               </a:rPr>
-              <a:t>Appendix 1 定義・著者・評価の詳細</a:t>
+              <a:t>Appendix 1 開発者の研究と領域認識の評価仕様</a:t>
             </a:r>
           </a:p>
         </p:txBody>
@@ -34412,12 +35330,26 @@
             <p:ph type="title"/>
           </p:nvPr>
         </p:nvSpPr>
-        <p:spPr/>
-        <p:txBody>
-          <a:bodyPr/>
-          <a:lstStyle/>
-          <a:p>
-            <a:pPr>
+        <p:spPr>
+          <a:xfrm>
+            <a:off x="468172" y="650138"/>
+            <a:ext cx="8206740" cy="616305"/>
+          </a:xfrm>
+        </p:spPr>
+        <p:txBody>
+          <a:bodyPr wrap="none" lIns="0" rIns="0" tIns="0" bIns="0"/>
+          <a:lstStyle/>
+          <a:p>
+            <a:pPr algn="l">
+              <a:lnSpc>
+                <a:spcPct val="100000"/>
+              </a:lnSpc>
+              <a:spcBef>
+                <a:spcPts val="0"/>
+              </a:spcBef>
+              <a:spcAft>
+                <a:spcPts val="0"/>
+              </a:spcAft>
               <a:defRPr sz="2800" b="1" lang="ja-JP">
                 <a:solidFill>
                   <a:srgbClr val="303437"/>
@@ -34436,7 +35368,7 @@
                 <a:ea typeface="Noto Sans CJK JP"/>
                 <a:cs typeface="Noto Sans"/>
               </a:rPr>
-              <a:t>位置・個体領域・画素カテゴリを分けて考える</a:t>
+              <a:t>認識課題ごとの予測対象と出力単位</a:t>
             </a:r>
           </a:p>
         </p:txBody>
@@ -34453,123 +35385,30 @@
         </p:nvSpPr>
         <p:spPr/>
         <p:txBody>
-          <a:bodyPr/>
-          <a:lstStyle/>
-          <a:p>
-            <a:pPr/>
-            <a:r>
-              <a:t>1 認識課題と実画像</a:t>
-            </a:r>
-          </a:p>
-        </p:txBody>
-      </p:sp>
-      <p:sp>
-        <p:nvSpPr>
-          <p:cNvPr id="4" name="sources"/>
-          <p:cNvSpPr txBox="1"/>
-          <p:nvPr/>
-        </p:nvSpPr>
-        <p:spPr>
-          <a:xfrm>
-            <a:off x="502920" y="4787900"/>
-            <a:ext cx="8183879" cy="640080"/>
-          </a:xfrm>
-          <a:prstGeom prst="rect">
-            <a:avLst/>
-          </a:prstGeom>
-          <a:noFill/>
-        </p:spPr>
-        <p:txBody>
-          <a:bodyPr wrap="square" lIns="0" rIns="0" tIns="0" bIns="0">
-            <a:spAutoFit/>
-          </a:bodyPr>
+          <a:bodyPr anchor="ctr" tIns="0" bIns="0"/>
           <a:lstStyle/>
           <a:p>
             <a:pPr>
               <a:lnSpc>
-                <a:spcPts val="1200"/>
-              </a:lnSpc>
-              <a:spcBef>
-                <a:spcPts val="0"/>
-              </a:spcBef>
-              <a:spcAft>
-                <a:spcPts val="0"/>
-              </a:spcAft>
-              <a:defRPr sz="800" b="0" lang="ja-JP">
-                <a:solidFill>
-                  <a:srgbClr val="626669"/>
-                </a:solidFill>
-                <a:latin typeface="Noto Sans"/>
-                <a:ea typeface="Noto Sans CJK JP"/>
-                <a:cs typeface="Noto Sans"/>
-              </a:defRPr>
-            </a:pPr>
-            <a:r>
-              <a:rPr sz="800" b="0" lang="ja-JP">
-                <a:solidFill>
-                  <a:srgbClr val="626669"/>
-                </a:solidFill>
-                <a:latin typeface="Noto Sans"/>
-                <a:ea typeface="Noto Sans CJK JP"/>
-                <a:cs typeface="Noto Sans"/>
-              </a:rPr>
-              <a:t>[1] </a:t>
-            </a:r>
-            <a:r>
-              <a:rPr sz="800" b="0" lang="ja-JP">
-                <a:solidFill>
-                  <a:srgbClr val="626669"/>
-                </a:solidFill>
-                <a:latin typeface="Noto Sans"/>
-                <a:ea typeface="Noto Sans CJK JP"/>
-                <a:cs typeface="Noto Sans"/>
-                <a:hlinkClick r:id="rId2"/>
-              </a:rPr>
-              <a:t>https://cocodataset.org/#format-data</a:t>
-            </a:r>
-          </a:p>
-          <a:p>
-            <a:pPr>
-              <a:lnSpc>
-                <a:spcPts val="1200"/>
-              </a:lnSpc>
-              <a:spcBef>
-                <a:spcPts val="0"/>
-              </a:spcBef>
-              <a:spcAft>
-                <a:spcPts val="0"/>
-              </a:spcAft>
-              <a:defRPr sz="800" b="0" lang="ja-JP">
-                <a:solidFill>
-                  <a:srgbClr val="626669"/>
-                </a:solidFill>
-                <a:latin typeface="Noto Sans"/>
-                <a:ea typeface="Noto Sans CJK JP"/>
-                <a:cs typeface="Noto Sans"/>
-              </a:defRPr>
-            </a:pPr>
-            <a:r>
-              <a:rPr sz="800" b="0" lang="ja-JP">
-                <a:solidFill>
-                  <a:srgbClr val="626669"/>
-                </a:solidFill>
-                <a:latin typeface="Noto Sans"/>
-                <a:ea typeface="Noto Sans CJK JP"/>
-                <a:cs typeface="Noto Sans"/>
-              </a:rPr>
-              <a:t>[2] </a:t>
-            </a:r>
-            <a:r>
-              <a:rPr sz="800" b="0" lang="ja-JP">
-                <a:solidFill>
-                  <a:srgbClr val="626669"/>
-                </a:solidFill>
-                <a:latin typeface="Noto Sans"/>
-                <a:ea typeface="Noto Sans CJK JP"/>
-                <a:cs typeface="Noto Sans"/>
-                <a:hlinkClick r:id="rId3"/>
-              </a:rPr>
-              <a:t>https://arxiv.org/abs/1801.00868</a:t>
+                <a:spcPct val="100000"/>
+              </a:lnSpc>
+              <a:spcBef>
+                <a:spcPts val="0"/>
+              </a:spcBef>
+              <a:spcAft>
+                <a:spcPts val="0"/>
+              </a:spcAft>
+            </a:pPr>
+            <a:r>
+              <a:rPr sz="1400" b="1" lang="ja-JP">
+                <a:solidFill>
+                  <a:srgbClr val="FFFEF8"/>
+                </a:solidFill>
+                <a:latin typeface="Noto Sans"/>
+                <a:ea typeface="Noto Sans CJK JP"/>
+                <a:cs typeface="Noto Sans"/>
+              </a:rPr>
+              <a:t>1 COCOの認識課題と領域注釈の実例</a:t>
             </a:r>
           </a:p>
         </p:txBody>
@@ -34637,11 +35476,13 @@
                       <a:solidFill>
                         <a:srgbClr val="626669"/>
                       </a:solidFill>
+                      <a:prstDash val="solid"/>
                     </a:lnT>
                     <a:lnB w="10160">
                       <a:solidFill>
                         <a:srgbClr val="626669"/>
                       </a:solidFill>
+                      <a:prstDash val="solid"/>
                     </a:lnB>
                     <a:solidFill>
                       <a:srgbClr val="FFFEF8"/>
@@ -34690,11 +35531,13 @@
                       <a:solidFill>
                         <a:srgbClr val="626669"/>
                       </a:solidFill>
+                      <a:prstDash val="solid"/>
                     </a:lnT>
                     <a:lnB w="10160">
                       <a:solidFill>
                         <a:srgbClr val="626669"/>
                       </a:solidFill>
+                      <a:prstDash val="solid"/>
                     </a:lnB>
                     <a:solidFill>
                       <a:srgbClr val="FFFEF8"/>
@@ -34741,8 +35584,11 @@
                     <a:lnR w="0">
                       <a:noFill/>
                     </a:lnR>
-                    <a:lnT w="0">
-                      <a:noFill/>
+                    <a:lnT w="10160">
+                      <a:solidFill>
+                        <a:srgbClr val="626669"/>
+                      </a:solidFill>
+                      <a:prstDash val="solid"/>
                     </a:lnT>
                     <a:lnB w="0">
                       <a:noFill/>
@@ -34790,8 +35636,11 @@
                     <a:lnR w="0">
                       <a:noFill/>
                     </a:lnR>
-                    <a:lnT w="0">
-                      <a:noFill/>
+                    <a:lnT w="10160">
+                      <a:solidFill>
+                        <a:srgbClr val="626669"/>
+                      </a:solidFill>
+                      <a:prstDash val="solid"/>
                     </a:lnT>
                     <a:lnB w="0">
                       <a:noFill/>
@@ -35048,6 +35897,7 @@
                       <a:solidFill>
                         <a:srgbClr val="626669"/>
                       </a:solidFill>
+                      <a:prstDash val="solid"/>
                     </a:lnB>
                     <a:solidFill>
                       <a:srgbClr val="FFFEF8"/>
@@ -35099,6 +35949,7 @@
                       <a:solidFill>
                         <a:srgbClr val="626669"/>
                       </a:solidFill>
+                      <a:prstDash val="solid"/>
                     </a:lnB>
                     <a:solidFill>
                       <a:srgbClr val="FFFEF8"/>
@@ -35162,6 +36013,123 @@
                 <a:cs typeface="Noto Sans"/>
               </a:rPr>
               <a:t>検出は位置を矩形で示す。分割は画素単位で領域を示し、個体を区別するか、背景まで含めるかが異なる。</a:t>
+            </a:r>
+          </a:p>
+        </p:txBody>
+      </p:sp>
+      <p:sp>
+        <p:nvSpPr>
+          <p:cNvPr id="7" name="TextBox 6"/>
+          <p:cNvSpPr txBox="1"/>
+          <p:nvPr/>
+        </p:nvSpPr>
+        <p:spPr>
+          <a:xfrm>
+            <a:off x="502920" y="4699000"/>
+            <a:ext cx="8183879" cy="177800"/>
+          </a:xfrm>
+          <a:prstGeom prst="rect">
+            <a:avLst/>
+          </a:prstGeom>
+          <a:noFill/>
+        </p:spPr>
+        <p:txBody>
+          <a:bodyPr wrap="square" lIns="0" rIns="0" tIns="0" bIns="0">
+            <a:spAutoFit/>
+          </a:bodyPr>
+          <a:lstStyle/>
+          <a:p>
+            <a:pPr algn="l">
+              <a:lnSpc>
+                <a:spcPts val="1400"/>
+              </a:lnSpc>
+              <a:spcBef>
+                <a:spcPts val="0"/>
+              </a:spcBef>
+              <a:spcAft>
+                <a:spcPts val="0"/>
+              </a:spcAft>
+            </a:pPr>
+            <a:r>
+              <a:rPr sz="800" b="0" lang="ja-JP">
+                <a:solidFill>
+                  <a:srgbClr val="626669"/>
+                </a:solidFill>
+                <a:latin typeface="Noto Sans"/>
+                <a:ea typeface="Noto Sans CJK JP"/>
+                <a:cs typeface="Noto Sans"/>
+              </a:rPr>
+              <a:t/>
+            </a:r>
+            <a:r>
+              <a:rPr sz="800" lang="ja-JP">
+                <a:solidFill>
+                  <a:srgbClr val="626669"/>
+                </a:solidFill>
+                <a:latin typeface="Noto Sans"/>
+                <a:ea typeface="Noto Sans CJK JP"/>
+                <a:cs typeface="Noto Sans"/>
+              </a:rPr>
+              <a:t>[1] Alexander Kirillov et al. (2019). IEEE/CVF Conference on Computer Vision and Pattern Recognition (CVPR), pp. 9404–9413. Panoptic Segmentation.</a:t>
+            </a:r>
+          </a:p>
+        </p:txBody>
+      </p:sp>
+      <p:sp>
+        <p:nvSpPr>
+          <p:cNvPr id="8" name="TextBox 7"/>
+          <p:cNvSpPr txBox="1"/>
+          <p:nvPr/>
+        </p:nvSpPr>
+        <p:spPr>
+          <a:xfrm>
+            <a:off x="502920" y="4876800"/>
+            <a:ext cx="8183879" cy="177800"/>
+          </a:xfrm>
+          <a:prstGeom prst="rect">
+            <a:avLst/>
+          </a:prstGeom>
+          <a:noFill/>
+        </p:spPr>
+        <p:txBody>
+          <a:bodyPr wrap="square" lIns="0" rIns="0" tIns="0" bIns="0">
+            <a:spAutoFit/>
+          </a:bodyPr>
+          <a:lstStyle/>
+          <a:p>
+            <a:pPr algn="l">
+              <a:lnSpc>
+                <a:spcPts val="1400"/>
+              </a:lnSpc>
+              <a:spcBef>
+                <a:spcPts val="0"/>
+              </a:spcBef>
+              <a:spcAft>
+                <a:spcPts val="0"/>
+              </a:spcAft>
+            </a:pPr>
+            <a:r>
+              <a:rPr sz="800" b="0" lang="ja-JP">
+                <a:solidFill>
+                  <a:srgbClr val="626669"/>
+                </a:solidFill>
+                <a:latin typeface="Noto Sans"/>
+                <a:ea typeface="Noto Sans CJK JP"/>
+                <a:cs typeface="Noto Sans"/>
+              </a:rPr>
+              <a:t/>
+            </a:r>
+            <a:r>
+              <a:rPr sz="800" lang="ja-JP">
+                <a:solidFill>
+                  <a:srgbClr val="626669"/>
+                </a:solidFill>
+                <a:latin typeface="Noto Sans"/>
+                <a:ea typeface="Noto Sans CJK JP"/>
+                <a:cs typeface="Noto Sans"/>
+                <a:hlinkClick r:id="rId3"/>
+              </a:rPr>
+              <a:t>https://arxiv.org/abs/1801.00868</a:t>
             </a:r>
           </a:p>
         </p:txBody>
@@ -35201,12 +36169,12 @@
           </a:xfrm>
         </p:spPr>
         <p:txBody>
-          <a:bodyPr wrap="square" anchor="t" lIns="0" rIns="0" tIns="0" bIns="0"/>
+          <a:bodyPr wrap="none" anchor="t" lIns="0" rIns="0" tIns="0" bIns="0"/>
           <a:lstStyle/>
           <a:p>
             <a:pPr algn="l">
               <a:lnSpc>
-                <a:spcPct val="115000"/>
+                <a:spcPct val="100000"/>
               </a:lnSpc>
               <a:spcBef>
                 <a:spcPts val="0"/>
@@ -35225,7 +36193,7 @@
               </a:defRPr>
             </a:pPr>
             <a:r>
-              <a:rPr lang="ja-JP" sz="2800" b="1">
+              <a:rPr sz="2800" b="1" lang="ja-JP">
                 <a:solidFill>
                   <a:srgbClr val="303437"/>
                 </a:solidFill>
@@ -35413,7 +36381,7 @@
                 <a:ea typeface="Noto Sans CJK JP"/>
                 <a:cs typeface="Noto Sans"/>
               </a:rPr>
-              <a:t>Appendix 1 定義・著者・評価の詳細</a:t>
+              <a:t>Appendix 1 開発者の研究と領域認識の評価仕様</a:t>
             </a:r>
           </a:p>
         </p:txBody>
@@ -35515,17 +36483,17 @@
         </p:nvSpPr>
         <p:spPr>
           <a:xfrm>
-            <a:off x="468172" y="650138"/>
-            <a:ext cx="8206740" cy="616305"/>
+            <a:off x="468172" y="1306154"/>
+            <a:ext cx="8206740" cy="594360"/>
           </a:xfrm>
         </p:spPr>
         <p:txBody>
           <a:bodyPr wrap="square" anchor="t" lIns="0" rIns="0" tIns="0" bIns="0"/>
           <a:lstStyle/>
           <a:p>
-            <a:pPr algn="l">
-              <a:lnSpc>
-                <a:spcPct val="115000"/>
+            <a:pPr algn="ctr">
+              <a:lnSpc>
+                <a:spcPct val="100000"/>
               </a:lnSpc>
               <a:spcBef>
                 <a:spcPts val="0"/>
@@ -35544,15 +36512,15 @@
               </a:defRPr>
             </a:pPr>
             <a:r>
-              <a:rPr lang="ja-JP" sz="2800" b="1">
-                <a:solidFill>
-                  <a:srgbClr val="303437"/>
-                </a:solidFill>
-                <a:latin typeface="Noto Sans"/>
-                <a:ea typeface="Noto Sans CJK JP"/>
-                <a:cs typeface="Noto Sans"/>
-              </a:rPr>
-              <a:t>ここからは公開128画像の部分集合を見る</a:t>
+              <a:rPr sz="3000" b="1" lang="ja-JP">
+                <a:solidFill>
+                  <a:srgbClr val="303437"/>
+                </a:solidFill>
+                <a:latin typeface="Noto Sans"/>
+                <a:ea typeface="Noto Sans CJK JP"/>
+                <a:cs typeface="Noto Sans"/>
+              </a:rPr>
+              <a:t>注釈数の分析対象とする128画像の部分集合</a:t>
             </a:r>
           </a:p>
         </p:txBody>
@@ -35569,27 +36537,25 @@
         </p:nvSpPr>
         <p:spPr>
           <a:xfrm>
-            <a:off x="594360" y="1508760"/>
-            <a:ext cx="7955279" cy="3017520"/>
-          </a:xfrm>
-        </p:spPr>
-        <p:txBody>
-          <a:bodyPr wrap="square" anchor="t" tIns="91440" bIns="91440"/>
-          <a:lstStyle/>
-          <a:p>
-            <a:pPr algn="l" lvl="0" marL="457200" indent="-355600">
-              <a:lnSpc>
-                <a:spcPct val="115000"/>
-              </a:lnSpc>
-              <a:spcBef>
-                <a:spcPts val="0"/>
-              </a:spcBef>
-              <a:spcAft>
-                <a:spcPts val="800"/>
-              </a:spcAft>
-              <a:buSzPct val="55417"/>
-              <a:buFont typeface="Noto Sans CJK JP"/>
-              <a:buChar char="●"/>
+            <a:off x="594360" y="2220554"/>
+            <a:ext cx="7955279" cy="1737360"/>
+          </a:xfrm>
+        </p:spPr>
+        <p:txBody>
+          <a:bodyPr wrap="square" anchor="t" tIns="0" bIns="0" lIns="0" rIns="0"/>
+          <a:lstStyle/>
+          <a:p>
+            <a:pPr algn="ctr" lvl="0" marL="0" indent="0">
+              <a:lnSpc>
+                <a:spcPct val="100000"/>
+              </a:lnSpc>
+              <a:spcBef>
+                <a:spcPts val="0"/>
+              </a:spcBef>
+              <a:spcAft>
+                <a:spcPts val="1200"/>
+              </a:spcAft>
+              <a:buNone/>
               <a:defRPr lang="ja-JP" sz="2400" b="0">
                 <a:solidFill>
                   <a:srgbClr val="303437"/>
@@ -35600,7 +36566,7 @@
               </a:defRPr>
             </a:pPr>
             <a:r>
-              <a:rPr lang="ja-JP" sz="2400" b="0">
+              <a:rPr sz="2000" b="0" lang="ja-JP">
                 <a:solidFill>
                   <a:srgbClr val="303437"/>
                 </a:solidFill>
@@ -35612,30 +36578,20 @@
             </a:r>
           </a:p>
           <a:p>
-            <a:pPr algn="l" lvl="0" marL="457200" indent="-355600">
-              <a:lnSpc>
-                <a:spcPct val="115000"/>
-              </a:lnSpc>
-              <a:spcBef>
-                <a:spcPts val="0"/>
-              </a:spcBef>
-              <a:spcAft>
-                <a:spcPts val="800"/>
-              </a:spcAft>
-              <a:buSzPct val="55417"/>
-              <a:buFont typeface="Noto Sans CJK JP"/>
-              <a:buChar char="●"/>
-              <a:defRPr lang="ja-JP" sz="2400" b="0">
-                <a:solidFill>
-                  <a:srgbClr val="303437"/>
-                </a:solidFill>
-                <a:latin typeface="Noto Sans"/>
-                <a:ea typeface="Noto Sans CJK JP"/>
-                <a:cs typeface="Noto Sans"/>
-              </a:defRPr>
-            </a:pPr>
-            <a:r>
-              <a:rPr lang="ja-JP" sz="2400" b="0">
+            <a:pPr algn="ctr" marL="0" indent="0">
+              <a:lnSpc>
+                <a:spcPct val="100000"/>
+              </a:lnSpc>
+              <a:spcBef>
+                <a:spcPts val="0"/>
+              </a:spcBef>
+              <a:spcAft>
+                <a:spcPts val="1200"/>
+              </a:spcAft>
+              <a:buNone/>
+            </a:pPr>
+            <a:r>
+              <a:rPr sz="2000" b="0" lang="ja-JP">
                 <a:solidFill>
                   <a:srgbClr val="303437"/>
                 </a:solidFill>
@@ -35647,30 +36603,20 @@
             </a:r>
           </a:p>
           <a:p>
-            <a:pPr algn="l" lvl="0" marL="457200" indent="-355600">
-              <a:lnSpc>
-                <a:spcPct val="115000"/>
-              </a:lnSpc>
-              <a:spcBef>
-                <a:spcPts val="0"/>
-              </a:spcBef>
-              <a:spcAft>
-                <a:spcPts val="800"/>
-              </a:spcAft>
-              <a:buSzPct val="55417"/>
-              <a:buFont typeface="Noto Sans CJK JP"/>
-              <a:buChar char="●"/>
-              <a:defRPr lang="ja-JP" sz="2400" b="0">
-                <a:solidFill>
-                  <a:srgbClr val="303437"/>
-                </a:solidFill>
-                <a:latin typeface="Noto Sans"/>
-                <a:ea typeface="Noto Sans CJK JP"/>
-                <a:cs typeface="Noto Sans"/>
-              </a:defRPr>
-            </a:pPr>
-            <a:r>
-              <a:rPr lang="ja-JP" sz="2400" b="0">
+            <a:pPr algn="ctr" marL="0" indent="0">
+              <a:lnSpc>
+                <a:spcPct val="100000"/>
+              </a:lnSpc>
+              <a:spcBef>
+                <a:spcPts val="0"/>
+              </a:spcBef>
+              <a:spcAft>
+                <a:spcPts val="1200"/>
+              </a:spcAft>
+              <a:buNone/>
+            </a:pPr>
+            <a:r>
+              <a:rPr sz="2000" b="0" lang="ja-JP">
                 <a:solidFill>
                   <a:srgbClr val="303437"/>
                 </a:solidFill>
@@ -35732,7 +36678,7 @@
                 <a:ea typeface="Noto Sans CJK JP"/>
                 <a:cs typeface="Noto Sans"/>
               </a:rPr>
-              <a:t>Appendix 2 128画像で見る注釈の分布</a:t>
+              <a:t>Appendix 2 128画像の部分集合における注釈数の分布</a:t>
             </a:r>
           </a:p>
         </p:txBody>
@@ -35839,12 +36785,12 @@
           </a:xfrm>
         </p:spPr>
         <p:txBody>
-          <a:bodyPr wrap="square" anchor="t" lIns="0" rIns="0" tIns="0" bIns="0"/>
+          <a:bodyPr wrap="none" anchor="t" lIns="0" rIns="0" tIns="0" bIns="0"/>
           <a:lstStyle/>
           <a:p>
             <a:pPr algn="l">
               <a:lnSpc>
-                <a:spcPct val="115000"/>
+                <a:spcPct val="100000"/>
               </a:lnSpc>
               <a:spcBef>
                 <a:spcPts val="0"/>
@@ -35863,7 +36809,7 @@
               </a:defRPr>
             </a:pPr>
             <a:r>
-              <a:rPr lang="ja-JP" sz="2800" b="1">
+              <a:rPr sz="2800" b="1" lang="ja-JP">
                 <a:solidFill>
                   <a:srgbClr val="303437"/>
                 </a:solidFill>
@@ -35925,7 +36871,7 @@
                 <a:ea typeface="Noto Sans CJK JP"/>
                 <a:cs typeface="Noto Sans"/>
               </a:rPr>
-              <a:t>Appendix 2 128画像で見る注釈の分布</a:t>
+              <a:t>Appendix 2 128画像の部分集合における注釈数の分布</a:t>
             </a:r>
           </a:p>
         </p:txBody>
@@ -36088,12 +37034,12 @@
           </a:xfrm>
         </p:spPr>
         <p:txBody>
-          <a:bodyPr wrap="square" anchor="t" lIns="0" rIns="0" tIns="0" bIns="0"/>
+          <a:bodyPr wrap="none" anchor="t" lIns="0" rIns="0" tIns="0" bIns="0"/>
           <a:lstStyle/>
           <a:p>
             <a:pPr algn="l">
               <a:lnSpc>
-                <a:spcPct val="115000"/>
+                <a:spcPct val="100000"/>
               </a:lnSpc>
               <a:spcBef>
                 <a:spcPts val="0"/>
@@ -36112,15 +37058,15 @@
               </a:defRPr>
             </a:pPr>
             <a:r>
-              <a:rPr lang="ja-JP" sz="2800" b="1">
-                <a:solidFill>
-                  <a:srgbClr val="303437"/>
-                </a:solidFill>
-                <a:latin typeface="Noto Sans"/>
-                <a:ea typeface="Noto Sans CJK JP"/>
-                <a:cs typeface="Noto Sans"/>
-              </a:rPr>
-              <a:t>128画像に含まれる929領域</a:t>
+              <a:rPr sz="2800" b="1" lang="ja-JP">
+                <a:solidFill>
+                  <a:srgbClr val="303437"/>
+                </a:solidFill>
+                <a:latin typeface="Noto Sans"/>
+                <a:ea typeface="Noto Sans CJK JP"/>
+                <a:cs typeface="Noto Sans"/>
+              </a:rPr>
+              <a:t>128画像の注釈領域数の記述統計</a:t>
             </a:r>
           </a:p>
         </p:txBody>
@@ -36174,7 +37120,7 @@
                 <a:ea typeface="Noto Sans CJK JP"/>
                 <a:cs typeface="Noto Sans"/>
               </a:rPr>
-              <a:t>Appendix 2 128画像で見る注釈の分布</a:t>
+              <a:t>Appendix 2 128画像の部分集合における注釈数の分布</a:t>
             </a:r>
           </a:p>
         </p:txBody>
@@ -36249,11 +37195,13 @@
                       <a:solidFill>
                         <a:srgbClr val="626669"/>
                       </a:solidFill>
+                      <a:prstDash val="solid"/>
                     </a:lnT>
                     <a:lnB w="10160">
                       <a:solidFill>
                         <a:srgbClr val="626669"/>
                       </a:solidFill>
+                      <a:prstDash val="solid"/>
                     </a:lnB>
                     <a:solidFill>
                       <a:srgbClr val="FFFEF8"/>
@@ -36309,11 +37257,13 @@
                       <a:solidFill>
                         <a:srgbClr val="626669"/>
                       </a:solidFill>
+                      <a:prstDash val="solid"/>
                     </a:lnT>
                     <a:lnB w="10160">
                       <a:solidFill>
                         <a:srgbClr val="626669"/>
                       </a:solidFill>
+                      <a:prstDash val="solid"/>
                     </a:lnB>
                     <a:solidFill>
                       <a:srgbClr val="FFFEF8"/>
@@ -36367,8 +37317,11 @@
                     <a:lnR w="0">
                       <a:noFill/>
                     </a:lnR>
-                    <a:lnT w="0">
-                      <a:noFill/>
+                    <a:lnT w="10160">
+                      <a:solidFill>
+                        <a:srgbClr val="626669"/>
+                      </a:solidFill>
+                      <a:prstDash val="solid"/>
                     </a:lnT>
                     <a:lnB w="0">
                       <a:noFill/>
@@ -36423,8 +37376,11 @@
                     <a:lnR w="0">
                       <a:noFill/>
                     </a:lnR>
-                    <a:lnT w="0">
-                      <a:noFill/>
+                    <a:lnT w="10160">
+                      <a:solidFill>
+                        <a:srgbClr val="626669"/>
+                      </a:solidFill>
+                      <a:prstDash val="solid"/>
                     </a:lnT>
                     <a:lnB w="0">
                       <a:noFill/>
@@ -36716,6 +37672,7 @@
                       <a:solidFill>
                         <a:srgbClr val="626669"/>
                       </a:solidFill>
+                      <a:prstDash val="solid"/>
                     </a:lnB>
                     <a:solidFill>
                       <a:srgbClr val="FFFEF8"/>
@@ -36774,6 +37731,7 @@
                       <a:solidFill>
                         <a:srgbClr val="626669"/>
                       </a:solidFill>
+                      <a:prstDash val="solid"/>
                     </a:lnB>
                     <a:solidFill>
                       <a:srgbClr val="FFFEF8"/>
@@ -36943,12 +37901,12 @@
           </a:xfrm>
         </p:spPr>
         <p:txBody>
-          <a:bodyPr wrap="square" anchor="t" lIns="0" rIns="0" tIns="0" bIns="0"/>
+          <a:bodyPr wrap="none" anchor="t" lIns="0" rIns="0" tIns="0" bIns="0"/>
           <a:lstStyle/>
           <a:p>
             <a:pPr algn="l">
               <a:lnSpc>
-                <a:spcPct val="115000"/>
+                <a:spcPct val="100000"/>
               </a:lnSpc>
               <a:spcBef>
                 <a:spcPts val="0"/>
@@ -36967,7 +37925,7 @@
               </a:defRPr>
             </a:pPr>
             <a:r>
-              <a:rPr lang="ja-JP" sz="2800" b="1">
+              <a:rPr sz="2800" b="1" lang="ja-JP">
                 <a:solidFill>
                   <a:srgbClr val="303437"/>
                 </a:solidFill>
@@ -37029,7 +37987,7 @@
                 <a:ea typeface="Noto Sans CJK JP"/>
                 <a:cs typeface="Noto Sans"/>
               </a:rPr>
-              <a:t>Appendix 2 128画像で見る注釈の分布</a:t>
+              <a:t>Appendix 2 128画像の部分集合における注釈数の分布</a:t>
             </a:r>
           </a:p>
         </p:txBody>
@@ -37192,12 +38150,12 @@
           </a:xfrm>
         </p:spPr>
         <p:txBody>
-          <a:bodyPr wrap="square" anchor="t" lIns="0" rIns="0" tIns="0" bIns="0"/>
+          <a:bodyPr wrap="none" anchor="t" lIns="0" rIns="0" tIns="0" bIns="0"/>
           <a:lstStyle/>
           <a:p>
             <a:pPr algn="l">
               <a:lnSpc>
-                <a:spcPct val="115000"/>
+                <a:spcPct val="100000"/>
               </a:lnSpc>
               <a:spcBef>
                 <a:spcPts val="0"/>
@@ -37216,7 +38174,7 @@
               </a:defRPr>
             </a:pPr>
             <a:r>
-              <a:rPr lang="ja-JP" sz="2800" b="1">
+              <a:rPr sz="2800" b="1" lang="ja-JP">
                 <a:solidFill>
                   <a:srgbClr val="303437"/>
                 </a:solidFill>
@@ -37278,7 +38236,7 @@
                 <a:ea typeface="Noto Sans CJK JP"/>
                 <a:cs typeface="Noto Sans"/>
               </a:rPr>
-              <a:t>Appendix 2 128画像で見る注釈の分布</a:t>
+              <a:t>Appendix 2 128画像の部分集合における注釈数の分布</a:t>
             </a:r>
           </a:p>
         </p:txBody>
@@ -37441,12 +38399,12 @@
           </a:xfrm>
         </p:spPr>
         <p:txBody>
-          <a:bodyPr wrap="square" anchor="t" lIns="0" rIns="0" tIns="0" bIns="0"/>
+          <a:bodyPr wrap="none" anchor="t" lIns="0" rIns="0" tIns="0" bIns="0"/>
           <a:lstStyle/>
           <a:p>
             <a:pPr algn="l">
               <a:lnSpc>
-                <a:spcPct val="115000"/>
+                <a:spcPct val="100000"/>
               </a:lnSpc>
               <a:spcBef>
                 <a:spcPts val="0"/>
@@ -37465,7 +38423,7 @@
               </a:defRPr>
             </a:pPr>
             <a:r>
-              <a:rPr lang="ja-JP" sz="2800" b="1">
+              <a:rPr sz="2800" b="1" lang="ja-JP">
                 <a:solidFill>
                   <a:srgbClr val="303437"/>
                 </a:solidFill>
@@ -37527,7 +38485,7 @@
                 <a:ea typeface="Noto Sans CJK JP"/>
                 <a:cs typeface="Noto Sans"/>
               </a:rPr>
-              <a:t>Appendix 3 追加の領域注釈例</a:t>
+              <a:t>Appendix 3 画像と物体領域の追加例</a:t>
             </a:r>
           </a:p>
         </p:txBody>
@@ -37690,12 +38648,12 @@
           </a:xfrm>
         </p:spPr>
         <p:txBody>
-          <a:bodyPr wrap="square" anchor="t" lIns="0" rIns="0" tIns="0" bIns="0"/>
+          <a:bodyPr wrap="none" anchor="t" lIns="0" rIns="0" tIns="0" bIns="0"/>
           <a:lstStyle/>
           <a:p>
             <a:pPr algn="l">
               <a:lnSpc>
-                <a:spcPct val="115000"/>
+                <a:spcPct val="100000"/>
               </a:lnSpc>
               <a:spcBef>
                 <a:spcPts val="0"/>
@@ -37714,7 +38672,7 @@
               </a:defRPr>
             </a:pPr>
             <a:r>
-              <a:rPr lang="ja-JP" sz="2800" b="1">
+              <a:rPr sz="2800" b="1" lang="ja-JP">
                 <a:solidFill>
                   <a:srgbClr val="303437"/>
                 </a:solidFill>
@@ -37776,7 +38734,7 @@
                 <a:ea typeface="Noto Sans CJK JP"/>
                 <a:cs typeface="Noto Sans"/>
               </a:rPr>
-              <a:t>Appendix 3 追加の領域注釈例</a:t>
+              <a:t>Appendix 3 画像と物体領域の追加例</a:t>
             </a:r>
           </a:p>
         </p:txBody>
@@ -37939,12 +38897,12 @@
           </a:xfrm>
         </p:spPr>
         <p:txBody>
-          <a:bodyPr wrap="square" anchor="t" lIns="0" rIns="0" tIns="0" bIns="0"/>
+          <a:bodyPr wrap="none" anchor="t" lIns="0" rIns="0" tIns="0" bIns="0"/>
           <a:lstStyle/>
           <a:p>
             <a:pPr algn="l">
               <a:lnSpc>
-                <a:spcPct val="115000"/>
+                <a:spcPct val="100000"/>
               </a:lnSpc>
               <a:spcBef>
                 <a:spcPts val="0"/>
@@ -37963,7 +38921,7 @@
               </a:defRPr>
             </a:pPr>
             <a:r>
-              <a:rPr lang="ja-JP" sz="2800" b="1">
+              <a:rPr sz="2800" b="1" lang="ja-JP">
                 <a:solidFill>
                   <a:srgbClr val="303437"/>
                 </a:solidFill>
@@ -38025,7 +38983,7 @@
                 <a:ea typeface="Noto Sans CJK JP"/>
                 <a:cs typeface="Noto Sans"/>
               </a:rPr>
-              <a:t>Appendix 3 追加の領域注釈例</a:t>
+              <a:t>Appendix 3 画像と物体領域の追加例</a:t>
             </a:r>
           </a:p>
         </p:txBody>
@@ -38345,12 +39303,12 @@
           </a:xfrm>
         </p:spPr>
         <p:txBody>
-          <a:bodyPr wrap="square" anchor="t" lIns="0" rIns="0" tIns="0" bIns="0"/>
+          <a:bodyPr wrap="none" anchor="t" lIns="0" rIns="0" tIns="0" bIns="0"/>
           <a:lstStyle/>
           <a:p>
             <a:pPr algn="l">
               <a:lnSpc>
-                <a:spcPct val="115000"/>
+                <a:spcPct val="100000"/>
               </a:lnSpc>
               <a:spcBef>
                 <a:spcPts val="0"/>
@@ -38369,7 +39327,7 @@
               </a:defRPr>
             </a:pPr>
             <a:r>
-              <a:rPr lang="ja-JP" sz="2800" b="1">
+              <a:rPr sz="2800" b="1" lang="ja-JP">
                 <a:solidFill>
                   <a:srgbClr val="303437"/>
                 </a:solidFill>
@@ -38431,7 +39389,7 @@
                 <a:ea typeface="Noto Sans CJK JP"/>
                 <a:cs typeface="Noto Sans"/>
               </a:rPr>
-              <a:t>Appendix 3 追加の領域注釈例</a:t>
+              <a:t>Appendix 3 画像と物体領域の追加例</a:t>
             </a:r>
           </a:p>
         </p:txBody>
@@ -38594,12 +39552,12 @@
           </a:xfrm>
         </p:spPr>
         <p:txBody>
-          <a:bodyPr wrap="square" anchor="t" lIns="0" rIns="0" tIns="0" bIns="0"/>
+          <a:bodyPr wrap="none" anchor="t" lIns="0" rIns="0" tIns="0" bIns="0"/>
           <a:lstStyle/>
           <a:p>
             <a:pPr algn="l">
               <a:lnSpc>
-                <a:spcPct val="115000"/>
+                <a:spcPct val="100000"/>
               </a:lnSpc>
               <a:spcBef>
                 <a:spcPts val="0"/>
@@ -38618,7 +39576,7 @@
               </a:defRPr>
             </a:pPr>
             <a:r>
-              <a:rPr lang="ja-JP" sz="2800" b="1">
+              <a:rPr sz="2800" b="1" lang="ja-JP">
                 <a:solidFill>
                   <a:srgbClr val="303437"/>
                 </a:solidFill>
@@ -38806,7 +39764,7 @@
                 <a:ea typeface="Noto Sans CJK JP"/>
                 <a:cs typeface="Noto Sans"/>
               </a:rPr>
-              <a:t>1 認識課題と実画像</a:t>
+              <a:t>1 COCOの認識課題と領域注釈の実例</a:t>
             </a:r>
           </a:p>
         </p:txBody>
@@ -38871,7 +39829,7 @@
                 <a:latin typeface="Noto Sans"/>
                 <a:ea typeface="Noto Sans CJK JP"/>
                 <a:cs typeface="Noto Sans"/>
-                <a:hlinkClick r:id="rId3"/>
+                <a:hlinkClick r:id="rId2"/>
               </a:rPr>
               <a:t>https://cocodataset.org/#format-data</a:t>
             </a:r>
@@ -38913,12 +39871,12 @@
           </a:xfrm>
         </p:spPr>
         <p:txBody>
-          <a:bodyPr wrap="square" anchor="t" lIns="0" rIns="0" tIns="0" bIns="0"/>
+          <a:bodyPr wrap="none" anchor="t" lIns="0" rIns="0" tIns="0" bIns="0"/>
           <a:lstStyle/>
           <a:p>
             <a:pPr algn="l">
               <a:lnSpc>
-                <a:spcPct val="115000"/>
+                <a:spcPct val="100000"/>
               </a:lnSpc>
               <a:spcBef>
                 <a:spcPts val="0"/>
@@ -38937,7 +39895,7 @@
               </a:defRPr>
             </a:pPr>
             <a:r>
-              <a:rPr lang="ja-JP" sz="2800" b="1">
+              <a:rPr sz="2800" b="1" lang="ja-JP">
                 <a:solidFill>
                   <a:srgbClr val="303437"/>
                 </a:solidFill>
@@ -38999,7 +39957,7 @@
                 <a:ea typeface="Noto Sans CJK JP"/>
                 <a:cs typeface="Noto Sans"/>
               </a:rPr>
-              <a:t>Appendix 3 追加の領域注釈例</a:t>
+              <a:t>Appendix 3 画像と物体領域の追加例</a:t>
             </a:r>
           </a:p>
         </p:txBody>
@@ -39162,12 +40120,12 @@
           </a:xfrm>
         </p:spPr>
         <p:txBody>
-          <a:bodyPr wrap="square" anchor="t" lIns="0" rIns="0" tIns="0" bIns="0"/>
+          <a:bodyPr wrap="none" anchor="t" lIns="0" rIns="0" tIns="0" bIns="0"/>
           <a:lstStyle/>
           <a:p>
             <a:pPr algn="l">
               <a:lnSpc>
-                <a:spcPct val="115000"/>
+                <a:spcPct val="100000"/>
               </a:lnSpc>
               <a:spcBef>
                 <a:spcPts val="0"/>
@@ -39186,7 +40144,7 @@
               </a:defRPr>
             </a:pPr>
             <a:r>
-              <a:rPr lang="ja-JP" sz="2800" b="1">
+              <a:rPr sz="2800" b="1" lang="ja-JP">
                 <a:solidFill>
                   <a:srgbClr val="303437"/>
                 </a:solidFill>
@@ -39248,7 +40206,7 @@
                 <a:ea typeface="Noto Sans CJK JP"/>
                 <a:cs typeface="Noto Sans"/>
               </a:rPr>
-              <a:t>Appendix 3 追加の領域注釈例</a:t>
+              <a:t>Appendix 3 画像と物体領域の追加例</a:t>
             </a:r>
           </a:p>
         </p:txBody>
@@ -39411,12 +40369,12 @@
           </a:xfrm>
         </p:spPr>
         <p:txBody>
-          <a:bodyPr wrap="square" anchor="t" lIns="0" rIns="0" tIns="0" bIns="0"/>
+          <a:bodyPr wrap="none" anchor="t" lIns="0" rIns="0" tIns="0" bIns="0"/>
           <a:lstStyle/>
           <a:p>
             <a:pPr algn="l">
               <a:lnSpc>
-                <a:spcPct val="115000"/>
+                <a:spcPct val="100000"/>
               </a:lnSpc>
               <a:spcBef>
                 <a:spcPts val="0"/>
@@ -39435,7 +40393,7 @@
               </a:defRPr>
             </a:pPr>
             <a:r>
-              <a:rPr lang="ja-JP" sz="2800" b="1">
+              <a:rPr sz="2800" b="1" lang="ja-JP">
                 <a:solidFill>
                   <a:srgbClr val="303437"/>
                 </a:solidFill>
@@ -39497,7 +40455,7 @@
                 <a:ea typeface="Noto Sans CJK JP"/>
                 <a:cs typeface="Noto Sans"/>
               </a:rPr>
-              <a:t>Appendix 3 追加の領域注釈例</a:t>
+              <a:t>Appendix 3 画像と物体領域の追加例</a:t>
             </a:r>
           </a:p>
         </p:txBody>
@@ -39660,12 +40618,12 @@
           </a:xfrm>
         </p:spPr>
         <p:txBody>
-          <a:bodyPr wrap="square" anchor="t" lIns="0" rIns="0" tIns="0" bIns="0"/>
+          <a:bodyPr wrap="none" anchor="t" lIns="0" rIns="0" tIns="0" bIns="0"/>
           <a:lstStyle/>
           <a:p>
             <a:pPr algn="l">
               <a:lnSpc>
-                <a:spcPct val="115000"/>
+                <a:spcPct val="100000"/>
               </a:lnSpc>
               <a:spcBef>
                 <a:spcPts val="0"/>
@@ -39684,7 +40642,7 @@
               </a:defRPr>
             </a:pPr>
             <a:r>
-              <a:rPr lang="ja-JP" sz="2800" b="1">
+              <a:rPr sz="2800" b="1" lang="ja-JP">
                 <a:solidFill>
                   <a:srgbClr val="303437"/>
                 </a:solidFill>
@@ -39746,7 +40704,7 @@
                 <a:ea typeface="Noto Sans CJK JP"/>
                 <a:cs typeface="Noto Sans"/>
               </a:rPr>
-              <a:t>Appendix 3 追加の領域注釈例</a:t>
+              <a:t>Appendix 3 画像と物体領域の追加例</a:t>
             </a:r>
           </a:p>
         </p:txBody>
@@ -39909,12 +40867,12 @@
           </a:xfrm>
         </p:spPr>
         <p:txBody>
-          <a:bodyPr wrap="square" anchor="t" lIns="0" rIns="0" tIns="0" bIns="0"/>
+          <a:bodyPr wrap="none" anchor="t" lIns="0" rIns="0" tIns="0" bIns="0"/>
           <a:lstStyle/>
           <a:p>
             <a:pPr algn="l">
               <a:lnSpc>
-                <a:spcPct val="115000"/>
+                <a:spcPct val="100000"/>
               </a:lnSpc>
               <a:spcBef>
                 <a:spcPts val="0"/>
@@ -39933,7 +40891,7 @@
               </a:defRPr>
             </a:pPr>
             <a:r>
-              <a:rPr lang="ja-JP" sz="2800" b="1">
+              <a:rPr sz="2800" b="1" lang="ja-JP">
                 <a:solidFill>
                   <a:srgbClr val="303437"/>
                 </a:solidFill>
@@ -39995,7 +40953,7 @@
                 <a:ea typeface="Noto Sans CJK JP"/>
                 <a:cs typeface="Noto Sans"/>
               </a:rPr>
-              <a:t>Appendix 3 追加の領域注釈例</a:t>
+              <a:t>Appendix 3 画像と物体領域の追加例</a:t>
             </a:r>
           </a:p>
         </p:txBody>
@@ -40158,12 +41116,12 @@
           </a:xfrm>
         </p:spPr>
         <p:txBody>
-          <a:bodyPr wrap="square" anchor="t" lIns="0" rIns="0" tIns="0" bIns="0"/>
+          <a:bodyPr wrap="none" anchor="t" lIns="0" rIns="0" tIns="0" bIns="0"/>
           <a:lstStyle/>
           <a:p>
             <a:pPr algn="l">
               <a:lnSpc>
-                <a:spcPct val="115000"/>
+                <a:spcPct val="100000"/>
               </a:lnSpc>
               <a:spcBef>
                 <a:spcPts val="0"/>
@@ -40182,7 +41140,7 @@
               </a:defRPr>
             </a:pPr>
             <a:r>
-              <a:rPr lang="ja-JP" sz="2800" b="1">
+              <a:rPr sz="2800" b="1" lang="ja-JP">
                 <a:solidFill>
                   <a:srgbClr val="303437"/>
                 </a:solidFill>
@@ -40244,7 +41202,7 @@
                 <a:ea typeface="Noto Sans CJK JP"/>
                 <a:cs typeface="Noto Sans"/>
               </a:rPr>
-              <a:t>Appendix 3 追加の領域注釈例</a:t>
+              <a:t>Appendix 3 画像と物体領域の追加例</a:t>
             </a:r>
           </a:p>
         </p:txBody>
@@ -40407,12 +41365,12 @@
           </a:xfrm>
         </p:spPr>
         <p:txBody>
-          <a:bodyPr wrap="square" anchor="t" lIns="0" rIns="0" tIns="0" bIns="0"/>
+          <a:bodyPr wrap="none" anchor="t" lIns="0" rIns="0" tIns="0" bIns="0"/>
           <a:lstStyle/>
           <a:p>
             <a:pPr algn="l">
               <a:lnSpc>
-                <a:spcPct val="115000"/>
+                <a:spcPct val="100000"/>
               </a:lnSpc>
               <a:spcBef>
                 <a:spcPts val="0"/>
@@ -40431,7 +41389,7 @@
               </a:defRPr>
             </a:pPr>
             <a:r>
-              <a:rPr lang="ja-JP" sz="2800" b="1">
+              <a:rPr sz="2800" b="1" lang="ja-JP">
                 <a:solidFill>
                   <a:srgbClr val="303437"/>
                 </a:solidFill>
@@ -40619,7 +41577,7 @@
                 <a:ea typeface="Noto Sans CJK JP"/>
                 <a:cs typeface="Noto Sans"/>
               </a:rPr>
-              <a:t>Appendix 4 全80カテゴリと利用条件</a:t>
+              <a:t>Appendix 4 全80物体カテゴリと画像・注釈の利用条件</a:t>
             </a:r>
           </a:p>
         </p:txBody>
@@ -40737,12 +41695,12 @@
           </a:xfrm>
         </p:spPr>
         <p:txBody>
-          <a:bodyPr wrap="square" anchor="t" lIns="0" rIns="0" tIns="0" bIns="0"/>
+          <a:bodyPr wrap="none" anchor="t" lIns="0" rIns="0" tIns="0" bIns="0"/>
           <a:lstStyle/>
           <a:p>
             <a:pPr algn="l">
               <a:lnSpc>
-                <a:spcPct val="115000"/>
+                <a:spcPct val="100000"/>
               </a:lnSpc>
               <a:spcBef>
                 <a:spcPts val="0"/>
@@ -40761,7 +41719,7 @@
               </a:defRPr>
             </a:pPr>
             <a:r>
-              <a:rPr lang="ja-JP" sz="2800" b="1">
+              <a:rPr sz="2800" b="1" lang="ja-JP">
                 <a:solidFill>
                   <a:srgbClr val="303437"/>
                 </a:solidFill>
@@ -40949,7 +41907,7 @@
                 <a:ea typeface="Noto Sans CJK JP"/>
                 <a:cs typeface="Noto Sans"/>
               </a:rPr>
-              <a:t>Appendix 4 全80カテゴリと利用条件</a:t>
+              <a:t>Appendix 4 全80物体カテゴリと画像・注釈の利用条件</a:t>
             </a:r>
           </a:p>
         </p:txBody>
@@ -41067,12 +42025,12 @@
           </a:xfrm>
         </p:spPr>
         <p:txBody>
-          <a:bodyPr wrap="square" anchor="t" lIns="0" rIns="0" tIns="0" bIns="0"/>
+          <a:bodyPr wrap="none" anchor="t" lIns="0" rIns="0" tIns="0" bIns="0"/>
           <a:lstStyle/>
           <a:p>
             <a:pPr algn="l">
               <a:lnSpc>
-                <a:spcPct val="115000"/>
+                <a:spcPct val="100000"/>
               </a:lnSpc>
               <a:spcBef>
                 <a:spcPts val="0"/>
@@ -41091,7 +42049,7 @@
               </a:defRPr>
             </a:pPr>
             <a:r>
-              <a:rPr lang="ja-JP" sz="2800" b="1">
+              <a:rPr sz="2800" b="1" lang="ja-JP">
                 <a:solidFill>
                   <a:srgbClr val="303437"/>
                 </a:solidFill>
@@ -41279,7 +42237,7 @@
                 <a:ea typeface="Noto Sans CJK JP"/>
                 <a:cs typeface="Noto Sans"/>
               </a:rPr>
-              <a:t>Appendix 4 全80カテゴリと利用条件</a:t>
+              <a:t>Appendix 4 全80物体カテゴリと画像・注釈の利用条件</a:t>
             </a:r>
           </a:p>
         </p:txBody>
@@ -41397,12 +42355,12 @@
           </a:xfrm>
         </p:spPr>
         <p:txBody>
-          <a:bodyPr wrap="square" anchor="t" lIns="0" rIns="0" tIns="0" bIns="0"/>
+          <a:bodyPr wrap="none" anchor="t" lIns="0" rIns="0" tIns="0" bIns="0"/>
           <a:lstStyle/>
           <a:p>
             <a:pPr algn="l">
               <a:lnSpc>
-                <a:spcPct val="115000"/>
+                <a:spcPct val="100000"/>
               </a:lnSpc>
               <a:spcBef>
                 <a:spcPts val="0"/>
@@ -41421,7 +42379,7 @@
               </a:defRPr>
             </a:pPr>
             <a:r>
-              <a:rPr lang="ja-JP" sz="2800" b="1">
+              <a:rPr sz="2800" b="1" lang="ja-JP">
                 <a:solidFill>
                   <a:srgbClr val="303437"/>
                 </a:solidFill>
@@ -41609,7 +42567,7 @@
                 <a:ea typeface="Noto Sans CJK JP"/>
                 <a:cs typeface="Noto Sans"/>
               </a:rPr>
-              <a:t>Appendix 4 全80カテゴリと利用条件</a:t>
+              <a:t>Appendix 4 全80物体カテゴリと画像・注釈の利用条件</a:t>
             </a:r>
           </a:p>
         </p:txBody>
@@ -41727,12 +42685,12 @@
           </a:xfrm>
         </p:spPr>
         <p:txBody>
-          <a:bodyPr wrap="square" anchor="t" lIns="0" rIns="0" tIns="0" bIns="0"/>
+          <a:bodyPr wrap="none" anchor="t" lIns="0" rIns="0" tIns="0" bIns="0"/>
           <a:lstStyle/>
           <a:p>
             <a:pPr algn="l">
               <a:lnSpc>
-                <a:spcPct val="115000"/>
+                <a:spcPct val="100000"/>
               </a:lnSpc>
               <a:spcBef>
                 <a:spcPts val="0"/>
@@ -41751,7 +42709,7 @@
               </a:defRPr>
             </a:pPr>
             <a:r>
-              <a:rPr lang="ja-JP" sz="2800" b="1">
+              <a:rPr sz="2800" b="1" lang="ja-JP">
                 <a:solidFill>
                   <a:srgbClr val="303437"/>
                 </a:solidFill>
@@ -41939,7 +42897,7 @@
                 <a:ea typeface="Noto Sans CJK JP"/>
                 <a:cs typeface="Noto Sans"/>
               </a:rPr>
-              <a:t>1 認識課題と実画像</a:t>
+              <a:t>1 COCOの認識課題と領域注釈の実例</a:t>
             </a:r>
           </a:p>
         </p:txBody>
@@ -42004,7 +42962,7 @@
                 <a:latin typeface="Noto Sans"/>
                 <a:ea typeface="Noto Sans CJK JP"/>
                 <a:cs typeface="Noto Sans"/>
-                <a:hlinkClick r:id="rId3"/>
+                <a:hlinkClick r:id="rId2"/>
               </a:rPr>
               <a:t>https://cocodataset.org/#format-data</a:t>
             </a:r>
@@ -42046,12 +43004,12 @@
           </a:xfrm>
         </p:spPr>
         <p:txBody>
-          <a:bodyPr wrap="square" anchor="t" lIns="0" rIns="0" tIns="0" bIns="0"/>
+          <a:bodyPr wrap="none" anchor="t" lIns="0" rIns="0" tIns="0" bIns="0"/>
           <a:lstStyle/>
           <a:p>
             <a:pPr algn="l">
               <a:lnSpc>
-                <a:spcPct val="115000"/>
+                <a:spcPct val="100000"/>
               </a:lnSpc>
               <a:spcBef>
                 <a:spcPts val="0"/>
@@ -42070,7 +43028,7 @@
               </a:defRPr>
             </a:pPr>
             <a:r>
-              <a:rPr lang="ja-JP" sz="2800" b="1">
+              <a:rPr sz="2800" b="1" lang="ja-JP">
                 <a:solidFill>
                   <a:srgbClr val="303437"/>
                 </a:solidFill>
@@ -42258,7 +43216,7 @@
                 <a:ea typeface="Noto Sans CJK JP"/>
                 <a:cs typeface="Noto Sans"/>
               </a:rPr>
-              <a:t>Appendix 4 全80カテゴリと利用条件</a:t>
+              <a:t>Appendix 4 全80物体カテゴリと画像・注釈の利用条件</a:t>
             </a:r>
           </a:p>
         </p:txBody>
@@ -42484,7 +43442,7 @@
                 <a:ea typeface="Noto Sans CJK JP"/>
                 <a:cs typeface="Noto Sans"/>
               </a:rPr>
-              <a:t>Appendix 5 参考文献</a:t>
+              <a:t>Appendix 5 物体検出・領域分割の関連文献</a:t>
             </a:r>
           </a:p>
         </p:txBody>
@@ -42497,8 +43455,8 @@
         </p:nvSpPr>
         <p:spPr>
           <a:xfrm>
-            <a:off x="594360" y="1051560"/>
-            <a:ext cx="7955279" cy="411480"/>
+            <a:off x="548640" y="780772"/>
+            <a:ext cx="8046720" cy="414131"/>
           </a:xfrm>
           <a:prstGeom prst="rect">
             <a:avLst/>
@@ -42511,28 +43469,19 @@
           </a:bodyPr>
           <a:lstStyle/>
           <a:p>
-            <a:pPr>
-              <a:lnSpc>
-                <a:spcPct val="110000"/>
-              </a:lnSpc>
-              <a:spcBef>
-                <a:spcPts val="0"/>
-              </a:spcBef>
-              <a:spcAft>
-                <a:spcPts val="0"/>
-              </a:spcAft>
-              <a:buNone/>
-              <a:defRPr sz="2400" lang="ja-JP" b="1">
-                <a:solidFill>
-                  <a:srgbClr val="303437"/>
-                </a:solidFill>
-                <a:latin typeface="Noto Sans"/>
-                <a:ea typeface="Noto Sans CJK JP"/>
-                <a:cs typeface="Noto Sans"/>
-              </a:defRPr>
-            </a:pPr>
-            <a:r>
-              <a:rPr sz="2400" lang="ja-JP" b="1">
+            <a:pPr algn="l">
+              <a:lnSpc>
+                <a:spcPct val="100000"/>
+              </a:lnSpc>
+              <a:spcBef>
+                <a:spcPts val="0"/>
+              </a:spcBef>
+              <a:spcAft>
+                <a:spcPts val="0"/>
+              </a:spcAft>
+            </a:pPr>
+            <a:r>
+              <a:rPr sz="2100" b="1" lang="ja-JP">
                 <a:solidFill>
                   <a:srgbClr val="303437"/>
                 </a:solidFill>
@@ -42553,8 +43502,8 @@
         </p:nvSpPr>
         <p:spPr>
           <a:xfrm>
-            <a:off x="594360" y="1600200"/>
-            <a:ext cx="7955279" cy="566928"/>
+            <a:off x="548640" y="1212979"/>
+            <a:ext cx="8046720" cy="267034"/>
           </a:xfrm>
           <a:prstGeom prst="rect">
             <a:avLst/>
@@ -42567,69 +43516,27 @@
           </a:bodyPr>
           <a:lstStyle/>
           <a:p>
-            <a:pPr>
-              <a:lnSpc>
-                <a:spcPct val="110000"/>
-              </a:lnSpc>
-              <a:spcBef>
-                <a:spcPts val="0"/>
-              </a:spcBef>
-              <a:spcAft>
-                <a:spcPts val="0"/>
-              </a:spcAft>
-              <a:buNone/>
-              <a:defRPr sz="1400" lang="ja-JP" b="0">
+            <a:pPr algn="l">
+              <a:lnSpc>
+                <a:spcPct val="100000"/>
+              </a:lnSpc>
+              <a:spcBef>
+                <a:spcPts val="0"/>
+              </a:spcBef>
+              <a:spcAft>
+                <a:spcPts val="0"/>
+              </a:spcAft>
+            </a:pPr>
+            <a:r>
+              <a:rPr sz="1250" b="0" lang="ja-JP">
                 <a:solidFill>
                   <a:srgbClr val="626669"/>
                 </a:solidFill>
                 <a:latin typeface="Noto Sans"/>
                 <a:ea typeface="Noto Sans CJK JP"/>
                 <a:cs typeface="Noto Sans"/>
-              </a:defRPr>
-            </a:pPr>
-            <a:r>
-              <a:rPr sz="1400" lang="ja-JP" b="0">
-                <a:solidFill>
-                  <a:srgbClr val="626669"/>
-                </a:solidFill>
-                <a:latin typeface="Noto Sans"/>
-                <a:ea typeface="Noto Sans CJK JP"/>
-                <a:cs typeface="Noto Sans"/>
-              </a:rPr>
-              <a:t>Tsung-Yi Lin et al. (2014).</a:t>
-            </a:r>
-          </a:p>
-          <a:p>
-            <a:pPr>
-              <a:lnSpc>
-                <a:spcPct val="110000"/>
-              </a:lnSpc>
-              <a:spcBef>
-                <a:spcPts val="0"/>
-              </a:spcBef>
-              <a:spcAft>
-                <a:spcPts val="0"/>
-              </a:spcAft>
-              <a:buNone/>
-              <a:defRPr sz="1400" lang="ja-JP" b="0">
-                <a:solidFill>
-                  <a:srgbClr val="626669"/>
-                </a:solidFill>
-                <a:latin typeface="Noto Sans"/>
-                <a:ea typeface="Noto Sans CJK JP"/>
-                <a:cs typeface="Noto Sans"/>
-              </a:defRPr>
-            </a:pPr>
-            <a:r>
-              <a:rPr sz="1400" lang="ja-JP" b="0">
-                <a:solidFill>
-                  <a:srgbClr val="626669"/>
-                </a:solidFill>
-                <a:latin typeface="Noto Sans"/>
-                <a:ea typeface="Noto Sans CJK JP"/>
-                <a:cs typeface="Noto Sans"/>
-              </a:rPr>
-              <a:t>European Conference on Computer Vision (ECCV), pp. 740–755.</a:t>
+              </a:rPr>
+              <a:t>Tsung-Yi Lin et al. (2014). European Conference on Computer Vision (ECCV), pp. 740–755.</a:t>
             </a:r>
           </a:p>
         </p:txBody>
@@ -42642,8 +43549,8 @@
         </p:nvSpPr>
         <p:spPr>
           <a:xfrm>
-            <a:off x="594360" y="2194560"/>
-            <a:ext cx="7955279" cy="475488"/>
+            <a:off x="548640" y="1529020"/>
+            <a:ext cx="8046720" cy="364650"/>
           </a:xfrm>
           <a:prstGeom prst="rect">
             <a:avLst/>
@@ -42656,28 +43563,19 @@
           </a:bodyPr>
           <a:lstStyle/>
           <a:p>
-            <a:pPr>
-              <a:lnSpc>
-                <a:spcPct val="110000"/>
-              </a:lnSpc>
-              <a:spcBef>
-                <a:spcPts val="0"/>
-              </a:spcBef>
-              <a:spcAft>
-                <a:spcPts val="0"/>
-              </a:spcAft>
-              <a:buNone/>
-              <a:defRPr sz="1800" lang="ja-JP" b="0">
-                <a:solidFill>
-                  <a:srgbClr val="303437"/>
-                </a:solidFill>
-                <a:latin typeface="Noto Sans"/>
-                <a:ea typeface="Noto Sans CJK JP"/>
-                <a:cs typeface="Noto Sans"/>
-              </a:defRPr>
-            </a:pPr>
-            <a:r>
-              <a:rPr sz="1800" lang="ja-JP" b="0">
+            <a:pPr algn="l">
+              <a:lnSpc>
+                <a:spcPct val="100000"/>
+              </a:lnSpc>
+              <a:spcBef>
+                <a:spcPts val="0"/>
+              </a:spcBef>
+              <a:spcAft>
+                <a:spcPts val="0"/>
+              </a:spcAft>
+            </a:pPr>
+            <a:r>
+              <a:rPr sz="1700" b="0" lang="ja-JP">
                 <a:solidFill>
                   <a:srgbClr val="303437"/>
                 </a:solidFill>
@@ -42698,8 +43596,8 @@
         </p:nvSpPr>
         <p:spPr>
           <a:xfrm>
-            <a:off x="594360" y="2651760"/>
-            <a:ext cx="7955279" cy="228600"/>
+            <a:off x="548640" y="1893062"/>
+            <a:ext cx="8046720" cy="223877"/>
           </a:xfrm>
           <a:prstGeom prst="rect">
             <a:avLst/>
@@ -42712,28 +43610,19 @@
           </a:bodyPr>
           <a:lstStyle/>
           <a:p>
-            <a:pPr>
-              <a:lnSpc>
-                <a:spcPct val="110000"/>
-              </a:lnSpc>
-              <a:spcBef>
-                <a:spcPts val="0"/>
-              </a:spcBef>
-              <a:spcAft>
-                <a:spcPts val="0"/>
-              </a:spcAft>
-              <a:buNone/>
-              <a:defRPr sz="1150" lang="ja-JP" b="0">
-                <a:solidFill>
-                  <a:srgbClr val="626669"/>
-                </a:solidFill>
-                <a:latin typeface="Noto Sans"/>
-                <a:ea typeface="Noto Sans CJK JP"/>
-                <a:cs typeface="Noto Sans"/>
-              </a:defRPr>
-            </a:pPr>
-            <a:r>
-              <a:rPr sz="1150" lang="ja-JP" b="0">
+            <a:pPr algn="l">
+              <a:lnSpc>
+                <a:spcPct val="100000"/>
+              </a:lnSpc>
+              <a:spcBef>
+                <a:spcPts val="0"/>
+              </a:spcBef>
+              <a:spcAft>
+                <a:spcPts val="0"/>
+              </a:spcAft>
+            </a:pPr>
+            <a:r>
+              <a:rPr sz="1000" b="0" lang="ja-JP">
                 <a:solidFill>
                   <a:srgbClr val="626669"/>
                 </a:solidFill>
@@ -42755,8 +43644,8 @@
         </p:nvSpPr>
         <p:spPr>
           <a:xfrm>
-            <a:off x="594360" y="3182112"/>
-            <a:ext cx="7955279" cy="411480"/>
+            <a:off x="548640" y="3041374"/>
+            <a:ext cx="8046720" cy="414132"/>
           </a:xfrm>
           <a:prstGeom prst="rect">
             <a:avLst/>
@@ -42769,28 +43658,19 @@
           </a:bodyPr>
           <a:lstStyle/>
           <a:p>
-            <a:pPr>
-              <a:lnSpc>
-                <a:spcPct val="110000"/>
-              </a:lnSpc>
-              <a:spcBef>
-                <a:spcPts val="0"/>
-              </a:spcBef>
-              <a:spcAft>
-                <a:spcPts val="0"/>
-              </a:spcAft>
-              <a:buNone/>
-              <a:defRPr sz="2400" lang="ja-JP" b="1">
-                <a:solidFill>
-                  <a:srgbClr val="303437"/>
-                </a:solidFill>
-                <a:latin typeface="Noto Sans"/>
-                <a:ea typeface="Noto Sans CJK JP"/>
-                <a:cs typeface="Noto Sans"/>
-              </a:defRPr>
-            </a:pPr>
-            <a:r>
-              <a:rPr sz="2400" lang="ja-JP" b="1">
+            <a:pPr algn="l">
+              <a:lnSpc>
+                <a:spcPct val="100000"/>
+              </a:lnSpc>
+              <a:spcBef>
+                <a:spcPts val="0"/>
+              </a:spcBef>
+              <a:spcAft>
+                <a:spcPts val="0"/>
+              </a:spcAft>
+            </a:pPr>
+            <a:r>
+              <a:rPr sz="2100" b="1" lang="ja-JP">
                 <a:solidFill>
                   <a:srgbClr val="303437"/>
                 </a:solidFill>
@@ -42811,8 +43691,8 @@
         </p:nvSpPr>
         <p:spPr>
           <a:xfrm>
-            <a:off x="594360" y="3730752"/>
-            <a:ext cx="7955279" cy="566928"/>
+            <a:off x="548640" y="3488028"/>
+            <a:ext cx="8046720" cy="281482"/>
           </a:xfrm>
           <a:prstGeom prst="rect">
             <a:avLst/>
@@ -42825,69 +43705,27 @@
           </a:bodyPr>
           <a:lstStyle/>
           <a:p>
-            <a:pPr>
-              <a:lnSpc>
-                <a:spcPct val="110000"/>
-              </a:lnSpc>
-              <a:spcBef>
-                <a:spcPts val="0"/>
-              </a:spcBef>
-              <a:spcAft>
-                <a:spcPts val="0"/>
-              </a:spcAft>
-              <a:buNone/>
-              <a:defRPr sz="1400" lang="ja-JP" b="0">
+            <a:pPr algn="l">
+              <a:lnSpc>
+                <a:spcPct val="100000"/>
+              </a:lnSpc>
+              <a:spcBef>
+                <a:spcPts val="0"/>
+              </a:spcBef>
+              <a:spcAft>
+                <a:spcPts val="0"/>
+              </a:spcAft>
+            </a:pPr>
+            <a:r>
+              <a:rPr sz="1250" b="0" lang="ja-JP">
                 <a:solidFill>
                   <a:srgbClr val="626669"/>
                 </a:solidFill>
                 <a:latin typeface="Noto Sans"/>
                 <a:ea typeface="Noto Sans CJK JP"/>
                 <a:cs typeface="Noto Sans"/>
-              </a:defRPr>
-            </a:pPr>
-            <a:r>
-              <a:rPr sz="1400" lang="ja-JP" b="0">
-                <a:solidFill>
-                  <a:srgbClr val="626669"/>
-                </a:solidFill>
-                <a:latin typeface="Noto Sans"/>
-                <a:ea typeface="Noto Sans CJK JP"/>
-                <a:cs typeface="Noto Sans"/>
-              </a:rPr>
-              <a:t>COCO Consortium (n.d.; 参照日 2026-10-15).</a:t>
-            </a:r>
-          </a:p>
-          <a:p>
-            <a:pPr>
-              <a:lnSpc>
-                <a:spcPct val="110000"/>
-              </a:lnSpc>
-              <a:spcBef>
-                <a:spcPts val="0"/>
-              </a:spcBef>
-              <a:spcAft>
-                <a:spcPts val="0"/>
-              </a:spcAft>
-              <a:buNone/>
-              <a:defRPr sz="1400" lang="ja-JP" b="0">
-                <a:solidFill>
-                  <a:srgbClr val="626669"/>
-                </a:solidFill>
-                <a:latin typeface="Noto Sans"/>
-                <a:ea typeface="Noto Sans CJK JP"/>
-                <a:cs typeface="Noto Sans"/>
-              </a:defRPr>
-            </a:pPr>
-            <a:r>
-              <a:rPr sz="1400" lang="ja-JP" b="0">
-                <a:solidFill>
-                  <a:srgbClr val="626669"/>
-                </a:solidFill>
-                <a:latin typeface="Noto Sans"/>
-                <a:ea typeface="Noto Sans CJK JP"/>
-                <a:cs typeface="Noto Sans"/>
-              </a:rPr>
-              <a:t>GitHub, cocodataset/cocoapi.</a:t>
+              </a:rPr>
+              <a:t>COCO Consortium (n.d.; 参照日 2026-10-15). GitHub, cocodataset/cocoapi.</a:t>
             </a:r>
           </a:p>
         </p:txBody>
@@ -42900,8 +43738,8 @@
         </p:nvSpPr>
         <p:spPr>
           <a:xfrm>
-            <a:off x="594360" y="4325112"/>
-            <a:ext cx="7955279" cy="475488"/>
+            <a:off x="548640" y="3804067"/>
+            <a:ext cx="8046720" cy="363570"/>
           </a:xfrm>
           <a:prstGeom prst="rect">
             <a:avLst/>
@@ -42914,28 +43752,19 @@
           </a:bodyPr>
           <a:lstStyle/>
           <a:p>
-            <a:pPr>
-              <a:lnSpc>
-                <a:spcPct val="110000"/>
-              </a:lnSpc>
-              <a:spcBef>
-                <a:spcPts val="0"/>
-              </a:spcBef>
-              <a:spcAft>
-                <a:spcPts val="0"/>
-              </a:spcAft>
-              <a:buNone/>
-              <a:defRPr sz="1800" lang="ja-JP" b="0">
-                <a:solidFill>
-                  <a:srgbClr val="303437"/>
-                </a:solidFill>
-                <a:latin typeface="Noto Sans"/>
-                <a:ea typeface="Noto Sans CJK JP"/>
-                <a:cs typeface="Noto Sans"/>
-              </a:defRPr>
-            </a:pPr>
-            <a:r>
-              <a:rPr sz="1800" lang="ja-JP" b="0">
+            <a:pPr algn="l">
+              <a:lnSpc>
+                <a:spcPct val="100000"/>
+              </a:lnSpc>
+              <a:spcBef>
+                <a:spcPts val="0"/>
+              </a:spcBef>
+              <a:spcAft>
+                <a:spcPts val="0"/>
+              </a:spcAft>
+            </a:pPr>
+            <a:r>
+              <a:rPr sz="1700" b="0" lang="ja-JP">
                 <a:solidFill>
                   <a:srgbClr val="303437"/>
                 </a:solidFill>
@@ -42956,8 +43785,8 @@
         </p:nvSpPr>
         <p:spPr>
           <a:xfrm>
-            <a:off x="594360" y="4782312"/>
-            <a:ext cx="7955279" cy="228600"/>
+            <a:off x="548640" y="4167030"/>
+            <a:ext cx="8046720" cy="223877"/>
           </a:xfrm>
           <a:prstGeom prst="rect">
             <a:avLst/>
@@ -42970,34 +43799,25 @@
           </a:bodyPr>
           <a:lstStyle/>
           <a:p>
-            <a:pPr>
-              <a:lnSpc>
-                <a:spcPct val="110000"/>
-              </a:lnSpc>
-              <a:spcBef>
-                <a:spcPts val="0"/>
-              </a:spcBef>
-              <a:spcAft>
-                <a:spcPts val="0"/>
-              </a:spcAft>
-              <a:buNone/>
-              <a:defRPr sz="1150" lang="ja-JP" b="0">
+            <a:pPr algn="l">
+              <a:lnSpc>
+                <a:spcPct val="100000"/>
+              </a:lnSpc>
+              <a:spcBef>
+                <a:spcPts val="0"/>
+              </a:spcBef>
+              <a:spcAft>
+                <a:spcPts val="0"/>
+              </a:spcAft>
+            </a:pPr>
+            <a:r>
+              <a:rPr sz="1000" b="0" lang="ja-JP">
                 <a:solidFill>
                   <a:srgbClr val="626669"/>
                 </a:solidFill>
                 <a:latin typeface="Noto Sans"/>
                 <a:ea typeface="Noto Sans CJK JP"/>
                 <a:cs typeface="Noto Sans"/>
-              </a:defRPr>
-            </a:pPr>
-            <a:r>
-              <a:rPr sz="1150" lang="ja-JP" b="0">
-                <a:solidFill>
-                  <a:srgbClr val="626669"/>
-                </a:solidFill>
-                <a:latin typeface="Noto Sans"/>
-                <a:ea typeface="Noto Sans CJK JP"/>
-                <a:cs typeface="Noto Sans"/>
                 <a:hlinkClick r:id="rId3"/>
               </a:rPr>
               <a:t>https://github.com/cocodataset/cocoapi</a:t>
@@ -43005,41 +43825,49 @@
           </a:p>
         </p:txBody>
       </p:sp>
-      <p:cxnSp>
-        <p:nvCxnSpPr>
-          <p:cNvPr id="12" name="Connector 11"/>
-          <p:cNvCxnSpPr/>
+      <p:sp>
+        <p:nvSpPr>
+          <p:cNvPr id="12" name="Rectangle 11"/>
+          <p:cNvSpPr/>
           <p:nvPr/>
-        </p:nvCxnSpPr>
-        <p:spPr>
-          <a:xfrm>
-            <a:off x="594360" y="2999232"/>
-            <a:ext cx="7955280" cy="0"/>
-          </a:xfrm>
-          <a:prstGeom prst="line">
+        </p:nvSpPr>
+        <p:spPr>
+          <a:xfrm>
+            <a:off x="548640" y="2852928"/>
+            <a:ext cx="8046720" cy="7620"/>
+          </a:xfrm>
+          <a:prstGeom prst="rect">
             <a:avLst/>
           </a:prstGeom>
-          <a:ln w="10160">
-            <a:solidFill>
-              <a:srgbClr val="626669"/>
-            </a:solidFill>
+          <a:solidFill>
+            <a:srgbClr val="C9CCCA"/>
+          </a:solidFill>
+          <a:ln>
+            <a:noFill/>
           </a:ln>
         </p:spPr>
         <p:style>
-          <a:lnRef idx="2">
+          <a:lnRef idx="1">
             <a:schemeClr val="accent1"/>
           </a:lnRef>
-          <a:fillRef idx="0">
+          <a:fillRef idx="3">
             <a:schemeClr val="accent1"/>
           </a:fillRef>
-          <a:effectRef idx="0">
+          <a:effectRef idx="2">
             <a:schemeClr val="accent1"/>
           </a:effectRef>
           <a:fontRef idx="minor">
-            <a:schemeClr val="tx1"/>
+            <a:schemeClr val="lt1"/>
           </a:fontRef>
         </p:style>
-      </p:cxnSp>
+        <p:txBody>
+          <a:bodyPr rtlCol="0" anchor="ctr"/>
+          <a:lstStyle/>
+          <a:p>
+            <a:pPr algn="ctr"/>
+          </a:p>
+        </p:txBody>
+      </p:sp>
     </p:spTree>
   </p:cSld>
   <p:clrMapOvr>
@@ -43161,7 +43989,7 @@
                 <a:ea typeface="Noto Sans CJK JP"/>
                 <a:cs typeface="Noto Sans"/>
               </a:rPr>
-              <a:t>Appendix 5 参考文献</a:t>
+              <a:t>Appendix 5 物体検出・領域分割の関連文献</a:t>
             </a:r>
           </a:p>
         </p:txBody>
@@ -43174,8 +44002,8 @@
         </p:nvSpPr>
         <p:spPr>
           <a:xfrm>
-            <a:off x="594360" y="1051560"/>
-            <a:ext cx="7955279" cy="411480"/>
+            <a:off x="548640" y="780772"/>
+            <a:ext cx="8046720" cy="414131"/>
           </a:xfrm>
           <a:prstGeom prst="rect">
             <a:avLst/>
@@ -43188,28 +44016,19 @@
           </a:bodyPr>
           <a:lstStyle/>
           <a:p>
-            <a:pPr>
-              <a:lnSpc>
-                <a:spcPct val="110000"/>
-              </a:lnSpc>
-              <a:spcBef>
-                <a:spcPts val="0"/>
-              </a:spcBef>
-              <a:spcAft>
-                <a:spcPts val="0"/>
-              </a:spcAft>
-              <a:buNone/>
-              <a:defRPr sz="2400" lang="ja-JP" b="1">
-                <a:solidFill>
-                  <a:srgbClr val="303437"/>
-                </a:solidFill>
-                <a:latin typeface="Noto Sans"/>
-                <a:ea typeface="Noto Sans CJK JP"/>
-                <a:cs typeface="Noto Sans"/>
-              </a:defRPr>
-            </a:pPr>
-            <a:r>
-              <a:rPr sz="2400" lang="ja-JP" b="1">
+            <a:pPr algn="l">
+              <a:lnSpc>
+                <a:spcPct val="100000"/>
+              </a:lnSpc>
+              <a:spcBef>
+                <a:spcPts val="0"/>
+              </a:spcBef>
+              <a:spcAft>
+                <a:spcPts val="0"/>
+              </a:spcAft>
+            </a:pPr>
+            <a:r>
+              <a:rPr sz="2100" b="1" lang="ja-JP">
                 <a:solidFill>
                   <a:srgbClr val="303437"/>
                 </a:solidFill>
@@ -43230,8 +44049,8 @@
         </p:nvSpPr>
         <p:spPr>
           <a:xfrm>
-            <a:off x="594360" y="1600200"/>
-            <a:ext cx="7955279" cy="566928"/>
+            <a:off x="548640" y="1212979"/>
+            <a:ext cx="8046720" cy="457471"/>
           </a:xfrm>
           <a:prstGeom prst="rect">
             <a:avLst/>
@@ -43244,69 +44063,27 @@
           </a:bodyPr>
           <a:lstStyle/>
           <a:p>
-            <a:pPr>
-              <a:lnSpc>
-                <a:spcPct val="110000"/>
-              </a:lnSpc>
-              <a:spcBef>
-                <a:spcPts val="0"/>
-              </a:spcBef>
-              <a:spcAft>
-                <a:spcPts val="0"/>
-              </a:spcAft>
-              <a:buNone/>
-              <a:defRPr sz="1400" lang="ja-JP" b="0">
+            <a:pPr algn="l">
+              <a:lnSpc>
+                <a:spcPct val="100000"/>
+              </a:lnSpc>
+              <a:spcBef>
+                <a:spcPts val="0"/>
+              </a:spcBef>
+              <a:spcAft>
+                <a:spcPts val="0"/>
+              </a:spcAft>
+            </a:pPr>
+            <a:r>
+              <a:rPr sz="1250" b="0" lang="ja-JP">
                 <a:solidFill>
                   <a:srgbClr val="626669"/>
                 </a:solidFill>
                 <a:latin typeface="Noto Sans"/>
                 <a:ea typeface="Noto Sans CJK JP"/>
                 <a:cs typeface="Noto Sans"/>
-              </a:defRPr>
-            </a:pPr>
-            <a:r>
-              <a:rPr sz="1400" lang="ja-JP" b="0">
-                <a:solidFill>
-                  <a:srgbClr val="626669"/>
-                </a:solidFill>
-                <a:latin typeface="Noto Sans"/>
-                <a:ea typeface="Noto Sans CJK JP"/>
-                <a:cs typeface="Noto Sans"/>
-              </a:rPr>
-              <a:t>Holger Caesar, Jasper Uijlings, Vittorio Ferrari (2018).</a:t>
-            </a:r>
-          </a:p>
-          <a:p>
-            <a:pPr>
-              <a:lnSpc>
-                <a:spcPct val="110000"/>
-              </a:lnSpc>
-              <a:spcBef>
-                <a:spcPts val="0"/>
-              </a:spcBef>
-              <a:spcAft>
-                <a:spcPts val="0"/>
-              </a:spcAft>
-              <a:buNone/>
-              <a:defRPr sz="1400" lang="ja-JP" b="0">
-                <a:solidFill>
-                  <a:srgbClr val="626669"/>
-                </a:solidFill>
-                <a:latin typeface="Noto Sans"/>
-                <a:ea typeface="Noto Sans CJK JP"/>
-                <a:cs typeface="Noto Sans"/>
-              </a:defRPr>
-            </a:pPr>
-            <a:r>
-              <a:rPr sz="1400" lang="ja-JP" b="0">
-                <a:solidFill>
-                  <a:srgbClr val="626669"/>
-                </a:solidFill>
-                <a:latin typeface="Noto Sans"/>
-                <a:ea typeface="Noto Sans CJK JP"/>
-                <a:cs typeface="Noto Sans"/>
-              </a:rPr>
-              <a:t>IEEE/CVF Conference on Computer Vision and Pattern Recognition (CVPR), pp. 1209–1218.</a:t>
+              </a:rPr>
+              <a:t>Holger Caesar, Jasper Uijlings, Vittorio Ferrari (2018). IEEE/CVF Conference on Computer Vision and Pattern Recognition (CVPR), pp. 1209–1218.</a:t>
             </a:r>
           </a:p>
         </p:txBody>
@@ -43319,8 +44096,8 @@
         </p:nvSpPr>
         <p:spPr>
           <a:xfrm>
-            <a:off x="594360" y="2194560"/>
-            <a:ext cx="7955279" cy="475488"/>
+            <a:off x="548640" y="1719165"/>
+            <a:ext cx="8046720" cy="364650"/>
           </a:xfrm>
           <a:prstGeom prst="rect">
             <a:avLst/>
@@ -43333,28 +44110,19 @@
           </a:bodyPr>
           <a:lstStyle/>
           <a:p>
-            <a:pPr>
-              <a:lnSpc>
-                <a:spcPct val="110000"/>
-              </a:lnSpc>
-              <a:spcBef>
-                <a:spcPts val="0"/>
-              </a:spcBef>
-              <a:spcAft>
-                <a:spcPts val="0"/>
-              </a:spcAft>
-              <a:buNone/>
-              <a:defRPr sz="1800" lang="ja-JP" b="0">
-                <a:solidFill>
-                  <a:srgbClr val="303437"/>
-                </a:solidFill>
-                <a:latin typeface="Noto Sans"/>
-                <a:ea typeface="Noto Sans CJK JP"/>
-                <a:cs typeface="Noto Sans"/>
-              </a:defRPr>
-            </a:pPr>
-            <a:r>
-              <a:rPr sz="1800" lang="ja-JP" b="0">
+            <a:pPr algn="l">
+              <a:lnSpc>
+                <a:spcPct val="100000"/>
+              </a:lnSpc>
+              <a:spcBef>
+                <a:spcPts val="0"/>
+              </a:spcBef>
+              <a:spcAft>
+                <a:spcPts val="0"/>
+              </a:spcAft>
+            </a:pPr>
+            <a:r>
+              <a:rPr sz="1700" b="0" lang="ja-JP">
                 <a:solidFill>
                   <a:srgbClr val="303437"/>
                 </a:solidFill>
@@ -43375,8 +44143,8 @@
         </p:nvSpPr>
         <p:spPr>
           <a:xfrm>
-            <a:off x="594360" y="2651760"/>
-            <a:ext cx="7955279" cy="228600"/>
+            <a:off x="548640" y="2083562"/>
+            <a:ext cx="8046720" cy="223877"/>
           </a:xfrm>
           <a:prstGeom prst="rect">
             <a:avLst/>
@@ -43389,28 +44157,19 @@
           </a:bodyPr>
           <a:lstStyle/>
           <a:p>
-            <a:pPr>
-              <a:lnSpc>
-                <a:spcPct val="110000"/>
-              </a:lnSpc>
-              <a:spcBef>
-                <a:spcPts val="0"/>
-              </a:spcBef>
-              <a:spcAft>
-                <a:spcPts val="0"/>
-              </a:spcAft>
-              <a:buNone/>
-              <a:defRPr sz="1150" lang="ja-JP" b="0">
-                <a:solidFill>
-                  <a:srgbClr val="626669"/>
-                </a:solidFill>
-                <a:latin typeface="Noto Sans"/>
-                <a:ea typeface="Noto Sans CJK JP"/>
-                <a:cs typeface="Noto Sans"/>
-              </a:defRPr>
-            </a:pPr>
-            <a:r>
-              <a:rPr sz="1150" lang="ja-JP" b="0">
+            <a:pPr algn="l">
+              <a:lnSpc>
+                <a:spcPct val="100000"/>
+              </a:lnSpc>
+              <a:spcBef>
+                <a:spcPts val="0"/>
+              </a:spcBef>
+              <a:spcAft>
+                <a:spcPts val="0"/>
+              </a:spcAft>
+            </a:pPr>
+            <a:r>
+              <a:rPr sz="1000" b="0" lang="ja-JP">
                 <a:solidFill>
                   <a:srgbClr val="626669"/>
                 </a:solidFill>
@@ -43432,8 +44191,8 @@
         </p:nvSpPr>
         <p:spPr>
           <a:xfrm>
-            <a:off x="594360" y="3182112"/>
-            <a:ext cx="7955279" cy="411480"/>
+            <a:off x="548640" y="3041374"/>
+            <a:ext cx="8046720" cy="414132"/>
           </a:xfrm>
           <a:prstGeom prst="rect">
             <a:avLst/>
@@ -43446,28 +44205,19 @@
           </a:bodyPr>
           <a:lstStyle/>
           <a:p>
-            <a:pPr>
-              <a:lnSpc>
-                <a:spcPct val="110000"/>
-              </a:lnSpc>
-              <a:spcBef>
-                <a:spcPts val="0"/>
-              </a:spcBef>
-              <a:spcAft>
-                <a:spcPts val="0"/>
-              </a:spcAft>
-              <a:buNone/>
-              <a:defRPr sz="2400" lang="ja-JP" b="1">
-                <a:solidFill>
-                  <a:srgbClr val="303437"/>
-                </a:solidFill>
-                <a:latin typeface="Noto Sans"/>
-                <a:ea typeface="Noto Sans CJK JP"/>
-                <a:cs typeface="Noto Sans"/>
-              </a:defRPr>
-            </a:pPr>
-            <a:r>
-              <a:rPr sz="2400" lang="ja-JP" b="1">
+            <a:pPr algn="l">
+              <a:lnSpc>
+                <a:spcPct val="100000"/>
+              </a:lnSpc>
+              <a:spcBef>
+                <a:spcPts val="0"/>
+              </a:spcBef>
+              <a:spcAft>
+                <a:spcPts val="0"/>
+              </a:spcAft>
+            </a:pPr>
+            <a:r>
+              <a:rPr sz="2100" b="1" lang="ja-JP">
                 <a:solidFill>
                   <a:srgbClr val="303437"/>
                 </a:solidFill>
@@ -43488,8 +44238,8 @@
         </p:nvSpPr>
         <p:spPr>
           <a:xfrm>
-            <a:off x="594360" y="3730752"/>
-            <a:ext cx="7955279" cy="566928"/>
+            <a:off x="548640" y="3473580"/>
+            <a:ext cx="8046720" cy="457470"/>
           </a:xfrm>
           <a:prstGeom prst="rect">
             <a:avLst/>
@@ -43502,69 +44252,27 @@
           </a:bodyPr>
           <a:lstStyle/>
           <a:p>
-            <a:pPr>
-              <a:lnSpc>
-                <a:spcPct val="110000"/>
-              </a:lnSpc>
-              <a:spcBef>
-                <a:spcPts val="0"/>
-              </a:spcBef>
-              <a:spcAft>
-                <a:spcPts val="0"/>
-              </a:spcAft>
-              <a:buNone/>
-              <a:defRPr sz="1400" lang="ja-JP" b="0">
+            <a:pPr algn="l">
+              <a:lnSpc>
+                <a:spcPct val="100000"/>
+              </a:lnSpc>
+              <a:spcBef>
+                <a:spcPts val="0"/>
+              </a:spcBef>
+              <a:spcAft>
+                <a:spcPts val="0"/>
+              </a:spcAft>
+            </a:pPr>
+            <a:r>
+              <a:rPr sz="1250" b="0" lang="ja-JP">
                 <a:solidFill>
                   <a:srgbClr val="626669"/>
                 </a:solidFill>
                 <a:latin typeface="Noto Sans"/>
                 <a:ea typeface="Noto Sans CJK JP"/>
                 <a:cs typeface="Noto Sans"/>
-              </a:defRPr>
-            </a:pPr>
-            <a:r>
-              <a:rPr sz="1400" lang="ja-JP" b="0">
-                <a:solidFill>
-                  <a:srgbClr val="626669"/>
-                </a:solidFill>
-                <a:latin typeface="Noto Sans"/>
-                <a:ea typeface="Noto Sans CJK JP"/>
-                <a:cs typeface="Noto Sans"/>
-              </a:rPr>
-              <a:t>Alexander Kirillov, Kaiming He, Ross Girshick, Carsten Rother, Piotr Dollár (2019).</a:t>
-            </a:r>
-          </a:p>
-          <a:p>
-            <a:pPr>
-              <a:lnSpc>
-                <a:spcPct val="110000"/>
-              </a:lnSpc>
-              <a:spcBef>
-                <a:spcPts val="0"/>
-              </a:spcBef>
-              <a:spcAft>
-                <a:spcPts val="0"/>
-              </a:spcAft>
-              <a:buNone/>
-              <a:defRPr sz="1400" lang="ja-JP" b="0">
-                <a:solidFill>
-                  <a:srgbClr val="626669"/>
-                </a:solidFill>
-                <a:latin typeface="Noto Sans"/>
-                <a:ea typeface="Noto Sans CJK JP"/>
-                <a:cs typeface="Noto Sans"/>
-              </a:defRPr>
-            </a:pPr>
-            <a:r>
-              <a:rPr sz="1400" lang="ja-JP" b="0">
-                <a:solidFill>
-                  <a:srgbClr val="626669"/>
-                </a:solidFill>
-                <a:latin typeface="Noto Sans"/>
-                <a:ea typeface="Noto Sans CJK JP"/>
-                <a:cs typeface="Noto Sans"/>
-              </a:rPr>
-              <a:t>IEEE/CVF Conference on Computer Vision and Pattern Recognition (CVPR), pp. 9404–9413.</a:t>
+              </a:rPr>
+              <a:t>Alexander Kirillov, Kaiming He, Ross Girshick, Carsten Rother, Piotr Dollár (2019). IEEE/CVF Conference on Computer Vision and Pattern Recognition (CVPR), pp. 9404–9413.</a:t>
             </a:r>
           </a:p>
         </p:txBody>
@@ -43577,8 +44285,8 @@
         </p:nvSpPr>
         <p:spPr>
           <a:xfrm>
-            <a:off x="594360" y="4325112"/>
-            <a:ext cx="7955279" cy="475488"/>
+            <a:off x="548640" y="3979765"/>
+            <a:ext cx="8046720" cy="364650"/>
           </a:xfrm>
           <a:prstGeom prst="rect">
             <a:avLst/>
@@ -43591,28 +44299,19 @@
           </a:bodyPr>
           <a:lstStyle/>
           <a:p>
-            <a:pPr>
-              <a:lnSpc>
-                <a:spcPct val="110000"/>
-              </a:lnSpc>
-              <a:spcBef>
-                <a:spcPts val="0"/>
-              </a:spcBef>
-              <a:spcAft>
-                <a:spcPts val="0"/>
-              </a:spcAft>
-              <a:buNone/>
-              <a:defRPr sz="1800" lang="ja-JP" b="0">
-                <a:solidFill>
-                  <a:srgbClr val="303437"/>
-                </a:solidFill>
-                <a:latin typeface="Noto Sans"/>
-                <a:ea typeface="Noto Sans CJK JP"/>
-                <a:cs typeface="Noto Sans"/>
-              </a:defRPr>
-            </a:pPr>
-            <a:r>
-              <a:rPr sz="1800" lang="ja-JP" b="0">
+            <a:pPr algn="l">
+              <a:lnSpc>
+                <a:spcPct val="100000"/>
+              </a:lnSpc>
+              <a:spcBef>
+                <a:spcPts val="0"/>
+              </a:spcBef>
+              <a:spcAft>
+                <a:spcPts val="0"/>
+              </a:spcAft>
+            </a:pPr>
+            <a:r>
+              <a:rPr sz="1700" b="0" lang="ja-JP">
                 <a:solidFill>
                   <a:srgbClr val="303437"/>
                 </a:solidFill>
@@ -43633,8 +44332,8 @@
         </p:nvSpPr>
         <p:spPr>
           <a:xfrm>
-            <a:off x="594360" y="4782312"/>
-            <a:ext cx="7955279" cy="228600"/>
+            <a:off x="548640" y="4344163"/>
+            <a:ext cx="8046720" cy="223877"/>
           </a:xfrm>
           <a:prstGeom prst="rect">
             <a:avLst/>
@@ -43647,76 +44346,75 @@
           </a:bodyPr>
           <a:lstStyle/>
           <a:p>
-            <a:pPr>
-              <a:lnSpc>
-                <a:spcPct val="110000"/>
-              </a:lnSpc>
-              <a:spcBef>
-                <a:spcPts val="0"/>
-              </a:spcBef>
-              <a:spcAft>
-                <a:spcPts val="0"/>
-              </a:spcAft>
-              <a:buNone/>
-              <a:defRPr sz="1150" lang="ja-JP" b="0">
+            <a:pPr algn="l">
+              <a:lnSpc>
+                <a:spcPct val="100000"/>
+              </a:lnSpc>
+              <a:spcBef>
+                <a:spcPts val="0"/>
+              </a:spcBef>
+              <a:spcAft>
+                <a:spcPts val="0"/>
+              </a:spcAft>
+            </a:pPr>
+            <a:r>
+              <a:rPr sz="1000" b="0" lang="ja-JP">
                 <a:solidFill>
                   <a:srgbClr val="626669"/>
                 </a:solidFill>
                 <a:latin typeface="Noto Sans"/>
                 <a:ea typeface="Noto Sans CJK JP"/>
                 <a:cs typeface="Noto Sans"/>
-              </a:defRPr>
-            </a:pPr>
-            <a:r>
-              <a:rPr sz="1150" lang="ja-JP" b="0">
-                <a:solidFill>
-                  <a:srgbClr val="626669"/>
-                </a:solidFill>
-                <a:latin typeface="Noto Sans"/>
-                <a:ea typeface="Noto Sans CJK JP"/>
-                <a:cs typeface="Noto Sans"/>
-                <a:hlinkClick r:id="rId4"/>
+                <a:hlinkClick r:id="rId2"/>
               </a:rPr>
               <a:t>https://arxiv.org/abs/1801.00868</a:t>
             </a:r>
           </a:p>
         </p:txBody>
       </p:sp>
-      <p:cxnSp>
-        <p:nvCxnSpPr>
-          <p:cNvPr id="12" name="Connector 11"/>
-          <p:cNvCxnSpPr/>
+      <p:sp>
+        <p:nvSpPr>
+          <p:cNvPr id="12" name="Rectangle 11"/>
+          <p:cNvSpPr/>
           <p:nvPr/>
-        </p:nvCxnSpPr>
-        <p:spPr>
-          <a:xfrm>
-            <a:off x="594360" y="2999232"/>
-            <a:ext cx="7955280" cy="0"/>
-          </a:xfrm>
-          <a:prstGeom prst="line">
+        </p:nvSpPr>
+        <p:spPr>
+          <a:xfrm>
+            <a:off x="548640" y="2852928"/>
+            <a:ext cx="8046720" cy="7620"/>
+          </a:xfrm>
+          <a:prstGeom prst="rect">
             <a:avLst/>
           </a:prstGeom>
-          <a:ln w="10160">
-            <a:solidFill>
-              <a:srgbClr val="626669"/>
-            </a:solidFill>
+          <a:solidFill>
+            <a:srgbClr val="C9CCCA"/>
+          </a:solidFill>
+          <a:ln>
+            <a:noFill/>
           </a:ln>
         </p:spPr>
         <p:style>
-          <a:lnRef idx="2">
+          <a:lnRef idx="1">
             <a:schemeClr val="accent1"/>
           </a:lnRef>
-          <a:fillRef idx="0">
+          <a:fillRef idx="3">
             <a:schemeClr val="accent1"/>
           </a:fillRef>
-          <a:effectRef idx="0">
+          <a:effectRef idx="2">
             <a:schemeClr val="accent1"/>
           </a:effectRef>
           <a:fontRef idx="minor">
-            <a:schemeClr val="tx1"/>
+            <a:schemeClr val="lt1"/>
           </a:fontRef>
         </p:style>
-      </p:cxnSp>
+        <p:txBody>
+          <a:bodyPr rtlCol="0" anchor="ctr"/>
+          <a:lstStyle/>
+          <a:p>
+            <a:pPr algn="ctr"/>
+          </a:p>
+        </p:txBody>
+      </p:sp>
     </p:spTree>
   </p:cSld>
   <p:clrMapOvr>
@@ -43838,7 +44536,7 @@
                 <a:ea typeface="Noto Sans CJK JP"/>
                 <a:cs typeface="Noto Sans"/>
               </a:rPr>
-              <a:t>Appendix 5 参考文献</a:t>
+              <a:t>Appendix 5 物体検出・領域分割の関連文献</a:t>
             </a:r>
           </a:p>
         </p:txBody>
@@ -43851,8 +44549,8 @@
         </p:nvSpPr>
         <p:spPr>
           <a:xfrm>
-            <a:off x="594360" y="1051560"/>
-            <a:ext cx="7955279" cy="411480"/>
+            <a:off x="548640" y="780772"/>
+            <a:ext cx="8046720" cy="414131"/>
           </a:xfrm>
           <a:prstGeom prst="rect">
             <a:avLst/>
@@ -43865,28 +44563,19 @@
           </a:bodyPr>
           <a:lstStyle/>
           <a:p>
-            <a:pPr>
-              <a:lnSpc>
-                <a:spcPct val="110000"/>
-              </a:lnSpc>
-              <a:spcBef>
-                <a:spcPts val="0"/>
-              </a:spcBef>
-              <a:spcAft>
-                <a:spcPts val="0"/>
-              </a:spcAft>
-              <a:buNone/>
-              <a:defRPr sz="2400" lang="ja-JP" b="1">
-                <a:solidFill>
-                  <a:srgbClr val="303437"/>
-                </a:solidFill>
-                <a:latin typeface="Noto Sans"/>
-                <a:ea typeface="Noto Sans CJK JP"/>
-                <a:cs typeface="Noto Sans"/>
-              </a:defRPr>
-            </a:pPr>
-            <a:r>
-              <a:rPr sz="2400" lang="ja-JP" b="1">
+            <a:pPr algn="l">
+              <a:lnSpc>
+                <a:spcPct val="100000"/>
+              </a:lnSpc>
+              <a:spcBef>
+                <a:spcPts val="0"/>
+              </a:spcBef>
+              <a:spcAft>
+                <a:spcPts val="0"/>
+              </a:spcAft>
+            </a:pPr>
+            <a:r>
+              <a:rPr sz="2100" b="1" lang="ja-JP">
                 <a:solidFill>
                   <a:srgbClr val="303437"/>
                 </a:solidFill>
@@ -43907,8 +44596,8 @@
         </p:nvSpPr>
         <p:spPr>
           <a:xfrm>
-            <a:off x="594360" y="1600200"/>
-            <a:ext cx="7955279" cy="566928"/>
+            <a:off x="548640" y="1212979"/>
+            <a:ext cx="8046720" cy="457471"/>
           </a:xfrm>
           <a:prstGeom prst="rect">
             <a:avLst/>
@@ -43921,69 +44610,27 @@
           </a:bodyPr>
           <a:lstStyle/>
           <a:p>
-            <a:pPr>
-              <a:lnSpc>
-                <a:spcPct val="110000"/>
-              </a:lnSpc>
-              <a:spcBef>
-                <a:spcPts val="0"/>
-              </a:spcBef>
-              <a:spcAft>
-                <a:spcPts val="0"/>
-              </a:spcAft>
-              <a:buNone/>
-              <a:defRPr sz="1400" lang="ja-JP" b="0">
+            <a:pPr algn="l">
+              <a:lnSpc>
+                <a:spcPct val="100000"/>
+              </a:lnSpc>
+              <a:spcBef>
+                <a:spcPts val="0"/>
+              </a:spcBef>
+              <a:spcAft>
+                <a:spcPts val="0"/>
+              </a:spcAft>
+            </a:pPr>
+            <a:r>
+              <a:rPr sz="1250" b="0" lang="ja-JP">
                 <a:solidFill>
                   <a:srgbClr val="626669"/>
                 </a:solidFill>
                 <a:latin typeface="Noto Sans"/>
                 <a:ea typeface="Noto Sans CJK JP"/>
                 <a:cs typeface="Noto Sans"/>
-              </a:defRPr>
-            </a:pPr>
-            <a:r>
-              <a:rPr sz="1400" lang="ja-JP" b="0">
-                <a:solidFill>
-                  <a:srgbClr val="626669"/>
-                </a:solidFill>
-                <a:latin typeface="Noto Sans"/>
-                <a:ea typeface="Noto Sans CJK JP"/>
-                <a:cs typeface="Noto Sans"/>
-              </a:rPr>
-              <a:t>Kaiming He, Georgia Gkioxari, Piotr Dollár, Ross Girshick (2017).</a:t>
-            </a:r>
-          </a:p>
-          <a:p>
-            <a:pPr>
-              <a:lnSpc>
-                <a:spcPct val="110000"/>
-              </a:lnSpc>
-              <a:spcBef>
-                <a:spcPts val="0"/>
-              </a:spcBef>
-              <a:spcAft>
-                <a:spcPts val="0"/>
-              </a:spcAft>
-              <a:buNone/>
-              <a:defRPr sz="1400" lang="ja-JP" b="0">
-                <a:solidFill>
-                  <a:srgbClr val="626669"/>
-                </a:solidFill>
-                <a:latin typeface="Noto Sans"/>
-                <a:ea typeface="Noto Sans CJK JP"/>
-                <a:cs typeface="Noto Sans"/>
-              </a:defRPr>
-            </a:pPr>
-            <a:r>
-              <a:rPr sz="1400" lang="ja-JP" b="0">
-                <a:solidFill>
-                  <a:srgbClr val="626669"/>
-                </a:solidFill>
-                <a:latin typeface="Noto Sans"/>
-                <a:ea typeface="Noto Sans CJK JP"/>
-                <a:cs typeface="Noto Sans"/>
-              </a:rPr>
-              <a:t>IEEE International Conference on Computer Vision (ICCV), pp. 2961–2969.</a:t>
+              </a:rPr>
+              <a:t>Kaiming He, Georgia Gkioxari, Piotr Dollár, Ross Girshick (2017). IEEE International Conference on Computer Vision (ICCV), pp. 2961–2969.</a:t>
             </a:r>
           </a:p>
         </p:txBody>
@@ -43996,8 +44643,8 @@
         </p:nvSpPr>
         <p:spPr>
           <a:xfrm>
-            <a:off x="594360" y="2194560"/>
-            <a:ext cx="7955279" cy="475488"/>
+            <a:off x="548640" y="1719165"/>
+            <a:ext cx="8046720" cy="364650"/>
           </a:xfrm>
           <a:prstGeom prst="rect">
             <a:avLst/>
@@ -44010,28 +44657,19 @@
           </a:bodyPr>
           <a:lstStyle/>
           <a:p>
-            <a:pPr>
-              <a:lnSpc>
-                <a:spcPct val="110000"/>
-              </a:lnSpc>
-              <a:spcBef>
-                <a:spcPts val="0"/>
-              </a:spcBef>
-              <a:spcAft>
-                <a:spcPts val="0"/>
-              </a:spcAft>
-              <a:buNone/>
-              <a:defRPr sz="1800" lang="ja-JP" b="0">
-                <a:solidFill>
-                  <a:srgbClr val="303437"/>
-                </a:solidFill>
-                <a:latin typeface="Noto Sans"/>
-                <a:ea typeface="Noto Sans CJK JP"/>
-                <a:cs typeface="Noto Sans"/>
-              </a:defRPr>
-            </a:pPr>
-            <a:r>
-              <a:rPr sz="1800" lang="ja-JP" b="0">
+            <a:pPr algn="l">
+              <a:lnSpc>
+                <a:spcPct val="100000"/>
+              </a:lnSpc>
+              <a:spcBef>
+                <a:spcPts val="0"/>
+              </a:spcBef>
+              <a:spcAft>
+                <a:spcPts val="0"/>
+              </a:spcAft>
+            </a:pPr>
+            <a:r>
+              <a:rPr sz="1700" b="0" lang="ja-JP">
                 <a:solidFill>
                   <a:srgbClr val="303437"/>
                 </a:solidFill>
@@ -44052,8 +44690,8 @@
         </p:nvSpPr>
         <p:spPr>
           <a:xfrm>
-            <a:off x="594360" y="2651760"/>
-            <a:ext cx="7955279" cy="228600"/>
+            <a:off x="548640" y="2083562"/>
+            <a:ext cx="8046720" cy="223877"/>
           </a:xfrm>
           <a:prstGeom prst="rect">
             <a:avLst/>
@@ -44066,28 +44704,19 @@
           </a:bodyPr>
           <a:lstStyle/>
           <a:p>
-            <a:pPr>
-              <a:lnSpc>
-                <a:spcPct val="110000"/>
-              </a:lnSpc>
-              <a:spcBef>
-                <a:spcPts val="0"/>
-              </a:spcBef>
-              <a:spcAft>
-                <a:spcPts val="0"/>
-              </a:spcAft>
-              <a:buNone/>
-              <a:defRPr sz="1150" lang="ja-JP" b="0">
-                <a:solidFill>
-                  <a:srgbClr val="626669"/>
-                </a:solidFill>
-                <a:latin typeface="Noto Sans"/>
-                <a:ea typeface="Noto Sans CJK JP"/>
-                <a:cs typeface="Noto Sans"/>
-              </a:defRPr>
-            </a:pPr>
-            <a:r>
-              <a:rPr sz="1150" lang="ja-JP" b="0">
+            <a:pPr algn="l">
+              <a:lnSpc>
+                <a:spcPct val="100000"/>
+              </a:lnSpc>
+              <a:spcBef>
+                <a:spcPts val="0"/>
+              </a:spcBef>
+              <a:spcAft>
+                <a:spcPts val="0"/>
+              </a:spcAft>
+            </a:pPr>
+            <a:r>
+              <a:rPr sz="1000" b="0" lang="ja-JP">
                 <a:solidFill>
                   <a:srgbClr val="626669"/>
                 </a:solidFill>
@@ -44109,8 +44738,8 @@
         </p:nvSpPr>
         <p:spPr>
           <a:xfrm>
-            <a:off x="594360" y="3182112"/>
-            <a:ext cx="7955279" cy="411480"/>
+            <a:off x="548640" y="3041374"/>
+            <a:ext cx="8046720" cy="414132"/>
           </a:xfrm>
           <a:prstGeom prst="rect">
             <a:avLst/>
@@ -44123,28 +44752,19 @@
           </a:bodyPr>
           <a:lstStyle/>
           <a:p>
-            <a:pPr>
-              <a:lnSpc>
-                <a:spcPct val="110000"/>
-              </a:lnSpc>
-              <a:spcBef>
-                <a:spcPts val="0"/>
-              </a:spcBef>
-              <a:spcAft>
-                <a:spcPts val="0"/>
-              </a:spcAft>
-              <a:buNone/>
-              <a:defRPr sz="2050" lang="ja-JP" b="1">
-                <a:solidFill>
-                  <a:srgbClr val="303437"/>
-                </a:solidFill>
-                <a:latin typeface="Noto Sans"/>
-                <a:ea typeface="Noto Sans CJK JP"/>
-                <a:cs typeface="Noto Sans"/>
-              </a:defRPr>
-            </a:pPr>
-            <a:r>
-              <a:rPr sz="2050" lang="ja-JP" b="1">
+            <a:pPr algn="l">
+              <a:lnSpc>
+                <a:spcPct val="100000"/>
+              </a:lnSpc>
+              <a:spcBef>
+                <a:spcPts val="0"/>
+              </a:spcBef>
+              <a:spcAft>
+                <a:spcPts val="0"/>
+              </a:spcAft>
+            </a:pPr>
+            <a:r>
+              <a:rPr sz="2100" b="1" lang="ja-JP">
                 <a:solidFill>
                   <a:srgbClr val="303437"/>
                 </a:solidFill>
@@ -44165,8 +44785,8 @@
         </p:nvSpPr>
         <p:spPr>
           <a:xfrm>
-            <a:off x="594360" y="3730752"/>
-            <a:ext cx="7955279" cy="566928"/>
+            <a:off x="548640" y="3473580"/>
+            <a:ext cx="8046720" cy="457470"/>
           </a:xfrm>
           <a:prstGeom prst="rect">
             <a:avLst/>
@@ -44179,69 +44799,27 @@
           </a:bodyPr>
           <a:lstStyle/>
           <a:p>
-            <a:pPr>
-              <a:lnSpc>
-                <a:spcPct val="110000"/>
-              </a:lnSpc>
-              <a:spcBef>
-                <a:spcPts val="0"/>
-              </a:spcBef>
-              <a:spcAft>
-                <a:spcPts val="0"/>
-              </a:spcAft>
-              <a:buNone/>
-              <a:defRPr sz="1400" lang="ja-JP" b="0">
+            <a:pPr algn="l">
+              <a:lnSpc>
+                <a:spcPct val="100000"/>
+              </a:lnSpc>
+              <a:spcBef>
+                <a:spcPts val="0"/>
+              </a:spcBef>
+              <a:spcAft>
+                <a:spcPts val="0"/>
+              </a:spcAft>
+            </a:pPr>
+            <a:r>
+              <a:rPr sz="1250" b="0" lang="ja-JP">
                 <a:solidFill>
                   <a:srgbClr val="626669"/>
                 </a:solidFill>
                 <a:latin typeface="Noto Sans"/>
                 <a:ea typeface="Noto Sans CJK JP"/>
                 <a:cs typeface="Noto Sans"/>
-              </a:defRPr>
-            </a:pPr>
-            <a:r>
-              <a:rPr sz="1400" lang="ja-JP" b="0">
-                <a:solidFill>
-                  <a:srgbClr val="626669"/>
-                </a:solidFill>
-                <a:latin typeface="Noto Sans"/>
-                <a:ea typeface="Noto Sans CJK JP"/>
-                <a:cs typeface="Noto Sans"/>
-              </a:rPr>
-              <a:t>Agrim Gupta, Piotr Dollár, Ross Girshick (2019).</a:t>
-            </a:r>
-          </a:p>
-          <a:p>
-            <a:pPr>
-              <a:lnSpc>
-                <a:spcPct val="110000"/>
-              </a:lnSpc>
-              <a:spcBef>
-                <a:spcPts val="0"/>
-              </a:spcBef>
-              <a:spcAft>
-                <a:spcPts val="0"/>
-              </a:spcAft>
-              <a:buNone/>
-              <a:defRPr sz="1400" lang="ja-JP" b="0">
-                <a:solidFill>
-                  <a:srgbClr val="626669"/>
-                </a:solidFill>
-                <a:latin typeface="Noto Sans"/>
-                <a:ea typeface="Noto Sans CJK JP"/>
-                <a:cs typeface="Noto Sans"/>
-              </a:defRPr>
-            </a:pPr>
-            <a:r>
-              <a:rPr sz="1400" lang="ja-JP" b="0">
-                <a:solidFill>
-                  <a:srgbClr val="626669"/>
-                </a:solidFill>
-                <a:latin typeface="Noto Sans"/>
-                <a:ea typeface="Noto Sans CJK JP"/>
-                <a:cs typeface="Noto Sans"/>
-              </a:rPr>
-              <a:t>IEEE/CVF Conference on Computer Vision and Pattern Recognition (CVPR), pp. 5356–5364.</a:t>
+              </a:rPr>
+              <a:t>Agrim Gupta, Piotr Dollár, Ross Girshick (2019). IEEE/CVF Conference on Computer Vision and Pattern Recognition (CVPR), pp. 5356–5364.</a:t>
             </a:r>
           </a:p>
         </p:txBody>
@@ -44254,8 +44832,8 @@
         </p:nvSpPr>
         <p:spPr>
           <a:xfrm>
-            <a:off x="594360" y="4325112"/>
-            <a:ext cx="7955279" cy="475488"/>
+            <a:off x="548640" y="3979765"/>
+            <a:ext cx="8046720" cy="364650"/>
           </a:xfrm>
           <a:prstGeom prst="rect">
             <a:avLst/>
@@ -44268,28 +44846,19 @@
           </a:bodyPr>
           <a:lstStyle/>
           <a:p>
-            <a:pPr>
-              <a:lnSpc>
-                <a:spcPct val="110000"/>
-              </a:lnSpc>
-              <a:spcBef>
-                <a:spcPts val="0"/>
-              </a:spcBef>
-              <a:spcAft>
-                <a:spcPts val="0"/>
-              </a:spcAft>
-              <a:buNone/>
-              <a:defRPr sz="1800" lang="ja-JP" b="0">
-                <a:solidFill>
-                  <a:srgbClr val="303437"/>
-                </a:solidFill>
-                <a:latin typeface="Noto Sans"/>
-                <a:ea typeface="Noto Sans CJK JP"/>
-                <a:cs typeface="Noto Sans"/>
-              </a:defRPr>
-            </a:pPr>
-            <a:r>
-              <a:rPr sz="1800" lang="ja-JP" b="0">
+            <a:pPr algn="l">
+              <a:lnSpc>
+                <a:spcPct val="100000"/>
+              </a:lnSpc>
+              <a:spcBef>
+                <a:spcPts val="0"/>
+              </a:spcBef>
+              <a:spcAft>
+                <a:spcPts val="0"/>
+              </a:spcAft>
+            </a:pPr>
+            <a:r>
+              <a:rPr sz="1700" b="0" lang="ja-JP">
                 <a:solidFill>
                   <a:srgbClr val="303437"/>
                 </a:solidFill>
@@ -44310,8 +44879,8 @@
         </p:nvSpPr>
         <p:spPr>
           <a:xfrm>
-            <a:off x="594360" y="4782312"/>
-            <a:ext cx="7955279" cy="228600"/>
+            <a:off x="548640" y="4344163"/>
+            <a:ext cx="8046720" cy="223877"/>
           </a:xfrm>
           <a:prstGeom prst="rect">
             <a:avLst/>
@@ -44324,76 +44893,75 @@
           </a:bodyPr>
           <a:lstStyle/>
           <a:p>
-            <a:pPr>
-              <a:lnSpc>
-                <a:spcPct val="110000"/>
-              </a:lnSpc>
-              <a:spcBef>
-                <a:spcPts val="0"/>
-              </a:spcBef>
-              <a:spcAft>
-                <a:spcPts val="0"/>
-              </a:spcAft>
-              <a:buNone/>
-              <a:defRPr sz="1150" lang="ja-JP" b="0">
+            <a:pPr algn="l">
+              <a:lnSpc>
+                <a:spcPct val="100000"/>
+              </a:lnSpc>
+              <a:spcBef>
+                <a:spcPts val="0"/>
+              </a:spcBef>
+              <a:spcAft>
+                <a:spcPts val="0"/>
+              </a:spcAft>
+            </a:pPr>
+            <a:r>
+              <a:rPr sz="1000" b="0" lang="ja-JP">
                 <a:solidFill>
                   <a:srgbClr val="626669"/>
                 </a:solidFill>
                 <a:latin typeface="Noto Sans"/>
                 <a:ea typeface="Noto Sans CJK JP"/>
                 <a:cs typeface="Noto Sans"/>
-              </a:defRPr>
-            </a:pPr>
-            <a:r>
-              <a:rPr sz="1150" lang="ja-JP" b="0">
-                <a:solidFill>
-                  <a:srgbClr val="626669"/>
-                </a:solidFill>
-                <a:latin typeface="Noto Sans"/>
-                <a:ea typeface="Noto Sans CJK JP"/>
-                <a:cs typeface="Noto Sans"/>
-                <a:hlinkClick r:id="rId4"/>
+                <a:hlinkClick r:id="rId2"/>
               </a:rPr>
               <a:t>https://arxiv.org/abs/1908.03195</a:t>
             </a:r>
           </a:p>
         </p:txBody>
       </p:sp>
-      <p:cxnSp>
-        <p:nvCxnSpPr>
-          <p:cNvPr id="12" name="Connector 11"/>
-          <p:cNvCxnSpPr/>
+      <p:sp>
+        <p:nvSpPr>
+          <p:cNvPr id="12" name="Rectangle 11"/>
+          <p:cNvSpPr/>
           <p:nvPr/>
-        </p:nvCxnSpPr>
-        <p:spPr>
-          <a:xfrm>
-            <a:off x="594360" y="2999232"/>
-            <a:ext cx="7955280" cy="0"/>
-          </a:xfrm>
-          <a:prstGeom prst="line">
+        </p:nvSpPr>
+        <p:spPr>
+          <a:xfrm>
+            <a:off x="548640" y="2852928"/>
+            <a:ext cx="8046720" cy="7620"/>
+          </a:xfrm>
+          <a:prstGeom prst="rect">
             <a:avLst/>
           </a:prstGeom>
-          <a:ln w="10160">
-            <a:solidFill>
-              <a:srgbClr val="626669"/>
-            </a:solidFill>
+          <a:solidFill>
+            <a:srgbClr val="C9CCCA"/>
+          </a:solidFill>
+          <a:ln>
+            <a:noFill/>
           </a:ln>
         </p:spPr>
         <p:style>
-          <a:lnRef idx="2">
+          <a:lnRef idx="1">
             <a:schemeClr val="accent1"/>
           </a:lnRef>
-          <a:fillRef idx="0">
+          <a:fillRef idx="3">
             <a:schemeClr val="accent1"/>
           </a:fillRef>
-          <a:effectRef idx="0">
+          <a:effectRef idx="2">
             <a:schemeClr val="accent1"/>
           </a:effectRef>
           <a:fontRef idx="minor">
-            <a:schemeClr val="tx1"/>
+            <a:schemeClr val="lt1"/>
           </a:fontRef>
         </p:style>
-      </p:cxnSp>
+        <p:txBody>
+          <a:bodyPr rtlCol="0" anchor="ctr"/>
+          <a:lstStyle/>
+          <a:p>
+            <a:pPr algn="ctr"/>
+          </a:p>
+        </p:txBody>
+      </p:sp>
     </p:spTree>
   </p:cSld>
   <p:clrMapOvr>
@@ -44429,12 +44997,12 @@
           </a:xfrm>
         </p:spPr>
         <p:txBody>
-          <a:bodyPr wrap="square" anchor="t" lIns="0" rIns="0" tIns="0" bIns="0"/>
+          <a:bodyPr wrap="none" anchor="t" lIns="0" rIns="0" tIns="0" bIns="0"/>
           <a:lstStyle/>
           <a:p>
             <a:pPr algn="l">
               <a:lnSpc>
-                <a:spcPct val="115000"/>
+                <a:spcPct val="100000"/>
               </a:lnSpc>
               <a:spcBef>
                 <a:spcPts val="0"/>
@@ -44453,7 +45021,7 @@
               </a:defRPr>
             </a:pPr>
             <a:r>
-              <a:rPr lang="ja-JP" sz="2800" b="1">
+              <a:rPr sz="2800" b="1" lang="ja-JP">
                 <a:solidFill>
                   <a:srgbClr val="303437"/>
                 </a:solidFill>
@@ -44515,7 +45083,7 @@
                 <a:ea typeface="Noto Sans CJK JP"/>
                 <a:cs typeface="Noto Sans"/>
               </a:rPr>
-              <a:t>1 認識課題と実画像</a:t>
+              <a:t>1 COCOの認識課題と領域注釈の実例</a:t>
             </a:r>
           </a:p>
         </p:txBody>

--- a/slides/datasets-in-10-minutes-coco.pptx
+++ b/slides/datasets-in-10-minutes-coco.pptx
@@ -7352,7 +7352,7 @@
                 <a:ea typeface="Noto Sans CJK JP"/>
                 <a:cs typeface="Noto Sans"/>
               </a:rPr>
-              <a:t>1 COCOの認識課題と領域注釈の実例</a:t>
+              <a:t>1. COCOの認識課題と領域注釈の実例</a:t>
             </a:r>
           </a:p>
         </p:txBody>
@@ -7586,7 +7586,7 @@
                 <a:ea typeface="Noto Sans CJK JP"/>
                 <a:cs typeface="Noto Sans"/>
               </a:rPr>
-              <a:t>1 COCOの認識課題と領域注釈の実例</a:t>
+              <a:t>1. COCOの認識課題と領域注釈の実例</a:t>
             </a:r>
           </a:p>
         </p:txBody>
@@ -7835,7 +7835,7 @@
                 <a:ea typeface="Noto Sans CJK JP"/>
                 <a:cs typeface="Noto Sans"/>
               </a:rPr>
-              <a:t>1 COCOの認識課題と領域注釈の実例</a:t>
+              <a:t>1. COCOの認識課題と領域注釈の実例</a:t>
             </a:r>
           </a:p>
         </p:txBody>
@@ -8409,7 +8409,7 @@
                 <a:ea typeface="Noto Sans CJK JP"/>
                 <a:cs typeface="Noto Sans"/>
               </a:rPr>
-              <a:t>1 COCOの認識課題と領域注釈の実例</a:t>
+              <a:t>1. COCOの認識課題と領域注釈の実例</a:t>
             </a:r>
           </a:p>
         </p:txBody>
@@ -8652,7 +8652,7 @@
                 <a:ea typeface="Noto Sans CJK JP"/>
                 <a:cs typeface="Noto Sans"/>
               </a:rPr>
-              <a:t>1 COCOの認識課題と領域注釈の実例</a:t>
+              <a:t>1. COCOの認識課題と領域注釈の実例</a:t>
             </a:r>
           </a:p>
         </p:txBody>
@@ -9226,7 +9226,7 @@
                 <a:ea typeface="Noto Sans CJK JP"/>
                 <a:cs typeface="Noto Sans"/>
               </a:rPr>
-              <a:t>1 COCOの認識課題と領域注釈の実例</a:t>
+              <a:t>1. COCOの認識課題と領域注釈の実例</a:t>
             </a:r>
           </a:p>
         </p:txBody>
@@ -9539,7 +9539,7 @@
                 <a:ea typeface="Noto Sans CJK JP"/>
                 <a:cs typeface="Noto Sans"/>
               </a:rPr>
-              <a:t>1 COCOの認識課題と領域注釈の実例</a:t>
+              <a:t>1. COCOの認識課題と領域注釈の実例</a:t>
             </a:r>
           </a:p>
         </p:txBody>
@@ -9734,7 +9734,7 @@
                 <a:ea typeface="Noto Sans CJK JP"/>
                 <a:cs typeface="Noto Sans"/>
               </a:rPr>
-              <a:t>2 画像の収集方法と物体注釈の構造</a:t>
+              <a:t>2. 画像の収集方法と物体注釈の構造</a:t>
             </a:r>
           </a:p>
         </p:txBody>
@@ -9788,7 +9788,7 @@
                 <a:ea typeface="Noto Sans CJK JP"/>
                 <a:cs typeface="Noto Sans"/>
               </a:rPr>
-              <a:t>2 画像の収集方法と物体注釈の構造</a:t>
+              <a:t>2. 画像の収集方法と物体注釈の構造</a:t>
             </a:r>
           </a:p>
         </p:txBody>
@@ -10040,7 +10040,7 @@
                 <a:ea typeface="Noto Sans CJK JP"/>
                 <a:cs typeface="Noto Sans"/>
               </a:rPr>
-              <a:t>2 画像の収集方法と物体注釈の構造</a:t>
+              <a:t>2. 画像の収集方法と物体注釈の構造</a:t>
             </a:r>
           </a:p>
         </p:txBody>
@@ -10409,7 +10409,7 @@
                 <a:ea typeface="Noto Sans CJK JP"/>
                 <a:cs typeface="Noto Sans"/>
               </a:rPr>
-              <a:t>2 画像の収集方法と物体注釈の構造</a:t>
+              <a:t>2. 画像の収集方法と物体注釈の構造</a:t>
             </a:r>
           </a:p>
         </p:txBody>
@@ -10937,7 +10937,7 @@
                 <a:ea typeface="Noto Sans CJK JP"/>
                 <a:cs typeface="Noto Sans"/>
               </a:rPr>
-              <a:t>2 画像の収集方法と物体注釈の構造</a:t>
+              <a:t>2. 画像の収集方法と物体注釈の構造</a:t>
             </a:r>
           </a:p>
         </p:txBody>
@@ -12097,7 +12097,7 @@
                 <a:ea typeface="Noto Sans CJK JP"/>
                 <a:cs typeface="Noto Sans"/>
               </a:rPr>
-              <a:t>2 画像の収集方法と物体注釈の構造</a:t>
+              <a:t>2. 画像の収集方法と物体注釈の構造</a:t>
             </a:r>
           </a:p>
         </p:txBody>
@@ -12466,7 +12466,7 @@
                 <a:ea typeface="Noto Sans CJK JP"/>
                 <a:cs typeface="Noto Sans"/>
               </a:rPr>
-              <a:t>2 画像の収集方法と物体注釈の構造</a:t>
+              <a:t>2. 画像の収集方法と物体注釈の構造</a:t>
             </a:r>
           </a:p>
         </p:txBody>
@@ -12905,7 +12905,7 @@
                 <a:ea typeface="Noto Sans CJK JP"/>
                 <a:cs typeface="Noto Sans"/>
               </a:rPr>
-              <a:t>2 画像の収集方法と物体注釈の構造</a:t>
+              <a:t>2. 画像の収集方法と物体注釈の構造</a:t>
             </a:r>
           </a:p>
         </p:txBody>
@@ -13274,7 +13274,7 @@
                 <a:ea typeface="Noto Sans CJK JP"/>
                 <a:cs typeface="Noto Sans"/>
               </a:rPr>
-              <a:t>2 画像の収集方法と物体注釈の構造</a:t>
+              <a:t>2. 画像の収集方法と物体注釈の構造</a:t>
             </a:r>
           </a:p>
         </p:txBody>
@@ -13593,7 +13593,7 @@
                 <a:ea typeface="Noto Sans CJK JP"/>
                 <a:cs typeface="Noto Sans"/>
               </a:rPr>
-              <a:t>2 画像の収集方法と物体注釈の構造</a:t>
+              <a:t>2. 画像の収集方法と物体注釈の構造</a:t>
             </a:r>
           </a:p>
         </p:txBody>
@@ -13912,7 +13912,7 @@
                 <a:ea typeface="Noto Sans CJK JP"/>
                 <a:cs typeface="Noto Sans"/>
               </a:rPr>
-              <a:t>2 画像の収集方法と物体注釈の構造</a:t>
+              <a:t>2. 画像の収集方法と物体注釈の構造</a:t>
             </a:r>
           </a:p>
         </p:txBody>
@@ -14149,7 +14149,7 @@
                 <a:ea typeface="Noto Sans CJK JP"/>
                 <a:cs typeface="Noto Sans"/>
               </a:rPr>
-              <a:t>2 画像の収集方法と物体注釈の構造</a:t>
+              <a:t>2. 画像の収集方法と物体注釈の構造</a:t>
             </a:r>
           </a:p>
         </p:txBody>
@@ -16647,7 +16647,7 @@
                 <a:ea typeface="Noto Sans CJK JP"/>
                 <a:cs typeface="Noto Sans"/>
               </a:rPr>
-              <a:t>2 画像の収集方法と物体注釈の構造</a:t>
+              <a:t>2. 画像の収集方法と物体注釈の構造</a:t>
             </a:r>
           </a:p>
         </p:txBody>
@@ -19278,7 +19278,7 @@
                 <a:ea typeface="Noto Sans CJK JP"/>
                 <a:cs typeface="Noto Sans"/>
               </a:rPr>
-              <a:t>2 画像の収集方法と物体注釈の構造</a:t>
+              <a:t>2. 画像の収集方法と物体注釈の構造</a:t>
             </a:r>
           </a:p>
         </p:txBody>
@@ -19770,7 +19770,7 @@
                 <a:ea typeface="Noto Sans CJK JP"/>
                 <a:cs typeface="Noto Sans"/>
               </a:rPr>
-              <a:t>1 COCOの認識課題と領域注釈の実例</a:t>
+              <a:t>1. COCOの認識課題と領域注釈の実例</a:t>
             </a:r>
           </a:p>
         </p:txBody>
@@ -19824,7 +19824,7 @@
                 <a:ea typeface="Noto Sans CJK JP"/>
                 <a:cs typeface="Noto Sans"/>
               </a:rPr>
-              <a:t>1 COCOの認識課題と領域注釈の実例</a:t>
+              <a:t>1. COCOの認識課題と領域注釈の実例</a:t>
             </a:r>
           </a:p>
         </p:txBody>
@@ -19950,7 +19950,7 @@
                 <a:ea typeface="Noto Sans CJK JP"/>
                 <a:cs typeface="Noto Sans"/>
               </a:rPr>
-              <a:t>2 画像の収集方法と物体注釈の構造</a:t>
+              <a:t>2. 画像の収集方法と物体注釈の構造</a:t>
             </a:r>
           </a:p>
         </p:txBody>
@@ -21066,7 +21066,7 @@
                 <a:ea typeface="Noto Sans CJK JP"/>
                 <a:cs typeface="Noto Sans"/>
               </a:rPr>
-              <a:t>2 画像の収集方法と物体注釈の構造</a:t>
+              <a:t>2. 画像の収集方法と物体注釈の構造</a:t>
             </a:r>
           </a:p>
         </p:txBody>
@@ -21408,7 +21408,7 @@
                 <a:ea typeface="Noto Sans CJK JP"/>
                 <a:cs typeface="Noto Sans"/>
               </a:rPr>
-              <a:t>2 画像の収集方法と物体注釈の構造</a:t>
+              <a:t>2. 画像の収集方法と物体注釈の構造</a:t>
             </a:r>
           </a:p>
         </p:txBody>
@@ -21647,7 +21647,7 @@
                 <a:ea typeface="Noto Sans CJK JP"/>
                 <a:cs typeface="Noto Sans"/>
               </a:rPr>
-              <a:t>2 画像の収集方法と物体注釈の構造</a:t>
+              <a:t>2. 画像の収集方法と物体注釈の構造</a:t>
             </a:r>
           </a:p>
         </p:txBody>
@@ -23095,7 +23095,7 @@
                 <a:ea typeface="Noto Sans CJK JP"/>
                 <a:cs typeface="Noto Sans"/>
               </a:rPr>
-              <a:t>2 画像の収集方法と物体注釈の構造</a:t>
+              <a:t>2. 画像の収集方法と物体注釈の構造</a:t>
             </a:r>
           </a:p>
         </p:txBody>
@@ -23269,7 +23269,7 @@
                 <a:ea typeface="Noto Sans CJK JP"/>
                 <a:cs typeface="Noto Sans"/>
               </a:rPr>
-              <a:t>3 物体検出・領域分割の評価とモデル性能</a:t>
+              <a:t>3. 物体検出・領域分割の評価とモデル性能</a:t>
             </a:r>
           </a:p>
         </p:txBody>
@@ -23323,7 +23323,7 @@
                 <a:ea typeface="Noto Sans CJK JP"/>
                 <a:cs typeface="Noto Sans"/>
               </a:rPr>
-              <a:t>3 物体検出・領域分割の評価とモデル性能</a:t>
+              <a:t>3. 物体検出・領域分割の評価とモデル性能</a:t>
             </a:r>
           </a:p>
         </p:txBody>
@@ -23449,7 +23449,7 @@
                 <a:ea typeface="Noto Sans CJK JP"/>
                 <a:cs typeface="Noto Sans"/>
               </a:rPr>
-              <a:t>3 物体検出・領域分割の評価とモデル性能</a:t>
+              <a:t>3. 物体検出・領域分割の評価とモデル性能</a:t>
             </a:r>
           </a:p>
         </p:txBody>
@@ -24155,7 +24155,7 @@
                 <a:ea typeface="Noto Sans CJK JP"/>
                 <a:cs typeface="Noto Sans"/>
               </a:rPr>
-              <a:t>3 物体検出・領域分割の評価とモデル性能</a:t>
+              <a:t>3. 物体検出・領域分割の評価とモデル性能</a:t>
             </a:r>
           </a:p>
         </p:txBody>
@@ -24348,7 +24348,7 @@
                 <a:ea typeface="Noto Sans CJK JP"/>
                 <a:cs typeface="Noto Sans"/>
               </a:rPr>
-              <a:t>3 物体検出・領域分割の評価とモデル性能</a:t>
+              <a:t>3. 物体検出・領域分割の評価とモデル性能</a:t>
             </a:r>
           </a:p>
         </p:txBody>
@@ -25326,7 +25326,7 @@
                 <a:ea typeface="Noto Sans CJK JP"/>
                 <a:cs typeface="Noto Sans"/>
               </a:rPr>
-              <a:t>3 物体検出・領域分割の評価とモデル性能</a:t>
+              <a:t>3. 物体検出・領域分割の評価とモデル性能</a:t>
             </a:r>
           </a:p>
         </p:txBody>
@@ -25519,7 +25519,7 @@
                 <a:ea typeface="Noto Sans CJK JP"/>
                 <a:cs typeface="Noto Sans"/>
               </a:rPr>
-              <a:t>1 COCOの認識課題と領域注釈の実例</a:t>
+              <a:t>1. COCOの認識課題と領域注釈の実例</a:t>
             </a:r>
           </a:p>
         </p:txBody>
@@ -25851,7 +25851,7 @@
                 <a:ea typeface="Noto Sans CJK JP"/>
                 <a:cs typeface="Noto Sans"/>
               </a:rPr>
-              <a:t>3 物体検出・領域分割の評価とモデル性能</a:t>
+              <a:t>3. 物体検出・領域分割の評価とモデル性能</a:t>
             </a:r>
           </a:p>
         </p:txBody>
@@ -26170,7 +26170,7 @@
                 <a:ea typeface="Noto Sans CJK JP"/>
                 <a:cs typeface="Noto Sans"/>
               </a:rPr>
-              <a:t>3 物体検出・領域分割の評価とモデル性能</a:t>
+              <a:t>3. 物体検出・領域分割の評価とモデル性能</a:t>
             </a:r>
           </a:p>
         </p:txBody>
@@ -26489,7 +26489,7 @@
                 <a:ea typeface="Noto Sans CJK JP"/>
                 <a:cs typeface="Noto Sans"/>
               </a:rPr>
-              <a:t>3 物体検出・領域分割の評価とモデル性能</a:t>
+              <a:t>3. 物体検出・領域分割の評価とモデル性能</a:t>
             </a:r>
           </a:p>
         </p:txBody>
@@ -27092,7 +27092,7 @@
                 <a:ea typeface="Noto Sans CJK JP"/>
                 <a:cs typeface="Noto Sans"/>
               </a:rPr>
-              <a:t>3 物体検出・領域分割の評価とモデル性能</a:t>
+              <a:t>3. 物体検出・領域分割の評価とモデル性能</a:t>
             </a:r>
           </a:p>
         </p:txBody>
@@ -27522,7 +27522,7 @@
                 <a:ea typeface="Noto Sans CJK JP"/>
                 <a:cs typeface="Noto Sans"/>
               </a:rPr>
-              <a:t>3 物体検出・領域分割の評価とモデル性能</a:t>
+              <a:t>3. 物体検出・領域分割の評価とモデル性能</a:t>
             </a:r>
           </a:p>
         </p:txBody>
@@ -28919,7 +28919,7 @@
                 <a:ea typeface="Noto Sans CJK JP"/>
                 <a:cs typeface="Noto Sans"/>
               </a:rPr>
-              <a:t>3 物体検出・領域分割の評価とモデル性能</a:t>
+              <a:t>3. 物体検出・領域分割の評価とモデル性能</a:t>
             </a:r>
           </a:p>
         </p:txBody>
@@ -29238,7 +29238,7 @@
                 <a:ea typeface="Noto Sans CJK JP"/>
                 <a:cs typeface="Noto Sans"/>
               </a:rPr>
-              <a:t>3 物体検出・領域分割の評価とモデル性能</a:t>
+              <a:t>3. 物体検出・領域分割の評価とモデル性能</a:t>
             </a:r>
           </a:p>
         </p:txBody>
@@ -29568,7 +29568,7 @@
                 <a:ea typeface="Noto Sans CJK JP"/>
                 <a:cs typeface="Noto Sans"/>
               </a:rPr>
-              <a:t>3 物体検出・領域分割の評価とモデル性能</a:t>
+              <a:t>3. 物体検出・領域分割の評価とモデル性能</a:t>
             </a:r>
           </a:p>
         </p:txBody>
@@ -29757,7 +29757,7 @@
                 <a:ea typeface="Noto Sans CJK JP"/>
                 <a:cs typeface="Noto Sans"/>
               </a:rPr>
-              <a:t>4 COCOの利用動向と画像・注釈の入手方法</a:t>
+              <a:t>4. COCOの利用動向と画像・注釈の入手方法</a:t>
             </a:r>
           </a:p>
         </p:txBody>
@@ -29811,7 +29811,7 @@
                 <a:ea typeface="Noto Sans CJK JP"/>
                 <a:cs typeface="Noto Sans"/>
               </a:rPr>
-              <a:t>4 COCOの利用動向と画像・注釈の入手方法</a:t>
+              <a:t>4. COCOの利用動向と画像・注釈の入手方法</a:t>
             </a:r>
           </a:p>
         </p:txBody>
@@ -30063,7 +30063,7 @@
                 <a:ea typeface="Noto Sans CJK JP"/>
                 <a:cs typeface="Noto Sans"/>
               </a:rPr>
-              <a:t>4 COCOの利用動向と画像・注釈の入手方法</a:t>
+              <a:t>4. COCOの利用動向と画像・注釈の入手方法</a:t>
             </a:r>
           </a:p>
         </p:txBody>
@@ -30426,7 +30426,7 @@
                 <a:ea typeface="Noto Sans CJK JP"/>
                 <a:cs typeface="Noto Sans"/>
               </a:rPr>
-              <a:t>1 COCOの認識課題と領域注釈の実例</a:t>
+              <a:t>1. COCOの認識課題と領域注釈の実例</a:t>
             </a:r>
           </a:p>
         </p:txBody>
@@ -30745,7 +30745,7 @@
                 <a:ea typeface="Noto Sans CJK JP"/>
                 <a:cs typeface="Noto Sans"/>
               </a:rPr>
-              <a:t>4 COCOの利用動向と画像・注釈の入手方法</a:t>
+              <a:t>4. COCOの利用動向と画像・注釈の入手方法</a:t>
             </a:r>
           </a:p>
         </p:txBody>
@@ -31058,7 +31058,7 @@
                 <a:ea typeface="Noto Sans CJK JP"/>
                 <a:cs typeface="Noto Sans"/>
               </a:rPr>
-              <a:t>4 COCOの利用動向と画像・注釈の入手方法</a:t>
+              <a:t>4. COCOの利用動向と画像・注釈の入手方法</a:t>
             </a:r>
           </a:p>
         </p:txBody>
@@ -31925,7 +31925,7 @@
                 <a:ea typeface="Noto Sans CJK JP"/>
                 <a:cs typeface="Noto Sans"/>
               </a:rPr>
-              <a:t>4 COCOの利用動向と画像・注釈の入手方法</a:t>
+              <a:t>4. COCOの利用動向と画像・注釈の入手方法</a:t>
             </a:r>
           </a:p>
         </p:txBody>
@@ -32553,7 +32553,7 @@
                 <a:ea typeface="Noto Sans CJK JP"/>
                 <a:cs typeface="Noto Sans"/>
               </a:rPr>
-              <a:t>4 COCOの利用動向と画像・注釈の入手方法</a:t>
+              <a:t>4. COCOの利用動向と画像・注釈の入手方法</a:t>
             </a:r>
           </a:p>
         </p:txBody>
@@ -32872,7 +32872,7 @@
                 <a:ea typeface="Noto Sans CJK JP"/>
                 <a:cs typeface="Noto Sans"/>
               </a:rPr>
-              <a:t>4 COCOの利用動向と画像・注釈の入手方法</a:t>
+              <a:t>4. COCOの利用動向と画像・注釈の入手方法</a:t>
             </a:r>
           </a:p>
         </p:txBody>
@@ -33566,7 +33566,7 @@
                 <a:ea typeface="Noto Sans CJK JP"/>
                 <a:cs typeface="Noto Sans"/>
               </a:rPr>
-              <a:t>Appendix 1 開発者の研究と領域認識の評価仕様</a:t>
+              <a:t>Appendix 1. 開発者の研究と領域認識の評価仕様</a:t>
             </a:r>
           </a:p>
         </p:txBody>
@@ -33867,7 +33867,7 @@
                 <a:ea typeface="Noto Sans CJK JP"/>
                 <a:cs typeface="Noto Sans"/>
               </a:rPr>
-              <a:t>Appendix 1 開発者の研究と領域認識の評価仕様</a:t>
+              <a:t>Appendix 1. 開発者の研究と領域認識の評価仕様</a:t>
             </a:r>
           </a:p>
         </p:txBody>
@@ -35197,7 +35197,7 @@
                 <a:ea typeface="Noto Sans CJK JP"/>
                 <a:cs typeface="Noto Sans"/>
               </a:rPr>
-              <a:t>Appendix 1 開発者の研究と領域認識の評価仕様</a:t>
+              <a:t>Appendix 1. 開発者の研究と領域認識の評価仕様</a:t>
             </a:r>
           </a:p>
         </p:txBody>
@@ -35408,7 +35408,7 @@
                 <a:ea typeface="Noto Sans CJK JP"/>
                 <a:cs typeface="Noto Sans"/>
               </a:rPr>
-              <a:t>1 COCOの認識課題と領域注釈の実例</a:t>
+              <a:t>1. COCOの認識課題と領域注釈の実例</a:t>
             </a:r>
           </a:p>
         </p:txBody>
@@ -36381,7 +36381,7 @@
                 <a:ea typeface="Noto Sans CJK JP"/>
                 <a:cs typeface="Noto Sans"/>
               </a:rPr>
-              <a:t>Appendix 1 開発者の研究と領域認識の評価仕様</a:t>
+              <a:t>Appendix 1. 開発者の研究と領域認識の評価仕様</a:t>
             </a:r>
           </a:p>
         </p:txBody>
@@ -36678,7 +36678,7 @@
                 <a:ea typeface="Noto Sans CJK JP"/>
                 <a:cs typeface="Noto Sans"/>
               </a:rPr>
-              <a:t>Appendix 2 128画像の部分集合における注釈数の分布</a:t>
+              <a:t>Appendix 2. 128画像の部分集合における注釈数の分布</a:t>
             </a:r>
           </a:p>
         </p:txBody>
@@ -36871,7 +36871,7 @@
                 <a:ea typeface="Noto Sans CJK JP"/>
                 <a:cs typeface="Noto Sans"/>
               </a:rPr>
-              <a:t>Appendix 2 128画像の部分集合における注釈数の分布</a:t>
+              <a:t>Appendix 2. 128画像の部分集合における注釈数の分布</a:t>
             </a:r>
           </a:p>
         </p:txBody>
@@ -37120,7 +37120,7 @@
                 <a:ea typeface="Noto Sans CJK JP"/>
                 <a:cs typeface="Noto Sans"/>
               </a:rPr>
-              <a:t>Appendix 2 128画像の部分集合における注釈数の分布</a:t>
+              <a:t>Appendix 2. 128画像の部分集合における注釈数の分布</a:t>
             </a:r>
           </a:p>
         </p:txBody>
@@ -37987,7 +37987,7 @@
                 <a:ea typeface="Noto Sans CJK JP"/>
                 <a:cs typeface="Noto Sans"/>
               </a:rPr>
-              <a:t>Appendix 2 128画像の部分集合における注釈数の分布</a:t>
+              <a:t>Appendix 2. 128画像の部分集合における注釈数の分布</a:t>
             </a:r>
           </a:p>
         </p:txBody>
@@ -38236,7 +38236,7 @@
                 <a:ea typeface="Noto Sans CJK JP"/>
                 <a:cs typeface="Noto Sans"/>
               </a:rPr>
-              <a:t>Appendix 2 128画像の部分集合における注釈数の分布</a:t>
+              <a:t>Appendix 2. 128画像の部分集合における注釈数の分布</a:t>
             </a:r>
           </a:p>
         </p:txBody>
@@ -38485,7 +38485,7 @@
                 <a:ea typeface="Noto Sans CJK JP"/>
                 <a:cs typeface="Noto Sans"/>
               </a:rPr>
-              <a:t>Appendix 3 画像と物体領域の追加例</a:t>
+              <a:t>Appendix 3. 画像と物体領域の追加例</a:t>
             </a:r>
           </a:p>
         </p:txBody>
@@ -38734,7 +38734,7 @@
                 <a:ea typeface="Noto Sans CJK JP"/>
                 <a:cs typeface="Noto Sans"/>
               </a:rPr>
-              <a:t>Appendix 3 画像と物体領域の追加例</a:t>
+              <a:t>Appendix 3. 画像と物体領域の追加例</a:t>
             </a:r>
           </a:p>
         </p:txBody>
@@ -38983,7 +38983,7 @@
                 <a:ea typeface="Noto Sans CJK JP"/>
                 <a:cs typeface="Noto Sans"/>
               </a:rPr>
-              <a:t>Appendix 3 画像と物体領域の追加例</a:t>
+              <a:t>Appendix 3. 画像と物体領域の追加例</a:t>
             </a:r>
           </a:p>
         </p:txBody>
@@ -39389,7 +39389,7 @@
                 <a:ea typeface="Noto Sans CJK JP"/>
                 <a:cs typeface="Noto Sans"/>
               </a:rPr>
-              <a:t>Appendix 3 画像と物体領域の追加例</a:t>
+              <a:t>Appendix 3. 画像と物体領域の追加例</a:t>
             </a:r>
           </a:p>
         </p:txBody>
@@ -39764,7 +39764,7 @@
                 <a:ea typeface="Noto Sans CJK JP"/>
                 <a:cs typeface="Noto Sans"/>
               </a:rPr>
-              <a:t>1 COCOの認識課題と領域注釈の実例</a:t>
+              <a:t>1. COCOの認識課題と領域注釈の実例</a:t>
             </a:r>
           </a:p>
         </p:txBody>
@@ -39957,7 +39957,7 @@
                 <a:ea typeface="Noto Sans CJK JP"/>
                 <a:cs typeface="Noto Sans"/>
               </a:rPr>
-              <a:t>Appendix 3 画像と物体領域の追加例</a:t>
+              <a:t>Appendix 3. 画像と物体領域の追加例</a:t>
             </a:r>
           </a:p>
         </p:txBody>
@@ -40206,7 +40206,7 @@
                 <a:ea typeface="Noto Sans CJK JP"/>
                 <a:cs typeface="Noto Sans"/>
               </a:rPr>
-              <a:t>Appendix 3 画像と物体領域の追加例</a:t>
+              <a:t>Appendix 3. 画像と物体領域の追加例</a:t>
             </a:r>
           </a:p>
         </p:txBody>
@@ -40455,7 +40455,7 @@
                 <a:ea typeface="Noto Sans CJK JP"/>
                 <a:cs typeface="Noto Sans"/>
               </a:rPr>
-              <a:t>Appendix 3 画像と物体領域の追加例</a:t>
+              <a:t>Appendix 3. 画像と物体領域の追加例</a:t>
             </a:r>
           </a:p>
         </p:txBody>
@@ -40704,7 +40704,7 @@
                 <a:ea typeface="Noto Sans CJK JP"/>
                 <a:cs typeface="Noto Sans"/>
               </a:rPr>
-              <a:t>Appendix 3 画像と物体領域の追加例</a:t>
+              <a:t>Appendix 3. 画像と物体領域の追加例</a:t>
             </a:r>
           </a:p>
         </p:txBody>
@@ -40953,7 +40953,7 @@
                 <a:ea typeface="Noto Sans CJK JP"/>
                 <a:cs typeface="Noto Sans"/>
               </a:rPr>
-              <a:t>Appendix 3 画像と物体領域の追加例</a:t>
+              <a:t>Appendix 3. 画像と物体領域の追加例</a:t>
             </a:r>
           </a:p>
         </p:txBody>
@@ -41202,7 +41202,7 @@
                 <a:ea typeface="Noto Sans CJK JP"/>
                 <a:cs typeface="Noto Sans"/>
               </a:rPr>
-              <a:t>Appendix 3 画像と物体領域の追加例</a:t>
+              <a:t>Appendix 3. 画像と物体領域の追加例</a:t>
             </a:r>
           </a:p>
         </p:txBody>
@@ -41577,7 +41577,7 @@
                 <a:ea typeface="Noto Sans CJK JP"/>
                 <a:cs typeface="Noto Sans"/>
               </a:rPr>
-              <a:t>Appendix 4 全80物体カテゴリと画像・注釈の利用条件</a:t>
+              <a:t>Appendix 4. 全80物体カテゴリと画像・注釈の利用条件</a:t>
             </a:r>
           </a:p>
         </p:txBody>
@@ -41907,7 +41907,7 @@
                 <a:ea typeface="Noto Sans CJK JP"/>
                 <a:cs typeface="Noto Sans"/>
               </a:rPr>
-              <a:t>Appendix 4 全80物体カテゴリと画像・注釈の利用条件</a:t>
+              <a:t>Appendix 4. 全80物体カテゴリと画像・注釈の利用条件</a:t>
             </a:r>
           </a:p>
         </p:txBody>
@@ -42237,7 +42237,7 @@
                 <a:ea typeface="Noto Sans CJK JP"/>
                 <a:cs typeface="Noto Sans"/>
               </a:rPr>
-              <a:t>Appendix 4 全80物体カテゴリと画像・注釈の利用条件</a:t>
+              <a:t>Appendix 4. 全80物体カテゴリと画像・注釈の利用条件</a:t>
             </a:r>
           </a:p>
         </p:txBody>
@@ -42567,7 +42567,7 @@
                 <a:ea typeface="Noto Sans CJK JP"/>
                 <a:cs typeface="Noto Sans"/>
               </a:rPr>
-              <a:t>Appendix 4 全80物体カテゴリと画像・注釈の利用条件</a:t>
+              <a:t>Appendix 4. 全80物体カテゴリと画像・注釈の利用条件</a:t>
             </a:r>
           </a:p>
         </p:txBody>
@@ -42897,7 +42897,7 @@
                 <a:ea typeface="Noto Sans CJK JP"/>
                 <a:cs typeface="Noto Sans"/>
               </a:rPr>
-              <a:t>1 COCOの認識課題と領域注釈の実例</a:t>
+              <a:t>1. COCOの認識課題と領域注釈の実例</a:t>
             </a:r>
           </a:p>
         </p:txBody>
@@ -43216,7 +43216,7 @@
                 <a:ea typeface="Noto Sans CJK JP"/>
                 <a:cs typeface="Noto Sans"/>
               </a:rPr>
-              <a:t>Appendix 4 全80物体カテゴリと画像・注釈の利用条件</a:t>
+              <a:t>Appendix 4. 全80物体カテゴリと画像・注釈の利用条件</a:t>
             </a:r>
           </a:p>
         </p:txBody>
@@ -43442,7 +43442,7 @@
                 <a:ea typeface="Noto Sans CJK JP"/>
                 <a:cs typeface="Noto Sans"/>
               </a:rPr>
-              <a:t>Appendix 5 物体検出・領域分割の関連文献</a:t>
+              <a:t>Appendix 5. 物体検出・領域分割の関連文献</a:t>
             </a:r>
           </a:p>
         </p:txBody>
@@ -43989,7 +43989,7 @@
                 <a:ea typeface="Noto Sans CJK JP"/>
                 <a:cs typeface="Noto Sans"/>
               </a:rPr>
-              <a:t>Appendix 5 物体検出・領域分割の関連文献</a:t>
+              <a:t>Appendix 5. 物体検出・領域分割の関連文献</a:t>
             </a:r>
           </a:p>
         </p:txBody>
@@ -44536,7 +44536,7 @@
                 <a:ea typeface="Noto Sans CJK JP"/>
                 <a:cs typeface="Noto Sans"/>
               </a:rPr>
-              <a:t>Appendix 5 物体検出・領域分割の関連文献</a:t>
+              <a:t>Appendix 5. 物体検出・領域分割の関連文献</a:t>
             </a:r>
           </a:p>
         </p:txBody>
@@ -45083,7 +45083,7 @@
                 <a:ea typeface="Noto Sans CJK JP"/>
                 <a:cs typeface="Noto Sans"/>
               </a:rPr>
-              <a:t>1 COCOの認識課題と領域注釈の実例</a:t>
+              <a:t>1. COCOの認識課題と領域注釈の実例</a:t>
             </a:r>
           </a:p>
         </p:txBody>

--- a/slides/datasets-in-10-minutes-coco.pptx
+++ b/slides/datasets-in-10-minutes-coco.pptx
@@ -46,9 +46,9 @@
     <p:sldId id="274" r:id="rId24"/>
     <p:sldId id="335" r:id="rId82"/>
     <p:sldId id="275" r:id="rId25"/>
+    <p:sldId id="276" r:id="rId26"/>
     <p:sldId id="336" r:id="rId83"/>
     <p:sldId id="337" r:id="rId84"/>
-    <p:sldId id="276" r:id="rId26"/>
     <p:sldId id="277" r:id="rId27"/>
     <p:sldId id="289" r:id="rId39"/>
     <p:sldId id="338" r:id="rId85"/>
@@ -10661,7 +10661,7 @@
         </p:nvSpPr>
         <p:spPr>
           <a:xfrm>
-            <a:off x="594360" y="1234440"/>
+            <a:off x="594360" y="1766163"/>
             <a:ext cx="7955279" cy="3749039"/>
           </a:xfrm>
           <a:prstGeom prst="rect">
@@ -27578,7 +27578,7 @@
                 <a:ea typeface="Noto Sans CJK JP"/>
                 <a:cs typeface="Noto Sans"/>
               </a:rPr>
-              <a:t>Faster R-CNNにはFPNを組み合わせた。</a:t>
+              <a:t>R50は50層の画像特徴モデル、FPNは多解像度の特徴統合、3xは学習期間の設定を表す。</a:t>
             </a:r>
           </a:p>
         </p:txBody>
@@ -33081,7 +33081,7 @@
         </p:nvSpPr>
         <p:spPr>
           <a:xfrm>
-            <a:off x="594360" y="960120"/>
+            <a:off x="594360" y="1001897"/>
             <a:ext cx="8138160" cy="3749039"/>
           </a:xfrm>
         </p:spPr>

--- a/slides/datasets-in-10-minutes-coco.pptx
+++ b/slides/datasets-in-10-minutes-coco.pptx
@@ -791,8 +791,8 @@
         </p:nvSpPr>
         <p:spPr>
           <a:xfrm>
-            <a:off x="8607898" y="-10450"/>
-            <a:ext cx="548701" cy="479700"/>
+            <a:off x="8412480" y="7937"/>
+            <a:ext cx="640080" cy="480059"/>
           </a:xfrm>
           <a:prstGeom prst="rect">
             <a:avLst/>
@@ -803,10 +803,20 @@
           </a:ln>
         </p:spPr>
         <p:txBody>
-          <a:bodyPr anchor="ctr"/>
-          <a:lstStyle/>
-          <a:p>
-            <a:pPr algn="ctr"/>
+          <a:bodyPr anchor="ctr" lIns="0" tIns="0" bIns="0"/>
+          <a:lstStyle/>
+          <a:p>
+            <a:pPr algn="r">
+              <a:lnSpc>
+                <a:spcPct val="100000"/>
+              </a:lnSpc>
+              <a:spcBef>
+                <a:spcPts val="0"/>
+              </a:spcBef>
+              <a:spcAft>
+                <a:spcPts val="0"/>
+              </a:spcAft>
+            </a:pPr>
             <a:fld id="{00000000-1234-1234-1234-000000000999}" type="slidenum">
               <a:rPr lang="ja-JP" sz="1800" b="1">
                 <a:solidFill>
@@ -2254,8 +2264,8 @@
         </p:nvSpPr>
         <p:spPr>
           <a:xfrm>
-            <a:off x="8501908" y="28683"/>
-            <a:ext cx="548700" cy="393600"/>
+            <a:off x="8412480" y="7937"/>
+            <a:ext cx="640080" cy="480059"/>
           </a:xfrm>
           <a:prstGeom prst="rect">
             <a:avLst/>
@@ -2266,10 +2276,20 @@
           </a:ln>
         </p:spPr>
         <p:txBody>
-          <a:bodyPr anchor="ctr"/>
-          <a:lstStyle/>
-          <a:p>
-            <a:pPr algn="r"/>
+          <a:bodyPr anchor="ctr" lIns="0" tIns="0" bIns="0"/>
+          <a:lstStyle/>
+          <a:p>
+            <a:pPr algn="r">
+              <a:lnSpc>
+                <a:spcPct val="100000"/>
+              </a:lnSpc>
+              <a:spcBef>
+                <a:spcPts val="0"/>
+              </a:spcBef>
+              <a:spcAft>
+                <a:spcPts val="0"/>
+              </a:spcAft>
+            </a:pPr>
             <a:fld id="{00000000-1234-1234-1234-000000000999}" type="slidenum">
               <a:rPr lang="ja-JP" sz="1800" b="1">
                 <a:solidFill>
@@ -2947,8 +2967,8 @@
         </p:nvSpPr>
         <p:spPr>
           <a:xfrm>
-            <a:off x="8501908" y="28683"/>
-            <a:ext cx="548700" cy="393600"/>
+            <a:off x="8412480" y="7937"/>
+            <a:ext cx="640080" cy="480059"/>
           </a:xfrm>
           <a:prstGeom prst="rect">
             <a:avLst/>
@@ -2959,10 +2979,20 @@
           </a:ln>
         </p:spPr>
         <p:txBody>
-          <a:bodyPr anchor="ctr"/>
-          <a:lstStyle/>
-          <a:p>
-            <a:pPr algn="r"/>
+          <a:bodyPr anchor="ctr" lIns="0" tIns="0" bIns="0"/>
+          <a:lstStyle/>
+          <a:p>
+            <a:pPr algn="r">
+              <a:lnSpc>
+                <a:spcPct val="100000"/>
+              </a:lnSpc>
+              <a:spcBef>
+                <a:spcPts val="0"/>
+              </a:spcBef>
+              <a:spcAft>
+                <a:spcPts val="0"/>
+              </a:spcAft>
+            </a:pPr>
             <a:fld id="{00000000-1234-1234-1234-000000000999}" type="slidenum">
               <a:rPr lang="ja-JP" sz="1800" b="1">
                 <a:solidFill>
@@ -3408,8 +3438,8 @@
         </p:nvSpPr>
         <p:spPr>
           <a:xfrm>
-            <a:off x="8501908" y="28683"/>
-            <a:ext cx="548700" cy="393600"/>
+            <a:off x="8412480" y="7937"/>
+            <a:ext cx="640080" cy="480059"/>
           </a:xfrm>
           <a:prstGeom prst="rect">
             <a:avLst/>
@@ -3420,10 +3450,20 @@
           </a:ln>
         </p:spPr>
         <p:txBody>
-          <a:bodyPr anchor="ctr"/>
-          <a:lstStyle/>
-          <a:p>
-            <a:pPr algn="r"/>
+          <a:bodyPr anchor="ctr" lIns="0" tIns="0" bIns="0"/>
+          <a:lstStyle/>
+          <a:p>
+            <a:pPr algn="r">
+              <a:lnSpc>
+                <a:spcPct val="100000"/>
+              </a:lnSpc>
+              <a:spcBef>
+                <a:spcPts val="0"/>
+              </a:spcBef>
+              <a:spcAft>
+                <a:spcPts val="0"/>
+              </a:spcAft>
+            </a:pPr>
             <a:fld id="{00000000-1234-1234-1234-000000000999}" type="slidenum">
               <a:rPr lang="ja-JP" sz="1800" b="1">
                 <a:solidFill>
@@ -3869,8 +3909,8 @@
         </p:nvSpPr>
         <p:spPr>
           <a:xfrm>
-            <a:off x="8501908" y="28683"/>
-            <a:ext cx="548700" cy="393600"/>
+            <a:off x="8412480" y="7937"/>
+            <a:ext cx="640080" cy="480059"/>
           </a:xfrm>
           <a:prstGeom prst="rect">
             <a:avLst/>
@@ -3881,10 +3921,20 @@
           </a:ln>
         </p:spPr>
         <p:txBody>
-          <a:bodyPr anchor="ctr"/>
-          <a:lstStyle/>
-          <a:p>
-            <a:pPr algn="r"/>
+          <a:bodyPr anchor="ctr" lIns="0" tIns="0" bIns="0"/>
+          <a:lstStyle/>
+          <a:p>
+            <a:pPr algn="r">
+              <a:lnSpc>
+                <a:spcPct val="100000"/>
+              </a:lnSpc>
+              <a:spcBef>
+                <a:spcPts val="0"/>
+              </a:spcBef>
+              <a:spcAft>
+                <a:spcPts val="0"/>
+              </a:spcAft>
+            </a:pPr>
             <a:fld id="{00000000-1234-1234-1234-000000000999}" type="slidenum">
               <a:rPr lang="ja-JP" sz="1800" b="1">
                 <a:solidFill>
@@ -4396,8 +4446,8 @@
         </p:nvSpPr>
         <p:spPr>
           <a:xfrm>
-            <a:off x="8501908" y="28683"/>
-            <a:ext cx="548700" cy="393600"/>
+            <a:off x="8412480" y="7937"/>
+            <a:ext cx="640080" cy="480059"/>
           </a:xfrm>
           <a:prstGeom prst="rect">
             <a:avLst/>
@@ -4408,10 +4458,20 @@
           </a:ln>
         </p:spPr>
         <p:txBody>
-          <a:bodyPr anchor="ctr"/>
-          <a:lstStyle/>
-          <a:p>
-            <a:pPr algn="r"/>
+          <a:bodyPr anchor="ctr" lIns="0" tIns="0" bIns="0"/>
+          <a:lstStyle/>
+          <a:p>
+            <a:pPr algn="r">
+              <a:lnSpc>
+                <a:spcPct val="100000"/>
+              </a:lnSpc>
+              <a:spcBef>
+                <a:spcPts val="0"/>
+              </a:spcBef>
+              <a:spcAft>
+                <a:spcPts val="0"/>
+              </a:spcAft>
+            </a:pPr>
             <a:fld id="{00000000-1234-1234-1234-000000000999}" type="slidenum">
               <a:rPr lang="ja-JP" sz="1800" b="1">
                 <a:solidFill>
@@ -4691,8 +4751,8 @@
         </p:nvSpPr>
         <p:spPr>
           <a:xfrm>
-            <a:off x="8501908" y="28683"/>
-            <a:ext cx="548700" cy="393600"/>
+            <a:off x="8412480" y="7937"/>
+            <a:ext cx="640080" cy="480059"/>
           </a:xfrm>
           <a:prstGeom prst="rect">
             <a:avLst/>
@@ -4703,10 +4763,20 @@
           </a:ln>
         </p:spPr>
         <p:txBody>
-          <a:bodyPr anchor="ctr"/>
-          <a:lstStyle/>
-          <a:p>
-            <a:pPr algn="r"/>
+          <a:bodyPr anchor="ctr" lIns="0" tIns="0" bIns="0"/>
+          <a:lstStyle/>
+          <a:p>
+            <a:pPr algn="r">
+              <a:lnSpc>
+                <a:spcPct val="100000"/>
+              </a:lnSpc>
+              <a:spcBef>
+                <a:spcPts val="0"/>
+              </a:spcBef>
+              <a:spcAft>
+                <a:spcPts val="0"/>
+              </a:spcAft>
+            </a:pPr>
             <a:fld id="{00000000-1234-1234-1234-000000000999}" type="slidenum">
               <a:rPr lang="ja-JP" sz="1800" b="1">
                 <a:solidFill>
@@ -5319,8 +5389,8 @@
         </p:nvSpPr>
         <p:spPr>
           <a:xfrm>
-            <a:off x="8501908" y="28683"/>
-            <a:ext cx="548700" cy="393600"/>
+            <a:off x="8412480" y="7937"/>
+            <a:ext cx="640080" cy="480059"/>
           </a:xfrm>
           <a:prstGeom prst="rect">
             <a:avLst/>
@@ -5331,10 +5401,20 @@
           </a:ln>
         </p:spPr>
         <p:txBody>
-          <a:bodyPr anchor="ctr"/>
-          <a:lstStyle/>
-          <a:p>
-            <a:pPr algn="r"/>
+          <a:bodyPr anchor="ctr" lIns="0" tIns="0" bIns="0"/>
+          <a:lstStyle/>
+          <a:p>
+            <a:pPr algn="r">
+              <a:lnSpc>
+                <a:spcPct val="100000"/>
+              </a:lnSpc>
+              <a:spcBef>
+                <a:spcPts val="0"/>
+              </a:spcBef>
+              <a:spcAft>
+                <a:spcPts val="0"/>
+              </a:spcAft>
+            </a:pPr>
             <a:fld id="{00000000-1234-1234-1234-000000000999}" type="slidenum">
               <a:rPr lang="ja-JP" sz="1800" b="1">
                 <a:solidFill>
@@ -5633,8 +5713,8 @@
         </p:nvSpPr>
         <p:spPr>
           <a:xfrm>
-            <a:off x="8472458" y="28683"/>
-            <a:ext cx="548700" cy="393600"/>
+            <a:off x="8412480" y="7937"/>
+            <a:ext cx="640080" cy="480059"/>
           </a:xfrm>
           <a:prstGeom prst="rect">
             <a:avLst/>
@@ -5645,10 +5725,20 @@
           </a:ln>
         </p:spPr>
         <p:txBody>
-          <a:bodyPr anchor="ctr"/>
-          <a:lstStyle/>
-          <a:p>
-            <a:pPr algn="r"/>
+          <a:bodyPr anchor="ctr" lIns="0" tIns="0" bIns="0"/>
+          <a:lstStyle/>
+          <a:p>
+            <a:pPr algn="r">
+              <a:lnSpc>
+                <a:spcPct val="100000"/>
+              </a:lnSpc>
+              <a:spcBef>
+                <a:spcPts val="0"/>
+              </a:spcBef>
+              <a:spcAft>
+                <a:spcPts val="0"/>
+              </a:spcAft>
+            </a:pPr>
             <a:fld id="{00000000-1234-1234-1234-000000000999}" type="slidenum">
               <a:rPr lang="ja-JP" sz="1800" b="1">
                 <a:solidFill>
@@ -6194,8 +6284,8 @@
         </p:nvSpPr>
         <p:spPr>
           <a:xfrm>
-            <a:off x="8472458" y="4663217"/>
-            <a:ext cx="548700" cy="393600"/>
+            <a:off x="8412480" y="7937"/>
+            <a:ext cx="640080" cy="480059"/>
           </a:xfrm>
           <a:prstGeom prst="rect">
             <a:avLst/>
@@ -6206,7 +6296,7 @@
           </a:ln>
         </p:spPr>
         <p:txBody>
-          <a:bodyPr spcFirstLastPara="1" wrap="square" lIns="91425" tIns="91425" rIns="91425" bIns="91425" anchor="ctr" anchorCtr="0">
+          <a:bodyPr spcFirstLastPara="1" wrap="square" lIns="0" tIns="0" bIns="0" anchor="ctr" anchorCtr="0">
             <a:normAutofit/>
           </a:bodyPr>
           <a:lstStyle>
@@ -6312,6 +6402,9 @@
           </a:lstStyle>
           <a:p>
             <a:pPr marL="0" lvl="0" indent="0" algn="r" rtl="0">
+              <a:lnSpc>
+                <a:spcPct val="100000"/>
+              </a:lnSpc>
               <a:spcBef>
                 <a:spcPts val="0"/>
               </a:spcBef>
@@ -10675,7 +10768,7 @@
           </a:bodyPr>
           <a:lstStyle/>
           <a:p>
-            <a:pPr lvl="0" marL="457200" indent="-355600">
+            <a:pPr lvl="0" marL="558800" indent="-457200">
               <a:lnSpc>
                 <a:spcPct val="100000"/>
               </a:lnSpc>
@@ -10710,7 +10803,7 @@
             </a:r>
           </a:p>
           <a:p>
-            <a:pPr lvl="0" marL="457200" indent="-355600">
+            <a:pPr lvl="0" marL="558800" indent="-457200">
               <a:lnSpc>
                 <a:spcPct val="100000"/>
               </a:lnSpc>
@@ -10745,7 +10838,7 @@
             </a:r>
           </a:p>
           <a:p>
-            <a:pPr lvl="0" marL="457200" indent="-355600">
+            <a:pPr lvl="0" marL="558800" indent="-457200">
               <a:lnSpc>
                 <a:spcPct val="100000"/>
               </a:lnSpc>
@@ -10780,7 +10873,7 @@
             </a:r>
           </a:p>
           <a:p>
-            <a:pPr lvl="0" marL="457200" indent="-355600">
+            <a:pPr lvl="0" marL="558800" indent="-457200">
               <a:lnSpc>
                 <a:spcPct val="100000"/>
               </a:lnSpc>
@@ -12168,8 +12261,8 @@
         </p:nvSpPr>
         <p:spPr>
           <a:xfrm>
-            <a:off x="502920" y="4876800"/>
-            <a:ext cx="8183879" cy="177800"/>
+            <a:off x="7124851" y="4717326"/>
+            <a:ext cx="1561948" cy="177800"/>
           </a:xfrm>
           <a:prstGeom prst="rect">
             <a:avLst/>
@@ -12177,7 +12270,7 @@
           <a:noFill/>
         </p:spPr>
         <p:txBody>
-          <a:bodyPr wrap="square" lIns="0" rIns="0" tIns="0" bIns="0">
+          <a:bodyPr wrap="none" lIns="0" rIns="0" tIns="0" bIns="0">
             <a:spAutoFit/>
           </a:bodyPr>
           <a:lstStyle/>
@@ -12537,8 +12630,8 @@
         </p:nvSpPr>
         <p:spPr>
           <a:xfrm>
-            <a:off x="502920" y="4699000"/>
-            <a:ext cx="8183879" cy="177800"/>
+            <a:off x="7124851" y="4539526"/>
+            <a:ext cx="1561948" cy="177800"/>
           </a:xfrm>
           <a:prstGeom prst="rect">
             <a:avLst/>
@@ -12546,7 +12639,7 @@
           <a:noFill/>
         </p:spPr>
         <p:txBody>
-          <a:bodyPr wrap="square" lIns="0" rIns="0" tIns="0" bIns="0">
+          <a:bodyPr wrap="none" lIns="0" rIns="0" tIns="0" bIns="0">
             <a:spAutoFit/>
           </a:bodyPr>
           <a:lstStyle/>
@@ -12976,8 +13069,8 @@
         </p:nvSpPr>
         <p:spPr>
           <a:xfrm>
-            <a:off x="502920" y="4876800"/>
-            <a:ext cx="8183879" cy="177800"/>
+            <a:off x="7124851" y="4717326"/>
+            <a:ext cx="1561948" cy="177800"/>
           </a:xfrm>
           <a:prstGeom prst="rect">
             <a:avLst/>
@@ -12985,7 +13078,7 @@
           <a:noFill/>
         </p:spPr>
         <p:txBody>
-          <a:bodyPr wrap="square" lIns="0" rIns="0" tIns="0" bIns="0">
+          <a:bodyPr wrap="none" lIns="0" rIns="0" tIns="0" bIns="0">
             <a:spAutoFit/>
           </a:bodyPr>
           <a:lstStyle/>
@@ -26560,8 +26653,8 @@
         </p:nvSpPr>
         <p:spPr>
           <a:xfrm>
-            <a:off x="502920" y="4165600"/>
-            <a:ext cx="8183879" cy="177800"/>
+            <a:off x="5928392" y="4006114"/>
+            <a:ext cx="2758407" cy="177800"/>
           </a:xfrm>
           <a:prstGeom prst="rect">
             <a:avLst/>
@@ -26569,7 +26662,7 @@
           <a:noFill/>
         </p:spPr>
         <p:txBody>
-          <a:bodyPr wrap="square" lIns="0" rIns="0" tIns="0" bIns="0">
+          <a:bodyPr wrap="none" lIns="0" rIns="0" tIns="0" bIns="0">
             <a:spAutoFit/>
           </a:bodyPr>
           <a:lstStyle/>
@@ -26677,8 +26770,8 @@
         </p:nvSpPr>
         <p:spPr>
           <a:xfrm>
-            <a:off x="502920" y="4521200"/>
-            <a:ext cx="8183879" cy="177800"/>
+            <a:off x="3583598" y="4361713"/>
+            <a:ext cx="5103201" cy="177800"/>
           </a:xfrm>
           <a:prstGeom prst="rect">
             <a:avLst/>
@@ -26686,7 +26779,7 @@
           <a:noFill/>
         </p:spPr>
         <p:txBody>
-          <a:bodyPr wrap="square" lIns="0" rIns="0" tIns="0" bIns="0">
+          <a:bodyPr wrap="none" lIns="0" rIns="0" tIns="0" bIns="0">
             <a:spAutoFit/>
           </a:bodyPr>
           <a:lstStyle/>
@@ -26794,8 +26887,8 @@
         </p:nvSpPr>
         <p:spPr>
           <a:xfrm>
-            <a:off x="502920" y="4876800"/>
-            <a:ext cx="8183879" cy="177800"/>
+            <a:off x="6558753" y="4717326"/>
+            <a:ext cx="2128046" cy="177800"/>
           </a:xfrm>
           <a:prstGeom prst="rect">
             <a:avLst/>
@@ -26803,7 +26896,7 @@
           <a:noFill/>
         </p:spPr>
         <p:txBody>
-          <a:bodyPr wrap="square" lIns="0" rIns="0" tIns="0" bIns="0">
+          <a:bodyPr wrap="none" lIns="0" rIns="0" tIns="0" bIns="0">
             <a:spAutoFit/>
           </a:bodyPr>
           <a:lstStyle/>
@@ -27163,8 +27256,8 @@
         </p:nvSpPr>
         <p:spPr>
           <a:xfrm>
-            <a:off x="502920" y="4343400"/>
-            <a:ext cx="8183879" cy="177800"/>
+            <a:off x="4664725" y="4183913"/>
+            <a:ext cx="4022074" cy="177800"/>
           </a:xfrm>
           <a:prstGeom prst="rect">
             <a:avLst/>
@@ -27172,7 +27265,7 @@
           <a:noFill/>
         </p:spPr>
         <p:txBody>
-          <a:bodyPr wrap="square" lIns="0" rIns="0" tIns="0" bIns="0">
+          <a:bodyPr wrap="none" lIns="0" rIns="0" tIns="0" bIns="0">
             <a:spAutoFit/>
           </a:bodyPr>
           <a:lstStyle/>
@@ -27280,8 +27373,8 @@
         </p:nvSpPr>
         <p:spPr>
           <a:xfrm>
-            <a:off x="502920" y="4699000"/>
-            <a:ext cx="8183879" cy="177800"/>
+            <a:off x="4074365" y="4539526"/>
+            <a:ext cx="4612434" cy="177800"/>
           </a:xfrm>
           <a:prstGeom prst="rect">
             <a:avLst/>
@@ -27289,7 +27382,7 @@
           <a:noFill/>
         </p:spPr>
         <p:txBody>
-          <a:bodyPr wrap="square" lIns="0" rIns="0" tIns="0" bIns="0">
+          <a:bodyPr wrap="none" lIns="0" rIns="0" tIns="0" bIns="0">
             <a:spAutoFit/>
           </a:bodyPr>
           <a:lstStyle/>
@@ -29639,8 +29732,8 @@
         </p:nvSpPr>
         <p:spPr>
           <a:xfrm>
-            <a:off x="502920" y="4876800"/>
-            <a:ext cx="8183879" cy="177800"/>
+            <a:off x="1254031" y="4717326"/>
+            <a:ext cx="7432768" cy="177800"/>
           </a:xfrm>
           <a:prstGeom prst="rect">
             <a:avLst/>
@@ -29648,7 +29741,7 @@
           <a:noFill/>
         </p:spPr>
         <p:txBody>
-          <a:bodyPr wrap="square" lIns="0" rIns="0" tIns="0" bIns="0">
+          <a:bodyPr wrap="none" lIns="0" rIns="0" tIns="0" bIns="0">
             <a:spAutoFit/>
           </a:bodyPr>
           <a:lstStyle/>
@@ -30816,8 +30909,8 @@
         </p:nvSpPr>
         <p:spPr>
           <a:xfrm>
-            <a:off x="502920" y="4699000"/>
-            <a:ext cx="8183879" cy="177800"/>
+            <a:off x="1254031" y="4539526"/>
+            <a:ext cx="7432768" cy="177800"/>
           </a:xfrm>
           <a:prstGeom prst="rect">
             <a:avLst/>
@@ -30825,7 +30918,7 @@
           <a:noFill/>
         </p:spPr>
         <p:txBody>
-          <a:bodyPr wrap="square" lIns="0" rIns="0" tIns="0" bIns="0">
+          <a:bodyPr wrap="none" lIns="0" rIns="0" tIns="0" bIns="0">
             <a:spAutoFit/>
           </a:bodyPr>
           <a:lstStyle/>
@@ -31004,7 +31097,7 @@
                 <a:ea typeface="Noto Sans CJK JP"/>
                 <a:cs typeface="Noto Sans"/>
               </a:rPr>
-              <a:t>画像と注釈を別々に入手する</a:t>
+              <a:t>COCO 2017の配布ファイルと圧縮容量</a:t>
             </a:r>
           </a:p>
         </p:txBody>
@@ -33637,8 +33730,8 @@
         </p:nvSpPr>
         <p:spPr>
           <a:xfrm>
-            <a:off x="502920" y="4699000"/>
-            <a:ext cx="8183879" cy="177800"/>
+            <a:off x="7124851" y="4539526"/>
+            <a:ext cx="1561948" cy="177800"/>
           </a:xfrm>
           <a:prstGeom prst="rect">
             <a:avLst/>
@@ -33646,7 +33739,7 @@
           <a:noFill/>
         </p:spPr>
         <p:txBody>
-          <a:bodyPr wrap="square" lIns="0" rIns="0" tIns="0" bIns="0">
+          <a:bodyPr wrap="none" lIns="0" rIns="0" tIns="0" bIns="0">
             <a:spAutoFit/>
           </a:bodyPr>
           <a:lstStyle/>

--- a/slides/datasets-in-10-minutes-coco.pptx
+++ b/slides/datasets-in-10-minutes-coco.pptx
@@ -11213,13 +11213,13 @@
                     <a:lnR w="0">
                       <a:noFill/>
                     </a:lnR>
-                    <a:lnT w="10160">
+                    <a:lnT w="15240">
                       <a:solidFill>
                         <a:srgbClr val="626669"/>
                       </a:solidFill>
                       <a:prstDash val="solid"/>
                     </a:lnT>
-                    <a:lnB w="10160">
+                    <a:lnB w="7620">
                       <a:solidFill>
                         <a:srgbClr val="626669"/>
                       </a:solidFill>
@@ -11275,13 +11275,13 @@
                     <a:lnR w="0">
                       <a:noFill/>
                     </a:lnR>
-                    <a:lnT w="10160">
+                    <a:lnT w="15240">
                       <a:solidFill>
                         <a:srgbClr val="626669"/>
                       </a:solidFill>
                       <a:prstDash val="solid"/>
                     </a:lnT>
-                    <a:lnB w="10160">
+                    <a:lnB w="7620">
                       <a:solidFill>
                         <a:srgbClr val="626669"/>
                       </a:solidFill>
@@ -11337,13 +11337,13 @@
                     <a:lnR w="0">
                       <a:noFill/>
                     </a:lnR>
-                    <a:lnT w="10160">
+                    <a:lnT w="15240">
                       <a:solidFill>
                         <a:srgbClr val="626669"/>
                       </a:solidFill>
                       <a:prstDash val="solid"/>
                     </a:lnT>
-                    <a:lnB w="10160">
+                    <a:lnB w="7620">
                       <a:solidFill>
                         <a:srgbClr val="626669"/>
                       </a:solidFill>
@@ -11401,7 +11401,7 @@
                     <a:lnR w="0">
                       <a:noFill/>
                     </a:lnR>
-                    <a:lnT w="10160">
+                    <a:lnT w="7620">
                       <a:solidFill>
                         <a:srgbClr val="626669"/>
                       </a:solidFill>
@@ -11460,7 +11460,7 @@
                     <a:lnR w="0">
                       <a:noFill/>
                     </a:lnR>
-                    <a:lnT w="10160">
+                    <a:lnT w="7620">
                       <a:solidFill>
                         <a:srgbClr val="626669"/>
                       </a:solidFill>
@@ -11519,7 +11519,7 @@
                     <a:lnR w="0">
                       <a:noFill/>
                     </a:lnR>
-                    <a:lnT w="10160">
+                    <a:lnT w="7620">
                       <a:solidFill>
                         <a:srgbClr val="626669"/>
                       </a:solidFill>
@@ -11753,7 +11753,7 @@
                     <a:lnT w="0">
                       <a:noFill/>
                     </a:lnT>
-                    <a:lnB w="10160">
+                    <a:lnB w="15240">
                       <a:solidFill>
                         <a:srgbClr val="626669"/>
                       </a:solidFill>
@@ -11812,7 +11812,7 @@
                     <a:lnT w="0">
                       <a:noFill/>
                     </a:lnT>
-                    <a:lnB w="10160">
+                    <a:lnB w="15240">
                       <a:solidFill>
                         <a:srgbClr val="626669"/>
                       </a:solidFill>
@@ -11871,7 +11871,7 @@
                     <a:lnT w="0">
                       <a:noFill/>
                     </a:lnT>
-                    <a:lnB w="10160">
+                    <a:lnB w="15240">
                       <a:solidFill>
                         <a:srgbClr val="626669"/>
                       </a:solidFill>
@@ -20115,13 +20115,13 @@
                     <a:lnR w="0">
                       <a:noFill/>
                     </a:lnR>
-                    <a:lnT w="10160">
+                    <a:lnT w="15240">
                       <a:solidFill>
                         <a:srgbClr val="626669"/>
                       </a:solidFill>
                       <a:prstDash val="solid"/>
                     </a:lnT>
-                    <a:lnB w="10160">
+                    <a:lnB w="7620">
                       <a:solidFill>
                         <a:srgbClr val="626669"/>
                       </a:solidFill>
@@ -20177,13 +20177,13 @@
                     <a:lnR w="0">
                       <a:noFill/>
                     </a:lnR>
-                    <a:lnT w="10160">
+                    <a:lnT w="15240">
                       <a:solidFill>
                         <a:srgbClr val="626669"/>
                       </a:solidFill>
                       <a:prstDash val="solid"/>
                     </a:lnT>
-                    <a:lnB w="10160">
+                    <a:lnB w="7620">
                       <a:solidFill>
                         <a:srgbClr val="626669"/>
                       </a:solidFill>
@@ -20239,13 +20239,13 @@
                     <a:lnR w="0">
                       <a:noFill/>
                     </a:lnR>
-                    <a:lnT w="10160">
+                    <a:lnT w="15240">
                       <a:solidFill>
                         <a:srgbClr val="626669"/>
                       </a:solidFill>
                       <a:prstDash val="solid"/>
                     </a:lnT>
-                    <a:lnB w="10160">
+                    <a:lnB w="7620">
                       <a:solidFill>
                         <a:srgbClr val="626669"/>
                       </a:solidFill>
@@ -20303,7 +20303,7 @@
                     <a:lnR w="0">
                       <a:noFill/>
                     </a:lnR>
-                    <a:lnT w="10160">
+                    <a:lnT w="7620">
                       <a:solidFill>
                         <a:srgbClr val="626669"/>
                       </a:solidFill>
@@ -20362,7 +20362,7 @@
                     <a:lnR w="0">
                       <a:noFill/>
                     </a:lnR>
-                    <a:lnT w="10160">
+                    <a:lnT w="7620">
                       <a:solidFill>
                         <a:srgbClr val="626669"/>
                       </a:solidFill>
@@ -20421,7 +20421,7 @@
                     <a:lnR w="0">
                       <a:noFill/>
                     </a:lnR>
-                    <a:lnT w="10160">
+                    <a:lnT w="7620">
                       <a:solidFill>
                         <a:srgbClr val="626669"/>
                       </a:solidFill>
@@ -20655,7 +20655,7 @@
                     <a:lnT w="0">
                       <a:noFill/>
                     </a:lnT>
-                    <a:lnB w="10160">
+                    <a:lnB w="15240">
                       <a:solidFill>
                         <a:srgbClr val="626669"/>
                       </a:solidFill>
@@ -20714,7 +20714,7 @@
                     <a:lnT w="0">
                       <a:noFill/>
                     </a:lnT>
-                    <a:lnB w="10160">
+                    <a:lnB w="15240">
                       <a:solidFill>
                         <a:srgbClr val="626669"/>
                       </a:solidFill>
@@ -20773,7 +20773,7 @@
                     <a:lnT w="0">
                       <a:noFill/>
                     </a:lnT>
-                    <a:lnB w="10160">
+                    <a:lnB w="15240">
                       <a:solidFill>
                         <a:srgbClr val="626669"/>
                       </a:solidFill>
@@ -24612,13 +24612,13 @@
                     <a:lnR w="0">
                       <a:noFill/>
                     </a:lnR>
-                    <a:lnT w="10160">
+                    <a:lnT w="15240">
                       <a:solidFill>
                         <a:srgbClr val="626669"/>
                       </a:solidFill>
                       <a:prstDash val="solid"/>
                     </a:lnT>
-                    <a:lnB w="10160">
+                    <a:lnB w="7620">
                       <a:solidFill>
                         <a:srgbClr val="626669"/>
                       </a:solidFill>
@@ -24674,13 +24674,13 @@
                     <a:lnR w="0">
                       <a:noFill/>
                     </a:lnR>
-                    <a:lnT w="10160">
+                    <a:lnT w="15240">
                       <a:solidFill>
                         <a:srgbClr val="626669"/>
                       </a:solidFill>
                       <a:prstDash val="solid"/>
                     </a:lnT>
-                    <a:lnB w="10160">
+                    <a:lnB w="7620">
                       <a:solidFill>
                         <a:srgbClr val="626669"/>
                       </a:solidFill>
@@ -24736,13 +24736,13 @@
                     <a:lnR w="0">
                       <a:noFill/>
                     </a:lnR>
-                    <a:lnT w="10160">
+                    <a:lnT w="15240">
                       <a:solidFill>
                         <a:srgbClr val="626669"/>
                       </a:solidFill>
                       <a:prstDash val="solid"/>
                     </a:lnT>
-                    <a:lnB w="10160">
+                    <a:lnB w="7620">
                       <a:solidFill>
                         <a:srgbClr val="626669"/>
                       </a:solidFill>
@@ -24800,7 +24800,7 @@
                     <a:lnR w="0">
                       <a:noFill/>
                     </a:lnR>
-                    <a:lnT w="10160">
+                    <a:lnT w="7620">
                       <a:solidFill>
                         <a:srgbClr val="626669"/>
                       </a:solidFill>
@@ -24859,7 +24859,7 @@
                     <a:lnR w="0">
                       <a:noFill/>
                     </a:lnR>
-                    <a:lnT w="10160">
+                    <a:lnT w="7620">
                       <a:solidFill>
                         <a:srgbClr val="626669"/>
                       </a:solidFill>
@@ -24918,7 +24918,7 @@
                     <a:lnR w="0">
                       <a:noFill/>
                     </a:lnR>
-                    <a:lnT w="10160">
+                    <a:lnT w="7620">
                       <a:solidFill>
                         <a:srgbClr val="626669"/>
                       </a:solidFill>
@@ -24982,7 +24982,7 @@
                     <a:lnT w="0">
                       <a:noFill/>
                     </a:lnT>
-                    <a:lnB w="10160">
+                    <a:lnB w="15240">
                       <a:solidFill>
                         <a:srgbClr val="626669"/>
                       </a:solidFill>
@@ -25041,7 +25041,7 @@
                     <a:lnT w="0">
                       <a:noFill/>
                     </a:lnT>
-                    <a:lnB w="10160">
+                    <a:lnB w="15240">
                       <a:solidFill>
                         <a:srgbClr val="626669"/>
                       </a:solidFill>
@@ -25100,7 +25100,7 @@
                     <a:lnT w="0">
                       <a:noFill/>
                     </a:lnT>
-                    <a:lnB w="10160">
+                    <a:lnB w="15240">
                       <a:solidFill>
                         <a:srgbClr val="626669"/>
                       </a:solidFill>
@@ -27855,13 +27855,13 @@
                     <a:lnR w="0">
                       <a:noFill/>
                     </a:lnR>
-                    <a:lnT w="10160">
+                    <a:lnT w="15240">
                       <a:solidFill>
                         <a:srgbClr val="626669"/>
                       </a:solidFill>
                       <a:prstDash val="solid"/>
                     </a:lnT>
-                    <a:lnB w="10160">
+                    <a:lnB w="7620">
                       <a:solidFill>
                         <a:srgbClr val="626669"/>
                       </a:solidFill>
@@ -27917,13 +27917,13 @@
                     <a:lnR w="0">
                       <a:noFill/>
                     </a:lnR>
-                    <a:lnT w="10160">
+                    <a:lnT w="15240">
                       <a:solidFill>
                         <a:srgbClr val="626669"/>
                       </a:solidFill>
                       <a:prstDash val="solid"/>
                     </a:lnT>
-                    <a:lnB w="10160">
+                    <a:lnB w="7620">
                       <a:solidFill>
                         <a:srgbClr val="626669"/>
                       </a:solidFill>
@@ -27979,13 +27979,13 @@
                     <a:lnR w="0">
                       <a:noFill/>
                     </a:lnR>
-                    <a:lnT w="10160">
+                    <a:lnT w="15240">
                       <a:solidFill>
                         <a:srgbClr val="626669"/>
                       </a:solidFill>
                       <a:prstDash val="solid"/>
                     </a:lnT>
-                    <a:lnB w="10160">
+                    <a:lnB w="7620">
                       <a:solidFill>
                         <a:srgbClr val="626669"/>
                       </a:solidFill>
@@ -28041,13 +28041,13 @@
                     <a:lnR w="0">
                       <a:noFill/>
                     </a:lnR>
-                    <a:lnT w="10160">
+                    <a:lnT w="15240">
                       <a:solidFill>
                         <a:srgbClr val="626669"/>
                       </a:solidFill>
                       <a:prstDash val="solid"/>
                     </a:lnT>
-                    <a:lnB w="10160">
+                    <a:lnB w="7620">
                       <a:solidFill>
                         <a:srgbClr val="626669"/>
                       </a:solidFill>
@@ -28105,7 +28105,7 @@
                     <a:lnR w="0">
                       <a:noFill/>
                     </a:lnR>
-                    <a:lnT w="10160">
+                    <a:lnT w="7620">
                       <a:solidFill>
                         <a:srgbClr val="626669"/>
                       </a:solidFill>
@@ -28164,7 +28164,7 @@
                     <a:lnR w="0">
                       <a:noFill/>
                     </a:lnR>
-                    <a:lnT w="10160">
+                    <a:lnT w="7620">
                       <a:solidFill>
                         <a:srgbClr val="626669"/>
                       </a:solidFill>
@@ -28223,7 +28223,7 @@
                     <a:lnR w="0">
                       <a:noFill/>
                     </a:lnR>
-                    <a:lnT w="10160">
+                    <a:lnT w="7620">
                       <a:solidFill>
                         <a:srgbClr val="626669"/>
                       </a:solidFill>
@@ -28282,7 +28282,7 @@
                     <a:lnR w="0">
                       <a:noFill/>
                     </a:lnR>
-                    <a:lnT w="10160">
+                    <a:lnT w="7620">
                       <a:solidFill>
                         <a:srgbClr val="626669"/>
                       </a:solidFill>
@@ -28572,7 +28572,7 @@
                     <a:lnT w="0">
                       <a:noFill/>
                     </a:lnT>
-                    <a:lnB w="10160">
+                    <a:lnB w="15240">
                       <a:solidFill>
                         <a:srgbClr val="626669"/>
                       </a:solidFill>
@@ -28631,7 +28631,7 @@
                     <a:lnT w="0">
                       <a:noFill/>
                     </a:lnT>
-                    <a:lnB w="10160">
+                    <a:lnB w="15240">
                       <a:solidFill>
                         <a:srgbClr val="626669"/>
                       </a:solidFill>
@@ -28690,7 +28690,7 @@
                     <a:lnT w="0">
                       <a:noFill/>
                     </a:lnT>
-                    <a:lnB w="10160">
+                    <a:lnB w="15240">
                       <a:solidFill>
                         <a:srgbClr val="626669"/>
                       </a:solidFill>
@@ -28749,7 +28749,7 @@
                     <a:lnT w="0">
                       <a:noFill/>
                     </a:lnT>
-                    <a:lnB w="10160">
+                    <a:lnB w="15240">
                       <a:solidFill>
                         <a:srgbClr val="626669"/>
                       </a:solidFill>
@@ -31222,13 +31222,13 @@
                     <a:lnR w="0">
                       <a:noFill/>
                     </a:lnR>
-                    <a:lnT w="10160">
+                    <a:lnT w="15240">
                       <a:solidFill>
                         <a:srgbClr val="626669"/>
                       </a:solidFill>
                       <a:prstDash val="solid"/>
                     </a:lnT>
-                    <a:lnB w="10160">
+                    <a:lnB w="7620">
                       <a:solidFill>
                         <a:srgbClr val="626669"/>
                       </a:solidFill>
@@ -31284,13 +31284,13 @@
                     <a:lnR w="0">
                       <a:noFill/>
                     </a:lnR>
-                    <a:lnT w="10160">
+                    <a:lnT w="15240">
                       <a:solidFill>
                         <a:srgbClr val="626669"/>
                       </a:solidFill>
                       <a:prstDash val="solid"/>
                     </a:lnT>
-                    <a:lnB w="10160">
+                    <a:lnB w="7620">
                       <a:solidFill>
                         <a:srgbClr val="626669"/>
                       </a:solidFill>
@@ -31348,7 +31348,7 @@
                     <a:lnR w="0">
                       <a:noFill/>
                     </a:lnR>
-                    <a:lnT w="10160">
+                    <a:lnT w="7620">
                       <a:solidFill>
                         <a:srgbClr val="626669"/>
                       </a:solidFill>
@@ -31407,7 +31407,7 @@
                     <a:lnR w="0">
                       <a:noFill/>
                     </a:lnR>
-                    <a:lnT w="10160">
+                    <a:lnT w="7620">
                       <a:solidFill>
                         <a:srgbClr val="626669"/>
                       </a:solidFill>
@@ -31699,7 +31699,7 @@
                     <a:lnT w="0">
                       <a:noFill/>
                     </a:lnT>
-                    <a:lnB w="10160">
+                    <a:lnB w="15240">
                       <a:solidFill>
                         <a:srgbClr val="626669"/>
                       </a:solidFill>
@@ -31758,7 +31758,7 @@
                     <a:lnT w="0">
                       <a:noFill/>
                     </a:lnT>
-                    <a:lnB w="10160">
+                    <a:lnB w="15240">
                       <a:solidFill>
                         <a:srgbClr val="626669"/>
                       </a:solidFill>
@@ -34032,13 +34032,13 @@
                     <a:lnR w="0">
                       <a:noFill/>
                     </a:lnR>
-                    <a:lnT w="10160">
+                    <a:lnT w="15240">
                       <a:solidFill>
                         <a:srgbClr val="626669"/>
                       </a:solidFill>
                       <a:prstDash val="solid"/>
                     </a:lnT>
-                    <a:lnB w="10160">
+                    <a:lnB w="7620">
                       <a:solidFill>
                         <a:srgbClr val="626669"/>
                       </a:solidFill>
@@ -34094,13 +34094,13 @@
                     <a:lnR w="0">
                       <a:noFill/>
                     </a:lnR>
-                    <a:lnT w="10160">
+                    <a:lnT w="15240">
                       <a:solidFill>
                         <a:srgbClr val="626669"/>
                       </a:solidFill>
                       <a:prstDash val="solid"/>
                     </a:lnT>
-                    <a:lnB w="10160">
+                    <a:lnB w="7620">
                       <a:solidFill>
                         <a:srgbClr val="626669"/>
                       </a:solidFill>
@@ -34156,13 +34156,13 @@
                     <a:lnR w="0">
                       <a:noFill/>
                     </a:lnR>
-                    <a:lnT w="10160">
+                    <a:lnT w="15240">
                       <a:solidFill>
                         <a:srgbClr val="626669"/>
                       </a:solidFill>
                       <a:prstDash val="solid"/>
                     </a:lnT>
-                    <a:lnB w="10160">
+                    <a:lnB w="7620">
                       <a:solidFill>
                         <a:srgbClr val="626669"/>
                       </a:solidFill>
@@ -34220,7 +34220,7 @@
                     <a:lnR w="0">
                       <a:noFill/>
                     </a:lnR>
-                    <a:lnT w="10160">
+                    <a:lnT w="7620">
                       <a:solidFill>
                         <a:srgbClr val="626669"/>
                       </a:solidFill>
@@ -34279,7 +34279,7 @@
                     <a:lnR w="0">
                       <a:noFill/>
                     </a:lnR>
-                    <a:lnT w="10160">
+                    <a:lnT w="7620">
                       <a:solidFill>
                         <a:srgbClr val="626669"/>
                       </a:solidFill>
@@ -34338,7 +34338,7 @@
                     <a:lnR w="0">
                       <a:noFill/>
                     </a:lnR>
-                    <a:lnT w="10160">
+                    <a:lnT w="7620">
                       <a:solidFill>
                         <a:srgbClr val="626669"/>
                       </a:solidFill>
@@ -34742,7 +34742,7 @@
                     <a:lnT w="0">
                       <a:noFill/>
                     </a:lnT>
-                    <a:lnB w="10160">
+                    <a:lnB w="15240">
                       <a:solidFill>
                         <a:srgbClr val="626669"/>
                       </a:solidFill>
@@ -34801,7 +34801,7 @@
                     <a:lnT w="0">
                       <a:noFill/>
                     </a:lnT>
-                    <a:lnB w="10160">
+                    <a:lnB w="15240">
                       <a:solidFill>
                         <a:srgbClr val="626669"/>
                       </a:solidFill>
@@ -34860,7 +34860,7 @@
                     <a:lnT w="0">
                       <a:noFill/>
                     </a:lnT>
-                    <a:lnB w="10160">
+                    <a:lnB w="15240">
                       <a:solidFill>
                         <a:srgbClr val="626669"/>
                       </a:solidFill>
@@ -35565,13 +35565,13 @@
                     <a:lnR w="0">
                       <a:noFill/>
                     </a:lnR>
-                    <a:lnT w="10160">
+                    <a:lnT w="15240">
                       <a:solidFill>
                         <a:srgbClr val="626669"/>
                       </a:solidFill>
                       <a:prstDash val="solid"/>
                     </a:lnT>
-                    <a:lnB w="10160">
+                    <a:lnB w="7620">
                       <a:solidFill>
                         <a:srgbClr val="626669"/>
                       </a:solidFill>
@@ -35620,13 +35620,13 @@
                     <a:lnR w="0">
                       <a:noFill/>
                     </a:lnR>
-                    <a:lnT w="10160">
+                    <a:lnT w="15240">
                       <a:solidFill>
                         <a:srgbClr val="626669"/>
                       </a:solidFill>
                       <a:prstDash val="solid"/>
                     </a:lnT>
-                    <a:lnB w="10160">
+                    <a:lnB w="7620">
                       <a:solidFill>
                         <a:srgbClr val="626669"/>
                       </a:solidFill>
@@ -35677,7 +35677,7 @@
                     <a:lnR w="0">
                       <a:noFill/>
                     </a:lnR>
-                    <a:lnT w="10160">
+                    <a:lnT w="7620">
                       <a:solidFill>
                         <a:srgbClr val="626669"/>
                       </a:solidFill>
@@ -35729,7 +35729,7 @@
                     <a:lnR w="0">
                       <a:noFill/>
                     </a:lnR>
-                    <a:lnT w="10160">
+                    <a:lnT w="7620">
                       <a:solidFill>
                         <a:srgbClr val="626669"/>
                       </a:solidFill>
@@ -35986,7 +35986,7 @@
                     <a:lnT w="0">
                       <a:noFill/>
                     </a:lnT>
-                    <a:lnB w="10160">
+                    <a:lnB w="15240">
                       <a:solidFill>
                         <a:srgbClr val="626669"/>
                       </a:solidFill>
@@ -36038,7 +36038,7 @@
                     <a:lnT w="0">
                       <a:noFill/>
                     </a:lnT>
-                    <a:lnB w="10160">
+                    <a:lnB w="15240">
                       <a:solidFill>
                         <a:srgbClr val="626669"/>
                       </a:solidFill>
@@ -37284,13 +37284,13 @@
                     <a:lnR w="0">
                       <a:noFill/>
                     </a:lnR>
-                    <a:lnT w="10160">
+                    <a:lnT w="15240">
                       <a:solidFill>
                         <a:srgbClr val="626669"/>
                       </a:solidFill>
                       <a:prstDash val="solid"/>
                     </a:lnT>
-                    <a:lnB w="10160">
+                    <a:lnB w="7620">
                       <a:solidFill>
                         <a:srgbClr val="626669"/>
                       </a:solidFill>
@@ -37346,13 +37346,13 @@
                     <a:lnR w="0">
                       <a:noFill/>
                     </a:lnR>
-                    <a:lnT w="10160">
+                    <a:lnT w="15240">
                       <a:solidFill>
                         <a:srgbClr val="626669"/>
                       </a:solidFill>
                       <a:prstDash val="solid"/>
                     </a:lnT>
-                    <a:lnB w="10160">
+                    <a:lnB w="7620">
                       <a:solidFill>
                         <a:srgbClr val="626669"/>
                       </a:solidFill>
@@ -37410,7 +37410,7 @@
                     <a:lnR w="0">
                       <a:noFill/>
                     </a:lnR>
-                    <a:lnT w="10160">
+                    <a:lnT w="7620">
                       <a:solidFill>
                         <a:srgbClr val="626669"/>
                       </a:solidFill>
@@ -37469,7 +37469,7 @@
                     <a:lnR w="0">
                       <a:noFill/>
                     </a:lnR>
-                    <a:lnT w="10160">
+                    <a:lnT w="7620">
                       <a:solidFill>
                         <a:srgbClr val="626669"/>
                       </a:solidFill>
@@ -37761,7 +37761,7 @@
                     <a:lnT w="0">
                       <a:noFill/>
                     </a:lnT>
-                    <a:lnB w="10160">
+                    <a:lnB w="15240">
                       <a:solidFill>
                         <a:srgbClr val="626669"/>
                       </a:solidFill>
@@ -37820,7 +37820,7 @@
                     <a:lnT w="0">
                       <a:noFill/>
                     </a:lnT>
-                    <a:lnB w="10160">
+                    <a:lnB w="15240">
                       <a:solidFill>
                         <a:srgbClr val="626669"/>
                       </a:solidFill>

--- a/slides/datasets-in-10-minutes-coco.pptx
+++ b/slides/datasets-in-10-minutes-coco.pptx
@@ -51,7 +51,6 @@
     <p:sldId id="337" r:id="rId84"/>
     <p:sldId id="277" r:id="rId27"/>
     <p:sldId id="289" r:id="rId39"/>
-    <p:sldId id="338" r:id="rId85"/>
     <p:sldId id="278" r:id="rId28"/>
     <p:sldId id="279" r:id="rId29"/>
     <p:sldId id="280" r:id="rId30"/>
@@ -10448,7 +10447,7 @@
                 <a:ea typeface="Noto Sans CJK JP"/>
                 <a:cs typeface="Noto Sans"/>
               </a:rPr>
-              <a:t>COCOの80物体カテゴリはVOCの4倍だが、画像数・注釈方法・評価指標も異なるため、得点を直接比較できない。</a:t>
+              <a:t>COCOの80物体カテゴリは、VOCの20カテゴリの4倍に当たる。</a:t>
             </a:r>
           </a:p>
         </p:txBody>
@@ -11908,39 +11907,7 @@
             <a:spAutoFit/>
           </a:bodyPr>
           <a:lstStyle/>
-          <a:p>
-            <a:pPr>
-              <a:lnSpc>
-                <a:spcPct val="110000"/>
-              </a:lnSpc>
-              <a:spcBef>
-                <a:spcPts val="0"/>
-              </a:spcBef>
-              <a:spcAft>
-                <a:spcPts val="0"/>
-              </a:spcAft>
-              <a:buNone/>
-              <a:defRPr sz="2000" b="0" lang="ja-JP">
-                <a:solidFill>
-                  <a:srgbClr val="303437"/>
-                </a:solidFill>
-                <a:latin typeface="Noto Sans"/>
-                <a:ea typeface="Noto Sans CJK JP"/>
-                <a:cs typeface="Noto Sans"/>
-              </a:defRPr>
-            </a:pPr>
-            <a:r>
-              <a:rPr sz="2000" b="0" lang="ja-JP">
-                <a:solidFill>
-                  <a:srgbClr val="303437"/>
-                </a:solidFill>
-                <a:latin typeface="Noto Sans"/>
-                <a:ea typeface="Noto Sans CJK JP"/>
-                <a:cs typeface="Noto Sans"/>
-              </a:rPr>
-              <a:t>この比較はタスクの整理であり、同じ評価集合の性能比較ではない。</a:t>
-            </a:r>
-          </a:p>
+          <a:p/>
         </p:txBody>
       </p:sp>
     </p:spTree>
@@ -13632,7 +13599,7 @@
                 <a:ea typeface="Noto Sans CJK JP"/>
                 <a:cs typeface="Noto Sans"/>
               </a:rPr>
-              <a:t>幅100・高さ60の矩形面積6,000画素と、物体の領域面積areaは一致するとは限らない。</a:t>
+              <a:t>areaは物体の領域マスクの面積を表す。</a:t>
             </a:r>
           </a:p>
         </p:txBody>
@@ -14341,7 +14308,7 @@
                 <a:ea typeface="Noto Sans CJK JP"/>
                 <a:cs typeface="Noto Sans"/>
               </a:rPr>
-              <a:t>4行×5列の符号化説明例。COCO画像からの集計ではない。</a:t>
+              <a:t>4行×5列の符号化説明例。</a:t>
             </a:r>
           </a:p>
         </p:txBody>
@@ -16839,7 +16806,7 @@
                 <a:ea typeface="Noto Sans CJK JP"/>
                 <a:cs typeface="Noto Sans"/>
               </a:rPr>
-              <a:t>4行×5列の符号化説明例。COCO画像からの集計ではない。</a:t>
+              <a:t>4行×5列の符号化説明例。</a:t>
             </a:r>
           </a:p>
         </p:txBody>
@@ -19759,39 +19726,6 @@
                 <a:cs typeface="Noto Sans"/>
               </a:rPr>
               <a:t>配布用の圧縮RLEでは連続長を文字列に符号化する。</a:t>
-            </a:r>
-          </a:p>
-          <a:p>
-            <a:pPr>
-              <a:lnSpc>
-                <a:spcPct val="110000"/>
-              </a:lnSpc>
-              <a:spcBef>
-                <a:spcPts val="0"/>
-              </a:spcBef>
-              <a:spcAft>
-                <a:spcPts val="0"/>
-              </a:spcAft>
-              <a:buNone/>
-              <a:defRPr sz="2000" b="0" lang="ja-JP">
-                <a:solidFill>
-                  <a:srgbClr val="303437"/>
-                </a:solidFill>
-                <a:latin typeface="Noto Sans"/>
-                <a:ea typeface="Noto Sans CJK JP"/>
-                <a:cs typeface="Noto Sans"/>
-              </a:defRPr>
-            </a:pPr>
-            <a:r>
-              <a:rPr sz="2000" b="0" lang="ja-JP">
-                <a:solidFill>
-                  <a:srgbClr val="303437"/>
-                </a:solidFill>
-                <a:latin typeface="Noto Sans"/>
-                <a:ea typeface="Noto Sans CJK JP"/>
-                <a:cs typeface="Noto Sans"/>
-              </a:rPr>
-              <a:t>文字列を手で画素数として読まず、APIで復元・面積計算を行う。</a:t>
             </a:r>
           </a:p>
         </p:txBody>
@@ -20840,7 +20774,7 @@
                 <a:ea typeface="Noto Sans CJK JP"/>
                 <a:cs typeface="Noto Sans"/>
               </a:rPr>
-              <a:t>2014年版のtrain 83K／val 41Kを、同じ画像で再分割した。2017は撮影年ではなく分割の公開年 [1]。</a:t>
+              <a:t>2017年に、2014年版のtrain 83K／val 41Kを同じ画像で再分割した [1]。</a:t>
             </a:r>
           </a:p>
         </p:txBody>
@@ -21071,41 +21005,6 @@
                 <a:cs typeface="Noto Sans"/>
               </a:rPr>
               <a:t>2017年版のtrain＋valは約123K画像。検出用の正解領域が公開されている。</a:t>
-            </a:r>
-          </a:p>
-          <a:p>
-            <a:pPr algn="l" lvl="0" marL="457200" indent="-355600">
-              <a:lnSpc>
-                <a:spcPct val="115000"/>
-              </a:lnSpc>
-              <a:spcBef>
-                <a:spcPts val="0"/>
-              </a:spcBef>
-              <a:spcAft>
-                <a:spcPts val="800"/>
-              </a:spcAft>
-              <a:buSzPct val="55417"/>
-              <a:buFont typeface="Noto Sans CJK JP"/>
-              <a:buChar char="●"/>
-              <a:defRPr lang="ja-JP" sz="2400" b="0">
-                <a:solidFill>
-                  <a:srgbClr val="303437"/>
-                </a:solidFill>
-                <a:latin typeface="Noto Sans"/>
-                <a:ea typeface="Noto Sans CJK JP"/>
-                <a:cs typeface="Noto Sans"/>
-              </a:defRPr>
-            </a:pPr>
-            <a:r>
-              <a:rPr lang="ja-JP" sz="2400" b="0">
-                <a:solidFill>
-                  <a:srgbClr val="303437"/>
-                </a:solidFill>
-                <a:latin typeface="Noto Sans"/>
-                <a:ea typeface="Noto Sans CJK JP"/>
-                <a:cs typeface="Noto Sans"/>
-              </a:rPr>
-              <a:t>全体規模の概数と、手元のtrain＋valで数える件数は対象範囲が異なる [1]。</a:t>
             </a:r>
           </a:p>
         </p:txBody>
@@ -25890,7 +25789,7 @@
                 <a:ea typeface="Noto Sans CJK JP"/>
                 <a:cs typeface="Noto Sans"/>
               </a:rPr>
-              <a:t>COCOの主指標APは、0.50から0.95まで0.05刻みの10閾値で求めたAPを平均する。1予測の合否を平均した値ではない。</a:t>
+              <a:t>COCOの主指標APは、0.50から0.95まで0.05刻みの10閾値で求めたAPを平均する。</a:t>
             </a:r>
           </a:p>
         </p:txBody>
@@ -26344,1165 +26243,6 @@
 </file>
 
 <file path=ppt/slides/slide42.xml><?xml version="1.0" encoding="utf-8"?>
-<p:sld xmlns:a="http://schemas.openxmlformats.org/drawingml/2006/main" xmlns:p="http://schemas.openxmlformats.org/presentationml/2006/main" xmlns:r="http://schemas.openxmlformats.org/officeDocument/2006/relationships">
-  <p:cSld>
-    <p:spTree>
-      <p:nvGrpSpPr>
-        <p:cNvPr id="1" name=""/>
-        <p:cNvGrpSpPr/>
-        <p:nvPr/>
-      </p:nvGrpSpPr>
-      <p:grpSpPr/>
-      <p:sp>
-        <p:nvSpPr>
-          <p:cNvPr id="2" name="Title 1"/>
-          <p:cNvSpPr>
-            <a:spLocks noGrp="1"/>
-          </p:cNvSpPr>
-          <p:nvPr>
-            <p:ph type="title"/>
-          </p:nvPr>
-        </p:nvSpPr>
-        <p:spPr>
-          <a:xfrm>
-            <a:off x="468172" y="650138"/>
-            <a:ext cx="8206740" cy="616305"/>
-          </a:xfrm>
-        </p:spPr>
-        <p:txBody>
-          <a:bodyPr wrap="none" anchor="t" lIns="0" rIns="0" tIns="0" bIns="0"/>
-          <a:lstStyle/>
-          <a:p>
-            <a:pPr algn="l">
-              <a:lnSpc>
-                <a:spcPct val="100000"/>
-              </a:lnSpc>
-              <a:spcBef>
-                <a:spcPts val="0"/>
-              </a:spcBef>
-              <a:spcAft>
-                <a:spcPts val="0"/>
-              </a:spcAft>
-              <a:buNone/>
-              <a:defRPr lang="ja-JP" sz="2800" b="1">
-                <a:solidFill>
-                  <a:srgbClr val="303437"/>
-                </a:solidFill>
-                <a:latin typeface="Noto Sans"/>
-                <a:ea typeface="Noto Sans CJK JP"/>
-                <a:cs typeface="Noto Sans"/>
-              </a:defRPr>
-            </a:pPr>
-            <a:r>
-              <a:rPr sz="2800" b="1" lang="ja-JP">
-                <a:solidFill>
-                  <a:srgbClr val="303437"/>
-                </a:solidFill>
-                <a:latin typeface="Noto Sans"/>
-                <a:ea typeface="Noto Sans CJK JP"/>
-                <a:cs typeface="Noto Sans"/>
-              </a:rPr>
-              <a:t>検出方式は領域候補を使うかどうかで異なる</a:t>
-            </a:r>
-          </a:p>
-        </p:txBody>
-      </p:sp>
-      <p:sp>
-        <p:nvSpPr>
-          <p:cNvPr id="3" name="Text Placeholder 2"/>
-          <p:cNvSpPr>
-            <a:spLocks noGrp="1"/>
-          </p:cNvSpPr>
-          <p:nvPr>
-            <p:ph type="body" idx="1"/>
-          </p:nvPr>
-        </p:nvSpPr>
-        <p:spPr>
-          <a:xfrm>
-            <a:off x="594360" y="1373852"/>
-            <a:ext cx="7955279" cy="3200400"/>
-          </a:xfrm>
-        </p:spPr>
-        <p:txBody>
-          <a:bodyPr wrap="square" anchor="t" tIns="91440" bIns="91440"/>
-          <a:lstStyle/>
-          <a:p>
-            <a:pPr algn="l" lvl="0" marL="457200" indent="-355600">
-              <a:lnSpc>
-                <a:spcPct val="110000"/>
-              </a:lnSpc>
-              <a:spcBef>
-                <a:spcPts val="0"/>
-              </a:spcBef>
-              <a:spcAft>
-                <a:spcPts val="700"/>
-              </a:spcAft>
-              <a:buSzPct val="63333"/>
-              <a:buFont typeface="Noto Sans CJK JP"/>
-              <a:buChar char="●"/>
-              <a:defRPr lang="ja-JP" sz="2100" b="0">
-                <a:solidFill>
-                  <a:srgbClr val="303437"/>
-                </a:solidFill>
-                <a:latin typeface="Noto Sans"/>
-                <a:ea typeface="Noto Sans CJK JP"/>
-                <a:cs typeface="Noto Sans"/>
-              </a:defRPr>
-            </a:pPr>
-            <a:r>
-              <a:rPr sz="2100" b="0" lang="ja-JP">
-                <a:solidFill>
-                  <a:srgbClr val="303437"/>
-                </a:solidFill>
-                <a:latin typeface="Noto Sans"/>
-                <a:ea typeface="Noto Sans CJK JP"/>
-                <a:cs typeface="Noto Sans"/>
-              </a:rPr>
-              <a:t>Faster R-CNN（2015）は候補領域を作り、その領域についてカテゴリと位置を推定する二段階方式である。</a:t>
-            </a:r>
-          </a:p>
-          <a:p>
-            <a:pPr algn="l" lvl="0" marL="457200" indent="-355600">
-              <a:lnSpc>
-                <a:spcPct val="110000"/>
-              </a:lnSpc>
-              <a:spcBef>
-                <a:spcPts val="0"/>
-              </a:spcBef>
-              <a:spcAft>
-                <a:spcPts val="700"/>
-              </a:spcAft>
-              <a:buSzPct val="63333"/>
-              <a:buFont typeface="Noto Sans CJK JP"/>
-              <a:buChar char="●"/>
-              <a:defRPr lang="ja-JP" sz="2100" b="0">
-                <a:solidFill>
-                  <a:srgbClr val="303437"/>
-                </a:solidFill>
-                <a:latin typeface="Noto Sans"/>
-                <a:ea typeface="Noto Sans CJK JP"/>
-                <a:cs typeface="Noto Sans"/>
-              </a:defRPr>
-            </a:pPr>
-            <a:r>
-              <a:rPr sz="2100" b="0" lang="ja-JP">
-                <a:solidFill>
-                  <a:srgbClr val="303437"/>
-                </a:solidFill>
-                <a:latin typeface="Noto Sans"/>
-                <a:ea typeface="Noto Sans CJK JP"/>
-                <a:cs typeface="Noto Sans"/>
-              </a:rPr>
-              <a:t>RetinaNet（2017）は画像上の多数の位置から直接検出する一段階方式で、学習中の易しい負例の影響を抑える。</a:t>
-            </a:r>
-          </a:p>
-          <a:p>
-            <a:pPr algn="l" lvl="0" marL="457200" indent="-355600">
-              <a:lnSpc>
-                <a:spcPct val="110000"/>
-              </a:lnSpc>
-              <a:spcBef>
-                <a:spcPts val="0"/>
-              </a:spcBef>
-              <a:spcAft>
-                <a:spcPts val="700"/>
-              </a:spcAft>
-              <a:buSzPct val="63333"/>
-              <a:buFont typeface="Noto Sans CJK JP"/>
-              <a:buChar char="●"/>
-              <a:defRPr lang="ja-JP" sz="2100" b="0">
-                <a:solidFill>
-                  <a:srgbClr val="303437"/>
-                </a:solidFill>
-                <a:latin typeface="Noto Sans"/>
-                <a:ea typeface="Noto Sans CJK JP"/>
-                <a:cs typeface="Noto Sans"/>
-              </a:defRPr>
-            </a:pPr>
-            <a:r>
-              <a:rPr sz="2100" b="0" lang="ja-JP">
-                <a:solidFill>
-                  <a:srgbClr val="303437"/>
-                </a:solidFill>
-                <a:latin typeface="Noto Sans"/>
-                <a:ea typeface="Noto Sans CJK JP"/>
-                <a:cs typeface="Noto Sans"/>
-              </a:rPr>
-              <a:t>RT-DETRv2（2024）は、物体間の関係を扱うTransformerを用いた実時間検出器RT-DETR（2023）を改良した。</a:t>
-            </a:r>
-          </a:p>
-        </p:txBody>
-      </p:sp>
-      <p:sp>
-        <p:nvSpPr>
-          <p:cNvPr id="4" name="Title 3"/>
-          <p:cNvSpPr>
-            <a:spLocks noGrp="1"/>
-          </p:cNvSpPr>
-          <p:nvPr>
-            <p:ph type="title" idx="2"/>
-          </p:nvPr>
-        </p:nvSpPr>
-        <p:spPr>
-          <a:xfrm>
-            <a:off x="75895" y="0"/>
-            <a:ext cx="8115300" cy="480060"/>
-          </a:xfrm>
-        </p:spPr>
-        <p:txBody>
-          <a:bodyPr wrap="square" anchor="ctr" lIns="0" rIns="0" tIns="0" bIns="0"/>
-          <a:lstStyle/>
-          <a:p>
-            <a:pPr algn="l">
-              <a:lnSpc>
-                <a:spcPct val="100000"/>
-              </a:lnSpc>
-              <a:spcBef>
-                <a:spcPts val="0"/>
-              </a:spcBef>
-              <a:spcAft>
-                <a:spcPts val="0"/>
-              </a:spcAft>
-              <a:buNone/>
-              <a:defRPr lang="ja-JP" sz="1400" b="1">
-                <a:solidFill>
-                  <a:srgbClr val="FFFEF8"/>
-                </a:solidFill>
-                <a:latin typeface="Noto Sans"/>
-                <a:ea typeface="Noto Sans CJK JP"/>
-                <a:cs typeface="Noto Sans"/>
-              </a:defRPr>
-            </a:pPr>
-            <a:r>
-              <a:rPr lang="ja-JP" sz="1400" b="1">
-                <a:solidFill>
-                  <a:srgbClr val="FFFEF8"/>
-                </a:solidFill>
-                <a:latin typeface="Noto Sans"/>
-                <a:ea typeface="Noto Sans CJK JP"/>
-                <a:cs typeface="Noto Sans"/>
-              </a:rPr>
-              <a:t>3. 物体検出・領域分割の評価とモデル性能</a:t>
-            </a:r>
-          </a:p>
-        </p:txBody>
-      </p:sp>
-      <p:sp>
-        <p:nvSpPr>
-          <p:cNvPr id="5" name="TextBox 4"/>
-          <p:cNvSpPr txBox="1"/>
-          <p:nvPr/>
-        </p:nvSpPr>
-        <p:spPr>
-          <a:xfrm>
-            <a:off x="502920" y="3987799"/>
-            <a:ext cx="8183879" cy="177800"/>
-          </a:xfrm>
-          <a:prstGeom prst="rect">
-            <a:avLst/>
-          </a:prstGeom>
-          <a:noFill/>
-        </p:spPr>
-        <p:txBody>
-          <a:bodyPr wrap="square" lIns="0" rIns="0" tIns="0" bIns="0">
-            <a:spAutoFit/>
-          </a:bodyPr>
-          <a:lstStyle/>
-          <a:p>
-            <a:pPr algn="l">
-              <a:lnSpc>
-                <a:spcPts val="1400"/>
-              </a:lnSpc>
-              <a:spcBef>
-                <a:spcPts val="0"/>
-              </a:spcBef>
-              <a:spcAft>
-                <a:spcPts val="0"/>
-              </a:spcAft>
-            </a:pPr>
-            <a:r>
-              <a:rPr sz="800" b="0" lang="ja-JP">
-                <a:solidFill>
-                  <a:srgbClr val="626669"/>
-                </a:solidFill>
-                <a:latin typeface="Noto Sans"/>
-                <a:ea typeface="Noto Sans CJK JP"/>
-                <a:cs typeface="Noto Sans"/>
-              </a:rPr>
-              <a:t/>
-            </a:r>
-            <a:r>
-              <a:rPr sz="800" lang="ja-JP">
-                <a:solidFill>
-                  <a:srgbClr val="626669"/>
-                </a:solidFill>
-                <a:latin typeface="Noto Sans"/>
-                <a:ea typeface="Noto Sans CJK JP"/>
-                <a:cs typeface="Noto Sans"/>
-              </a:rPr>
-              <a:t>[1] Ren et al. (2015). NeurIPS. Faster R-CNN: Towards Real-Time Object Detection with Region Proposal Networks.</a:t>
-            </a:r>
-          </a:p>
-        </p:txBody>
-      </p:sp>
-      <p:sp>
-        <p:nvSpPr>
-          <p:cNvPr id="6" name="TextBox 5"/>
-          <p:cNvSpPr txBox="1"/>
-          <p:nvPr/>
-        </p:nvSpPr>
-        <p:spPr>
-          <a:xfrm>
-            <a:off x="5928392" y="4006114"/>
-            <a:ext cx="2758407" cy="177800"/>
-          </a:xfrm>
-          <a:prstGeom prst="rect">
-            <a:avLst/>
-          </a:prstGeom>
-          <a:noFill/>
-        </p:spPr>
-        <p:txBody>
-          <a:bodyPr wrap="none" lIns="0" rIns="0" tIns="0" bIns="0">
-            <a:spAutoFit/>
-          </a:bodyPr>
-          <a:lstStyle/>
-          <a:p>
-            <a:pPr algn="l">
-              <a:lnSpc>
-                <a:spcPts val="1400"/>
-              </a:lnSpc>
-              <a:spcBef>
-                <a:spcPts val="0"/>
-              </a:spcBef>
-              <a:spcAft>
-                <a:spcPts val="0"/>
-              </a:spcAft>
-            </a:pPr>
-            <a:r>
-              <a:rPr sz="800" b="0" lang="ja-JP">
-                <a:solidFill>
-                  <a:srgbClr val="626669"/>
-                </a:solidFill>
-                <a:latin typeface="Noto Sans"/>
-                <a:ea typeface="Noto Sans CJK JP"/>
-                <a:cs typeface="Noto Sans"/>
-              </a:rPr>
-              <a:t/>
-            </a:r>
-            <a:r>
-              <a:rPr sz="800" lang="ja-JP">
-                <a:solidFill>
-                  <a:srgbClr val="626669"/>
-                </a:solidFill>
-                <a:latin typeface="Noto Sans"/>
-                <a:ea typeface="Noto Sans CJK JP"/>
-                <a:cs typeface="Noto Sans"/>
-                <a:hlinkClick r:id="rId3"/>
-              </a:rPr>
-              <a:t>https://arxiv.org/abs/1506.01497</a:t>
-            </a:r>
-          </a:p>
-        </p:txBody>
-      </p:sp>
-      <p:sp>
-        <p:nvSpPr>
-          <p:cNvPr id="7" name="TextBox 6"/>
-          <p:cNvSpPr txBox="1"/>
-          <p:nvPr/>
-        </p:nvSpPr>
-        <p:spPr>
-          <a:xfrm>
-            <a:off x="502920" y="4343400"/>
-            <a:ext cx="8183879" cy="177800"/>
-          </a:xfrm>
-          <a:prstGeom prst="rect">
-            <a:avLst/>
-          </a:prstGeom>
-          <a:noFill/>
-        </p:spPr>
-        <p:txBody>
-          <a:bodyPr wrap="square" lIns="0" rIns="0" tIns="0" bIns="0">
-            <a:spAutoFit/>
-          </a:bodyPr>
-          <a:lstStyle/>
-          <a:p>
-            <a:pPr algn="l">
-              <a:lnSpc>
-                <a:spcPts val="1400"/>
-              </a:lnSpc>
-              <a:spcBef>
-                <a:spcPts val="0"/>
-              </a:spcBef>
-              <a:spcAft>
-                <a:spcPts val="0"/>
-              </a:spcAft>
-            </a:pPr>
-            <a:r>
-              <a:rPr sz="800" b="0" lang="ja-JP">
-                <a:solidFill>
-                  <a:srgbClr val="626669"/>
-                </a:solidFill>
-                <a:latin typeface="Noto Sans"/>
-                <a:ea typeface="Noto Sans CJK JP"/>
-                <a:cs typeface="Noto Sans"/>
-              </a:rPr>
-              <a:t/>
-            </a:r>
-            <a:r>
-              <a:rPr sz="800" lang="ja-JP">
-                <a:solidFill>
-                  <a:srgbClr val="626669"/>
-                </a:solidFill>
-                <a:latin typeface="Noto Sans"/>
-                <a:ea typeface="Noto Sans CJK JP"/>
-                <a:cs typeface="Noto Sans"/>
-              </a:rPr>
-              <a:t>[2] Lin et al. (2017). ICCV. Focal Loss for Dense Object Detection.</a:t>
-            </a:r>
-          </a:p>
-        </p:txBody>
-      </p:sp>
-      <p:sp>
-        <p:nvSpPr>
-          <p:cNvPr id="8" name="TextBox 7"/>
-          <p:cNvSpPr txBox="1"/>
-          <p:nvPr/>
-        </p:nvSpPr>
-        <p:spPr>
-          <a:xfrm>
-            <a:off x="3583598" y="4361713"/>
-            <a:ext cx="5103201" cy="177800"/>
-          </a:xfrm>
-          <a:prstGeom prst="rect">
-            <a:avLst/>
-          </a:prstGeom>
-          <a:noFill/>
-        </p:spPr>
-        <p:txBody>
-          <a:bodyPr wrap="none" lIns="0" rIns="0" tIns="0" bIns="0">
-            <a:spAutoFit/>
-          </a:bodyPr>
-          <a:lstStyle/>
-          <a:p>
-            <a:pPr algn="l">
-              <a:lnSpc>
-                <a:spcPts val="1400"/>
-              </a:lnSpc>
-              <a:spcBef>
-                <a:spcPts val="0"/>
-              </a:spcBef>
-              <a:spcAft>
-                <a:spcPts val="0"/>
-              </a:spcAft>
-            </a:pPr>
-            <a:r>
-              <a:rPr sz="800" b="0" lang="ja-JP">
-                <a:solidFill>
-                  <a:srgbClr val="626669"/>
-                </a:solidFill>
-                <a:latin typeface="Noto Sans"/>
-                <a:ea typeface="Noto Sans CJK JP"/>
-                <a:cs typeface="Noto Sans"/>
-              </a:rPr>
-              <a:t/>
-            </a:r>
-            <a:r>
-              <a:rPr sz="800" lang="ja-JP">
-                <a:solidFill>
-                  <a:srgbClr val="626669"/>
-                </a:solidFill>
-                <a:latin typeface="Noto Sans"/>
-                <a:ea typeface="Noto Sans CJK JP"/>
-                <a:cs typeface="Noto Sans"/>
-                <a:hlinkClick r:id="rId4"/>
-              </a:rPr>
-              <a:t>https://arxiv.org/abs/1708.02002</a:t>
-            </a:r>
-          </a:p>
-        </p:txBody>
-      </p:sp>
-      <p:sp>
-        <p:nvSpPr>
-          <p:cNvPr id="9" name="TextBox 8"/>
-          <p:cNvSpPr txBox="1"/>
-          <p:nvPr/>
-        </p:nvSpPr>
-        <p:spPr>
-          <a:xfrm>
-            <a:off x="502920" y="4699000"/>
-            <a:ext cx="8183879" cy="177800"/>
-          </a:xfrm>
-          <a:prstGeom prst="rect">
-            <a:avLst/>
-          </a:prstGeom>
-          <a:noFill/>
-        </p:spPr>
-        <p:txBody>
-          <a:bodyPr wrap="square" lIns="0" rIns="0" tIns="0" bIns="0">
-            <a:spAutoFit/>
-          </a:bodyPr>
-          <a:lstStyle/>
-          <a:p>
-            <a:pPr algn="l">
-              <a:lnSpc>
-                <a:spcPts val="1400"/>
-              </a:lnSpc>
-              <a:spcBef>
-                <a:spcPts val="0"/>
-              </a:spcBef>
-              <a:spcAft>
-                <a:spcPts val="0"/>
-              </a:spcAft>
-            </a:pPr>
-            <a:r>
-              <a:rPr sz="800" b="0" lang="ja-JP">
-                <a:solidFill>
-                  <a:srgbClr val="626669"/>
-                </a:solidFill>
-                <a:latin typeface="Noto Sans"/>
-                <a:ea typeface="Noto Sans CJK JP"/>
-                <a:cs typeface="Noto Sans"/>
-              </a:rPr>
-              <a:t/>
-            </a:r>
-            <a:r>
-              <a:rPr sz="800" lang="ja-JP">
-                <a:solidFill>
-                  <a:srgbClr val="626669"/>
-                </a:solidFill>
-                <a:latin typeface="Noto Sans"/>
-                <a:ea typeface="Noto Sans CJK JP"/>
-                <a:cs typeface="Noto Sans"/>
-              </a:rPr>
-              <a:t>[3] Lv et al. (2024). arXiv:2407.17140. RT-DETRv2: Improved Baseline with Bag-of-Freebies for Real-Time Detection Transformer.</a:t>
-            </a:r>
-          </a:p>
-        </p:txBody>
-      </p:sp>
-      <p:sp>
-        <p:nvSpPr>
-          <p:cNvPr id="10" name="TextBox 9"/>
-          <p:cNvSpPr txBox="1"/>
-          <p:nvPr/>
-        </p:nvSpPr>
-        <p:spPr>
-          <a:xfrm>
-            <a:off x="6558753" y="4717326"/>
-            <a:ext cx="2128046" cy="177800"/>
-          </a:xfrm>
-          <a:prstGeom prst="rect">
-            <a:avLst/>
-          </a:prstGeom>
-          <a:noFill/>
-        </p:spPr>
-        <p:txBody>
-          <a:bodyPr wrap="none" lIns="0" rIns="0" tIns="0" bIns="0">
-            <a:spAutoFit/>
-          </a:bodyPr>
-          <a:lstStyle/>
-          <a:p>
-            <a:pPr algn="l">
-              <a:lnSpc>
-                <a:spcPts val="1400"/>
-              </a:lnSpc>
-              <a:spcBef>
-                <a:spcPts val="0"/>
-              </a:spcBef>
-              <a:spcAft>
-                <a:spcPts val="0"/>
-              </a:spcAft>
-            </a:pPr>
-            <a:r>
-              <a:rPr sz="800" b="0" lang="ja-JP">
-                <a:solidFill>
-                  <a:srgbClr val="626669"/>
-                </a:solidFill>
-                <a:latin typeface="Noto Sans"/>
-                <a:ea typeface="Noto Sans CJK JP"/>
-                <a:cs typeface="Noto Sans"/>
-              </a:rPr>
-              <a:t/>
-            </a:r>
-            <a:r>
-              <a:rPr sz="800" lang="ja-JP">
-                <a:solidFill>
-                  <a:srgbClr val="626669"/>
-                </a:solidFill>
-                <a:latin typeface="Noto Sans"/>
-                <a:ea typeface="Noto Sans CJK JP"/>
-                <a:cs typeface="Noto Sans"/>
-                <a:hlinkClick r:id="rId2"/>
-              </a:rPr>
-              <a:t>https://arxiv.org/abs/2407.17140</a:t>
-            </a:r>
-          </a:p>
-        </p:txBody>
-      </p:sp>
-    </p:spTree>
-  </p:cSld>
-  <p:clrMapOvr>
-    <a:masterClrMapping/>
-  </p:clrMapOvr>
-</p:sld>
-</file>
-
-<file path=ppt/slides/slide43.xml><?xml version="1.0" encoding="utf-8"?>
-<p:sld xmlns:a="http://schemas.openxmlformats.org/drawingml/2006/main" xmlns:p="http://schemas.openxmlformats.org/presentationml/2006/main" xmlns:r="http://schemas.openxmlformats.org/officeDocument/2006/relationships">
-  <p:cSld>
-    <p:spTree>
-      <p:nvGrpSpPr>
-        <p:cNvPr id="1" name=""/>
-        <p:cNvGrpSpPr/>
-        <p:nvPr/>
-      </p:nvGrpSpPr>
-      <p:grpSpPr/>
-      <p:sp>
-        <p:nvSpPr>
-          <p:cNvPr id="2" name="Title 1"/>
-          <p:cNvSpPr>
-            <a:spLocks noGrp="1"/>
-          </p:cNvSpPr>
-          <p:nvPr>
-            <p:ph type="title"/>
-          </p:nvPr>
-        </p:nvSpPr>
-        <p:spPr>
-          <a:xfrm>
-            <a:off x="468172" y="650138"/>
-            <a:ext cx="8206740" cy="616305"/>
-          </a:xfrm>
-        </p:spPr>
-        <p:txBody>
-          <a:bodyPr wrap="none" anchor="t" lIns="0" rIns="0" tIns="0" bIns="0"/>
-          <a:lstStyle/>
-          <a:p>
-            <a:pPr algn="l">
-              <a:lnSpc>
-                <a:spcPct val="100000"/>
-              </a:lnSpc>
-              <a:spcBef>
-                <a:spcPts val="0"/>
-              </a:spcBef>
-              <a:spcAft>
-                <a:spcPts val="0"/>
-              </a:spcAft>
-              <a:buNone/>
-              <a:defRPr lang="ja-JP" sz="2800" b="1">
-                <a:solidFill>
-                  <a:srgbClr val="303437"/>
-                </a:solidFill>
-                <a:latin typeface="Noto Sans"/>
-                <a:ea typeface="Noto Sans CJK JP"/>
-                <a:cs typeface="Noto Sans"/>
-              </a:defRPr>
-            </a:pPr>
-            <a:r>
-              <a:rPr sz="2800" b="1" lang="ja-JP">
-                <a:solidFill>
-                  <a:srgbClr val="303437"/>
-                </a:solidFill>
-                <a:latin typeface="Noto Sans"/>
-                <a:ea typeface="Noto Sans CJK JP"/>
-                <a:cs typeface="Noto Sans"/>
-              </a:rPr>
-              <a:t>R50・FPN・3xはモデルと学習設定を表す</a:t>
-            </a:r>
-          </a:p>
-        </p:txBody>
-      </p:sp>
-      <p:sp>
-        <p:nvSpPr>
-          <p:cNvPr id="3" name="Text Placeholder 2"/>
-          <p:cNvSpPr>
-            <a:spLocks noGrp="1"/>
-          </p:cNvSpPr>
-          <p:nvPr>
-            <p:ph type="body" idx="1"/>
-          </p:nvPr>
-        </p:nvSpPr>
-        <p:spPr>
-          <a:xfrm>
-            <a:off x="594360" y="1301097"/>
-            <a:ext cx="7955279" cy="3200400"/>
-          </a:xfrm>
-        </p:spPr>
-        <p:txBody>
-          <a:bodyPr wrap="square" anchor="t" tIns="91440" bIns="91440"/>
-          <a:lstStyle/>
-          <a:p>
-            <a:pPr algn="l" lvl="0" marL="457200" indent="-355600">
-              <a:lnSpc>
-                <a:spcPct val="115000"/>
-              </a:lnSpc>
-              <a:spcBef>
-                <a:spcPts val="0"/>
-              </a:spcBef>
-              <a:spcAft>
-                <a:spcPts val="1000"/>
-              </a:spcAft>
-              <a:buSzPct val="57826"/>
-              <a:buFont typeface="Noto Sans CJK JP"/>
-              <a:buChar char="●"/>
-              <a:defRPr lang="ja-JP" sz="2300" b="0">
-                <a:solidFill>
-                  <a:srgbClr val="303437"/>
-                </a:solidFill>
-                <a:latin typeface="Noto Sans"/>
-                <a:ea typeface="Noto Sans CJK JP"/>
-                <a:cs typeface="Noto Sans"/>
-              </a:defRPr>
-            </a:pPr>
-            <a:r>
-              <a:rPr sz="2300" b="0" lang="ja-JP">
-                <a:solidFill>
-                  <a:srgbClr val="303437"/>
-                </a:solidFill>
-                <a:latin typeface="Noto Sans"/>
-                <a:ea typeface="Noto Sans CJK JP"/>
-                <a:cs typeface="Noto Sans"/>
-              </a:rPr>
-              <a:t>R50は、画像から特徴を抽出する50層のResNet-50（2016）を指す。</a:t>
-            </a:r>
-          </a:p>
-          <a:p>
-            <a:pPr algn="l" lvl="0" marL="457200" indent="-355600">
-              <a:lnSpc>
-                <a:spcPct val="115000"/>
-              </a:lnSpc>
-              <a:spcBef>
-                <a:spcPts val="0"/>
-              </a:spcBef>
-              <a:spcAft>
-                <a:spcPts val="1000"/>
-              </a:spcAft>
-              <a:buSzPct val="57826"/>
-              <a:buFont typeface="Noto Sans CJK JP"/>
-              <a:buChar char="●"/>
-              <a:defRPr lang="ja-JP" sz="2300" b="0">
-                <a:solidFill>
-                  <a:srgbClr val="303437"/>
-                </a:solidFill>
-                <a:latin typeface="Noto Sans"/>
-                <a:ea typeface="Noto Sans CJK JP"/>
-                <a:cs typeface="Noto Sans"/>
-              </a:defRPr>
-            </a:pPr>
-            <a:r>
-              <a:rPr sz="2300" b="0" lang="ja-JP">
-                <a:solidFill>
-                  <a:srgbClr val="303437"/>
-                </a:solidFill>
-                <a:latin typeface="Noto Sans"/>
-                <a:ea typeface="Noto Sans CJK JP"/>
-                <a:cs typeface="Noto Sans"/>
-              </a:rPr>
-              <a:t>FPNは、異なる解像度の特徴を統合するFeature Pyramid Networks（2017）を指す。</a:t>
-            </a:r>
-          </a:p>
-          <a:p>
-            <a:pPr algn="l" lvl="0" marL="457200" indent="-355600">
-              <a:lnSpc>
-                <a:spcPct val="115000"/>
-              </a:lnSpc>
-              <a:spcBef>
-                <a:spcPts val="0"/>
-              </a:spcBef>
-              <a:spcAft>
-                <a:spcPts val="1000"/>
-              </a:spcAft>
-              <a:buSzPct val="57826"/>
-              <a:buFont typeface="Noto Sans CJK JP"/>
-              <a:buChar char="●"/>
-              <a:defRPr lang="ja-JP" sz="2300" b="0">
-                <a:solidFill>
-                  <a:srgbClr val="303437"/>
-                </a:solidFill>
-                <a:latin typeface="Noto Sans"/>
-                <a:ea typeface="Noto Sans CJK JP"/>
-                <a:cs typeface="Noto Sans"/>
-              </a:defRPr>
-            </a:pPr>
-            <a:r>
-              <a:rPr sz="2300" b="0" lang="ja-JP">
-                <a:solidFill>
-                  <a:srgbClr val="303437"/>
-                </a:solidFill>
-                <a:latin typeface="Noto Sans"/>
-                <a:ea typeface="Noto Sans CJK JP"/>
-                <a:cs typeface="Noto Sans"/>
-              </a:rPr>
-              <a:t>3xは公開実装の学習スケジュール名で、標準的な1xより長く学習する設定を示す。モデルの発表年ではない。</a:t>
-            </a:r>
-          </a:p>
-        </p:txBody>
-      </p:sp>
-      <p:sp>
-        <p:nvSpPr>
-          <p:cNvPr id="4" name="Title 3"/>
-          <p:cNvSpPr>
-            <a:spLocks noGrp="1"/>
-          </p:cNvSpPr>
-          <p:nvPr>
-            <p:ph type="title" idx="2"/>
-          </p:nvPr>
-        </p:nvSpPr>
-        <p:spPr>
-          <a:xfrm>
-            <a:off x="75895" y="0"/>
-            <a:ext cx="8115300" cy="480060"/>
-          </a:xfrm>
-        </p:spPr>
-        <p:txBody>
-          <a:bodyPr wrap="square" anchor="ctr" lIns="0" rIns="0" tIns="0" bIns="0"/>
-          <a:lstStyle/>
-          <a:p>
-            <a:pPr algn="l">
-              <a:lnSpc>
-                <a:spcPct val="100000"/>
-              </a:lnSpc>
-              <a:spcBef>
-                <a:spcPts val="0"/>
-              </a:spcBef>
-              <a:spcAft>
-                <a:spcPts val="0"/>
-              </a:spcAft>
-              <a:buNone/>
-              <a:defRPr lang="ja-JP" sz="1400" b="1">
-                <a:solidFill>
-                  <a:srgbClr val="FFFEF8"/>
-                </a:solidFill>
-                <a:latin typeface="Noto Sans"/>
-                <a:ea typeface="Noto Sans CJK JP"/>
-                <a:cs typeface="Noto Sans"/>
-              </a:defRPr>
-            </a:pPr>
-            <a:r>
-              <a:rPr lang="ja-JP" sz="1400" b="1">
-                <a:solidFill>
-                  <a:srgbClr val="FFFEF8"/>
-                </a:solidFill>
-                <a:latin typeface="Noto Sans"/>
-                <a:ea typeface="Noto Sans CJK JP"/>
-                <a:cs typeface="Noto Sans"/>
-              </a:rPr>
-              <a:t>3. 物体検出・領域分割の評価とモデル性能</a:t>
-            </a:r>
-          </a:p>
-        </p:txBody>
-      </p:sp>
-      <p:sp>
-        <p:nvSpPr>
-          <p:cNvPr id="5" name="TextBox 4"/>
-          <p:cNvSpPr txBox="1"/>
-          <p:nvPr/>
-        </p:nvSpPr>
-        <p:spPr>
-          <a:xfrm>
-            <a:off x="502920" y="4165600"/>
-            <a:ext cx="8183879" cy="177800"/>
-          </a:xfrm>
-          <a:prstGeom prst="rect">
-            <a:avLst/>
-          </a:prstGeom>
-          <a:noFill/>
-        </p:spPr>
-        <p:txBody>
-          <a:bodyPr wrap="square" lIns="0" rIns="0" tIns="0" bIns="0">
-            <a:spAutoFit/>
-          </a:bodyPr>
-          <a:lstStyle/>
-          <a:p>
-            <a:pPr algn="l">
-              <a:lnSpc>
-                <a:spcPts val="1400"/>
-              </a:lnSpc>
-              <a:spcBef>
-                <a:spcPts val="0"/>
-              </a:spcBef>
-              <a:spcAft>
-                <a:spcPts val="0"/>
-              </a:spcAft>
-            </a:pPr>
-            <a:r>
-              <a:rPr sz="800" b="0" lang="ja-JP">
-                <a:solidFill>
-                  <a:srgbClr val="626669"/>
-                </a:solidFill>
-                <a:latin typeface="Noto Sans"/>
-                <a:ea typeface="Noto Sans CJK JP"/>
-                <a:cs typeface="Noto Sans"/>
-              </a:rPr>
-              <a:t/>
-            </a:r>
-            <a:r>
-              <a:rPr sz="800" lang="ja-JP">
-                <a:solidFill>
-                  <a:srgbClr val="626669"/>
-                </a:solidFill>
-                <a:latin typeface="Noto Sans"/>
-                <a:ea typeface="Noto Sans CJK JP"/>
-                <a:cs typeface="Noto Sans"/>
-              </a:rPr>
-              <a:t>[1] He et al. (2016). CVPR, pp. 770–778. Deep Residual Learning for Image Recognition.</a:t>
-            </a:r>
-          </a:p>
-        </p:txBody>
-      </p:sp>
-      <p:sp>
-        <p:nvSpPr>
-          <p:cNvPr id="6" name="TextBox 5"/>
-          <p:cNvSpPr txBox="1"/>
-          <p:nvPr/>
-        </p:nvSpPr>
-        <p:spPr>
-          <a:xfrm>
-            <a:off x="4664725" y="4183913"/>
-            <a:ext cx="4022074" cy="177800"/>
-          </a:xfrm>
-          <a:prstGeom prst="rect">
-            <a:avLst/>
-          </a:prstGeom>
-          <a:noFill/>
-        </p:spPr>
-        <p:txBody>
-          <a:bodyPr wrap="none" lIns="0" rIns="0" tIns="0" bIns="0">
-            <a:spAutoFit/>
-          </a:bodyPr>
-          <a:lstStyle/>
-          <a:p>
-            <a:pPr algn="l">
-              <a:lnSpc>
-                <a:spcPts val="1400"/>
-              </a:lnSpc>
-              <a:spcBef>
-                <a:spcPts val="0"/>
-              </a:spcBef>
-              <a:spcAft>
-                <a:spcPts val="0"/>
-              </a:spcAft>
-            </a:pPr>
-            <a:r>
-              <a:rPr sz="800" b="0" lang="ja-JP">
-                <a:solidFill>
-                  <a:srgbClr val="626669"/>
-                </a:solidFill>
-                <a:latin typeface="Noto Sans"/>
-                <a:ea typeface="Noto Sans CJK JP"/>
-                <a:cs typeface="Noto Sans"/>
-              </a:rPr>
-              <a:t/>
-            </a:r>
-            <a:r>
-              <a:rPr sz="800" lang="ja-JP">
-                <a:solidFill>
-                  <a:srgbClr val="626669"/>
-                </a:solidFill>
-                <a:latin typeface="Noto Sans"/>
-                <a:ea typeface="Noto Sans CJK JP"/>
-                <a:cs typeface="Noto Sans"/>
-                <a:hlinkClick r:id="rId3"/>
-              </a:rPr>
-              <a:t>https://arxiv.org/abs/1512.03385</a:t>
-            </a:r>
-          </a:p>
-        </p:txBody>
-      </p:sp>
-      <p:sp>
-        <p:nvSpPr>
-          <p:cNvPr id="7" name="TextBox 6"/>
-          <p:cNvSpPr txBox="1"/>
-          <p:nvPr/>
-        </p:nvSpPr>
-        <p:spPr>
-          <a:xfrm>
-            <a:off x="502920" y="4521200"/>
-            <a:ext cx="8183879" cy="177800"/>
-          </a:xfrm>
-          <a:prstGeom prst="rect">
-            <a:avLst/>
-          </a:prstGeom>
-          <a:noFill/>
-        </p:spPr>
-        <p:txBody>
-          <a:bodyPr wrap="square" lIns="0" rIns="0" tIns="0" bIns="0">
-            <a:spAutoFit/>
-          </a:bodyPr>
-          <a:lstStyle/>
-          <a:p>
-            <a:pPr algn="l">
-              <a:lnSpc>
-                <a:spcPts val="1400"/>
-              </a:lnSpc>
-              <a:spcBef>
-                <a:spcPts val="0"/>
-              </a:spcBef>
-              <a:spcAft>
-                <a:spcPts val="0"/>
-              </a:spcAft>
-            </a:pPr>
-            <a:r>
-              <a:rPr sz="800" b="0" lang="ja-JP">
-                <a:solidFill>
-                  <a:srgbClr val="626669"/>
-                </a:solidFill>
-                <a:latin typeface="Noto Sans"/>
-                <a:ea typeface="Noto Sans CJK JP"/>
-                <a:cs typeface="Noto Sans"/>
-              </a:rPr>
-              <a:t/>
-            </a:r>
-            <a:r>
-              <a:rPr sz="800" lang="ja-JP">
-                <a:solidFill>
-                  <a:srgbClr val="626669"/>
-                </a:solidFill>
-                <a:latin typeface="Noto Sans"/>
-                <a:ea typeface="Noto Sans CJK JP"/>
-                <a:cs typeface="Noto Sans"/>
-              </a:rPr>
-              <a:t>[2] Lin et al. (2017). CVPR. Feature Pyramid Networks for Object Detection.</a:t>
-            </a:r>
-          </a:p>
-        </p:txBody>
-      </p:sp>
-      <p:sp>
-        <p:nvSpPr>
-          <p:cNvPr id="8" name="TextBox 7"/>
-          <p:cNvSpPr txBox="1"/>
-          <p:nvPr/>
-        </p:nvSpPr>
-        <p:spPr>
-          <a:xfrm>
-            <a:off x="4074365" y="4539526"/>
-            <a:ext cx="4612434" cy="177800"/>
-          </a:xfrm>
-          <a:prstGeom prst="rect">
-            <a:avLst/>
-          </a:prstGeom>
-          <a:noFill/>
-        </p:spPr>
-        <p:txBody>
-          <a:bodyPr wrap="none" lIns="0" rIns="0" tIns="0" bIns="0">
-            <a:spAutoFit/>
-          </a:bodyPr>
-          <a:lstStyle/>
-          <a:p>
-            <a:pPr algn="l">
-              <a:lnSpc>
-                <a:spcPts val="1400"/>
-              </a:lnSpc>
-              <a:spcBef>
-                <a:spcPts val="0"/>
-              </a:spcBef>
-              <a:spcAft>
-                <a:spcPts val="0"/>
-              </a:spcAft>
-            </a:pPr>
-            <a:r>
-              <a:rPr sz="800" b="0" lang="ja-JP">
-                <a:solidFill>
-                  <a:srgbClr val="626669"/>
-                </a:solidFill>
-                <a:latin typeface="Noto Sans"/>
-                <a:ea typeface="Noto Sans CJK JP"/>
-                <a:cs typeface="Noto Sans"/>
-              </a:rPr>
-              <a:t/>
-            </a:r>
-            <a:r>
-              <a:rPr sz="800" lang="ja-JP">
-                <a:solidFill>
-                  <a:srgbClr val="626669"/>
-                </a:solidFill>
-                <a:latin typeface="Noto Sans"/>
-                <a:ea typeface="Noto Sans CJK JP"/>
-                <a:cs typeface="Noto Sans"/>
-                <a:hlinkClick r:id="rId4"/>
-              </a:rPr>
-              <a:t>https://arxiv.org/abs/1612.03144</a:t>
-            </a:r>
-          </a:p>
-        </p:txBody>
-      </p:sp>
-      <p:sp>
-        <p:nvSpPr>
-          <p:cNvPr id="9" name="TextBox 8"/>
-          <p:cNvSpPr txBox="1"/>
-          <p:nvPr/>
-        </p:nvSpPr>
-        <p:spPr>
-          <a:xfrm>
-            <a:off x="502920" y="4876800"/>
-            <a:ext cx="8183879" cy="177800"/>
-          </a:xfrm>
-          <a:prstGeom prst="rect">
-            <a:avLst/>
-          </a:prstGeom>
-          <a:noFill/>
-        </p:spPr>
-        <p:txBody>
-          <a:bodyPr wrap="square" lIns="0" rIns="0" tIns="0" bIns="0">
-            <a:spAutoFit/>
-          </a:bodyPr>
-          <a:lstStyle/>
-          <a:p>
-            <a:pPr algn="l">
-              <a:lnSpc>
-                <a:spcPts val="1400"/>
-              </a:lnSpc>
-              <a:spcBef>
-                <a:spcPts val="0"/>
-              </a:spcBef>
-              <a:spcAft>
-                <a:spcPts val="0"/>
-              </a:spcAft>
-            </a:pPr>
-            <a:r>
-              <a:rPr sz="800" b="0" lang="ja-JP">
-                <a:solidFill>
-                  <a:srgbClr val="626669"/>
-                </a:solidFill>
-                <a:latin typeface="Noto Sans"/>
-                <a:ea typeface="Noto Sans CJK JP"/>
-                <a:cs typeface="Noto Sans"/>
-              </a:rPr>
-              <a:t/>
-            </a:r>
-            <a:r>
-              <a:rPr sz="800" lang="ja-JP">
-                <a:solidFill>
-                  <a:srgbClr val="626669"/>
-                </a:solidFill>
-                <a:latin typeface="Noto Sans"/>
-                <a:ea typeface="Noto Sans CJK JP"/>
-                <a:cs typeface="Noto Sans"/>
-              </a:rPr>
-              <a:t>[3] </a:t>
-            </a:r>
-            <a:r>
-              <a:rPr sz="800" lang="ja-JP">
-                <a:solidFill>
-                  <a:srgbClr val="626669"/>
-                </a:solidFill>
-                <a:latin typeface="Noto Sans"/>
-                <a:ea typeface="Noto Sans CJK JP"/>
-                <a:cs typeface="Noto Sans"/>
-                <a:hlinkClick r:id="rId2"/>
-              </a:rPr>
-              <a:t>https://github.com/facebookresearch/detectron2/blob/main/MODEL_ZOO.md</a:t>
-            </a:r>
-          </a:p>
-        </p:txBody>
-      </p:sp>
-    </p:spTree>
-  </p:cSld>
-  <p:clrMapOvr>
-    <a:masterClrMapping/>
-  </p:clrMapOvr>
-</p:sld>
-</file>
-
-<file path=ppt/slides/slide44.xml><?xml version="1.0" encoding="utf-8"?>
 <p:sld xmlns:a="http://schemas.openxmlformats.org/drawingml/2006/main" xmlns:p="http://schemas.openxmlformats.org/presentationml/2006/main" xmlns:r="http://schemas.openxmlformats.org/officeDocument/2006/relationships">
   <p:cSld>
     <p:spTree>
@@ -28773,6 +27513,1165 @@
 </p:sld>
 </file>
 
+<file path=ppt/slides/slide43.xml><?xml version="1.0" encoding="utf-8"?>
+<p:sld xmlns:a="http://schemas.openxmlformats.org/drawingml/2006/main" xmlns:p="http://schemas.openxmlformats.org/presentationml/2006/main" xmlns:r="http://schemas.openxmlformats.org/officeDocument/2006/relationships">
+  <p:cSld>
+    <p:spTree>
+      <p:nvGrpSpPr>
+        <p:cNvPr id="1" name=""/>
+        <p:cNvGrpSpPr/>
+        <p:nvPr/>
+      </p:nvGrpSpPr>
+      <p:grpSpPr/>
+      <p:sp>
+        <p:nvSpPr>
+          <p:cNvPr id="2" name="Title 1"/>
+          <p:cNvSpPr>
+            <a:spLocks noGrp="1"/>
+          </p:cNvSpPr>
+          <p:nvPr>
+            <p:ph type="title"/>
+          </p:nvPr>
+        </p:nvSpPr>
+        <p:spPr>
+          <a:xfrm>
+            <a:off x="468172" y="650138"/>
+            <a:ext cx="8206740" cy="616305"/>
+          </a:xfrm>
+        </p:spPr>
+        <p:txBody>
+          <a:bodyPr wrap="none" anchor="t" lIns="0" rIns="0" tIns="0" bIns="0"/>
+          <a:lstStyle/>
+          <a:p>
+            <a:pPr algn="l">
+              <a:lnSpc>
+                <a:spcPct val="100000"/>
+              </a:lnSpc>
+              <a:spcBef>
+                <a:spcPts val="0"/>
+              </a:spcBef>
+              <a:spcAft>
+                <a:spcPts val="0"/>
+              </a:spcAft>
+              <a:buNone/>
+              <a:defRPr lang="ja-JP" sz="2800" b="1">
+                <a:solidFill>
+                  <a:srgbClr val="303437"/>
+                </a:solidFill>
+                <a:latin typeface="Noto Sans"/>
+                <a:ea typeface="Noto Sans CJK JP"/>
+                <a:cs typeface="Noto Sans"/>
+              </a:defRPr>
+            </a:pPr>
+            <a:r>
+              <a:rPr sz="2800" b="1" lang="ja-JP">
+                <a:solidFill>
+                  <a:srgbClr val="303437"/>
+                </a:solidFill>
+                <a:latin typeface="Noto Sans"/>
+                <a:ea typeface="Noto Sans CJK JP"/>
+                <a:cs typeface="Noto Sans"/>
+              </a:rPr>
+              <a:t>検出方式は領域候補を使うかどうかで異なる</a:t>
+            </a:r>
+          </a:p>
+        </p:txBody>
+      </p:sp>
+      <p:sp>
+        <p:nvSpPr>
+          <p:cNvPr id="3" name="Text Placeholder 2"/>
+          <p:cNvSpPr>
+            <a:spLocks noGrp="1"/>
+          </p:cNvSpPr>
+          <p:nvPr>
+            <p:ph type="body" idx="1"/>
+          </p:nvPr>
+        </p:nvSpPr>
+        <p:spPr>
+          <a:xfrm>
+            <a:off x="594360" y="1373852"/>
+            <a:ext cx="7955279" cy="3200400"/>
+          </a:xfrm>
+        </p:spPr>
+        <p:txBody>
+          <a:bodyPr wrap="square" anchor="t" tIns="91440" bIns="91440"/>
+          <a:lstStyle/>
+          <a:p>
+            <a:pPr algn="l" lvl="0" marL="457200" indent="-355600">
+              <a:lnSpc>
+                <a:spcPct val="110000"/>
+              </a:lnSpc>
+              <a:spcBef>
+                <a:spcPts val="0"/>
+              </a:spcBef>
+              <a:spcAft>
+                <a:spcPts val="700"/>
+              </a:spcAft>
+              <a:buSzPct val="63333"/>
+              <a:buFont typeface="Noto Sans CJK JP"/>
+              <a:buChar char="●"/>
+              <a:defRPr lang="ja-JP" sz="2100" b="0">
+                <a:solidFill>
+                  <a:srgbClr val="303437"/>
+                </a:solidFill>
+                <a:latin typeface="Noto Sans"/>
+                <a:ea typeface="Noto Sans CJK JP"/>
+                <a:cs typeface="Noto Sans"/>
+              </a:defRPr>
+            </a:pPr>
+            <a:r>
+              <a:rPr sz="2100" b="0" lang="ja-JP">
+                <a:solidFill>
+                  <a:srgbClr val="303437"/>
+                </a:solidFill>
+                <a:latin typeface="Noto Sans"/>
+                <a:ea typeface="Noto Sans CJK JP"/>
+                <a:cs typeface="Noto Sans"/>
+              </a:rPr>
+              <a:t>Faster R-CNN（2015）は候補領域を作り、その領域についてカテゴリと位置を推定する二段階方式である。</a:t>
+            </a:r>
+          </a:p>
+          <a:p>
+            <a:pPr algn="l" lvl="0" marL="457200" indent="-355600">
+              <a:lnSpc>
+                <a:spcPct val="110000"/>
+              </a:lnSpc>
+              <a:spcBef>
+                <a:spcPts val="0"/>
+              </a:spcBef>
+              <a:spcAft>
+                <a:spcPts val="700"/>
+              </a:spcAft>
+              <a:buSzPct val="63333"/>
+              <a:buFont typeface="Noto Sans CJK JP"/>
+              <a:buChar char="●"/>
+              <a:defRPr lang="ja-JP" sz="2100" b="0">
+                <a:solidFill>
+                  <a:srgbClr val="303437"/>
+                </a:solidFill>
+                <a:latin typeface="Noto Sans"/>
+                <a:ea typeface="Noto Sans CJK JP"/>
+                <a:cs typeface="Noto Sans"/>
+              </a:defRPr>
+            </a:pPr>
+            <a:r>
+              <a:rPr sz="2100" b="0" lang="ja-JP">
+                <a:solidFill>
+                  <a:srgbClr val="303437"/>
+                </a:solidFill>
+                <a:latin typeface="Noto Sans"/>
+                <a:ea typeface="Noto Sans CJK JP"/>
+                <a:cs typeface="Noto Sans"/>
+              </a:rPr>
+              <a:t>RetinaNet（2017）は画像上の多数の位置から直接検出する一段階方式で、学習中の易しい負例の影響を抑える。</a:t>
+            </a:r>
+          </a:p>
+          <a:p>
+            <a:pPr algn="l" lvl="0" marL="457200" indent="-355600">
+              <a:lnSpc>
+                <a:spcPct val="110000"/>
+              </a:lnSpc>
+              <a:spcBef>
+                <a:spcPts val="0"/>
+              </a:spcBef>
+              <a:spcAft>
+                <a:spcPts val="700"/>
+              </a:spcAft>
+              <a:buSzPct val="63333"/>
+              <a:buFont typeface="Noto Sans CJK JP"/>
+              <a:buChar char="●"/>
+              <a:defRPr lang="ja-JP" sz="2100" b="0">
+                <a:solidFill>
+                  <a:srgbClr val="303437"/>
+                </a:solidFill>
+                <a:latin typeface="Noto Sans"/>
+                <a:ea typeface="Noto Sans CJK JP"/>
+                <a:cs typeface="Noto Sans"/>
+              </a:defRPr>
+            </a:pPr>
+            <a:r>
+              <a:rPr sz="2100" b="0" lang="ja-JP">
+                <a:solidFill>
+                  <a:srgbClr val="303437"/>
+                </a:solidFill>
+                <a:latin typeface="Noto Sans"/>
+                <a:ea typeface="Noto Sans CJK JP"/>
+                <a:cs typeface="Noto Sans"/>
+              </a:rPr>
+              <a:t>RT-DETRv2（2024）は、物体間の関係を扱うTransformerを用いた実時間検出器RT-DETR（2023）を改良した。</a:t>
+            </a:r>
+          </a:p>
+        </p:txBody>
+      </p:sp>
+      <p:sp>
+        <p:nvSpPr>
+          <p:cNvPr id="4" name="Title 3"/>
+          <p:cNvSpPr>
+            <a:spLocks noGrp="1"/>
+          </p:cNvSpPr>
+          <p:nvPr>
+            <p:ph type="title" idx="2"/>
+          </p:nvPr>
+        </p:nvSpPr>
+        <p:spPr>
+          <a:xfrm>
+            <a:off x="75895" y="0"/>
+            <a:ext cx="8115300" cy="480060"/>
+          </a:xfrm>
+        </p:spPr>
+        <p:txBody>
+          <a:bodyPr wrap="square" anchor="ctr" lIns="0" rIns="0" tIns="0" bIns="0"/>
+          <a:lstStyle/>
+          <a:p>
+            <a:pPr algn="l">
+              <a:lnSpc>
+                <a:spcPct val="100000"/>
+              </a:lnSpc>
+              <a:spcBef>
+                <a:spcPts val="0"/>
+              </a:spcBef>
+              <a:spcAft>
+                <a:spcPts val="0"/>
+              </a:spcAft>
+              <a:buNone/>
+              <a:defRPr lang="ja-JP" sz="1400" b="1">
+                <a:solidFill>
+                  <a:srgbClr val="FFFEF8"/>
+                </a:solidFill>
+                <a:latin typeface="Noto Sans"/>
+                <a:ea typeface="Noto Sans CJK JP"/>
+                <a:cs typeface="Noto Sans"/>
+              </a:defRPr>
+            </a:pPr>
+            <a:r>
+              <a:rPr lang="ja-JP" sz="1400" b="1">
+                <a:solidFill>
+                  <a:srgbClr val="FFFEF8"/>
+                </a:solidFill>
+                <a:latin typeface="Noto Sans"/>
+                <a:ea typeface="Noto Sans CJK JP"/>
+                <a:cs typeface="Noto Sans"/>
+              </a:rPr>
+              <a:t>3. 物体検出・領域分割の評価とモデル性能</a:t>
+            </a:r>
+          </a:p>
+        </p:txBody>
+      </p:sp>
+      <p:sp>
+        <p:nvSpPr>
+          <p:cNvPr id="5" name="TextBox 4"/>
+          <p:cNvSpPr txBox="1"/>
+          <p:nvPr/>
+        </p:nvSpPr>
+        <p:spPr>
+          <a:xfrm>
+            <a:off x="502920" y="3987799"/>
+            <a:ext cx="8183879" cy="177800"/>
+          </a:xfrm>
+          <a:prstGeom prst="rect">
+            <a:avLst/>
+          </a:prstGeom>
+          <a:noFill/>
+        </p:spPr>
+        <p:txBody>
+          <a:bodyPr wrap="square" lIns="0" rIns="0" tIns="0" bIns="0">
+            <a:spAutoFit/>
+          </a:bodyPr>
+          <a:lstStyle/>
+          <a:p>
+            <a:pPr algn="l">
+              <a:lnSpc>
+                <a:spcPts val="1400"/>
+              </a:lnSpc>
+              <a:spcBef>
+                <a:spcPts val="0"/>
+              </a:spcBef>
+              <a:spcAft>
+                <a:spcPts val="0"/>
+              </a:spcAft>
+            </a:pPr>
+            <a:r>
+              <a:rPr sz="800" b="0" lang="ja-JP">
+                <a:solidFill>
+                  <a:srgbClr val="626669"/>
+                </a:solidFill>
+                <a:latin typeface="Noto Sans"/>
+                <a:ea typeface="Noto Sans CJK JP"/>
+                <a:cs typeface="Noto Sans"/>
+              </a:rPr>
+              <a:t/>
+            </a:r>
+            <a:r>
+              <a:rPr sz="800" lang="ja-JP">
+                <a:solidFill>
+                  <a:srgbClr val="626669"/>
+                </a:solidFill>
+                <a:latin typeface="Noto Sans"/>
+                <a:ea typeface="Noto Sans CJK JP"/>
+                <a:cs typeface="Noto Sans"/>
+              </a:rPr>
+              <a:t>[1] Ren et al. (2015). NeurIPS. Faster R-CNN: Towards Real-Time Object Detection with Region Proposal Networks.</a:t>
+            </a:r>
+          </a:p>
+        </p:txBody>
+      </p:sp>
+      <p:sp>
+        <p:nvSpPr>
+          <p:cNvPr id="6" name="TextBox 5"/>
+          <p:cNvSpPr txBox="1"/>
+          <p:nvPr/>
+        </p:nvSpPr>
+        <p:spPr>
+          <a:xfrm>
+            <a:off x="5928392" y="4006114"/>
+            <a:ext cx="2758407" cy="177800"/>
+          </a:xfrm>
+          <a:prstGeom prst="rect">
+            <a:avLst/>
+          </a:prstGeom>
+          <a:noFill/>
+        </p:spPr>
+        <p:txBody>
+          <a:bodyPr wrap="none" lIns="0" rIns="0" tIns="0" bIns="0">
+            <a:spAutoFit/>
+          </a:bodyPr>
+          <a:lstStyle/>
+          <a:p>
+            <a:pPr algn="l">
+              <a:lnSpc>
+                <a:spcPts val="1400"/>
+              </a:lnSpc>
+              <a:spcBef>
+                <a:spcPts val="0"/>
+              </a:spcBef>
+              <a:spcAft>
+                <a:spcPts val="0"/>
+              </a:spcAft>
+            </a:pPr>
+            <a:r>
+              <a:rPr sz="800" b="0" lang="ja-JP">
+                <a:solidFill>
+                  <a:srgbClr val="626669"/>
+                </a:solidFill>
+                <a:latin typeface="Noto Sans"/>
+                <a:ea typeface="Noto Sans CJK JP"/>
+                <a:cs typeface="Noto Sans"/>
+              </a:rPr>
+              <a:t/>
+            </a:r>
+            <a:r>
+              <a:rPr sz="800" lang="ja-JP">
+                <a:solidFill>
+                  <a:srgbClr val="626669"/>
+                </a:solidFill>
+                <a:latin typeface="Noto Sans"/>
+                <a:ea typeface="Noto Sans CJK JP"/>
+                <a:cs typeface="Noto Sans"/>
+                <a:hlinkClick r:id="rId3"/>
+              </a:rPr>
+              <a:t>https://arxiv.org/abs/1506.01497</a:t>
+            </a:r>
+          </a:p>
+        </p:txBody>
+      </p:sp>
+      <p:sp>
+        <p:nvSpPr>
+          <p:cNvPr id="7" name="TextBox 6"/>
+          <p:cNvSpPr txBox="1"/>
+          <p:nvPr/>
+        </p:nvSpPr>
+        <p:spPr>
+          <a:xfrm>
+            <a:off x="502920" y="4343400"/>
+            <a:ext cx="8183879" cy="177800"/>
+          </a:xfrm>
+          <a:prstGeom prst="rect">
+            <a:avLst/>
+          </a:prstGeom>
+          <a:noFill/>
+        </p:spPr>
+        <p:txBody>
+          <a:bodyPr wrap="square" lIns="0" rIns="0" tIns="0" bIns="0">
+            <a:spAutoFit/>
+          </a:bodyPr>
+          <a:lstStyle/>
+          <a:p>
+            <a:pPr algn="l">
+              <a:lnSpc>
+                <a:spcPts val="1400"/>
+              </a:lnSpc>
+              <a:spcBef>
+                <a:spcPts val="0"/>
+              </a:spcBef>
+              <a:spcAft>
+                <a:spcPts val="0"/>
+              </a:spcAft>
+            </a:pPr>
+            <a:r>
+              <a:rPr sz="800" b="0" lang="ja-JP">
+                <a:solidFill>
+                  <a:srgbClr val="626669"/>
+                </a:solidFill>
+                <a:latin typeface="Noto Sans"/>
+                <a:ea typeface="Noto Sans CJK JP"/>
+                <a:cs typeface="Noto Sans"/>
+              </a:rPr>
+              <a:t/>
+            </a:r>
+            <a:r>
+              <a:rPr sz="800" lang="ja-JP">
+                <a:solidFill>
+                  <a:srgbClr val="626669"/>
+                </a:solidFill>
+                <a:latin typeface="Noto Sans"/>
+                <a:ea typeface="Noto Sans CJK JP"/>
+                <a:cs typeface="Noto Sans"/>
+              </a:rPr>
+              <a:t>[2] Lin et al. (2017). ICCV. Focal Loss for Dense Object Detection.</a:t>
+            </a:r>
+          </a:p>
+        </p:txBody>
+      </p:sp>
+      <p:sp>
+        <p:nvSpPr>
+          <p:cNvPr id="8" name="TextBox 7"/>
+          <p:cNvSpPr txBox="1"/>
+          <p:nvPr/>
+        </p:nvSpPr>
+        <p:spPr>
+          <a:xfrm>
+            <a:off x="3583598" y="4361713"/>
+            <a:ext cx="5103201" cy="177800"/>
+          </a:xfrm>
+          <a:prstGeom prst="rect">
+            <a:avLst/>
+          </a:prstGeom>
+          <a:noFill/>
+        </p:spPr>
+        <p:txBody>
+          <a:bodyPr wrap="none" lIns="0" rIns="0" tIns="0" bIns="0">
+            <a:spAutoFit/>
+          </a:bodyPr>
+          <a:lstStyle/>
+          <a:p>
+            <a:pPr algn="l">
+              <a:lnSpc>
+                <a:spcPts val="1400"/>
+              </a:lnSpc>
+              <a:spcBef>
+                <a:spcPts val="0"/>
+              </a:spcBef>
+              <a:spcAft>
+                <a:spcPts val="0"/>
+              </a:spcAft>
+            </a:pPr>
+            <a:r>
+              <a:rPr sz="800" b="0" lang="ja-JP">
+                <a:solidFill>
+                  <a:srgbClr val="626669"/>
+                </a:solidFill>
+                <a:latin typeface="Noto Sans"/>
+                <a:ea typeface="Noto Sans CJK JP"/>
+                <a:cs typeface="Noto Sans"/>
+              </a:rPr>
+              <a:t/>
+            </a:r>
+            <a:r>
+              <a:rPr sz="800" lang="ja-JP">
+                <a:solidFill>
+                  <a:srgbClr val="626669"/>
+                </a:solidFill>
+                <a:latin typeface="Noto Sans"/>
+                <a:ea typeface="Noto Sans CJK JP"/>
+                <a:cs typeface="Noto Sans"/>
+                <a:hlinkClick r:id="rId4"/>
+              </a:rPr>
+              <a:t>https://arxiv.org/abs/1708.02002</a:t>
+            </a:r>
+          </a:p>
+        </p:txBody>
+      </p:sp>
+      <p:sp>
+        <p:nvSpPr>
+          <p:cNvPr id="9" name="TextBox 8"/>
+          <p:cNvSpPr txBox="1"/>
+          <p:nvPr/>
+        </p:nvSpPr>
+        <p:spPr>
+          <a:xfrm>
+            <a:off x="502920" y="4699000"/>
+            <a:ext cx="8183879" cy="177800"/>
+          </a:xfrm>
+          <a:prstGeom prst="rect">
+            <a:avLst/>
+          </a:prstGeom>
+          <a:noFill/>
+        </p:spPr>
+        <p:txBody>
+          <a:bodyPr wrap="square" lIns="0" rIns="0" tIns="0" bIns="0">
+            <a:spAutoFit/>
+          </a:bodyPr>
+          <a:lstStyle/>
+          <a:p>
+            <a:pPr algn="l">
+              <a:lnSpc>
+                <a:spcPts val="1400"/>
+              </a:lnSpc>
+              <a:spcBef>
+                <a:spcPts val="0"/>
+              </a:spcBef>
+              <a:spcAft>
+                <a:spcPts val="0"/>
+              </a:spcAft>
+            </a:pPr>
+            <a:r>
+              <a:rPr sz="800" b="0" lang="ja-JP">
+                <a:solidFill>
+                  <a:srgbClr val="626669"/>
+                </a:solidFill>
+                <a:latin typeface="Noto Sans"/>
+                <a:ea typeface="Noto Sans CJK JP"/>
+                <a:cs typeface="Noto Sans"/>
+              </a:rPr>
+              <a:t/>
+            </a:r>
+            <a:r>
+              <a:rPr sz="800" lang="ja-JP">
+                <a:solidFill>
+                  <a:srgbClr val="626669"/>
+                </a:solidFill>
+                <a:latin typeface="Noto Sans"/>
+                <a:ea typeface="Noto Sans CJK JP"/>
+                <a:cs typeface="Noto Sans"/>
+              </a:rPr>
+              <a:t>[3] Lv et al. (2024). arXiv:2407.17140. RT-DETRv2: Improved Baseline with Bag-of-Freebies for Real-Time Detection Transformer.</a:t>
+            </a:r>
+          </a:p>
+        </p:txBody>
+      </p:sp>
+      <p:sp>
+        <p:nvSpPr>
+          <p:cNvPr id="10" name="TextBox 9"/>
+          <p:cNvSpPr txBox="1"/>
+          <p:nvPr/>
+        </p:nvSpPr>
+        <p:spPr>
+          <a:xfrm>
+            <a:off x="6558753" y="4717326"/>
+            <a:ext cx="2128046" cy="177800"/>
+          </a:xfrm>
+          <a:prstGeom prst="rect">
+            <a:avLst/>
+          </a:prstGeom>
+          <a:noFill/>
+        </p:spPr>
+        <p:txBody>
+          <a:bodyPr wrap="none" lIns="0" rIns="0" tIns="0" bIns="0">
+            <a:spAutoFit/>
+          </a:bodyPr>
+          <a:lstStyle/>
+          <a:p>
+            <a:pPr algn="l">
+              <a:lnSpc>
+                <a:spcPts val="1400"/>
+              </a:lnSpc>
+              <a:spcBef>
+                <a:spcPts val="0"/>
+              </a:spcBef>
+              <a:spcAft>
+                <a:spcPts val="0"/>
+              </a:spcAft>
+            </a:pPr>
+            <a:r>
+              <a:rPr sz="800" b="0" lang="ja-JP">
+                <a:solidFill>
+                  <a:srgbClr val="626669"/>
+                </a:solidFill>
+                <a:latin typeface="Noto Sans"/>
+                <a:ea typeface="Noto Sans CJK JP"/>
+                <a:cs typeface="Noto Sans"/>
+              </a:rPr>
+              <a:t/>
+            </a:r>
+            <a:r>
+              <a:rPr sz="800" lang="ja-JP">
+                <a:solidFill>
+                  <a:srgbClr val="626669"/>
+                </a:solidFill>
+                <a:latin typeface="Noto Sans"/>
+                <a:ea typeface="Noto Sans CJK JP"/>
+                <a:cs typeface="Noto Sans"/>
+                <a:hlinkClick r:id="rId2"/>
+              </a:rPr>
+              <a:t>https://arxiv.org/abs/2407.17140</a:t>
+            </a:r>
+          </a:p>
+        </p:txBody>
+      </p:sp>
+    </p:spTree>
+  </p:cSld>
+  <p:clrMapOvr>
+    <a:masterClrMapping/>
+  </p:clrMapOvr>
+</p:sld>
+</file>
+
+<file path=ppt/slides/slide44.xml><?xml version="1.0" encoding="utf-8"?>
+<p:sld xmlns:a="http://schemas.openxmlformats.org/drawingml/2006/main" xmlns:p="http://schemas.openxmlformats.org/presentationml/2006/main" xmlns:r="http://schemas.openxmlformats.org/officeDocument/2006/relationships">
+  <p:cSld>
+    <p:spTree>
+      <p:nvGrpSpPr>
+        <p:cNvPr id="1" name=""/>
+        <p:cNvGrpSpPr/>
+        <p:nvPr/>
+      </p:nvGrpSpPr>
+      <p:grpSpPr/>
+      <p:sp>
+        <p:nvSpPr>
+          <p:cNvPr id="2" name="Title 1"/>
+          <p:cNvSpPr>
+            <a:spLocks noGrp="1"/>
+          </p:cNvSpPr>
+          <p:nvPr>
+            <p:ph type="title"/>
+          </p:nvPr>
+        </p:nvSpPr>
+        <p:spPr>
+          <a:xfrm>
+            <a:off x="468172" y="650138"/>
+            <a:ext cx="8206740" cy="616305"/>
+          </a:xfrm>
+        </p:spPr>
+        <p:txBody>
+          <a:bodyPr wrap="none" anchor="t" lIns="0" rIns="0" tIns="0" bIns="0"/>
+          <a:lstStyle/>
+          <a:p>
+            <a:pPr algn="l">
+              <a:lnSpc>
+                <a:spcPct val="100000"/>
+              </a:lnSpc>
+              <a:spcBef>
+                <a:spcPts val="0"/>
+              </a:spcBef>
+              <a:spcAft>
+                <a:spcPts val="0"/>
+              </a:spcAft>
+              <a:buNone/>
+              <a:defRPr lang="ja-JP" sz="2800" b="1">
+                <a:solidFill>
+                  <a:srgbClr val="303437"/>
+                </a:solidFill>
+                <a:latin typeface="Noto Sans"/>
+                <a:ea typeface="Noto Sans CJK JP"/>
+                <a:cs typeface="Noto Sans"/>
+              </a:defRPr>
+            </a:pPr>
+            <a:r>
+              <a:rPr sz="2800" b="1" lang="ja-JP">
+                <a:solidFill>
+                  <a:srgbClr val="303437"/>
+                </a:solidFill>
+                <a:latin typeface="Noto Sans"/>
+                <a:ea typeface="Noto Sans CJK JP"/>
+                <a:cs typeface="Noto Sans"/>
+              </a:rPr>
+              <a:t>R50・FPN・3xはモデルと学習設定を表す</a:t>
+            </a:r>
+          </a:p>
+        </p:txBody>
+      </p:sp>
+      <p:sp>
+        <p:nvSpPr>
+          <p:cNvPr id="3" name="Text Placeholder 2"/>
+          <p:cNvSpPr>
+            <a:spLocks noGrp="1"/>
+          </p:cNvSpPr>
+          <p:nvPr>
+            <p:ph type="body" idx="1"/>
+          </p:nvPr>
+        </p:nvSpPr>
+        <p:spPr>
+          <a:xfrm>
+            <a:off x="594360" y="1301097"/>
+            <a:ext cx="7955279" cy="3200400"/>
+          </a:xfrm>
+        </p:spPr>
+        <p:txBody>
+          <a:bodyPr wrap="square" anchor="t" tIns="91440" bIns="91440"/>
+          <a:lstStyle/>
+          <a:p>
+            <a:pPr algn="l" lvl="0" marL="457200" indent="-355600">
+              <a:lnSpc>
+                <a:spcPct val="115000"/>
+              </a:lnSpc>
+              <a:spcBef>
+                <a:spcPts val="0"/>
+              </a:spcBef>
+              <a:spcAft>
+                <a:spcPts val="1000"/>
+              </a:spcAft>
+              <a:buSzPct val="57826"/>
+              <a:buFont typeface="Noto Sans CJK JP"/>
+              <a:buChar char="●"/>
+              <a:defRPr lang="ja-JP" sz="2300" b="0">
+                <a:solidFill>
+                  <a:srgbClr val="303437"/>
+                </a:solidFill>
+                <a:latin typeface="Noto Sans"/>
+                <a:ea typeface="Noto Sans CJK JP"/>
+                <a:cs typeface="Noto Sans"/>
+              </a:defRPr>
+            </a:pPr>
+            <a:r>
+              <a:rPr sz="2300" b="0" lang="ja-JP">
+                <a:solidFill>
+                  <a:srgbClr val="303437"/>
+                </a:solidFill>
+                <a:latin typeface="Noto Sans"/>
+                <a:ea typeface="Noto Sans CJK JP"/>
+                <a:cs typeface="Noto Sans"/>
+              </a:rPr>
+              <a:t>R50は、画像から特徴を抽出する50層のResNet-50（2016）を指す。</a:t>
+            </a:r>
+          </a:p>
+          <a:p>
+            <a:pPr algn="l" lvl="0" marL="457200" indent="-355600">
+              <a:lnSpc>
+                <a:spcPct val="115000"/>
+              </a:lnSpc>
+              <a:spcBef>
+                <a:spcPts val="0"/>
+              </a:spcBef>
+              <a:spcAft>
+                <a:spcPts val="1000"/>
+              </a:spcAft>
+              <a:buSzPct val="57826"/>
+              <a:buFont typeface="Noto Sans CJK JP"/>
+              <a:buChar char="●"/>
+              <a:defRPr lang="ja-JP" sz="2300" b="0">
+                <a:solidFill>
+                  <a:srgbClr val="303437"/>
+                </a:solidFill>
+                <a:latin typeface="Noto Sans"/>
+                <a:ea typeface="Noto Sans CJK JP"/>
+                <a:cs typeface="Noto Sans"/>
+              </a:defRPr>
+            </a:pPr>
+            <a:r>
+              <a:rPr sz="2300" b="0" lang="ja-JP">
+                <a:solidFill>
+                  <a:srgbClr val="303437"/>
+                </a:solidFill>
+                <a:latin typeface="Noto Sans"/>
+                <a:ea typeface="Noto Sans CJK JP"/>
+                <a:cs typeface="Noto Sans"/>
+              </a:rPr>
+              <a:t>FPNは、異なる解像度の特徴を統合するFeature Pyramid Networks（2017）を指す。</a:t>
+            </a:r>
+          </a:p>
+          <a:p>
+            <a:pPr algn="l" lvl="0" marL="457200" indent="-355600">
+              <a:lnSpc>
+                <a:spcPct val="115000"/>
+              </a:lnSpc>
+              <a:spcBef>
+                <a:spcPts val="0"/>
+              </a:spcBef>
+              <a:spcAft>
+                <a:spcPts val="1000"/>
+              </a:spcAft>
+              <a:buSzPct val="57826"/>
+              <a:buFont typeface="Noto Sans CJK JP"/>
+              <a:buChar char="●"/>
+              <a:defRPr lang="ja-JP" sz="2300" b="0">
+                <a:solidFill>
+                  <a:srgbClr val="303437"/>
+                </a:solidFill>
+                <a:latin typeface="Noto Sans"/>
+                <a:ea typeface="Noto Sans CJK JP"/>
+                <a:cs typeface="Noto Sans"/>
+              </a:defRPr>
+            </a:pPr>
+            <a:r>
+              <a:rPr sz="2300" b="0" lang="ja-JP">
+                <a:solidFill>
+                  <a:srgbClr val="303437"/>
+                </a:solidFill>
+                <a:latin typeface="Noto Sans"/>
+                <a:ea typeface="Noto Sans CJK JP"/>
+                <a:cs typeface="Noto Sans"/>
+              </a:rPr>
+              <a:t>3xは公開実装の学習スケジュール名で、標準的な1xより長く学習する設定を示す。</a:t>
+            </a:r>
+          </a:p>
+        </p:txBody>
+      </p:sp>
+      <p:sp>
+        <p:nvSpPr>
+          <p:cNvPr id="4" name="Title 3"/>
+          <p:cNvSpPr>
+            <a:spLocks noGrp="1"/>
+          </p:cNvSpPr>
+          <p:nvPr>
+            <p:ph type="title" idx="2"/>
+          </p:nvPr>
+        </p:nvSpPr>
+        <p:spPr>
+          <a:xfrm>
+            <a:off x="75895" y="0"/>
+            <a:ext cx="8115300" cy="480060"/>
+          </a:xfrm>
+        </p:spPr>
+        <p:txBody>
+          <a:bodyPr wrap="square" anchor="ctr" lIns="0" rIns="0" tIns="0" bIns="0"/>
+          <a:lstStyle/>
+          <a:p>
+            <a:pPr algn="l">
+              <a:lnSpc>
+                <a:spcPct val="100000"/>
+              </a:lnSpc>
+              <a:spcBef>
+                <a:spcPts val="0"/>
+              </a:spcBef>
+              <a:spcAft>
+                <a:spcPts val="0"/>
+              </a:spcAft>
+              <a:buNone/>
+              <a:defRPr lang="ja-JP" sz="1400" b="1">
+                <a:solidFill>
+                  <a:srgbClr val="FFFEF8"/>
+                </a:solidFill>
+                <a:latin typeface="Noto Sans"/>
+                <a:ea typeface="Noto Sans CJK JP"/>
+                <a:cs typeface="Noto Sans"/>
+              </a:defRPr>
+            </a:pPr>
+            <a:r>
+              <a:rPr lang="ja-JP" sz="1400" b="1">
+                <a:solidFill>
+                  <a:srgbClr val="FFFEF8"/>
+                </a:solidFill>
+                <a:latin typeface="Noto Sans"/>
+                <a:ea typeface="Noto Sans CJK JP"/>
+                <a:cs typeface="Noto Sans"/>
+              </a:rPr>
+              <a:t>3. 物体検出・領域分割の評価とモデル性能</a:t>
+            </a:r>
+          </a:p>
+        </p:txBody>
+      </p:sp>
+      <p:sp>
+        <p:nvSpPr>
+          <p:cNvPr id="5" name="TextBox 4"/>
+          <p:cNvSpPr txBox="1"/>
+          <p:nvPr/>
+        </p:nvSpPr>
+        <p:spPr>
+          <a:xfrm>
+            <a:off x="502920" y="4165600"/>
+            <a:ext cx="8183879" cy="177800"/>
+          </a:xfrm>
+          <a:prstGeom prst="rect">
+            <a:avLst/>
+          </a:prstGeom>
+          <a:noFill/>
+        </p:spPr>
+        <p:txBody>
+          <a:bodyPr wrap="square" lIns="0" rIns="0" tIns="0" bIns="0">
+            <a:spAutoFit/>
+          </a:bodyPr>
+          <a:lstStyle/>
+          <a:p>
+            <a:pPr algn="l">
+              <a:lnSpc>
+                <a:spcPts val="1400"/>
+              </a:lnSpc>
+              <a:spcBef>
+                <a:spcPts val="0"/>
+              </a:spcBef>
+              <a:spcAft>
+                <a:spcPts val="0"/>
+              </a:spcAft>
+            </a:pPr>
+            <a:r>
+              <a:rPr sz="800" b="0" lang="ja-JP">
+                <a:solidFill>
+                  <a:srgbClr val="626669"/>
+                </a:solidFill>
+                <a:latin typeface="Noto Sans"/>
+                <a:ea typeface="Noto Sans CJK JP"/>
+                <a:cs typeface="Noto Sans"/>
+              </a:rPr>
+              <a:t/>
+            </a:r>
+            <a:r>
+              <a:rPr sz="800" lang="ja-JP">
+                <a:solidFill>
+                  <a:srgbClr val="626669"/>
+                </a:solidFill>
+                <a:latin typeface="Noto Sans"/>
+                <a:ea typeface="Noto Sans CJK JP"/>
+                <a:cs typeface="Noto Sans"/>
+              </a:rPr>
+              <a:t>[1] He et al. (2016). CVPR, pp. 770–778. Deep Residual Learning for Image Recognition.</a:t>
+            </a:r>
+          </a:p>
+        </p:txBody>
+      </p:sp>
+      <p:sp>
+        <p:nvSpPr>
+          <p:cNvPr id="6" name="TextBox 5"/>
+          <p:cNvSpPr txBox="1"/>
+          <p:nvPr/>
+        </p:nvSpPr>
+        <p:spPr>
+          <a:xfrm>
+            <a:off x="4664725" y="4183913"/>
+            <a:ext cx="4022074" cy="177800"/>
+          </a:xfrm>
+          <a:prstGeom prst="rect">
+            <a:avLst/>
+          </a:prstGeom>
+          <a:noFill/>
+        </p:spPr>
+        <p:txBody>
+          <a:bodyPr wrap="none" lIns="0" rIns="0" tIns="0" bIns="0">
+            <a:spAutoFit/>
+          </a:bodyPr>
+          <a:lstStyle/>
+          <a:p>
+            <a:pPr algn="l">
+              <a:lnSpc>
+                <a:spcPts val="1400"/>
+              </a:lnSpc>
+              <a:spcBef>
+                <a:spcPts val="0"/>
+              </a:spcBef>
+              <a:spcAft>
+                <a:spcPts val="0"/>
+              </a:spcAft>
+            </a:pPr>
+            <a:r>
+              <a:rPr sz="800" b="0" lang="ja-JP">
+                <a:solidFill>
+                  <a:srgbClr val="626669"/>
+                </a:solidFill>
+                <a:latin typeface="Noto Sans"/>
+                <a:ea typeface="Noto Sans CJK JP"/>
+                <a:cs typeface="Noto Sans"/>
+              </a:rPr>
+              <a:t/>
+            </a:r>
+            <a:r>
+              <a:rPr sz="800" lang="ja-JP">
+                <a:solidFill>
+                  <a:srgbClr val="626669"/>
+                </a:solidFill>
+                <a:latin typeface="Noto Sans"/>
+                <a:ea typeface="Noto Sans CJK JP"/>
+                <a:cs typeface="Noto Sans"/>
+                <a:hlinkClick r:id="rId3"/>
+              </a:rPr>
+              <a:t>https://arxiv.org/abs/1512.03385</a:t>
+            </a:r>
+          </a:p>
+        </p:txBody>
+      </p:sp>
+      <p:sp>
+        <p:nvSpPr>
+          <p:cNvPr id="7" name="TextBox 6"/>
+          <p:cNvSpPr txBox="1"/>
+          <p:nvPr/>
+        </p:nvSpPr>
+        <p:spPr>
+          <a:xfrm>
+            <a:off x="502920" y="4521200"/>
+            <a:ext cx="8183879" cy="177800"/>
+          </a:xfrm>
+          <a:prstGeom prst="rect">
+            <a:avLst/>
+          </a:prstGeom>
+          <a:noFill/>
+        </p:spPr>
+        <p:txBody>
+          <a:bodyPr wrap="square" lIns="0" rIns="0" tIns="0" bIns="0">
+            <a:spAutoFit/>
+          </a:bodyPr>
+          <a:lstStyle/>
+          <a:p>
+            <a:pPr algn="l">
+              <a:lnSpc>
+                <a:spcPts val="1400"/>
+              </a:lnSpc>
+              <a:spcBef>
+                <a:spcPts val="0"/>
+              </a:spcBef>
+              <a:spcAft>
+                <a:spcPts val="0"/>
+              </a:spcAft>
+            </a:pPr>
+            <a:r>
+              <a:rPr sz="800" b="0" lang="ja-JP">
+                <a:solidFill>
+                  <a:srgbClr val="626669"/>
+                </a:solidFill>
+                <a:latin typeface="Noto Sans"/>
+                <a:ea typeface="Noto Sans CJK JP"/>
+                <a:cs typeface="Noto Sans"/>
+              </a:rPr>
+              <a:t/>
+            </a:r>
+            <a:r>
+              <a:rPr sz="800" lang="ja-JP">
+                <a:solidFill>
+                  <a:srgbClr val="626669"/>
+                </a:solidFill>
+                <a:latin typeface="Noto Sans"/>
+                <a:ea typeface="Noto Sans CJK JP"/>
+                <a:cs typeface="Noto Sans"/>
+              </a:rPr>
+              <a:t>[2] Lin et al. (2017). CVPR. Feature Pyramid Networks for Object Detection.</a:t>
+            </a:r>
+          </a:p>
+        </p:txBody>
+      </p:sp>
+      <p:sp>
+        <p:nvSpPr>
+          <p:cNvPr id="8" name="TextBox 7"/>
+          <p:cNvSpPr txBox="1"/>
+          <p:nvPr/>
+        </p:nvSpPr>
+        <p:spPr>
+          <a:xfrm>
+            <a:off x="4074365" y="4539526"/>
+            <a:ext cx="4612434" cy="177800"/>
+          </a:xfrm>
+          <a:prstGeom prst="rect">
+            <a:avLst/>
+          </a:prstGeom>
+          <a:noFill/>
+        </p:spPr>
+        <p:txBody>
+          <a:bodyPr wrap="none" lIns="0" rIns="0" tIns="0" bIns="0">
+            <a:spAutoFit/>
+          </a:bodyPr>
+          <a:lstStyle/>
+          <a:p>
+            <a:pPr algn="l">
+              <a:lnSpc>
+                <a:spcPts val="1400"/>
+              </a:lnSpc>
+              <a:spcBef>
+                <a:spcPts val="0"/>
+              </a:spcBef>
+              <a:spcAft>
+                <a:spcPts val="0"/>
+              </a:spcAft>
+            </a:pPr>
+            <a:r>
+              <a:rPr sz="800" b="0" lang="ja-JP">
+                <a:solidFill>
+                  <a:srgbClr val="626669"/>
+                </a:solidFill>
+                <a:latin typeface="Noto Sans"/>
+                <a:ea typeface="Noto Sans CJK JP"/>
+                <a:cs typeface="Noto Sans"/>
+              </a:rPr>
+              <a:t/>
+            </a:r>
+            <a:r>
+              <a:rPr sz="800" lang="ja-JP">
+                <a:solidFill>
+                  <a:srgbClr val="626669"/>
+                </a:solidFill>
+                <a:latin typeface="Noto Sans"/>
+                <a:ea typeface="Noto Sans CJK JP"/>
+                <a:cs typeface="Noto Sans"/>
+                <a:hlinkClick r:id="rId4"/>
+              </a:rPr>
+              <a:t>https://arxiv.org/abs/1612.03144</a:t>
+            </a:r>
+          </a:p>
+        </p:txBody>
+      </p:sp>
+      <p:sp>
+        <p:nvSpPr>
+          <p:cNvPr id="9" name="TextBox 8"/>
+          <p:cNvSpPr txBox="1"/>
+          <p:nvPr/>
+        </p:nvSpPr>
+        <p:spPr>
+          <a:xfrm>
+            <a:off x="502920" y="4876800"/>
+            <a:ext cx="8183879" cy="177800"/>
+          </a:xfrm>
+          <a:prstGeom prst="rect">
+            <a:avLst/>
+          </a:prstGeom>
+          <a:noFill/>
+        </p:spPr>
+        <p:txBody>
+          <a:bodyPr wrap="square" lIns="0" rIns="0" tIns="0" bIns="0">
+            <a:spAutoFit/>
+          </a:bodyPr>
+          <a:lstStyle/>
+          <a:p>
+            <a:pPr algn="l">
+              <a:lnSpc>
+                <a:spcPts val="1400"/>
+              </a:lnSpc>
+              <a:spcBef>
+                <a:spcPts val="0"/>
+              </a:spcBef>
+              <a:spcAft>
+                <a:spcPts val="0"/>
+              </a:spcAft>
+            </a:pPr>
+            <a:r>
+              <a:rPr sz="800" b="0" lang="ja-JP">
+                <a:solidFill>
+                  <a:srgbClr val="626669"/>
+                </a:solidFill>
+                <a:latin typeface="Noto Sans"/>
+                <a:ea typeface="Noto Sans CJK JP"/>
+                <a:cs typeface="Noto Sans"/>
+              </a:rPr>
+              <a:t/>
+            </a:r>
+            <a:r>
+              <a:rPr sz="800" lang="ja-JP">
+                <a:solidFill>
+                  <a:srgbClr val="626669"/>
+                </a:solidFill>
+                <a:latin typeface="Noto Sans"/>
+                <a:ea typeface="Noto Sans CJK JP"/>
+                <a:cs typeface="Noto Sans"/>
+              </a:rPr>
+              <a:t>[3] </a:t>
+            </a:r>
+            <a:r>
+              <a:rPr sz="800" lang="ja-JP">
+                <a:solidFill>
+                  <a:srgbClr val="626669"/>
+                </a:solidFill>
+                <a:latin typeface="Noto Sans"/>
+                <a:ea typeface="Noto Sans CJK JP"/>
+                <a:cs typeface="Noto Sans"/>
+                <a:hlinkClick r:id="rId2"/>
+              </a:rPr>
+              <a:t>https://github.com/facebookresearch/detectron2/blob/main/MODEL_ZOO.md</a:t>
+            </a:r>
+          </a:p>
+        </p:txBody>
+      </p:sp>
+    </p:spTree>
+  </p:cSld>
+  <p:clrMapOvr>
+    <a:masterClrMapping/>
+  </p:clrMapOvr>
+</p:sld>
+</file>
+
 <file path=ppt/slides/slide45.xml><?xml version="1.0" encoding="utf-8"?>
 <p:sld xmlns:a="http://schemas.openxmlformats.org/drawingml/2006/main" xmlns:p="http://schemas.openxmlformats.org/presentationml/2006/main" xmlns:r="http://schemas.openxmlformats.org/officeDocument/2006/relationships">
   <p:cSld>
@@ -29422,375 +29321,6 @@
 </p:sld>
 </file>
 
-<file path=ppt/slides/slide47.xml><?xml version="1.0" encoding="utf-8"?>
-<p:sld xmlns:a="http://schemas.openxmlformats.org/drawingml/2006/main" xmlns:p="http://schemas.openxmlformats.org/presentationml/2006/main" xmlns:r="http://schemas.openxmlformats.org/officeDocument/2006/relationships">
-  <p:cSld>
-    <p:spTree>
-      <p:nvGrpSpPr>
-        <p:cNvPr id="1" name=""/>
-        <p:cNvGrpSpPr/>
-        <p:nvPr/>
-      </p:nvGrpSpPr>
-      <p:grpSpPr/>
-      <p:sp>
-        <p:nvSpPr>
-          <p:cNvPr id="2" name="Title 1"/>
-          <p:cNvSpPr>
-            <a:spLocks noGrp="1"/>
-          </p:cNvSpPr>
-          <p:nvPr>
-            <p:ph type="title"/>
-          </p:nvPr>
-        </p:nvSpPr>
-        <p:spPr>
-          <a:xfrm>
-            <a:off x="468172" y="650138"/>
-            <a:ext cx="8206740" cy="616305"/>
-          </a:xfrm>
-        </p:spPr>
-        <p:txBody>
-          <a:bodyPr wrap="none" anchor="t" lIns="0" rIns="0" tIns="0" bIns="0"/>
-          <a:lstStyle/>
-          <a:p>
-            <a:pPr algn="l">
-              <a:lnSpc>
-                <a:spcPct val="100000"/>
-              </a:lnSpc>
-              <a:spcBef>
-                <a:spcPts val="0"/>
-              </a:spcBef>
-              <a:spcAft>
-                <a:spcPts val="0"/>
-              </a:spcAft>
-              <a:buNone/>
-              <a:defRPr lang="ja-JP" sz="2800" b="1">
-                <a:solidFill>
-                  <a:srgbClr val="303437"/>
-                </a:solidFill>
-                <a:latin typeface="Noto Sans"/>
-                <a:ea typeface="Noto Sans CJK JP"/>
-                <a:cs typeface="Noto Sans"/>
-              </a:defRPr>
-            </a:pPr>
-            <a:r>
-              <a:rPr sz="2800" b="1" lang="ja-JP">
-                <a:solidFill>
-                  <a:srgbClr val="303437"/>
-                </a:solidFill>
-                <a:latin typeface="Noto Sans"/>
-                <a:ea typeface="Noto Sans CJK JP"/>
-                <a:cs typeface="Noto Sans"/>
-              </a:rPr>
-              <a:t>COCOの評価対象と汎化の範囲</a:t>
-            </a:r>
-          </a:p>
-        </p:txBody>
-      </p:sp>
-      <p:sp>
-        <p:nvSpPr>
-          <p:cNvPr id="3" name="Text Placeholder 2"/>
-          <p:cNvSpPr>
-            <a:spLocks noGrp="1"/>
-          </p:cNvSpPr>
-          <p:nvPr>
-            <p:ph type="body" idx="1"/>
-          </p:nvPr>
-        </p:nvSpPr>
-        <p:spPr>
-          <a:xfrm>
-            <a:off x="594360" y="1417320"/>
-            <a:ext cx="7955279" cy="3200400"/>
-          </a:xfrm>
-        </p:spPr>
-        <p:txBody>
-          <a:bodyPr wrap="square" anchor="t" tIns="91440" bIns="91440"/>
-          <a:lstStyle/>
-          <a:p>
-            <a:pPr algn="l" lvl="0" marL="457200" indent="-355600">
-              <a:lnSpc>
-                <a:spcPct val="115000"/>
-              </a:lnSpc>
-              <a:spcBef>
-                <a:spcPts val="0"/>
-              </a:spcBef>
-              <a:spcAft>
-                <a:spcPts val="1000"/>
-              </a:spcAft>
-              <a:buSzPct val="57826"/>
-              <a:buFont typeface="Noto Sans CJK JP"/>
-              <a:buChar char="●"/>
-              <a:defRPr lang="ja-JP" sz="2300" b="0">
-                <a:solidFill>
-                  <a:srgbClr val="303437"/>
-                </a:solidFill>
-                <a:latin typeface="Noto Sans"/>
-                <a:ea typeface="Noto Sans CJK JP"/>
-                <a:cs typeface="Noto Sans"/>
-              </a:defRPr>
-            </a:pPr>
-            <a:r>
-              <a:rPr sz="2300" b="0" lang="ja-JP">
-                <a:solidFill>
-                  <a:srgbClr val="303437"/>
-                </a:solidFill>
-                <a:latin typeface="Noto Sans"/>
-                <a:ea typeface="Noto Sans CJK JP"/>
-                <a:cs typeface="Noto Sans"/>
-              </a:rPr>
-              <a:t>COCOの物体検出は80カテゴリを対象とし、未知カテゴリや専門分野の物体認識を直接は測らない。</a:t>
-            </a:r>
-          </a:p>
-          <a:p>
-            <a:pPr algn="l" lvl="0" marL="457200" indent="-355600">
-              <a:lnSpc>
-                <a:spcPct val="115000"/>
-              </a:lnSpc>
-              <a:spcBef>
-                <a:spcPts val="0"/>
-              </a:spcBef>
-              <a:spcAft>
-                <a:spcPts val="1000"/>
-              </a:spcAft>
-              <a:buSzPct val="57826"/>
-              <a:buFont typeface="Noto Sans CJK JP"/>
-              <a:buChar char="●"/>
-              <a:defRPr lang="ja-JP" sz="2300" b="0">
-                <a:solidFill>
-                  <a:srgbClr val="303437"/>
-                </a:solidFill>
-                <a:latin typeface="Noto Sans"/>
-                <a:ea typeface="Noto Sans CJK JP"/>
-                <a:cs typeface="Noto Sans"/>
-              </a:defRPr>
-            </a:pPr>
-            <a:r>
-              <a:rPr sz="2300" b="0" lang="ja-JP">
-                <a:solidFill>
-                  <a:srgbClr val="303437"/>
-                </a:solidFill>
-                <a:latin typeface="Noto Sans"/>
-                <a:ea typeface="Noto Sans CJK JP"/>
-                <a:cs typeface="Noto Sans"/>
-              </a:rPr>
-              <a:t>小さな物体・混雑・遮蔽に加え、注釈の範囲や不確実性も得点の解釈に関わる。</a:t>
-            </a:r>
-          </a:p>
-          <a:p>
-            <a:pPr algn="l" lvl="0" marL="457200" indent="-355600">
-              <a:lnSpc>
-                <a:spcPct val="115000"/>
-              </a:lnSpc>
-              <a:spcBef>
-                <a:spcPts val="0"/>
-              </a:spcBef>
-              <a:spcAft>
-                <a:spcPts val="1000"/>
-              </a:spcAft>
-              <a:buSzPct val="57826"/>
-              <a:buFont typeface="Noto Sans CJK JP"/>
-              <a:buChar char="●"/>
-              <a:defRPr lang="ja-JP" sz="2300" b="0">
-                <a:solidFill>
-                  <a:srgbClr val="303437"/>
-                </a:solidFill>
-                <a:latin typeface="Noto Sans"/>
-                <a:ea typeface="Noto Sans CJK JP"/>
-                <a:cs typeface="Noto Sans"/>
-              </a:defRPr>
-            </a:pPr>
-            <a:r>
-              <a:rPr sz="2300" b="0" lang="ja-JP">
-                <a:solidFill>
-                  <a:srgbClr val="303437"/>
-                </a:solidFill>
-                <a:latin typeface="Noto Sans"/>
-                <a:ea typeface="Noto Sans CJK JP"/>
-                <a:cs typeface="Noto Sans"/>
-              </a:rPr>
-              <a:t>手法の比較では、発表年だけでなく学習画像・事前学習・入力サイズ・評価集合を確認する必要がある。</a:t>
-            </a:r>
-          </a:p>
-        </p:txBody>
-      </p:sp>
-      <p:sp>
-        <p:nvSpPr>
-          <p:cNvPr id="4" name="Title 3"/>
-          <p:cNvSpPr>
-            <a:spLocks noGrp="1"/>
-          </p:cNvSpPr>
-          <p:nvPr>
-            <p:ph type="title" idx="2"/>
-          </p:nvPr>
-        </p:nvSpPr>
-        <p:spPr>
-          <a:xfrm>
-            <a:off x="75895" y="0"/>
-            <a:ext cx="8115300" cy="480060"/>
-          </a:xfrm>
-        </p:spPr>
-        <p:txBody>
-          <a:bodyPr wrap="square" anchor="ctr" lIns="0" rIns="0" tIns="0" bIns="0"/>
-          <a:lstStyle/>
-          <a:p>
-            <a:pPr algn="l">
-              <a:lnSpc>
-                <a:spcPct val="100000"/>
-              </a:lnSpc>
-              <a:spcBef>
-                <a:spcPts val="0"/>
-              </a:spcBef>
-              <a:spcAft>
-                <a:spcPts val="0"/>
-              </a:spcAft>
-              <a:buNone/>
-              <a:defRPr lang="ja-JP" sz="1400" b="1">
-                <a:solidFill>
-                  <a:srgbClr val="FFFEF8"/>
-                </a:solidFill>
-                <a:latin typeface="Noto Sans"/>
-                <a:ea typeface="Noto Sans CJK JP"/>
-                <a:cs typeface="Noto Sans"/>
-              </a:defRPr>
-            </a:pPr>
-            <a:r>
-              <a:rPr lang="ja-JP" sz="1400" b="1">
-                <a:solidFill>
-                  <a:srgbClr val="FFFEF8"/>
-                </a:solidFill>
-                <a:latin typeface="Noto Sans"/>
-                <a:ea typeface="Noto Sans CJK JP"/>
-                <a:cs typeface="Noto Sans"/>
-              </a:rPr>
-              <a:t>3. 物体検出・領域分割の評価とモデル性能</a:t>
-            </a:r>
-          </a:p>
-        </p:txBody>
-      </p:sp>
-      <p:sp>
-        <p:nvSpPr>
-          <p:cNvPr id="5" name="TextBox 4"/>
-          <p:cNvSpPr txBox="1"/>
-          <p:nvPr/>
-        </p:nvSpPr>
-        <p:spPr>
-          <a:xfrm>
-            <a:off x="502920" y="4521200"/>
-            <a:ext cx="8183879" cy="355600"/>
-          </a:xfrm>
-          <a:prstGeom prst="rect">
-            <a:avLst/>
-          </a:prstGeom>
-          <a:noFill/>
-        </p:spPr>
-        <p:txBody>
-          <a:bodyPr wrap="square" lIns="0" rIns="0" tIns="0" bIns="0">
-            <a:spAutoFit/>
-          </a:bodyPr>
-          <a:lstStyle/>
-          <a:p>
-            <a:pPr algn="l">
-              <a:lnSpc>
-                <a:spcPts val="1400"/>
-              </a:lnSpc>
-              <a:spcBef>
-                <a:spcPts val="0"/>
-              </a:spcBef>
-              <a:spcAft>
-                <a:spcPts val="0"/>
-              </a:spcAft>
-            </a:pPr>
-            <a:r>
-              <a:rPr sz="800" b="0" lang="ja-JP">
-                <a:solidFill>
-                  <a:srgbClr val="626669"/>
-                </a:solidFill>
-                <a:latin typeface="Noto Sans"/>
-                <a:ea typeface="Noto Sans CJK JP"/>
-                <a:cs typeface="Noto Sans"/>
-              </a:rPr>
-              <a:t/>
-            </a:r>
-            <a:r>
-              <a:rPr sz="800" lang="ja-JP">
-                <a:solidFill>
-                  <a:srgbClr val="626669"/>
-                </a:solidFill>
-                <a:latin typeface="Noto Sans"/>
-                <a:ea typeface="Noto Sans CJK JP"/>
-                <a:cs typeface="Noto Sans"/>
-              </a:rPr>
-              <a:t>[1] Agrim Gupta et al. (2019). IEEE/CVF Conference on Computer Vision and Pattern Recognition (CVPR), pp. 5356–5364. LVIS: A Dataset for Large Vocabulary Instance Segmentation.</a:t>
-            </a:r>
-          </a:p>
-        </p:txBody>
-      </p:sp>
-      <p:sp>
-        <p:nvSpPr>
-          <p:cNvPr id="6" name="TextBox 5"/>
-          <p:cNvSpPr txBox="1"/>
-          <p:nvPr/>
-        </p:nvSpPr>
-        <p:spPr>
-          <a:xfrm>
-            <a:off x="1254031" y="4717326"/>
-            <a:ext cx="7432768" cy="177800"/>
-          </a:xfrm>
-          <a:prstGeom prst="rect">
-            <a:avLst/>
-          </a:prstGeom>
-          <a:noFill/>
-        </p:spPr>
-        <p:txBody>
-          <a:bodyPr wrap="none" lIns="0" rIns="0" tIns="0" bIns="0">
-            <a:spAutoFit/>
-          </a:bodyPr>
-          <a:lstStyle/>
-          <a:p>
-            <a:pPr algn="l">
-              <a:lnSpc>
-                <a:spcPts val="1400"/>
-              </a:lnSpc>
-              <a:spcBef>
-                <a:spcPts val="0"/>
-              </a:spcBef>
-              <a:spcAft>
-                <a:spcPts val="0"/>
-              </a:spcAft>
-            </a:pPr>
-            <a:r>
-              <a:rPr sz="800" b="0" lang="ja-JP">
-                <a:solidFill>
-                  <a:srgbClr val="626669"/>
-                </a:solidFill>
-                <a:latin typeface="Noto Sans"/>
-                <a:ea typeface="Noto Sans CJK JP"/>
-                <a:cs typeface="Noto Sans"/>
-              </a:rPr>
-              <a:t/>
-            </a:r>
-            <a:r>
-              <a:rPr sz="800" lang="ja-JP">
-                <a:solidFill>
-                  <a:srgbClr val="626669"/>
-                </a:solidFill>
-                <a:latin typeface="Noto Sans"/>
-                <a:ea typeface="Noto Sans CJK JP"/>
-                <a:cs typeface="Noto Sans"/>
-                <a:hlinkClick r:id="rId2"/>
-              </a:rPr>
-              <a:t>https://arxiv.org/abs/1908.03195</a:t>
-            </a:r>
-          </a:p>
-        </p:txBody>
-      </p:sp>
-    </p:spTree>
-  </p:cSld>
-  <p:clrMapOvr>
-    <a:masterClrMapping/>
-  </p:clrMapOvr>
-</p:sld>
-</file>
-
 <file path=ppt/slides/slide48.xml><?xml version="1.0" encoding="utf-8"?>
 <p:sld xmlns:a="http://schemas.openxmlformats.org/drawingml/2006/main" xmlns:p="http://schemas.openxmlformats.org/presentationml/2006/main" xmlns:r="http://schemas.openxmlformats.org/officeDocument/2006/relationships">
   <p:cSld>
@@ -30750,41 +30280,6 @@
                 <a:cs typeface="Noto Sans"/>
               </a:rPr>
               <a:t>出現頻度の低いカテゴリを多く含み、頻出・少数カテゴリ別の認識性能を評価する。</a:t>
-            </a:r>
-          </a:p>
-          <a:p>
-            <a:pPr algn="l" lvl="0" marL="457200" indent="-355600">
-              <a:lnSpc>
-                <a:spcPct val="115000"/>
-              </a:lnSpc>
-              <a:spcBef>
-                <a:spcPts val="0"/>
-              </a:spcBef>
-              <a:spcAft>
-                <a:spcPts val="1000"/>
-              </a:spcAft>
-              <a:buSzPct val="60455"/>
-              <a:buFont typeface="Noto Sans CJK JP"/>
-              <a:buChar char="●"/>
-              <a:defRPr lang="ja-JP" sz="2200" b="0">
-                <a:solidFill>
-                  <a:srgbClr val="303437"/>
-                </a:solidFill>
-                <a:latin typeface="Noto Sans"/>
-                <a:ea typeface="Noto Sans CJK JP"/>
-                <a:cs typeface="Noto Sans"/>
-              </a:defRPr>
-            </a:pPr>
-            <a:r>
-              <a:rPr sz="2200" b="0" lang="ja-JP">
-                <a:solidFill>
-                  <a:srgbClr val="303437"/>
-                </a:solidFill>
-                <a:latin typeface="Noto Sans"/>
-                <a:ea typeface="Noto Sans CJK JP"/>
-                <a:cs typeface="Noto Sans"/>
-              </a:rPr>
-              <a:t>COCOと画像を共有しても、カテゴリ・注釈・評価方法が異なり、得点を直接比較できない。</a:t>
             </a:r>
           </a:p>
         </p:txBody>
@@ -31825,7 +31320,7 @@
                 <a:ea typeface="Noto Sans CJK JP"/>
                 <a:cs typeface="Noto Sans"/>
               </a:rPr>
-              <a:t>公式ページの圧縮配布サイズ。展開後の容量ではない。画像の利用条件はFlickr側のライセンスも確認する [1]。</a:t>
+              <a:t>画像の利用条件はFlickr側のライセンスも確認する [1]。</a:t>
             </a:r>
           </a:p>
         </p:txBody>
@@ -32592,7 +32087,7 @@
                 <a:ea typeface="Noto Sans CJK JP"/>
                 <a:cs typeface="Noto Sans"/>
               </a:rPr>
-              <a:t>annToMaskは多角形やRLEを画像と同じ縦横の二値マスクへ変換する。表示用の縮小画像の寸法と混同しない。</a:t>
+              <a:t>annToMaskは多角形やRLEを画像と同じ縦横の二値マスクへ変換する。</a:t>
             </a:r>
           </a:p>
         </p:txBody>
@@ -32911,7 +32406,7 @@
                 <a:ea typeface="Noto Sans CJK JP"/>
                 <a:cs typeface="Noto Sans"/>
               </a:rPr>
-              <a:t>検出・個体分割のAPとPanopticのPQは異なる指標である。範囲・版・評価集合をそろえて結果を読む。</a:t>
+              <a:t>検出・個体分割はAP、Panoptic分割はPQで評価する。</a:t>
             </a:r>
           </a:p>
         </p:txBody>
@@ -34897,39 +34392,7 @@
             <a:spAutoFit/>
           </a:bodyPr>
           <a:lstStyle/>
-          <a:p>
-            <a:pPr algn="l">
-              <a:lnSpc>
-                <a:spcPct val="115000"/>
-              </a:lnSpc>
-              <a:spcBef>
-                <a:spcPts val="0"/>
-              </a:spcBef>
-              <a:spcAft>
-                <a:spcPts val="0"/>
-              </a:spcAft>
-              <a:buNone/>
-              <a:defRPr lang="ja-JP" sz="1900" b="0">
-                <a:solidFill>
-                  <a:srgbClr val="303437"/>
-                </a:solidFill>
-                <a:latin typeface="Noto Sans"/>
-                <a:ea typeface="Noto Sans CJK JP"/>
-                <a:cs typeface="Noto Sans"/>
-              </a:defRPr>
-            </a:pPr>
-            <a:r>
-              <a:rPr lang="ja-JP" sz="1900" b="0">
-                <a:solidFill>
-                  <a:srgbClr val="303437"/>
-                </a:solidFill>
-                <a:latin typeface="Noto Sans"/>
-                <a:ea typeface="Noto Sans CJK JP"/>
-                <a:cs typeface="Noto Sans"/>
-              </a:rPr>
-              <a:t>意味的領域分割では、同じカテゴリに属する複数の人を個体として区別する必要がない。</a:t>
-            </a:r>
-          </a:p>
+          <a:p/>
         </p:txBody>
       </p:sp>
       <p:sp>
@@ -36667,7 +36130,7 @@
                 <a:ea typeface="Noto Sans CJK JP"/>
                 <a:cs typeface="Noto Sans"/>
               </a:rPr>
-              <a:t>全体の配布画像は約330K枚だが、以下の集計はCOCO128-segの128画像に限定する。</a:t>
+              <a:t>分析対象はCOCO128-segの128画像である [1]。</a:t>
             </a:r>
           </a:p>
           <a:p>
@@ -36693,31 +36156,6 @@
                 <a:cs typeface="Noto Sans"/>
               </a:rPr>
               <a:t>公開変換された領域注釈を画像ごとに数え、注釈ファイルがない2画像は0領域として含める。</a:t>
-            </a:r>
-          </a:p>
-          <a:p>
-            <a:pPr algn="ctr" marL="0" indent="0">
-              <a:lnSpc>
-                <a:spcPct val="100000"/>
-              </a:lnSpc>
-              <a:spcBef>
-                <a:spcPts val="0"/>
-              </a:spcBef>
-              <a:spcAft>
-                <a:spcPts val="1200"/>
-              </a:spcAft>
-              <a:buNone/>
-            </a:pPr>
-            <a:r>
-              <a:rPr sz="2000" b="0" lang="ja-JP">
-                <a:solidFill>
-                  <a:srgbClr val="303437"/>
-                </a:solidFill>
-                <a:latin typeface="Noto Sans"/>
-                <a:ea typeface="Noto Sans CJK JP"/>
-                <a:cs typeface="Noto Sans"/>
-              </a:rPr>
-              <a:t>これは例示用の小さな部分集合。カテゴリ頻度や領域数の分布をCOCO全体へ一般化しない [1]。</a:t>
             </a:r>
           </a:p>
         </p:txBody>
@@ -43255,7 +42693,7 @@
                 <a:ea typeface="Noto Sans CJK JP"/>
                 <a:cs typeface="Noto Sans"/>
               </a:rPr>
-              <a:t>公式APIはBSD形式の利用条件を持つ。画像・注釈・コードで利用条件が異なる [1]。</a:t>
+              <a:t>公式APIはBSD形式の利用条件を持つ [1]。</a:t>
             </a:r>
           </a:p>
         </p:txBody>

--- a/slides/datasets-in-10-minutes-coco.pptx
+++ b/slides/datasets-in-10-minutes-coco.pptx
@@ -10043,7 +10043,7 @@
                 <a:ea typeface="Noto Sans CJK JP"/>
                 <a:cs typeface="Noto Sans"/>
               </a:rPr>
-              <a:t>画像分類大会ILSVRC 2012では、1,000クラスの画像分類が広く使われた。</a:t>
+              <a:t>画像分類大会ILSVRC 2012では、1,000クラスの画像分類タスクが広く使われた。</a:t>
             </a:r>
           </a:p>
           <a:p>
@@ -10975,7 +10975,7 @@
                 <a:ea typeface="Noto Sans CJK JP"/>
                 <a:cs typeface="Noto Sans"/>
               </a:rPr>
-              <a:t>先行データとCOCOでは正解の単位が異なる</a:t>
+              <a:t>先行データとCOCOの正解単位とカテゴリ数</a:t>
             </a:r>
           </a:p>
         </p:txBody>
@@ -11325,7 +11325,7 @@
                           <a:ea typeface="Noto Sans CJK JP"/>
                           <a:cs typeface="Noto Sans"/>
                         </a:rPr>
-                        <a:t>カテゴリ</a:t>
+                        <a:t>カテゴリ数</a:t>
                       </a:r>
                     </a:p>
                   </a:txBody>
@@ -12437,7 +12437,7 @@
                 <a:ea typeface="Noto Sans CJK JP"/>
                 <a:cs typeface="Noto Sans"/>
               </a:rPr>
-              <a:t>カテゴリの存在確認、個体の特定、輪郭の作成を分け、各段階で注釈品質を確認した。</a:t>
+              <a:t>カテゴリの存在確認、個体の特定、輪郭の作成に段階を分け、各段階で注釈品質を確認した。</a:t>
             </a:r>
           </a:p>
           <a:p>
@@ -12472,7 +12472,7 @@
                 <a:ea typeface="Noto Sans CJK JP"/>
                 <a:cs typeface="Noto Sans"/>
               </a:rPr>
-              <a:t>現在の物体注釈は、カテゴリ・矩形・領域マスクなどを同じレコードにまとめる。</a:t>
+              <a:t>COCOの物体注釈は、カテゴリ・矩形・領域マスクなどを同じレコードにまとめる。</a:t>
             </a:r>
           </a:p>
         </p:txBody>
@@ -12876,7 +12876,7 @@
                 <a:ea typeface="Noto Sans CJK JP"/>
                 <a:cs typeface="Noto Sans"/>
               </a:rPr>
-              <a:t>個体の特定では、何人・何本の傘があり、どの位置にあるかを分ける。</a:t>
+              <a:t>個体の特定では、人や傘の数と、それぞれの位置を区別する。</a:t>
             </a:r>
           </a:p>
           <a:p>
@@ -19923,7 +19923,7 @@
                 <a:ea typeface="Noto Sans CJK JP"/>
                 <a:cs typeface="Noto Sans"/>
               </a:rPr>
-              <a:t>COCO 2017の画像分割</a:t>
+              <a:t>COCO 2017のデータ分割</a:t>
             </a:r>
           </a:p>
         </p:txBody>
@@ -20038,7 +20038,7 @@
                           <a:ea typeface="Noto Sans CJK JP"/>
                           <a:cs typeface="Noto Sans"/>
                         </a:rPr>
-                        <a:t>分割</a:t>
+                        <a:t>データ分割</a:t>
                       </a:r>
                     </a:p>
                   </a:txBody>
@@ -21584,7 +21584,7 @@
                 <a:ea typeface="Noto Sans CJK JP"/>
                 <a:cs typeface="Noto Sans"/>
               </a:rPr>
-              <a:t>実画像の傘で面積の大きさを比べる</a:t>
+              <a:t>実画像の傘で面積を比べる</a:t>
             </a:r>
           </a:p>
         </p:txBody>
@@ -23596,7 +23596,7 @@
         </p:nvSpPr>
         <p:spPr>
           <a:xfrm>
-            <a:off x="2880360" y="3291840"/>
+            <a:off x="2880360" y="3456940"/>
             <a:ext cx="1005840" cy="365760"/>
           </a:xfrm>
           <a:prstGeom prst="rect">
@@ -23784,7 +23784,7 @@
                 <a:ea typeface="Noto Sans CJK JP"/>
                 <a:cs typeface="Noto Sans"/>
               </a:rPr>
-              <a:t>IoU 0.50で一致とはならない。</a:t>
+              <a:t>IoU 0.50では一致と判定されない。</a:t>
             </a:r>
           </a:p>
           <a:p>
@@ -24023,7 +24023,7 @@
                 <a:ea typeface="Noto Sans CJK JP"/>
                 <a:cs typeface="Noto Sans"/>
               </a:rPr>
-              <a:t>正しいカテゴリで正解領域へ一致した予測を真陽性TPとする。</a:t>
+              <a:t>正しいカテゴリで正解領域と一致した予測を真陽性TPとする。</a:t>
             </a:r>
           </a:p>
           <a:p>
@@ -24058,7 +24058,7 @@
                 <a:ea typeface="Noto Sans CJK JP"/>
                 <a:cs typeface="Noto Sans"/>
               </a:rPr>
-              <a:t>正解へ一致しない予測や、同じ物体への重複した予測を偽陽性FPとする。</a:t>
+              <a:t>正解と一致しない予測や、同じ物体への重複した予測を偽陽性FPとする。</a:t>
             </a:r>
           </a:p>
           <a:p>
@@ -25982,7 +25982,7 @@
                 <a:ea typeface="Noto Sans CJK JP"/>
                 <a:cs typeface="Noto Sans"/>
               </a:rPr>
-              <a:t>数えにくい集団にはcrowd注釈がある</a:t>
+              <a:t>crowd注釈と検出誤差の扱い</a:t>
             </a:r>
           </a:p>
         </p:txBody>
@@ -35813,7 +35813,7 @@
                 <a:ea typeface="Noto Sans CJK JP"/>
                 <a:cs typeface="Noto Sans"/>
               </a:rPr>
-              <a:t>各カテゴリ・各IoU閾値で、信頼度順の予測から適合率・再現率を作る。</a:t>
+              <a:t>各カテゴリ・各IoU閾値で、信頼度順の予測から適合率・再現率を算出する。</a:t>
             </a:r>
           </a:p>
           <a:p>
@@ -36155,7 +36155,7 @@
                 <a:ea typeface="Noto Sans CJK JP"/>
                 <a:cs typeface="Noto Sans"/>
               </a:rPr>
-              <a:t>公開変換された領域注釈を画像ごとに数え、注釈ファイルがない2画像は0領域として含める。</a:t>
+              <a:t>変換して公開された領域注釈を画像ごとに数え、注釈ファイルがない2画像は領域数0として含める。</a:t>
             </a:r>
           </a:p>
         </p:txBody>

--- a/slides/datasets-in-10-minutes-coco.pptx
+++ b/slides/datasets-in-10-minutes-coco.pptx
@@ -36039,7 +36039,7 @@
         </p:nvSpPr>
         <p:spPr>
           <a:xfrm>
-            <a:off x="468172" y="1306154"/>
+            <a:off x="468172" y="650240"/>
             <a:ext cx="8206740" cy="594360"/>
           </a:xfrm>
         </p:spPr>
@@ -36047,7 +36047,7 @@
           <a:bodyPr wrap="square" anchor="t" lIns="0" rIns="0" tIns="0" bIns="0"/>
           <a:lstStyle/>
           <a:p>
-            <a:pPr algn="ctr">
+            <a:pPr algn="l">
               <a:lnSpc>
                 <a:spcPct val="100000"/>
               </a:lnSpc>
@@ -36093,15 +36093,15 @@
         </p:nvSpPr>
         <p:spPr>
           <a:xfrm>
-            <a:off x="594360" y="2220554"/>
-            <a:ext cx="7955279" cy="1737360"/>
+            <a:off x="594360" y="1508760"/>
+            <a:ext cx="7955279" cy="2794000"/>
           </a:xfrm>
         </p:spPr>
         <p:txBody>
           <a:bodyPr wrap="square" anchor="t" tIns="0" bIns="0" lIns="0" rIns="0"/>
           <a:lstStyle/>
           <a:p>
-            <a:pPr algn="ctr" lvl="0" marL="0" indent="0">
+            <a:pPr algn="l" lvl="0" marL="0" indent="0">
               <a:lnSpc>
                 <a:spcPct val="100000"/>
               </a:lnSpc>
@@ -36130,11 +36130,11 @@
                 <a:ea typeface="Noto Sans CJK JP"/>
                 <a:cs typeface="Noto Sans"/>
               </a:rPr>
-              <a:t>分析対象はCOCO128-segの128画像である [1]。</a:t>
-            </a:r>
-          </a:p>
-          <a:p>
-            <a:pPr algn="ctr" marL="0" indent="0">
+              <a:t>分析には、COCO128-segの128枚の画像を使う [1]。</a:t>
+            </a:r>
+          </a:p>
+          <a:p>
+            <a:pPr algn="l" marL="0" indent="0">
               <a:lnSpc>
                 <a:spcPct val="100000"/>
               </a:lnSpc>
@@ -36155,7 +36155,7 @@
                 <a:ea typeface="Noto Sans CJK JP"/>
                 <a:cs typeface="Noto Sans"/>
               </a:rPr>
-              <a:t>変換して公開された領域注釈を画像ごとに数え、注釈ファイルがない2画像は領域数0として含める。</a:t>
+              <a:t>変換・公開された領域注釈を画像ごとに数え、注釈ファイルがない2枚は領域数を0として集計に含める。</a:t>
             </a:r>
           </a:p>
         </p:txBody>

--- a/slides/datasets-in-10-minutes-coco.pptx
+++ b/slides/datasets-in-10-minutes-coco.pptx
@@ -29321,6 +29321,132 @@
 </p:sld>
 </file>
 
+<file path=ppt/slides/slide47.xml><?xml version="1.0" encoding="utf-8"?>
+<p:sld xmlns:a="http://schemas.openxmlformats.org/drawingml/2006/main" xmlns:p="http://schemas.openxmlformats.org/presentationml/2006/main" xmlns:r="http://schemas.openxmlformats.org/officeDocument/2006/relationships">
+  <p:cSld>
+    <p:spTree>
+      <p:nvGrpSpPr>
+        <p:cNvPr id="1" name=""/>
+        <p:cNvGrpSpPr/>
+        <p:nvPr/>
+      </p:nvGrpSpPr>
+      <p:grpSpPr/>
+      <p:sp>
+        <p:nvSpPr>
+          <p:cNvPr id="2" name="Title 1"/>
+          <p:cNvSpPr>
+            <a:spLocks noGrp="1"/>
+          </p:cNvSpPr>
+          <p:nvPr>
+            <p:ph type="title"/>
+          </p:nvPr>
+        </p:nvSpPr>
+        <p:spPr>
+          <a:xfrm>
+            <a:off x="548640" y="2458846"/>
+            <a:ext cx="8046720" cy="731520"/>
+          </a:xfrm>
+        </p:spPr>
+        <p:txBody>
+          <a:bodyPr wrap="square" anchor="ctr" lIns="0" rIns="0" tIns="0" bIns="0"/>
+          <a:lstStyle/>
+          <a:p>
+            <a:pPr algn="ctr">
+              <a:lnSpc>
+                <a:spcPct val="100000"/>
+              </a:lnSpc>
+              <a:spcBef>
+                <a:spcPts val="0"/>
+              </a:spcBef>
+              <a:spcAft>
+                <a:spcPts val="0"/>
+              </a:spcAft>
+              <a:buNone/>
+              <a:defRPr lang="ja-JP" sz="3400" b="1">
+                <a:solidFill>
+                  <a:srgbClr val="303437"/>
+                </a:solidFill>
+                <a:latin typeface="Noto Sans"/>
+                <a:ea typeface="Noto Sans CJK JP"/>
+                <a:cs typeface="Noto Sans"/>
+              </a:defRPr>
+            </a:pPr>
+            <a:r>
+              <a:rPr sz="3000" b="1" lang="ja-JP">
+                <a:solidFill>
+                  <a:srgbClr val="303437"/>
+                </a:solidFill>
+                <a:latin typeface="Noto Sans"/>
+                <a:ea typeface="Noto Sans CJK JP"/>
+                <a:cs typeface="Noto Sans"/>
+              </a:rPr>
+              <a:t>4. COCOの利用動向と画像・注釈の入手方法</a:t>
+            </a:r>
+          </a:p>
+        </p:txBody>
+      </p:sp>
+      <p:sp>
+        <p:nvSpPr>
+          <p:cNvPr id="3" name="Title 2"/>
+          <p:cNvSpPr>
+            <a:spLocks noGrp="1"/>
+          </p:cNvSpPr>
+          <p:nvPr>
+            <p:ph type="title" idx="2"/>
+          </p:nvPr>
+        </p:nvSpPr>
+        <p:spPr>
+          <a:xfrm>
+            <a:off x="75895" y="0"/>
+            <a:ext cx="8115300" cy="480060"/>
+          </a:xfrm>
+        </p:spPr>
+        <p:txBody>
+          <a:bodyPr wrap="square" anchor="ctr" lIns="0" rIns="0" tIns="0" bIns="0"/>
+          <a:lstStyle/>
+          <a:p>
+            <a:pPr algn="l">
+              <a:lnSpc>
+                <a:spcPct val="100000"/>
+              </a:lnSpc>
+              <a:spcBef>
+                <a:spcPts val="0"/>
+              </a:spcBef>
+              <a:spcAft>
+                <a:spcPts val="0"/>
+              </a:spcAft>
+              <a:buNone/>
+              <a:defRPr lang="ja-JP" sz="1400" b="1">
+                <a:solidFill>
+                  <a:srgbClr val="FFFEF8"/>
+                </a:solidFill>
+                <a:latin typeface="Noto Sans"/>
+                <a:ea typeface="Noto Sans CJK JP"/>
+                <a:cs typeface="Noto Sans"/>
+              </a:defRPr>
+            </a:pPr>
+            <a:r>
+              <a:rPr lang="ja-JP" sz="1400" b="1">
+                <a:solidFill>
+                  <a:srgbClr val="FFFEF8"/>
+                </a:solidFill>
+                <a:latin typeface="Noto Sans"/>
+                <a:ea typeface="Noto Sans CJK JP"/>
+                <a:cs typeface="Noto Sans"/>
+              </a:rPr>
+              <a:t>4. COCOの利用動向と画像・注釈の入手方法</a:t>
+            </a:r>
+          </a:p>
+        </p:txBody>
+      </p:sp>
+    </p:spTree>
+  </p:cSld>
+  <p:clrMapOvr>
+    <a:masterClrMapping/>
+  </p:clrMapOvr>
+</p:sld>
+</file>
+
 <file path=ppt/slides/slide48.xml><?xml version="1.0" encoding="utf-8"?>
 <p:sld xmlns:a="http://schemas.openxmlformats.org/drawingml/2006/main" xmlns:p="http://schemas.openxmlformats.org/presentationml/2006/main" xmlns:r="http://schemas.openxmlformats.org/officeDocument/2006/relationships">
   <p:cSld>
@@ -29343,15 +29469,15 @@
         </p:nvSpPr>
         <p:spPr>
           <a:xfrm>
-            <a:off x="548640" y="2458846"/>
-            <a:ext cx="8046720" cy="731520"/>
-          </a:xfrm>
-        </p:spPr>
-        <p:txBody>
-          <a:bodyPr wrap="square" anchor="ctr" lIns="0" rIns="0" tIns="0" bIns="0"/>
-          <a:lstStyle/>
-          <a:p>
-            <a:pPr algn="ctr">
+            <a:off x="468172" y="650138"/>
+            <a:ext cx="8206740" cy="616305"/>
+          </a:xfrm>
+        </p:spPr>
+        <p:txBody>
+          <a:bodyPr wrap="none" anchor="t" lIns="0" rIns="0" tIns="0" bIns="0"/>
+          <a:lstStyle/>
+          <a:p>
+            <a:pPr algn="l">
               <a:lnSpc>
                 <a:spcPct val="100000"/>
               </a:lnSpc>
@@ -29362,32 +29488,158 @@
                 <a:spcPts val="0"/>
               </a:spcAft>
               <a:buNone/>
-              <a:defRPr lang="ja-JP" sz="3400" b="1">
-                <a:solidFill>
-                  <a:srgbClr val="303437"/>
-                </a:solidFill>
-                <a:latin typeface="Noto Sans"/>
-                <a:ea typeface="Noto Sans CJK JP"/>
-                <a:cs typeface="Noto Sans"/>
-              </a:defRPr>
-            </a:pPr>
-            <a:r>
-              <a:rPr sz="3000" b="1" lang="ja-JP">
-                <a:solidFill>
-                  <a:srgbClr val="303437"/>
-                </a:solidFill>
-                <a:latin typeface="Noto Sans"/>
-                <a:ea typeface="Noto Sans CJK JP"/>
-                <a:cs typeface="Noto Sans"/>
-              </a:rPr>
-              <a:t>4. COCOの利用動向と画像・注釈の入手方法</a:t>
-            </a:r>
-          </a:p>
-        </p:txBody>
-      </p:sp>
-      <p:sp>
-        <p:nvSpPr>
-          <p:cNvPr id="3" name="Title 2"/>
+              <a:defRPr lang="ja-JP" sz="2800" b="1">
+                <a:solidFill>
+                  <a:srgbClr val="303437"/>
+                </a:solidFill>
+                <a:latin typeface="Noto Sans"/>
+                <a:ea typeface="Noto Sans CJK JP"/>
+                <a:cs typeface="Noto Sans"/>
+              </a:defRPr>
+            </a:pPr>
+            <a:r>
+              <a:rPr sz="2800" b="1" lang="ja-JP">
+                <a:solidFill>
+                  <a:srgbClr val="303437"/>
+                </a:solidFill>
+                <a:latin typeface="Noto Sans"/>
+                <a:ea typeface="Noto Sans CJK JP"/>
+                <a:cs typeface="Noto Sans"/>
+              </a:rPr>
+              <a:t>COCOの公開・分割更新と検出モデルへの利用</a:t>
+            </a:r>
+          </a:p>
+        </p:txBody>
+      </p:sp>
+      <p:sp>
+        <p:nvSpPr>
+          <p:cNvPr id="3" name="Text Placeholder 2"/>
+          <p:cNvSpPr>
+            <a:spLocks noGrp="1"/>
+          </p:cNvSpPr>
+          <p:nvPr>
+            <p:ph type="body" idx="1"/>
+          </p:nvPr>
+        </p:nvSpPr>
+        <p:spPr>
+          <a:xfrm>
+            <a:off x="594360" y="1508760"/>
+            <a:ext cx="7955279" cy="3017520"/>
+          </a:xfrm>
+        </p:spPr>
+        <p:txBody>
+          <a:bodyPr wrap="square" anchor="t" tIns="91440" bIns="91440"/>
+          <a:lstStyle/>
+          <a:p>
+            <a:pPr algn="l" lvl="0" marL="457200" indent="-355600">
+              <a:lnSpc>
+                <a:spcPct val="115000"/>
+              </a:lnSpc>
+              <a:spcBef>
+                <a:spcPts val="0"/>
+              </a:spcBef>
+              <a:spcAft>
+                <a:spcPts val="800"/>
+              </a:spcAft>
+              <a:buSzPct val="55417"/>
+              <a:buFont typeface="Noto Sans CJK JP"/>
+              <a:buChar char="●"/>
+              <a:defRPr lang="ja-JP" sz="2400" b="0">
+                <a:solidFill>
+                  <a:srgbClr val="303437"/>
+                </a:solidFill>
+                <a:latin typeface="Noto Sans"/>
+                <a:ea typeface="Noto Sans CJK JP"/>
+                <a:cs typeface="Noto Sans"/>
+              </a:defRPr>
+            </a:pPr>
+            <a:r>
+              <a:rPr lang="ja-JP" sz="2400" b="0">
+                <a:solidFill>
+                  <a:srgbClr val="303437"/>
+                </a:solidFill>
+                <a:latin typeface="Noto Sans"/>
+                <a:ea typeface="Noto Sans CJK JP"/>
+                <a:cs typeface="Noto Sans"/>
+              </a:rPr>
+              <a:t>2014年に物体の文脈と領域を重視したデータとして登場し、2017年に学習・検証分割を再編した。</a:t>
+            </a:r>
+          </a:p>
+          <a:p>
+            <a:pPr algn="l" lvl="0" marL="457200" indent="-355600">
+              <a:lnSpc>
+                <a:spcPct val="115000"/>
+              </a:lnSpc>
+              <a:spcBef>
+                <a:spcPts val="0"/>
+              </a:spcBef>
+              <a:spcAft>
+                <a:spcPts val="800"/>
+              </a:spcAft>
+              <a:buSzPct val="55417"/>
+              <a:buFont typeface="Noto Sans CJK JP"/>
+              <a:buChar char="●"/>
+              <a:defRPr lang="ja-JP" sz="2400" b="0">
+                <a:solidFill>
+                  <a:srgbClr val="303437"/>
+                </a:solidFill>
+                <a:latin typeface="Noto Sans"/>
+                <a:ea typeface="Noto Sans CJK JP"/>
+                <a:cs typeface="Noto Sans"/>
+              </a:defRPr>
+            </a:pPr>
+            <a:r>
+              <a:rPr lang="ja-JP" sz="2400" b="0">
+                <a:solidFill>
+                  <a:srgbClr val="303437"/>
+                </a:solidFill>
+                <a:latin typeface="Noto Sans"/>
+                <a:ea typeface="Noto Sans CJK JP"/>
+                <a:cs typeface="Noto Sans"/>
+              </a:rPr>
+              <a:t>2018年にはPanoptic分割を追加した [1]。</a:t>
+            </a:r>
+          </a:p>
+          <a:p>
+            <a:pPr algn="l" lvl="0" marL="457200" indent="-355600">
+              <a:lnSpc>
+                <a:spcPct val="115000"/>
+              </a:lnSpc>
+              <a:spcBef>
+                <a:spcPts val="0"/>
+              </a:spcBef>
+              <a:spcAft>
+                <a:spcPts val="800"/>
+              </a:spcAft>
+              <a:buSzPct val="55417"/>
+              <a:buFont typeface="Noto Sans CJK JP"/>
+              <a:buChar char="●"/>
+              <a:defRPr lang="ja-JP" sz="2400" b="0">
+                <a:solidFill>
+                  <a:srgbClr val="303437"/>
+                </a:solidFill>
+                <a:latin typeface="Noto Sans"/>
+                <a:ea typeface="Noto Sans CJK JP"/>
+                <a:cs typeface="Noto Sans"/>
+              </a:defRPr>
+            </a:pPr>
+            <a:r>
+              <a:rPr lang="ja-JP" sz="2400" b="0">
+                <a:solidFill>
+                  <a:srgbClr val="303437"/>
+                </a:solidFill>
+                <a:latin typeface="Noto Sans"/>
+                <a:ea typeface="Noto Sans CJK JP"/>
+                <a:cs typeface="Noto Sans"/>
+              </a:rPr>
+              <a:t>2026-10-15の確認では、RT-DETR系の公式実装がCOCOでの評価設定と結果を公開している [2]。</a:t>
+            </a:r>
+          </a:p>
+        </p:txBody>
+      </p:sp>
+      <p:sp>
+        <p:nvSpPr>
+          <p:cNvPr id="4" name="Title 3"/>
           <p:cNvSpPr>
             <a:spLocks noGrp="1"/>
           </p:cNvSpPr>
@@ -29435,6 +29687,117 @@
                 <a:cs typeface="Noto Sans"/>
               </a:rPr>
               <a:t>4. COCOの利用動向と画像・注釈の入手方法</a:t>
+            </a:r>
+          </a:p>
+        </p:txBody>
+      </p:sp>
+      <p:sp>
+        <p:nvSpPr>
+          <p:cNvPr id="5" name="TextBox 4"/>
+          <p:cNvSpPr txBox="1"/>
+          <p:nvPr/>
+        </p:nvSpPr>
+        <p:spPr>
+          <a:xfrm>
+            <a:off x="502920" y="4787900"/>
+            <a:ext cx="8183879" cy="640080"/>
+          </a:xfrm>
+          <a:prstGeom prst="rect">
+            <a:avLst/>
+          </a:prstGeom>
+          <a:noFill/>
+        </p:spPr>
+        <p:txBody>
+          <a:bodyPr wrap="square" anchor="t" lIns="0" rIns="0" tIns="0" bIns="0">
+            <a:spAutoFit/>
+          </a:bodyPr>
+          <a:lstStyle/>
+          <a:p>
+            <a:pPr>
+              <a:lnSpc>
+                <a:spcPts val="1200"/>
+              </a:lnSpc>
+              <a:spcBef>
+                <a:spcPts val="0"/>
+              </a:spcBef>
+              <a:spcAft>
+                <a:spcPts val="0"/>
+              </a:spcAft>
+              <a:defRPr sz="800" b="0" lang="ja-JP">
+                <a:solidFill>
+                  <a:srgbClr val="626669"/>
+                </a:solidFill>
+                <a:latin typeface="Noto Sans"/>
+                <a:ea typeface="Noto Sans CJK JP"/>
+                <a:cs typeface="Noto Sans"/>
+              </a:defRPr>
+            </a:pPr>
+            <a:r>
+              <a:rPr sz="800" b="0" lang="ja-JP">
+                <a:solidFill>
+                  <a:srgbClr val="626669"/>
+                </a:solidFill>
+                <a:latin typeface="Noto Sans"/>
+                <a:ea typeface="Noto Sans CJK JP"/>
+                <a:cs typeface="Noto Sans"/>
+              </a:rPr>
+              <a:t>[1] </a:t>
+            </a:r>
+            <a:r>
+              <a:rPr sz="800" b="0" lang="ja-JP">
+                <a:solidFill>
+                  <a:srgbClr val="626669"/>
+                </a:solidFill>
+                <a:latin typeface="Noto Sans"/>
+                <a:ea typeface="Noto Sans CJK JP"/>
+                <a:cs typeface="Noto Sans"/>
+                <a:hlinkClick r:id="rId2"/>
+              </a:rPr>
+              <a:t>https://cocodataset.org/#download</a:t>
+            </a:r>
+          </a:p>
+          <a:p>
+            <a:pPr>
+              <a:lnSpc>
+                <a:spcPts val="1200"/>
+              </a:lnSpc>
+              <a:spcBef>
+                <a:spcPts val="0"/>
+              </a:spcBef>
+              <a:spcAft>
+                <a:spcPts val="0"/>
+              </a:spcAft>
+              <a:defRPr sz="800" b="0" lang="ja-JP">
+                <a:solidFill>
+                  <a:srgbClr val="626669"/>
+                </a:solidFill>
+                <a:latin typeface="Noto Sans"/>
+                <a:ea typeface="Noto Sans CJK JP"/>
+                <a:cs typeface="Noto Sans"/>
+              </a:defRPr>
+            </a:pPr>
+            <a:r>
+              <a:rPr sz="800" b="0" lang="ja-JP">
+                <a:solidFill>
+                  <a:srgbClr val="626669"/>
+                </a:solidFill>
+                <a:latin typeface="Noto Sans"/>
+                <a:ea typeface="Noto Sans CJK JP"/>
+                <a:cs typeface="Noto Sans"/>
+              </a:rPr>
+              <a:t>[2] </a:t>
+            </a:r>
+            <a:r>
+              <a:rPr sz="800" b="0" lang="ja-JP">
+                <a:solidFill>
+                  <a:srgbClr val="626669"/>
+                </a:solidFill>
+                <a:latin typeface="Noto Sans"/>
+                <a:ea typeface="Noto Sans CJK JP"/>
+                <a:cs typeface="Noto Sans"/>
+                <a:hlinkClick r:id="rId3"/>
+              </a:rPr>
+              <a:t>https://github.com/lyuwenyu/RT-DETR</a:t>
             </a:r>
           </a:p>
         </p:txBody>
@@ -29506,7 +29869,7 @@
                 <a:ea typeface="Noto Sans CJK JP"/>
                 <a:cs typeface="Noto Sans"/>
               </a:rPr>
-              <a:t>COCOの公開・分割更新と検出モデルへの利用</a:t>
+              <a:t>LVISはCOCO画像を大語彙の物体認識へ拡張した</a:t>
             </a:r>
           </a:p>
         </p:txBody>
@@ -29523,8 +29886,8 @@
         </p:nvSpPr>
         <p:spPr>
           <a:xfrm>
-            <a:off x="594360" y="1508760"/>
-            <a:ext cx="7955279" cy="3017520"/>
+            <a:off x="594360" y="1198528"/>
+            <a:ext cx="7955279" cy="3200400"/>
           </a:xfrm>
         </p:spPr>
         <p:txBody>
@@ -29539,30 +29902,30 @@
                 <a:spcPts val="0"/>
               </a:spcBef>
               <a:spcAft>
-                <a:spcPts val="800"/>
-              </a:spcAft>
-              <a:buSzPct val="55417"/>
+                <a:spcPts val="1000"/>
+              </a:spcAft>
+              <a:buSzPct val="60455"/>
               <a:buFont typeface="Noto Sans CJK JP"/>
               <a:buChar char="●"/>
-              <a:defRPr lang="ja-JP" sz="2400" b="0">
-                <a:solidFill>
-                  <a:srgbClr val="303437"/>
-                </a:solidFill>
-                <a:latin typeface="Noto Sans"/>
-                <a:ea typeface="Noto Sans CJK JP"/>
-                <a:cs typeface="Noto Sans"/>
-              </a:defRPr>
-            </a:pPr>
-            <a:r>
-              <a:rPr lang="ja-JP" sz="2400" b="0">
-                <a:solidFill>
-                  <a:srgbClr val="303437"/>
-                </a:solidFill>
-                <a:latin typeface="Noto Sans"/>
-                <a:ea typeface="Noto Sans CJK JP"/>
-                <a:cs typeface="Noto Sans"/>
-              </a:rPr>
-              <a:t>2014年に物体の文脈と領域を重視したデータとして登場し、2017年に学習・検証分割を再編した。</a:t>
+              <a:defRPr lang="ja-JP" sz="2200" b="0">
+                <a:solidFill>
+                  <a:srgbClr val="303437"/>
+                </a:solidFill>
+                <a:latin typeface="Noto Sans"/>
+                <a:ea typeface="Noto Sans CJK JP"/>
+                <a:cs typeface="Noto Sans"/>
+              </a:defRPr>
+            </a:pPr>
+            <a:r>
+              <a:rPr sz="2200" b="0" lang="ja-JP">
+                <a:solidFill>
+                  <a:srgbClr val="303437"/>
+                </a:solidFill>
+                <a:latin typeface="Noto Sans"/>
+                <a:ea typeface="Noto Sans CJK JP"/>
+                <a:cs typeface="Noto Sans"/>
+              </a:rPr>
+              <a:t>Large Vocabulary Instance Segmentation（LVIS、2019）は、COCO画像へ1,000以上の物体カテゴリの注釈を追加した。</a:t>
             </a:r>
           </a:p>
           <a:p>
@@ -29574,65 +29937,30 @@
                 <a:spcPts val="0"/>
               </a:spcBef>
               <a:spcAft>
-                <a:spcPts val="800"/>
-              </a:spcAft>
-              <a:buSzPct val="55417"/>
+                <a:spcPts val="1000"/>
+              </a:spcAft>
+              <a:buSzPct val="60455"/>
               <a:buFont typeface="Noto Sans CJK JP"/>
               <a:buChar char="●"/>
-              <a:defRPr lang="ja-JP" sz="2400" b="0">
-                <a:solidFill>
-                  <a:srgbClr val="303437"/>
-                </a:solidFill>
-                <a:latin typeface="Noto Sans"/>
-                <a:ea typeface="Noto Sans CJK JP"/>
-                <a:cs typeface="Noto Sans"/>
-              </a:defRPr>
-            </a:pPr>
-            <a:r>
-              <a:rPr lang="ja-JP" sz="2400" b="0">
-                <a:solidFill>
-                  <a:srgbClr val="303437"/>
-                </a:solidFill>
-                <a:latin typeface="Noto Sans"/>
-                <a:ea typeface="Noto Sans CJK JP"/>
-                <a:cs typeface="Noto Sans"/>
-              </a:rPr>
-              <a:t>2018年にはPanoptic分割を追加した [1]。</a:t>
-            </a:r>
-          </a:p>
-          <a:p>
-            <a:pPr algn="l" lvl="0" marL="457200" indent="-355600">
-              <a:lnSpc>
-                <a:spcPct val="115000"/>
-              </a:lnSpc>
-              <a:spcBef>
-                <a:spcPts val="0"/>
-              </a:spcBef>
-              <a:spcAft>
-                <a:spcPts val="800"/>
-              </a:spcAft>
-              <a:buSzPct val="55417"/>
-              <a:buFont typeface="Noto Sans CJK JP"/>
-              <a:buChar char="●"/>
-              <a:defRPr lang="ja-JP" sz="2400" b="0">
-                <a:solidFill>
-                  <a:srgbClr val="303437"/>
-                </a:solidFill>
-                <a:latin typeface="Noto Sans"/>
-                <a:ea typeface="Noto Sans CJK JP"/>
-                <a:cs typeface="Noto Sans"/>
-              </a:defRPr>
-            </a:pPr>
-            <a:r>
-              <a:rPr lang="ja-JP" sz="2400" b="0">
-                <a:solidFill>
-                  <a:srgbClr val="303437"/>
-                </a:solidFill>
-                <a:latin typeface="Noto Sans"/>
-                <a:ea typeface="Noto Sans CJK JP"/>
-                <a:cs typeface="Noto Sans"/>
-              </a:rPr>
-              <a:t>2026-10-15の確認では、RT-DETR系の公式実装がCOCOでの評価設定と結果を公開している [2]。</a:t>
+              <a:defRPr lang="ja-JP" sz="2200" b="0">
+                <a:solidFill>
+                  <a:srgbClr val="303437"/>
+                </a:solidFill>
+                <a:latin typeface="Noto Sans"/>
+                <a:ea typeface="Noto Sans CJK JP"/>
+                <a:cs typeface="Noto Sans"/>
+              </a:defRPr>
+            </a:pPr>
+            <a:r>
+              <a:rPr sz="2200" b="0" lang="ja-JP">
+                <a:solidFill>
+                  <a:srgbClr val="303437"/>
+                </a:solidFill>
+                <a:latin typeface="Noto Sans"/>
+                <a:ea typeface="Noto Sans CJK JP"/>
+                <a:cs typeface="Noto Sans"/>
+              </a:rPr>
+              <a:t>出現頻度の低いカテゴリを多く含み、頻出・少数カテゴリ別の認識性能を評価する。</a:t>
             </a:r>
           </a:p>
         </p:txBody>
@@ -29699,8 +30027,8 @@
         </p:nvSpPr>
         <p:spPr>
           <a:xfrm>
-            <a:off x="502920" y="4787900"/>
-            <a:ext cx="8183879" cy="640080"/>
+            <a:off x="502920" y="4343400"/>
+            <a:ext cx="8183879" cy="355600"/>
           </a:xfrm>
           <a:prstGeom prst="rect">
             <a:avLst/>
@@ -29708,29 +30036,79 @@
           <a:noFill/>
         </p:spPr>
         <p:txBody>
-          <a:bodyPr wrap="square" anchor="t" lIns="0" rIns="0" tIns="0" bIns="0">
+          <a:bodyPr wrap="square" lIns="0" rIns="0" tIns="0" bIns="0">
             <a:spAutoFit/>
           </a:bodyPr>
           <a:lstStyle/>
           <a:p>
-            <a:pPr>
-              <a:lnSpc>
-                <a:spcPts val="1200"/>
-              </a:lnSpc>
-              <a:spcBef>
-                <a:spcPts val="0"/>
-              </a:spcBef>
-              <a:spcAft>
-                <a:spcPts val="0"/>
-              </a:spcAft>
-              <a:defRPr sz="800" b="0" lang="ja-JP">
+            <a:pPr algn="l">
+              <a:lnSpc>
+                <a:spcPts val="1400"/>
+              </a:lnSpc>
+              <a:spcBef>
+                <a:spcPts val="0"/>
+              </a:spcBef>
+              <a:spcAft>
+                <a:spcPts val="0"/>
+              </a:spcAft>
+            </a:pPr>
+            <a:r>
+              <a:rPr sz="800" b="0" lang="ja-JP">
                 <a:solidFill>
                   <a:srgbClr val="626669"/>
                 </a:solidFill>
                 <a:latin typeface="Noto Sans"/>
                 <a:ea typeface="Noto Sans CJK JP"/>
                 <a:cs typeface="Noto Sans"/>
-              </a:defRPr>
+              </a:rPr>
+              <a:t/>
+            </a:r>
+            <a:r>
+              <a:rPr sz="800" lang="ja-JP">
+                <a:solidFill>
+                  <a:srgbClr val="626669"/>
+                </a:solidFill>
+                <a:latin typeface="Noto Sans"/>
+                <a:ea typeface="Noto Sans CJK JP"/>
+                <a:cs typeface="Noto Sans"/>
+              </a:rPr>
+              <a:t>[1] Agrim Gupta et al. (2019). IEEE/CVF Conference on Computer Vision and Pattern Recognition (CVPR), pp. 5356–5364. LVIS: A Dataset for Large Vocabulary Instance Segmentation.</a:t>
+            </a:r>
+          </a:p>
+        </p:txBody>
+      </p:sp>
+      <p:sp>
+        <p:nvSpPr>
+          <p:cNvPr id="6" name="TextBox 5"/>
+          <p:cNvSpPr txBox="1"/>
+          <p:nvPr/>
+        </p:nvSpPr>
+        <p:spPr>
+          <a:xfrm>
+            <a:off x="1254031" y="4539526"/>
+            <a:ext cx="7432768" cy="177800"/>
+          </a:xfrm>
+          <a:prstGeom prst="rect">
+            <a:avLst/>
+          </a:prstGeom>
+          <a:noFill/>
+        </p:spPr>
+        <p:txBody>
+          <a:bodyPr wrap="none" lIns="0" rIns="0" tIns="0" bIns="0">
+            <a:spAutoFit/>
+          </a:bodyPr>
+          <a:lstStyle/>
+          <a:p>
+            <a:pPr algn="l">
+              <a:lnSpc>
+                <a:spcPts val="1400"/>
+              </a:lnSpc>
+              <a:spcBef>
+                <a:spcPts val="0"/>
+              </a:spcBef>
+              <a:spcAft>
+                <a:spcPts val="0"/>
+              </a:spcAft>
             </a:pPr>
             <a:r>
               <a:rPr sz="800" b="0" lang="ja-JP">
@@ -29741,8 +30119,56 @@
                 <a:ea typeface="Noto Sans CJK JP"/>
                 <a:cs typeface="Noto Sans"/>
               </a:rPr>
-              <a:t>[1] </a:t>
-            </a:r>
+              <a:t/>
+            </a:r>
+            <a:r>
+              <a:rPr sz="800" lang="ja-JP">
+                <a:solidFill>
+                  <a:srgbClr val="626669"/>
+                </a:solidFill>
+                <a:latin typeface="Noto Sans"/>
+                <a:ea typeface="Noto Sans CJK JP"/>
+                <a:cs typeface="Noto Sans"/>
+                <a:hlinkClick r:id="rId2"/>
+              </a:rPr>
+              <a:t>https://arxiv.org/abs/1908.03195</a:t>
+            </a:r>
+          </a:p>
+        </p:txBody>
+      </p:sp>
+      <p:sp>
+        <p:nvSpPr>
+          <p:cNvPr id="7" name="TextBox 6"/>
+          <p:cNvSpPr txBox="1"/>
+          <p:nvPr/>
+        </p:nvSpPr>
+        <p:spPr>
+          <a:xfrm>
+            <a:off x="502920" y="4876800"/>
+            <a:ext cx="8183879" cy="177800"/>
+          </a:xfrm>
+          <a:prstGeom prst="rect">
+            <a:avLst/>
+          </a:prstGeom>
+          <a:noFill/>
+        </p:spPr>
+        <p:txBody>
+          <a:bodyPr wrap="square" lIns="0" rIns="0" tIns="0" bIns="0">
+            <a:spAutoFit/>
+          </a:bodyPr>
+          <a:lstStyle/>
+          <a:p>
+            <a:pPr algn="l">
+              <a:lnSpc>
+                <a:spcPts val="1400"/>
+              </a:lnSpc>
+              <a:spcBef>
+                <a:spcPts val="0"/>
+              </a:spcBef>
+              <a:spcAft>
+                <a:spcPts val="0"/>
+              </a:spcAft>
+            </a:pPr>
             <a:r>
               <a:rPr sz="800" b="0" lang="ja-JP">
                 <a:solidFill>
@@ -29751,53 +30177,31 @@
                 <a:latin typeface="Noto Sans"/>
                 <a:ea typeface="Noto Sans CJK JP"/>
                 <a:cs typeface="Noto Sans"/>
-                <a:hlinkClick r:id="rId2"/>
-              </a:rPr>
-              <a:t>https://cocodataset.org/#download</a:t>
-            </a:r>
-          </a:p>
-          <a:p>
-            <a:pPr>
-              <a:lnSpc>
-                <a:spcPts val="1200"/>
-              </a:lnSpc>
-              <a:spcBef>
-                <a:spcPts val="0"/>
-              </a:spcBef>
-              <a:spcAft>
-                <a:spcPts val="0"/>
-              </a:spcAft>
-              <a:defRPr sz="800" b="0" lang="ja-JP">
+              </a:rPr>
+              <a:t/>
+            </a:r>
+            <a:r>
+              <a:rPr sz="800" lang="ja-JP">
                 <a:solidFill>
                   <a:srgbClr val="626669"/>
                 </a:solidFill>
                 <a:latin typeface="Noto Sans"/>
                 <a:ea typeface="Noto Sans CJK JP"/>
                 <a:cs typeface="Noto Sans"/>
-              </a:defRPr>
-            </a:pPr>
-            <a:r>
-              <a:rPr sz="800" b="0" lang="ja-JP">
+              </a:rPr>
+              <a:t>[2] </a:t>
+            </a:r>
+            <a:r>
+              <a:rPr sz="800" lang="ja-JP">
                 <a:solidFill>
                   <a:srgbClr val="626669"/>
                 </a:solidFill>
                 <a:latin typeface="Noto Sans"/>
                 <a:ea typeface="Noto Sans CJK JP"/>
                 <a:cs typeface="Noto Sans"/>
-              </a:rPr>
-              <a:t>[2] </a:t>
-            </a:r>
-            <a:r>
-              <a:rPr sz="800" b="0" lang="ja-JP">
-                <a:solidFill>
-                  <a:srgbClr val="626669"/>
-                </a:solidFill>
-                <a:latin typeface="Noto Sans"/>
-                <a:ea typeface="Noto Sans CJK JP"/>
-                <a:cs typeface="Noto Sans"/>
                 <a:hlinkClick r:id="rId3"/>
               </a:rPr>
-              <a:t>https://github.com/lyuwenyu/RT-DETR</a:t>
+              <a:t>https://github.com/lvis-dataset/lvis-api</a:t>
             </a:r>
           </a:p>
         </p:txBody>
@@ -30130,410 +30534,6 @@
 </file>
 
 <file path=ppt/slides/slide50.xml><?xml version="1.0" encoding="utf-8"?>
-<p:sld xmlns:a="http://schemas.openxmlformats.org/drawingml/2006/main" xmlns:p="http://schemas.openxmlformats.org/presentationml/2006/main" xmlns:r="http://schemas.openxmlformats.org/officeDocument/2006/relationships">
-  <p:cSld>
-    <p:spTree>
-      <p:nvGrpSpPr>
-        <p:cNvPr id="1" name=""/>
-        <p:cNvGrpSpPr/>
-        <p:nvPr/>
-      </p:nvGrpSpPr>
-      <p:grpSpPr/>
-      <p:sp>
-        <p:nvSpPr>
-          <p:cNvPr id="2" name="Title 1"/>
-          <p:cNvSpPr>
-            <a:spLocks noGrp="1"/>
-          </p:cNvSpPr>
-          <p:nvPr>
-            <p:ph type="title"/>
-          </p:nvPr>
-        </p:nvSpPr>
-        <p:spPr>
-          <a:xfrm>
-            <a:off x="468172" y="650138"/>
-            <a:ext cx="8206740" cy="616305"/>
-          </a:xfrm>
-        </p:spPr>
-        <p:txBody>
-          <a:bodyPr wrap="none" anchor="t" lIns="0" rIns="0" tIns="0" bIns="0"/>
-          <a:lstStyle/>
-          <a:p>
-            <a:pPr algn="l">
-              <a:lnSpc>
-                <a:spcPct val="100000"/>
-              </a:lnSpc>
-              <a:spcBef>
-                <a:spcPts val="0"/>
-              </a:spcBef>
-              <a:spcAft>
-                <a:spcPts val="0"/>
-              </a:spcAft>
-              <a:buNone/>
-              <a:defRPr lang="ja-JP" sz="2800" b="1">
-                <a:solidFill>
-                  <a:srgbClr val="303437"/>
-                </a:solidFill>
-                <a:latin typeface="Noto Sans"/>
-                <a:ea typeface="Noto Sans CJK JP"/>
-                <a:cs typeface="Noto Sans"/>
-              </a:defRPr>
-            </a:pPr>
-            <a:r>
-              <a:rPr sz="2800" b="1" lang="ja-JP">
-                <a:solidFill>
-                  <a:srgbClr val="303437"/>
-                </a:solidFill>
-                <a:latin typeface="Noto Sans"/>
-                <a:ea typeface="Noto Sans CJK JP"/>
-                <a:cs typeface="Noto Sans"/>
-              </a:rPr>
-              <a:t>LVISはCOCO画像を大語彙の物体認識へ拡張した</a:t>
-            </a:r>
-          </a:p>
-        </p:txBody>
-      </p:sp>
-      <p:sp>
-        <p:nvSpPr>
-          <p:cNvPr id="3" name="Text Placeholder 2"/>
-          <p:cNvSpPr>
-            <a:spLocks noGrp="1"/>
-          </p:cNvSpPr>
-          <p:nvPr>
-            <p:ph type="body" idx="1"/>
-          </p:nvPr>
-        </p:nvSpPr>
-        <p:spPr>
-          <a:xfrm>
-            <a:off x="594360" y="1198528"/>
-            <a:ext cx="7955279" cy="3200400"/>
-          </a:xfrm>
-        </p:spPr>
-        <p:txBody>
-          <a:bodyPr wrap="square" anchor="t" tIns="91440" bIns="91440"/>
-          <a:lstStyle/>
-          <a:p>
-            <a:pPr algn="l" lvl="0" marL="457200" indent="-355600">
-              <a:lnSpc>
-                <a:spcPct val="115000"/>
-              </a:lnSpc>
-              <a:spcBef>
-                <a:spcPts val="0"/>
-              </a:spcBef>
-              <a:spcAft>
-                <a:spcPts val="1000"/>
-              </a:spcAft>
-              <a:buSzPct val="60455"/>
-              <a:buFont typeface="Noto Sans CJK JP"/>
-              <a:buChar char="●"/>
-              <a:defRPr lang="ja-JP" sz="2200" b="0">
-                <a:solidFill>
-                  <a:srgbClr val="303437"/>
-                </a:solidFill>
-                <a:latin typeface="Noto Sans"/>
-                <a:ea typeface="Noto Sans CJK JP"/>
-                <a:cs typeface="Noto Sans"/>
-              </a:defRPr>
-            </a:pPr>
-            <a:r>
-              <a:rPr sz="2200" b="0" lang="ja-JP">
-                <a:solidFill>
-                  <a:srgbClr val="303437"/>
-                </a:solidFill>
-                <a:latin typeface="Noto Sans"/>
-                <a:ea typeface="Noto Sans CJK JP"/>
-                <a:cs typeface="Noto Sans"/>
-              </a:rPr>
-              <a:t>Large Vocabulary Instance Segmentation（LVIS、2019）は、COCO画像へ1,000以上の物体カテゴリの注釈を追加した。</a:t>
-            </a:r>
-          </a:p>
-          <a:p>
-            <a:pPr algn="l" lvl="0" marL="457200" indent="-355600">
-              <a:lnSpc>
-                <a:spcPct val="115000"/>
-              </a:lnSpc>
-              <a:spcBef>
-                <a:spcPts val="0"/>
-              </a:spcBef>
-              <a:spcAft>
-                <a:spcPts val="1000"/>
-              </a:spcAft>
-              <a:buSzPct val="60455"/>
-              <a:buFont typeface="Noto Sans CJK JP"/>
-              <a:buChar char="●"/>
-              <a:defRPr lang="ja-JP" sz="2200" b="0">
-                <a:solidFill>
-                  <a:srgbClr val="303437"/>
-                </a:solidFill>
-                <a:latin typeface="Noto Sans"/>
-                <a:ea typeface="Noto Sans CJK JP"/>
-                <a:cs typeface="Noto Sans"/>
-              </a:defRPr>
-            </a:pPr>
-            <a:r>
-              <a:rPr sz="2200" b="0" lang="ja-JP">
-                <a:solidFill>
-                  <a:srgbClr val="303437"/>
-                </a:solidFill>
-                <a:latin typeface="Noto Sans"/>
-                <a:ea typeface="Noto Sans CJK JP"/>
-                <a:cs typeface="Noto Sans"/>
-              </a:rPr>
-              <a:t>出現頻度の低いカテゴリを多く含み、頻出・少数カテゴリ別の認識性能を評価する。</a:t>
-            </a:r>
-          </a:p>
-        </p:txBody>
-      </p:sp>
-      <p:sp>
-        <p:nvSpPr>
-          <p:cNvPr id="4" name="Title 3"/>
-          <p:cNvSpPr>
-            <a:spLocks noGrp="1"/>
-          </p:cNvSpPr>
-          <p:nvPr>
-            <p:ph type="title" idx="2"/>
-          </p:nvPr>
-        </p:nvSpPr>
-        <p:spPr>
-          <a:xfrm>
-            <a:off x="75895" y="0"/>
-            <a:ext cx="8115300" cy="480060"/>
-          </a:xfrm>
-        </p:spPr>
-        <p:txBody>
-          <a:bodyPr wrap="square" anchor="ctr" lIns="0" rIns="0" tIns="0" bIns="0"/>
-          <a:lstStyle/>
-          <a:p>
-            <a:pPr algn="l">
-              <a:lnSpc>
-                <a:spcPct val="100000"/>
-              </a:lnSpc>
-              <a:spcBef>
-                <a:spcPts val="0"/>
-              </a:spcBef>
-              <a:spcAft>
-                <a:spcPts val="0"/>
-              </a:spcAft>
-              <a:buNone/>
-              <a:defRPr lang="ja-JP" sz="1400" b="1">
-                <a:solidFill>
-                  <a:srgbClr val="FFFEF8"/>
-                </a:solidFill>
-                <a:latin typeface="Noto Sans"/>
-                <a:ea typeface="Noto Sans CJK JP"/>
-                <a:cs typeface="Noto Sans"/>
-              </a:defRPr>
-            </a:pPr>
-            <a:r>
-              <a:rPr lang="ja-JP" sz="1400" b="1">
-                <a:solidFill>
-                  <a:srgbClr val="FFFEF8"/>
-                </a:solidFill>
-                <a:latin typeface="Noto Sans"/>
-                <a:ea typeface="Noto Sans CJK JP"/>
-                <a:cs typeface="Noto Sans"/>
-              </a:rPr>
-              <a:t>4. COCOの利用動向と画像・注釈の入手方法</a:t>
-            </a:r>
-          </a:p>
-        </p:txBody>
-      </p:sp>
-      <p:sp>
-        <p:nvSpPr>
-          <p:cNvPr id="5" name="TextBox 4"/>
-          <p:cNvSpPr txBox="1"/>
-          <p:nvPr/>
-        </p:nvSpPr>
-        <p:spPr>
-          <a:xfrm>
-            <a:off x="502920" y="4343400"/>
-            <a:ext cx="8183879" cy="355600"/>
-          </a:xfrm>
-          <a:prstGeom prst="rect">
-            <a:avLst/>
-          </a:prstGeom>
-          <a:noFill/>
-        </p:spPr>
-        <p:txBody>
-          <a:bodyPr wrap="square" lIns="0" rIns="0" tIns="0" bIns="0">
-            <a:spAutoFit/>
-          </a:bodyPr>
-          <a:lstStyle/>
-          <a:p>
-            <a:pPr algn="l">
-              <a:lnSpc>
-                <a:spcPts val="1400"/>
-              </a:lnSpc>
-              <a:spcBef>
-                <a:spcPts val="0"/>
-              </a:spcBef>
-              <a:spcAft>
-                <a:spcPts val="0"/>
-              </a:spcAft>
-            </a:pPr>
-            <a:r>
-              <a:rPr sz="800" b="0" lang="ja-JP">
-                <a:solidFill>
-                  <a:srgbClr val="626669"/>
-                </a:solidFill>
-                <a:latin typeface="Noto Sans"/>
-                <a:ea typeface="Noto Sans CJK JP"/>
-                <a:cs typeface="Noto Sans"/>
-              </a:rPr>
-              <a:t/>
-            </a:r>
-            <a:r>
-              <a:rPr sz="800" lang="ja-JP">
-                <a:solidFill>
-                  <a:srgbClr val="626669"/>
-                </a:solidFill>
-                <a:latin typeface="Noto Sans"/>
-                <a:ea typeface="Noto Sans CJK JP"/>
-                <a:cs typeface="Noto Sans"/>
-              </a:rPr>
-              <a:t>[1] Agrim Gupta et al. (2019). IEEE/CVF Conference on Computer Vision and Pattern Recognition (CVPR), pp. 5356–5364. LVIS: A Dataset for Large Vocabulary Instance Segmentation.</a:t>
-            </a:r>
-          </a:p>
-        </p:txBody>
-      </p:sp>
-      <p:sp>
-        <p:nvSpPr>
-          <p:cNvPr id="6" name="TextBox 5"/>
-          <p:cNvSpPr txBox="1"/>
-          <p:nvPr/>
-        </p:nvSpPr>
-        <p:spPr>
-          <a:xfrm>
-            <a:off x="1254031" y="4539526"/>
-            <a:ext cx="7432768" cy="177800"/>
-          </a:xfrm>
-          <a:prstGeom prst="rect">
-            <a:avLst/>
-          </a:prstGeom>
-          <a:noFill/>
-        </p:spPr>
-        <p:txBody>
-          <a:bodyPr wrap="none" lIns="0" rIns="0" tIns="0" bIns="0">
-            <a:spAutoFit/>
-          </a:bodyPr>
-          <a:lstStyle/>
-          <a:p>
-            <a:pPr algn="l">
-              <a:lnSpc>
-                <a:spcPts val="1400"/>
-              </a:lnSpc>
-              <a:spcBef>
-                <a:spcPts val="0"/>
-              </a:spcBef>
-              <a:spcAft>
-                <a:spcPts val="0"/>
-              </a:spcAft>
-            </a:pPr>
-            <a:r>
-              <a:rPr sz="800" b="0" lang="ja-JP">
-                <a:solidFill>
-                  <a:srgbClr val="626669"/>
-                </a:solidFill>
-                <a:latin typeface="Noto Sans"/>
-                <a:ea typeface="Noto Sans CJK JP"/>
-                <a:cs typeface="Noto Sans"/>
-              </a:rPr>
-              <a:t/>
-            </a:r>
-            <a:r>
-              <a:rPr sz="800" lang="ja-JP">
-                <a:solidFill>
-                  <a:srgbClr val="626669"/>
-                </a:solidFill>
-                <a:latin typeface="Noto Sans"/>
-                <a:ea typeface="Noto Sans CJK JP"/>
-                <a:cs typeface="Noto Sans"/>
-                <a:hlinkClick r:id="rId2"/>
-              </a:rPr>
-              <a:t>https://arxiv.org/abs/1908.03195</a:t>
-            </a:r>
-          </a:p>
-        </p:txBody>
-      </p:sp>
-      <p:sp>
-        <p:nvSpPr>
-          <p:cNvPr id="7" name="TextBox 6"/>
-          <p:cNvSpPr txBox="1"/>
-          <p:nvPr/>
-        </p:nvSpPr>
-        <p:spPr>
-          <a:xfrm>
-            <a:off x="502920" y="4876800"/>
-            <a:ext cx="8183879" cy="177800"/>
-          </a:xfrm>
-          <a:prstGeom prst="rect">
-            <a:avLst/>
-          </a:prstGeom>
-          <a:noFill/>
-        </p:spPr>
-        <p:txBody>
-          <a:bodyPr wrap="square" lIns="0" rIns="0" tIns="0" bIns="0">
-            <a:spAutoFit/>
-          </a:bodyPr>
-          <a:lstStyle/>
-          <a:p>
-            <a:pPr algn="l">
-              <a:lnSpc>
-                <a:spcPts val="1400"/>
-              </a:lnSpc>
-              <a:spcBef>
-                <a:spcPts val="0"/>
-              </a:spcBef>
-              <a:spcAft>
-                <a:spcPts val="0"/>
-              </a:spcAft>
-            </a:pPr>
-            <a:r>
-              <a:rPr sz="800" b="0" lang="ja-JP">
-                <a:solidFill>
-                  <a:srgbClr val="626669"/>
-                </a:solidFill>
-                <a:latin typeface="Noto Sans"/>
-                <a:ea typeface="Noto Sans CJK JP"/>
-                <a:cs typeface="Noto Sans"/>
-              </a:rPr>
-              <a:t/>
-            </a:r>
-            <a:r>
-              <a:rPr sz="800" lang="ja-JP">
-                <a:solidFill>
-                  <a:srgbClr val="626669"/>
-                </a:solidFill>
-                <a:latin typeface="Noto Sans"/>
-                <a:ea typeface="Noto Sans CJK JP"/>
-                <a:cs typeface="Noto Sans"/>
-              </a:rPr>
-              <a:t>[2] </a:t>
-            </a:r>
-            <a:r>
-              <a:rPr sz="800" lang="ja-JP">
-                <a:solidFill>
-                  <a:srgbClr val="626669"/>
-                </a:solidFill>
-                <a:latin typeface="Noto Sans"/>
-                <a:ea typeface="Noto Sans CJK JP"/>
-                <a:cs typeface="Noto Sans"/>
-                <a:hlinkClick r:id="rId3"/>
-              </a:rPr>
-              <a:t>https://github.com/lvis-dataset/lvis-api</a:t>
-            </a:r>
-          </a:p>
-        </p:txBody>
-      </p:sp>
-    </p:spTree>
-  </p:cSld>
-  <p:clrMapOvr>
-    <a:masterClrMapping/>
-  </p:clrMapOvr>
-</p:sld>
-</file>
-
-<file path=ppt/slides/slide51.xml><?xml version="1.0" encoding="utf-8"?>
 <p:sld xmlns:a="http://schemas.openxmlformats.org/drawingml/2006/main" xmlns:p="http://schemas.openxmlformats.org/presentationml/2006/main" xmlns:r="http://schemas.openxmlformats.org/officeDocument/2006/relationships">
   <p:cSld>
     <p:spTree>
@@ -31400,7 +31400,7 @@
 </p:sld>
 </file>
 
-<file path=ppt/slides/slide52.xml><?xml version="1.0" encoding="utf-8"?>
+<file path=ppt/slides/slide51.xml><?xml version="1.0" encoding="utf-8"?>
 <p:sld xmlns:a="http://schemas.openxmlformats.org/drawingml/2006/main" xmlns:p="http://schemas.openxmlformats.org/presentationml/2006/main" xmlns:r="http://schemas.openxmlformats.org/officeDocument/2006/relationships">
   <p:cSld>
     <p:spTree>
@@ -31890,6 +31890,325 @@
                 <a:hlinkClick r:id="rId2"/>
               </a:rPr>
               <a:t>https://github.com/cocodataset/cocoapi/blob/master/PythonAPI/pycocoDemo.ipynb</a:t>
+            </a:r>
+          </a:p>
+        </p:txBody>
+      </p:sp>
+    </p:spTree>
+  </p:cSld>
+  <p:clrMapOvr>
+    <a:masterClrMapping/>
+  </p:clrMapOvr>
+</p:sld>
+</file>
+
+<file path=ppt/slides/slide52.xml><?xml version="1.0" encoding="utf-8"?>
+<p:sld xmlns:a="http://schemas.openxmlformats.org/drawingml/2006/main" xmlns:p="http://schemas.openxmlformats.org/presentationml/2006/main" xmlns:r="http://schemas.openxmlformats.org/officeDocument/2006/relationships">
+  <p:cSld>
+    <p:spTree>
+      <p:nvGrpSpPr>
+        <p:cNvPr id="1" name=""/>
+        <p:cNvGrpSpPr/>
+        <p:nvPr/>
+      </p:nvGrpSpPr>
+      <p:grpSpPr/>
+      <p:sp>
+        <p:nvSpPr>
+          <p:cNvPr id="2" name="Title 1"/>
+          <p:cNvSpPr>
+            <a:spLocks noGrp="1"/>
+          </p:cNvSpPr>
+          <p:nvPr>
+            <p:ph type="title"/>
+          </p:nvPr>
+        </p:nvSpPr>
+        <p:spPr>
+          <a:xfrm>
+            <a:off x="468172" y="650138"/>
+            <a:ext cx="8206740" cy="616305"/>
+          </a:xfrm>
+        </p:spPr>
+        <p:txBody>
+          <a:bodyPr wrap="none" anchor="t" lIns="0" rIns="0" tIns="0" bIns="0"/>
+          <a:lstStyle/>
+          <a:p>
+            <a:pPr algn="l">
+              <a:lnSpc>
+                <a:spcPct val="100000"/>
+              </a:lnSpc>
+              <a:spcBef>
+                <a:spcPts val="0"/>
+              </a:spcBef>
+              <a:spcAft>
+                <a:spcPts val="0"/>
+              </a:spcAft>
+              <a:buNone/>
+              <a:defRPr lang="ja-JP" sz="2800" b="1">
+                <a:solidFill>
+                  <a:srgbClr val="303437"/>
+                </a:solidFill>
+                <a:latin typeface="Noto Sans"/>
+                <a:ea typeface="Noto Sans CJK JP"/>
+                <a:cs typeface="Noto Sans"/>
+              </a:defRPr>
+            </a:pPr>
+            <a:r>
+              <a:rPr sz="2800" b="1" lang="ja-JP">
+                <a:solidFill>
+                  <a:srgbClr val="303437"/>
+                </a:solidFill>
+                <a:latin typeface="Noto Sans"/>
+                <a:ea typeface="Noto Sans CJK JP"/>
+                <a:cs typeface="Noto Sans"/>
+              </a:rPr>
+              <a:t>APIは画像IDから物体注釈とマスクを取り出す</a:t>
+            </a:r>
+          </a:p>
+        </p:txBody>
+      </p:sp>
+      <p:sp>
+        <p:nvSpPr>
+          <p:cNvPr id="3" name="Text Placeholder 2"/>
+          <p:cNvSpPr>
+            <a:spLocks noGrp="1"/>
+          </p:cNvSpPr>
+          <p:nvPr>
+            <p:ph type="body" idx="1"/>
+          </p:nvPr>
+        </p:nvSpPr>
+        <p:spPr>
+          <a:xfrm>
+            <a:off x="594360" y="1417320"/>
+            <a:ext cx="7955279" cy="3200400"/>
+          </a:xfrm>
+        </p:spPr>
+        <p:txBody>
+          <a:bodyPr wrap="square" anchor="t" tIns="91440" bIns="91440"/>
+          <a:lstStyle/>
+          <a:p>
+            <a:pPr algn="l" lvl="0" marL="457200" indent="-355600">
+              <a:lnSpc>
+                <a:spcPct val="115000"/>
+              </a:lnSpc>
+              <a:spcBef>
+                <a:spcPts val="0"/>
+              </a:spcBef>
+              <a:spcAft>
+                <a:spcPts val="1000"/>
+              </a:spcAft>
+              <a:buSzPct val="57826"/>
+              <a:buFont typeface="Noto Sans CJK JP"/>
+              <a:buChar char="●"/>
+              <a:defRPr lang="ja-JP" sz="2300" b="0">
+                <a:solidFill>
+                  <a:srgbClr val="303437"/>
+                </a:solidFill>
+                <a:latin typeface="Noto Sans"/>
+                <a:ea typeface="Noto Sans CJK JP"/>
+                <a:cs typeface="Noto Sans"/>
+              </a:defRPr>
+            </a:pPr>
+            <a:r>
+              <a:rPr sz="2300" b="0" lang="ja-JP">
+                <a:solidFill>
+                  <a:srgbClr val="303437"/>
+                </a:solidFill>
+                <a:latin typeface="Noto Sans"/>
+                <a:ea typeface="Noto Sans CJK JP"/>
+                <a:cs typeface="Noto Sans"/>
+              </a:rPr>
+              <a:t>COCO.getImgIdsは条件に合う画像IDを返し、loadImgsでファイル名・幅・高さなどを読み込む。</a:t>
+            </a:r>
+          </a:p>
+          <a:p>
+            <a:pPr algn="l" lvl="0" marL="457200" indent="-355600">
+              <a:lnSpc>
+                <a:spcPct val="115000"/>
+              </a:lnSpc>
+              <a:spcBef>
+                <a:spcPts val="0"/>
+              </a:spcBef>
+              <a:spcAft>
+                <a:spcPts val="1000"/>
+              </a:spcAft>
+              <a:buSzPct val="57826"/>
+              <a:buFont typeface="Noto Sans CJK JP"/>
+              <a:buChar char="●"/>
+              <a:defRPr lang="ja-JP" sz="2300" b="0">
+                <a:solidFill>
+                  <a:srgbClr val="303437"/>
+                </a:solidFill>
+                <a:latin typeface="Noto Sans"/>
+                <a:ea typeface="Noto Sans CJK JP"/>
+                <a:cs typeface="Noto Sans"/>
+              </a:defRPr>
+            </a:pPr>
+            <a:r>
+              <a:rPr sz="2300" b="0" lang="ja-JP">
+                <a:solidFill>
+                  <a:srgbClr val="303437"/>
+                </a:solidFill>
+                <a:latin typeface="Noto Sans"/>
+                <a:ea typeface="Noto Sans CJK JP"/>
+                <a:cs typeface="Noto Sans"/>
+              </a:rPr>
+              <a:t>getAnnIdsとloadAnnsで、その画像に対応する物体注釈を取り出す。category_idはカテゴリ表と照合する。</a:t>
+            </a:r>
+          </a:p>
+          <a:p>
+            <a:pPr algn="l" lvl="0" marL="457200" indent="-355600">
+              <a:lnSpc>
+                <a:spcPct val="115000"/>
+              </a:lnSpc>
+              <a:spcBef>
+                <a:spcPts val="0"/>
+              </a:spcBef>
+              <a:spcAft>
+                <a:spcPts val="1000"/>
+              </a:spcAft>
+              <a:buSzPct val="57826"/>
+              <a:buFont typeface="Noto Sans CJK JP"/>
+              <a:buChar char="●"/>
+              <a:defRPr lang="ja-JP" sz="2300" b="0">
+                <a:solidFill>
+                  <a:srgbClr val="303437"/>
+                </a:solidFill>
+                <a:latin typeface="Noto Sans"/>
+                <a:ea typeface="Noto Sans CJK JP"/>
+                <a:cs typeface="Noto Sans"/>
+              </a:defRPr>
+            </a:pPr>
+            <a:r>
+              <a:rPr sz="2300" b="0" lang="ja-JP">
+                <a:solidFill>
+                  <a:srgbClr val="303437"/>
+                </a:solidFill>
+                <a:latin typeface="Noto Sans"/>
+                <a:ea typeface="Noto Sans CJK JP"/>
+                <a:cs typeface="Noto Sans"/>
+              </a:rPr>
+              <a:t>annToMaskは多角形やRLEを画像と同じ縦横の二値マスクへ変換する。</a:t>
+            </a:r>
+          </a:p>
+        </p:txBody>
+      </p:sp>
+      <p:sp>
+        <p:nvSpPr>
+          <p:cNvPr id="4" name="Title 3"/>
+          <p:cNvSpPr>
+            <a:spLocks noGrp="1"/>
+          </p:cNvSpPr>
+          <p:nvPr>
+            <p:ph type="title" idx="2"/>
+          </p:nvPr>
+        </p:nvSpPr>
+        <p:spPr>
+          <a:xfrm>
+            <a:off x="75895" y="0"/>
+            <a:ext cx="8115300" cy="480060"/>
+          </a:xfrm>
+        </p:spPr>
+        <p:txBody>
+          <a:bodyPr wrap="square" anchor="ctr" lIns="0" rIns="0" tIns="0" bIns="0"/>
+          <a:lstStyle/>
+          <a:p>
+            <a:pPr algn="l">
+              <a:lnSpc>
+                <a:spcPct val="100000"/>
+              </a:lnSpc>
+              <a:spcBef>
+                <a:spcPts val="0"/>
+              </a:spcBef>
+              <a:spcAft>
+                <a:spcPts val="0"/>
+              </a:spcAft>
+              <a:buNone/>
+              <a:defRPr lang="ja-JP" sz="1400" b="1">
+                <a:solidFill>
+                  <a:srgbClr val="FFFEF8"/>
+                </a:solidFill>
+                <a:latin typeface="Noto Sans"/>
+                <a:ea typeface="Noto Sans CJK JP"/>
+                <a:cs typeface="Noto Sans"/>
+              </a:defRPr>
+            </a:pPr>
+            <a:r>
+              <a:rPr lang="ja-JP" sz="1400" b="1">
+                <a:solidFill>
+                  <a:srgbClr val="FFFEF8"/>
+                </a:solidFill>
+                <a:latin typeface="Noto Sans"/>
+                <a:ea typeface="Noto Sans CJK JP"/>
+                <a:cs typeface="Noto Sans"/>
+              </a:rPr>
+              <a:t>4. COCOの利用動向と画像・注釈の入手方法</a:t>
+            </a:r>
+          </a:p>
+        </p:txBody>
+      </p:sp>
+      <p:sp>
+        <p:nvSpPr>
+          <p:cNvPr id="5" name="sources"/>
+          <p:cNvSpPr txBox="1"/>
+          <p:nvPr/>
+        </p:nvSpPr>
+        <p:spPr>
+          <a:xfrm>
+            <a:off x="502920" y="4828032"/>
+            <a:ext cx="8183879" cy="640080"/>
+          </a:xfrm>
+          <a:prstGeom prst="rect">
+            <a:avLst/>
+          </a:prstGeom>
+          <a:noFill/>
+        </p:spPr>
+        <p:txBody>
+          <a:bodyPr wrap="square" lIns="0" rIns="0" tIns="0" bIns="0">
+            <a:spAutoFit/>
+          </a:bodyPr>
+          <a:lstStyle/>
+          <a:p>
+            <a:pPr>
+              <a:lnSpc>
+                <a:spcPts val="1200"/>
+              </a:lnSpc>
+              <a:spcBef>
+                <a:spcPts val="0"/>
+              </a:spcBef>
+              <a:spcAft>
+                <a:spcPts val="0"/>
+              </a:spcAft>
+              <a:defRPr sz="800" b="0" lang="ja-JP">
+                <a:solidFill>
+                  <a:srgbClr val="626669"/>
+                </a:solidFill>
+                <a:latin typeface="Noto Sans"/>
+                <a:ea typeface="Noto Sans CJK JP"/>
+                <a:cs typeface="Noto Sans"/>
+              </a:defRPr>
+            </a:pPr>
+            <a:r>
+              <a:rPr sz="800" b="0" lang="ja-JP">
+                <a:solidFill>
+                  <a:srgbClr val="626669"/>
+                </a:solidFill>
+                <a:latin typeface="Noto Sans"/>
+                <a:ea typeface="Noto Sans CJK JP"/>
+                <a:cs typeface="Noto Sans"/>
+              </a:rPr>
+              <a:t>[1] </a:t>
+            </a:r>
+            <a:r>
+              <a:rPr sz="800" b="0" lang="ja-JP">
+                <a:solidFill>
+                  <a:srgbClr val="626669"/>
+                </a:solidFill>
+                <a:latin typeface="Noto Sans"/>
+                <a:ea typeface="Noto Sans CJK JP"/>
+                <a:cs typeface="Noto Sans"/>
+                <a:hlinkClick r:id="rId2"/>
+              </a:rPr>
+              <a:t>https://github.com/cocodataset/cocoapi/blob/master/PythonAPI/pycocotools/coco.py</a:t>
             </a:r>
           </a:p>
         </p:txBody>
@@ -31961,7 +32280,7 @@
                 <a:ea typeface="Noto Sans CJK JP"/>
                 <a:cs typeface="Noto Sans"/>
               </a:rPr>
-              <a:t>APIは画像IDから物体注釈とマスクを取り出す</a:t>
+              <a:t>COCOは複数物体の位置と領域を評価する</a:t>
             </a:r>
           </a:p>
         </p:txBody>
@@ -32017,7 +32336,7 @@
                 <a:ea typeface="Noto Sans CJK JP"/>
                 <a:cs typeface="Noto Sans"/>
               </a:rPr>
-              <a:t>COCO.getImgIdsは条件に合う画像IDを返し、loadImgsでファイル名・幅・高さなどを読み込む。</a:t>
+              <a:t>COCOは、物体のカテゴリ・矩形・個体領域を注釈し、日常場面の複数物体認識を評価する。</a:t>
             </a:r>
           </a:p>
           <a:p>
@@ -32052,7 +32371,7 @@
                 <a:ea typeface="Noto Sans CJK JP"/>
                 <a:cs typeface="Noto Sans"/>
               </a:rPr>
-              <a:t>getAnnIdsとloadAnnsで、その画像に対応する物体注釈を取り出す。category_idはカテゴリ表と照合する。</a:t>
+              <a:t>Panoptic分割は背景領域も含め、各画素のカテゴリと領域IDを統合する。</a:t>
             </a:r>
           </a:p>
           <a:p>
@@ -32087,7 +32406,7 @@
                 <a:ea typeface="Noto Sans CJK JP"/>
                 <a:cs typeface="Noto Sans"/>
               </a:rPr>
-              <a:t>annToMaskは多角形やRLEを画像と同じ縦横の二値マスクへ変換する。</a:t>
+              <a:t>検出・個体分割はAP、Panoptic分割はPQで評価する。</a:t>
             </a:r>
           </a:p>
         </p:txBody>
@@ -32142,73 +32461,6 @@
                 <a:cs typeface="Noto Sans"/>
               </a:rPr>
               <a:t>4. COCOの利用動向と画像・注釈の入手方法</a:t>
-            </a:r>
-          </a:p>
-        </p:txBody>
-      </p:sp>
-      <p:sp>
-        <p:nvSpPr>
-          <p:cNvPr id="5" name="sources"/>
-          <p:cNvSpPr txBox="1"/>
-          <p:nvPr/>
-        </p:nvSpPr>
-        <p:spPr>
-          <a:xfrm>
-            <a:off x="502920" y="4828032"/>
-            <a:ext cx="8183879" cy="640080"/>
-          </a:xfrm>
-          <a:prstGeom prst="rect">
-            <a:avLst/>
-          </a:prstGeom>
-          <a:noFill/>
-        </p:spPr>
-        <p:txBody>
-          <a:bodyPr wrap="square" lIns="0" rIns="0" tIns="0" bIns="0">
-            <a:spAutoFit/>
-          </a:bodyPr>
-          <a:lstStyle/>
-          <a:p>
-            <a:pPr>
-              <a:lnSpc>
-                <a:spcPts val="1200"/>
-              </a:lnSpc>
-              <a:spcBef>
-                <a:spcPts val="0"/>
-              </a:spcBef>
-              <a:spcAft>
-                <a:spcPts val="0"/>
-              </a:spcAft>
-              <a:defRPr sz="800" b="0" lang="ja-JP">
-                <a:solidFill>
-                  <a:srgbClr val="626669"/>
-                </a:solidFill>
-                <a:latin typeface="Noto Sans"/>
-                <a:ea typeface="Noto Sans CJK JP"/>
-                <a:cs typeface="Noto Sans"/>
-              </a:defRPr>
-            </a:pPr>
-            <a:r>
-              <a:rPr sz="800" b="0" lang="ja-JP">
-                <a:solidFill>
-                  <a:srgbClr val="626669"/>
-                </a:solidFill>
-                <a:latin typeface="Noto Sans"/>
-                <a:ea typeface="Noto Sans CJK JP"/>
-                <a:cs typeface="Noto Sans"/>
-              </a:rPr>
-              <a:t>[1] </a:t>
-            </a:r>
-            <a:r>
-              <a:rPr sz="800" b="0" lang="ja-JP">
-                <a:solidFill>
-                  <a:srgbClr val="626669"/>
-                </a:solidFill>
-                <a:latin typeface="Noto Sans"/>
-                <a:ea typeface="Noto Sans CJK JP"/>
-                <a:cs typeface="Noto Sans"/>
-                <a:hlinkClick r:id="rId2"/>
-              </a:rPr>
-              <a:t>https://github.com/cocodataset/cocoapi/blob/master/PythonAPI/pycocotools/coco.py</a:t>
             </a:r>
           </a:p>
         </p:txBody>
@@ -32243,15 +32495,15 @@
         </p:nvSpPr>
         <p:spPr>
           <a:xfrm>
-            <a:off x="468172" y="650138"/>
-            <a:ext cx="8206740" cy="616305"/>
-          </a:xfrm>
-        </p:spPr>
-        <p:txBody>
-          <a:bodyPr wrap="none" anchor="t" lIns="0" rIns="0" tIns="0" bIns="0"/>
-          <a:lstStyle/>
-          <a:p>
-            <a:pPr algn="l">
+            <a:off x="548640" y="2441359"/>
+            <a:ext cx="8046720" cy="731520"/>
+          </a:xfrm>
+        </p:spPr>
+        <p:txBody>
+          <a:bodyPr anchor="ctr" wrap="square" lIns="0" rIns="0" tIns="0" bIns="0"/>
+          <a:lstStyle/>
+          <a:p>
+            <a:pPr algn="ctr">
               <a:lnSpc>
                 <a:spcPct val="100000"/>
               </a:lnSpc>
@@ -32261,159 +32513,32 @@
               <a:spcAft>
                 <a:spcPts val="0"/>
               </a:spcAft>
-              <a:buNone/>
-              <a:defRPr lang="ja-JP" sz="2800" b="1">
-                <a:solidFill>
-                  <a:srgbClr val="303437"/>
-                </a:solidFill>
-                <a:latin typeface="Noto Sans"/>
-                <a:ea typeface="Noto Sans CJK JP"/>
-                <a:cs typeface="Noto Sans"/>
-              </a:defRPr>
-            </a:pPr>
-            <a:r>
-              <a:rPr sz="2800" b="1" lang="ja-JP">
-                <a:solidFill>
-                  <a:srgbClr val="303437"/>
-                </a:solidFill>
-                <a:latin typeface="Noto Sans"/>
-                <a:ea typeface="Noto Sans CJK JP"/>
-                <a:cs typeface="Noto Sans"/>
-              </a:rPr>
-              <a:t>COCOは複数物体の位置と領域を評価する</a:t>
-            </a:r>
-          </a:p>
-        </p:txBody>
-      </p:sp>
-      <p:sp>
-        <p:nvSpPr>
-          <p:cNvPr id="3" name="Text Placeholder 2"/>
-          <p:cNvSpPr>
-            <a:spLocks noGrp="1"/>
-          </p:cNvSpPr>
-          <p:nvPr>
-            <p:ph type="body" idx="1"/>
-          </p:nvPr>
-        </p:nvSpPr>
-        <p:spPr>
-          <a:xfrm>
-            <a:off x="594360" y="1417320"/>
-            <a:ext cx="7955279" cy="3200400"/>
-          </a:xfrm>
-        </p:spPr>
-        <p:txBody>
-          <a:bodyPr wrap="square" anchor="t" tIns="91440" bIns="91440"/>
-          <a:lstStyle/>
-          <a:p>
-            <a:pPr algn="l" lvl="0" marL="457200" indent="-355600">
-              <a:lnSpc>
-                <a:spcPct val="115000"/>
-              </a:lnSpc>
-              <a:spcBef>
-                <a:spcPts val="0"/>
-              </a:spcBef>
-              <a:spcAft>
-                <a:spcPts val="1000"/>
-              </a:spcAft>
-              <a:buSzPct val="57826"/>
-              <a:buFont typeface="Noto Sans CJK JP"/>
-              <a:buChar char="●"/>
-              <a:defRPr lang="ja-JP" sz="2300" b="0">
-                <a:solidFill>
-                  <a:srgbClr val="303437"/>
-                </a:solidFill>
-                <a:latin typeface="Noto Sans"/>
-                <a:ea typeface="Noto Sans CJK JP"/>
-                <a:cs typeface="Noto Sans"/>
-              </a:defRPr>
-            </a:pPr>
-            <a:r>
-              <a:rPr sz="2300" b="0" lang="ja-JP">
-                <a:solidFill>
-                  <a:srgbClr val="303437"/>
-                </a:solidFill>
-                <a:latin typeface="Noto Sans"/>
-                <a:ea typeface="Noto Sans CJK JP"/>
-                <a:cs typeface="Noto Sans"/>
-              </a:rPr>
-              <a:t>COCOは、物体のカテゴリ・矩形・個体領域を注釈し、日常場面の複数物体認識を評価する。</a:t>
-            </a:r>
-          </a:p>
-          <a:p>
-            <a:pPr algn="l" lvl="0" marL="457200" indent="-355600">
-              <a:lnSpc>
-                <a:spcPct val="115000"/>
-              </a:lnSpc>
-              <a:spcBef>
-                <a:spcPts val="0"/>
-              </a:spcBef>
-              <a:spcAft>
-                <a:spcPts val="1000"/>
-              </a:spcAft>
-              <a:buSzPct val="57826"/>
-              <a:buFont typeface="Noto Sans CJK JP"/>
-              <a:buChar char="●"/>
-              <a:defRPr lang="ja-JP" sz="2300" b="0">
-                <a:solidFill>
-                  <a:srgbClr val="303437"/>
-                </a:solidFill>
-                <a:latin typeface="Noto Sans"/>
-                <a:ea typeface="Noto Sans CJK JP"/>
-                <a:cs typeface="Noto Sans"/>
-              </a:defRPr>
-            </a:pPr>
-            <a:r>
-              <a:rPr sz="2300" b="0" lang="ja-JP">
-                <a:solidFill>
-                  <a:srgbClr val="303437"/>
-                </a:solidFill>
-                <a:latin typeface="Noto Sans"/>
-                <a:ea typeface="Noto Sans CJK JP"/>
-                <a:cs typeface="Noto Sans"/>
-              </a:rPr>
-              <a:t>Panoptic分割は背景領域も含め、各画素のカテゴリと領域IDを統合する。</a:t>
-            </a:r>
-          </a:p>
-          <a:p>
-            <a:pPr algn="l" lvl="0" marL="457200" indent="-355600">
-              <a:lnSpc>
-                <a:spcPct val="115000"/>
-              </a:lnSpc>
-              <a:spcBef>
-                <a:spcPts val="0"/>
-              </a:spcBef>
-              <a:spcAft>
-                <a:spcPts val="1000"/>
-              </a:spcAft>
-              <a:buSzPct val="57826"/>
-              <a:buFont typeface="Noto Sans CJK JP"/>
-              <a:buChar char="●"/>
-              <a:defRPr lang="ja-JP" sz="2300" b="0">
-                <a:solidFill>
-                  <a:srgbClr val="303437"/>
-                </a:solidFill>
-                <a:latin typeface="Noto Sans"/>
-                <a:ea typeface="Noto Sans CJK JP"/>
-                <a:cs typeface="Noto Sans"/>
-              </a:defRPr>
-            </a:pPr>
-            <a:r>
-              <a:rPr sz="2300" b="0" lang="ja-JP">
-                <a:solidFill>
-                  <a:srgbClr val="303437"/>
-                </a:solidFill>
-                <a:latin typeface="Noto Sans"/>
-                <a:ea typeface="Noto Sans CJK JP"/>
-                <a:cs typeface="Noto Sans"/>
-              </a:rPr>
-              <a:t>検出・個体分割はAP、Panoptic分割はPQで評価する。</a:t>
-            </a:r>
-          </a:p>
-        </p:txBody>
-      </p:sp>
-      <p:sp>
-        <p:nvSpPr>
-          <p:cNvPr id="4" name="Title 3"/>
+              <a:defRPr sz="4800" b="1" lang="ja-JP">
+                <a:solidFill>
+                  <a:srgbClr val="303437"/>
+                </a:solidFill>
+                <a:latin typeface="Noto Sans"/>
+                <a:ea typeface="Noto Sans CJK JP"/>
+                <a:cs typeface="Noto Sans"/>
+              </a:defRPr>
+            </a:pPr>
+            <a:r>
+              <a:rPr sz="3200" b="1" lang="ja-JP">
+                <a:solidFill>
+                  <a:srgbClr val="303437"/>
+                </a:solidFill>
+                <a:latin typeface="Noto Sans"/>
+                <a:ea typeface="Noto Sans CJK JP"/>
+                <a:cs typeface="Noto Sans"/>
+              </a:rPr>
+              <a:t>Appendix</a:t>
+            </a:r>
+          </a:p>
+        </p:txBody>
+      </p:sp>
+      <p:sp>
+        <p:nvSpPr>
+          <p:cNvPr id="3" name="Title 2"/>
           <p:cNvSpPr>
             <a:spLocks noGrp="1"/>
           </p:cNvSpPr>
@@ -32421,14 +32546,9 @@
             <p:ph type="title" idx="2"/>
           </p:nvPr>
         </p:nvSpPr>
-        <p:spPr>
-          <a:xfrm>
-            <a:off x="75895" y="0"/>
-            <a:ext cx="8115300" cy="480060"/>
-          </a:xfrm>
-        </p:spPr>
-        <p:txBody>
-          <a:bodyPr wrap="square" anchor="ctr" lIns="0" rIns="0" tIns="0" bIns="0"/>
+        <p:spPr/>
+        <p:txBody>
+          <a:bodyPr anchor="ctr" tIns="0" bIns="0"/>
           <a:lstStyle/>
           <a:p>
             <a:pPr algn="l">
@@ -32460,7 +32580,7 @@
                 <a:ea typeface="Noto Sans CJK JP"/>
                 <a:cs typeface="Noto Sans"/>
               </a:rPr>
-              <a:t>4. COCOの利用動向と画像・注釈の入手方法</a:t>
+              <a:t>Appendix</a:t>
             </a:r>
           </a:p>
         </p:txBody>
@@ -32495,50 +32615,247 @@
         </p:nvSpPr>
         <p:spPr>
           <a:xfrm>
-            <a:off x="548640" y="2441359"/>
-            <a:ext cx="8046720" cy="731520"/>
-          </a:xfrm>
-        </p:spPr>
-        <p:txBody>
-          <a:bodyPr anchor="ctr" wrap="square" lIns="0" rIns="0" tIns="0" bIns="0"/>
-          <a:lstStyle/>
-          <a:p>
-            <a:pPr algn="ctr">
-              <a:lnSpc>
-                <a:spcPct val="100000"/>
-              </a:lnSpc>
-              <a:spcBef>
-                <a:spcPts val="0"/>
-              </a:spcBef>
-              <a:spcAft>
-                <a:spcPts val="0"/>
-              </a:spcAft>
-              <a:defRPr sz="4800" b="1" lang="ja-JP">
-                <a:solidFill>
-                  <a:srgbClr val="303437"/>
-                </a:solidFill>
-                <a:latin typeface="Noto Sans"/>
-                <a:ea typeface="Noto Sans CJK JP"/>
-                <a:cs typeface="Noto Sans"/>
-              </a:defRPr>
-            </a:pPr>
-            <a:r>
-              <a:rPr sz="3200" b="1" lang="ja-JP">
-                <a:solidFill>
-                  <a:srgbClr val="303437"/>
-                </a:solidFill>
-                <a:latin typeface="Noto Sans"/>
-                <a:ea typeface="Noto Sans CJK JP"/>
-                <a:cs typeface="Noto Sans"/>
-              </a:rPr>
-              <a:t>Appendix</a:t>
-            </a:r>
-          </a:p>
-        </p:txBody>
-      </p:sp>
-      <p:sp>
-        <p:nvSpPr>
-          <p:cNvPr id="3" name="Title 2"/>
+            <a:off x="468172" y="650138"/>
+            <a:ext cx="8206740" cy="616305"/>
+          </a:xfrm>
+        </p:spPr>
+        <p:txBody>
+          <a:bodyPr wrap="square" anchor="t" lIns="0" rIns="0" tIns="0" bIns="0"/>
+          <a:lstStyle/>
+          <a:p>
+            <a:pPr algn="l">
+              <a:lnSpc>
+                <a:spcPct val="115000"/>
+              </a:lnSpc>
+              <a:spcBef>
+                <a:spcPts val="0"/>
+              </a:spcBef>
+              <a:spcAft>
+                <a:spcPts val="0"/>
+              </a:spcAft>
+              <a:buNone/>
+              <a:defRPr lang="ja-JP" sz="2800" b="1">
+                <a:solidFill>
+                  <a:srgbClr val="303437"/>
+                </a:solidFill>
+                <a:latin typeface="Noto Sans"/>
+                <a:ea typeface="Noto Sans CJK JP"/>
+                <a:cs typeface="Noto Sans"/>
+              </a:defRPr>
+            </a:pPr>
+            <a:r>
+              <a:rPr lang="ja-JP" sz="2800" b="1">
+                <a:solidFill>
+                  <a:srgbClr val="303437"/>
+                </a:solidFill>
+                <a:latin typeface="Noto Sans"/>
+                <a:ea typeface="Noto Sans CJK JP"/>
+                <a:cs typeface="Noto Sans"/>
+              </a:rPr>
+              <a:t/>
+            </a:r>
+          </a:p>
+        </p:txBody>
+      </p:sp>
+      <p:sp>
+        <p:nvSpPr>
+          <p:cNvPr id="3" name="Text Placeholder 2"/>
+          <p:cNvSpPr>
+            <a:spLocks noGrp="1"/>
+          </p:cNvSpPr>
+          <p:nvPr>
+            <p:ph type="body" idx="1"/>
+          </p:nvPr>
+        </p:nvSpPr>
+        <p:spPr>
+          <a:xfrm>
+            <a:off x="594360" y="1001897"/>
+            <a:ext cx="8138160" cy="3749039"/>
+          </a:xfrm>
+        </p:spPr>
+        <p:txBody>
+          <a:bodyPr wrap="square" anchor="t" tIns="91440" bIns="91440"/>
+          <a:lstStyle/>
+          <a:p>
+            <a:pPr algn="l" marL="609600" indent="-457200" lvl="0">
+              <a:lnSpc>
+                <a:spcPct val="115000"/>
+              </a:lnSpc>
+              <a:spcBef>
+                <a:spcPts val="0"/>
+              </a:spcBef>
+              <a:spcAft>
+                <a:spcPts val="1600"/>
+              </a:spcAft>
+              <a:buSzPct val="100000"/>
+              <a:buFont typeface="Noto Sans CJK JP"/>
+              <a:buAutoNum type="arabicPeriod"/>
+              <a:defRPr lang="ja-JP" sz="3000" b="1">
+                <a:solidFill>
+                  <a:srgbClr val="303437"/>
+                </a:solidFill>
+                <a:latin typeface="Noto Sans"/>
+                <a:ea typeface="Noto Sans CJK JP"/>
+                <a:cs typeface="Noto Sans"/>
+              </a:defRPr>
+            </a:pPr>
+            <a:r>
+              <a:rPr lang="ja-JP" sz="3000" b="1">
+                <a:solidFill>
+                  <a:srgbClr val="303437"/>
+                </a:solidFill>
+                <a:latin typeface="Noto Sans"/>
+                <a:ea typeface="Noto Sans CJK JP"/>
+                <a:cs typeface="Noto Sans"/>
+              </a:rPr>
+              <a:t>開発者の研究と領域認識の評価仕様</a:t>
+            </a:r>
+          </a:p>
+          <a:p>
+            <a:pPr algn="l" marL="609600" indent="-457200" lvl="0">
+              <a:lnSpc>
+                <a:spcPct val="115000"/>
+              </a:lnSpc>
+              <a:spcBef>
+                <a:spcPts val="0"/>
+              </a:spcBef>
+              <a:spcAft>
+                <a:spcPts val="1600"/>
+              </a:spcAft>
+              <a:buSzPct val="100000"/>
+              <a:buFont typeface="Noto Sans CJK JP"/>
+              <a:buAutoNum type="arabicPeriod"/>
+              <a:defRPr lang="ja-JP" sz="2900" b="1">
+                <a:solidFill>
+                  <a:srgbClr val="303437"/>
+                </a:solidFill>
+                <a:latin typeface="Noto Sans"/>
+                <a:ea typeface="Noto Sans CJK JP"/>
+                <a:cs typeface="Noto Sans"/>
+              </a:defRPr>
+            </a:pPr>
+            <a:r>
+              <a:rPr lang="ja-JP" sz="2900" b="1">
+                <a:solidFill>
+                  <a:srgbClr val="303437"/>
+                </a:solidFill>
+                <a:latin typeface="Noto Sans"/>
+                <a:ea typeface="Noto Sans CJK JP"/>
+                <a:cs typeface="Noto Sans"/>
+              </a:rPr>
+              <a:t>128画像の部分集合における注釈数の分布</a:t>
+            </a:r>
+          </a:p>
+          <a:p>
+            <a:pPr algn="l" marL="609600" indent="-457200" lvl="0">
+              <a:lnSpc>
+                <a:spcPct val="115000"/>
+              </a:lnSpc>
+              <a:spcBef>
+                <a:spcPts val="0"/>
+              </a:spcBef>
+              <a:spcAft>
+                <a:spcPts val="1600"/>
+              </a:spcAft>
+              <a:buSzPct val="100000"/>
+              <a:buFont typeface="Noto Sans CJK JP"/>
+              <a:buAutoNum type="arabicPeriod"/>
+              <a:defRPr lang="ja-JP" sz="3000" b="1">
+                <a:solidFill>
+                  <a:srgbClr val="303437"/>
+                </a:solidFill>
+                <a:latin typeface="Noto Sans"/>
+                <a:ea typeface="Noto Sans CJK JP"/>
+                <a:cs typeface="Noto Sans"/>
+              </a:defRPr>
+            </a:pPr>
+            <a:r>
+              <a:rPr lang="ja-JP" sz="3000" b="1">
+                <a:solidFill>
+                  <a:srgbClr val="303437"/>
+                </a:solidFill>
+                <a:latin typeface="Noto Sans"/>
+                <a:ea typeface="Noto Sans CJK JP"/>
+                <a:cs typeface="Noto Sans"/>
+              </a:rPr>
+              <a:t>画像と物体領域の追加例</a:t>
+            </a:r>
+          </a:p>
+          <a:p>
+            <a:pPr algn="l" marL="609600" indent="-457200" lvl="0">
+              <a:lnSpc>
+                <a:spcPct val="115000"/>
+              </a:lnSpc>
+              <a:spcBef>
+                <a:spcPts val="0"/>
+              </a:spcBef>
+              <a:spcAft>
+                <a:spcPts val="1600"/>
+              </a:spcAft>
+              <a:buSzPct val="100000"/>
+              <a:buFont typeface="Noto Sans CJK JP"/>
+              <a:buAutoNum type="arabicPeriod"/>
+              <a:defRPr lang="ja-JP" sz="2850" b="1">
+                <a:solidFill>
+                  <a:srgbClr val="303437"/>
+                </a:solidFill>
+                <a:latin typeface="Noto Sans"/>
+                <a:ea typeface="Noto Sans CJK JP"/>
+                <a:cs typeface="Noto Sans"/>
+              </a:defRPr>
+            </a:pPr>
+            <a:r>
+              <a:rPr lang="ja-JP" sz="2850" b="1">
+                <a:solidFill>
+                  <a:srgbClr val="303437"/>
+                </a:solidFill>
+                <a:latin typeface="Noto Sans"/>
+                <a:ea typeface="Noto Sans CJK JP"/>
+                <a:cs typeface="Noto Sans"/>
+              </a:rPr>
+              <a:t>全80物体カテゴリと画像・注釈の利用条件</a:t>
+            </a:r>
+          </a:p>
+          <a:p>
+            <a:pPr algn="l" marL="609600" indent="-457200" lvl="0">
+              <a:lnSpc>
+                <a:spcPct val="115000"/>
+              </a:lnSpc>
+              <a:spcBef>
+                <a:spcPts val="0"/>
+              </a:spcBef>
+              <a:spcAft>
+                <a:spcPts val="1600"/>
+              </a:spcAft>
+              <a:buSzPct val="100000"/>
+              <a:buFont typeface="Noto Sans CJK JP"/>
+              <a:buAutoNum type="arabicPeriod"/>
+              <a:defRPr lang="ja-JP" sz="3000" b="1">
+                <a:solidFill>
+                  <a:srgbClr val="303437"/>
+                </a:solidFill>
+                <a:latin typeface="Noto Sans"/>
+                <a:ea typeface="Noto Sans CJK JP"/>
+                <a:cs typeface="Noto Sans"/>
+              </a:defRPr>
+            </a:pPr>
+            <a:r>
+              <a:rPr lang="ja-JP" sz="3000" b="1">
+                <a:solidFill>
+                  <a:srgbClr val="303437"/>
+                </a:solidFill>
+                <a:latin typeface="Noto Sans"/>
+                <a:ea typeface="Noto Sans CJK JP"/>
+                <a:cs typeface="Noto Sans"/>
+              </a:rPr>
+              <a:t>物体検出・領域分割の関連文献</a:t>
+            </a:r>
+          </a:p>
+        </p:txBody>
+      </p:sp>
+      <p:sp>
+        <p:nvSpPr>
+          <p:cNvPr id="4" name="Title 3"/>
           <p:cNvSpPr>
             <a:spLocks noGrp="1"/>
           </p:cNvSpPr>
@@ -32546,9 +32863,14 @@
             <p:ph type="title" idx="2"/>
           </p:nvPr>
         </p:nvSpPr>
-        <p:spPr/>
-        <p:txBody>
-          <a:bodyPr anchor="ctr" tIns="0" bIns="0"/>
+        <p:spPr>
+          <a:xfrm>
+            <a:off x="75895" y="0"/>
+            <a:ext cx="8115300" cy="480060"/>
+          </a:xfrm>
+        </p:spPr>
+        <p:txBody>
+          <a:bodyPr wrap="square" anchor="ctr" lIns="0" rIns="0" tIns="0" bIns="0"/>
           <a:lstStyle/>
           <a:p>
             <a:pPr algn="l">
@@ -32580,7 +32902,7 @@
                 <a:ea typeface="Noto Sans CJK JP"/>
                 <a:cs typeface="Noto Sans"/>
               </a:rPr>
-              <a:t>Appendix</a:t>
+              <a:t>Appendix: 目次</a:t>
             </a:r>
           </a:p>
         </p:txBody>
@@ -32620,12 +32942,12 @@
           </a:xfrm>
         </p:spPr>
         <p:txBody>
-          <a:bodyPr wrap="square" anchor="t" lIns="0" rIns="0" tIns="0" bIns="0"/>
+          <a:bodyPr wrap="none" anchor="t" lIns="0" rIns="0" tIns="0" bIns="0"/>
           <a:lstStyle/>
           <a:p>
             <a:pPr algn="l">
               <a:lnSpc>
-                <a:spcPct val="115000"/>
+                <a:spcPct val="100000"/>
               </a:lnSpc>
               <a:spcBef>
                 <a:spcPts val="0"/>
@@ -32644,15 +32966,15 @@
               </a:defRPr>
             </a:pPr>
             <a:r>
-              <a:rPr lang="ja-JP" sz="2800" b="1">
-                <a:solidFill>
-                  <a:srgbClr val="303437"/>
-                </a:solidFill>
-                <a:latin typeface="Noto Sans"/>
-                <a:ea typeface="Noto Sans CJK JP"/>
-                <a:cs typeface="Noto Sans"/>
-              </a:rPr>
-              <a:t/>
+              <a:rPr sz="2800" b="1" lang="ja-JP">
+                <a:solidFill>
+                  <a:srgbClr val="303437"/>
+                </a:solidFill>
+                <a:latin typeface="Noto Sans"/>
+                <a:ea typeface="Noto Sans CJK JP"/>
+                <a:cs typeface="Noto Sans"/>
+              </a:rPr>
+              <a:t>COCOの著者と研究の位置付け</a:t>
             </a:r>
           </a:p>
         </p:txBody>
@@ -32669,15 +32991,15 @@
         </p:nvSpPr>
         <p:spPr>
           <a:xfrm>
-            <a:off x="594360" y="1001897"/>
-            <a:ext cx="8138160" cy="3749039"/>
+            <a:off x="594360" y="1304015"/>
+            <a:ext cx="7955279" cy="3017520"/>
           </a:xfrm>
         </p:spPr>
         <p:txBody>
           <a:bodyPr wrap="square" anchor="t" tIns="91440" bIns="91440"/>
           <a:lstStyle/>
           <a:p>
-            <a:pPr algn="l" marL="609600" indent="-457200" lvl="0">
+            <a:pPr algn="l" lvl="0" marL="457200" indent="-355600">
               <a:lnSpc>
                 <a:spcPct val="115000"/>
               </a:lnSpc>
@@ -32685,34 +33007,34 @@
                 <a:spcPts val="0"/>
               </a:spcBef>
               <a:spcAft>
-                <a:spcPts val="1600"/>
-              </a:spcAft>
-              <a:buSzPct val="100000"/>
+                <a:spcPts val="800"/>
+              </a:spcAft>
+              <a:buSzPct val="57826"/>
               <a:buFont typeface="Noto Sans CJK JP"/>
-              <a:buAutoNum type="arabicPeriod"/>
-              <a:defRPr lang="ja-JP" sz="3000" b="1">
-                <a:solidFill>
-                  <a:srgbClr val="303437"/>
-                </a:solidFill>
-                <a:latin typeface="Noto Sans"/>
-                <a:ea typeface="Noto Sans CJK JP"/>
-                <a:cs typeface="Noto Sans"/>
-              </a:defRPr>
-            </a:pPr>
-            <a:r>
-              <a:rPr lang="ja-JP" sz="3000" b="1">
-                <a:solidFill>
-                  <a:srgbClr val="303437"/>
-                </a:solidFill>
-                <a:latin typeface="Noto Sans"/>
-                <a:ea typeface="Noto Sans CJK JP"/>
-                <a:cs typeface="Noto Sans"/>
-              </a:rPr>
-              <a:t>開発者の研究と領域認識の評価仕様</a:t>
-            </a:r>
-          </a:p>
-          <a:p>
-            <a:pPr algn="l" marL="609600" indent="-457200" lvl="0">
+              <a:buChar char="●"/>
+              <a:defRPr lang="ja-JP" sz="2300" b="0">
+                <a:solidFill>
+                  <a:srgbClr val="303437"/>
+                </a:solidFill>
+                <a:latin typeface="Noto Sans"/>
+                <a:ea typeface="Noto Sans CJK JP"/>
+                <a:cs typeface="Noto Sans"/>
+              </a:defRPr>
+            </a:pPr>
+            <a:r>
+              <a:rPr lang="ja-JP" sz="2300" b="0">
+                <a:solidFill>
+                  <a:srgbClr val="303437"/>
+                </a:solidFill>
+                <a:latin typeface="Noto Sans"/>
+                <a:ea typeface="Noto Sans CJK JP"/>
+                <a:cs typeface="Noto Sans"/>
+              </a:rPr>
+              <a:t>第一著者Tsung-Yi Linは、物体認識・検出の研究者。後のFeature Pyramid Networksでも第一著者を務めた。</a:t>
+            </a:r>
+          </a:p>
+          <a:p>
+            <a:pPr algn="l" lvl="0" marL="457200" indent="-355600">
               <a:lnSpc>
                 <a:spcPct val="115000"/>
               </a:lnSpc>
@@ -32720,34 +33042,34 @@
                 <a:spcPts val="0"/>
               </a:spcBef>
               <a:spcAft>
-                <a:spcPts val="1600"/>
-              </a:spcAft>
-              <a:buSzPct val="100000"/>
+                <a:spcPts val="800"/>
+              </a:spcAft>
+              <a:buSzPct val="57826"/>
               <a:buFont typeface="Noto Sans CJK JP"/>
-              <a:buAutoNum type="arabicPeriod"/>
-              <a:defRPr lang="ja-JP" sz="2900" b="1">
-                <a:solidFill>
-                  <a:srgbClr val="303437"/>
-                </a:solidFill>
-                <a:latin typeface="Noto Sans"/>
-                <a:ea typeface="Noto Sans CJK JP"/>
-                <a:cs typeface="Noto Sans"/>
-              </a:defRPr>
-            </a:pPr>
-            <a:r>
-              <a:rPr lang="ja-JP" sz="2900" b="1">
-                <a:solidFill>
-                  <a:srgbClr val="303437"/>
-                </a:solidFill>
-                <a:latin typeface="Noto Sans"/>
-                <a:ea typeface="Noto Sans CJK JP"/>
-                <a:cs typeface="Noto Sans"/>
-              </a:rPr>
-              <a:t>128画像の部分集合における注釈数の分布</a:t>
-            </a:r>
-          </a:p>
-          <a:p>
-            <a:pPr algn="l" marL="609600" indent="-457200" lvl="0">
+              <a:buChar char="●"/>
+              <a:defRPr lang="ja-JP" sz="2300" b="0">
+                <a:solidFill>
+                  <a:srgbClr val="303437"/>
+                </a:solidFill>
+                <a:latin typeface="Noto Sans"/>
+                <a:ea typeface="Noto Sans CJK JP"/>
+                <a:cs typeface="Noto Sans"/>
+              </a:defRPr>
+            </a:pPr>
+            <a:r>
+              <a:rPr lang="ja-JP" sz="2300" b="0">
+                <a:solidFill>
+                  <a:srgbClr val="303437"/>
+                </a:solidFill>
+                <a:latin typeface="Noto Sans"/>
+                <a:ea typeface="Noto Sans CJK JP"/>
+                <a:cs typeface="Noto Sans"/>
+              </a:rPr>
+              <a:t>最終著者C. Lawrence Zitnickは、視覚認識や画像理解の研究者。</a:t>
+            </a:r>
+          </a:p>
+          <a:p>
+            <a:pPr algn="l" lvl="0" marL="457200" indent="-355600">
               <a:lnSpc>
                 <a:spcPct val="115000"/>
               </a:lnSpc>
@@ -32755,100 +33077,30 @@
                 <a:spcPts val="0"/>
               </a:spcBef>
               <a:spcAft>
-                <a:spcPts val="1600"/>
-              </a:spcAft>
-              <a:buSzPct val="100000"/>
+                <a:spcPts val="800"/>
+              </a:spcAft>
+              <a:buSzPct val="57826"/>
               <a:buFont typeface="Noto Sans CJK JP"/>
-              <a:buAutoNum type="arabicPeriod"/>
-              <a:defRPr lang="ja-JP" sz="3000" b="1">
-                <a:solidFill>
-                  <a:srgbClr val="303437"/>
-                </a:solidFill>
-                <a:latin typeface="Noto Sans"/>
-                <a:ea typeface="Noto Sans CJK JP"/>
-                <a:cs typeface="Noto Sans"/>
-              </a:defRPr>
-            </a:pPr>
-            <a:r>
-              <a:rPr lang="ja-JP" sz="3000" b="1">
-                <a:solidFill>
-                  <a:srgbClr val="303437"/>
-                </a:solidFill>
-                <a:latin typeface="Noto Sans"/>
-                <a:ea typeface="Noto Sans CJK JP"/>
-                <a:cs typeface="Noto Sans"/>
-              </a:rPr>
-              <a:t>画像と物体領域の追加例</a:t>
-            </a:r>
-          </a:p>
-          <a:p>
-            <a:pPr algn="l" marL="609600" indent="-457200" lvl="0">
-              <a:lnSpc>
-                <a:spcPct val="115000"/>
-              </a:lnSpc>
-              <a:spcBef>
-                <a:spcPts val="0"/>
-              </a:spcBef>
-              <a:spcAft>
-                <a:spcPts val="1600"/>
-              </a:spcAft>
-              <a:buSzPct val="100000"/>
-              <a:buFont typeface="Noto Sans CJK JP"/>
-              <a:buAutoNum type="arabicPeriod"/>
-              <a:defRPr lang="ja-JP" sz="2850" b="1">
-                <a:solidFill>
-                  <a:srgbClr val="303437"/>
-                </a:solidFill>
-                <a:latin typeface="Noto Sans"/>
-                <a:ea typeface="Noto Sans CJK JP"/>
-                <a:cs typeface="Noto Sans"/>
-              </a:defRPr>
-            </a:pPr>
-            <a:r>
-              <a:rPr lang="ja-JP" sz="2850" b="1">
-                <a:solidFill>
-                  <a:srgbClr val="303437"/>
-                </a:solidFill>
-                <a:latin typeface="Noto Sans"/>
-                <a:ea typeface="Noto Sans CJK JP"/>
-                <a:cs typeface="Noto Sans"/>
-              </a:rPr>
-              <a:t>全80物体カテゴリと画像・注釈の利用条件</a:t>
-            </a:r>
-          </a:p>
-          <a:p>
-            <a:pPr algn="l" marL="609600" indent="-457200" lvl="0">
-              <a:lnSpc>
-                <a:spcPct val="115000"/>
-              </a:lnSpc>
-              <a:spcBef>
-                <a:spcPts val="0"/>
-              </a:spcBef>
-              <a:spcAft>
-                <a:spcPts val="1600"/>
-              </a:spcAft>
-              <a:buSzPct val="100000"/>
-              <a:buFont typeface="Noto Sans CJK JP"/>
-              <a:buAutoNum type="arabicPeriod"/>
-              <a:defRPr lang="ja-JP" sz="3000" b="1">
-                <a:solidFill>
-                  <a:srgbClr val="303437"/>
-                </a:solidFill>
-                <a:latin typeface="Noto Sans"/>
-                <a:ea typeface="Noto Sans CJK JP"/>
-                <a:cs typeface="Noto Sans"/>
-              </a:defRPr>
-            </a:pPr>
-            <a:r>
-              <a:rPr lang="ja-JP" sz="3000" b="1">
-                <a:solidFill>
-                  <a:srgbClr val="303437"/>
-                </a:solidFill>
-                <a:latin typeface="Noto Sans"/>
-                <a:ea typeface="Noto Sans CJK JP"/>
-                <a:cs typeface="Noto Sans"/>
-              </a:rPr>
-              <a:t>物体検出・領域分割の関連文献</a:t>
+              <a:buChar char="●"/>
+              <a:defRPr lang="ja-JP" sz="2300" b="0">
+                <a:solidFill>
+                  <a:srgbClr val="303437"/>
+                </a:solidFill>
+                <a:latin typeface="Noto Sans"/>
+                <a:ea typeface="Noto Sans CJK JP"/>
+                <a:cs typeface="Noto Sans"/>
+              </a:defRPr>
+            </a:pPr>
+            <a:r>
+              <a:rPr lang="ja-JP" sz="2300" b="0">
+                <a:solidFill>
+                  <a:srgbClr val="303437"/>
+                </a:solidFill>
+                <a:latin typeface="Noto Sans"/>
+                <a:ea typeface="Noto Sans CJK JP"/>
+                <a:cs typeface="Noto Sans"/>
+              </a:rPr>
+              <a:t>COCOの研究はECCV 2014で発表され、日常場面の文脈と物体領域の注釈をデータ設計の中心に据えた [1]。</a:t>
             </a:r>
           </a:p>
         </p:txBody>
@@ -32902,7 +33154,182 @@
                 <a:ea typeface="Noto Sans CJK JP"/>
                 <a:cs typeface="Noto Sans"/>
               </a:rPr>
-              <a:t>Appendix: 目次</a:t>
+              <a:t>Appendix 1. 開発者の研究と領域認識の評価仕様</a:t>
+            </a:r>
+          </a:p>
+        </p:txBody>
+      </p:sp>
+      <p:sp>
+        <p:nvSpPr>
+          <p:cNvPr id="5" name="TextBox 4"/>
+          <p:cNvSpPr txBox="1"/>
+          <p:nvPr/>
+        </p:nvSpPr>
+        <p:spPr>
+          <a:xfrm>
+            <a:off x="502920" y="4521200"/>
+            <a:ext cx="8183879" cy="177800"/>
+          </a:xfrm>
+          <a:prstGeom prst="rect">
+            <a:avLst/>
+          </a:prstGeom>
+          <a:noFill/>
+        </p:spPr>
+        <p:txBody>
+          <a:bodyPr wrap="square" lIns="0" rIns="0" tIns="0" bIns="0">
+            <a:spAutoFit/>
+          </a:bodyPr>
+          <a:lstStyle/>
+          <a:p>
+            <a:pPr algn="l">
+              <a:lnSpc>
+                <a:spcPts val="1400"/>
+              </a:lnSpc>
+              <a:spcBef>
+                <a:spcPts val="0"/>
+              </a:spcBef>
+              <a:spcAft>
+                <a:spcPts val="0"/>
+              </a:spcAft>
+            </a:pPr>
+            <a:r>
+              <a:rPr sz="800" b="0" lang="ja-JP">
+                <a:solidFill>
+                  <a:srgbClr val="626669"/>
+                </a:solidFill>
+                <a:latin typeface="Noto Sans"/>
+                <a:ea typeface="Noto Sans CJK JP"/>
+                <a:cs typeface="Noto Sans"/>
+              </a:rPr>
+              <a:t/>
+            </a:r>
+            <a:r>
+              <a:rPr sz="800" lang="ja-JP">
+                <a:solidFill>
+                  <a:srgbClr val="626669"/>
+                </a:solidFill>
+                <a:latin typeface="Noto Sans"/>
+                <a:ea typeface="Noto Sans CJK JP"/>
+                <a:cs typeface="Noto Sans"/>
+              </a:rPr>
+              <a:t>[1] Tsung-Yi Lin et al. (2014). European Conference on Computer Vision (ECCV), pp. 740–755. Microsoft COCO: Common Objects in Context.</a:t>
+            </a:r>
+          </a:p>
+        </p:txBody>
+      </p:sp>
+      <p:sp>
+        <p:nvSpPr>
+          <p:cNvPr id="6" name="TextBox 5"/>
+          <p:cNvSpPr txBox="1"/>
+          <p:nvPr/>
+        </p:nvSpPr>
+        <p:spPr>
+          <a:xfrm>
+            <a:off x="7124851" y="4539526"/>
+            <a:ext cx="1561948" cy="177800"/>
+          </a:xfrm>
+          <a:prstGeom prst="rect">
+            <a:avLst/>
+          </a:prstGeom>
+          <a:noFill/>
+        </p:spPr>
+        <p:txBody>
+          <a:bodyPr wrap="none" lIns="0" rIns="0" tIns="0" bIns="0">
+            <a:spAutoFit/>
+          </a:bodyPr>
+          <a:lstStyle/>
+          <a:p>
+            <a:pPr algn="l">
+              <a:lnSpc>
+                <a:spcPts val="1400"/>
+              </a:lnSpc>
+              <a:spcBef>
+                <a:spcPts val="0"/>
+              </a:spcBef>
+              <a:spcAft>
+                <a:spcPts val="0"/>
+              </a:spcAft>
+            </a:pPr>
+            <a:r>
+              <a:rPr sz="800" b="0" lang="ja-JP">
+                <a:solidFill>
+                  <a:srgbClr val="626669"/>
+                </a:solidFill>
+                <a:latin typeface="Noto Sans"/>
+                <a:ea typeface="Noto Sans CJK JP"/>
+                <a:cs typeface="Noto Sans"/>
+              </a:rPr>
+              <a:t/>
+            </a:r>
+            <a:r>
+              <a:rPr sz="800" lang="ja-JP">
+                <a:solidFill>
+                  <a:srgbClr val="626669"/>
+                </a:solidFill>
+                <a:latin typeface="Noto Sans"/>
+                <a:ea typeface="Noto Sans CJK JP"/>
+                <a:cs typeface="Noto Sans"/>
+                <a:hlinkClick r:id="rId2"/>
+              </a:rPr>
+              <a:t>https://arxiv.org/abs/1405.0312</a:t>
+            </a:r>
+          </a:p>
+        </p:txBody>
+      </p:sp>
+      <p:sp>
+        <p:nvSpPr>
+          <p:cNvPr id="7" name="TextBox 6"/>
+          <p:cNvSpPr txBox="1"/>
+          <p:nvPr/>
+        </p:nvSpPr>
+        <p:spPr>
+          <a:xfrm>
+            <a:off x="502920" y="4876800"/>
+            <a:ext cx="8183879" cy="177800"/>
+          </a:xfrm>
+          <a:prstGeom prst="rect">
+            <a:avLst/>
+          </a:prstGeom>
+          <a:noFill/>
+        </p:spPr>
+        <p:txBody>
+          <a:bodyPr wrap="square" lIns="0" rIns="0" tIns="0" bIns="0">
+            <a:spAutoFit/>
+          </a:bodyPr>
+          <a:lstStyle/>
+          <a:p>
+            <a:pPr algn="l">
+              <a:lnSpc>
+                <a:spcPts val="1400"/>
+              </a:lnSpc>
+              <a:spcBef>
+                <a:spcPts val="0"/>
+              </a:spcBef>
+              <a:spcAft>
+                <a:spcPts val="0"/>
+              </a:spcAft>
+            </a:pPr>
+            <a:r>
+              <a:rPr sz="800" b="0" lang="ja-JP">
+                <a:solidFill>
+                  <a:srgbClr val="626669"/>
+                </a:solidFill>
+                <a:latin typeface="Noto Sans"/>
+                <a:ea typeface="Noto Sans CJK JP"/>
+                <a:cs typeface="Noto Sans"/>
+              </a:rPr>
+              <a:t/>
+            </a:r>
+            <a:r>
+              <a:rPr sz="800" lang="ja-JP">
+                <a:solidFill>
+                  <a:srgbClr val="626669"/>
+                </a:solidFill>
+                <a:latin typeface="Noto Sans"/>
+                <a:ea typeface="Noto Sans CJK JP"/>
+                <a:cs typeface="Noto Sans"/>
+              </a:rPr>
+              <a:t>Tsung-Yi Lin et al., Microsoft COCO: Common Objects in Context, ECCV 2014, pp. 740–755.</a:t>
             </a:r>
           </a:p>
         </p:txBody>
@@ -32916,433 +33343,6 @@
 </file>
 
 <file path=ppt/slides/slide57.xml><?xml version="1.0" encoding="utf-8"?>
-<p:sld xmlns:a="http://schemas.openxmlformats.org/drawingml/2006/main" xmlns:p="http://schemas.openxmlformats.org/presentationml/2006/main" xmlns:r="http://schemas.openxmlformats.org/officeDocument/2006/relationships">
-  <p:cSld>
-    <p:spTree>
-      <p:nvGrpSpPr>
-        <p:cNvPr id="1" name=""/>
-        <p:cNvGrpSpPr/>
-        <p:nvPr/>
-      </p:nvGrpSpPr>
-      <p:grpSpPr/>
-      <p:sp>
-        <p:nvSpPr>
-          <p:cNvPr id="2" name="Title 1"/>
-          <p:cNvSpPr>
-            <a:spLocks noGrp="1"/>
-          </p:cNvSpPr>
-          <p:nvPr>
-            <p:ph type="title"/>
-          </p:nvPr>
-        </p:nvSpPr>
-        <p:spPr>
-          <a:xfrm>
-            <a:off x="468172" y="650138"/>
-            <a:ext cx="8206740" cy="616305"/>
-          </a:xfrm>
-        </p:spPr>
-        <p:txBody>
-          <a:bodyPr wrap="none" anchor="t" lIns="0" rIns="0" tIns="0" bIns="0"/>
-          <a:lstStyle/>
-          <a:p>
-            <a:pPr algn="l">
-              <a:lnSpc>
-                <a:spcPct val="100000"/>
-              </a:lnSpc>
-              <a:spcBef>
-                <a:spcPts val="0"/>
-              </a:spcBef>
-              <a:spcAft>
-                <a:spcPts val="0"/>
-              </a:spcAft>
-              <a:buNone/>
-              <a:defRPr lang="ja-JP" sz="2800" b="1">
-                <a:solidFill>
-                  <a:srgbClr val="303437"/>
-                </a:solidFill>
-                <a:latin typeface="Noto Sans"/>
-                <a:ea typeface="Noto Sans CJK JP"/>
-                <a:cs typeface="Noto Sans"/>
-              </a:defRPr>
-            </a:pPr>
-            <a:r>
-              <a:rPr sz="2800" b="1" lang="ja-JP">
-                <a:solidFill>
-                  <a:srgbClr val="303437"/>
-                </a:solidFill>
-                <a:latin typeface="Noto Sans"/>
-                <a:ea typeface="Noto Sans CJK JP"/>
-                <a:cs typeface="Noto Sans"/>
-              </a:rPr>
-              <a:t>原著の著者と研究の位置付け</a:t>
-            </a:r>
-          </a:p>
-        </p:txBody>
-      </p:sp>
-      <p:sp>
-        <p:nvSpPr>
-          <p:cNvPr id="3" name="Text Placeholder 2"/>
-          <p:cNvSpPr>
-            <a:spLocks noGrp="1"/>
-          </p:cNvSpPr>
-          <p:nvPr>
-            <p:ph type="body" idx="1"/>
-          </p:nvPr>
-        </p:nvSpPr>
-        <p:spPr>
-          <a:xfrm>
-            <a:off x="594360" y="1304015"/>
-            <a:ext cx="7955279" cy="3017520"/>
-          </a:xfrm>
-        </p:spPr>
-        <p:txBody>
-          <a:bodyPr wrap="square" anchor="t" tIns="91440" bIns="91440"/>
-          <a:lstStyle/>
-          <a:p>
-            <a:pPr algn="l" lvl="0" marL="457200" indent="-355600">
-              <a:lnSpc>
-                <a:spcPct val="115000"/>
-              </a:lnSpc>
-              <a:spcBef>
-                <a:spcPts val="0"/>
-              </a:spcBef>
-              <a:spcAft>
-                <a:spcPts val="800"/>
-              </a:spcAft>
-              <a:buSzPct val="57826"/>
-              <a:buFont typeface="Noto Sans CJK JP"/>
-              <a:buChar char="●"/>
-              <a:defRPr lang="ja-JP" sz="2300" b="0">
-                <a:solidFill>
-                  <a:srgbClr val="303437"/>
-                </a:solidFill>
-                <a:latin typeface="Noto Sans"/>
-                <a:ea typeface="Noto Sans CJK JP"/>
-                <a:cs typeface="Noto Sans"/>
-              </a:defRPr>
-            </a:pPr>
-            <a:r>
-              <a:rPr lang="ja-JP" sz="2300" b="0">
-                <a:solidFill>
-                  <a:srgbClr val="303437"/>
-                </a:solidFill>
-                <a:latin typeface="Noto Sans"/>
-                <a:ea typeface="Noto Sans CJK JP"/>
-                <a:cs typeface="Noto Sans"/>
-              </a:rPr>
-              <a:t>第一著者Tsung-Yi Linは、物体認識・検出の研究者。後のFeature Pyramid Networksでも第一著者を務めた。</a:t>
-            </a:r>
-          </a:p>
-          <a:p>
-            <a:pPr algn="l" lvl="0" marL="457200" indent="-355600">
-              <a:lnSpc>
-                <a:spcPct val="115000"/>
-              </a:lnSpc>
-              <a:spcBef>
-                <a:spcPts val="0"/>
-              </a:spcBef>
-              <a:spcAft>
-                <a:spcPts val="800"/>
-              </a:spcAft>
-              <a:buSzPct val="57826"/>
-              <a:buFont typeface="Noto Sans CJK JP"/>
-              <a:buChar char="●"/>
-              <a:defRPr lang="ja-JP" sz="2300" b="0">
-                <a:solidFill>
-                  <a:srgbClr val="303437"/>
-                </a:solidFill>
-                <a:latin typeface="Noto Sans"/>
-                <a:ea typeface="Noto Sans CJK JP"/>
-                <a:cs typeface="Noto Sans"/>
-              </a:defRPr>
-            </a:pPr>
-            <a:r>
-              <a:rPr lang="ja-JP" sz="2300" b="0">
-                <a:solidFill>
-                  <a:srgbClr val="303437"/>
-                </a:solidFill>
-                <a:latin typeface="Noto Sans"/>
-                <a:ea typeface="Noto Sans CJK JP"/>
-                <a:cs typeface="Noto Sans"/>
-              </a:rPr>
-              <a:t>最終著者C. Lawrence Zitnickは、視覚認識や画像理解の研究者。</a:t>
-            </a:r>
-          </a:p>
-          <a:p>
-            <a:pPr algn="l" lvl="0" marL="457200" indent="-355600">
-              <a:lnSpc>
-                <a:spcPct val="115000"/>
-              </a:lnSpc>
-              <a:spcBef>
-                <a:spcPts val="0"/>
-              </a:spcBef>
-              <a:spcAft>
-                <a:spcPts val="800"/>
-              </a:spcAft>
-              <a:buSzPct val="57826"/>
-              <a:buFont typeface="Noto Sans CJK JP"/>
-              <a:buChar char="●"/>
-              <a:defRPr lang="ja-JP" sz="2300" b="0">
-                <a:solidFill>
-                  <a:srgbClr val="303437"/>
-                </a:solidFill>
-                <a:latin typeface="Noto Sans"/>
-                <a:ea typeface="Noto Sans CJK JP"/>
-                <a:cs typeface="Noto Sans"/>
-              </a:defRPr>
-            </a:pPr>
-            <a:r>
-              <a:rPr lang="ja-JP" sz="2300" b="0">
-                <a:solidFill>
-                  <a:srgbClr val="303437"/>
-                </a:solidFill>
-                <a:latin typeface="Noto Sans"/>
-                <a:ea typeface="Noto Sans CJK JP"/>
-                <a:cs typeface="Noto Sans"/>
-              </a:rPr>
-              <a:t>原著はECCV 2014で発表され、日常場面の文脈と物体領域の注釈をデータ設計の中心に据えた [1]。</a:t>
-            </a:r>
-          </a:p>
-        </p:txBody>
-      </p:sp>
-      <p:sp>
-        <p:nvSpPr>
-          <p:cNvPr id="4" name="Title 3"/>
-          <p:cNvSpPr>
-            <a:spLocks noGrp="1"/>
-          </p:cNvSpPr>
-          <p:nvPr>
-            <p:ph type="title" idx="2"/>
-          </p:nvPr>
-        </p:nvSpPr>
-        <p:spPr>
-          <a:xfrm>
-            <a:off x="75895" y="0"/>
-            <a:ext cx="8115300" cy="480060"/>
-          </a:xfrm>
-        </p:spPr>
-        <p:txBody>
-          <a:bodyPr wrap="square" anchor="ctr" lIns="0" rIns="0" tIns="0" bIns="0"/>
-          <a:lstStyle/>
-          <a:p>
-            <a:pPr algn="l">
-              <a:lnSpc>
-                <a:spcPct val="100000"/>
-              </a:lnSpc>
-              <a:spcBef>
-                <a:spcPts val="0"/>
-              </a:spcBef>
-              <a:spcAft>
-                <a:spcPts val="0"/>
-              </a:spcAft>
-              <a:buNone/>
-              <a:defRPr lang="ja-JP" sz="1400" b="1">
-                <a:solidFill>
-                  <a:srgbClr val="FFFEF8"/>
-                </a:solidFill>
-                <a:latin typeface="Noto Sans"/>
-                <a:ea typeface="Noto Sans CJK JP"/>
-                <a:cs typeface="Noto Sans"/>
-              </a:defRPr>
-            </a:pPr>
-            <a:r>
-              <a:rPr lang="ja-JP" sz="1400" b="1">
-                <a:solidFill>
-                  <a:srgbClr val="FFFEF8"/>
-                </a:solidFill>
-                <a:latin typeface="Noto Sans"/>
-                <a:ea typeface="Noto Sans CJK JP"/>
-                <a:cs typeface="Noto Sans"/>
-              </a:rPr>
-              <a:t>Appendix 1. 開発者の研究と領域認識の評価仕様</a:t>
-            </a:r>
-          </a:p>
-        </p:txBody>
-      </p:sp>
-      <p:sp>
-        <p:nvSpPr>
-          <p:cNvPr id="5" name="TextBox 4"/>
-          <p:cNvSpPr txBox="1"/>
-          <p:nvPr/>
-        </p:nvSpPr>
-        <p:spPr>
-          <a:xfrm>
-            <a:off x="502920" y="4521200"/>
-            <a:ext cx="8183879" cy="177800"/>
-          </a:xfrm>
-          <a:prstGeom prst="rect">
-            <a:avLst/>
-          </a:prstGeom>
-          <a:noFill/>
-        </p:spPr>
-        <p:txBody>
-          <a:bodyPr wrap="square" lIns="0" rIns="0" tIns="0" bIns="0">
-            <a:spAutoFit/>
-          </a:bodyPr>
-          <a:lstStyle/>
-          <a:p>
-            <a:pPr algn="l">
-              <a:lnSpc>
-                <a:spcPts val="1400"/>
-              </a:lnSpc>
-              <a:spcBef>
-                <a:spcPts val="0"/>
-              </a:spcBef>
-              <a:spcAft>
-                <a:spcPts val="0"/>
-              </a:spcAft>
-            </a:pPr>
-            <a:r>
-              <a:rPr sz="800" b="0" lang="ja-JP">
-                <a:solidFill>
-                  <a:srgbClr val="626669"/>
-                </a:solidFill>
-                <a:latin typeface="Noto Sans"/>
-                <a:ea typeface="Noto Sans CJK JP"/>
-                <a:cs typeface="Noto Sans"/>
-              </a:rPr>
-              <a:t/>
-            </a:r>
-            <a:r>
-              <a:rPr sz="800" lang="ja-JP">
-                <a:solidFill>
-                  <a:srgbClr val="626669"/>
-                </a:solidFill>
-                <a:latin typeface="Noto Sans"/>
-                <a:ea typeface="Noto Sans CJK JP"/>
-                <a:cs typeface="Noto Sans"/>
-              </a:rPr>
-              <a:t>[1] Tsung-Yi Lin et al. (2014). European Conference on Computer Vision (ECCV), pp. 740–755. Microsoft COCO: Common Objects in Context.</a:t>
-            </a:r>
-          </a:p>
-        </p:txBody>
-      </p:sp>
-      <p:sp>
-        <p:nvSpPr>
-          <p:cNvPr id="6" name="TextBox 5"/>
-          <p:cNvSpPr txBox="1"/>
-          <p:nvPr/>
-        </p:nvSpPr>
-        <p:spPr>
-          <a:xfrm>
-            <a:off x="7124851" y="4539526"/>
-            <a:ext cx="1561948" cy="177800"/>
-          </a:xfrm>
-          <a:prstGeom prst="rect">
-            <a:avLst/>
-          </a:prstGeom>
-          <a:noFill/>
-        </p:spPr>
-        <p:txBody>
-          <a:bodyPr wrap="none" lIns="0" rIns="0" tIns="0" bIns="0">
-            <a:spAutoFit/>
-          </a:bodyPr>
-          <a:lstStyle/>
-          <a:p>
-            <a:pPr algn="l">
-              <a:lnSpc>
-                <a:spcPts val="1400"/>
-              </a:lnSpc>
-              <a:spcBef>
-                <a:spcPts val="0"/>
-              </a:spcBef>
-              <a:spcAft>
-                <a:spcPts val="0"/>
-              </a:spcAft>
-            </a:pPr>
-            <a:r>
-              <a:rPr sz="800" b="0" lang="ja-JP">
-                <a:solidFill>
-                  <a:srgbClr val="626669"/>
-                </a:solidFill>
-                <a:latin typeface="Noto Sans"/>
-                <a:ea typeface="Noto Sans CJK JP"/>
-                <a:cs typeface="Noto Sans"/>
-              </a:rPr>
-              <a:t/>
-            </a:r>
-            <a:r>
-              <a:rPr sz="800" lang="ja-JP">
-                <a:solidFill>
-                  <a:srgbClr val="626669"/>
-                </a:solidFill>
-                <a:latin typeface="Noto Sans"/>
-                <a:ea typeface="Noto Sans CJK JP"/>
-                <a:cs typeface="Noto Sans"/>
-                <a:hlinkClick r:id="rId2"/>
-              </a:rPr>
-              <a:t>https://arxiv.org/abs/1405.0312</a:t>
-            </a:r>
-          </a:p>
-        </p:txBody>
-      </p:sp>
-      <p:sp>
-        <p:nvSpPr>
-          <p:cNvPr id="7" name="TextBox 6"/>
-          <p:cNvSpPr txBox="1"/>
-          <p:nvPr/>
-        </p:nvSpPr>
-        <p:spPr>
-          <a:xfrm>
-            <a:off x="502920" y="4876800"/>
-            <a:ext cx="8183879" cy="177800"/>
-          </a:xfrm>
-          <a:prstGeom prst="rect">
-            <a:avLst/>
-          </a:prstGeom>
-          <a:noFill/>
-        </p:spPr>
-        <p:txBody>
-          <a:bodyPr wrap="square" lIns="0" rIns="0" tIns="0" bIns="0">
-            <a:spAutoFit/>
-          </a:bodyPr>
-          <a:lstStyle/>
-          <a:p>
-            <a:pPr algn="l">
-              <a:lnSpc>
-                <a:spcPts val="1400"/>
-              </a:lnSpc>
-              <a:spcBef>
-                <a:spcPts val="0"/>
-              </a:spcBef>
-              <a:spcAft>
-                <a:spcPts val="0"/>
-              </a:spcAft>
-            </a:pPr>
-            <a:r>
-              <a:rPr sz="800" b="0" lang="ja-JP">
-                <a:solidFill>
-                  <a:srgbClr val="626669"/>
-                </a:solidFill>
-                <a:latin typeface="Noto Sans"/>
-                <a:ea typeface="Noto Sans CJK JP"/>
-                <a:cs typeface="Noto Sans"/>
-              </a:rPr>
-              <a:t/>
-            </a:r>
-            <a:r>
-              <a:rPr sz="800" lang="ja-JP">
-                <a:solidFill>
-                  <a:srgbClr val="626669"/>
-                </a:solidFill>
-                <a:latin typeface="Noto Sans"/>
-                <a:ea typeface="Noto Sans CJK JP"/>
-                <a:cs typeface="Noto Sans"/>
-              </a:rPr>
-              <a:t>Tsung-Yi Lin et al., Microsoft COCO: Common Objects in Context, ECCV 2014, pp. 740–755.</a:t>
-            </a:r>
-          </a:p>
-        </p:txBody>
-      </p:sp>
-    </p:spTree>
-  </p:cSld>
-  <p:clrMapOvr>
-    <a:masterClrMapping/>
-  </p:clrMapOvr>
-</p:sld>
-</file>
-
-<file path=ppt/slides/slide58.xml><?xml version="1.0" encoding="utf-8"?>
 <p:sld xmlns:a="http://schemas.openxmlformats.org/drawingml/2006/main" xmlns:p="http://schemas.openxmlformats.org/presentationml/2006/main" xmlns:r="http://schemas.openxmlformats.org/officeDocument/2006/relationships">
   <p:cSld>
     <p:spTree>
@@ -34514,6 +34514,358 @@
 </p:sld>
 </file>
 
+<file path=ppt/slides/slide58.xml><?xml version="1.0" encoding="utf-8"?>
+<p:sld xmlns:a="http://schemas.openxmlformats.org/drawingml/2006/main" xmlns:p="http://schemas.openxmlformats.org/presentationml/2006/main" xmlns:r="http://schemas.openxmlformats.org/officeDocument/2006/relationships">
+  <p:cSld>
+    <p:spTree>
+      <p:nvGrpSpPr>
+        <p:cNvPr id="1" name=""/>
+        <p:cNvGrpSpPr/>
+        <p:nvPr/>
+      </p:nvGrpSpPr>
+      <p:grpSpPr/>
+      <p:sp>
+        <p:nvSpPr>
+          <p:cNvPr id="2" name="Title 1"/>
+          <p:cNvSpPr>
+            <a:spLocks noGrp="1"/>
+          </p:cNvSpPr>
+          <p:nvPr>
+            <p:ph type="title"/>
+          </p:nvPr>
+        </p:nvSpPr>
+        <p:spPr>
+          <a:xfrm>
+            <a:off x="468172" y="650138"/>
+            <a:ext cx="8206740" cy="616305"/>
+          </a:xfrm>
+        </p:spPr>
+        <p:txBody>
+          <a:bodyPr wrap="none" anchor="t" lIns="0" rIns="0" tIns="0" bIns="0"/>
+          <a:lstStyle/>
+          <a:p>
+            <a:pPr algn="l">
+              <a:lnSpc>
+                <a:spcPct val="100000"/>
+              </a:lnSpc>
+              <a:spcBef>
+                <a:spcPts val="0"/>
+              </a:spcBef>
+              <a:spcAft>
+                <a:spcPts val="0"/>
+              </a:spcAft>
+              <a:buNone/>
+              <a:defRPr lang="ja-JP" sz="2800" b="1">
+                <a:solidFill>
+                  <a:srgbClr val="303437"/>
+                </a:solidFill>
+                <a:latin typeface="Noto Sans"/>
+                <a:ea typeface="Noto Sans CJK JP"/>
+                <a:cs typeface="Noto Sans"/>
+              </a:defRPr>
+            </a:pPr>
+            <a:r>
+              <a:rPr sz="2800" b="1" lang="ja-JP">
+                <a:solidFill>
+                  <a:srgbClr val="303437"/>
+                </a:solidFill>
+                <a:latin typeface="Noto Sans"/>
+                <a:ea typeface="Noto Sans CJK JP"/>
+                <a:cs typeface="Noto Sans"/>
+              </a:rPr>
+              <a:t>通常注釈とcrowd注釈の扱い</a:t>
+            </a:r>
+          </a:p>
+        </p:txBody>
+      </p:sp>
+      <p:sp>
+        <p:nvSpPr>
+          <p:cNvPr id="3" name="Text Placeholder 2"/>
+          <p:cNvSpPr>
+            <a:spLocks noGrp="1"/>
+          </p:cNvSpPr>
+          <p:nvPr>
+            <p:ph type="body" idx="1"/>
+          </p:nvPr>
+        </p:nvSpPr>
+        <p:spPr>
+          <a:xfrm>
+            <a:off x="594360" y="1508760"/>
+            <a:ext cx="7955279" cy="3017520"/>
+          </a:xfrm>
+        </p:spPr>
+        <p:txBody>
+          <a:bodyPr wrap="square" anchor="t" tIns="91440" bIns="91440"/>
+          <a:lstStyle/>
+          <a:p>
+            <a:pPr algn="l" lvl="0" marL="457200" indent="-355600">
+              <a:lnSpc>
+                <a:spcPct val="115000"/>
+              </a:lnSpc>
+              <a:spcBef>
+                <a:spcPts val="0"/>
+              </a:spcBef>
+              <a:spcAft>
+                <a:spcPts val="800"/>
+              </a:spcAft>
+              <a:buSzPct val="57826"/>
+              <a:buFont typeface="Noto Sans CJK JP"/>
+              <a:buChar char="●"/>
+              <a:defRPr lang="ja-JP" sz="2300" b="0">
+                <a:solidFill>
+                  <a:srgbClr val="303437"/>
+                </a:solidFill>
+                <a:latin typeface="Noto Sans"/>
+                <a:ea typeface="Noto Sans CJK JP"/>
+                <a:cs typeface="Noto Sans"/>
+              </a:defRPr>
+            </a:pPr>
+            <a:r>
+              <a:rPr lang="ja-JP" sz="2300" b="0">
+                <a:solidFill>
+                  <a:srgbClr val="303437"/>
+                </a:solidFill>
+                <a:latin typeface="Noto Sans"/>
+                <a:ea typeface="Noto Sans CJK JP"/>
+                <a:cs typeface="Noto Sans"/>
+              </a:rPr>
+              <a:t>通常の一致判定は、交差面積を和集合面積で割るIoUを用いる。</a:t>
+            </a:r>
+          </a:p>
+          <a:p>
+            <a:pPr algn="l" lvl="0" marL="457200" indent="-355600">
+              <a:lnSpc>
+                <a:spcPct val="115000"/>
+              </a:lnSpc>
+              <a:spcBef>
+                <a:spcPts val="0"/>
+              </a:spcBef>
+              <a:spcAft>
+                <a:spcPts val="800"/>
+              </a:spcAft>
+              <a:buSzPct val="57826"/>
+              <a:buFont typeface="Noto Sans CJK JP"/>
+              <a:buChar char="●"/>
+              <a:defRPr lang="ja-JP" sz="2300" b="0">
+                <a:solidFill>
+                  <a:srgbClr val="303437"/>
+                </a:solidFill>
+                <a:latin typeface="Noto Sans"/>
+                <a:ea typeface="Noto Sans CJK JP"/>
+                <a:cs typeface="Noto Sans"/>
+              </a:defRPr>
+            </a:pPr>
+            <a:r>
+              <a:rPr lang="ja-JP" sz="2300" b="0">
+                <a:solidFill>
+                  <a:srgbClr val="303437"/>
+                </a:solidFill>
+                <a:latin typeface="Noto Sans"/>
+                <a:ea typeface="Noto Sans CJK JP"/>
+                <a:cs typeface="Noto Sans"/>
+              </a:rPr>
+              <a:t>crowdとの判定は交差面積を予測面積で割る。一つのcrowd領域へ複数の予測を対応付けられる。</a:t>
+            </a:r>
+          </a:p>
+          <a:p>
+            <a:pPr algn="l" lvl="0" marL="457200" indent="-355600">
+              <a:lnSpc>
+                <a:spcPct val="115000"/>
+              </a:lnSpc>
+              <a:spcBef>
+                <a:spcPts val="0"/>
+              </a:spcBef>
+              <a:spcAft>
+                <a:spcPts val="800"/>
+              </a:spcAft>
+              <a:buSzPct val="57826"/>
+              <a:buFont typeface="Noto Sans CJK JP"/>
+              <a:buChar char="●"/>
+              <a:defRPr lang="ja-JP" sz="2300" b="0">
+                <a:solidFill>
+                  <a:srgbClr val="303437"/>
+                </a:solidFill>
+                <a:latin typeface="Noto Sans"/>
+                <a:ea typeface="Noto Sans CJK JP"/>
+                <a:cs typeface="Noto Sans"/>
+              </a:defRPr>
+            </a:pPr>
+            <a:r>
+              <a:rPr lang="ja-JP" sz="2300" b="0">
+                <a:solidFill>
+                  <a:srgbClr val="303437"/>
+                </a:solidFill>
+                <a:latin typeface="Noto Sans"/>
+                <a:ea typeface="Noto Sans CJK JP"/>
+                <a:cs typeface="Noto Sans"/>
+              </a:rPr>
+              <a:t>crowd正解は再現率の分母から除外され、そこへ一致した予測も適合率の集計から除外される [1]。</a:t>
+            </a:r>
+          </a:p>
+        </p:txBody>
+      </p:sp>
+      <p:sp>
+        <p:nvSpPr>
+          <p:cNvPr id="4" name="Title 3"/>
+          <p:cNvSpPr>
+            <a:spLocks noGrp="1"/>
+          </p:cNvSpPr>
+          <p:nvPr>
+            <p:ph type="title" idx="2"/>
+          </p:nvPr>
+        </p:nvSpPr>
+        <p:spPr>
+          <a:xfrm>
+            <a:off x="75895" y="0"/>
+            <a:ext cx="8115300" cy="480060"/>
+          </a:xfrm>
+        </p:spPr>
+        <p:txBody>
+          <a:bodyPr wrap="square" anchor="ctr" lIns="0" rIns="0" tIns="0" bIns="0"/>
+          <a:lstStyle/>
+          <a:p>
+            <a:pPr algn="l">
+              <a:lnSpc>
+                <a:spcPct val="100000"/>
+              </a:lnSpc>
+              <a:spcBef>
+                <a:spcPts val="0"/>
+              </a:spcBef>
+              <a:spcAft>
+                <a:spcPts val="0"/>
+              </a:spcAft>
+              <a:buNone/>
+              <a:defRPr lang="ja-JP" sz="1400" b="1">
+                <a:solidFill>
+                  <a:srgbClr val="FFFEF8"/>
+                </a:solidFill>
+                <a:latin typeface="Noto Sans"/>
+                <a:ea typeface="Noto Sans CJK JP"/>
+                <a:cs typeface="Noto Sans"/>
+              </a:defRPr>
+            </a:pPr>
+            <a:r>
+              <a:rPr lang="ja-JP" sz="1400" b="1">
+                <a:solidFill>
+                  <a:srgbClr val="FFFEF8"/>
+                </a:solidFill>
+                <a:latin typeface="Noto Sans"/>
+                <a:ea typeface="Noto Sans CJK JP"/>
+                <a:cs typeface="Noto Sans"/>
+              </a:rPr>
+              <a:t>Appendix 1. 開発者の研究と領域認識の評価仕様</a:t>
+            </a:r>
+          </a:p>
+        </p:txBody>
+      </p:sp>
+      <p:sp>
+        <p:nvSpPr>
+          <p:cNvPr id="5" name="TextBox 4"/>
+          <p:cNvSpPr txBox="1"/>
+          <p:nvPr/>
+        </p:nvSpPr>
+        <p:spPr>
+          <a:xfrm>
+            <a:off x="502920" y="4787900"/>
+            <a:ext cx="8183879" cy="640080"/>
+          </a:xfrm>
+          <a:prstGeom prst="rect">
+            <a:avLst/>
+          </a:prstGeom>
+          <a:noFill/>
+        </p:spPr>
+        <p:txBody>
+          <a:bodyPr wrap="square" anchor="t" lIns="0" rIns="0" tIns="0" bIns="0">
+            <a:spAutoFit/>
+          </a:bodyPr>
+          <a:lstStyle/>
+          <a:p>
+            <a:pPr>
+              <a:lnSpc>
+                <a:spcPts val="1200"/>
+              </a:lnSpc>
+              <a:spcBef>
+                <a:spcPts val="0"/>
+              </a:spcBef>
+              <a:spcAft>
+                <a:spcPts val="0"/>
+              </a:spcAft>
+              <a:defRPr sz="800" b="0" lang="ja-JP">
+                <a:solidFill>
+                  <a:srgbClr val="626669"/>
+                </a:solidFill>
+                <a:latin typeface="Noto Sans"/>
+                <a:ea typeface="Noto Sans CJK JP"/>
+                <a:cs typeface="Noto Sans"/>
+              </a:defRPr>
+            </a:pPr>
+            <a:r>
+              <a:rPr sz="800" b="0" lang="ja-JP">
+                <a:solidFill>
+                  <a:srgbClr val="626669"/>
+                </a:solidFill>
+                <a:latin typeface="Noto Sans"/>
+                <a:ea typeface="Noto Sans CJK JP"/>
+                <a:cs typeface="Noto Sans"/>
+              </a:rPr>
+              <a:t>[1] </a:t>
+            </a:r>
+            <a:r>
+              <a:rPr sz="800" b="0" lang="ja-JP">
+                <a:solidFill>
+                  <a:srgbClr val="626669"/>
+                </a:solidFill>
+                <a:latin typeface="Noto Sans"/>
+                <a:ea typeface="Noto Sans CJK JP"/>
+                <a:cs typeface="Noto Sans"/>
+                <a:hlinkClick r:id="rId2"/>
+              </a:rPr>
+              <a:t>https://github.com/cocodataset/cocoapi/blob/master/common/maskApi.c</a:t>
+            </a:r>
+          </a:p>
+          <a:p>
+            <a:pPr>
+              <a:lnSpc>
+                <a:spcPts val="1200"/>
+              </a:lnSpc>
+              <a:spcBef>
+                <a:spcPts val="0"/>
+              </a:spcBef>
+              <a:spcAft>
+                <a:spcPts val="0"/>
+              </a:spcAft>
+              <a:defRPr sz="800" b="0" lang="ja-JP">
+                <a:solidFill>
+                  <a:srgbClr val="626669"/>
+                </a:solidFill>
+                <a:latin typeface="Noto Sans"/>
+                <a:ea typeface="Noto Sans CJK JP"/>
+                <a:cs typeface="Noto Sans"/>
+              </a:defRPr>
+            </a:pPr>
+            <a:r>
+              <a:rPr sz="800" b="0" lang="ja-JP">
+                <a:solidFill>
+                  <a:srgbClr val="626669"/>
+                </a:solidFill>
+                <a:latin typeface="Noto Sans"/>
+                <a:ea typeface="Noto Sans CJK JP"/>
+                <a:cs typeface="Noto Sans"/>
+                <a:hlinkClick r:id="rId3"/>
+              </a:rPr>
+              <a:t>https://github.com/cocodataset/cocoapi/blob/master/PythonAPI/pycocotools/cocoeval.py</a:t>
+            </a:r>
+          </a:p>
+        </p:txBody>
+      </p:sp>
+    </p:spTree>
+  </p:cSld>
+  <p:clrMapOvr>
+    <a:masterClrMapping/>
+  </p:clrMapOvr>
+</p:sld>
+</file>
+
 <file path=ppt/slides/slide59.xml><?xml version="1.0" encoding="utf-8"?>
 <p:sld xmlns:a="http://schemas.openxmlformats.org/drawingml/2006/main" xmlns:p="http://schemas.openxmlformats.org/presentationml/2006/main" xmlns:r="http://schemas.openxmlformats.org/officeDocument/2006/relationships">
   <p:cSld>
@@ -34573,7 +34925,7 @@
                 <a:ea typeface="Noto Sans CJK JP"/>
                 <a:cs typeface="Noto Sans"/>
               </a:rPr>
-              <a:t>通常注釈とcrowd注釈の扱い</a:t>
+              <a:t>APの平均には複数の軸がある</a:t>
             </a:r>
           </a:p>
         </p:txBody>
@@ -34629,7 +34981,7 @@
                 <a:ea typeface="Noto Sans CJK JP"/>
                 <a:cs typeface="Noto Sans"/>
               </a:rPr>
-              <a:t>通常の一致判定は、交差面積を和集合面積で割るIoUを用いる。</a:t>
+              <a:t>各カテゴリ・各IoU閾値で、信頼度順の予測から適合率・再現率を算出する。</a:t>
             </a:r>
           </a:p>
           <a:p>
@@ -34664,7 +35016,7 @@
                 <a:ea typeface="Noto Sans CJK JP"/>
                 <a:cs typeface="Noto Sans"/>
               </a:rPr>
-              <a:t>crowdとの判定は交差面積を予測面積で割る。一つのcrowd領域へ複数の予測を対応付けられる。</a:t>
+              <a:t>再現率0.00〜1.00の101点で補間した適合率を平均し、カテゴリと10個のIoU閾値で平均する。</a:t>
             </a:r>
           </a:p>
           <a:p>
@@ -34699,7 +35051,7 @@
                 <a:ea typeface="Noto Sans CJK JP"/>
                 <a:cs typeface="Noto Sans"/>
               </a:rPr>
-              <a:t>crowd正解は再現率の分母から除外され、そこへ一致した予測も適合率の集計から除外される [1]。</a:t>
+              <a:t>通常APはmaxDets=100。公式Python実装では、画像・カテゴリごとに上位100予測を使う [1]。</a:t>
             </a:r>
           </a:p>
         </p:txBody>
@@ -34766,7 +35118,7 @@
         </p:nvSpPr>
         <p:spPr>
           <a:xfrm>
-            <a:off x="502920" y="4787900"/>
+            <a:off x="502920" y="4828032"/>
             <a:ext cx="8183879" cy="640080"/>
           </a:xfrm>
           <a:prstGeom prst="rect">
@@ -34819,39 +35171,6 @@
                 <a:ea typeface="Noto Sans CJK JP"/>
                 <a:cs typeface="Noto Sans"/>
                 <a:hlinkClick r:id="rId2"/>
-              </a:rPr>
-              <a:t>https://github.com/cocodataset/cocoapi/blob/master/common/maskApi.c</a:t>
-            </a:r>
-          </a:p>
-          <a:p>
-            <a:pPr>
-              <a:lnSpc>
-                <a:spcPts val="1200"/>
-              </a:lnSpc>
-              <a:spcBef>
-                <a:spcPts val="0"/>
-              </a:spcBef>
-              <a:spcAft>
-                <a:spcPts val="0"/>
-              </a:spcAft>
-              <a:defRPr sz="800" b="0" lang="ja-JP">
-                <a:solidFill>
-                  <a:srgbClr val="626669"/>
-                </a:solidFill>
-                <a:latin typeface="Noto Sans"/>
-                <a:ea typeface="Noto Sans CJK JP"/>
-                <a:cs typeface="Noto Sans"/>
-              </a:defRPr>
-            </a:pPr>
-            <a:r>
-              <a:rPr sz="800" b="0" lang="ja-JP">
-                <a:solidFill>
-                  <a:srgbClr val="626669"/>
-                </a:solidFill>
-                <a:latin typeface="Noto Sans"/>
-                <a:ea typeface="Noto Sans CJK JP"/>
-                <a:cs typeface="Noto Sans"/>
-                <a:hlinkClick r:id="rId3"/>
               </a:rPr>
               <a:t>https://github.com/cocodataset/cocoapi/blob/master/PythonAPI/pycocotools/cocoeval.py</a:t>
             </a:r>
@@ -35720,12 +36039,12 @@
         </p:nvSpPr>
         <p:spPr>
           <a:xfrm>
-            <a:off x="468172" y="650138"/>
-            <a:ext cx="8206740" cy="616305"/>
-          </a:xfrm>
-        </p:spPr>
-        <p:txBody>
-          <a:bodyPr wrap="none" anchor="t" lIns="0" rIns="0" tIns="0" bIns="0"/>
+            <a:off x="468172" y="650240"/>
+            <a:ext cx="8206740" cy="594360"/>
+          </a:xfrm>
+        </p:spPr>
+        <p:txBody>
+          <a:bodyPr wrap="square" anchor="t" lIns="0" rIns="0" tIns="0" bIns="0"/>
           <a:lstStyle/>
           <a:p>
             <a:pPr algn="l">
@@ -35749,15 +36068,15 @@
               </a:defRPr>
             </a:pPr>
             <a:r>
-              <a:rPr sz="2800" b="1" lang="ja-JP">
-                <a:solidFill>
-                  <a:srgbClr val="303437"/>
-                </a:solidFill>
-                <a:latin typeface="Noto Sans"/>
-                <a:ea typeface="Noto Sans CJK JP"/>
-                <a:cs typeface="Noto Sans"/>
-              </a:rPr>
-              <a:t>APの平均には複数の軸がある</a:t>
+              <a:rPr sz="3000" b="1" lang="ja-JP">
+                <a:solidFill>
+                  <a:srgbClr val="303437"/>
+                </a:solidFill>
+                <a:latin typeface="Noto Sans"/>
+                <a:ea typeface="Noto Sans CJK JP"/>
+                <a:cs typeface="Noto Sans"/>
+              </a:rPr>
+              <a:t>注釈数の分析対象とする128画像の部分集合</a:t>
             </a:r>
           </a:p>
         </p:txBody>
@@ -35775,115 +36094,68 @@
         <p:spPr>
           <a:xfrm>
             <a:off x="594360" y="1508760"/>
-            <a:ext cx="7955279" cy="3017520"/>
-          </a:xfrm>
-        </p:spPr>
-        <p:txBody>
-          <a:bodyPr wrap="square" anchor="t" tIns="91440" bIns="91440"/>
-          <a:lstStyle/>
-          <a:p>
-            <a:pPr algn="l" lvl="0" marL="457200" indent="-355600">
-              <a:lnSpc>
-                <a:spcPct val="115000"/>
-              </a:lnSpc>
-              <a:spcBef>
-                <a:spcPts val="0"/>
-              </a:spcBef>
-              <a:spcAft>
-                <a:spcPts val="800"/>
-              </a:spcAft>
-              <a:buSzPct val="57826"/>
-              <a:buFont typeface="Noto Sans CJK JP"/>
-              <a:buChar char="●"/>
-              <a:defRPr lang="ja-JP" sz="2300" b="0">
-                <a:solidFill>
-                  <a:srgbClr val="303437"/>
-                </a:solidFill>
-                <a:latin typeface="Noto Sans"/>
-                <a:ea typeface="Noto Sans CJK JP"/>
-                <a:cs typeface="Noto Sans"/>
-              </a:defRPr>
-            </a:pPr>
-            <a:r>
-              <a:rPr lang="ja-JP" sz="2300" b="0">
-                <a:solidFill>
-                  <a:srgbClr val="303437"/>
-                </a:solidFill>
-                <a:latin typeface="Noto Sans"/>
-                <a:ea typeface="Noto Sans CJK JP"/>
-                <a:cs typeface="Noto Sans"/>
-              </a:rPr>
-              <a:t>各カテゴリ・各IoU閾値で、信頼度順の予測から適合率・再現率を算出する。</a:t>
-            </a:r>
-          </a:p>
-          <a:p>
-            <a:pPr algn="l" lvl="0" marL="457200" indent="-355600">
-              <a:lnSpc>
-                <a:spcPct val="115000"/>
-              </a:lnSpc>
-              <a:spcBef>
-                <a:spcPts val="0"/>
-              </a:spcBef>
-              <a:spcAft>
-                <a:spcPts val="800"/>
-              </a:spcAft>
-              <a:buSzPct val="57826"/>
-              <a:buFont typeface="Noto Sans CJK JP"/>
-              <a:buChar char="●"/>
-              <a:defRPr lang="ja-JP" sz="2300" b="0">
-                <a:solidFill>
-                  <a:srgbClr val="303437"/>
-                </a:solidFill>
-                <a:latin typeface="Noto Sans"/>
-                <a:ea typeface="Noto Sans CJK JP"/>
-                <a:cs typeface="Noto Sans"/>
-              </a:defRPr>
-            </a:pPr>
-            <a:r>
-              <a:rPr lang="ja-JP" sz="2300" b="0">
-                <a:solidFill>
-                  <a:srgbClr val="303437"/>
-                </a:solidFill>
-                <a:latin typeface="Noto Sans"/>
-                <a:ea typeface="Noto Sans CJK JP"/>
-                <a:cs typeface="Noto Sans"/>
-              </a:rPr>
-              <a:t>再現率0.00〜1.00の101点で補間した適合率を平均し、カテゴリと10個のIoU閾値で平均する。</a:t>
-            </a:r>
-          </a:p>
-          <a:p>
-            <a:pPr algn="l" lvl="0" marL="457200" indent="-355600">
-              <a:lnSpc>
-                <a:spcPct val="115000"/>
-              </a:lnSpc>
-              <a:spcBef>
-                <a:spcPts val="0"/>
-              </a:spcBef>
-              <a:spcAft>
-                <a:spcPts val="800"/>
-              </a:spcAft>
-              <a:buSzPct val="57826"/>
-              <a:buFont typeface="Noto Sans CJK JP"/>
-              <a:buChar char="●"/>
-              <a:defRPr lang="ja-JP" sz="2300" b="0">
-                <a:solidFill>
-                  <a:srgbClr val="303437"/>
-                </a:solidFill>
-                <a:latin typeface="Noto Sans"/>
-                <a:ea typeface="Noto Sans CJK JP"/>
-                <a:cs typeface="Noto Sans"/>
-              </a:defRPr>
-            </a:pPr>
-            <a:r>
-              <a:rPr lang="ja-JP" sz="2300" b="0">
-                <a:solidFill>
-                  <a:srgbClr val="303437"/>
-                </a:solidFill>
-                <a:latin typeface="Noto Sans"/>
-                <a:ea typeface="Noto Sans CJK JP"/>
-                <a:cs typeface="Noto Sans"/>
-              </a:rPr>
-              <a:t>通常APはmaxDets=100。公式Python実装では、画像・カテゴリごとに上位100予測を使う [1]。</a:t>
+            <a:ext cx="7955279" cy="2794000"/>
+          </a:xfrm>
+        </p:spPr>
+        <p:txBody>
+          <a:bodyPr wrap="square" anchor="t" tIns="0" bIns="0" lIns="0" rIns="0"/>
+          <a:lstStyle/>
+          <a:p>
+            <a:pPr algn="l" lvl="0" marL="0" indent="0">
+              <a:lnSpc>
+                <a:spcPct val="100000"/>
+              </a:lnSpc>
+              <a:spcBef>
+                <a:spcPts val="0"/>
+              </a:spcBef>
+              <a:spcAft>
+                <a:spcPts val="1200"/>
+              </a:spcAft>
+              <a:buNone/>
+              <a:defRPr lang="ja-JP" sz="2400" b="0">
+                <a:solidFill>
+                  <a:srgbClr val="303437"/>
+                </a:solidFill>
+                <a:latin typeface="Noto Sans"/>
+                <a:ea typeface="Noto Sans CJK JP"/>
+                <a:cs typeface="Noto Sans"/>
+              </a:defRPr>
+            </a:pPr>
+            <a:r>
+              <a:rPr sz="2000" b="0" lang="ja-JP">
+                <a:solidFill>
+                  <a:srgbClr val="303437"/>
+                </a:solidFill>
+                <a:latin typeface="Noto Sans"/>
+                <a:ea typeface="Noto Sans CJK JP"/>
+                <a:cs typeface="Noto Sans"/>
+              </a:rPr>
+              <a:t>分析には、COCO128-segの128枚の画像を使う [1]。</a:t>
+            </a:r>
+          </a:p>
+          <a:p>
+            <a:pPr algn="l" marL="0" indent="0">
+              <a:lnSpc>
+                <a:spcPct val="100000"/>
+              </a:lnSpc>
+              <a:spcBef>
+                <a:spcPts val="0"/>
+              </a:spcBef>
+              <a:spcAft>
+                <a:spcPts val="1200"/>
+              </a:spcAft>
+              <a:buNone/>
+            </a:pPr>
+            <a:r>
+              <a:rPr sz="2000" b="0" lang="ja-JP">
+                <a:solidFill>
+                  <a:srgbClr val="303437"/>
+                </a:solidFill>
+                <a:latin typeface="Noto Sans"/>
+                <a:ea typeface="Noto Sans CJK JP"/>
+                <a:cs typeface="Noto Sans"/>
+              </a:rPr>
+              <a:t>変換・公開された領域注釈を画像ごとに数え、注釈ファイルがない2枚は領域数を0として集計に含める。</a:t>
             </a:r>
           </a:p>
         </p:txBody>
@@ -35937,7 +36209,7 @@
                 <a:ea typeface="Noto Sans CJK JP"/>
                 <a:cs typeface="Noto Sans"/>
               </a:rPr>
-              <a:t>Appendix 1. 開発者の研究と領域認識の評価仕様</a:t>
+              <a:t>Appendix 2. 128画像の部分集合における注釈数の分布</a:t>
             </a:r>
           </a:p>
         </p:txBody>
@@ -36004,7 +36276,7 @@
                 <a:cs typeface="Noto Sans"/>
                 <a:hlinkClick r:id="rId2"/>
               </a:rPr>
-              <a:t>https://github.com/cocodataset/cocoapi/blob/master/PythonAPI/pycocotools/cocoeval.py</a:t>
+              <a:t>https://github.com/ultralytics/assets/releases/download/v0.0.0/coco128-seg.zip</a:t>
             </a:r>
           </a:p>
         </p:txBody>
@@ -36039,278 +36311,6 @@
         </p:nvSpPr>
         <p:spPr>
           <a:xfrm>
-            <a:off x="468172" y="650240"/>
-            <a:ext cx="8206740" cy="594360"/>
-          </a:xfrm>
-        </p:spPr>
-        <p:txBody>
-          <a:bodyPr wrap="square" anchor="t" lIns="0" rIns="0" tIns="0" bIns="0"/>
-          <a:lstStyle/>
-          <a:p>
-            <a:pPr algn="l">
-              <a:lnSpc>
-                <a:spcPct val="100000"/>
-              </a:lnSpc>
-              <a:spcBef>
-                <a:spcPts val="0"/>
-              </a:spcBef>
-              <a:spcAft>
-                <a:spcPts val="0"/>
-              </a:spcAft>
-              <a:buNone/>
-              <a:defRPr lang="ja-JP" sz="2800" b="1">
-                <a:solidFill>
-                  <a:srgbClr val="303437"/>
-                </a:solidFill>
-                <a:latin typeface="Noto Sans"/>
-                <a:ea typeface="Noto Sans CJK JP"/>
-                <a:cs typeface="Noto Sans"/>
-              </a:defRPr>
-            </a:pPr>
-            <a:r>
-              <a:rPr sz="3000" b="1" lang="ja-JP">
-                <a:solidFill>
-                  <a:srgbClr val="303437"/>
-                </a:solidFill>
-                <a:latin typeface="Noto Sans"/>
-                <a:ea typeface="Noto Sans CJK JP"/>
-                <a:cs typeface="Noto Sans"/>
-              </a:rPr>
-              <a:t>注釈数の分析対象とする128画像の部分集合</a:t>
-            </a:r>
-          </a:p>
-        </p:txBody>
-      </p:sp>
-      <p:sp>
-        <p:nvSpPr>
-          <p:cNvPr id="3" name="Text Placeholder 2"/>
-          <p:cNvSpPr>
-            <a:spLocks noGrp="1"/>
-          </p:cNvSpPr>
-          <p:nvPr>
-            <p:ph type="body" idx="1"/>
-          </p:nvPr>
-        </p:nvSpPr>
-        <p:spPr>
-          <a:xfrm>
-            <a:off x="594360" y="1508760"/>
-            <a:ext cx="7955279" cy="2794000"/>
-          </a:xfrm>
-        </p:spPr>
-        <p:txBody>
-          <a:bodyPr wrap="square" anchor="t" tIns="0" bIns="0" lIns="0" rIns="0"/>
-          <a:lstStyle/>
-          <a:p>
-            <a:pPr algn="l" lvl="0" marL="0" indent="0">
-              <a:lnSpc>
-                <a:spcPct val="100000"/>
-              </a:lnSpc>
-              <a:spcBef>
-                <a:spcPts val="0"/>
-              </a:spcBef>
-              <a:spcAft>
-                <a:spcPts val="1200"/>
-              </a:spcAft>
-              <a:buNone/>
-              <a:defRPr lang="ja-JP" sz="2400" b="0">
-                <a:solidFill>
-                  <a:srgbClr val="303437"/>
-                </a:solidFill>
-                <a:latin typeface="Noto Sans"/>
-                <a:ea typeface="Noto Sans CJK JP"/>
-                <a:cs typeface="Noto Sans"/>
-              </a:defRPr>
-            </a:pPr>
-            <a:r>
-              <a:rPr sz="2000" b="0" lang="ja-JP">
-                <a:solidFill>
-                  <a:srgbClr val="303437"/>
-                </a:solidFill>
-                <a:latin typeface="Noto Sans"/>
-                <a:ea typeface="Noto Sans CJK JP"/>
-                <a:cs typeface="Noto Sans"/>
-              </a:rPr>
-              <a:t>分析には、COCO128-segの128枚の画像を使う [1]。</a:t>
-            </a:r>
-          </a:p>
-          <a:p>
-            <a:pPr algn="l" marL="0" indent="0">
-              <a:lnSpc>
-                <a:spcPct val="100000"/>
-              </a:lnSpc>
-              <a:spcBef>
-                <a:spcPts val="0"/>
-              </a:spcBef>
-              <a:spcAft>
-                <a:spcPts val="1200"/>
-              </a:spcAft>
-              <a:buNone/>
-            </a:pPr>
-            <a:r>
-              <a:rPr sz="2000" b="0" lang="ja-JP">
-                <a:solidFill>
-                  <a:srgbClr val="303437"/>
-                </a:solidFill>
-                <a:latin typeface="Noto Sans"/>
-                <a:ea typeface="Noto Sans CJK JP"/>
-                <a:cs typeface="Noto Sans"/>
-              </a:rPr>
-              <a:t>変換・公開された領域注釈を画像ごとに数え、注釈ファイルがない2枚は領域数を0として集計に含める。</a:t>
-            </a:r>
-          </a:p>
-        </p:txBody>
-      </p:sp>
-      <p:sp>
-        <p:nvSpPr>
-          <p:cNvPr id="4" name="Title 3"/>
-          <p:cNvSpPr>
-            <a:spLocks noGrp="1"/>
-          </p:cNvSpPr>
-          <p:nvPr>
-            <p:ph type="title" idx="2"/>
-          </p:nvPr>
-        </p:nvSpPr>
-        <p:spPr>
-          <a:xfrm>
-            <a:off x="75895" y="0"/>
-            <a:ext cx="8115300" cy="480060"/>
-          </a:xfrm>
-        </p:spPr>
-        <p:txBody>
-          <a:bodyPr wrap="square" anchor="ctr" lIns="0" rIns="0" tIns="0" bIns="0"/>
-          <a:lstStyle/>
-          <a:p>
-            <a:pPr algn="l">
-              <a:lnSpc>
-                <a:spcPct val="100000"/>
-              </a:lnSpc>
-              <a:spcBef>
-                <a:spcPts val="0"/>
-              </a:spcBef>
-              <a:spcAft>
-                <a:spcPts val="0"/>
-              </a:spcAft>
-              <a:buNone/>
-              <a:defRPr lang="ja-JP" sz="1400" b="1">
-                <a:solidFill>
-                  <a:srgbClr val="FFFEF8"/>
-                </a:solidFill>
-                <a:latin typeface="Noto Sans"/>
-                <a:ea typeface="Noto Sans CJK JP"/>
-                <a:cs typeface="Noto Sans"/>
-              </a:defRPr>
-            </a:pPr>
-            <a:r>
-              <a:rPr lang="ja-JP" sz="1400" b="1">
-                <a:solidFill>
-                  <a:srgbClr val="FFFEF8"/>
-                </a:solidFill>
-                <a:latin typeface="Noto Sans"/>
-                <a:ea typeface="Noto Sans CJK JP"/>
-                <a:cs typeface="Noto Sans"/>
-              </a:rPr>
-              <a:t>Appendix 2. 128画像の部分集合における注釈数の分布</a:t>
-            </a:r>
-          </a:p>
-        </p:txBody>
-      </p:sp>
-      <p:sp>
-        <p:nvSpPr>
-          <p:cNvPr id="5" name="TextBox 4"/>
-          <p:cNvSpPr txBox="1"/>
-          <p:nvPr/>
-        </p:nvSpPr>
-        <p:spPr>
-          <a:xfrm>
-            <a:off x="502920" y="4828032"/>
-            <a:ext cx="8183879" cy="640080"/>
-          </a:xfrm>
-          <a:prstGeom prst="rect">
-            <a:avLst/>
-          </a:prstGeom>
-          <a:noFill/>
-        </p:spPr>
-        <p:txBody>
-          <a:bodyPr wrap="square" anchor="t" lIns="0" rIns="0" tIns="0" bIns="0">
-            <a:spAutoFit/>
-          </a:bodyPr>
-          <a:lstStyle/>
-          <a:p>
-            <a:pPr>
-              <a:lnSpc>
-                <a:spcPts val="1200"/>
-              </a:lnSpc>
-              <a:spcBef>
-                <a:spcPts val="0"/>
-              </a:spcBef>
-              <a:spcAft>
-                <a:spcPts val="0"/>
-              </a:spcAft>
-              <a:defRPr sz="800" b="0" lang="ja-JP">
-                <a:solidFill>
-                  <a:srgbClr val="626669"/>
-                </a:solidFill>
-                <a:latin typeface="Noto Sans"/>
-                <a:ea typeface="Noto Sans CJK JP"/>
-                <a:cs typeface="Noto Sans"/>
-              </a:defRPr>
-            </a:pPr>
-            <a:r>
-              <a:rPr sz="800" b="0" lang="ja-JP">
-                <a:solidFill>
-                  <a:srgbClr val="626669"/>
-                </a:solidFill>
-                <a:latin typeface="Noto Sans"/>
-                <a:ea typeface="Noto Sans CJK JP"/>
-                <a:cs typeface="Noto Sans"/>
-              </a:rPr>
-              <a:t>[1] </a:t>
-            </a:r>
-            <a:r>
-              <a:rPr sz="800" b="0" lang="ja-JP">
-                <a:solidFill>
-                  <a:srgbClr val="626669"/>
-                </a:solidFill>
-                <a:latin typeface="Noto Sans"/>
-                <a:ea typeface="Noto Sans CJK JP"/>
-                <a:cs typeface="Noto Sans"/>
-                <a:hlinkClick r:id="rId2"/>
-              </a:rPr>
-              <a:t>https://github.com/ultralytics/assets/releases/download/v0.0.0/coco128-seg.zip</a:t>
-            </a:r>
-          </a:p>
-        </p:txBody>
-      </p:sp>
-    </p:spTree>
-  </p:cSld>
-  <p:clrMapOvr>
-    <a:masterClrMapping/>
-  </p:clrMapOvr>
-</p:sld>
-</file>
-
-<file path=ppt/slides/slide62.xml><?xml version="1.0" encoding="utf-8"?>
-<p:sld xmlns:a="http://schemas.openxmlformats.org/drawingml/2006/main" xmlns:p="http://schemas.openxmlformats.org/presentationml/2006/main" xmlns:r="http://schemas.openxmlformats.org/officeDocument/2006/relationships">
-  <p:cSld>
-    <p:spTree>
-      <p:nvGrpSpPr>
-        <p:cNvPr id="1" name=""/>
-        <p:cNvGrpSpPr/>
-        <p:nvPr/>
-      </p:nvGrpSpPr>
-      <p:grpSpPr/>
-      <p:sp>
-        <p:nvSpPr>
-          <p:cNvPr id="2" name="Title 1"/>
-          <p:cNvSpPr>
-            <a:spLocks noGrp="1"/>
-          </p:cNvSpPr>
-          <p:nvPr>
-            <p:ph type="title"/>
-          </p:nvPr>
-        </p:nvSpPr>
-        <p:spPr>
-          <a:xfrm>
             <a:off x="468172" y="650138"/>
             <a:ext cx="8206740" cy="616305"/>
           </a:xfrm>
@@ -36538,7 +36538,7 @@
 </p:sld>
 </file>
 
-<file path=ppt/slides/slide63.xml><?xml version="1.0" encoding="utf-8"?>
+<file path=ppt/slides/slide62.xml><?xml version="1.0" encoding="utf-8"?>
 <p:sld xmlns:a="http://schemas.openxmlformats.org/drawingml/2006/main" xmlns:p="http://schemas.openxmlformats.org/presentationml/2006/main" xmlns:r="http://schemas.openxmlformats.org/officeDocument/2006/relationships">
   <p:cSld>
     <p:spTree>
@@ -37405,7 +37405,7 @@
 </p:sld>
 </file>
 
-<file path=ppt/slides/slide64.xml><?xml version="1.0" encoding="utf-8"?>
+<file path=ppt/slides/slide63.xml><?xml version="1.0" encoding="utf-8"?>
 <p:sld xmlns:a="http://schemas.openxmlformats.org/drawingml/2006/main" xmlns:p="http://schemas.openxmlformats.org/presentationml/2006/main" xmlns:r="http://schemas.openxmlformats.org/officeDocument/2006/relationships">
   <p:cSld>
     <p:spTree>
@@ -37642,6 +37642,255 @@
                 <a:cs typeface="Noto Sans"/>
               </a:rPr>
               <a:t>COCO image ID 000000000196 / COCO128-seg公開変換注釈の輪郭を重ねて表示</a:t>
+            </a:r>
+          </a:p>
+        </p:txBody>
+      </p:sp>
+    </p:spTree>
+  </p:cSld>
+  <p:clrMapOvr>
+    <a:masterClrMapping/>
+  </p:clrMapOvr>
+</p:sld>
+</file>
+
+<file path=ppt/slides/slide64.xml><?xml version="1.0" encoding="utf-8"?>
+<p:sld xmlns:a="http://schemas.openxmlformats.org/drawingml/2006/main" xmlns:p="http://schemas.openxmlformats.org/presentationml/2006/main" xmlns:r="http://schemas.openxmlformats.org/officeDocument/2006/relationships">
+  <p:cSld>
+    <p:spTree>
+      <p:nvGrpSpPr>
+        <p:cNvPr id="1" name=""/>
+        <p:cNvGrpSpPr/>
+        <p:nvPr/>
+      </p:nvGrpSpPr>
+      <p:grpSpPr/>
+      <p:sp>
+        <p:nvSpPr>
+          <p:cNvPr id="2" name="Title 1"/>
+          <p:cNvSpPr>
+            <a:spLocks noGrp="1"/>
+          </p:cNvSpPr>
+          <p:nvPr>
+            <p:ph type="title"/>
+          </p:nvPr>
+        </p:nvSpPr>
+        <p:spPr>
+          <a:xfrm>
+            <a:off x="468172" y="650138"/>
+            <a:ext cx="8206740" cy="616305"/>
+          </a:xfrm>
+        </p:spPr>
+        <p:txBody>
+          <a:bodyPr wrap="none" anchor="t" lIns="0" rIns="0" tIns="0" bIns="0"/>
+          <a:lstStyle/>
+          <a:p>
+            <a:pPr algn="l">
+              <a:lnSpc>
+                <a:spcPct val="100000"/>
+              </a:lnSpc>
+              <a:spcBef>
+                <a:spcPts val="0"/>
+              </a:spcBef>
+              <a:spcAft>
+                <a:spcPts val="0"/>
+              </a:spcAft>
+              <a:buNone/>
+              <a:defRPr lang="ja-JP" sz="2800" b="1">
+                <a:solidFill>
+                  <a:srgbClr val="303437"/>
+                </a:solidFill>
+                <a:latin typeface="Noto Sans"/>
+                <a:ea typeface="Noto Sans CJK JP"/>
+                <a:cs typeface="Noto Sans"/>
+              </a:defRPr>
+            </a:pPr>
+            <a:r>
+              <a:rPr sz="2800" b="1" lang="ja-JP">
+                <a:solidFill>
+                  <a:srgbClr val="303437"/>
+                </a:solidFill>
+                <a:latin typeface="Noto Sans"/>
+                <a:ea typeface="Noto Sans CJK JP"/>
+                <a:cs typeface="Noto Sans"/>
+              </a:rPr>
+              <a:t>注釈が0領域の画像にも物体は写る</a:t>
+            </a:r>
+          </a:p>
+        </p:txBody>
+      </p:sp>
+      <p:sp>
+        <p:nvSpPr>
+          <p:cNvPr id="3" name="Title 2"/>
+          <p:cNvSpPr>
+            <a:spLocks noGrp="1"/>
+          </p:cNvSpPr>
+          <p:nvPr>
+            <p:ph type="title" idx="2"/>
+          </p:nvPr>
+        </p:nvSpPr>
+        <p:spPr>
+          <a:xfrm>
+            <a:off x="75895" y="0"/>
+            <a:ext cx="8115300" cy="480060"/>
+          </a:xfrm>
+        </p:spPr>
+        <p:txBody>
+          <a:bodyPr wrap="square" anchor="ctr" lIns="0" rIns="0" tIns="0" bIns="0"/>
+          <a:lstStyle/>
+          <a:p>
+            <a:pPr algn="l">
+              <a:lnSpc>
+                <a:spcPct val="100000"/>
+              </a:lnSpc>
+              <a:spcBef>
+                <a:spcPts val="0"/>
+              </a:spcBef>
+              <a:spcAft>
+                <a:spcPts val="0"/>
+              </a:spcAft>
+              <a:buNone/>
+              <a:defRPr lang="ja-JP" sz="1400" b="1">
+                <a:solidFill>
+                  <a:srgbClr val="FFFEF8"/>
+                </a:solidFill>
+                <a:latin typeface="Noto Sans"/>
+                <a:ea typeface="Noto Sans CJK JP"/>
+                <a:cs typeface="Noto Sans"/>
+              </a:defRPr>
+            </a:pPr>
+            <a:r>
+              <a:rPr lang="ja-JP" sz="1400" b="1">
+                <a:solidFill>
+                  <a:srgbClr val="FFFEF8"/>
+                </a:solidFill>
+                <a:latin typeface="Noto Sans"/>
+                <a:ea typeface="Noto Sans CJK JP"/>
+                <a:cs typeface="Noto Sans"/>
+              </a:rPr>
+              <a:t>Appendix 2. 128画像の部分集合における注釈数の分布</a:t>
+            </a:r>
+          </a:p>
+        </p:txBody>
+      </p:sp>
+      <p:pic>
+        <p:nvPicPr>
+          <p:cNvPr id="4" name="Picture 3" descr="250.jpg"/>
+          <p:cNvPicPr>
+            <a:picLocks noChangeAspect="1"/>
+          </p:cNvPicPr>
+          <p:nvPr/>
+        </p:nvPicPr>
+        <p:blipFill>
+          <a:blip r:embed="rId2"/>
+          <a:stretch>
+            <a:fillRect/>
+          </a:stretch>
+        </p:blipFill>
+        <p:spPr>
+          <a:xfrm>
+            <a:off x="2468879" y="1417320"/>
+            <a:ext cx="4206240" cy="3154680"/>
+          </a:xfrm>
+          <a:prstGeom prst="rect">
+            <a:avLst/>
+          </a:prstGeom>
+        </p:spPr>
+      </p:pic>
+      <p:sp>
+        <p:nvSpPr>
+          <p:cNvPr id="5" name="TextBox 4"/>
+          <p:cNvSpPr txBox="1"/>
+          <p:nvPr/>
+        </p:nvSpPr>
+        <p:spPr>
+          <a:xfrm>
+            <a:off x="502920" y="4787900"/>
+            <a:ext cx="8183879" cy="640080"/>
+          </a:xfrm>
+          <a:prstGeom prst="rect">
+            <a:avLst/>
+          </a:prstGeom>
+          <a:noFill/>
+        </p:spPr>
+        <p:txBody>
+          <a:bodyPr wrap="square" anchor="t" lIns="0" rIns="0" tIns="0" bIns="0">
+            <a:spAutoFit/>
+          </a:bodyPr>
+          <a:lstStyle/>
+          <a:p>
+            <a:pPr>
+              <a:lnSpc>
+                <a:spcPts val="1200"/>
+              </a:lnSpc>
+              <a:spcBef>
+                <a:spcPts val="0"/>
+              </a:spcBef>
+              <a:spcAft>
+                <a:spcPts val="0"/>
+              </a:spcAft>
+              <a:defRPr sz="800" b="0" lang="ja-JP">
+                <a:solidFill>
+                  <a:srgbClr val="626669"/>
+                </a:solidFill>
+                <a:latin typeface="Noto Sans"/>
+                <a:ea typeface="Noto Sans CJK JP"/>
+                <a:cs typeface="Noto Sans"/>
+              </a:defRPr>
+            </a:pPr>
+            <a:r>
+              <a:rPr sz="800" b="0" lang="ja-JP">
+                <a:solidFill>
+                  <a:srgbClr val="626669"/>
+                </a:solidFill>
+                <a:latin typeface="Noto Sans"/>
+                <a:ea typeface="Noto Sans CJK JP"/>
+                <a:cs typeface="Noto Sans"/>
+              </a:rPr>
+              <a:t>[1] </a:t>
+            </a:r>
+            <a:r>
+              <a:rPr sz="800" b="0" lang="ja-JP">
+                <a:solidFill>
+                  <a:srgbClr val="626669"/>
+                </a:solidFill>
+                <a:latin typeface="Noto Sans"/>
+                <a:ea typeface="Noto Sans CJK JP"/>
+                <a:cs typeface="Noto Sans"/>
+                <a:hlinkClick r:id="rId3"/>
+              </a:rPr>
+              <a:t>https://github.com/ultralytics/assets/releases/download/v0.0.0/coco128-seg.zip</a:t>
+            </a:r>
+          </a:p>
+          <a:p>
+            <a:pPr>
+              <a:lnSpc>
+                <a:spcPts val="1200"/>
+              </a:lnSpc>
+              <a:spcBef>
+                <a:spcPts val="0"/>
+              </a:spcBef>
+              <a:spcAft>
+                <a:spcPts val="0"/>
+              </a:spcAft>
+              <a:defRPr sz="800" b="0" lang="ja-JP">
+                <a:solidFill>
+                  <a:srgbClr val="626669"/>
+                </a:solidFill>
+                <a:latin typeface="Noto Sans"/>
+                <a:ea typeface="Noto Sans CJK JP"/>
+                <a:cs typeface="Noto Sans"/>
+              </a:defRPr>
+            </a:pPr>
+            <a:r>
+              <a:rPr sz="800" b="0" lang="ja-JP">
+                <a:solidFill>
+                  <a:srgbClr val="626669"/>
+                </a:solidFill>
+                <a:latin typeface="Noto Sans"/>
+                <a:ea typeface="Noto Sans CJK JP"/>
+                <a:cs typeface="Noto Sans"/>
+              </a:rPr>
+              <a:t>COCO image ID 000000000250 / COCO128-seg公開変換注釈の輪郭を重ねて表示</a:t>
             </a:r>
           </a:p>
         </p:txBody>
@@ -37713,7 +37962,7 @@
                 <a:ea typeface="Noto Sans CJK JP"/>
                 <a:cs typeface="Noto Sans"/>
               </a:rPr>
-              <a:t>注釈が0領域の画像にも物体は写る</a:t>
+              <a:t>キリン giraffe</a:t>
             </a:r>
           </a:p>
         </p:txBody>
@@ -37767,14 +38016,14 @@
                 <a:ea typeface="Noto Sans CJK JP"/>
                 <a:cs typeface="Noto Sans"/>
               </a:rPr>
-              <a:t>Appendix 2. 128画像の部分集合における注釈数の分布</a:t>
+              <a:t>Appendix 3. 画像と物体領域の追加例</a:t>
             </a:r>
           </a:p>
         </p:txBody>
       </p:sp>
       <p:pic>
         <p:nvPicPr>
-          <p:cNvPr id="4" name="Picture 3" descr="250.jpg"/>
+          <p:cNvPr id="4" name="Picture 3" descr="25.jpg"/>
           <p:cNvPicPr>
             <a:picLocks noChangeAspect="1"/>
           </p:cNvPicPr>
@@ -37788,8 +38037,8 @@
         </p:blipFill>
         <p:spPr>
           <a:xfrm>
-            <a:off x="2468879" y="1417320"/>
-            <a:ext cx="4206240" cy="3154680"/>
+            <a:off x="2202287" y="1417320"/>
+            <a:ext cx="4739425" cy="3154679"/>
           </a:xfrm>
           <a:prstGeom prst="rect">
             <a:avLst/>
@@ -37890,7 +38139,7 @@
                 <a:ea typeface="Noto Sans CJK JP"/>
                 <a:cs typeface="Noto Sans"/>
               </a:rPr>
-              <a:t>COCO image ID 000000000250 / COCO128-seg公開変換注釈の輪郭を重ねて表示</a:t>
+              <a:t>COCO image ID 000000000025 / COCO128-seg公開変換注釈の輪郭を重ねて表示</a:t>
             </a:r>
           </a:p>
         </p:txBody>
@@ -37962,255 +38211,6 @@
                 <a:ea typeface="Noto Sans CJK JP"/>
                 <a:cs typeface="Noto Sans"/>
               </a:rPr>
-              <a:t>キリン giraffe</a:t>
-            </a:r>
-          </a:p>
-        </p:txBody>
-      </p:sp>
-      <p:sp>
-        <p:nvSpPr>
-          <p:cNvPr id="3" name="Title 2"/>
-          <p:cNvSpPr>
-            <a:spLocks noGrp="1"/>
-          </p:cNvSpPr>
-          <p:nvPr>
-            <p:ph type="title" idx="2"/>
-          </p:nvPr>
-        </p:nvSpPr>
-        <p:spPr>
-          <a:xfrm>
-            <a:off x="75895" y="0"/>
-            <a:ext cx="8115300" cy="480060"/>
-          </a:xfrm>
-        </p:spPr>
-        <p:txBody>
-          <a:bodyPr wrap="square" anchor="ctr" lIns="0" rIns="0" tIns="0" bIns="0"/>
-          <a:lstStyle/>
-          <a:p>
-            <a:pPr algn="l">
-              <a:lnSpc>
-                <a:spcPct val="100000"/>
-              </a:lnSpc>
-              <a:spcBef>
-                <a:spcPts val="0"/>
-              </a:spcBef>
-              <a:spcAft>
-                <a:spcPts val="0"/>
-              </a:spcAft>
-              <a:buNone/>
-              <a:defRPr lang="ja-JP" sz="1400" b="1">
-                <a:solidFill>
-                  <a:srgbClr val="FFFEF8"/>
-                </a:solidFill>
-                <a:latin typeface="Noto Sans"/>
-                <a:ea typeface="Noto Sans CJK JP"/>
-                <a:cs typeface="Noto Sans"/>
-              </a:defRPr>
-            </a:pPr>
-            <a:r>
-              <a:rPr lang="ja-JP" sz="1400" b="1">
-                <a:solidFill>
-                  <a:srgbClr val="FFFEF8"/>
-                </a:solidFill>
-                <a:latin typeface="Noto Sans"/>
-                <a:ea typeface="Noto Sans CJK JP"/>
-                <a:cs typeface="Noto Sans"/>
-              </a:rPr>
-              <a:t>Appendix 3. 画像と物体領域の追加例</a:t>
-            </a:r>
-          </a:p>
-        </p:txBody>
-      </p:sp>
-      <p:pic>
-        <p:nvPicPr>
-          <p:cNvPr id="4" name="Picture 3" descr="25.jpg"/>
-          <p:cNvPicPr>
-            <a:picLocks noChangeAspect="1"/>
-          </p:cNvPicPr>
-          <p:nvPr/>
-        </p:nvPicPr>
-        <p:blipFill>
-          <a:blip r:embed="rId2"/>
-          <a:stretch>
-            <a:fillRect/>
-          </a:stretch>
-        </p:blipFill>
-        <p:spPr>
-          <a:xfrm>
-            <a:off x="2202287" y="1417320"/>
-            <a:ext cx="4739425" cy="3154679"/>
-          </a:xfrm>
-          <a:prstGeom prst="rect">
-            <a:avLst/>
-          </a:prstGeom>
-        </p:spPr>
-      </p:pic>
-      <p:sp>
-        <p:nvSpPr>
-          <p:cNvPr id="5" name="TextBox 4"/>
-          <p:cNvSpPr txBox="1"/>
-          <p:nvPr/>
-        </p:nvSpPr>
-        <p:spPr>
-          <a:xfrm>
-            <a:off x="502920" y="4787900"/>
-            <a:ext cx="8183879" cy="640080"/>
-          </a:xfrm>
-          <a:prstGeom prst="rect">
-            <a:avLst/>
-          </a:prstGeom>
-          <a:noFill/>
-        </p:spPr>
-        <p:txBody>
-          <a:bodyPr wrap="square" anchor="t" lIns="0" rIns="0" tIns="0" bIns="0">
-            <a:spAutoFit/>
-          </a:bodyPr>
-          <a:lstStyle/>
-          <a:p>
-            <a:pPr>
-              <a:lnSpc>
-                <a:spcPts val="1200"/>
-              </a:lnSpc>
-              <a:spcBef>
-                <a:spcPts val="0"/>
-              </a:spcBef>
-              <a:spcAft>
-                <a:spcPts val="0"/>
-              </a:spcAft>
-              <a:defRPr sz="800" b="0" lang="ja-JP">
-                <a:solidFill>
-                  <a:srgbClr val="626669"/>
-                </a:solidFill>
-                <a:latin typeface="Noto Sans"/>
-                <a:ea typeface="Noto Sans CJK JP"/>
-                <a:cs typeface="Noto Sans"/>
-              </a:defRPr>
-            </a:pPr>
-            <a:r>
-              <a:rPr sz="800" b="0" lang="ja-JP">
-                <a:solidFill>
-                  <a:srgbClr val="626669"/>
-                </a:solidFill>
-                <a:latin typeface="Noto Sans"/>
-                <a:ea typeface="Noto Sans CJK JP"/>
-                <a:cs typeface="Noto Sans"/>
-              </a:rPr>
-              <a:t>[1] </a:t>
-            </a:r>
-            <a:r>
-              <a:rPr sz="800" b="0" lang="ja-JP">
-                <a:solidFill>
-                  <a:srgbClr val="626669"/>
-                </a:solidFill>
-                <a:latin typeface="Noto Sans"/>
-                <a:ea typeface="Noto Sans CJK JP"/>
-                <a:cs typeface="Noto Sans"/>
-                <a:hlinkClick r:id="rId3"/>
-              </a:rPr>
-              <a:t>https://github.com/ultralytics/assets/releases/download/v0.0.0/coco128-seg.zip</a:t>
-            </a:r>
-          </a:p>
-          <a:p>
-            <a:pPr>
-              <a:lnSpc>
-                <a:spcPts val="1200"/>
-              </a:lnSpc>
-              <a:spcBef>
-                <a:spcPts val="0"/>
-              </a:spcBef>
-              <a:spcAft>
-                <a:spcPts val="0"/>
-              </a:spcAft>
-              <a:defRPr sz="800" b="0" lang="ja-JP">
-                <a:solidFill>
-                  <a:srgbClr val="626669"/>
-                </a:solidFill>
-                <a:latin typeface="Noto Sans"/>
-                <a:ea typeface="Noto Sans CJK JP"/>
-                <a:cs typeface="Noto Sans"/>
-              </a:defRPr>
-            </a:pPr>
-            <a:r>
-              <a:rPr sz="800" b="0" lang="ja-JP">
-                <a:solidFill>
-                  <a:srgbClr val="626669"/>
-                </a:solidFill>
-                <a:latin typeface="Noto Sans"/>
-                <a:ea typeface="Noto Sans CJK JP"/>
-                <a:cs typeface="Noto Sans"/>
-              </a:rPr>
-              <a:t>COCO image ID 000000000025 / COCO128-seg公開変換注釈の輪郭を重ねて表示</a:t>
-            </a:r>
-          </a:p>
-        </p:txBody>
-      </p:sp>
-    </p:spTree>
-  </p:cSld>
-  <p:clrMapOvr>
-    <a:masterClrMapping/>
-  </p:clrMapOvr>
-</p:sld>
-</file>
-
-<file path=ppt/slides/slide67.xml><?xml version="1.0" encoding="utf-8"?>
-<p:sld xmlns:a="http://schemas.openxmlformats.org/drawingml/2006/main" xmlns:p="http://schemas.openxmlformats.org/presentationml/2006/main" xmlns:r="http://schemas.openxmlformats.org/officeDocument/2006/relationships">
-  <p:cSld>
-    <p:spTree>
-      <p:nvGrpSpPr>
-        <p:cNvPr id="1" name=""/>
-        <p:cNvGrpSpPr/>
-        <p:nvPr/>
-      </p:nvGrpSpPr>
-      <p:grpSpPr/>
-      <p:sp>
-        <p:nvSpPr>
-          <p:cNvPr id="2" name="Title 1"/>
-          <p:cNvSpPr>
-            <a:spLocks noGrp="1"/>
-          </p:cNvSpPr>
-          <p:nvPr>
-            <p:ph type="title"/>
-          </p:nvPr>
-        </p:nvSpPr>
-        <p:spPr>
-          <a:xfrm>
-            <a:off x="468172" y="650138"/>
-            <a:ext cx="8206740" cy="616305"/>
-          </a:xfrm>
-        </p:spPr>
-        <p:txBody>
-          <a:bodyPr wrap="none" anchor="t" lIns="0" rIns="0" tIns="0" bIns="0"/>
-          <a:lstStyle/>
-          <a:p>
-            <a:pPr algn="l">
-              <a:lnSpc>
-                <a:spcPct val="100000"/>
-              </a:lnSpc>
-              <a:spcBef>
-                <a:spcPts val="0"/>
-              </a:spcBef>
-              <a:spcAft>
-                <a:spcPts val="0"/>
-              </a:spcAft>
-              <a:buNone/>
-              <a:defRPr lang="ja-JP" sz="2800" b="1">
-                <a:solidFill>
-                  <a:srgbClr val="303437"/>
-                </a:solidFill>
-                <a:latin typeface="Noto Sans"/>
-                <a:ea typeface="Noto Sans CJK JP"/>
-                <a:cs typeface="Noto Sans"/>
-              </a:defRPr>
-            </a:pPr>
-            <a:r>
-              <a:rPr sz="2800" b="1" lang="ja-JP">
-                <a:solidFill>
-                  <a:srgbClr val="303437"/>
-                </a:solidFill>
-                <a:latin typeface="Noto Sans"/>
-                <a:ea typeface="Noto Sans CJK JP"/>
-                <a:cs typeface="Noto Sans"/>
-              </a:rPr>
               <a:t>シマウマ zebra</a:t>
             </a:r>
           </a:p>
@@ -38401,7 +38401,7 @@
 </p:sld>
 </file>
 
-<file path=ppt/slides/slide68.xml><?xml version="1.0" encoding="utf-8"?>
+<file path=ppt/slides/slide67.xml><?xml version="1.0" encoding="utf-8"?>
 <p:sld xmlns:a="http://schemas.openxmlformats.org/drawingml/2006/main" xmlns:p="http://schemas.openxmlformats.org/presentationml/2006/main" xmlns:r="http://schemas.openxmlformats.org/officeDocument/2006/relationships">
   <p:cSld>
     <p:spTree>
@@ -38807,7 +38807,7 @@
 </p:sld>
 </file>
 
-<file path=ppt/slides/slide69.xml><?xml version="1.0" encoding="utf-8"?>
+<file path=ppt/slides/slide68.xml><?xml version="1.0" encoding="utf-8"?>
 <p:sld xmlns:a="http://schemas.openxmlformats.org/drawingml/2006/main" xmlns:p="http://schemas.openxmlformats.org/presentationml/2006/main" xmlns:r="http://schemas.openxmlformats.org/officeDocument/2006/relationships">
   <p:cSld>
     <p:spTree>
@@ -39044,6 +39044,255 @@
                 <a:cs typeface="Noto Sans"/>
               </a:rPr>
               <a:t>COCO image ID 000000000064 / COCO128-seg公開変換注釈の輪郭を重ねて表示</a:t>
+            </a:r>
+          </a:p>
+        </p:txBody>
+      </p:sp>
+    </p:spTree>
+  </p:cSld>
+  <p:clrMapOvr>
+    <a:masterClrMapping/>
+  </p:clrMapOvr>
+</p:sld>
+</file>
+
+<file path=ppt/slides/slide69.xml><?xml version="1.0" encoding="utf-8"?>
+<p:sld xmlns:a="http://schemas.openxmlformats.org/drawingml/2006/main" xmlns:p="http://schemas.openxmlformats.org/presentationml/2006/main" xmlns:r="http://schemas.openxmlformats.org/officeDocument/2006/relationships">
+  <p:cSld>
+    <p:spTree>
+      <p:nvGrpSpPr>
+        <p:cNvPr id="1" name=""/>
+        <p:cNvGrpSpPr/>
+        <p:nvPr/>
+      </p:nvGrpSpPr>
+      <p:grpSpPr/>
+      <p:sp>
+        <p:nvSpPr>
+          <p:cNvPr id="2" name="Title 1"/>
+          <p:cNvSpPr>
+            <a:spLocks noGrp="1"/>
+          </p:cNvSpPr>
+          <p:nvPr>
+            <p:ph type="title"/>
+          </p:nvPr>
+        </p:nvSpPr>
+        <p:spPr>
+          <a:xfrm>
+            <a:off x="468172" y="650138"/>
+            <a:ext cx="8206740" cy="616305"/>
+          </a:xfrm>
+        </p:spPr>
+        <p:txBody>
+          <a:bodyPr wrap="none" anchor="t" lIns="0" rIns="0" tIns="0" bIns="0"/>
+          <a:lstStyle/>
+          <a:p>
+            <a:pPr algn="l">
+              <a:lnSpc>
+                <a:spcPct val="100000"/>
+              </a:lnSpc>
+              <a:spcBef>
+                <a:spcPts val="0"/>
+              </a:spcBef>
+              <a:spcAft>
+                <a:spcPts val="0"/>
+              </a:spcAft>
+              <a:buNone/>
+              <a:defRPr lang="ja-JP" sz="2800" b="1">
+                <a:solidFill>
+                  <a:srgbClr val="303437"/>
+                </a:solidFill>
+                <a:latin typeface="Noto Sans"/>
+                <a:ea typeface="Noto Sans CJK JP"/>
+                <a:cs typeface="Noto Sans"/>
+              </a:defRPr>
+            </a:pPr>
+            <a:r>
+              <a:rPr sz="2800" b="1" lang="ja-JP">
+                <a:solidFill>
+                  <a:srgbClr val="303437"/>
+                </a:solidFill>
+                <a:latin typeface="Noto Sans"/>
+                <a:ea typeface="Noto Sans CJK JP"/>
+                <a:cs typeface="Noto Sans"/>
+              </a:rPr>
+              <a:t>重なり合うオートバイ motorcycle</a:t>
+            </a:r>
+          </a:p>
+        </p:txBody>
+      </p:sp>
+      <p:sp>
+        <p:nvSpPr>
+          <p:cNvPr id="3" name="Title 2"/>
+          <p:cNvSpPr>
+            <a:spLocks noGrp="1"/>
+          </p:cNvSpPr>
+          <p:nvPr>
+            <p:ph type="title" idx="2"/>
+          </p:nvPr>
+        </p:nvSpPr>
+        <p:spPr>
+          <a:xfrm>
+            <a:off x="75895" y="0"/>
+            <a:ext cx="8115300" cy="480060"/>
+          </a:xfrm>
+        </p:spPr>
+        <p:txBody>
+          <a:bodyPr wrap="square" anchor="ctr" lIns="0" rIns="0" tIns="0" bIns="0"/>
+          <a:lstStyle/>
+          <a:p>
+            <a:pPr algn="l">
+              <a:lnSpc>
+                <a:spcPct val="100000"/>
+              </a:lnSpc>
+              <a:spcBef>
+                <a:spcPts val="0"/>
+              </a:spcBef>
+              <a:spcAft>
+                <a:spcPts val="0"/>
+              </a:spcAft>
+              <a:buNone/>
+              <a:defRPr lang="ja-JP" sz="1400" b="1">
+                <a:solidFill>
+                  <a:srgbClr val="FFFEF8"/>
+                </a:solidFill>
+                <a:latin typeface="Noto Sans"/>
+                <a:ea typeface="Noto Sans CJK JP"/>
+                <a:cs typeface="Noto Sans"/>
+              </a:defRPr>
+            </a:pPr>
+            <a:r>
+              <a:rPr lang="ja-JP" sz="1400" b="1">
+                <a:solidFill>
+                  <a:srgbClr val="FFFEF8"/>
+                </a:solidFill>
+                <a:latin typeface="Noto Sans"/>
+                <a:ea typeface="Noto Sans CJK JP"/>
+                <a:cs typeface="Noto Sans"/>
+              </a:rPr>
+              <a:t>Appendix 3. 画像と物体領域の追加例</a:t>
+            </a:r>
+          </a:p>
+        </p:txBody>
+      </p:sp>
+      <p:pic>
+        <p:nvPicPr>
+          <p:cNvPr id="4" name="Picture 3" descr="73.jpg"/>
+          <p:cNvPicPr>
+            <a:picLocks noChangeAspect="1"/>
+          </p:cNvPicPr>
+          <p:nvPr/>
+        </p:nvPicPr>
+        <p:blipFill>
+          <a:blip r:embed="rId2"/>
+          <a:stretch>
+            <a:fillRect/>
+          </a:stretch>
+        </p:blipFill>
+        <p:spPr>
+          <a:xfrm>
+            <a:off x="3179504" y="1417320"/>
+            <a:ext cx="2784990" cy="3154680"/>
+          </a:xfrm>
+          <a:prstGeom prst="rect">
+            <a:avLst/>
+          </a:prstGeom>
+        </p:spPr>
+      </p:pic>
+      <p:sp>
+        <p:nvSpPr>
+          <p:cNvPr id="5" name="TextBox 4"/>
+          <p:cNvSpPr txBox="1"/>
+          <p:nvPr/>
+        </p:nvSpPr>
+        <p:spPr>
+          <a:xfrm>
+            <a:off x="502920" y="4787900"/>
+            <a:ext cx="8183879" cy="640080"/>
+          </a:xfrm>
+          <a:prstGeom prst="rect">
+            <a:avLst/>
+          </a:prstGeom>
+          <a:noFill/>
+        </p:spPr>
+        <p:txBody>
+          <a:bodyPr wrap="square" anchor="t" lIns="0" rIns="0" tIns="0" bIns="0">
+            <a:spAutoFit/>
+          </a:bodyPr>
+          <a:lstStyle/>
+          <a:p>
+            <a:pPr>
+              <a:lnSpc>
+                <a:spcPts val="1200"/>
+              </a:lnSpc>
+              <a:spcBef>
+                <a:spcPts val="0"/>
+              </a:spcBef>
+              <a:spcAft>
+                <a:spcPts val="0"/>
+              </a:spcAft>
+              <a:defRPr sz="800" b="0" lang="ja-JP">
+                <a:solidFill>
+                  <a:srgbClr val="626669"/>
+                </a:solidFill>
+                <a:latin typeface="Noto Sans"/>
+                <a:ea typeface="Noto Sans CJK JP"/>
+                <a:cs typeface="Noto Sans"/>
+              </a:defRPr>
+            </a:pPr>
+            <a:r>
+              <a:rPr sz="800" b="0" lang="ja-JP">
+                <a:solidFill>
+                  <a:srgbClr val="626669"/>
+                </a:solidFill>
+                <a:latin typeface="Noto Sans"/>
+                <a:ea typeface="Noto Sans CJK JP"/>
+                <a:cs typeface="Noto Sans"/>
+              </a:rPr>
+              <a:t>[1] </a:t>
+            </a:r>
+            <a:r>
+              <a:rPr sz="800" b="0" lang="ja-JP">
+                <a:solidFill>
+                  <a:srgbClr val="626669"/>
+                </a:solidFill>
+                <a:latin typeface="Noto Sans"/>
+                <a:ea typeface="Noto Sans CJK JP"/>
+                <a:cs typeface="Noto Sans"/>
+                <a:hlinkClick r:id="rId3"/>
+              </a:rPr>
+              <a:t>https://github.com/ultralytics/assets/releases/download/v0.0.0/coco128-seg.zip</a:t>
+            </a:r>
+          </a:p>
+          <a:p>
+            <a:pPr>
+              <a:lnSpc>
+                <a:spcPts val="1200"/>
+              </a:lnSpc>
+              <a:spcBef>
+                <a:spcPts val="0"/>
+              </a:spcBef>
+              <a:spcAft>
+                <a:spcPts val="0"/>
+              </a:spcAft>
+              <a:defRPr sz="800" b="0" lang="ja-JP">
+                <a:solidFill>
+                  <a:srgbClr val="626669"/>
+                </a:solidFill>
+                <a:latin typeface="Noto Sans"/>
+                <a:ea typeface="Noto Sans CJK JP"/>
+                <a:cs typeface="Noto Sans"/>
+              </a:defRPr>
+            </a:pPr>
+            <a:r>
+              <a:rPr sz="800" b="0" lang="ja-JP">
+                <a:solidFill>
+                  <a:srgbClr val="626669"/>
+                </a:solidFill>
+                <a:latin typeface="Noto Sans"/>
+                <a:ea typeface="Noto Sans CJK JP"/>
+                <a:cs typeface="Noto Sans"/>
+              </a:rPr>
+              <a:t>COCO image ID 000000000073 / COCO128-seg公開変換注釈の輪郭を重ねて表示</a:t>
             </a:r>
           </a:p>
         </p:txBody>
@@ -39434,7 +39683,7 @@
                 <a:ea typeface="Noto Sans CJK JP"/>
                 <a:cs typeface="Noto Sans"/>
               </a:rPr>
-              <a:t>重なり合うオートバイ motorcycle</a:t>
+              <a:t>飛行機 airplane</a:t>
             </a:r>
           </a:p>
         </p:txBody>
@@ -39495,7 +39744,7 @@
       </p:sp>
       <p:pic>
         <p:nvPicPr>
-          <p:cNvPr id="4" name="Picture 3" descr="73.jpg"/>
+          <p:cNvPr id="4" name="Picture 3" descr="81.jpg"/>
           <p:cNvPicPr>
             <a:picLocks noChangeAspect="1"/>
           </p:cNvPicPr>
@@ -39509,8 +39758,8 @@
         </p:blipFill>
         <p:spPr>
           <a:xfrm>
-            <a:off x="3179504" y="1417320"/>
-            <a:ext cx="2784990" cy="3154680"/>
+            <a:off x="2196711" y="1417320"/>
+            <a:ext cx="4750576" cy="3154680"/>
           </a:xfrm>
           <a:prstGeom prst="rect">
             <a:avLst/>
@@ -39611,7 +39860,7 @@
                 <a:ea typeface="Noto Sans CJK JP"/>
                 <a:cs typeface="Noto Sans"/>
               </a:rPr>
-              <a:t>COCO image ID 000000000073 / COCO128-seg公開変換注釈の輪郭を重ねて表示</a:t>
+              <a:t>COCO image ID 000000000081 / COCO128-seg公開変換注釈の輪郭を重ねて表示</a:t>
             </a:r>
           </a:p>
         </p:txBody>
@@ -39683,7 +39932,7 @@
                 <a:ea typeface="Noto Sans CJK JP"/>
                 <a:cs typeface="Noto Sans"/>
               </a:rPr>
-              <a:t>飛行機 airplane</a:t>
+              <a:t>ケーキとフォーク cake / fork</a:t>
             </a:r>
           </a:p>
         </p:txBody>
@@ -39744,7 +39993,7 @@
       </p:sp>
       <p:pic>
         <p:nvPicPr>
-          <p:cNvPr id="4" name="Picture 3" descr="81.jpg"/>
+          <p:cNvPr id="4" name="Picture 3" descr="92.jpg"/>
           <p:cNvPicPr>
             <a:picLocks noChangeAspect="1"/>
           </p:cNvPicPr>
@@ -39758,8 +40007,8 @@
         </p:blipFill>
         <p:spPr>
           <a:xfrm>
-            <a:off x="2196711" y="1417320"/>
-            <a:ext cx="4750576" cy="3154680"/>
+            <a:off x="2207837" y="1417320"/>
+            <a:ext cx="4728325" cy="3154680"/>
           </a:xfrm>
           <a:prstGeom prst="rect">
             <a:avLst/>
@@ -39860,7 +40109,7 @@
                 <a:ea typeface="Noto Sans CJK JP"/>
                 <a:cs typeface="Noto Sans"/>
               </a:rPr>
-              <a:t>COCO image ID 000000000081 / COCO128-seg公開変換注釈の輪郭を重ねて表示</a:t>
+              <a:t>COCO image ID 000000000092 / COCO128-seg公開変換注釈の輪郭を重ねて表示</a:t>
             </a:r>
           </a:p>
         </p:txBody>
@@ -39932,7 +40181,7 @@
                 <a:ea typeface="Noto Sans CJK JP"/>
                 <a:cs typeface="Noto Sans"/>
               </a:rPr>
-              <a:t>ケーキとフォーク cake / fork</a:t>
+              <a:t>野球の選手とバット person / baseball bat</a:t>
             </a:r>
           </a:p>
         </p:txBody>
@@ -39993,7 +40242,7 @@
       </p:sp>
       <p:pic>
         <p:nvPicPr>
-          <p:cNvPr id="4" name="Picture 3" descr="92.jpg"/>
+          <p:cNvPr id="4" name="Picture 3" descr="192.jpg"/>
           <p:cNvPicPr>
             <a:picLocks noChangeAspect="1"/>
           </p:cNvPicPr>
@@ -40007,8 +40256,8 @@
         </p:blipFill>
         <p:spPr>
           <a:xfrm>
-            <a:off x="2207837" y="1417320"/>
-            <a:ext cx="4728325" cy="3154680"/>
+            <a:off x="2468879" y="1417320"/>
+            <a:ext cx="4206240" cy="3154680"/>
           </a:xfrm>
           <a:prstGeom prst="rect">
             <a:avLst/>
@@ -40109,7 +40358,7 @@
                 <a:ea typeface="Noto Sans CJK JP"/>
                 <a:cs typeface="Noto Sans"/>
               </a:rPr>
-              <a:t>COCO image ID 000000000092 / COCO128-seg公開変換注釈の輪郭を重ねて表示</a:t>
+              <a:t>COCO image ID 000000000192 / COCO128-seg公開変換注釈の輪郭を重ねて表示</a:t>
             </a:r>
           </a:p>
         </p:txBody>
@@ -40181,7 +40430,7 @@
                 <a:ea typeface="Noto Sans CJK JP"/>
                 <a:cs typeface="Noto Sans"/>
               </a:rPr>
-              <a:t>野球の選手とバット person / baseball bat</a:t>
+              <a:t>スノーボードと遠方の人 person / snowboard</a:t>
             </a:r>
           </a:p>
         </p:txBody>
@@ -40242,7 +40491,7 @@
       </p:sp>
       <p:pic>
         <p:nvPicPr>
-          <p:cNvPr id="4" name="Picture 3" descr="192.jpg"/>
+          <p:cNvPr id="4" name="Picture 3" descr="201.jpg"/>
           <p:cNvPicPr>
             <a:picLocks noChangeAspect="1"/>
           </p:cNvPicPr>
@@ -40256,8 +40505,8 @@
         </p:blipFill>
         <p:spPr>
           <a:xfrm>
-            <a:off x="2468879" y="1417320"/>
-            <a:ext cx="4206240" cy="3154680"/>
+            <a:off x="2213360" y="1417319"/>
+            <a:ext cx="4717278" cy="3154680"/>
           </a:xfrm>
           <a:prstGeom prst="rect">
             <a:avLst/>
@@ -40358,7 +40607,7 @@
                 <a:ea typeface="Noto Sans CJK JP"/>
                 <a:cs typeface="Noto Sans"/>
               </a:rPr>
-              <a:t>COCO image ID 000000000192 / COCO128-seg公開変換注釈の輪郭を重ねて表示</a:t>
+              <a:t>COCO image ID 000000000201 / COCO128-seg公開変換注釈の輪郭を重ねて表示</a:t>
             </a:r>
           </a:p>
         </p:txBody>
@@ -40430,7 +40679,7 @@
                 <a:ea typeface="Noto Sans CJK JP"/>
                 <a:cs typeface="Noto Sans"/>
               </a:rPr>
-              <a:t>スノーボードと遠方の人 person / snowboard</a:t>
+              <a:t>前後に重なるゾウ elephant</a:t>
             </a:r>
           </a:p>
         </p:txBody>
@@ -40491,7 +40740,7 @@
       </p:sp>
       <p:pic>
         <p:nvPicPr>
-          <p:cNvPr id="4" name="Picture 3" descr="201.jpg"/>
+          <p:cNvPr id="4" name="Picture 3" descr="263.jpg"/>
           <p:cNvPicPr>
             <a:picLocks noChangeAspect="1"/>
           </p:cNvPicPr>
@@ -40505,8 +40754,8 @@
         </p:blipFill>
         <p:spPr>
           <a:xfrm>
-            <a:off x="2213360" y="1417319"/>
-            <a:ext cx="4717278" cy="3154680"/>
+            <a:off x="3115425" y="1417320"/>
+            <a:ext cx="2913149" cy="3154680"/>
           </a:xfrm>
           <a:prstGeom prst="rect">
             <a:avLst/>
@@ -40607,7 +40856,7 @@
                 <a:ea typeface="Noto Sans CJK JP"/>
                 <a:cs typeface="Noto Sans"/>
               </a:rPr>
-              <a:t>COCO image ID 000000000201 / COCO128-seg公開変換注釈の輪郭を重ねて表示</a:t>
+              <a:t>COCO image ID 000000000263 / COCO128-seg公開変換注釈の輪郭を重ねて表示</a:t>
             </a:r>
           </a:p>
         </p:txBody>
@@ -40679,14 +40928,140 @@
                 <a:ea typeface="Noto Sans CJK JP"/>
                 <a:cs typeface="Noto Sans"/>
               </a:rPr>
-              <a:t>前後に重なるゾウ elephant</a:t>
-            </a:r>
-          </a:p>
-        </p:txBody>
-      </p:sp>
-      <p:sp>
-        <p:nvSpPr>
-          <p:cNvPr id="3" name="Title 2"/>
+              <a:t>全80カテゴリ（1/4）</a:t>
+            </a:r>
+          </a:p>
+        </p:txBody>
+      </p:sp>
+      <p:sp>
+        <p:nvSpPr>
+          <p:cNvPr id="3" name="Text Placeholder 2"/>
+          <p:cNvSpPr>
+            <a:spLocks noGrp="1"/>
+          </p:cNvSpPr>
+          <p:nvPr>
+            <p:ph type="body" idx="1"/>
+          </p:nvPr>
+        </p:nvSpPr>
+        <p:spPr>
+          <a:xfrm>
+            <a:off x="594360" y="1508760"/>
+            <a:ext cx="7955279" cy="3017520"/>
+          </a:xfrm>
+        </p:spPr>
+        <p:txBody>
+          <a:bodyPr wrap="square" anchor="t" tIns="91440" bIns="91440"/>
+          <a:lstStyle/>
+          <a:p>
+            <a:pPr algn="l" lvl="0" marL="457200" indent="-355600">
+              <a:lnSpc>
+                <a:spcPct val="115000"/>
+              </a:lnSpc>
+              <a:spcBef>
+                <a:spcPts val="0"/>
+              </a:spcBef>
+              <a:spcAft>
+                <a:spcPts val="800"/>
+              </a:spcAft>
+              <a:buSzPct val="57826"/>
+              <a:buFont typeface="Noto Sans CJK JP"/>
+              <a:buChar char="●"/>
+              <a:defRPr lang="ja-JP" sz="2300" b="0">
+                <a:solidFill>
+                  <a:srgbClr val="303437"/>
+                </a:solidFill>
+                <a:latin typeface="Noto Sans"/>
+                <a:ea typeface="Noto Sans CJK JP"/>
+                <a:cs typeface="Noto Sans"/>
+              </a:defRPr>
+            </a:pPr>
+            <a:r>
+              <a:rPr lang="ja-JP" sz="2300" b="0">
+                <a:solidFill>
+                  <a:srgbClr val="303437"/>
+                </a:solidFill>
+                <a:latin typeface="Noto Sans"/>
+                <a:ea typeface="Noto Sans CJK JP"/>
+                <a:cs typeface="Noto Sans"/>
+              </a:rPr>
+              <a:t>person（1カテゴリ）: person</a:t>
+            </a:r>
+          </a:p>
+          <a:p>
+            <a:pPr algn="l" lvl="0" marL="457200" indent="-355600">
+              <a:lnSpc>
+                <a:spcPct val="115000"/>
+              </a:lnSpc>
+              <a:spcBef>
+                <a:spcPts val="0"/>
+              </a:spcBef>
+              <a:spcAft>
+                <a:spcPts val="800"/>
+              </a:spcAft>
+              <a:buSzPct val="57826"/>
+              <a:buFont typeface="Noto Sans CJK JP"/>
+              <a:buChar char="●"/>
+              <a:defRPr lang="ja-JP" sz="2300" b="0">
+                <a:solidFill>
+                  <a:srgbClr val="303437"/>
+                </a:solidFill>
+                <a:latin typeface="Noto Sans"/>
+                <a:ea typeface="Noto Sans CJK JP"/>
+                <a:cs typeface="Noto Sans"/>
+              </a:defRPr>
+            </a:pPr>
+            <a:r>
+              <a:rPr lang="ja-JP" sz="2300" b="0">
+                <a:solidFill>
+                  <a:srgbClr val="303437"/>
+                </a:solidFill>
+                <a:latin typeface="Noto Sans"/>
+                <a:ea typeface="Noto Sans CJK JP"/>
+                <a:cs typeface="Noto Sans"/>
+              </a:rPr>
+              <a:t>vehicle（8カテゴリ）: bicycle, car, motorcycle, airplane, bus, train, truck, boat</a:t>
+            </a:r>
+          </a:p>
+          <a:p>
+            <a:pPr algn="l" lvl="0" marL="457200" indent="-355600">
+              <a:lnSpc>
+                <a:spcPct val="115000"/>
+              </a:lnSpc>
+              <a:spcBef>
+                <a:spcPts val="0"/>
+              </a:spcBef>
+              <a:spcAft>
+                <a:spcPts val="800"/>
+              </a:spcAft>
+              <a:buSzPct val="57826"/>
+              <a:buFont typeface="Noto Sans CJK JP"/>
+              <a:buChar char="●"/>
+              <a:defRPr lang="ja-JP" sz="2300" b="0">
+                <a:solidFill>
+                  <a:srgbClr val="303437"/>
+                </a:solidFill>
+                <a:latin typeface="Noto Sans"/>
+                <a:ea typeface="Noto Sans CJK JP"/>
+                <a:cs typeface="Noto Sans"/>
+              </a:defRPr>
+            </a:pPr>
+            <a:r>
+              <a:rPr lang="ja-JP" sz="2300" b="0">
+                <a:solidFill>
+                  <a:srgbClr val="303437"/>
+                </a:solidFill>
+                <a:latin typeface="Noto Sans"/>
+                <a:ea typeface="Noto Sans CJK JP"/>
+                <a:cs typeface="Noto Sans"/>
+              </a:rPr>
+              <a:t>outdoor（5カテゴリ）: traffic light, fire hydrant, stop sign, parking meter, bench</a:t>
+            </a:r>
+          </a:p>
+        </p:txBody>
+      </p:sp>
+      <p:sp>
+        <p:nvSpPr>
+          <p:cNvPr id="4" name="Title 3"/>
           <p:cNvSpPr>
             <a:spLocks noGrp="1"/>
           </p:cNvSpPr>
@@ -40733,35 +41108,11 @@
                 <a:ea typeface="Noto Sans CJK JP"/>
                 <a:cs typeface="Noto Sans"/>
               </a:rPr>
-              <a:t>Appendix 3. 画像と物体領域の追加例</a:t>
-            </a:r>
-          </a:p>
-        </p:txBody>
-      </p:sp>
-      <p:pic>
-        <p:nvPicPr>
-          <p:cNvPr id="4" name="Picture 3" descr="263.jpg"/>
-          <p:cNvPicPr>
-            <a:picLocks noChangeAspect="1"/>
-          </p:cNvPicPr>
-          <p:nvPr/>
-        </p:nvPicPr>
-        <p:blipFill>
-          <a:blip r:embed="rId2"/>
-          <a:stretch>
-            <a:fillRect/>
-          </a:stretch>
-        </p:blipFill>
-        <p:spPr>
-          <a:xfrm>
-            <a:off x="3115425" y="1417320"/>
-            <a:ext cx="2913149" cy="3154680"/>
-          </a:xfrm>
-          <a:prstGeom prst="rect">
-            <a:avLst/>
-          </a:prstGeom>
-        </p:spPr>
-      </p:pic>
+              <a:t>Appendix 4. 全80物体カテゴリと画像・注釈の利用条件</a:t>
+            </a:r>
+          </a:p>
+        </p:txBody>
+      </p:sp>
       <p:sp>
         <p:nvSpPr>
           <p:cNvPr id="5" name="TextBox 4"/>
@@ -40770,7 +41121,7 @@
         </p:nvSpPr>
         <p:spPr>
           <a:xfrm>
-            <a:off x="502920" y="4787900"/>
+            <a:off x="502920" y="4828032"/>
             <a:ext cx="8183879" cy="640080"/>
           </a:xfrm>
           <a:prstGeom prst="rect">
@@ -40822,41 +41173,20 @@
                 <a:latin typeface="Noto Sans"/>
                 <a:ea typeface="Noto Sans CJK JP"/>
                 <a:cs typeface="Noto Sans"/>
-                <a:hlinkClick r:id="rId3"/>
-              </a:rPr>
-              <a:t>https://github.com/ultralytics/assets/releases/download/v0.0.0/coco128-seg.zip</a:t>
-            </a:r>
-          </a:p>
-          <a:p>
-            <a:pPr>
-              <a:lnSpc>
-                <a:spcPts val="1200"/>
-              </a:lnSpc>
-              <a:spcBef>
-                <a:spcPts val="0"/>
-              </a:spcBef>
-              <a:spcAft>
-                <a:spcPts val="0"/>
-              </a:spcAft>
-              <a:defRPr sz="800" b="0" lang="ja-JP">
+                <a:hlinkClick r:id="rId2"/>
+              </a:rPr>
+              <a:t>https://github.com/cocodataset/panopticapi/blob/master/panoptic_coco_categories.json</a:t>
+            </a:r>
+            <a:r>
+              <a:rPr sz="800" b="0" lang="ja-JP">
                 <a:solidFill>
                   <a:srgbClr val="626669"/>
                 </a:solidFill>
                 <a:latin typeface="Noto Sans"/>
                 <a:ea typeface="Noto Sans CJK JP"/>
                 <a:cs typeface="Noto Sans"/>
-              </a:defRPr>
-            </a:pPr>
-            <a:r>
-              <a:rPr sz="800" b="0" lang="ja-JP">
-                <a:solidFill>
-                  <a:srgbClr val="626669"/>
-                </a:solidFill>
-                <a:latin typeface="Noto Sans"/>
-                <a:ea typeface="Noto Sans CJK JP"/>
-                <a:cs typeface="Noto Sans"/>
-              </a:rPr>
-              <a:t>COCO image ID 000000000263 / COCO128-seg公開変換注釈の輪郭を重ねて表示</a:t>
+              </a:rPr>
+              <a:t> / isthing=1の全80カテゴリ</a:t>
             </a:r>
           </a:p>
         </p:txBody>
@@ -40928,7 +41258,7 @@
                 <a:ea typeface="Noto Sans CJK JP"/>
                 <a:cs typeface="Noto Sans"/>
               </a:rPr>
-              <a:t>全80カテゴリ（1/4）</a:t>
+              <a:t>全80カテゴリ（2/4）</a:t>
             </a:r>
           </a:p>
         </p:txBody>
@@ -40984,7 +41314,7 @@
                 <a:ea typeface="Noto Sans CJK JP"/>
                 <a:cs typeface="Noto Sans"/>
               </a:rPr>
-              <a:t>person（1カテゴリ）: person</a:t>
+              <a:t>animal（10カテゴリ）: bird, cat, dog, horse, sheep, cow, elephant, bear, zebra, giraffe</a:t>
             </a:r>
           </a:p>
           <a:p>
@@ -41019,7 +41349,7 @@
                 <a:ea typeface="Noto Sans CJK JP"/>
                 <a:cs typeface="Noto Sans"/>
               </a:rPr>
-              <a:t>vehicle（8カテゴリ）: bicycle, car, motorcycle, airplane, bus, train, truck, boat</a:t>
+              <a:t>accessory（5カテゴリ）: backpack, umbrella, handbag, tie, suitcase</a:t>
             </a:r>
           </a:p>
           <a:p>
@@ -41054,7 +41384,7 @@
                 <a:ea typeface="Noto Sans CJK JP"/>
                 <a:cs typeface="Noto Sans"/>
               </a:rPr>
-              <a:t>outdoor（5カテゴリ）: traffic light, fire hydrant, stop sign, parking meter, bench</a:t>
+              <a:t>sports（10カテゴリ）: frisbee, skis, snowboard, sports ball, kite, baseball bat, baseball glove, skateboard, surfboard, tennis racket</a:t>
             </a:r>
           </a:p>
         </p:txBody>
@@ -41258,7 +41588,7 @@
                 <a:ea typeface="Noto Sans CJK JP"/>
                 <a:cs typeface="Noto Sans"/>
               </a:rPr>
-              <a:t>全80カテゴリ（2/4）</a:t>
+              <a:t>全80カテゴリ（3/4）</a:t>
             </a:r>
           </a:p>
         </p:txBody>
@@ -41314,7 +41644,7 @@
                 <a:ea typeface="Noto Sans CJK JP"/>
                 <a:cs typeface="Noto Sans"/>
               </a:rPr>
-              <a:t>animal（10カテゴリ）: bird, cat, dog, horse, sheep, cow, elephant, bear, zebra, giraffe</a:t>
+              <a:t>kitchen（7カテゴリ）: bottle, wine glass, cup, fork, knife, spoon, bowl</a:t>
             </a:r>
           </a:p>
           <a:p>
@@ -41349,7 +41679,7 @@
                 <a:ea typeface="Noto Sans CJK JP"/>
                 <a:cs typeface="Noto Sans"/>
               </a:rPr>
-              <a:t>accessory（5カテゴリ）: backpack, umbrella, handbag, tie, suitcase</a:t>
+              <a:t>food（10カテゴリ）: banana, apple, sandwich, orange, broccoli, carrot, hot dog, pizza, donut, cake</a:t>
             </a:r>
           </a:p>
           <a:p>
@@ -41384,7 +41714,7 @@
                 <a:ea typeface="Noto Sans CJK JP"/>
                 <a:cs typeface="Noto Sans"/>
               </a:rPr>
-              <a:t>sports（10カテゴリ）: frisbee, skis, snowboard, sports ball, kite, baseball bat, baseball glove, skateboard, surfboard, tennis racket</a:t>
+              <a:t>furniture（6カテゴリ）: chair, couch, potted plant, bed, dining table, toilet</a:t>
             </a:r>
           </a:p>
         </p:txBody>
@@ -41588,7 +41918,7 @@
                 <a:ea typeface="Noto Sans CJK JP"/>
                 <a:cs typeface="Noto Sans"/>
               </a:rPr>
-              <a:t>全80カテゴリ（3/4）</a:t>
+              <a:t>全80カテゴリ（4/4）</a:t>
             </a:r>
           </a:p>
         </p:txBody>
@@ -41644,7 +41974,7 @@
                 <a:ea typeface="Noto Sans CJK JP"/>
                 <a:cs typeface="Noto Sans"/>
               </a:rPr>
-              <a:t>kitchen（7カテゴリ）: bottle, wine glass, cup, fork, knife, spoon, bowl</a:t>
+              <a:t>electronic（6カテゴリ）: tv, laptop, mouse, remote, keyboard, cell phone</a:t>
             </a:r>
           </a:p>
           <a:p>
@@ -41679,7 +42009,7 @@
                 <a:ea typeface="Noto Sans CJK JP"/>
                 <a:cs typeface="Noto Sans"/>
               </a:rPr>
-              <a:t>food（10カテゴリ）: banana, apple, sandwich, orange, broccoli, carrot, hot dog, pizza, donut, cake</a:t>
+              <a:t>appliance（5カテゴリ）: microwave, oven, toaster, sink, refrigerator</a:t>
             </a:r>
           </a:p>
           <a:p>
@@ -41714,7 +42044,7 @@
                 <a:ea typeface="Noto Sans CJK JP"/>
                 <a:cs typeface="Noto Sans"/>
               </a:rPr>
-              <a:t>furniture（6カテゴリ）: chair, couch, potted plant, bed, dining table, toilet</a:t>
+              <a:t>indoor（7カテゴリ）: book, clock, vase, scissors, teddy bear, hair drier, toothbrush</a:t>
             </a:r>
           </a:p>
         </p:txBody>
@@ -41918,7 +42248,7 @@
                 <a:ea typeface="Noto Sans CJK JP"/>
                 <a:cs typeface="Noto Sans"/>
               </a:rPr>
-              <a:t>全80カテゴリ（4/4）</a:t>
+              <a:t>画像・注釈・ソフトウェアの利用条件</a:t>
             </a:r>
           </a:p>
         </p:txBody>
@@ -41953,28 +42283,28 @@
               <a:spcAft>
                 <a:spcPts val="800"/>
               </a:spcAft>
-              <a:buSzPct val="57826"/>
+              <a:buSzPct val="55417"/>
               <a:buFont typeface="Noto Sans CJK JP"/>
               <a:buChar char="●"/>
-              <a:defRPr lang="ja-JP" sz="2300" b="0">
-                <a:solidFill>
-                  <a:srgbClr val="303437"/>
-                </a:solidFill>
-                <a:latin typeface="Noto Sans"/>
-                <a:ea typeface="Noto Sans CJK JP"/>
-                <a:cs typeface="Noto Sans"/>
-              </a:defRPr>
-            </a:pPr>
-            <a:r>
-              <a:rPr lang="ja-JP" sz="2300" b="0">
-                <a:solidFill>
-                  <a:srgbClr val="303437"/>
-                </a:solidFill>
-                <a:latin typeface="Noto Sans"/>
-                <a:ea typeface="Noto Sans CJK JP"/>
-                <a:cs typeface="Noto Sans"/>
-              </a:rPr>
-              <a:t>electronic（6カテゴリ）: tv, laptop, mouse, remote, keyboard, cell phone</a:t>
+              <a:defRPr lang="ja-JP" sz="2400" b="0">
+                <a:solidFill>
+                  <a:srgbClr val="303437"/>
+                </a:solidFill>
+                <a:latin typeface="Noto Sans"/>
+                <a:ea typeface="Noto Sans CJK JP"/>
+                <a:cs typeface="Noto Sans"/>
+              </a:defRPr>
+            </a:pPr>
+            <a:r>
+              <a:rPr lang="ja-JP" sz="2400" b="0">
+                <a:solidFill>
+                  <a:srgbClr val="303437"/>
+                </a:solidFill>
+                <a:latin typeface="Noto Sans"/>
+                <a:ea typeface="Noto Sans CJK JP"/>
+                <a:cs typeface="Noto Sans"/>
+              </a:rPr>
+              <a:t>注釈とWebサイトはCOCO ConsortiumのCC BY 4.0で提供される。</a:t>
             </a:r>
           </a:p>
           <a:p>
@@ -41988,28 +42318,28 @@
               <a:spcAft>
                 <a:spcPts val="800"/>
               </a:spcAft>
-              <a:buSzPct val="57826"/>
+              <a:buSzPct val="55417"/>
               <a:buFont typeface="Noto Sans CJK JP"/>
               <a:buChar char="●"/>
-              <a:defRPr lang="ja-JP" sz="2300" b="0">
-                <a:solidFill>
-                  <a:srgbClr val="303437"/>
-                </a:solidFill>
-                <a:latin typeface="Noto Sans"/>
-                <a:ea typeface="Noto Sans CJK JP"/>
-                <a:cs typeface="Noto Sans"/>
-              </a:defRPr>
-            </a:pPr>
-            <a:r>
-              <a:rPr lang="ja-JP" sz="2300" b="0">
-                <a:solidFill>
-                  <a:srgbClr val="303437"/>
-                </a:solidFill>
-                <a:latin typeface="Noto Sans"/>
-                <a:ea typeface="Noto Sans CJK JP"/>
-                <a:cs typeface="Noto Sans"/>
-              </a:rPr>
-              <a:t>appliance（5カテゴリ）: microwave, oven, toaster, sink, refrigerator</a:t>
+              <a:defRPr lang="ja-JP" sz="2400" b="0">
+                <a:solidFill>
+                  <a:srgbClr val="303437"/>
+                </a:solidFill>
+                <a:latin typeface="Noto Sans"/>
+                <a:ea typeface="Noto Sans CJK JP"/>
+                <a:cs typeface="Noto Sans"/>
+              </a:defRPr>
+            </a:pPr>
+            <a:r>
+              <a:rPr lang="ja-JP" sz="2400" b="0">
+                <a:solidFill>
+                  <a:srgbClr val="303437"/>
+                </a:solidFill>
+                <a:latin typeface="Noto Sans"/>
+                <a:ea typeface="Noto Sans CJK JP"/>
+                <a:cs typeface="Noto Sans"/>
+              </a:rPr>
+              <a:t>画像の著作権は撮影者側にあり、Flickrの画像ごとの利用条件に従う。</a:t>
             </a:r>
           </a:p>
           <a:p>
@@ -42023,28 +42353,28 @@
               <a:spcAft>
                 <a:spcPts val="800"/>
               </a:spcAft>
-              <a:buSzPct val="57826"/>
+              <a:buSzPct val="55417"/>
               <a:buFont typeface="Noto Sans CJK JP"/>
               <a:buChar char="●"/>
-              <a:defRPr lang="ja-JP" sz="2300" b="0">
-                <a:solidFill>
-                  <a:srgbClr val="303437"/>
-                </a:solidFill>
-                <a:latin typeface="Noto Sans"/>
-                <a:ea typeface="Noto Sans CJK JP"/>
-                <a:cs typeface="Noto Sans"/>
-              </a:defRPr>
-            </a:pPr>
-            <a:r>
-              <a:rPr lang="ja-JP" sz="2300" b="0">
-                <a:solidFill>
-                  <a:srgbClr val="303437"/>
-                </a:solidFill>
-                <a:latin typeface="Noto Sans"/>
-                <a:ea typeface="Noto Sans CJK JP"/>
-                <a:cs typeface="Noto Sans"/>
-              </a:rPr>
-              <a:t>indoor（7カテゴリ）: book, clock, vase, scissors, teddy bear, hair drier, toothbrush</a:t>
+              <a:defRPr lang="ja-JP" sz="2400" b="0">
+                <a:solidFill>
+                  <a:srgbClr val="303437"/>
+                </a:solidFill>
+                <a:latin typeface="Noto Sans"/>
+                <a:ea typeface="Noto Sans CJK JP"/>
+                <a:cs typeface="Noto Sans"/>
+              </a:defRPr>
+            </a:pPr>
+            <a:r>
+              <a:rPr lang="ja-JP" sz="2400" b="0">
+                <a:solidFill>
+                  <a:srgbClr val="303437"/>
+                </a:solidFill>
+                <a:latin typeface="Noto Sans"/>
+                <a:ea typeface="Noto Sans CJK JP"/>
+                <a:cs typeface="Noto Sans"/>
+              </a:rPr>
+              <a:t>公式APIはBSD形式の利用条件を持つ [1]。</a:t>
             </a:r>
           </a:p>
         </p:txBody>
@@ -42111,7 +42441,7 @@
         </p:nvSpPr>
         <p:spPr>
           <a:xfrm>
-            <a:off x="502920" y="4828032"/>
+            <a:off x="502920" y="4787900"/>
             <a:ext cx="8183879" cy="640080"/>
           </a:xfrm>
           <a:prstGeom prst="rect">
@@ -42165,8 +42495,29 @@
                 <a:cs typeface="Noto Sans"/>
                 <a:hlinkClick r:id="rId2"/>
               </a:rPr>
-              <a:t>https://github.com/cocodataset/panopticapi/blob/master/panoptic_coco_categories.json</a:t>
-            </a:r>
+              <a:t>https://cocodataset.org/#termsofuse</a:t>
+            </a:r>
+          </a:p>
+          <a:p>
+            <a:pPr>
+              <a:lnSpc>
+                <a:spcPts val="1200"/>
+              </a:lnSpc>
+              <a:spcBef>
+                <a:spcPts val="0"/>
+              </a:spcBef>
+              <a:spcAft>
+                <a:spcPts val="0"/>
+              </a:spcAft>
+              <a:defRPr sz="800" b="0" lang="ja-JP">
+                <a:solidFill>
+                  <a:srgbClr val="626669"/>
+                </a:solidFill>
+                <a:latin typeface="Noto Sans"/>
+                <a:ea typeface="Noto Sans CJK JP"/>
+                <a:cs typeface="Noto Sans"/>
+              </a:defRPr>
+            </a:pPr>
             <a:r>
               <a:rPr sz="800" b="0" lang="ja-JP">
                 <a:solidFill>
@@ -42175,8 +42526,9 @@
                 <a:latin typeface="Noto Sans"/>
                 <a:ea typeface="Noto Sans CJK JP"/>
                 <a:cs typeface="Noto Sans"/>
-              </a:rPr>
-              <a:t> / isthing=1の全80カテゴリ</a:t>
+                <a:hlinkClick r:id="rId3"/>
+              </a:rPr>
+              <a:t>https://github.com/cocodataset/cocoapi/blob/master/license.txt</a:t>
             </a:r>
           </a:p>
         </p:txBody>
@@ -42535,12 +42887,12 @@
           </a:xfrm>
         </p:spPr>
         <p:txBody>
-          <a:bodyPr wrap="none" anchor="t" lIns="0" rIns="0" tIns="0" bIns="0"/>
+          <a:bodyPr wrap="square" anchor="t" lIns="0" rIns="0" tIns="0" bIns="0"/>
           <a:lstStyle/>
           <a:p>
             <a:pPr algn="l">
               <a:lnSpc>
-                <a:spcPct val="100000"/>
+                <a:spcPct val="115000"/>
               </a:lnSpc>
               <a:spcBef>
                 <a:spcPts val="0"/>
@@ -42559,148 +42911,22 @@
               </a:defRPr>
             </a:pPr>
             <a:r>
-              <a:rPr sz="2800" b="1" lang="ja-JP">
-                <a:solidFill>
-                  <a:srgbClr val="303437"/>
-                </a:solidFill>
-                <a:latin typeface="Noto Sans"/>
-                <a:ea typeface="Noto Sans CJK JP"/>
-                <a:cs typeface="Noto Sans"/>
-              </a:rPr>
-              <a:t>画像・注釈・ソフトウェアの利用条件</a:t>
-            </a:r>
-          </a:p>
-        </p:txBody>
-      </p:sp>
-      <p:sp>
-        <p:nvSpPr>
-          <p:cNvPr id="3" name="Text Placeholder 2"/>
-          <p:cNvSpPr>
-            <a:spLocks noGrp="1"/>
-          </p:cNvSpPr>
-          <p:nvPr>
-            <p:ph type="body" idx="1"/>
-          </p:nvPr>
-        </p:nvSpPr>
-        <p:spPr>
-          <a:xfrm>
-            <a:off x="594360" y="1508760"/>
-            <a:ext cx="7955279" cy="3017520"/>
-          </a:xfrm>
-        </p:spPr>
-        <p:txBody>
-          <a:bodyPr wrap="square" anchor="t" tIns="91440" bIns="91440"/>
-          <a:lstStyle/>
-          <a:p>
-            <a:pPr algn="l" lvl="0" marL="457200" indent="-355600">
-              <a:lnSpc>
-                <a:spcPct val="115000"/>
-              </a:lnSpc>
-              <a:spcBef>
-                <a:spcPts val="0"/>
-              </a:spcBef>
-              <a:spcAft>
-                <a:spcPts val="800"/>
-              </a:spcAft>
-              <a:buSzPct val="55417"/>
-              <a:buFont typeface="Noto Sans CJK JP"/>
-              <a:buChar char="●"/>
-              <a:defRPr lang="ja-JP" sz="2400" b="0">
-                <a:solidFill>
-                  <a:srgbClr val="303437"/>
-                </a:solidFill>
-                <a:latin typeface="Noto Sans"/>
-                <a:ea typeface="Noto Sans CJK JP"/>
-                <a:cs typeface="Noto Sans"/>
-              </a:defRPr>
-            </a:pPr>
-            <a:r>
-              <a:rPr lang="ja-JP" sz="2400" b="0">
-                <a:solidFill>
-                  <a:srgbClr val="303437"/>
-                </a:solidFill>
-                <a:latin typeface="Noto Sans"/>
-                <a:ea typeface="Noto Sans CJK JP"/>
-                <a:cs typeface="Noto Sans"/>
-              </a:rPr>
-              <a:t>注釈とWebサイトはCOCO ConsortiumのCC BY 4.0で提供される。</a:t>
-            </a:r>
-          </a:p>
-          <a:p>
-            <a:pPr algn="l" lvl="0" marL="457200" indent="-355600">
-              <a:lnSpc>
-                <a:spcPct val="115000"/>
-              </a:lnSpc>
-              <a:spcBef>
-                <a:spcPts val="0"/>
-              </a:spcBef>
-              <a:spcAft>
-                <a:spcPts val="800"/>
-              </a:spcAft>
-              <a:buSzPct val="55417"/>
-              <a:buFont typeface="Noto Sans CJK JP"/>
-              <a:buChar char="●"/>
-              <a:defRPr lang="ja-JP" sz="2400" b="0">
-                <a:solidFill>
-                  <a:srgbClr val="303437"/>
-                </a:solidFill>
-                <a:latin typeface="Noto Sans"/>
-                <a:ea typeface="Noto Sans CJK JP"/>
-                <a:cs typeface="Noto Sans"/>
-              </a:defRPr>
-            </a:pPr>
-            <a:r>
-              <a:rPr lang="ja-JP" sz="2400" b="0">
-                <a:solidFill>
-                  <a:srgbClr val="303437"/>
-                </a:solidFill>
-                <a:latin typeface="Noto Sans"/>
-                <a:ea typeface="Noto Sans CJK JP"/>
-                <a:cs typeface="Noto Sans"/>
-              </a:rPr>
-              <a:t>画像の著作権は撮影者側にあり、Flickrの画像ごとの利用条件に従う。</a:t>
-            </a:r>
-          </a:p>
-          <a:p>
-            <a:pPr algn="l" lvl="0" marL="457200" indent="-355600">
-              <a:lnSpc>
-                <a:spcPct val="115000"/>
-              </a:lnSpc>
-              <a:spcBef>
-                <a:spcPts val="0"/>
-              </a:spcBef>
-              <a:spcAft>
-                <a:spcPts val="800"/>
-              </a:spcAft>
-              <a:buSzPct val="55417"/>
-              <a:buFont typeface="Noto Sans CJK JP"/>
-              <a:buChar char="●"/>
-              <a:defRPr lang="ja-JP" sz="2400" b="0">
-                <a:solidFill>
-                  <a:srgbClr val="303437"/>
-                </a:solidFill>
-                <a:latin typeface="Noto Sans"/>
-                <a:ea typeface="Noto Sans CJK JP"/>
-                <a:cs typeface="Noto Sans"/>
-              </a:defRPr>
-            </a:pPr>
-            <a:r>
-              <a:rPr lang="ja-JP" sz="2400" b="0">
-                <a:solidFill>
-                  <a:srgbClr val="303437"/>
-                </a:solidFill>
-                <a:latin typeface="Noto Sans"/>
-                <a:ea typeface="Noto Sans CJK JP"/>
-                <a:cs typeface="Noto Sans"/>
-              </a:rPr>
-              <a:t>公式APIはBSD形式の利用条件を持つ [1]。</a:t>
-            </a:r>
-          </a:p>
-        </p:txBody>
-      </p:sp>
-      <p:sp>
-        <p:nvSpPr>
-          <p:cNvPr id="4" name="Title 3"/>
+              <a:rPr lang="ja-JP" sz="2800" b="1">
+                <a:solidFill>
+                  <a:srgbClr val="303437"/>
+                </a:solidFill>
+                <a:latin typeface="Noto Sans"/>
+                <a:ea typeface="Noto Sans CJK JP"/>
+                <a:cs typeface="Noto Sans"/>
+              </a:rPr>
+              <a:t/>
+            </a:r>
+          </a:p>
+        </p:txBody>
+      </p:sp>
+      <p:sp>
+        <p:nvSpPr>
+          <p:cNvPr id="3" name="Title 2"/>
           <p:cNvSpPr>
             <a:spLocks noGrp="1"/>
           </p:cNvSpPr>
@@ -42747,21 +42973,21 @@
                 <a:ea typeface="Noto Sans CJK JP"/>
                 <a:cs typeface="Noto Sans"/>
               </a:rPr>
-              <a:t>Appendix 4. 全80物体カテゴリと画像・注釈の利用条件</a:t>
-            </a:r>
-          </a:p>
-        </p:txBody>
-      </p:sp>
-      <p:sp>
-        <p:nvSpPr>
-          <p:cNvPr id="5" name="TextBox 4"/>
+              <a:t>Appendix 5. 物体検出・領域分割の関連文献</a:t>
+            </a:r>
+          </a:p>
+        </p:txBody>
+      </p:sp>
+      <p:sp>
+        <p:nvSpPr>
+          <p:cNvPr id="4" name="TextBox 3"/>
           <p:cNvSpPr txBox="1"/>
           <p:nvPr/>
         </p:nvSpPr>
         <p:spPr>
           <a:xfrm>
-            <a:off x="502920" y="4787900"/>
-            <a:ext cx="8183879" cy="640080"/>
+            <a:off x="548640" y="780772"/>
+            <a:ext cx="8046720" cy="414131"/>
           </a:xfrm>
           <a:prstGeom prst="rect">
             <a:avLst/>
@@ -42769,86 +42995,407 @@
           <a:noFill/>
         </p:spPr>
         <p:txBody>
-          <a:bodyPr wrap="square" anchor="t" lIns="0" rIns="0" tIns="0" bIns="0">
+          <a:bodyPr wrap="square" lIns="0" rIns="0" tIns="0" bIns="0">
             <a:spAutoFit/>
           </a:bodyPr>
           <a:lstStyle/>
           <a:p>
-            <a:pPr>
-              <a:lnSpc>
-                <a:spcPts val="1200"/>
-              </a:lnSpc>
-              <a:spcBef>
-                <a:spcPts val="0"/>
-              </a:spcBef>
-              <a:spcAft>
-                <a:spcPts val="0"/>
-              </a:spcAft>
-              <a:defRPr sz="800" b="0" lang="ja-JP">
+            <a:pPr algn="l">
+              <a:lnSpc>
+                <a:spcPct val="100000"/>
+              </a:lnSpc>
+              <a:spcBef>
+                <a:spcPts val="0"/>
+              </a:spcBef>
+              <a:spcAft>
+                <a:spcPts val="0"/>
+              </a:spcAft>
+            </a:pPr>
+            <a:r>
+              <a:rPr sz="2100" b="1" lang="ja-JP">
+                <a:solidFill>
+                  <a:srgbClr val="303437"/>
+                </a:solidFill>
+                <a:latin typeface="Noto Sans"/>
+                <a:ea typeface="Noto Sans CJK JP"/>
+                <a:cs typeface="Noto Sans"/>
+              </a:rPr>
+              <a:t>Microsoft COCO: Common Objects in Context</a:t>
+            </a:r>
+          </a:p>
+        </p:txBody>
+      </p:sp>
+      <p:sp>
+        <p:nvSpPr>
+          <p:cNvPr id="5" name="TextBox 4"/>
+          <p:cNvSpPr txBox="1"/>
+          <p:nvPr/>
+        </p:nvSpPr>
+        <p:spPr>
+          <a:xfrm>
+            <a:off x="548640" y="1212979"/>
+            <a:ext cx="8046720" cy="267034"/>
+          </a:xfrm>
+          <a:prstGeom prst="rect">
+            <a:avLst/>
+          </a:prstGeom>
+          <a:noFill/>
+        </p:spPr>
+        <p:txBody>
+          <a:bodyPr wrap="square" lIns="0" rIns="0" tIns="0" bIns="0">
+            <a:spAutoFit/>
+          </a:bodyPr>
+          <a:lstStyle/>
+          <a:p>
+            <a:pPr algn="l">
+              <a:lnSpc>
+                <a:spcPct val="100000"/>
+              </a:lnSpc>
+              <a:spcBef>
+                <a:spcPts val="0"/>
+              </a:spcBef>
+              <a:spcAft>
+                <a:spcPts val="0"/>
+              </a:spcAft>
+            </a:pPr>
+            <a:r>
+              <a:rPr sz="1250" b="0" lang="ja-JP">
                 <a:solidFill>
                   <a:srgbClr val="626669"/>
                 </a:solidFill>
                 <a:latin typeface="Noto Sans"/>
                 <a:ea typeface="Noto Sans CJK JP"/>
                 <a:cs typeface="Noto Sans"/>
-              </a:defRPr>
-            </a:pPr>
-            <a:r>
-              <a:rPr sz="800" b="0" lang="ja-JP">
+              </a:rPr>
+              <a:t>Tsung-Yi Lin et al. (2014). European Conference on Computer Vision (ECCV), pp. 740–755.</a:t>
+            </a:r>
+          </a:p>
+        </p:txBody>
+      </p:sp>
+      <p:sp>
+        <p:nvSpPr>
+          <p:cNvPr id="6" name="TextBox 5"/>
+          <p:cNvSpPr txBox="1"/>
+          <p:nvPr/>
+        </p:nvSpPr>
+        <p:spPr>
+          <a:xfrm>
+            <a:off x="548640" y="1529020"/>
+            <a:ext cx="8046720" cy="364650"/>
+          </a:xfrm>
+          <a:prstGeom prst="rect">
+            <a:avLst/>
+          </a:prstGeom>
+          <a:noFill/>
+        </p:spPr>
+        <p:txBody>
+          <a:bodyPr wrap="square" lIns="0" rIns="0" tIns="0" bIns="0">
+            <a:spAutoFit/>
+          </a:bodyPr>
+          <a:lstStyle/>
+          <a:p>
+            <a:pPr algn="l">
+              <a:lnSpc>
+                <a:spcPct val="100000"/>
+              </a:lnSpc>
+              <a:spcBef>
+                <a:spcPts val="0"/>
+              </a:spcBef>
+              <a:spcAft>
+                <a:spcPts val="0"/>
+              </a:spcAft>
+            </a:pPr>
+            <a:r>
+              <a:rPr sz="1700" b="0" lang="ja-JP">
+                <a:solidFill>
+                  <a:srgbClr val="303437"/>
+                </a:solidFill>
+                <a:latin typeface="Noto Sans"/>
+                <a:ea typeface="Noto Sans CJK JP"/>
+                <a:cs typeface="Noto Sans"/>
+              </a:rPr>
+              <a:t>日常場面の画像収集、領域注釈と初期評価を報告する。</a:t>
+            </a:r>
+          </a:p>
+        </p:txBody>
+      </p:sp>
+      <p:sp>
+        <p:nvSpPr>
+          <p:cNvPr id="7" name="TextBox 6"/>
+          <p:cNvSpPr txBox="1"/>
+          <p:nvPr/>
+        </p:nvSpPr>
+        <p:spPr>
+          <a:xfrm>
+            <a:off x="548640" y="1893062"/>
+            <a:ext cx="8046720" cy="223877"/>
+          </a:xfrm>
+          <a:prstGeom prst="rect">
+            <a:avLst/>
+          </a:prstGeom>
+          <a:noFill/>
+        </p:spPr>
+        <p:txBody>
+          <a:bodyPr wrap="square" lIns="0" rIns="0" tIns="0" bIns="0">
+            <a:spAutoFit/>
+          </a:bodyPr>
+          <a:lstStyle/>
+          <a:p>
+            <a:pPr algn="l">
+              <a:lnSpc>
+                <a:spcPct val="100000"/>
+              </a:lnSpc>
+              <a:spcBef>
+                <a:spcPts val="0"/>
+              </a:spcBef>
+              <a:spcAft>
+                <a:spcPts val="0"/>
+              </a:spcAft>
+            </a:pPr>
+            <a:r>
+              <a:rPr sz="1000" b="0" lang="ja-JP">
                 <a:solidFill>
                   <a:srgbClr val="626669"/>
                 </a:solidFill>
                 <a:latin typeface="Noto Sans"/>
                 <a:ea typeface="Noto Sans CJK JP"/>
                 <a:cs typeface="Noto Sans"/>
-              </a:rPr>
-              <a:t>[1] </a:t>
-            </a:r>
-            <a:r>
-              <a:rPr sz="800" b="0" lang="ja-JP">
+                <a:hlinkClick r:id="rId2"/>
+              </a:rPr>
+              <a:t>https://arxiv.org/abs/1405.0312</a:t>
+            </a:r>
+          </a:p>
+        </p:txBody>
+      </p:sp>
+      <p:sp>
+        <p:nvSpPr>
+          <p:cNvPr id="8" name="TextBox 7"/>
+          <p:cNvSpPr txBox="1"/>
+          <p:nvPr/>
+        </p:nvSpPr>
+        <p:spPr>
+          <a:xfrm>
+            <a:off x="548640" y="3041374"/>
+            <a:ext cx="8046720" cy="414132"/>
+          </a:xfrm>
+          <a:prstGeom prst="rect">
+            <a:avLst/>
+          </a:prstGeom>
+          <a:noFill/>
+        </p:spPr>
+        <p:txBody>
+          <a:bodyPr wrap="square" lIns="0" rIns="0" tIns="0" bIns="0">
+            <a:spAutoFit/>
+          </a:bodyPr>
+          <a:lstStyle/>
+          <a:p>
+            <a:pPr algn="l">
+              <a:lnSpc>
+                <a:spcPct val="100000"/>
+              </a:lnSpc>
+              <a:spcBef>
+                <a:spcPts val="0"/>
+              </a:spcBef>
+              <a:spcAft>
+                <a:spcPts val="0"/>
+              </a:spcAft>
+            </a:pPr>
+            <a:r>
+              <a:rPr sz="2100" b="1" lang="ja-JP">
+                <a:solidFill>
+                  <a:srgbClr val="303437"/>
+                </a:solidFill>
+                <a:latin typeface="Noto Sans"/>
+                <a:ea typeface="Noto Sans CJK JP"/>
+                <a:cs typeface="Noto Sans"/>
+              </a:rPr>
+              <a:t>COCO API</a:t>
+            </a:r>
+          </a:p>
+        </p:txBody>
+      </p:sp>
+      <p:sp>
+        <p:nvSpPr>
+          <p:cNvPr id="9" name="TextBox 8"/>
+          <p:cNvSpPr txBox="1"/>
+          <p:nvPr/>
+        </p:nvSpPr>
+        <p:spPr>
+          <a:xfrm>
+            <a:off x="548640" y="3488028"/>
+            <a:ext cx="8046720" cy="281482"/>
+          </a:xfrm>
+          <a:prstGeom prst="rect">
+            <a:avLst/>
+          </a:prstGeom>
+          <a:noFill/>
+        </p:spPr>
+        <p:txBody>
+          <a:bodyPr wrap="square" lIns="0" rIns="0" tIns="0" bIns="0">
+            <a:spAutoFit/>
+          </a:bodyPr>
+          <a:lstStyle/>
+          <a:p>
+            <a:pPr algn="l">
+              <a:lnSpc>
+                <a:spcPct val="100000"/>
+              </a:lnSpc>
+              <a:spcBef>
+                <a:spcPts val="0"/>
+              </a:spcBef>
+              <a:spcAft>
+                <a:spcPts val="0"/>
+              </a:spcAft>
+            </a:pPr>
+            <a:r>
+              <a:rPr sz="1250" b="0" lang="ja-JP">
                 <a:solidFill>
                   <a:srgbClr val="626669"/>
                 </a:solidFill>
                 <a:latin typeface="Noto Sans"/>
                 <a:ea typeface="Noto Sans CJK JP"/>
                 <a:cs typeface="Noto Sans"/>
-                <a:hlinkClick r:id="rId2"/>
-              </a:rPr>
-              <a:t>https://cocodataset.org/#termsofuse</a:t>
-            </a:r>
-          </a:p>
-          <a:p>
-            <a:pPr>
-              <a:lnSpc>
-                <a:spcPts val="1200"/>
-              </a:lnSpc>
-              <a:spcBef>
-                <a:spcPts val="0"/>
-              </a:spcBef>
-              <a:spcAft>
-                <a:spcPts val="0"/>
-              </a:spcAft>
-              <a:defRPr sz="800" b="0" lang="ja-JP">
+              </a:rPr>
+              <a:t>COCO Consortium (n.d.; 参照日 2026-10-15). GitHub, cocodataset/cocoapi.</a:t>
+            </a:r>
+          </a:p>
+        </p:txBody>
+      </p:sp>
+      <p:sp>
+        <p:nvSpPr>
+          <p:cNvPr id="10" name="TextBox 9"/>
+          <p:cNvSpPr txBox="1"/>
+          <p:nvPr/>
+        </p:nvSpPr>
+        <p:spPr>
+          <a:xfrm>
+            <a:off x="548640" y="3804067"/>
+            <a:ext cx="8046720" cy="363570"/>
+          </a:xfrm>
+          <a:prstGeom prst="rect">
+            <a:avLst/>
+          </a:prstGeom>
+          <a:noFill/>
+        </p:spPr>
+        <p:txBody>
+          <a:bodyPr wrap="square" lIns="0" rIns="0" tIns="0" bIns="0">
+            <a:spAutoFit/>
+          </a:bodyPr>
+          <a:lstStyle/>
+          <a:p>
+            <a:pPr algn="l">
+              <a:lnSpc>
+                <a:spcPct val="100000"/>
+              </a:lnSpc>
+              <a:spcBef>
+                <a:spcPts val="0"/>
+              </a:spcBef>
+              <a:spcAft>
+                <a:spcPts val="0"/>
+              </a:spcAft>
+            </a:pPr>
+            <a:r>
+              <a:rPr sz="1700" b="0" lang="ja-JP">
+                <a:solidFill>
+                  <a:srgbClr val="303437"/>
+                </a:solidFill>
+                <a:latin typeface="Noto Sans"/>
+                <a:ea typeface="Noto Sans CJK JP"/>
+                <a:cs typeface="Noto Sans"/>
+              </a:rPr>
+              <a:t>画像・注釈の読込み、マスク表現、検出・分割の評価を担う公式実装。</a:t>
+            </a:r>
+          </a:p>
+        </p:txBody>
+      </p:sp>
+      <p:sp>
+        <p:nvSpPr>
+          <p:cNvPr id="11" name="TextBox 10"/>
+          <p:cNvSpPr txBox="1"/>
+          <p:nvPr/>
+        </p:nvSpPr>
+        <p:spPr>
+          <a:xfrm>
+            <a:off x="548640" y="4167030"/>
+            <a:ext cx="8046720" cy="223877"/>
+          </a:xfrm>
+          <a:prstGeom prst="rect">
+            <a:avLst/>
+          </a:prstGeom>
+          <a:noFill/>
+        </p:spPr>
+        <p:txBody>
+          <a:bodyPr wrap="square" lIns="0" rIns="0" tIns="0" bIns="0">
+            <a:spAutoFit/>
+          </a:bodyPr>
+          <a:lstStyle/>
+          <a:p>
+            <a:pPr algn="l">
+              <a:lnSpc>
+                <a:spcPct val="100000"/>
+              </a:lnSpc>
+              <a:spcBef>
+                <a:spcPts val="0"/>
+              </a:spcBef>
+              <a:spcAft>
+                <a:spcPts val="0"/>
+              </a:spcAft>
+            </a:pPr>
+            <a:r>
+              <a:rPr sz="1000" b="0" lang="ja-JP">
                 <a:solidFill>
                   <a:srgbClr val="626669"/>
                 </a:solidFill>
                 <a:latin typeface="Noto Sans"/>
                 <a:ea typeface="Noto Sans CJK JP"/>
                 <a:cs typeface="Noto Sans"/>
-              </a:defRPr>
-            </a:pPr>
-            <a:r>
-              <a:rPr sz="800" b="0" lang="ja-JP">
-                <a:solidFill>
-                  <a:srgbClr val="626669"/>
-                </a:solidFill>
-                <a:latin typeface="Noto Sans"/>
-                <a:ea typeface="Noto Sans CJK JP"/>
-                <a:cs typeface="Noto Sans"/>
                 <a:hlinkClick r:id="rId3"/>
               </a:rPr>
-              <a:t>https://github.com/cocodataset/cocoapi/blob/master/license.txt</a:t>
-            </a:r>
+              <a:t>https://github.com/cocodataset/cocoapi</a:t>
+            </a:r>
+          </a:p>
+        </p:txBody>
+      </p:sp>
+      <p:sp>
+        <p:nvSpPr>
+          <p:cNvPr id="12" name="Rectangle 11"/>
+          <p:cNvSpPr/>
+          <p:nvPr/>
+        </p:nvSpPr>
+        <p:spPr>
+          <a:xfrm>
+            <a:off x="548640" y="2852928"/>
+            <a:ext cx="8046720" cy="7620"/>
+          </a:xfrm>
+          <a:prstGeom prst="rect">
+            <a:avLst/>
+          </a:prstGeom>
+          <a:solidFill>
+            <a:srgbClr val="C9CCCA"/>
+          </a:solidFill>
+          <a:ln>
+            <a:noFill/>
+          </a:ln>
+        </p:spPr>
+        <p:style>
+          <a:lnRef idx="1">
+            <a:schemeClr val="accent1"/>
+          </a:lnRef>
+          <a:fillRef idx="3">
+            <a:schemeClr val="accent1"/>
+          </a:fillRef>
+          <a:effectRef idx="2">
+            <a:schemeClr val="accent1"/>
+          </a:effectRef>
+          <a:fontRef idx="minor">
+            <a:schemeClr val="lt1"/>
+          </a:fontRef>
+        </p:style>
+        <p:txBody>
+          <a:bodyPr rtlCol="0" anchor="ctr"/>
+          <a:lstStyle/>
+          <a:p>
+            <a:pPr algn="ctr"/>
           </a:p>
         </p:txBody>
       </p:sp>
@@ -43020,7 +43567,7 @@
                 <a:ea typeface="Noto Sans CJK JP"/>
                 <a:cs typeface="Noto Sans"/>
               </a:rPr>
-              <a:t>Microsoft COCO: Common Objects in Context</a:t>
+              <a:t>COCO-Stuff: Thing and Stuff Classes in Context</a:t>
             </a:r>
           </a:p>
         </p:txBody>
@@ -43034,7 +43581,7 @@
         <p:spPr>
           <a:xfrm>
             <a:off x="548640" y="1212979"/>
-            <a:ext cx="8046720" cy="267034"/>
+            <a:ext cx="8046720" cy="457471"/>
           </a:xfrm>
           <a:prstGeom prst="rect">
             <a:avLst/>
@@ -43067,7 +43614,7 @@
                 <a:ea typeface="Noto Sans CJK JP"/>
                 <a:cs typeface="Noto Sans"/>
               </a:rPr>
-              <a:t>Tsung-Yi Lin et al. (2014). European Conference on Computer Vision (ECCV), pp. 740–755.</a:t>
+              <a:t>Holger Caesar, Jasper Uijlings, Vittorio Ferrari (2018). IEEE/CVF Conference on Computer Vision and Pattern Recognition (CVPR), pp. 1209–1218.</a:t>
             </a:r>
           </a:p>
         </p:txBody>
@@ -43080,7 +43627,7 @@
         </p:nvSpPr>
         <p:spPr>
           <a:xfrm>
-            <a:off x="548640" y="1529020"/>
+            <a:off x="548640" y="1719165"/>
             <a:ext cx="8046720" cy="364650"/>
           </a:xfrm>
           <a:prstGeom prst="rect">
@@ -43114,7 +43661,7 @@
                 <a:ea typeface="Noto Sans CJK JP"/>
                 <a:cs typeface="Noto Sans"/>
               </a:rPr>
-              <a:t>COCOの原著。日常場面の画像収集、領域注釈と初期評価を報告する。</a:t>
+              <a:t>COCOへ背景の画素注釈を加え、物体と背景を含む場面理解を扱う研究。</a:t>
             </a:r>
           </a:p>
         </p:txBody>
@@ -43127,7 +43674,7 @@
         </p:nvSpPr>
         <p:spPr>
           <a:xfrm>
-            <a:off x="548640" y="1893062"/>
+            <a:off x="548640" y="2083562"/>
             <a:ext cx="8046720" cy="223877"/>
           </a:xfrm>
           <a:prstGeom prst="rect">
@@ -43160,9 +43707,9 @@
                 <a:latin typeface="Noto Sans"/>
                 <a:ea typeface="Noto Sans CJK JP"/>
                 <a:cs typeface="Noto Sans"/>
-                <a:hlinkClick r:id="rId2"/>
-              </a:rPr>
-              <a:t>https://arxiv.org/abs/1405.0312</a:t>
+                <a:hlinkClick r:id="rId3"/>
+              </a:rPr>
+              <a:t>https://arxiv.org/abs/1612.03716</a:t>
             </a:r>
           </a:p>
         </p:txBody>
@@ -43209,7 +43756,7 @@
                 <a:ea typeface="Noto Sans CJK JP"/>
                 <a:cs typeface="Noto Sans"/>
               </a:rPr>
-              <a:t>COCO API</a:t>
+              <a:t>Panoptic Segmentation</a:t>
             </a:r>
           </a:p>
         </p:txBody>
@@ -43222,8 +43769,8 @@
         </p:nvSpPr>
         <p:spPr>
           <a:xfrm>
-            <a:off x="548640" y="3488028"/>
-            <a:ext cx="8046720" cy="281482"/>
+            <a:off x="548640" y="3473580"/>
+            <a:ext cx="8046720" cy="457470"/>
           </a:xfrm>
           <a:prstGeom prst="rect">
             <a:avLst/>
@@ -43256,7 +43803,7 @@
                 <a:ea typeface="Noto Sans CJK JP"/>
                 <a:cs typeface="Noto Sans"/>
               </a:rPr>
-              <a:t>COCO Consortium (n.d.; 参照日 2026-10-15). GitHub, cocodataset/cocoapi.</a:t>
+              <a:t>Alexander Kirillov, Kaiming He, Ross Girshick, Carsten Rother, Piotr Dollár (2019). IEEE/CVF Conference on Computer Vision and Pattern Recognition (CVPR), pp. 9404–9413.</a:t>
             </a:r>
           </a:p>
         </p:txBody>
@@ -43269,8 +43816,8 @@
         </p:nvSpPr>
         <p:spPr>
           <a:xfrm>
-            <a:off x="548640" y="3804067"/>
-            <a:ext cx="8046720" cy="363570"/>
+            <a:off x="548640" y="3979765"/>
+            <a:ext cx="8046720" cy="364650"/>
           </a:xfrm>
           <a:prstGeom prst="rect">
             <a:avLst/>
@@ -43303,7 +43850,7 @@
                 <a:ea typeface="Noto Sans CJK JP"/>
                 <a:cs typeface="Noto Sans"/>
               </a:rPr>
-              <a:t>画像・注釈の読込み、マスク表現、検出・分割の評価を担う公式実装。</a:t>
+              <a:t>意味的領域分割と個体ごとの分割を統合し、共通指標PQを提案する。</a:t>
             </a:r>
           </a:p>
         </p:txBody>
@@ -43316,7 +43863,7 @@
         </p:nvSpPr>
         <p:spPr>
           <a:xfrm>
-            <a:off x="548640" y="4167030"/>
+            <a:off x="548640" y="4344163"/>
             <a:ext cx="8046720" cy="223877"/>
           </a:xfrm>
           <a:prstGeom prst="rect">
@@ -43349,9 +43896,9 @@
                 <a:latin typeface="Noto Sans"/>
                 <a:ea typeface="Noto Sans CJK JP"/>
                 <a:cs typeface="Noto Sans"/>
-                <a:hlinkClick r:id="rId3"/>
-              </a:rPr>
-              <a:t>https://github.com/cocodataset/cocoapi</a:t>
+                <a:hlinkClick r:id="rId2"/>
+              </a:rPr>
+              <a:t>https://arxiv.org/abs/1801.00868</a:t>
             </a:r>
           </a:p>
         </p:txBody>
@@ -43408,553 +43955,6 @@
 </file>
 
 <file path=ppt/slides/slide82.xml><?xml version="1.0" encoding="utf-8"?>
-<p:sld xmlns:a="http://schemas.openxmlformats.org/drawingml/2006/main" xmlns:p="http://schemas.openxmlformats.org/presentationml/2006/main" xmlns:r="http://schemas.openxmlformats.org/officeDocument/2006/relationships">
-  <p:cSld>
-    <p:spTree>
-      <p:nvGrpSpPr>
-        <p:cNvPr id="1" name=""/>
-        <p:cNvGrpSpPr/>
-        <p:nvPr/>
-      </p:nvGrpSpPr>
-      <p:grpSpPr/>
-      <p:sp>
-        <p:nvSpPr>
-          <p:cNvPr id="2" name="Title 1"/>
-          <p:cNvSpPr>
-            <a:spLocks noGrp="1"/>
-          </p:cNvSpPr>
-          <p:nvPr>
-            <p:ph type="title"/>
-          </p:nvPr>
-        </p:nvSpPr>
-        <p:spPr>
-          <a:xfrm>
-            <a:off x="468172" y="650138"/>
-            <a:ext cx="8206740" cy="616305"/>
-          </a:xfrm>
-        </p:spPr>
-        <p:txBody>
-          <a:bodyPr wrap="square" anchor="t" lIns="0" rIns="0" tIns="0" bIns="0"/>
-          <a:lstStyle/>
-          <a:p>
-            <a:pPr algn="l">
-              <a:lnSpc>
-                <a:spcPct val="115000"/>
-              </a:lnSpc>
-              <a:spcBef>
-                <a:spcPts val="0"/>
-              </a:spcBef>
-              <a:spcAft>
-                <a:spcPts val="0"/>
-              </a:spcAft>
-              <a:buNone/>
-              <a:defRPr lang="ja-JP" sz="2800" b="1">
-                <a:solidFill>
-                  <a:srgbClr val="303437"/>
-                </a:solidFill>
-                <a:latin typeface="Noto Sans"/>
-                <a:ea typeface="Noto Sans CJK JP"/>
-                <a:cs typeface="Noto Sans"/>
-              </a:defRPr>
-            </a:pPr>
-            <a:r>
-              <a:rPr lang="ja-JP" sz="2800" b="1">
-                <a:solidFill>
-                  <a:srgbClr val="303437"/>
-                </a:solidFill>
-                <a:latin typeface="Noto Sans"/>
-                <a:ea typeface="Noto Sans CJK JP"/>
-                <a:cs typeface="Noto Sans"/>
-              </a:rPr>
-              <a:t/>
-            </a:r>
-          </a:p>
-        </p:txBody>
-      </p:sp>
-      <p:sp>
-        <p:nvSpPr>
-          <p:cNvPr id="3" name="Title 2"/>
-          <p:cNvSpPr>
-            <a:spLocks noGrp="1"/>
-          </p:cNvSpPr>
-          <p:nvPr>
-            <p:ph type="title" idx="2"/>
-          </p:nvPr>
-        </p:nvSpPr>
-        <p:spPr>
-          <a:xfrm>
-            <a:off x="75895" y="0"/>
-            <a:ext cx="8115300" cy="480060"/>
-          </a:xfrm>
-        </p:spPr>
-        <p:txBody>
-          <a:bodyPr wrap="square" anchor="ctr" lIns="0" rIns="0" tIns="0" bIns="0"/>
-          <a:lstStyle/>
-          <a:p>
-            <a:pPr algn="l">
-              <a:lnSpc>
-                <a:spcPct val="100000"/>
-              </a:lnSpc>
-              <a:spcBef>
-                <a:spcPts val="0"/>
-              </a:spcBef>
-              <a:spcAft>
-                <a:spcPts val="0"/>
-              </a:spcAft>
-              <a:buNone/>
-              <a:defRPr lang="ja-JP" sz="1400" b="1">
-                <a:solidFill>
-                  <a:srgbClr val="FFFEF8"/>
-                </a:solidFill>
-                <a:latin typeface="Noto Sans"/>
-                <a:ea typeface="Noto Sans CJK JP"/>
-                <a:cs typeface="Noto Sans"/>
-              </a:defRPr>
-            </a:pPr>
-            <a:r>
-              <a:rPr lang="ja-JP" sz="1400" b="1">
-                <a:solidFill>
-                  <a:srgbClr val="FFFEF8"/>
-                </a:solidFill>
-                <a:latin typeface="Noto Sans"/>
-                <a:ea typeface="Noto Sans CJK JP"/>
-                <a:cs typeface="Noto Sans"/>
-              </a:rPr>
-              <a:t>Appendix 5. 物体検出・領域分割の関連文献</a:t>
-            </a:r>
-          </a:p>
-        </p:txBody>
-      </p:sp>
-      <p:sp>
-        <p:nvSpPr>
-          <p:cNvPr id="4" name="TextBox 3"/>
-          <p:cNvSpPr txBox="1"/>
-          <p:nvPr/>
-        </p:nvSpPr>
-        <p:spPr>
-          <a:xfrm>
-            <a:off x="548640" y="780772"/>
-            <a:ext cx="8046720" cy="414131"/>
-          </a:xfrm>
-          <a:prstGeom prst="rect">
-            <a:avLst/>
-          </a:prstGeom>
-          <a:noFill/>
-        </p:spPr>
-        <p:txBody>
-          <a:bodyPr wrap="square" lIns="0" rIns="0" tIns="0" bIns="0">
-            <a:spAutoFit/>
-          </a:bodyPr>
-          <a:lstStyle/>
-          <a:p>
-            <a:pPr algn="l">
-              <a:lnSpc>
-                <a:spcPct val="100000"/>
-              </a:lnSpc>
-              <a:spcBef>
-                <a:spcPts val="0"/>
-              </a:spcBef>
-              <a:spcAft>
-                <a:spcPts val="0"/>
-              </a:spcAft>
-            </a:pPr>
-            <a:r>
-              <a:rPr sz="2100" b="1" lang="ja-JP">
-                <a:solidFill>
-                  <a:srgbClr val="303437"/>
-                </a:solidFill>
-                <a:latin typeface="Noto Sans"/>
-                <a:ea typeface="Noto Sans CJK JP"/>
-                <a:cs typeface="Noto Sans"/>
-              </a:rPr>
-              <a:t>COCO-Stuff: Thing and Stuff Classes in Context</a:t>
-            </a:r>
-          </a:p>
-        </p:txBody>
-      </p:sp>
-      <p:sp>
-        <p:nvSpPr>
-          <p:cNvPr id="5" name="TextBox 4"/>
-          <p:cNvSpPr txBox="1"/>
-          <p:nvPr/>
-        </p:nvSpPr>
-        <p:spPr>
-          <a:xfrm>
-            <a:off x="548640" y="1212979"/>
-            <a:ext cx="8046720" cy="457471"/>
-          </a:xfrm>
-          <a:prstGeom prst="rect">
-            <a:avLst/>
-          </a:prstGeom>
-          <a:noFill/>
-        </p:spPr>
-        <p:txBody>
-          <a:bodyPr wrap="square" lIns="0" rIns="0" tIns="0" bIns="0">
-            <a:spAutoFit/>
-          </a:bodyPr>
-          <a:lstStyle/>
-          <a:p>
-            <a:pPr algn="l">
-              <a:lnSpc>
-                <a:spcPct val="100000"/>
-              </a:lnSpc>
-              <a:spcBef>
-                <a:spcPts val="0"/>
-              </a:spcBef>
-              <a:spcAft>
-                <a:spcPts val="0"/>
-              </a:spcAft>
-            </a:pPr>
-            <a:r>
-              <a:rPr sz="1250" b="0" lang="ja-JP">
-                <a:solidFill>
-                  <a:srgbClr val="626669"/>
-                </a:solidFill>
-                <a:latin typeface="Noto Sans"/>
-                <a:ea typeface="Noto Sans CJK JP"/>
-                <a:cs typeface="Noto Sans"/>
-              </a:rPr>
-              <a:t>Holger Caesar, Jasper Uijlings, Vittorio Ferrari (2018). IEEE/CVF Conference on Computer Vision and Pattern Recognition (CVPR), pp. 1209–1218.</a:t>
-            </a:r>
-          </a:p>
-        </p:txBody>
-      </p:sp>
-      <p:sp>
-        <p:nvSpPr>
-          <p:cNvPr id="6" name="TextBox 5"/>
-          <p:cNvSpPr txBox="1"/>
-          <p:nvPr/>
-        </p:nvSpPr>
-        <p:spPr>
-          <a:xfrm>
-            <a:off x="548640" y="1719165"/>
-            <a:ext cx="8046720" cy="364650"/>
-          </a:xfrm>
-          <a:prstGeom prst="rect">
-            <a:avLst/>
-          </a:prstGeom>
-          <a:noFill/>
-        </p:spPr>
-        <p:txBody>
-          <a:bodyPr wrap="square" lIns="0" rIns="0" tIns="0" bIns="0">
-            <a:spAutoFit/>
-          </a:bodyPr>
-          <a:lstStyle/>
-          <a:p>
-            <a:pPr algn="l">
-              <a:lnSpc>
-                <a:spcPct val="100000"/>
-              </a:lnSpc>
-              <a:spcBef>
-                <a:spcPts val="0"/>
-              </a:spcBef>
-              <a:spcAft>
-                <a:spcPts val="0"/>
-              </a:spcAft>
-            </a:pPr>
-            <a:r>
-              <a:rPr sz="1700" b="0" lang="ja-JP">
-                <a:solidFill>
-                  <a:srgbClr val="303437"/>
-                </a:solidFill>
-                <a:latin typeface="Noto Sans"/>
-                <a:ea typeface="Noto Sans CJK JP"/>
-                <a:cs typeface="Noto Sans"/>
-              </a:rPr>
-              <a:t>COCOへ背景の画素注釈を加え、物体と背景を含む場面理解を扱う研究。</a:t>
-            </a:r>
-          </a:p>
-        </p:txBody>
-      </p:sp>
-      <p:sp>
-        <p:nvSpPr>
-          <p:cNvPr id="7" name="TextBox 6"/>
-          <p:cNvSpPr txBox="1"/>
-          <p:nvPr/>
-        </p:nvSpPr>
-        <p:spPr>
-          <a:xfrm>
-            <a:off x="548640" y="2083562"/>
-            <a:ext cx="8046720" cy="223877"/>
-          </a:xfrm>
-          <a:prstGeom prst="rect">
-            <a:avLst/>
-          </a:prstGeom>
-          <a:noFill/>
-        </p:spPr>
-        <p:txBody>
-          <a:bodyPr wrap="square" lIns="0" rIns="0" tIns="0" bIns="0">
-            <a:spAutoFit/>
-          </a:bodyPr>
-          <a:lstStyle/>
-          <a:p>
-            <a:pPr algn="l">
-              <a:lnSpc>
-                <a:spcPct val="100000"/>
-              </a:lnSpc>
-              <a:spcBef>
-                <a:spcPts val="0"/>
-              </a:spcBef>
-              <a:spcAft>
-                <a:spcPts val="0"/>
-              </a:spcAft>
-            </a:pPr>
-            <a:r>
-              <a:rPr sz="1000" b="0" lang="ja-JP">
-                <a:solidFill>
-                  <a:srgbClr val="626669"/>
-                </a:solidFill>
-                <a:latin typeface="Noto Sans"/>
-                <a:ea typeface="Noto Sans CJK JP"/>
-                <a:cs typeface="Noto Sans"/>
-                <a:hlinkClick r:id="rId3"/>
-              </a:rPr>
-              <a:t>https://arxiv.org/abs/1612.03716</a:t>
-            </a:r>
-          </a:p>
-        </p:txBody>
-      </p:sp>
-      <p:sp>
-        <p:nvSpPr>
-          <p:cNvPr id="8" name="TextBox 7"/>
-          <p:cNvSpPr txBox="1"/>
-          <p:nvPr/>
-        </p:nvSpPr>
-        <p:spPr>
-          <a:xfrm>
-            <a:off x="548640" y="3041374"/>
-            <a:ext cx="8046720" cy="414132"/>
-          </a:xfrm>
-          <a:prstGeom prst="rect">
-            <a:avLst/>
-          </a:prstGeom>
-          <a:noFill/>
-        </p:spPr>
-        <p:txBody>
-          <a:bodyPr wrap="square" lIns="0" rIns="0" tIns="0" bIns="0">
-            <a:spAutoFit/>
-          </a:bodyPr>
-          <a:lstStyle/>
-          <a:p>
-            <a:pPr algn="l">
-              <a:lnSpc>
-                <a:spcPct val="100000"/>
-              </a:lnSpc>
-              <a:spcBef>
-                <a:spcPts val="0"/>
-              </a:spcBef>
-              <a:spcAft>
-                <a:spcPts val="0"/>
-              </a:spcAft>
-            </a:pPr>
-            <a:r>
-              <a:rPr sz="2100" b="1" lang="ja-JP">
-                <a:solidFill>
-                  <a:srgbClr val="303437"/>
-                </a:solidFill>
-                <a:latin typeface="Noto Sans"/>
-                <a:ea typeface="Noto Sans CJK JP"/>
-                <a:cs typeface="Noto Sans"/>
-              </a:rPr>
-              <a:t>Panoptic Segmentation</a:t>
-            </a:r>
-          </a:p>
-        </p:txBody>
-      </p:sp>
-      <p:sp>
-        <p:nvSpPr>
-          <p:cNvPr id="9" name="TextBox 8"/>
-          <p:cNvSpPr txBox="1"/>
-          <p:nvPr/>
-        </p:nvSpPr>
-        <p:spPr>
-          <a:xfrm>
-            <a:off x="548640" y="3473580"/>
-            <a:ext cx="8046720" cy="457470"/>
-          </a:xfrm>
-          <a:prstGeom prst="rect">
-            <a:avLst/>
-          </a:prstGeom>
-          <a:noFill/>
-        </p:spPr>
-        <p:txBody>
-          <a:bodyPr wrap="square" lIns="0" rIns="0" tIns="0" bIns="0">
-            <a:spAutoFit/>
-          </a:bodyPr>
-          <a:lstStyle/>
-          <a:p>
-            <a:pPr algn="l">
-              <a:lnSpc>
-                <a:spcPct val="100000"/>
-              </a:lnSpc>
-              <a:spcBef>
-                <a:spcPts val="0"/>
-              </a:spcBef>
-              <a:spcAft>
-                <a:spcPts val="0"/>
-              </a:spcAft>
-            </a:pPr>
-            <a:r>
-              <a:rPr sz="1250" b="0" lang="ja-JP">
-                <a:solidFill>
-                  <a:srgbClr val="626669"/>
-                </a:solidFill>
-                <a:latin typeface="Noto Sans"/>
-                <a:ea typeface="Noto Sans CJK JP"/>
-                <a:cs typeface="Noto Sans"/>
-              </a:rPr>
-              <a:t>Alexander Kirillov, Kaiming He, Ross Girshick, Carsten Rother, Piotr Dollár (2019). IEEE/CVF Conference on Computer Vision and Pattern Recognition (CVPR), pp. 9404–9413.</a:t>
-            </a:r>
-          </a:p>
-        </p:txBody>
-      </p:sp>
-      <p:sp>
-        <p:nvSpPr>
-          <p:cNvPr id="10" name="TextBox 9"/>
-          <p:cNvSpPr txBox="1"/>
-          <p:nvPr/>
-        </p:nvSpPr>
-        <p:spPr>
-          <a:xfrm>
-            <a:off x="548640" y="3979765"/>
-            <a:ext cx="8046720" cy="364650"/>
-          </a:xfrm>
-          <a:prstGeom prst="rect">
-            <a:avLst/>
-          </a:prstGeom>
-          <a:noFill/>
-        </p:spPr>
-        <p:txBody>
-          <a:bodyPr wrap="square" lIns="0" rIns="0" tIns="0" bIns="0">
-            <a:spAutoFit/>
-          </a:bodyPr>
-          <a:lstStyle/>
-          <a:p>
-            <a:pPr algn="l">
-              <a:lnSpc>
-                <a:spcPct val="100000"/>
-              </a:lnSpc>
-              <a:spcBef>
-                <a:spcPts val="0"/>
-              </a:spcBef>
-              <a:spcAft>
-                <a:spcPts val="0"/>
-              </a:spcAft>
-            </a:pPr>
-            <a:r>
-              <a:rPr sz="1700" b="0" lang="ja-JP">
-                <a:solidFill>
-                  <a:srgbClr val="303437"/>
-                </a:solidFill>
-                <a:latin typeface="Noto Sans"/>
-                <a:ea typeface="Noto Sans CJK JP"/>
-                <a:cs typeface="Noto Sans"/>
-              </a:rPr>
-              <a:t>意味的領域分割と個体ごとの分割を統合し、共通指標PQを提案する。</a:t>
-            </a:r>
-          </a:p>
-        </p:txBody>
-      </p:sp>
-      <p:sp>
-        <p:nvSpPr>
-          <p:cNvPr id="11" name="TextBox 10"/>
-          <p:cNvSpPr txBox="1"/>
-          <p:nvPr/>
-        </p:nvSpPr>
-        <p:spPr>
-          <a:xfrm>
-            <a:off x="548640" y="4344163"/>
-            <a:ext cx="8046720" cy="223877"/>
-          </a:xfrm>
-          <a:prstGeom prst="rect">
-            <a:avLst/>
-          </a:prstGeom>
-          <a:noFill/>
-        </p:spPr>
-        <p:txBody>
-          <a:bodyPr wrap="square" lIns="0" rIns="0" tIns="0" bIns="0">
-            <a:spAutoFit/>
-          </a:bodyPr>
-          <a:lstStyle/>
-          <a:p>
-            <a:pPr algn="l">
-              <a:lnSpc>
-                <a:spcPct val="100000"/>
-              </a:lnSpc>
-              <a:spcBef>
-                <a:spcPts val="0"/>
-              </a:spcBef>
-              <a:spcAft>
-                <a:spcPts val="0"/>
-              </a:spcAft>
-            </a:pPr>
-            <a:r>
-              <a:rPr sz="1000" b="0" lang="ja-JP">
-                <a:solidFill>
-                  <a:srgbClr val="626669"/>
-                </a:solidFill>
-                <a:latin typeface="Noto Sans"/>
-                <a:ea typeface="Noto Sans CJK JP"/>
-                <a:cs typeface="Noto Sans"/>
-                <a:hlinkClick r:id="rId2"/>
-              </a:rPr>
-              <a:t>https://arxiv.org/abs/1801.00868</a:t>
-            </a:r>
-          </a:p>
-        </p:txBody>
-      </p:sp>
-      <p:sp>
-        <p:nvSpPr>
-          <p:cNvPr id="12" name="Rectangle 11"/>
-          <p:cNvSpPr/>
-          <p:nvPr/>
-        </p:nvSpPr>
-        <p:spPr>
-          <a:xfrm>
-            <a:off x="548640" y="2852928"/>
-            <a:ext cx="8046720" cy="7620"/>
-          </a:xfrm>
-          <a:prstGeom prst="rect">
-            <a:avLst/>
-          </a:prstGeom>
-          <a:solidFill>
-            <a:srgbClr val="C9CCCA"/>
-          </a:solidFill>
-          <a:ln>
-            <a:noFill/>
-          </a:ln>
-        </p:spPr>
-        <p:style>
-          <a:lnRef idx="1">
-            <a:schemeClr val="accent1"/>
-          </a:lnRef>
-          <a:fillRef idx="3">
-            <a:schemeClr val="accent1"/>
-          </a:fillRef>
-          <a:effectRef idx="2">
-            <a:schemeClr val="accent1"/>
-          </a:effectRef>
-          <a:fontRef idx="minor">
-            <a:schemeClr val="lt1"/>
-          </a:fontRef>
-        </p:style>
-        <p:txBody>
-          <a:bodyPr rtlCol="0" anchor="ctr"/>
-          <a:lstStyle/>
-          <a:p>
-            <a:pPr algn="ctr"/>
-          </a:p>
-        </p:txBody>
-      </p:sp>
-    </p:spTree>
-  </p:cSld>
-  <p:clrMapOvr>
-    <a:masterClrMapping/>
-  </p:clrMapOvr>
-</p:sld>
-</file>
-
-<file path=ppt/slides/slide83.xml><?xml version="1.0" encoding="utf-8"?>
 <p:sld xmlns:a="http://schemas.openxmlformats.org/drawingml/2006/main" xmlns:p="http://schemas.openxmlformats.org/presentationml/2006/main" xmlns:r="http://schemas.openxmlformats.org/officeDocument/2006/relationships">
   <p:cSld>
     <p:spTree>

--- a/slides/datasets-in-10-minutes-coco.pptx
+++ b/slides/datasets-in-10-minutes-coco.pptx
@@ -23541,7 +23541,7 @@
         <p:spPr>
           <a:xfrm>
             <a:off x="1005840" y="1371600"/>
-            <a:ext cx="1645920" cy="365760"/>
+            <a:ext cx="1645920" cy="434902"/>
           </a:xfrm>
           <a:prstGeom prst="rect">
             <a:avLst/>
@@ -23577,7 +23577,7 @@
             <a:r>
               <a:rPr lang="ja-JP" sz="2200" b="1">
                 <a:solidFill>
-                  <a:srgbClr val="2C9100"/>
+                  <a:schemeClr val="accent1"/>
                 </a:solidFill>
                 <a:latin typeface="Noto Sans"/>
                 <a:ea typeface="Noto Sans CJK JP"/>
